--- a/Icons_UI/bcpst.pptx
+++ b/Icons_UI/bcpst.pptx
@@ -837,6 +837,16 @@
 <file path=ppt/slides/slide1.xml><?xml version="1.0" encoding="utf-8"?>
 <p:sld xmlns:a="http://schemas.openxmlformats.org/drawingml/2006/main" xmlns:r="http://schemas.openxmlformats.org/officeDocument/2006/relationships" xmlns:p="http://schemas.openxmlformats.org/presentationml/2006/main">
   <p:cSld>
+    <p:bg>
+      <p:bgPr>
+        <a:solidFill>
+          <a:schemeClr val="bg1">
+            <a:lumMod val="75000"/>
+          </a:schemeClr>
+        </a:solidFill>
+        <a:effectLst/>
+      </p:bgPr>
+    </p:bg>
     <p:spTree>
       <p:nvGrpSpPr>
         <p:cNvPr id="1" name=""/>
@@ -853,10 +863,185 @@
       </p:grpSpPr>
       <p:sp>
         <p:nvSpPr>
-          <p:cNvPr id="2" name="Rectangle: Rounded Corners 1">
+          <p:cNvPr id="30" name="TextBox 29">
             <a:extLst>
               <a:ext uri="{FF2B5EF4-FFF2-40B4-BE49-F238E27FC236}">
-                <a16:creationId xmlns:a16="http://schemas.microsoft.com/office/drawing/2014/main" id="{12C13025-5D67-6C8B-54DE-83B2023BAE11}"/>
+                <a16:creationId xmlns:a16="http://schemas.microsoft.com/office/drawing/2014/main" id="{EB02AB71-560D-B89E-5DE4-34FAB3B4358B}"/>
+              </a:ext>
+            </a:extLst>
+          </p:cNvPr>
+          <p:cNvSpPr txBox="1"/>
+          <p:nvPr/>
+        </p:nvSpPr>
+        <p:spPr>
+          <a:xfrm>
+            <a:off x="5371621" y="165598"/>
+            <a:ext cx="306494" cy="369332"/>
+          </a:xfrm>
+          <a:prstGeom prst="rect">
+            <a:avLst/>
+          </a:prstGeom>
+          <a:noFill/>
+        </p:spPr>
+        <p:txBody>
+          <a:bodyPr wrap="none" rtlCol="0">
+            <a:spAutoFit/>
+          </a:bodyPr>
+          <a:lstStyle/>
+          <a:p>
+            <a:r>
+              <a:rPr lang="en-US" dirty="0"/>
+              <a:t>p</a:t>
+            </a:r>
+          </a:p>
+        </p:txBody>
+      </p:sp>
+      <p:sp>
+        <p:nvSpPr>
+          <p:cNvPr id="31" name="TextBox 30">
+            <a:extLst>
+              <a:ext uri="{FF2B5EF4-FFF2-40B4-BE49-F238E27FC236}">
+                <a16:creationId xmlns:a16="http://schemas.microsoft.com/office/drawing/2014/main" id="{197A0BF1-A07E-C291-06DB-390F9668E87D}"/>
+              </a:ext>
+            </a:extLst>
+          </p:cNvPr>
+          <p:cNvSpPr txBox="1"/>
+          <p:nvPr/>
+        </p:nvSpPr>
+        <p:spPr>
+          <a:xfrm>
+            <a:off x="2861712" y="165598"/>
+            <a:ext cx="306494" cy="369332"/>
+          </a:xfrm>
+          <a:prstGeom prst="rect">
+            <a:avLst/>
+          </a:prstGeom>
+          <a:noFill/>
+        </p:spPr>
+        <p:txBody>
+          <a:bodyPr wrap="none" rtlCol="0">
+            <a:spAutoFit/>
+          </a:bodyPr>
+          <a:lstStyle/>
+          <a:p>
+            <a:r>
+              <a:rPr lang="en-US" dirty="0"/>
+              <a:t>b</a:t>
+            </a:r>
+          </a:p>
+        </p:txBody>
+      </p:sp>
+      <p:sp>
+        <p:nvSpPr>
+          <p:cNvPr id="32" name="TextBox 31">
+            <a:extLst>
+              <a:ext uri="{FF2B5EF4-FFF2-40B4-BE49-F238E27FC236}">
+                <a16:creationId xmlns:a16="http://schemas.microsoft.com/office/drawing/2014/main" id="{93758F67-FC8D-E4E6-B3F8-C0E6FDBC9C48}"/>
+              </a:ext>
+            </a:extLst>
+          </p:cNvPr>
+          <p:cNvSpPr txBox="1"/>
+          <p:nvPr/>
+        </p:nvSpPr>
+        <p:spPr>
+          <a:xfrm>
+            <a:off x="6567085" y="165598"/>
+            <a:ext cx="274434" cy="369332"/>
+          </a:xfrm>
+          <a:prstGeom prst="rect">
+            <a:avLst/>
+          </a:prstGeom>
+          <a:noFill/>
+        </p:spPr>
+        <p:txBody>
+          <a:bodyPr wrap="none" rtlCol="0">
+            <a:spAutoFit/>
+          </a:bodyPr>
+          <a:lstStyle/>
+          <a:p>
+            <a:r>
+              <a:rPr lang="en-US" dirty="0"/>
+              <a:t>s</a:t>
+            </a:r>
+          </a:p>
+        </p:txBody>
+      </p:sp>
+      <p:sp>
+        <p:nvSpPr>
+          <p:cNvPr id="33" name="TextBox 32">
+            <a:extLst>
+              <a:ext uri="{FF2B5EF4-FFF2-40B4-BE49-F238E27FC236}">
+                <a16:creationId xmlns:a16="http://schemas.microsoft.com/office/drawing/2014/main" id="{44D6A337-A633-B877-B90D-71E3502CAC70}"/>
+              </a:ext>
+            </a:extLst>
+          </p:cNvPr>
+          <p:cNvSpPr txBox="1"/>
+          <p:nvPr/>
+        </p:nvSpPr>
+        <p:spPr>
+          <a:xfrm>
+            <a:off x="4207325" y="165598"/>
+            <a:ext cx="282450" cy="369332"/>
+          </a:xfrm>
+          <a:prstGeom prst="rect">
+            <a:avLst/>
+          </a:prstGeom>
+          <a:noFill/>
+        </p:spPr>
+        <p:txBody>
+          <a:bodyPr wrap="none" rtlCol="0">
+            <a:spAutoFit/>
+          </a:bodyPr>
+          <a:lstStyle/>
+          <a:p>
+            <a:r>
+              <a:rPr lang="en-US" dirty="0"/>
+              <a:t>c</a:t>
+            </a:r>
+          </a:p>
+        </p:txBody>
+      </p:sp>
+      <p:sp>
+        <p:nvSpPr>
+          <p:cNvPr id="34" name="TextBox 33">
+            <a:extLst>
+              <a:ext uri="{FF2B5EF4-FFF2-40B4-BE49-F238E27FC236}">
+                <a16:creationId xmlns:a16="http://schemas.microsoft.com/office/drawing/2014/main" id="{96FE4204-BEDE-AB1A-FDC6-CE2BC2D0C466}"/>
+              </a:ext>
+            </a:extLst>
+          </p:cNvPr>
+          <p:cNvSpPr txBox="1"/>
+          <p:nvPr/>
+        </p:nvSpPr>
+        <p:spPr>
+          <a:xfrm>
+            <a:off x="8033885" y="165598"/>
+            <a:ext cx="261610" cy="369332"/>
+          </a:xfrm>
+          <a:prstGeom prst="rect">
+            <a:avLst/>
+          </a:prstGeom>
+          <a:noFill/>
+        </p:spPr>
+        <p:txBody>
+          <a:bodyPr wrap="none" rtlCol="0">
+            <a:spAutoFit/>
+          </a:bodyPr>
+          <a:lstStyle/>
+          <a:p>
+            <a:r>
+              <a:rPr lang="en-US" dirty="0"/>
+              <a:t>t</a:t>
+            </a:r>
+          </a:p>
+        </p:txBody>
+      </p:sp>
+      <p:sp>
+        <p:nvSpPr>
+          <p:cNvPr id="35" name="Rectangle: Rounded Corners 34">
+            <a:extLst>
+              <a:ext uri="{FF2B5EF4-FFF2-40B4-BE49-F238E27FC236}">
+                <a16:creationId xmlns:a16="http://schemas.microsoft.com/office/drawing/2014/main" id="{4FBA92A9-9010-7BFC-681C-4B863379BF47}"/>
               </a:ext>
             </a:extLst>
           </p:cNvPr>
@@ -865,14 +1050,14 @@
         </p:nvSpPr>
         <p:spPr>
           <a:xfrm>
-            <a:off x="1528959" y="1721071"/>
+            <a:off x="2546329" y="812168"/>
             <a:ext cx="937260" cy="652166"/>
           </a:xfrm>
           <a:prstGeom prst="roundRect">
             <a:avLst/>
           </a:prstGeom>
           <a:solidFill>
-            <a:srgbClr val="C775E7"/>
+            <a:schemeClr val="bg1"/>
           </a:solidFill>
           <a:ln>
             <a:noFill/>
@@ -905,10 +1090,10 @@
       </p:sp>
       <p:sp>
         <p:nvSpPr>
-          <p:cNvPr id="9" name="Freeform: Shape 8">
+          <p:cNvPr id="36" name="Freeform: Shape 35">
             <a:extLst>
               <a:ext uri="{FF2B5EF4-FFF2-40B4-BE49-F238E27FC236}">
-                <a16:creationId xmlns:a16="http://schemas.microsoft.com/office/drawing/2014/main" id="{752EF61E-B836-2759-45C5-72267A0CF283}"/>
+                <a16:creationId xmlns:a16="http://schemas.microsoft.com/office/drawing/2014/main" id="{AE0A9775-16AC-CC28-A936-FF5C937D2C3D}"/>
               </a:ext>
             </a:extLst>
           </p:cNvPr>
@@ -917,7 +1102,7 @@
         </p:nvSpPr>
         <p:spPr>
           <a:xfrm>
-            <a:off x="7421444" y="1721072"/>
+            <a:off x="7698281" y="812169"/>
             <a:ext cx="932818" cy="652165"/>
           </a:xfrm>
           <a:custGeom>
@@ -1063,7 +1248,7 @@
             </a:pathLst>
           </a:custGeom>
           <a:solidFill>
-            <a:srgbClr val="ECC31D"/>
+            <a:schemeClr val="bg1"/>
           </a:solidFill>
           <a:ln>
             <a:noFill/>
@@ -1098,64 +1283,10 @@
       </p:sp>
       <p:sp>
         <p:nvSpPr>
-          <p:cNvPr id="20" name="Rectangle 19">
+          <p:cNvPr id="38" name="Freeform: Shape 37">
             <a:extLst>
               <a:ext uri="{FF2B5EF4-FFF2-40B4-BE49-F238E27FC236}">
-                <a16:creationId xmlns:a16="http://schemas.microsoft.com/office/drawing/2014/main" id="{F5BB5A4F-F999-516C-69E5-2D27239483B8}"/>
-              </a:ext>
-            </a:extLst>
-          </p:cNvPr>
-          <p:cNvSpPr/>
-          <p:nvPr/>
-        </p:nvSpPr>
-        <p:spPr>
-          <a:xfrm>
-            <a:off x="5958835" y="1721072"/>
-            <a:ext cx="937260" cy="652165"/>
-          </a:xfrm>
-          <a:prstGeom prst="rect">
-            <a:avLst/>
-          </a:prstGeom>
-          <a:solidFill>
-            <a:srgbClr val="36E67F"/>
-          </a:solidFill>
-          <a:ln>
-            <a:noFill/>
-          </a:ln>
-        </p:spPr>
-        <p:style>
-          <a:lnRef idx="2">
-            <a:schemeClr val="accent1">
-              <a:shade val="15000"/>
-            </a:schemeClr>
-          </a:lnRef>
-          <a:fillRef idx="1">
-            <a:schemeClr val="accent1"/>
-          </a:fillRef>
-          <a:effectRef idx="0">
-            <a:schemeClr val="accent1"/>
-          </a:effectRef>
-          <a:fontRef idx="minor">
-            <a:schemeClr val="lt1"/>
-          </a:fontRef>
-        </p:style>
-        <p:txBody>
-          <a:bodyPr wrap="square" rtlCol="0" anchor="ctr">
-            <a:noAutofit/>
-          </a:bodyPr>
-          <a:lstStyle/>
-          <a:p>
-            <a:pPr algn="ctr"/>
-            <a:endParaRPr lang="en-US"/>
-          </a:p>
-        </p:txBody>
-      </p:sp>
-      <p:sp>
-        <p:nvSpPr>
-          <p:cNvPr id="25" name="Freeform: Shape 24">
-            <a:extLst>
-              <a:ext uri="{FF2B5EF4-FFF2-40B4-BE49-F238E27FC236}">
-                <a16:creationId xmlns:a16="http://schemas.microsoft.com/office/drawing/2014/main" id="{2E213A89-99A8-A872-0282-9D1A8FF97292}"/>
+                <a16:creationId xmlns:a16="http://schemas.microsoft.com/office/drawing/2014/main" id="{F763365D-02FA-E1A3-5EDF-709DE02770B6}"/>
               </a:ext>
             </a:extLst>
           </p:cNvPr>
@@ -1164,7 +1295,7 @@
         </p:nvSpPr>
         <p:spPr>
           <a:xfrm rot="16200000" flipH="1">
-            <a:off x="4921949" y="1578525"/>
+            <a:off x="5198786" y="669621"/>
             <a:ext cx="652164" cy="937260"/>
           </a:xfrm>
           <a:custGeom>
@@ -1518,7 +1649,7 @@
             </a:pathLst>
           </a:custGeom>
           <a:solidFill>
-            <a:srgbClr val="E94B3A"/>
+            <a:schemeClr val="bg1"/>
           </a:solidFill>
           <a:ln>
             <a:noFill/>
@@ -1553,10 +1684,10 @@
       </p:sp>
       <p:sp>
         <p:nvSpPr>
-          <p:cNvPr id="29" name="Freeform: Shape 28">
+          <p:cNvPr id="39" name="Freeform: Shape 38">
             <a:extLst>
               <a:ext uri="{FF2B5EF4-FFF2-40B4-BE49-F238E27FC236}">
-                <a16:creationId xmlns:a16="http://schemas.microsoft.com/office/drawing/2014/main" id="{76B87F79-2AD4-F7CE-83A6-69F0513E9B18}"/>
+                <a16:creationId xmlns:a16="http://schemas.microsoft.com/office/drawing/2014/main" id="{E4031813-5928-9A4C-032E-FF7B84B47C4B}"/>
               </a:ext>
             </a:extLst>
           </p:cNvPr>
@@ -1565,7 +1696,7 @@
         </p:nvSpPr>
         <p:spPr>
           <a:xfrm>
-            <a:off x="3603083" y="1721072"/>
+            <a:off x="3879920" y="812169"/>
             <a:ext cx="937260" cy="652164"/>
           </a:xfrm>
           <a:custGeom>
@@ -1735,7 +1866,7 @@
             </a:pathLst>
           </a:custGeom>
           <a:solidFill>
-            <a:srgbClr val="3BA8F0"/>
+            <a:schemeClr val="bg1"/>
           </a:solidFill>
           <a:ln>
             <a:noFill/>
@@ -1768,187 +1899,3381 @@
           </a:p>
         </p:txBody>
       </p:sp>
-      <p:sp>
-        <p:nvSpPr>
-          <p:cNvPr id="30" name="TextBox 29">
+      <p:grpSp>
+        <p:nvGrpSpPr>
+          <p:cNvPr id="16" name="Group 15">
             <a:extLst>
               <a:ext uri="{FF2B5EF4-FFF2-40B4-BE49-F238E27FC236}">
-                <a16:creationId xmlns:a16="http://schemas.microsoft.com/office/drawing/2014/main" id="{EB02AB71-560D-B89E-5DE4-34FAB3B4358B}"/>
+                <a16:creationId xmlns:a16="http://schemas.microsoft.com/office/drawing/2014/main" id="{23697E2C-6CBC-C4BD-5CC2-BD8D6C58D47C}"/>
               </a:ext>
             </a:extLst>
           </p:cNvPr>
-          <p:cNvSpPr txBox="1"/>
+          <p:cNvGrpSpPr/>
           <p:nvPr/>
-        </p:nvSpPr>
-        <p:spPr>
+        </p:nvGrpSpPr>
+        <p:grpSpPr>
           <a:xfrm>
-            <a:off x="5094784" y="2648739"/>
-            <a:ext cx="306494" cy="369332"/>
+            <a:off x="2546329" y="1558946"/>
+            <a:ext cx="6084770" cy="652166"/>
+            <a:chOff x="2546329" y="2239749"/>
+            <a:chExt cx="6084770" cy="652166"/>
           </a:xfrm>
-          <a:prstGeom prst="rect">
-            <a:avLst/>
-          </a:prstGeom>
-          <a:noFill/>
-        </p:spPr>
-        <p:txBody>
-          <a:bodyPr wrap="none" rtlCol="0">
-            <a:spAutoFit/>
-          </a:bodyPr>
-          <a:lstStyle/>
-          <a:p>
-            <a:r>
-              <a:rPr lang="en-US" dirty="0"/>
-              <a:t>p</a:t>
-            </a:r>
-          </a:p>
-        </p:txBody>
-      </p:sp>
-      <p:sp>
-        <p:nvSpPr>
-          <p:cNvPr id="31" name="TextBox 30">
+        </p:grpSpPr>
+        <p:sp>
+          <p:nvSpPr>
+            <p:cNvPr id="2" name="Rectangle: Rounded Corners 1">
+              <a:extLst>
+                <a:ext uri="{FF2B5EF4-FFF2-40B4-BE49-F238E27FC236}">
+                  <a16:creationId xmlns:a16="http://schemas.microsoft.com/office/drawing/2014/main" id="{12C13025-5D67-6C8B-54DE-83B2023BAE11}"/>
+                </a:ext>
+              </a:extLst>
+            </p:cNvPr>
+            <p:cNvSpPr/>
+            <p:nvPr/>
+          </p:nvSpPr>
+          <p:spPr>
+            <a:xfrm>
+              <a:off x="2546329" y="2239749"/>
+              <a:ext cx="937260" cy="652166"/>
+            </a:xfrm>
+            <a:prstGeom prst="roundRect">
+              <a:avLst/>
+            </a:prstGeom>
+            <a:solidFill>
+              <a:srgbClr val="C775E7"/>
+            </a:solidFill>
+            <a:ln w="3175">
+              <a:solidFill>
+                <a:srgbClr val="7030A0"/>
+              </a:solidFill>
+            </a:ln>
+          </p:spPr>
+          <p:style>
+            <a:lnRef idx="2">
+              <a:schemeClr val="accent1">
+                <a:shade val="15000"/>
+              </a:schemeClr>
+            </a:lnRef>
+            <a:fillRef idx="1">
+              <a:schemeClr val="accent1"/>
+            </a:fillRef>
+            <a:effectRef idx="0">
+              <a:schemeClr val="accent1"/>
+            </a:effectRef>
+            <a:fontRef idx="minor">
+              <a:schemeClr val="lt1"/>
+            </a:fontRef>
+          </p:style>
+          <p:txBody>
+            <a:bodyPr rtlCol="0" anchor="ctr"/>
+            <a:lstStyle/>
+            <a:p>
+              <a:pPr algn="ctr"/>
+              <a:endParaRPr lang="en-US"/>
+            </a:p>
+          </p:txBody>
+        </p:sp>
+        <p:sp>
+          <p:nvSpPr>
+            <p:cNvPr id="9" name="Freeform: Shape 8">
+              <a:extLst>
+                <a:ext uri="{FF2B5EF4-FFF2-40B4-BE49-F238E27FC236}">
+                  <a16:creationId xmlns:a16="http://schemas.microsoft.com/office/drawing/2014/main" id="{752EF61E-B836-2759-45C5-72267A0CF283}"/>
+                </a:ext>
+              </a:extLst>
+            </p:cNvPr>
+            <p:cNvSpPr/>
+            <p:nvPr/>
+          </p:nvSpPr>
+          <p:spPr>
+            <a:xfrm>
+              <a:off x="7698281" y="2239750"/>
+              <a:ext cx="932818" cy="652165"/>
+            </a:xfrm>
+            <a:custGeom>
+              <a:avLst/>
+              <a:gdLst>
+                <a:gd name="csX0" fmla="*/ 0 w 1761688"/>
+                <a:gd name="csY0" fmla="*/ 0 h 1291904"/>
+                <a:gd name="csX1" fmla="*/ 75501 w 1761688"/>
+                <a:gd name="csY1" fmla="*/ 0 h 1291904"/>
+                <a:gd name="csX2" fmla="*/ 1686187 w 1761688"/>
+                <a:gd name="csY2" fmla="*/ 0 h 1291904"/>
+                <a:gd name="csX3" fmla="*/ 1761688 w 1761688"/>
+                <a:gd name="csY3" fmla="*/ 0 h 1291904"/>
+                <a:gd name="csX4" fmla="*/ 1761688 w 1761688"/>
+                <a:gd name="csY4" fmla="*/ 102765 h 1291904"/>
+                <a:gd name="csX5" fmla="*/ 1686187 w 1761688"/>
+                <a:gd name="csY5" fmla="*/ 102765 h 1291904"/>
+                <a:gd name="csX6" fmla="*/ 1686187 w 1761688"/>
+                <a:gd name="csY6" fmla="*/ 1189139 h 1291904"/>
+                <a:gd name="csX7" fmla="*/ 1761688 w 1761688"/>
+                <a:gd name="csY7" fmla="*/ 1189139 h 1291904"/>
+                <a:gd name="csX8" fmla="*/ 1761688 w 1761688"/>
+                <a:gd name="csY8" fmla="*/ 1291904 h 1291904"/>
+                <a:gd name="csX9" fmla="*/ 1686187 w 1761688"/>
+                <a:gd name="csY9" fmla="*/ 1291904 h 1291904"/>
+                <a:gd name="csX10" fmla="*/ 75501 w 1761688"/>
+                <a:gd name="csY10" fmla="*/ 1291904 h 1291904"/>
+                <a:gd name="csX11" fmla="*/ 0 w 1761688"/>
+                <a:gd name="csY11" fmla="*/ 1291904 h 1291904"/>
+                <a:gd name="csX12" fmla="*/ 0 w 1761688"/>
+                <a:gd name="csY12" fmla="*/ 1189139 h 1291904"/>
+                <a:gd name="csX13" fmla="*/ 75501 w 1761688"/>
+                <a:gd name="csY13" fmla="*/ 1189139 h 1291904"/>
+                <a:gd name="csX14" fmla="*/ 75501 w 1761688"/>
+                <a:gd name="csY14" fmla="*/ 102765 h 1291904"/>
+                <a:gd name="csX15" fmla="*/ 0 w 1761688"/>
+                <a:gd name="csY15" fmla="*/ 102765 h 1291904"/>
+              </a:gdLst>
+              <a:ahLst/>
+              <a:cxnLst>
+                <a:cxn ang="0">
+                  <a:pos x="csX0" y="csY0"/>
+                </a:cxn>
+                <a:cxn ang="0">
+                  <a:pos x="csX1" y="csY1"/>
+                </a:cxn>
+                <a:cxn ang="0">
+                  <a:pos x="csX2" y="csY2"/>
+                </a:cxn>
+                <a:cxn ang="0">
+                  <a:pos x="csX3" y="csY3"/>
+                </a:cxn>
+                <a:cxn ang="0">
+                  <a:pos x="csX4" y="csY4"/>
+                </a:cxn>
+                <a:cxn ang="0">
+                  <a:pos x="csX5" y="csY5"/>
+                </a:cxn>
+                <a:cxn ang="0">
+                  <a:pos x="csX6" y="csY6"/>
+                </a:cxn>
+                <a:cxn ang="0">
+                  <a:pos x="csX7" y="csY7"/>
+                </a:cxn>
+                <a:cxn ang="0">
+                  <a:pos x="csX8" y="csY8"/>
+                </a:cxn>
+                <a:cxn ang="0">
+                  <a:pos x="csX9" y="csY9"/>
+                </a:cxn>
+                <a:cxn ang="0">
+                  <a:pos x="csX10" y="csY10"/>
+                </a:cxn>
+                <a:cxn ang="0">
+                  <a:pos x="csX11" y="csY11"/>
+                </a:cxn>
+                <a:cxn ang="0">
+                  <a:pos x="csX12" y="csY12"/>
+                </a:cxn>
+                <a:cxn ang="0">
+                  <a:pos x="csX13" y="csY13"/>
+                </a:cxn>
+                <a:cxn ang="0">
+                  <a:pos x="csX14" y="csY14"/>
+                </a:cxn>
+                <a:cxn ang="0">
+                  <a:pos x="csX15" y="csY15"/>
+                </a:cxn>
+              </a:cxnLst>
+              <a:rect l="l" t="t" r="r" b="b"/>
+              <a:pathLst>
+                <a:path w="1761688" h="1291904">
+                  <a:moveTo>
+                    <a:pt x="0" y="0"/>
+                  </a:moveTo>
+                  <a:lnTo>
+                    <a:pt x="75501" y="0"/>
+                  </a:lnTo>
+                  <a:lnTo>
+                    <a:pt x="1686187" y="0"/>
+                  </a:lnTo>
+                  <a:lnTo>
+                    <a:pt x="1761688" y="0"/>
+                  </a:lnTo>
+                  <a:lnTo>
+                    <a:pt x="1761688" y="102765"/>
+                  </a:lnTo>
+                  <a:lnTo>
+                    <a:pt x="1686187" y="102765"/>
+                  </a:lnTo>
+                  <a:lnTo>
+                    <a:pt x="1686187" y="1189139"/>
+                  </a:lnTo>
+                  <a:lnTo>
+                    <a:pt x="1761688" y="1189139"/>
+                  </a:lnTo>
+                  <a:lnTo>
+                    <a:pt x="1761688" y="1291904"/>
+                  </a:lnTo>
+                  <a:lnTo>
+                    <a:pt x="1686187" y="1291904"/>
+                  </a:lnTo>
+                  <a:lnTo>
+                    <a:pt x="75501" y="1291904"/>
+                  </a:lnTo>
+                  <a:lnTo>
+                    <a:pt x="0" y="1291904"/>
+                  </a:lnTo>
+                  <a:lnTo>
+                    <a:pt x="0" y="1189139"/>
+                  </a:lnTo>
+                  <a:lnTo>
+                    <a:pt x="75501" y="1189139"/>
+                  </a:lnTo>
+                  <a:lnTo>
+                    <a:pt x="75501" y="102765"/>
+                  </a:lnTo>
+                  <a:lnTo>
+                    <a:pt x="0" y="102765"/>
+                  </a:lnTo>
+                  <a:close/>
+                </a:path>
+              </a:pathLst>
+            </a:custGeom>
+            <a:solidFill>
+              <a:srgbClr val="ECC31D"/>
+            </a:solidFill>
+            <a:ln w="3175">
+              <a:solidFill>
+                <a:schemeClr val="accent4">
+                  <a:lumMod val="75000"/>
+                </a:schemeClr>
+              </a:solidFill>
+            </a:ln>
+          </p:spPr>
+          <p:style>
+            <a:lnRef idx="2">
+              <a:schemeClr val="accent1">
+                <a:shade val="15000"/>
+              </a:schemeClr>
+            </a:lnRef>
+            <a:fillRef idx="1">
+              <a:schemeClr val="accent1"/>
+            </a:fillRef>
+            <a:effectRef idx="0">
+              <a:schemeClr val="accent1"/>
+            </a:effectRef>
+            <a:fontRef idx="minor">
+              <a:schemeClr val="lt1"/>
+            </a:fontRef>
+          </p:style>
+          <p:txBody>
+            <a:bodyPr wrap="square" rtlCol="0" anchor="ctr">
+              <a:noAutofit/>
+            </a:bodyPr>
+            <a:lstStyle/>
+            <a:p>
+              <a:pPr algn="ctr"/>
+              <a:endParaRPr lang="en-US"/>
+            </a:p>
+          </p:txBody>
+        </p:sp>
+        <p:sp>
+          <p:nvSpPr>
+            <p:cNvPr id="25" name="Freeform: Shape 24">
+              <a:extLst>
+                <a:ext uri="{FF2B5EF4-FFF2-40B4-BE49-F238E27FC236}">
+                  <a16:creationId xmlns:a16="http://schemas.microsoft.com/office/drawing/2014/main" id="{2E213A89-99A8-A872-0282-9D1A8FF97292}"/>
+                </a:ext>
+              </a:extLst>
+            </p:cNvPr>
+            <p:cNvSpPr/>
+            <p:nvPr/>
+          </p:nvSpPr>
+          <p:spPr>
+            <a:xfrm rot="16200000" flipH="1">
+              <a:off x="5198786" y="2097202"/>
+              <a:ext cx="652164" cy="937260"/>
+            </a:xfrm>
+            <a:custGeom>
+              <a:avLst/>
+              <a:gdLst>
+                <a:gd name="csX0" fmla="*/ 0 w 1291905"/>
+                <a:gd name="csY0" fmla="*/ 0 h 1770078"/>
+                <a:gd name="csX1" fmla="*/ 0 w 1291905"/>
+                <a:gd name="csY1" fmla="*/ 478173 h 1770078"/>
+                <a:gd name="csX2" fmla="*/ 0 w 1291905"/>
+                <a:gd name="csY2" fmla="*/ 1291905 h 1770078"/>
+                <a:gd name="csX3" fmla="*/ 0 w 1291905"/>
+                <a:gd name="csY3" fmla="*/ 1770078 h 1770078"/>
+                <a:gd name="csX4" fmla="*/ 6123 w 1291905"/>
+                <a:gd name="csY4" fmla="*/ 1770078 h 1770078"/>
+                <a:gd name="csX5" fmla="*/ 109381 w 1291905"/>
+                <a:gd name="csY5" fmla="*/ 1658008 h 1770078"/>
+                <a:gd name="csX6" fmla="*/ 212639 w 1291905"/>
+                <a:gd name="csY6" fmla="*/ 1770078 h 1770078"/>
+                <a:gd name="csX7" fmla="*/ 221976 w 1291905"/>
+                <a:gd name="csY7" fmla="*/ 1770078 h 1770078"/>
+                <a:gd name="csX8" fmla="*/ 325234 w 1291905"/>
+                <a:gd name="csY8" fmla="*/ 1658008 h 1770078"/>
+                <a:gd name="csX9" fmla="*/ 428492 w 1291905"/>
+                <a:gd name="csY9" fmla="*/ 1770078 h 1770078"/>
+                <a:gd name="csX10" fmla="*/ 437829 w 1291905"/>
+                <a:gd name="csY10" fmla="*/ 1770078 h 1770078"/>
+                <a:gd name="csX11" fmla="*/ 541087 w 1291905"/>
+                <a:gd name="csY11" fmla="*/ 1658008 h 1770078"/>
+                <a:gd name="csX12" fmla="*/ 644346 w 1291905"/>
+                <a:gd name="csY12" fmla="*/ 1770078 h 1770078"/>
+                <a:gd name="csX13" fmla="*/ 653683 w 1291905"/>
+                <a:gd name="csY13" fmla="*/ 1770078 h 1770078"/>
+                <a:gd name="csX14" fmla="*/ 756941 w 1291905"/>
+                <a:gd name="csY14" fmla="*/ 1658008 h 1770078"/>
+                <a:gd name="csX15" fmla="*/ 860199 w 1291905"/>
+                <a:gd name="csY15" fmla="*/ 1770078 h 1770078"/>
+                <a:gd name="csX16" fmla="*/ 869536 w 1291905"/>
+                <a:gd name="csY16" fmla="*/ 1770078 h 1770078"/>
+                <a:gd name="csX17" fmla="*/ 972794 w 1291905"/>
+                <a:gd name="csY17" fmla="*/ 1658008 h 1770078"/>
+                <a:gd name="csX18" fmla="*/ 1076052 w 1291905"/>
+                <a:gd name="csY18" fmla="*/ 1770078 h 1770078"/>
+                <a:gd name="csX19" fmla="*/ 1085389 w 1291905"/>
+                <a:gd name="csY19" fmla="*/ 1770078 h 1770078"/>
+                <a:gd name="csX20" fmla="*/ 1188647 w 1291905"/>
+                <a:gd name="csY20" fmla="*/ 1658008 h 1770078"/>
+                <a:gd name="csX21" fmla="*/ 1291905 w 1291905"/>
+                <a:gd name="csY21" fmla="*/ 1770078 h 1770078"/>
+                <a:gd name="csX22" fmla="*/ 1291905 w 1291905"/>
+                <a:gd name="csY22" fmla="*/ 1291905 h 1770078"/>
+                <a:gd name="csX23" fmla="*/ 1291905 w 1291905"/>
+                <a:gd name="csY23" fmla="*/ 478173 h 1770078"/>
+                <a:gd name="csX24" fmla="*/ 1291905 w 1291905"/>
+                <a:gd name="csY24" fmla="*/ 0 h 1770078"/>
+                <a:gd name="csX25" fmla="*/ 1188647 w 1291905"/>
+                <a:gd name="csY25" fmla="*/ 112070 h 1770078"/>
+                <a:gd name="csX26" fmla="*/ 1085389 w 1291905"/>
+                <a:gd name="csY26" fmla="*/ 0 h 1770078"/>
+                <a:gd name="csX27" fmla="*/ 1076052 w 1291905"/>
+                <a:gd name="csY27" fmla="*/ 0 h 1770078"/>
+                <a:gd name="csX28" fmla="*/ 972794 w 1291905"/>
+                <a:gd name="csY28" fmla="*/ 112070 h 1770078"/>
+                <a:gd name="csX29" fmla="*/ 869536 w 1291905"/>
+                <a:gd name="csY29" fmla="*/ 0 h 1770078"/>
+                <a:gd name="csX30" fmla="*/ 860199 w 1291905"/>
+                <a:gd name="csY30" fmla="*/ 0 h 1770078"/>
+                <a:gd name="csX31" fmla="*/ 756941 w 1291905"/>
+                <a:gd name="csY31" fmla="*/ 112070 h 1770078"/>
+                <a:gd name="csX32" fmla="*/ 653683 w 1291905"/>
+                <a:gd name="csY32" fmla="*/ 0 h 1770078"/>
+                <a:gd name="csX33" fmla="*/ 644346 w 1291905"/>
+                <a:gd name="csY33" fmla="*/ 0 h 1770078"/>
+                <a:gd name="csX34" fmla="*/ 541087 w 1291905"/>
+                <a:gd name="csY34" fmla="*/ 112070 h 1770078"/>
+                <a:gd name="csX35" fmla="*/ 437829 w 1291905"/>
+                <a:gd name="csY35" fmla="*/ 0 h 1770078"/>
+                <a:gd name="csX36" fmla="*/ 428492 w 1291905"/>
+                <a:gd name="csY36" fmla="*/ 0 h 1770078"/>
+                <a:gd name="csX37" fmla="*/ 325234 w 1291905"/>
+                <a:gd name="csY37" fmla="*/ 112070 h 1770078"/>
+                <a:gd name="csX38" fmla="*/ 221976 w 1291905"/>
+                <a:gd name="csY38" fmla="*/ 0 h 1770078"/>
+                <a:gd name="csX39" fmla="*/ 212639 w 1291905"/>
+                <a:gd name="csY39" fmla="*/ 0 h 1770078"/>
+                <a:gd name="csX40" fmla="*/ 109381 w 1291905"/>
+                <a:gd name="csY40" fmla="*/ 112070 h 1770078"/>
+                <a:gd name="csX41" fmla="*/ 6123 w 1291905"/>
+                <a:gd name="csY41" fmla="*/ 0 h 1770078"/>
+              </a:gdLst>
+              <a:ahLst/>
+              <a:cxnLst>
+                <a:cxn ang="0">
+                  <a:pos x="csX0" y="csY0"/>
+                </a:cxn>
+                <a:cxn ang="0">
+                  <a:pos x="csX1" y="csY1"/>
+                </a:cxn>
+                <a:cxn ang="0">
+                  <a:pos x="csX2" y="csY2"/>
+                </a:cxn>
+                <a:cxn ang="0">
+                  <a:pos x="csX3" y="csY3"/>
+                </a:cxn>
+                <a:cxn ang="0">
+                  <a:pos x="csX4" y="csY4"/>
+                </a:cxn>
+                <a:cxn ang="0">
+                  <a:pos x="csX5" y="csY5"/>
+                </a:cxn>
+                <a:cxn ang="0">
+                  <a:pos x="csX6" y="csY6"/>
+                </a:cxn>
+                <a:cxn ang="0">
+                  <a:pos x="csX7" y="csY7"/>
+                </a:cxn>
+                <a:cxn ang="0">
+                  <a:pos x="csX8" y="csY8"/>
+                </a:cxn>
+                <a:cxn ang="0">
+                  <a:pos x="csX9" y="csY9"/>
+                </a:cxn>
+                <a:cxn ang="0">
+                  <a:pos x="csX10" y="csY10"/>
+                </a:cxn>
+                <a:cxn ang="0">
+                  <a:pos x="csX11" y="csY11"/>
+                </a:cxn>
+                <a:cxn ang="0">
+                  <a:pos x="csX12" y="csY12"/>
+                </a:cxn>
+                <a:cxn ang="0">
+                  <a:pos x="csX13" y="csY13"/>
+                </a:cxn>
+                <a:cxn ang="0">
+                  <a:pos x="csX14" y="csY14"/>
+                </a:cxn>
+                <a:cxn ang="0">
+                  <a:pos x="csX15" y="csY15"/>
+                </a:cxn>
+                <a:cxn ang="0">
+                  <a:pos x="csX16" y="csY16"/>
+                </a:cxn>
+                <a:cxn ang="0">
+                  <a:pos x="csX17" y="csY17"/>
+                </a:cxn>
+                <a:cxn ang="0">
+                  <a:pos x="csX18" y="csY18"/>
+                </a:cxn>
+                <a:cxn ang="0">
+                  <a:pos x="csX19" y="csY19"/>
+                </a:cxn>
+                <a:cxn ang="0">
+                  <a:pos x="csX20" y="csY20"/>
+                </a:cxn>
+                <a:cxn ang="0">
+                  <a:pos x="csX21" y="csY21"/>
+                </a:cxn>
+                <a:cxn ang="0">
+                  <a:pos x="csX22" y="csY22"/>
+                </a:cxn>
+                <a:cxn ang="0">
+                  <a:pos x="csX23" y="csY23"/>
+                </a:cxn>
+                <a:cxn ang="0">
+                  <a:pos x="csX24" y="csY24"/>
+                </a:cxn>
+                <a:cxn ang="0">
+                  <a:pos x="csX25" y="csY25"/>
+                </a:cxn>
+                <a:cxn ang="0">
+                  <a:pos x="csX26" y="csY26"/>
+                </a:cxn>
+                <a:cxn ang="0">
+                  <a:pos x="csX27" y="csY27"/>
+                </a:cxn>
+                <a:cxn ang="0">
+                  <a:pos x="csX28" y="csY28"/>
+                </a:cxn>
+                <a:cxn ang="0">
+                  <a:pos x="csX29" y="csY29"/>
+                </a:cxn>
+                <a:cxn ang="0">
+                  <a:pos x="csX30" y="csY30"/>
+                </a:cxn>
+                <a:cxn ang="0">
+                  <a:pos x="csX31" y="csY31"/>
+                </a:cxn>
+                <a:cxn ang="0">
+                  <a:pos x="csX32" y="csY32"/>
+                </a:cxn>
+                <a:cxn ang="0">
+                  <a:pos x="csX33" y="csY33"/>
+                </a:cxn>
+                <a:cxn ang="0">
+                  <a:pos x="csX34" y="csY34"/>
+                </a:cxn>
+                <a:cxn ang="0">
+                  <a:pos x="csX35" y="csY35"/>
+                </a:cxn>
+                <a:cxn ang="0">
+                  <a:pos x="csX36" y="csY36"/>
+                </a:cxn>
+                <a:cxn ang="0">
+                  <a:pos x="csX37" y="csY37"/>
+                </a:cxn>
+                <a:cxn ang="0">
+                  <a:pos x="csX38" y="csY38"/>
+                </a:cxn>
+                <a:cxn ang="0">
+                  <a:pos x="csX39" y="csY39"/>
+                </a:cxn>
+                <a:cxn ang="0">
+                  <a:pos x="csX40" y="csY40"/>
+                </a:cxn>
+                <a:cxn ang="0">
+                  <a:pos x="csX41" y="csY41"/>
+                </a:cxn>
+              </a:cxnLst>
+              <a:rect l="l" t="t" r="r" b="b"/>
+              <a:pathLst>
+                <a:path w="1291905" h="1770078">
+                  <a:moveTo>
+                    <a:pt x="0" y="0"/>
+                  </a:moveTo>
+                  <a:lnTo>
+                    <a:pt x="0" y="478173"/>
+                  </a:lnTo>
+                  <a:lnTo>
+                    <a:pt x="0" y="1291905"/>
+                  </a:lnTo>
+                  <a:lnTo>
+                    <a:pt x="0" y="1770078"/>
+                  </a:lnTo>
+                  <a:lnTo>
+                    <a:pt x="6123" y="1770078"/>
+                  </a:lnTo>
+                  <a:lnTo>
+                    <a:pt x="109381" y="1658008"/>
+                  </a:lnTo>
+                  <a:lnTo>
+                    <a:pt x="212639" y="1770078"/>
+                  </a:lnTo>
+                  <a:lnTo>
+                    <a:pt x="221976" y="1770078"/>
+                  </a:lnTo>
+                  <a:lnTo>
+                    <a:pt x="325234" y="1658008"/>
+                  </a:lnTo>
+                  <a:lnTo>
+                    <a:pt x="428492" y="1770078"/>
+                  </a:lnTo>
+                  <a:lnTo>
+                    <a:pt x="437829" y="1770078"/>
+                  </a:lnTo>
+                  <a:lnTo>
+                    <a:pt x="541087" y="1658008"/>
+                  </a:lnTo>
+                  <a:lnTo>
+                    <a:pt x="644346" y="1770078"/>
+                  </a:lnTo>
+                  <a:lnTo>
+                    <a:pt x="653683" y="1770078"/>
+                  </a:lnTo>
+                  <a:lnTo>
+                    <a:pt x="756941" y="1658008"/>
+                  </a:lnTo>
+                  <a:lnTo>
+                    <a:pt x="860199" y="1770078"/>
+                  </a:lnTo>
+                  <a:lnTo>
+                    <a:pt x="869536" y="1770078"/>
+                  </a:lnTo>
+                  <a:lnTo>
+                    <a:pt x="972794" y="1658008"/>
+                  </a:lnTo>
+                  <a:lnTo>
+                    <a:pt x="1076052" y="1770078"/>
+                  </a:lnTo>
+                  <a:lnTo>
+                    <a:pt x="1085389" y="1770078"/>
+                  </a:lnTo>
+                  <a:lnTo>
+                    <a:pt x="1188647" y="1658008"/>
+                  </a:lnTo>
+                  <a:lnTo>
+                    <a:pt x="1291905" y="1770078"/>
+                  </a:lnTo>
+                  <a:lnTo>
+                    <a:pt x="1291905" y="1291905"/>
+                  </a:lnTo>
+                  <a:lnTo>
+                    <a:pt x="1291905" y="478173"/>
+                  </a:lnTo>
+                  <a:lnTo>
+                    <a:pt x="1291905" y="0"/>
+                  </a:lnTo>
+                  <a:lnTo>
+                    <a:pt x="1188647" y="112070"/>
+                  </a:lnTo>
+                  <a:lnTo>
+                    <a:pt x="1085389" y="0"/>
+                  </a:lnTo>
+                  <a:lnTo>
+                    <a:pt x="1076052" y="0"/>
+                  </a:lnTo>
+                  <a:lnTo>
+                    <a:pt x="972794" y="112070"/>
+                  </a:lnTo>
+                  <a:lnTo>
+                    <a:pt x="869536" y="0"/>
+                  </a:lnTo>
+                  <a:lnTo>
+                    <a:pt x="860199" y="0"/>
+                  </a:lnTo>
+                  <a:lnTo>
+                    <a:pt x="756941" y="112070"/>
+                  </a:lnTo>
+                  <a:lnTo>
+                    <a:pt x="653683" y="0"/>
+                  </a:lnTo>
+                  <a:lnTo>
+                    <a:pt x="644346" y="0"/>
+                  </a:lnTo>
+                  <a:lnTo>
+                    <a:pt x="541087" y="112070"/>
+                  </a:lnTo>
+                  <a:lnTo>
+                    <a:pt x="437829" y="0"/>
+                  </a:lnTo>
+                  <a:lnTo>
+                    <a:pt x="428492" y="0"/>
+                  </a:lnTo>
+                  <a:lnTo>
+                    <a:pt x="325234" y="112070"/>
+                  </a:lnTo>
+                  <a:lnTo>
+                    <a:pt x="221976" y="0"/>
+                  </a:lnTo>
+                  <a:lnTo>
+                    <a:pt x="212639" y="0"/>
+                  </a:lnTo>
+                  <a:lnTo>
+                    <a:pt x="109381" y="112070"/>
+                  </a:lnTo>
+                  <a:lnTo>
+                    <a:pt x="6123" y="0"/>
+                  </a:lnTo>
+                  <a:close/>
+                </a:path>
+              </a:pathLst>
+            </a:custGeom>
+            <a:solidFill>
+              <a:srgbClr val="E94B3A"/>
+            </a:solidFill>
+            <a:ln w="3175">
+              <a:solidFill>
+                <a:srgbClr val="C00000"/>
+              </a:solidFill>
+            </a:ln>
+          </p:spPr>
+          <p:style>
+            <a:lnRef idx="2">
+              <a:schemeClr val="accent1">
+                <a:shade val="15000"/>
+              </a:schemeClr>
+            </a:lnRef>
+            <a:fillRef idx="1">
+              <a:schemeClr val="accent1"/>
+            </a:fillRef>
+            <a:effectRef idx="0">
+              <a:schemeClr val="accent1"/>
+            </a:effectRef>
+            <a:fontRef idx="minor">
+              <a:schemeClr val="lt1"/>
+            </a:fontRef>
+          </p:style>
+          <p:txBody>
+            <a:bodyPr wrap="square" rtlCol="0" anchor="ctr">
+              <a:noAutofit/>
+            </a:bodyPr>
+            <a:lstStyle/>
+            <a:p>
+              <a:pPr algn="ctr"/>
+              <a:endParaRPr lang="en-US"/>
+            </a:p>
+          </p:txBody>
+        </p:sp>
+        <p:sp>
+          <p:nvSpPr>
+            <p:cNvPr id="29" name="Freeform: Shape 28">
+              <a:extLst>
+                <a:ext uri="{FF2B5EF4-FFF2-40B4-BE49-F238E27FC236}">
+                  <a16:creationId xmlns:a16="http://schemas.microsoft.com/office/drawing/2014/main" id="{76B87F79-2AD4-F7CE-83A6-69F0513E9B18}"/>
+                </a:ext>
+              </a:extLst>
+            </p:cNvPr>
+            <p:cNvSpPr/>
+            <p:nvPr/>
+          </p:nvSpPr>
+          <p:spPr>
+            <a:xfrm>
+              <a:off x="3879920" y="2239750"/>
+              <a:ext cx="937260" cy="652164"/>
+            </a:xfrm>
+            <a:custGeom>
+              <a:avLst/>
+              <a:gdLst>
+                <a:gd name="csX0" fmla="*/ 885039 w 1770078"/>
+                <a:gd name="csY0" fmla="*/ 0 h 1291903"/>
+                <a:gd name="csX1" fmla="*/ 1752097 w 1770078"/>
+                <a:gd name="csY1" fmla="*/ 364364 h 1291903"/>
+                <a:gd name="csX2" fmla="*/ 1756386 w 1770078"/>
+                <a:gd name="csY2" fmla="*/ 378854 h 1291903"/>
+                <a:gd name="csX3" fmla="*/ 1770078 w 1770078"/>
+                <a:gd name="csY3" fmla="*/ 378854 h 1291903"/>
+                <a:gd name="csX4" fmla="*/ 1770078 w 1770078"/>
+                <a:gd name="csY4" fmla="*/ 456330 h 1291903"/>
+                <a:gd name="csX5" fmla="*/ 1770078 w 1770078"/>
+                <a:gd name="csY5" fmla="*/ 1291903 h 1291903"/>
+                <a:gd name="csX6" fmla="*/ 0 w 1770078"/>
+                <a:gd name="csY6" fmla="*/ 1291903 h 1291903"/>
+                <a:gd name="csX7" fmla="*/ 0 w 1770078"/>
+                <a:gd name="csY7" fmla="*/ 456330 h 1291903"/>
+                <a:gd name="csX8" fmla="*/ 0 w 1770078"/>
+                <a:gd name="csY8" fmla="*/ 378854 h 1291903"/>
+                <a:gd name="csX9" fmla="*/ 13692 w 1770078"/>
+                <a:gd name="csY9" fmla="*/ 378854 h 1291903"/>
+                <a:gd name="csX10" fmla="*/ 17981 w 1770078"/>
+                <a:gd name="csY10" fmla="*/ 364364 h 1291903"/>
+                <a:gd name="csX11" fmla="*/ 885039 w 1770078"/>
+                <a:gd name="csY11" fmla="*/ 0 h 1291903"/>
+                <a:gd name="csX0" fmla="*/ 885039 w 1770078"/>
+                <a:gd name="csY0" fmla="*/ 0 h 1291903"/>
+                <a:gd name="csX1" fmla="*/ 1752097 w 1770078"/>
+                <a:gd name="csY1" fmla="*/ 364364 h 1291903"/>
+                <a:gd name="csX2" fmla="*/ 1756386 w 1770078"/>
+                <a:gd name="csY2" fmla="*/ 378854 h 1291903"/>
+                <a:gd name="csX3" fmla="*/ 1770078 w 1770078"/>
+                <a:gd name="csY3" fmla="*/ 378854 h 1291903"/>
+                <a:gd name="csX4" fmla="*/ 1770078 w 1770078"/>
+                <a:gd name="csY4" fmla="*/ 456330 h 1291903"/>
+                <a:gd name="csX5" fmla="*/ 1770078 w 1770078"/>
+                <a:gd name="csY5" fmla="*/ 1291903 h 1291903"/>
+                <a:gd name="csX6" fmla="*/ 0 w 1770078"/>
+                <a:gd name="csY6" fmla="*/ 1291903 h 1291903"/>
+                <a:gd name="csX7" fmla="*/ 0 w 1770078"/>
+                <a:gd name="csY7" fmla="*/ 456330 h 1291903"/>
+                <a:gd name="csX8" fmla="*/ 13692 w 1770078"/>
+                <a:gd name="csY8" fmla="*/ 378854 h 1291903"/>
+                <a:gd name="csX9" fmla="*/ 17981 w 1770078"/>
+                <a:gd name="csY9" fmla="*/ 364364 h 1291903"/>
+                <a:gd name="csX10" fmla="*/ 885039 w 1770078"/>
+                <a:gd name="csY10" fmla="*/ 0 h 1291903"/>
+                <a:gd name="csX0" fmla="*/ 885039 w 1770078"/>
+                <a:gd name="csY0" fmla="*/ 0 h 1291903"/>
+                <a:gd name="csX1" fmla="*/ 1752097 w 1770078"/>
+                <a:gd name="csY1" fmla="*/ 364364 h 1291903"/>
+                <a:gd name="csX2" fmla="*/ 1756386 w 1770078"/>
+                <a:gd name="csY2" fmla="*/ 378854 h 1291903"/>
+                <a:gd name="csX3" fmla="*/ 1770078 w 1770078"/>
+                <a:gd name="csY3" fmla="*/ 378854 h 1291903"/>
+                <a:gd name="csX4" fmla="*/ 1770078 w 1770078"/>
+                <a:gd name="csY4" fmla="*/ 456330 h 1291903"/>
+                <a:gd name="csX5" fmla="*/ 1770078 w 1770078"/>
+                <a:gd name="csY5" fmla="*/ 1291903 h 1291903"/>
+                <a:gd name="csX6" fmla="*/ 0 w 1770078"/>
+                <a:gd name="csY6" fmla="*/ 1291903 h 1291903"/>
+                <a:gd name="csX7" fmla="*/ 0 w 1770078"/>
+                <a:gd name="csY7" fmla="*/ 456330 h 1291903"/>
+                <a:gd name="csX8" fmla="*/ 17981 w 1770078"/>
+                <a:gd name="csY8" fmla="*/ 364364 h 1291903"/>
+                <a:gd name="csX9" fmla="*/ 885039 w 1770078"/>
+                <a:gd name="csY9" fmla="*/ 0 h 1291903"/>
+                <a:gd name="csX0" fmla="*/ 885039 w 1770078"/>
+                <a:gd name="csY0" fmla="*/ 0 h 1291903"/>
+                <a:gd name="csX1" fmla="*/ 1752097 w 1770078"/>
+                <a:gd name="csY1" fmla="*/ 364364 h 1291903"/>
+                <a:gd name="csX2" fmla="*/ 1756386 w 1770078"/>
+                <a:gd name="csY2" fmla="*/ 378854 h 1291903"/>
+                <a:gd name="csX3" fmla="*/ 1770078 w 1770078"/>
+                <a:gd name="csY3" fmla="*/ 456330 h 1291903"/>
+                <a:gd name="csX4" fmla="*/ 1770078 w 1770078"/>
+                <a:gd name="csY4" fmla="*/ 1291903 h 1291903"/>
+                <a:gd name="csX5" fmla="*/ 0 w 1770078"/>
+                <a:gd name="csY5" fmla="*/ 1291903 h 1291903"/>
+                <a:gd name="csX6" fmla="*/ 0 w 1770078"/>
+                <a:gd name="csY6" fmla="*/ 456330 h 1291903"/>
+                <a:gd name="csX7" fmla="*/ 17981 w 1770078"/>
+                <a:gd name="csY7" fmla="*/ 364364 h 1291903"/>
+                <a:gd name="csX8" fmla="*/ 885039 w 1770078"/>
+                <a:gd name="csY8" fmla="*/ 0 h 1291903"/>
+                <a:gd name="csX0" fmla="*/ 885039 w 1770078"/>
+                <a:gd name="csY0" fmla="*/ 0 h 1291903"/>
+                <a:gd name="csX1" fmla="*/ 1752097 w 1770078"/>
+                <a:gd name="csY1" fmla="*/ 364364 h 1291903"/>
+                <a:gd name="csX2" fmla="*/ 1770078 w 1770078"/>
+                <a:gd name="csY2" fmla="*/ 456330 h 1291903"/>
+                <a:gd name="csX3" fmla="*/ 1770078 w 1770078"/>
+                <a:gd name="csY3" fmla="*/ 1291903 h 1291903"/>
+                <a:gd name="csX4" fmla="*/ 0 w 1770078"/>
+                <a:gd name="csY4" fmla="*/ 1291903 h 1291903"/>
+                <a:gd name="csX5" fmla="*/ 0 w 1770078"/>
+                <a:gd name="csY5" fmla="*/ 456330 h 1291903"/>
+                <a:gd name="csX6" fmla="*/ 17981 w 1770078"/>
+                <a:gd name="csY6" fmla="*/ 364364 h 1291903"/>
+                <a:gd name="csX7" fmla="*/ 885039 w 1770078"/>
+                <a:gd name="csY7" fmla="*/ 0 h 1291903"/>
+              </a:gdLst>
+              <a:ahLst/>
+              <a:cxnLst>
+                <a:cxn ang="0">
+                  <a:pos x="csX0" y="csY0"/>
+                </a:cxn>
+                <a:cxn ang="0">
+                  <a:pos x="csX1" y="csY1"/>
+                </a:cxn>
+                <a:cxn ang="0">
+                  <a:pos x="csX2" y="csY2"/>
+                </a:cxn>
+                <a:cxn ang="0">
+                  <a:pos x="csX3" y="csY3"/>
+                </a:cxn>
+                <a:cxn ang="0">
+                  <a:pos x="csX4" y="csY4"/>
+                </a:cxn>
+                <a:cxn ang="0">
+                  <a:pos x="csX5" y="csY5"/>
+                </a:cxn>
+                <a:cxn ang="0">
+                  <a:pos x="csX6" y="csY6"/>
+                </a:cxn>
+                <a:cxn ang="0">
+                  <a:pos x="csX7" y="csY7"/>
+                </a:cxn>
+              </a:cxnLst>
+              <a:rect l="l" t="t" r="r" b="b"/>
+              <a:pathLst>
+                <a:path w="1770078" h="1291903">
+                  <a:moveTo>
+                    <a:pt x="885039" y="0"/>
+                  </a:moveTo>
+                  <a:cubicBezTo>
+                    <a:pt x="1312734" y="0"/>
+                    <a:pt x="1669571" y="156422"/>
+                    <a:pt x="1752097" y="364364"/>
+                  </a:cubicBezTo>
+                  <a:lnTo>
+                    <a:pt x="1770078" y="456330"/>
+                  </a:lnTo>
+                  <a:lnTo>
+                    <a:pt x="1770078" y="1291903"/>
+                  </a:lnTo>
+                  <a:lnTo>
+                    <a:pt x="0" y="1291903"/>
+                  </a:lnTo>
+                  <a:lnTo>
+                    <a:pt x="0" y="456330"/>
+                  </a:lnTo>
+                  <a:lnTo>
+                    <a:pt x="17981" y="364364"/>
+                  </a:lnTo>
+                  <a:cubicBezTo>
+                    <a:pt x="100507" y="156422"/>
+                    <a:pt x="457344" y="0"/>
+                    <a:pt x="885039" y="0"/>
+                  </a:cubicBezTo>
+                  <a:close/>
+                </a:path>
+              </a:pathLst>
+            </a:custGeom>
+            <a:solidFill>
+              <a:srgbClr val="3BA8F0"/>
+            </a:solidFill>
+            <a:ln w="3175">
+              <a:solidFill>
+                <a:srgbClr val="0070C0"/>
+              </a:solidFill>
+            </a:ln>
+          </p:spPr>
+          <p:style>
+            <a:lnRef idx="2">
+              <a:schemeClr val="accent1">
+                <a:shade val="15000"/>
+              </a:schemeClr>
+            </a:lnRef>
+            <a:fillRef idx="1">
+              <a:schemeClr val="accent1"/>
+            </a:fillRef>
+            <a:effectRef idx="0">
+              <a:schemeClr val="accent1"/>
+            </a:effectRef>
+            <a:fontRef idx="minor">
+              <a:schemeClr val="lt1"/>
+            </a:fontRef>
+          </p:style>
+          <p:txBody>
+            <a:bodyPr wrap="square" rtlCol="0" anchor="ctr">
+              <a:noAutofit/>
+            </a:bodyPr>
+            <a:lstStyle/>
+            <a:p>
+              <a:pPr algn="ctr"/>
+              <a:endParaRPr lang="en-US"/>
+            </a:p>
+          </p:txBody>
+        </p:sp>
+        <p:sp>
+          <p:nvSpPr>
+            <p:cNvPr id="15" name="Freeform: Shape 14">
+              <a:extLst>
+                <a:ext uri="{FF2B5EF4-FFF2-40B4-BE49-F238E27FC236}">
+                  <a16:creationId xmlns:a16="http://schemas.microsoft.com/office/drawing/2014/main" id="{B231A9A5-1710-4C6B-848A-D5C60834FE34}"/>
+                </a:ext>
+              </a:extLst>
+            </p:cNvPr>
+            <p:cNvSpPr/>
+            <p:nvPr/>
+          </p:nvSpPr>
+          <p:spPr>
+            <a:xfrm>
+              <a:off x="6235672" y="2239750"/>
+              <a:ext cx="937260" cy="652165"/>
+            </a:xfrm>
+            <a:custGeom>
+              <a:avLst/>
+              <a:gdLst>
+                <a:gd name="csX0" fmla="*/ 0 w 937260"/>
+                <a:gd name="csY0" fmla="*/ 0 h 652165"/>
+                <a:gd name="csX1" fmla="*/ 179 w 937260"/>
+                <a:gd name="csY1" fmla="*/ 0 h 652165"/>
+                <a:gd name="csX2" fmla="*/ 116373 w 937260"/>
+                <a:gd name="csY2" fmla="*/ 31552 h 652165"/>
+                <a:gd name="csX3" fmla="*/ 468630 w 937260"/>
+                <a:gd name="csY3" fmla="*/ 67131 h 652165"/>
+                <a:gd name="csX4" fmla="*/ 820887 w 937260"/>
+                <a:gd name="csY4" fmla="*/ 31552 h 652165"/>
+                <a:gd name="csX5" fmla="*/ 937081 w 937260"/>
+                <a:gd name="csY5" fmla="*/ 0 h 652165"/>
+                <a:gd name="csX6" fmla="*/ 937260 w 937260"/>
+                <a:gd name="csY6" fmla="*/ 0 h 652165"/>
+                <a:gd name="csX7" fmla="*/ 937260 w 937260"/>
+                <a:gd name="csY7" fmla="*/ 652165 h 652165"/>
+                <a:gd name="csX8" fmla="*/ 937078 w 937260"/>
+                <a:gd name="csY8" fmla="*/ 652165 h 652165"/>
+                <a:gd name="csX9" fmla="*/ 820887 w 937260"/>
+                <a:gd name="csY9" fmla="*/ 620614 h 652165"/>
+                <a:gd name="csX10" fmla="*/ 468630 w 937260"/>
+                <a:gd name="csY10" fmla="*/ 585035 h 652165"/>
+                <a:gd name="csX11" fmla="*/ 116373 w 937260"/>
+                <a:gd name="csY11" fmla="*/ 620614 h 652165"/>
+                <a:gd name="csX12" fmla="*/ 183 w 937260"/>
+                <a:gd name="csY12" fmla="*/ 652165 h 652165"/>
+                <a:gd name="csX13" fmla="*/ 0 w 937260"/>
+                <a:gd name="csY13" fmla="*/ 652165 h 652165"/>
+              </a:gdLst>
+              <a:ahLst/>
+              <a:cxnLst>
+                <a:cxn ang="0">
+                  <a:pos x="csX0" y="csY0"/>
+                </a:cxn>
+                <a:cxn ang="0">
+                  <a:pos x="csX1" y="csY1"/>
+                </a:cxn>
+                <a:cxn ang="0">
+                  <a:pos x="csX2" y="csY2"/>
+                </a:cxn>
+                <a:cxn ang="0">
+                  <a:pos x="csX3" y="csY3"/>
+                </a:cxn>
+                <a:cxn ang="0">
+                  <a:pos x="csX4" y="csY4"/>
+                </a:cxn>
+                <a:cxn ang="0">
+                  <a:pos x="csX5" y="csY5"/>
+                </a:cxn>
+                <a:cxn ang="0">
+                  <a:pos x="csX6" y="csY6"/>
+                </a:cxn>
+                <a:cxn ang="0">
+                  <a:pos x="csX7" y="csY7"/>
+                </a:cxn>
+                <a:cxn ang="0">
+                  <a:pos x="csX8" y="csY8"/>
+                </a:cxn>
+                <a:cxn ang="0">
+                  <a:pos x="csX9" y="csY9"/>
+                </a:cxn>
+                <a:cxn ang="0">
+                  <a:pos x="csX10" y="csY10"/>
+                </a:cxn>
+                <a:cxn ang="0">
+                  <a:pos x="csX11" y="csY11"/>
+                </a:cxn>
+                <a:cxn ang="0">
+                  <a:pos x="csX12" y="csY12"/>
+                </a:cxn>
+                <a:cxn ang="0">
+                  <a:pos x="csX13" y="csY13"/>
+                </a:cxn>
+              </a:cxnLst>
+              <a:rect l="l" t="t" r="r" b="b"/>
+              <a:pathLst>
+                <a:path w="937260" h="652165">
+                  <a:moveTo>
+                    <a:pt x="0" y="0"/>
+                  </a:moveTo>
+                  <a:lnTo>
+                    <a:pt x="179" y="0"/>
+                  </a:lnTo>
+                  <a:lnTo>
+                    <a:pt x="116373" y="31552"/>
+                  </a:lnTo>
+                  <a:cubicBezTo>
+                    <a:pt x="224643" y="54462"/>
+                    <a:pt x="343679" y="67131"/>
+                    <a:pt x="468630" y="67131"/>
+                  </a:cubicBezTo>
+                  <a:cubicBezTo>
+                    <a:pt x="593581" y="67131"/>
+                    <a:pt x="712618" y="54462"/>
+                    <a:pt x="820887" y="31552"/>
+                  </a:cubicBezTo>
+                  <a:lnTo>
+                    <a:pt x="937081" y="0"/>
+                  </a:lnTo>
+                  <a:lnTo>
+                    <a:pt x="937260" y="0"/>
+                  </a:lnTo>
+                  <a:lnTo>
+                    <a:pt x="937260" y="652165"/>
+                  </a:lnTo>
+                  <a:lnTo>
+                    <a:pt x="937078" y="652165"/>
+                  </a:lnTo>
+                  <a:lnTo>
+                    <a:pt x="820887" y="620614"/>
+                  </a:lnTo>
+                  <a:cubicBezTo>
+                    <a:pt x="712618" y="597704"/>
+                    <a:pt x="593581" y="585035"/>
+                    <a:pt x="468630" y="585035"/>
+                  </a:cubicBezTo>
+                  <a:cubicBezTo>
+                    <a:pt x="343679" y="585035"/>
+                    <a:pt x="224643" y="597704"/>
+                    <a:pt x="116373" y="620614"/>
+                  </a:cubicBezTo>
+                  <a:lnTo>
+                    <a:pt x="183" y="652165"/>
+                  </a:lnTo>
+                  <a:lnTo>
+                    <a:pt x="0" y="652165"/>
+                  </a:lnTo>
+                  <a:close/>
+                </a:path>
+              </a:pathLst>
+            </a:custGeom>
+            <a:solidFill>
+              <a:srgbClr val="36E67F"/>
+            </a:solidFill>
+            <a:ln w="3175">
+              <a:solidFill>
+                <a:srgbClr val="00B050"/>
+              </a:solidFill>
+            </a:ln>
+          </p:spPr>
+          <p:style>
+            <a:lnRef idx="2">
+              <a:schemeClr val="accent1">
+                <a:shade val="15000"/>
+              </a:schemeClr>
+            </a:lnRef>
+            <a:fillRef idx="1">
+              <a:schemeClr val="accent1"/>
+            </a:fillRef>
+            <a:effectRef idx="0">
+              <a:schemeClr val="accent1"/>
+            </a:effectRef>
+            <a:fontRef idx="minor">
+              <a:schemeClr val="lt1"/>
+            </a:fontRef>
+          </p:style>
+          <p:txBody>
+            <a:bodyPr wrap="square" rtlCol="0" anchor="ctr">
+              <a:noAutofit/>
+            </a:bodyPr>
+            <a:lstStyle/>
+            <a:p>
+              <a:pPr algn="ctr"/>
+              <a:endParaRPr lang="en-US"/>
+            </a:p>
+          </p:txBody>
+        </p:sp>
+      </p:grpSp>
+      <p:grpSp>
+        <p:nvGrpSpPr>
+          <p:cNvPr id="14" name="Group 13">
             <a:extLst>
               <a:ext uri="{FF2B5EF4-FFF2-40B4-BE49-F238E27FC236}">
-                <a16:creationId xmlns:a16="http://schemas.microsoft.com/office/drawing/2014/main" id="{197A0BF1-A07E-C291-06DB-390F9668E87D}"/>
+                <a16:creationId xmlns:a16="http://schemas.microsoft.com/office/drawing/2014/main" id="{91BD41E1-46FD-7779-B47B-85D54801030A}"/>
               </a:ext>
             </a:extLst>
           </p:cNvPr>
-          <p:cNvSpPr txBox="1"/>
+          <p:cNvGrpSpPr/>
           <p:nvPr/>
-        </p:nvSpPr>
-        <p:spPr>
+        </p:nvGrpSpPr>
+        <p:grpSpPr>
           <a:xfrm>
-            <a:off x="1844342" y="2648739"/>
-            <a:ext cx="306494" cy="369332"/>
+            <a:off x="2546329" y="2307461"/>
+            <a:ext cx="6084770" cy="652166"/>
+            <a:chOff x="2546329" y="3184240"/>
+            <a:chExt cx="6084770" cy="652166"/>
           </a:xfrm>
-          <a:prstGeom prst="rect">
-            <a:avLst/>
-          </a:prstGeom>
-          <a:noFill/>
-        </p:spPr>
-        <p:txBody>
-          <a:bodyPr wrap="none" rtlCol="0">
-            <a:spAutoFit/>
-          </a:bodyPr>
-          <a:lstStyle/>
-          <a:p>
-            <a:r>
-              <a:rPr lang="en-US" dirty="0"/>
-              <a:t>b</a:t>
-            </a:r>
-          </a:p>
-        </p:txBody>
-      </p:sp>
-      <p:sp>
-        <p:nvSpPr>
-          <p:cNvPr id="32" name="TextBox 31">
+        </p:grpSpPr>
+        <p:sp>
+          <p:nvSpPr>
+            <p:cNvPr id="3" name="Rectangle: Rounded Corners 2">
+              <a:extLst>
+                <a:ext uri="{FF2B5EF4-FFF2-40B4-BE49-F238E27FC236}">
+                  <a16:creationId xmlns:a16="http://schemas.microsoft.com/office/drawing/2014/main" id="{E7AF6779-4F34-5962-5E22-E7DABD566F5D}"/>
+                </a:ext>
+              </a:extLst>
+            </p:cNvPr>
+            <p:cNvSpPr/>
+            <p:nvPr/>
+          </p:nvSpPr>
+          <p:spPr>
+            <a:xfrm>
+              <a:off x="2546329" y="3184240"/>
+              <a:ext cx="937260" cy="652166"/>
+            </a:xfrm>
+            <a:prstGeom prst="roundRect">
+              <a:avLst/>
+            </a:prstGeom>
+            <a:gradFill flip="none" rotWithShape="1">
+              <a:gsLst>
+                <a:gs pos="100000">
+                  <a:schemeClr val="bg1">
+                    <a:alpha val="46000"/>
+                  </a:schemeClr>
+                </a:gs>
+                <a:gs pos="0">
+                  <a:schemeClr val="accent1">
+                    <a:tint val="23500"/>
+                    <a:satMod val="160000"/>
+                    <a:alpha val="0"/>
+                  </a:schemeClr>
+                </a:gs>
+              </a:gsLst>
+              <a:path path="circle">
+                <a:fillToRect l="100000" t="100000"/>
+              </a:path>
+              <a:tileRect r="-100000" b="-100000"/>
+            </a:gradFill>
+            <a:ln>
+              <a:noFill/>
+            </a:ln>
+          </p:spPr>
+          <p:style>
+            <a:lnRef idx="2">
+              <a:schemeClr val="accent1">
+                <a:shade val="15000"/>
+              </a:schemeClr>
+            </a:lnRef>
+            <a:fillRef idx="1">
+              <a:schemeClr val="accent1"/>
+            </a:fillRef>
+            <a:effectRef idx="0">
+              <a:schemeClr val="accent1"/>
+            </a:effectRef>
+            <a:fontRef idx="minor">
+              <a:schemeClr val="lt1"/>
+            </a:fontRef>
+          </p:style>
+          <p:txBody>
+            <a:bodyPr rtlCol="0" anchor="ctr"/>
+            <a:lstStyle/>
+            <a:p>
+              <a:pPr algn="ctr"/>
+              <a:endParaRPr lang="en-US"/>
+            </a:p>
+          </p:txBody>
+        </p:sp>
+        <p:sp>
+          <p:nvSpPr>
+            <p:cNvPr id="4" name="Freeform: Shape 3">
+              <a:extLst>
+                <a:ext uri="{FF2B5EF4-FFF2-40B4-BE49-F238E27FC236}">
+                  <a16:creationId xmlns:a16="http://schemas.microsoft.com/office/drawing/2014/main" id="{038BF728-E7E6-8421-8840-6E3ECD9A75DD}"/>
+                </a:ext>
+              </a:extLst>
+            </p:cNvPr>
+            <p:cNvSpPr/>
+            <p:nvPr/>
+          </p:nvSpPr>
+          <p:spPr>
+            <a:xfrm>
+              <a:off x="7698281" y="3184241"/>
+              <a:ext cx="932818" cy="652165"/>
+            </a:xfrm>
+            <a:custGeom>
+              <a:avLst/>
+              <a:gdLst>
+                <a:gd name="csX0" fmla="*/ 0 w 1761688"/>
+                <a:gd name="csY0" fmla="*/ 0 h 1291904"/>
+                <a:gd name="csX1" fmla="*/ 75501 w 1761688"/>
+                <a:gd name="csY1" fmla="*/ 0 h 1291904"/>
+                <a:gd name="csX2" fmla="*/ 1686187 w 1761688"/>
+                <a:gd name="csY2" fmla="*/ 0 h 1291904"/>
+                <a:gd name="csX3" fmla="*/ 1761688 w 1761688"/>
+                <a:gd name="csY3" fmla="*/ 0 h 1291904"/>
+                <a:gd name="csX4" fmla="*/ 1761688 w 1761688"/>
+                <a:gd name="csY4" fmla="*/ 102765 h 1291904"/>
+                <a:gd name="csX5" fmla="*/ 1686187 w 1761688"/>
+                <a:gd name="csY5" fmla="*/ 102765 h 1291904"/>
+                <a:gd name="csX6" fmla="*/ 1686187 w 1761688"/>
+                <a:gd name="csY6" fmla="*/ 1189139 h 1291904"/>
+                <a:gd name="csX7" fmla="*/ 1761688 w 1761688"/>
+                <a:gd name="csY7" fmla="*/ 1189139 h 1291904"/>
+                <a:gd name="csX8" fmla="*/ 1761688 w 1761688"/>
+                <a:gd name="csY8" fmla="*/ 1291904 h 1291904"/>
+                <a:gd name="csX9" fmla="*/ 1686187 w 1761688"/>
+                <a:gd name="csY9" fmla="*/ 1291904 h 1291904"/>
+                <a:gd name="csX10" fmla="*/ 75501 w 1761688"/>
+                <a:gd name="csY10" fmla="*/ 1291904 h 1291904"/>
+                <a:gd name="csX11" fmla="*/ 0 w 1761688"/>
+                <a:gd name="csY11" fmla="*/ 1291904 h 1291904"/>
+                <a:gd name="csX12" fmla="*/ 0 w 1761688"/>
+                <a:gd name="csY12" fmla="*/ 1189139 h 1291904"/>
+                <a:gd name="csX13" fmla="*/ 75501 w 1761688"/>
+                <a:gd name="csY13" fmla="*/ 1189139 h 1291904"/>
+                <a:gd name="csX14" fmla="*/ 75501 w 1761688"/>
+                <a:gd name="csY14" fmla="*/ 102765 h 1291904"/>
+                <a:gd name="csX15" fmla="*/ 0 w 1761688"/>
+                <a:gd name="csY15" fmla="*/ 102765 h 1291904"/>
+              </a:gdLst>
+              <a:ahLst/>
+              <a:cxnLst>
+                <a:cxn ang="0">
+                  <a:pos x="csX0" y="csY0"/>
+                </a:cxn>
+                <a:cxn ang="0">
+                  <a:pos x="csX1" y="csY1"/>
+                </a:cxn>
+                <a:cxn ang="0">
+                  <a:pos x="csX2" y="csY2"/>
+                </a:cxn>
+                <a:cxn ang="0">
+                  <a:pos x="csX3" y="csY3"/>
+                </a:cxn>
+                <a:cxn ang="0">
+                  <a:pos x="csX4" y="csY4"/>
+                </a:cxn>
+                <a:cxn ang="0">
+                  <a:pos x="csX5" y="csY5"/>
+                </a:cxn>
+                <a:cxn ang="0">
+                  <a:pos x="csX6" y="csY6"/>
+                </a:cxn>
+                <a:cxn ang="0">
+                  <a:pos x="csX7" y="csY7"/>
+                </a:cxn>
+                <a:cxn ang="0">
+                  <a:pos x="csX8" y="csY8"/>
+                </a:cxn>
+                <a:cxn ang="0">
+                  <a:pos x="csX9" y="csY9"/>
+                </a:cxn>
+                <a:cxn ang="0">
+                  <a:pos x="csX10" y="csY10"/>
+                </a:cxn>
+                <a:cxn ang="0">
+                  <a:pos x="csX11" y="csY11"/>
+                </a:cxn>
+                <a:cxn ang="0">
+                  <a:pos x="csX12" y="csY12"/>
+                </a:cxn>
+                <a:cxn ang="0">
+                  <a:pos x="csX13" y="csY13"/>
+                </a:cxn>
+                <a:cxn ang="0">
+                  <a:pos x="csX14" y="csY14"/>
+                </a:cxn>
+                <a:cxn ang="0">
+                  <a:pos x="csX15" y="csY15"/>
+                </a:cxn>
+              </a:cxnLst>
+              <a:rect l="l" t="t" r="r" b="b"/>
+              <a:pathLst>
+                <a:path w="1761688" h="1291904">
+                  <a:moveTo>
+                    <a:pt x="0" y="0"/>
+                  </a:moveTo>
+                  <a:lnTo>
+                    <a:pt x="75501" y="0"/>
+                  </a:lnTo>
+                  <a:lnTo>
+                    <a:pt x="1686187" y="0"/>
+                  </a:lnTo>
+                  <a:lnTo>
+                    <a:pt x="1761688" y="0"/>
+                  </a:lnTo>
+                  <a:lnTo>
+                    <a:pt x="1761688" y="102765"/>
+                  </a:lnTo>
+                  <a:lnTo>
+                    <a:pt x="1686187" y="102765"/>
+                  </a:lnTo>
+                  <a:lnTo>
+                    <a:pt x="1686187" y="1189139"/>
+                  </a:lnTo>
+                  <a:lnTo>
+                    <a:pt x="1761688" y="1189139"/>
+                  </a:lnTo>
+                  <a:lnTo>
+                    <a:pt x="1761688" y="1291904"/>
+                  </a:lnTo>
+                  <a:lnTo>
+                    <a:pt x="1686187" y="1291904"/>
+                  </a:lnTo>
+                  <a:lnTo>
+                    <a:pt x="75501" y="1291904"/>
+                  </a:lnTo>
+                  <a:lnTo>
+                    <a:pt x="0" y="1291904"/>
+                  </a:lnTo>
+                  <a:lnTo>
+                    <a:pt x="0" y="1189139"/>
+                  </a:lnTo>
+                  <a:lnTo>
+                    <a:pt x="75501" y="1189139"/>
+                  </a:lnTo>
+                  <a:lnTo>
+                    <a:pt x="75501" y="102765"/>
+                  </a:lnTo>
+                  <a:lnTo>
+                    <a:pt x="0" y="102765"/>
+                  </a:lnTo>
+                  <a:close/>
+                </a:path>
+              </a:pathLst>
+            </a:custGeom>
+            <a:gradFill flip="none" rotWithShape="1">
+              <a:gsLst>
+                <a:gs pos="100000">
+                  <a:schemeClr val="bg1">
+                    <a:alpha val="46000"/>
+                  </a:schemeClr>
+                </a:gs>
+                <a:gs pos="0">
+                  <a:schemeClr val="accent1">
+                    <a:tint val="23500"/>
+                    <a:satMod val="160000"/>
+                    <a:alpha val="0"/>
+                  </a:schemeClr>
+                </a:gs>
+              </a:gsLst>
+              <a:path path="circle">
+                <a:fillToRect l="100000" t="100000"/>
+              </a:path>
+              <a:tileRect r="-100000" b="-100000"/>
+            </a:gradFill>
+            <a:ln>
+              <a:noFill/>
+            </a:ln>
+          </p:spPr>
+          <p:style>
+            <a:lnRef idx="2">
+              <a:schemeClr val="accent1">
+                <a:shade val="15000"/>
+              </a:schemeClr>
+            </a:lnRef>
+            <a:fillRef idx="1">
+              <a:schemeClr val="accent1"/>
+            </a:fillRef>
+            <a:effectRef idx="0">
+              <a:schemeClr val="accent1"/>
+            </a:effectRef>
+            <a:fontRef idx="minor">
+              <a:schemeClr val="lt1"/>
+            </a:fontRef>
+          </p:style>
+          <p:txBody>
+            <a:bodyPr wrap="square" rtlCol="0" anchor="ctr">
+              <a:noAutofit/>
+            </a:bodyPr>
+            <a:lstStyle/>
+            <a:p>
+              <a:pPr algn="ctr"/>
+              <a:endParaRPr lang="en-US"/>
+            </a:p>
+          </p:txBody>
+        </p:sp>
+        <p:sp>
+          <p:nvSpPr>
+            <p:cNvPr id="5" name="Freeform: Shape 4">
+              <a:extLst>
+                <a:ext uri="{FF2B5EF4-FFF2-40B4-BE49-F238E27FC236}">
+                  <a16:creationId xmlns:a16="http://schemas.microsoft.com/office/drawing/2014/main" id="{73960F27-E2A1-DEAE-24C4-DEF281EA1B1B}"/>
+                </a:ext>
+              </a:extLst>
+            </p:cNvPr>
+            <p:cNvSpPr/>
+            <p:nvPr/>
+          </p:nvSpPr>
+          <p:spPr>
+            <a:xfrm rot="16200000" flipH="1">
+              <a:off x="5198786" y="3041693"/>
+              <a:ext cx="652164" cy="937260"/>
+            </a:xfrm>
+            <a:custGeom>
+              <a:avLst/>
+              <a:gdLst>
+                <a:gd name="csX0" fmla="*/ 0 w 1291905"/>
+                <a:gd name="csY0" fmla="*/ 0 h 1770078"/>
+                <a:gd name="csX1" fmla="*/ 0 w 1291905"/>
+                <a:gd name="csY1" fmla="*/ 478173 h 1770078"/>
+                <a:gd name="csX2" fmla="*/ 0 w 1291905"/>
+                <a:gd name="csY2" fmla="*/ 1291905 h 1770078"/>
+                <a:gd name="csX3" fmla="*/ 0 w 1291905"/>
+                <a:gd name="csY3" fmla="*/ 1770078 h 1770078"/>
+                <a:gd name="csX4" fmla="*/ 6123 w 1291905"/>
+                <a:gd name="csY4" fmla="*/ 1770078 h 1770078"/>
+                <a:gd name="csX5" fmla="*/ 109381 w 1291905"/>
+                <a:gd name="csY5" fmla="*/ 1658008 h 1770078"/>
+                <a:gd name="csX6" fmla="*/ 212639 w 1291905"/>
+                <a:gd name="csY6" fmla="*/ 1770078 h 1770078"/>
+                <a:gd name="csX7" fmla="*/ 221976 w 1291905"/>
+                <a:gd name="csY7" fmla="*/ 1770078 h 1770078"/>
+                <a:gd name="csX8" fmla="*/ 325234 w 1291905"/>
+                <a:gd name="csY8" fmla="*/ 1658008 h 1770078"/>
+                <a:gd name="csX9" fmla="*/ 428492 w 1291905"/>
+                <a:gd name="csY9" fmla="*/ 1770078 h 1770078"/>
+                <a:gd name="csX10" fmla="*/ 437829 w 1291905"/>
+                <a:gd name="csY10" fmla="*/ 1770078 h 1770078"/>
+                <a:gd name="csX11" fmla="*/ 541087 w 1291905"/>
+                <a:gd name="csY11" fmla="*/ 1658008 h 1770078"/>
+                <a:gd name="csX12" fmla="*/ 644346 w 1291905"/>
+                <a:gd name="csY12" fmla="*/ 1770078 h 1770078"/>
+                <a:gd name="csX13" fmla="*/ 653683 w 1291905"/>
+                <a:gd name="csY13" fmla="*/ 1770078 h 1770078"/>
+                <a:gd name="csX14" fmla="*/ 756941 w 1291905"/>
+                <a:gd name="csY14" fmla="*/ 1658008 h 1770078"/>
+                <a:gd name="csX15" fmla="*/ 860199 w 1291905"/>
+                <a:gd name="csY15" fmla="*/ 1770078 h 1770078"/>
+                <a:gd name="csX16" fmla="*/ 869536 w 1291905"/>
+                <a:gd name="csY16" fmla="*/ 1770078 h 1770078"/>
+                <a:gd name="csX17" fmla="*/ 972794 w 1291905"/>
+                <a:gd name="csY17" fmla="*/ 1658008 h 1770078"/>
+                <a:gd name="csX18" fmla="*/ 1076052 w 1291905"/>
+                <a:gd name="csY18" fmla="*/ 1770078 h 1770078"/>
+                <a:gd name="csX19" fmla="*/ 1085389 w 1291905"/>
+                <a:gd name="csY19" fmla="*/ 1770078 h 1770078"/>
+                <a:gd name="csX20" fmla="*/ 1188647 w 1291905"/>
+                <a:gd name="csY20" fmla="*/ 1658008 h 1770078"/>
+                <a:gd name="csX21" fmla="*/ 1291905 w 1291905"/>
+                <a:gd name="csY21" fmla="*/ 1770078 h 1770078"/>
+                <a:gd name="csX22" fmla="*/ 1291905 w 1291905"/>
+                <a:gd name="csY22" fmla="*/ 1291905 h 1770078"/>
+                <a:gd name="csX23" fmla="*/ 1291905 w 1291905"/>
+                <a:gd name="csY23" fmla="*/ 478173 h 1770078"/>
+                <a:gd name="csX24" fmla="*/ 1291905 w 1291905"/>
+                <a:gd name="csY24" fmla="*/ 0 h 1770078"/>
+                <a:gd name="csX25" fmla="*/ 1188647 w 1291905"/>
+                <a:gd name="csY25" fmla="*/ 112070 h 1770078"/>
+                <a:gd name="csX26" fmla="*/ 1085389 w 1291905"/>
+                <a:gd name="csY26" fmla="*/ 0 h 1770078"/>
+                <a:gd name="csX27" fmla="*/ 1076052 w 1291905"/>
+                <a:gd name="csY27" fmla="*/ 0 h 1770078"/>
+                <a:gd name="csX28" fmla="*/ 972794 w 1291905"/>
+                <a:gd name="csY28" fmla="*/ 112070 h 1770078"/>
+                <a:gd name="csX29" fmla="*/ 869536 w 1291905"/>
+                <a:gd name="csY29" fmla="*/ 0 h 1770078"/>
+                <a:gd name="csX30" fmla="*/ 860199 w 1291905"/>
+                <a:gd name="csY30" fmla="*/ 0 h 1770078"/>
+                <a:gd name="csX31" fmla="*/ 756941 w 1291905"/>
+                <a:gd name="csY31" fmla="*/ 112070 h 1770078"/>
+                <a:gd name="csX32" fmla="*/ 653683 w 1291905"/>
+                <a:gd name="csY32" fmla="*/ 0 h 1770078"/>
+                <a:gd name="csX33" fmla="*/ 644346 w 1291905"/>
+                <a:gd name="csY33" fmla="*/ 0 h 1770078"/>
+                <a:gd name="csX34" fmla="*/ 541087 w 1291905"/>
+                <a:gd name="csY34" fmla="*/ 112070 h 1770078"/>
+                <a:gd name="csX35" fmla="*/ 437829 w 1291905"/>
+                <a:gd name="csY35" fmla="*/ 0 h 1770078"/>
+                <a:gd name="csX36" fmla="*/ 428492 w 1291905"/>
+                <a:gd name="csY36" fmla="*/ 0 h 1770078"/>
+                <a:gd name="csX37" fmla="*/ 325234 w 1291905"/>
+                <a:gd name="csY37" fmla="*/ 112070 h 1770078"/>
+                <a:gd name="csX38" fmla="*/ 221976 w 1291905"/>
+                <a:gd name="csY38" fmla="*/ 0 h 1770078"/>
+                <a:gd name="csX39" fmla="*/ 212639 w 1291905"/>
+                <a:gd name="csY39" fmla="*/ 0 h 1770078"/>
+                <a:gd name="csX40" fmla="*/ 109381 w 1291905"/>
+                <a:gd name="csY40" fmla="*/ 112070 h 1770078"/>
+                <a:gd name="csX41" fmla="*/ 6123 w 1291905"/>
+                <a:gd name="csY41" fmla="*/ 0 h 1770078"/>
+              </a:gdLst>
+              <a:ahLst/>
+              <a:cxnLst>
+                <a:cxn ang="0">
+                  <a:pos x="csX0" y="csY0"/>
+                </a:cxn>
+                <a:cxn ang="0">
+                  <a:pos x="csX1" y="csY1"/>
+                </a:cxn>
+                <a:cxn ang="0">
+                  <a:pos x="csX2" y="csY2"/>
+                </a:cxn>
+                <a:cxn ang="0">
+                  <a:pos x="csX3" y="csY3"/>
+                </a:cxn>
+                <a:cxn ang="0">
+                  <a:pos x="csX4" y="csY4"/>
+                </a:cxn>
+                <a:cxn ang="0">
+                  <a:pos x="csX5" y="csY5"/>
+                </a:cxn>
+                <a:cxn ang="0">
+                  <a:pos x="csX6" y="csY6"/>
+                </a:cxn>
+                <a:cxn ang="0">
+                  <a:pos x="csX7" y="csY7"/>
+                </a:cxn>
+                <a:cxn ang="0">
+                  <a:pos x="csX8" y="csY8"/>
+                </a:cxn>
+                <a:cxn ang="0">
+                  <a:pos x="csX9" y="csY9"/>
+                </a:cxn>
+                <a:cxn ang="0">
+                  <a:pos x="csX10" y="csY10"/>
+                </a:cxn>
+                <a:cxn ang="0">
+                  <a:pos x="csX11" y="csY11"/>
+                </a:cxn>
+                <a:cxn ang="0">
+                  <a:pos x="csX12" y="csY12"/>
+                </a:cxn>
+                <a:cxn ang="0">
+                  <a:pos x="csX13" y="csY13"/>
+                </a:cxn>
+                <a:cxn ang="0">
+                  <a:pos x="csX14" y="csY14"/>
+                </a:cxn>
+                <a:cxn ang="0">
+                  <a:pos x="csX15" y="csY15"/>
+                </a:cxn>
+                <a:cxn ang="0">
+                  <a:pos x="csX16" y="csY16"/>
+                </a:cxn>
+                <a:cxn ang="0">
+                  <a:pos x="csX17" y="csY17"/>
+                </a:cxn>
+                <a:cxn ang="0">
+                  <a:pos x="csX18" y="csY18"/>
+                </a:cxn>
+                <a:cxn ang="0">
+                  <a:pos x="csX19" y="csY19"/>
+                </a:cxn>
+                <a:cxn ang="0">
+                  <a:pos x="csX20" y="csY20"/>
+                </a:cxn>
+                <a:cxn ang="0">
+                  <a:pos x="csX21" y="csY21"/>
+                </a:cxn>
+                <a:cxn ang="0">
+                  <a:pos x="csX22" y="csY22"/>
+                </a:cxn>
+                <a:cxn ang="0">
+                  <a:pos x="csX23" y="csY23"/>
+                </a:cxn>
+                <a:cxn ang="0">
+                  <a:pos x="csX24" y="csY24"/>
+                </a:cxn>
+                <a:cxn ang="0">
+                  <a:pos x="csX25" y="csY25"/>
+                </a:cxn>
+                <a:cxn ang="0">
+                  <a:pos x="csX26" y="csY26"/>
+                </a:cxn>
+                <a:cxn ang="0">
+                  <a:pos x="csX27" y="csY27"/>
+                </a:cxn>
+                <a:cxn ang="0">
+                  <a:pos x="csX28" y="csY28"/>
+                </a:cxn>
+                <a:cxn ang="0">
+                  <a:pos x="csX29" y="csY29"/>
+                </a:cxn>
+                <a:cxn ang="0">
+                  <a:pos x="csX30" y="csY30"/>
+                </a:cxn>
+                <a:cxn ang="0">
+                  <a:pos x="csX31" y="csY31"/>
+                </a:cxn>
+                <a:cxn ang="0">
+                  <a:pos x="csX32" y="csY32"/>
+                </a:cxn>
+                <a:cxn ang="0">
+                  <a:pos x="csX33" y="csY33"/>
+                </a:cxn>
+                <a:cxn ang="0">
+                  <a:pos x="csX34" y="csY34"/>
+                </a:cxn>
+                <a:cxn ang="0">
+                  <a:pos x="csX35" y="csY35"/>
+                </a:cxn>
+                <a:cxn ang="0">
+                  <a:pos x="csX36" y="csY36"/>
+                </a:cxn>
+                <a:cxn ang="0">
+                  <a:pos x="csX37" y="csY37"/>
+                </a:cxn>
+                <a:cxn ang="0">
+                  <a:pos x="csX38" y="csY38"/>
+                </a:cxn>
+                <a:cxn ang="0">
+                  <a:pos x="csX39" y="csY39"/>
+                </a:cxn>
+                <a:cxn ang="0">
+                  <a:pos x="csX40" y="csY40"/>
+                </a:cxn>
+                <a:cxn ang="0">
+                  <a:pos x="csX41" y="csY41"/>
+                </a:cxn>
+              </a:cxnLst>
+              <a:rect l="l" t="t" r="r" b="b"/>
+              <a:pathLst>
+                <a:path w="1291905" h="1770078">
+                  <a:moveTo>
+                    <a:pt x="0" y="0"/>
+                  </a:moveTo>
+                  <a:lnTo>
+                    <a:pt x="0" y="478173"/>
+                  </a:lnTo>
+                  <a:lnTo>
+                    <a:pt x="0" y="1291905"/>
+                  </a:lnTo>
+                  <a:lnTo>
+                    <a:pt x="0" y="1770078"/>
+                  </a:lnTo>
+                  <a:lnTo>
+                    <a:pt x="6123" y="1770078"/>
+                  </a:lnTo>
+                  <a:lnTo>
+                    <a:pt x="109381" y="1658008"/>
+                  </a:lnTo>
+                  <a:lnTo>
+                    <a:pt x="212639" y="1770078"/>
+                  </a:lnTo>
+                  <a:lnTo>
+                    <a:pt x="221976" y="1770078"/>
+                  </a:lnTo>
+                  <a:lnTo>
+                    <a:pt x="325234" y="1658008"/>
+                  </a:lnTo>
+                  <a:lnTo>
+                    <a:pt x="428492" y="1770078"/>
+                  </a:lnTo>
+                  <a:lnTo>
+                    <a:pt x="437829" y="1770078"/>
+                  </a:lnTo>
+                  <a:lnTo>
+                    <a:pt x="541087" y="1658008"/>
+                  </a:lnTo>
+                  <a:lnTo>
+                    <a:pt x="644346" y="1770078"/>
+                  </a:lnTo>
+                  <a:lnTo>
+                    <a:pt x="653683" y="1770078"/>
+                  </a:lnTo>
+                  <a:lnTo>
+                    <a:pt x="756941" y="1658008"/>
+                  </a:lnTo>
+                  <a:lnTo>
+                    <a:pt x="860199" y="1770078"/>
+                  </a:lnTo>
+                  <a:lnTo>
+                    <a:pt x="869536" y="1770078"/>
+                  </a:lnTo>
+                  <a:lnTo>
+                    <a:pt x="972794" y="1658008"/>
+                  </a:lnTo>
+                  <a:lnTo>
+                    <a:pt x="1076052" y="1770078"/>
+                  </a:lnTo>
+                  <a:lnTo>
+                    <a:pt x="1085389" y="1770078"/>
+                  </a:lnTo>
+                  <a:lnTo>
+                    <a:pt x="1188647" y="1658008"/>
+                  </a:lnTo>
+                  <a:lnTo>
+                    <a:pt x="1291905" y="1770078"/>
+                  </a:lnTo>
+                  <a:lnTo>
+                    <a:pt x="1291905" y="1291905"/>
+                  </a:lnTo>
+                  <a:lnTo>
+                    <a:pt x="1291905" y="478173"/>
+                  </a:lnTo>
+                  <a:lnTo>
+                    <a:pt x="1291905" y="0"/>
+                  </a:lnTo>
+                  <a:lnTo>
+                    <a:pt x="1188647" y="112070"/>
+                  </a:lnTo>
+                  <a:lnTo>
+                    <a:pt x="1085389" y="0"/>
+                  </a:lnTo>
+                  <a:lnTo>
+                    <a:pt x="1076052" y="0"/>
+                  </a:lnTo>
+                  <a:lnTo>
+                    <a:pt x="972794" y="112070"/>
+                  </a:lnTo>
+                  <a:lnTo>
+                    <a:pt x="869536" y="0"/>
+                  </a:lnTo>
+                  <a:lnTo>
+                    <a:pt x="860199" y="0"/>
+                  </a:lnTo>
+                  <a:lnTo>
+                    <a:pt x="756941" y="112070"/>
+                  </a:lnTo>
+                  <a:lnTo>
+                    <a:pt x="653683" y="0"/>
+                  </a:lnTo>
+                  <a:lnTo>
+                    <a:pt x="644346" y="0"/>
+                  </a:lnTo>
+                  <a:lnTo>
+                    <a:pt x="541087" y="112070"/>
+                  </a:lnTo>
+                  <a:lnTo>
+                    <a:pt x="437829" y="0"/>
+                  </a:lnTo>
+                  <a:lnTo>
+                    <a:pt x="428492" y="0"/>
+                  </a:lnTo>
+                  <a:lnTo>
+                    <a:pt x="325234" y="112070"/>
+                  </a:lnTo>
+                  <a:lnTo>
+                    <a:pt x="221976" y="0"/>
+                  </a:lnTo>
+                  <a:lnTo>
+                    <a:pt x="212639" y="0"/>
+                  </a:lnTo>
+                  <a:lnTo>
+                    <a:pt x="109381" y="112070"/>
+                  </a:lnTo>
+                  <a:lnTo>
+                    <a:pt x="6123" y="0"/>
+                  </a:lnTo>
+                  <a:close/>
+                </a:path>
+              </a:pathLst>
+            </a:custGeom>
+            <a:gradFill flip="none" rotWithShape="1">
+              <a:gsLst>
+                <a:gs pos="100000">
+                  <a:schemeClr val="bg1">
+                    <a:alpha val="46000"/>
+                  </a:schemeClr>
+                </a:gs>
+                <a:gs pos="0">
+                  <a:schemeClr val="accent1">
+                    <a:tint val="23500"/>
+                    <a:satMod val="160000"/>
+                    <a:alpha val="0"/>
+                  </a:schemeClr>
+                </a:gs>
+              </a:gsLst>
+              <a:path path="circle">
+                <a:fillToRect l="100000" t="100000"/>
+              </a:path>
+              <a:tileRect r="-100000" b="-100000"/>
+            </a:gradFill>
+            <a:ln>
+              <a:noFill/>
+            </a:ln>
+          </p:spPr>
+          <p:style>
+            <a:lnRef idx="2">
+              <a:schemeClr val="accent1">
+                <a:shade val="15000"/>
+              </a:schemeClr>
+            </a:lnRef>
+            <a:fillRef idx="1">
+              <a:schemeClr val="accent1"/>
+            </a:fillRef>
+            <a:effectRef idx="0">
+              <a:schemeClr val="accent1"/>
+            </a:effectRef>
+            <a:fontRef idx="minor">
+              <a:schemeClr val="lt1"/>
+            </a:fontRef>
+          </p:style>
+          <p:txBody>
+            <a:bodyPr wrap="square" rtlCol="0" anchor="ctr">
+              <a:noAutofit/>
+            </a:bodyPr>
+            <a:lstStyle/>
+            <a:p>
+              <a:pPr algn="ctr"/>
+              <a:endParaRPr lang="en-US"/>
+            </a:p>
+          </p:txBody>
+        </p:sp>
+        <p:sp>
+          <p:nvSpPr>
+            <p:cNvPr id="6" name="Freeform: Shape 5">
+              <a:extLst>
+                <a:ext uri="{FF2B5EF4-FFF2-40B4-BE49-F238E27FC236}">
+                  <a16:creationId xmlns:a16="http://schemas.microsoft.com/office/drawing/2014/main" id="{6163783E-ABBA-32CC-CDE3-A5BD115DA911}"/>
+                </a:ext>
+              </a:extLst>
+            </p:cNvPr>
+            <p:cNvSpPr/>
+            <p:nvPr/>
+          </p:nvSpPr>
+          <p:spPr>
+            <a:xfrm>
+              <a:off x="3879920" y="3184241"/>
+              <a:ext cx="937260" cy="652164"/>
+            </a:xfrm>
+            <a:custGeom>
+              <a:avLst/>
+              <a:gdLst>
+                <a:gd name="csX0" fmla="*/ 885039 w 1770078"/>
+                <a:gd name="csY0" fmla="*/ 0 h 1291903"/>
+                <a:gd name="csX1" fmla="*/ 1752097 w 1770078"/>
+                <a:gd name="csY1" fmla="*/ 364364 h 1291903"/>
+                <a:gd name="csX2" fmla="*/ 1756386 w 1770078"/>
+                <a:gd name="csY2" fmla="*/ 378854 h 1291903"/>
+                <a:gd name="csX3" fmla="*/ 1770078 w 1770078"/>
+                <a:gd name="csY3" fmla="*/ 378854 h 1291903"/>
+                <a:gd name="csX4" fmla="*/ 1770078 w 1770078"/>
+                <a:gd name="csY4" fmla="*/ 456330 h 1291903"/>
+                <a:gd name="csX5" fmla="*/ 1770078 w 1770078"/>
+                <a:gd name="csY5" fmla="*/ 1291903 h 1291903"/>
+                <a:gd name="csX6" fmla="*/ 0 w 1770078"/>
+                <a:gd name="csY6" fmla="*/ 1291903 h 1291903"/>
+                <a:gd name="csX7" fmla="*/ 0 w 1770078"/>
+                <a:gd name="csY7" fmla="*/ 456330 h 1291903"/>
+                <a:gd name="csX8" fmla="*/ 0 w 1770078"/>
+                <a:gd name="csY8" fmla="*/ 378854 h 1291903"/>
+                <a:gd name="csX9" fmla="*/ 13692 w 1770078"/>
+                <a:gd name="csY9" fmla="*/ 378854 h 1291903"/>
+                <a:gd name="csX10" fmla="*/ 17981 w 1770078"/>
+                <a:gd name="csY10" fmla="*/ 364364 h 1291903"/>
+                <a:gd name="csX11" fmla="*/ 885039 w 1770078"/>
+                <a:gd name="csY11" fmla="*/ 0 h 1291903"/>
+                <a:gd name="csX0" fmla="*/ 885039 w 1770078"/>
+                <a:gd name="csY0" fmla="*/ 0 h 1291903"/>
+                <a:gd name="csX1" fmla="*/ 1752097 w 1770078"/>
+                <a:gd name="csY1" fmla="*/ 364364 h 1291903"/>
+                <a:gd name="csX2" fmla="*/ 1756386 w 1770078"/>
+                <a:gd name="csY2" fmla="*/ 378854 h 1291903"/>
+                <a:gd name="csX3" fmla="*/ 1770078 w 1770078"/>
+                <a:gd name="csY3" fmla="*/ 378854 h 1291903"/>
+                <a:gd name="csX4" fmla="*/ 1770078 w 1770078"/>
+                <a:gd name="csY4" fmla="*/ 456330 h 1291903"/>
+                <a:gd name="csX5" fmla="*/ 1770078 w 1770078"/>
+                <a:gd name="csY5" fmla="*/ 1291903 h 1291903"/>
+                <a:gd name="csX6" fmla="*/ 0 w 1770078"/>
+                <a:gd name="csY6" fmla="*/ 1291903 h 1291903"/>
+                <a:gd name="csX7" fmla="*/ 0 w 1770078"/>
+                <a:gd name="csY7" fmla="*/ 456330 h 1291903"/>
+                <a:gd name="csX8" fmla="*/ 13692 w 1770078"/>
+                <a:gd name="csY8" fmla="*/ 378854 h 1291903"/>
+                <a:gd name="csX9" fmla="*/ 17981 w 1770078"/>
+                <a:gd name="csY9" fmla="*/ 364364 h 1291903"/>
+                <a:gd name="csX10" fmla="*/ 885039 w 1770078"/>
+                <a:gd name="csY10" fmla="*/ 0 h 1291903"/>
+                <a:gd name="csX0" fmla="*/ 885039 w 1770078"/>
+                <a:gd name="csY0" fmla="*/ 0 h 1291903"/>
+                <a:gd name="csX1" fmla="*/ 1752097 w 1770078"/>
+                <a:gd name="csY1" fmla="*/ 364364 h 1291903"/>
+                <a:gd name="csX2" fmla="*/ 1756386 w 1770078"/>
+                <a:gd name="csY2" fmla="*/ 378854 h 1291903"/>
+                <a:gd name="csX3" fmla="*/ 1770078 w 1770078"/>
+                <a:gd name="csY3" fmla="*/ 378854 h 1291903"/>
+                <a:gd name="csX4" fmla="*/ 1770078 w 1770078"/>
+                <a:gd name="csY4" fmla="*/ 456330 h 1291903"/>
+                <a:gd name="csX5" fmla="*/ 1770078 w 1770078"/>
+                <a:gd name="csY5" fmla="*/ 1291903 h 1291903"/>
+                <a:gd name="csX6" fmla="*/ 0 w 1770078"/>
+                <a:gd name="csY6" fmla="*/ 1291903 h 1291903"/>
+                <a:gd name="csX7" fmla="*/ 0 w 1770078"/>
+                <a:gd name="csY7" fmla="*/ 456330 h 1291903"/>
+                <a:gd name="csX8" fmla="*/ 17981 w 1770078"/>
+                <a:gd name="csY8" fmla="*/ 364364 h 1291903"/>
+                <a:gd name="csX9" fmla="*/ 885039 w 1770078"/>
+                <a:gd name="csY9" fmla="*/ 0 h 1291903"/>
+                <a:gd name="csX0" fmla="*/ 885039 w 1770078"/>
+                <a:gd name="csY0" fmla="*/ 0 h 1291903"/>
+                <a:gd name="csX1" fmla="*/ 1752097 w 1770078"/>
+                <a:gd name="csY1" fmla="*/ 364364 h 1291903"/>
+                <a:gd name="csX2" fmla="*/ 1756386 w 1770078"/>
+                <a:gd name="csY2" fmla="*/ 378854 h 1291903"/>
+                <a:gd name="csX3" fmla="*/ 1770078 w 1770078"/>
+                <a:gd name="csY3" fmla="*/ 456330 h 1291903"/>
+                <a:gd name="csX4" fmla="*/ 1770078 w 1770078"/>
+                <a:gd name="csY4" fmla="*/ 1291903 h 1291903"/>
+                <a:gd name="csX5" fmla="*/ 0 w 1770078"/>
+                <a:gd name="csY5" fmla="*/ 1291903 h 1291903"/>
+                <a:gd name="csX6" fmla="*/ 0 w 1770078"/>
+                <a:gd name="csY6" fmla="*/ 456330 h 1291903"/>
+                <a:gd name="csX7" fmla="*/ 17981 w 1770078"/>
+                <a:gd name="csY7" fmla="*/ 364364 h 1291903"/>
+                <a:gd name="csX8" fmla="*/ 885039 w 1770078"/>
+                <a:gd name="csY8" fmla="*/ 0 h 1291903"/>
+                <a:gd name="csX0" fmla="*/ 885039 w 1770078"/>
+                <a:gd name="csY0" fmla="*/ 0 h 1291903"/>
+                <a:gd name="csX1" fmla="*/ 1752097 w 1770078"/>
+                <a:gd name="csY1" fmla="*/ 364364 h 1291903"/>
+                <a:gd name="csX2" fmla="*/ 1770078 w 1770078"/>
+                <a:gd name="csY2" fmla="*/ 456330 h 1291903"/>
+                <a:gd name="csX3" fmla="*/ 1770078 w 1770078"/>
+                <a:gd name="csY3" fmla="*/ 1291903 h 1291903"/>
+                <a:gd name="csX4" fmla="*/ 0 w 1770078"/>
+                <a:gd name="csY4" fmla="*/ 1291903 h 1291903"/>
+                <a:gd name="csX5" fmla="*/ 0 w 1770078"/>
+                <a:gd name="csY5" fmla="*/ 456330 h 1291903"/>
+                <a:gd name="csX6" fmla="*/ 17981 w 1770078"/>
+                <a:gd name="csY6" fmla="*/ 364364 h 1291903"/>
+                <a:gd name="csX7" fmla="*/ 885039 w 1770078"/>
+                <a:gd name="csY7" fmla="*/ 0 h 1291903"/>
+              </a:gdLst>
+              <a:ahLst/>
+              <a:cxnLst>
+                <a:cxn ang="0">
+                  <a:pos x="csX0" y="csY0"/>
+                </a:cxn>
+                <a:cxn ang="0">
+                  <a:pos x="csX1" y="csY1"/>
+                </a:cxn>
+                <a:cxn ang="0">
+                  <a:pos x="csX2" y="csY2"/>
+                </a:cxn>
+                <a:cxn ang="0">
+                  <a:pos x="csX3" y="csY3"/>
+                </a:cxn>
+                <a:cxn ang="0">
+                  <a:pos x="csX4" y="csY4"/>
+                </a:cxn>
+                <a:cxn ang="0">
+                  <a:pos x="csX5" y="csY5"/>
+                </a:cxn>
+                <a:cxn ang="0">
+                  <a:pos x="csX6" y="csY6"/>
+                </a:cxn>
+                <a:cxn ang="0">
+                  <a:pos x="csX7" y="csY7"/>
+                </a:cxn>
+              </a:cxnLst>
+              <a:rect l="l" t="t" r="r" b="b"/>
+              <a:pathLst>
+                <a:path w="1770078" h="1291903">
+                  <a:moveTo>
+                    <a:pt x="885039" y="0"/>
+                  </a:moveTo>
+                  <a:cubicBezTo>
+                    <a:pt x="1312734" y="0"/>
+                    <a:pt x="1669571" y="156422"/>
+                    <a:pt x="1752097" y="364364"/>
+                  </a:cubicBezTo>
+                  <a:lnTo>
+                    <a:pt x="1770078" y="456330"/>
+                  </a:lnTo>
+                  <a:lnTo>
+                    <a:pt x="1770078" y="1291903"/>
+                  </a:lnTo>
+                  <a:lnTo>
+                    <a:pt x="0" y="1291903"/>
+                  </a:lnTo>
+                  <a:lnTo>
+                    <a:pt x="0" y="456330"/>
+                  </a:lnTo>
+                  <a:lnTo>
+                    <a:pt x="17981" y="364364"/>
+                  </a:lnTo>
+                  <a:cubicBezTo>
+                    <a:pt x="100507" y="156422"/>
+                    <a:pt x="457344" y="0"/>
+                    <a:pt x="885039" y="0"/>
+                  </a:cubicBezTo>
+                  <a:close/>
+                </a:path>
+              </a:pathLst>
+            </a:custGeom>
+            <a:gradFill flip="none" rotWithShape="1">
+              <a:gsLst>
+                <a:gs pos="100000">
+                  <a:schemeClr val="bg1">
+                    <a:alpha val="46000"/>
+                  </a:schemeClr>
+                </a:gs>
+                <a:gs pos="0">
+                  <a:schemeClr val="accent1">
+                    <a:tint val="23500"/>
+                    <a:satMod val="160000"/>
+                    <a:alpha val="0"/>
+                  </a:schemeClr>
+                </a:gs>
+              </a:gsLst>
+              <a:path path="circle">
+                <a:fillToRect l="100000" t="100000"/>
+              </a:path>
+              <a:tileRect r="-100000" b="-100000"/>
+            </a:gradFill>
+            <a:ln>
+              <a:noFill/>
+            </a:ln>
+          </p:spPr>
+          <p:style>
+            <a:lnRef idx="2">
+              <a:schemeClr val="accent1">
+                <a:shade val="15000"/>
+              </a:schemeClr>
+            </a:lnRef>
+            <a:fillRef idx="1">
+              <a:schemeClr val="accent1"/>
+            </a:fillRef>
+            <a:effectRef idx="0">
+              <a:schemeClr val="accent1"/>
+            </a:effectRef>
+            <a:fontRef idx="minor">
+              <a:schemeClr val="lt1"/>
+            </a:fontRef>
+          </p:style>
+          <p:txBody>
+            <a:bodyPr wrap="square" rtlCol="0" anchor="ctr">
+              <a:noAutofit/>
+            </a:bodyPr>
+            <a:lstStyle/>
+            <a:p>
+              <a:pPr algn="ctr"/>
+              <a:endParaRPr lang="en-US"/>
+            </a:p>
+          </p:txBody>
+        </p:sp>
+        <p:sp>
+          <p:nvSpPr>
+            <p:cNvPr id="7" name="Freeform: Shape 6">
+              <a:extLst>
+                <a:ext uri="{FF2B5EF4-FFF2-40B4-BE49-F238E27FC236}">
+                  <a16:creationId xmlns:a16="http://schemas.microsoft.com/office/drawing/2014/main" id="{9C539027-E51B-BF43-E640-102FDFA8D418}"/>
+                </a:ext>
+              </a:extLst>
+            </p:cNvPr>
+            <p:cNvSpPr/>
+            <p:nvPr/>
+          </p:nvSpPr>
+          <p:spPr>
+            <a:xfrm>
+              <a:off x="6235672" y="3184241"/>
+              <a:ext cx="937260" cy="652165"/>
+            </a:xfrm>
+            <a:custGeom>
+              <a:avLst/>
+              <a:gdLst>
+                <a:gd name="csX0" fmla="*/ 0 w 937260"/>
+                <a:gd name="csY0" fmla="*/ 0 h 652165"/>
+                <a:gd name="csX1" fmla="*/ 179 w 937260"/>
+                <a:gd name="csY1" fmla="*/ 0 h 652165"/>
+                <a:gd name="csX2" fmla="*/ 116373 w 937260"/>
+                <a:gd name="csY2" fmla="*/ 31552 h 652165"/>
+                <a:gd name="csX3" fmla="*/ 468630 w 937260"/>
+                <a:gd name="csY3" fmla="*/ 67131 h 652165"/>
+                <a:gd name="csX4" fmla="*/ 820887 w 937260"/>
+                <a:gd name="csY4" fmla="*/ 31552 h 652165"/>
+                <a:gd name="csX5" fmla="*/ 937081 w 937260"/>
+                <a:gd name="csY5" fmla="*/ 0 h 652165"/>
+                <a:gd name="csX6" fmla="*/ 937260 w 937260"/>
+                <a:gd name="csY6" fmla="*/ 0 h 652165"/>
+                <a:gd name="csX7" fmla="*/ 937260 w 937260"/>
+                <a:gd name="csY7" fmla="*/ 652165 h 652165"/>
+                <a:gd name="csX8" fmla="*/ 937078 w 937260"/>
+                <a:gd name="csY8" fmla="*/ 652165 h 652165"/>
+                <a:gd name="csX9" fmla="*/ 820887 w 937260"/>
+                <a:gd name="csY9" fmla="*/ 620614 h 652165"/>
+                <a:gd name="csX10" fmla="*/ 468630 w 937260"/>
+                <a:gd name="csY10" fmla="*/ 585035 h 652165"/>
+                <a:gd name="csX11" fmla="*/ 116373 w 937260"/>
+                <a:gd name="csY11" fmla="*/ 620614 h 652165"/>
+                <a:gd name="csX12" fmla="*/ 183 w 937260"/>
+                <a:gd name="csY12" fmla="*/ 652165 h 652165"/>
+                <a:gd name="csX13" fmla="*/ 0 w 937260"/>
+                <a:gd name="csY13" fmla="*/ 652165 h 652165"/>
+              </a:gdLst>
+              <a:ahLst/>
+              <a:cxnLst>
+                <a:cxn ang="0">
+                  <a:pos x="csX0" y="csY0"/>
+                </a:cxn>
+                <a:cxn ang="0">
+                  <a:pos x="csX1" y="csY1"/>
+                </a:cxn>
+                <a:cxn ang="0">
+                  <a:pos x="csX2" y="csY2"/>
+                </a:cxn>
+                <a:cxn ang="0">
+                  <a:pos x="csX3" y="csY3"/>
+                </a:cxn>
+                <a:cxn ang="0">
+                  <a:pos x="csX4" y="csY4"/>
+                </a:cxn>
+                <a:cxn ang="0">
+                  <a:pos x="csX5" y="csY5"/>
+                </a:cxn>
+                <a:cxn ang="0">
+                  <a:pos x="csX6" y="csY6"/>
+                </a:cxn>
+                <a:cxn ang="0">
+                  <a:pos x="csX7" y="csY7"/>
+                </a:cxn>
+                <a:cxn ang="0">
+                  <a:pos x="csX8" y="csY8"/>
+                </a:cxn>
+                <a:cxn ang="0">
+                  <a:pos x="csX9" y="csY9"/>
+                </a:cxn>
+                <a:cxn ang="0">
+                  <a:pos x="csX10" y="csY10"/>
+                </a:cxn>
+                <a:cxn ang="0">
+                  <a:pos x="csX11" y="csY11"/>
+                </a:cxn>
+                <a:cxn ang="0">
+                  <a:pos x="csX12" y="csY12"/>
+                </a:cxn>
+                <a:cxn ang="0">
+                  <a:pos x="csX13" y="csY13"/>
+                </a:cxn>
+              </a:cxnLst>
+              <a:rect l="l" t="t" r="r" b="b"/>
+              <a:pathLst>
+                <a:path w="937260" h="652165">
+                  <a:moveTo>
+                    <a:pt x="0" y="0"/>
+                  </a:moveTo>
+                  <a:lnTo>
+                    <a:pt x="179" y="0"/>
+                  </a:lnTo>
+                  <a:lnTo>
+                    <a:pt x="116373" y="31552"/>
+                  </a:lnTo>
+                  <a:cubicBezTo>
+                    <a:pt x="224643" y="54462"/>
+                    <a:pt x="343679" y="67131"/>
+                    <a:pt x="468630" y="67131"/>
+                  </a:cubicBezTo>
+                  <a:cubicBezTo>
+                    <a:pt x="593581" y="67131"/>
+                    <a:pt x="712618" y="54462"/>
+                    <a:pt x="820887" y="31552"/>
+                  </a:cubicBezTo>
+                  <a:lnTo>
+                    <a:pt x="937081" y="0"/>
+                  </a:lnTo>
+                  <a:lnTo>
+                    <a:pt x="937260" y="0"/>
+                  </a:lnTo>
+                  <a:lnTo>
+                    <a:pt x="937260" y="652165"/>
+                  </a:lnTo>
+                  <a:lnTo>
+                    <a:pt x="937078" y="652165"/>
+                  </a:lnTo>
+                  <a:lnTo>
+                    <a:pt x="820887" y="620614"/>
+                  </a:lnTo>
+                  <a:cubicBezTo>
+                    <a:pt x="712618" y="597704"/>
+                    <a:pt x="593581" y="585035"/>
+                    <a:pt x="468630" y="585035"/>
+                  </a:cubicBezTo>
+                  <a:cubicBezTo>
+                    <a:pt x="343679" y="585035"/>
+                    <a:pt x="224643" y="597704"/>
+                    <a:pt x="116373" y="620614"/>
+                  </a:cubicBezTo>
+                  <a:lnTo>
+                    <a:pt x="183" y="652165"/>
+                  </a:lnTo>
+                  <a:lnTo>
+                    <a:pt x="0" y="652165"/>
+                  </a:lnTo>
+                  <a:close/>
+                </a:path>
+              </a:pathLst>
+            </a:custGeom>
+            <a:gradFill flip="none" rotWithShape="1">
+              <a:gsLst>
+                <a:gs pos="100000">
+                  <a:schemeClr val="bg1">
+                    <a:alpha val="46000"/>
+                  </a:schemeClr>
+                </a:gs>
+                <a:gs pos="0">
+                  <a:schemeClr val="accent1">
+                    <a:tint val="23500"/>
+                    <a:satMod val="160000"/>
+                    <a:alpha val="0"/>
+                  </a:schemeClr>
+                </a:gs>
+              </a:gsLst>
+              <a:path path="circle">
+                <a:fillToRect l="100000" t="100000"/>
+              </a:path>
+              <a:tileRect r="-100000" b="-100000"/>
+            </a:gradFill>
+            <a:ln>
+              <a:noFill/>
+            </a:ln>
+          </p:spPr>
+          <p:style>
+            <a:lnRef idx="2">
+              <a:schemeClr val="accent1">
+                <a:shade val="15000"/>
+              </a:schemeClr>
+            </a:lnRef>
+            <a:fillRef idx="1">
+              <a:schemeClr val="accent1"/>
+            </a:fillRef>
+            <a:effectRef idx="0">
+              <a:schemeClr val="accent1"/>
+            </a:effectRef>
+            <a:fontRef idx="minor">
+              <a:schemeClr val="lt1"/>
+            </a:fontRef>
+          </p:style>
+          <p:txBody>
+            <a:bodyPr wrap="square" rtlCol="0" anchor="ctr">
+              <a:noAutofit/>
+            </a:bodyPr>
+            <a:lstStyle/>
+            <a:p>
+              <a:pPr algn="ctr"/>
+              <a:endParaRPr lang="en-US"/>
+            </a:p>
+          </p:txBody>
+        </p:sp>
+      </p:grpSp>
+      <p:grpSp>
+        <p:nvGrpSpPr>
+          <p:cNvPr id="17" name="Group 16">
             <a:extLst>
               <a:ext uri="{FF2B5EF4-FFF2-40B4-BE49-F238E27FC236}">
-                <a16:creationId xmlns:a16="http://schemas.microsoft.com/office/drawing/2014/main" id="{93758F67-FC8D-E4E6-B3F8-C0E6FDBC9C48}"/>
+                <a16:creationId xmlns:a16="http://schemas.microsoft.com/office/drawing/2014/main" id="{9C815764-5201-F8E9-F637-1FAA86E70FD6}"/>
               </a:ext>
             </a:extLst>
           </p:cNvPr>
-          <p:cNvSpPr txBox="1"/>
+          <p:cNvGrpSpPr/>
           <p:nvPr/>
-        </p:nvSpPr>
-        <p:spPr>
+        </p:nvGrpSpPr>
+        <p:grpSpPr>
           <a:xfrm>
-            <a:off x="6290248" y="2648739"/>
-            <a:ext cx="274434" cy="369332"/>
+            <a:off x="2539535" y="3055976"/>
+            <a:ext cx="6091564" cy="652166"/>
+            <a:chOff x="2539535" y="4287476"/>
+            <a:chExt cx="6091564" cy="652166"/>
           </a:xfrm>
-          <a:prstGeom prst="rect">
-            <a:avLst/>
-          </a:prstGeom>
-          <a:noFill/>
-        </p:spPr>
-        <p:txBody>
-          <a:bodyPr wrap="none" rtlCol="0">
-            <a:spAutoFit/>
-          </a:bodyPr>
-          <a:lstStyle/>
-          <a:p>
-            <a:r>
-              <a:rPr lang="en-US" dirty="0"/>
-              <a:t>s</a:t>
-            </a:r>
-          </a:p>
-        </p:txBody>
-      </p:sp>
+        </p:grpSpPr>
+        <p:sp>
+          <p:nvSpPr>
+            <p:cNvPr id="8" name="Rectangle: Rounded Corners 7">
+              <a:extLst>
+                <a:ext uri="{FF2B5EF4-FFF2-40B4-BE49-F238E27FC236}">
+                  <a16:creationId xmlns:a16="http://schemas.microsoft.com/office/drawing/2014/main" id="{4F1D700E-B6A8-D301-EA7F-6854E39C7931}"/>
+                </a:ext>
+              </a:extLst>
+            </p:cNvPr>
+            <p:cNvSpPr/>
+            <p:nvPr/>
+          </p:nvSpPr>
+          <p:spPr>
+            <a:xfrm>
+              <a:off x="2539535" y="4287476"/>
+              <a:ext cx="937260" cy="652166"/>
+            </a:xfrm>
+            <a:prstGeom prst="roundRect">
+              <a:avLst/>
+            </a:prstGeom>
+            <a:gradFill flip="none" rotWithShape="1">
+              <a:gsLst>
+                <a:gs pos="78000">
+                  <a:schemeClr val="bg1">
+                    <a:alpha val="0"/>
+                  </a:schemeClr>
+                </a:gs>
+                <a:gs pos="0">
+                  <a:srgbClr val="7030A0"/>
+                </a:gs>
+              </a:gsLst>
+              <a:path path="circle">
+                <a:fillToRect l="100000" b="100000"/>
+              </a:path>
+              <a:tileRect t="-100000" r="-100000"/>
+            </a:gradFill>
+            <a:ln>
+              <a:noFill/>
+            </a:ln>
+          </p:spPr>
+          <p:style>
+            <a:lnRef idx="2">
+              <a:schemeClr val="accent1">
+                <a:shade val="15000"/>
+              </a:schemeClr>
+            </a:lnRef>
+            <a:fillRef idx="1">
+              <a:schemeClr val="accent1"/>
+            </a:fillRef>
+            <a:effectRef idx="0">
+              <a:schemeClr val="accent1"/>
+            </a:effectRef>
+            <a:fontRef idx="minor">
+              <a:schemeClr val="lt1"/>
+            </a:fontRef>
+          </p:style>
+          <p:txBody>
+            <a:bodyPr rtlCol="0" anchor="ctr"/>
+            <a:lstStyle/>
+            <a:p>
+              <a:pPr algn="ctr"/>
+              <a:endParaRPr lang="en-US"/>
+            </a:p>
+          </p:txBody>
+        </p:sp>
+        <p:sp>
+          <p:nvSpPr>
+            <p:cNvPr id="10" name="Freeform: Shape 9">
+              <a:extLst>
+                <a:ext uri="{FF2B5EF4-FFF2-40B4-BE49-F238E27FC236}">
+                  <a16:creationId xmlns:a16="http://schemas.microsoft.com/office/drawing/2014/main" id="{4202D5CA-B4A9-A576-53A1-B5A940B8B139}"/>
+                </a:ext>
+              </a:extLst>
+            </p:cNvPr>
+            <p:cNvSpPr/>
+            <p:nvPr/>
+          </p:nvSpPr>
+          <p:spPr>
+            <a:xfrm>
+              <a:off x="7698281" y="4287477"/>
+              <a:ext cx="932818" cy="652165"/>
+            </a:xfrm>
+            <a:custGeom>
+              <a:avLst/>
+              <a:gdLst>
+                <a:gd name="csX0" fmla="*/ 0 w 1761688"/>
+                <a:gd name="csY0" fmla="*/ 0 h 1291904"/>
+                <a:gd name="csX1" fmla="*/ 75501 w 1761688"/>
+                <a:gd name="csY1" fmla="*/ 0 h 1291904"/>
+                <a:gd name="csX2" fmla="*/ 1686187 w 1761688"/>
+                <a:gd name="csY2" fmla="*/ 0 h 1291904"/>
+                <a:gd name="csX3" fmla="*/ 1761688 w 1761688"/>
+                <a:gd name="csY3" fmla="*/ 0 h 1291904"/>
+                <a:gd name="csX4" fmla="*/ 1761688 w 1761688"/>
+                <a:gd name="csY4" fmla="*/ 102765 h 1291904"/>
+                <a:gd name="csX5" fmla="*/ 1686187 w 1761688"/>
+                <a:gd name="csY5" fmla="*/ 102765 h 1291904"/>
+                <a:gd name="csX6" fmla="*/ 1686187 w 1761688"/>
+                <a:gd name="csY6" fmla="*/ 1189139 h 1291904"/>
+                <a:gd name="csX7" fmla="*/ 1761688 w 1761688"/>
+                <a:gd name="csY7" fmla="*/ 1189139 h 1291904"/>
+                <a:gd name="csX8" fmla="*/ 1761688 w 1761688"/>
+                <a:gd name="csY8" fmla="*/ 1291904 h 1291904"/>
+                <a:gd name="csX9" fmla="*/ 1686187 w 1761688"/>
+                <a:gd name="csY9" fmla="*/ 1291904 h 1291904"/>
+                <a:gd name="csX10" fmla="*/ 75501 w 1761688"/>
+                <a:gd name="csY10" fmla="*/ 1291904 h 1291904"/>
+                <a:gd name="csX11" fmla="*/ 0 w 1761688"/>
+                <a:gd name="csY11" fmla="*/ 1291904 h 1291904"/>
+                <a:gd name="csX12" fmla="*/ 0 w 1761688"/>
+                <a:gd name="csY12" fmla="*/ 1189139 h 1291904"/>
+                <a:gd name="csX13" fmla="*/ 75501 w 1761688"/>
+                <a:gd name="csY13" fmla="*/ 1189139 h 1291904"/>
+                <a:gd name="csX14" fmla="*/ 75501 w 1761688"/>
+                <a:gd name="csY14" fmla="*/ 102765 h 1291904"/>
+                <a:gd name="csX15" fmla="*/ 0 w 1761688"/>
+                <a:gd name="csY15" fmla="*/ 102765 h 1291904"/>
+              </a:gdLst>
+              <a:ahLst/>
+              <a:cxnLst>
+                <a:cxn ang="0">
+                  <a:pos x="csX0" y="csY0"/>
+                </a:cxn>
+                <a:cxn ang="0">
+                  <a:pos x="csX1" y="csY1"/>
+                </a:cxn>
+                <a:cxn ang="0">
+                  <a:pos x="csX2" y="csY2"/>
+                </a:cxn>
+                <a:cxn ang="0">
+                  <a:pos x="csX3" y="csY3"/>
+                </a:cxn>
+                <a:cxn ang="0">
+                  <a:pos x="csX4" y="csY4"/>
+                </a:cxn>
+                <a:cxn ang="0">
+                  <a:pos x="csX5" y="csY5"/>
+                </a:cxn>
+                <a:cxn ang="0">
+                  <a:pos x="csX6" y="csY6"/>
+                </a:cxn>
+                <a:cxn ang="0">
+                  <a:pos x="csX7" y="csY7"/>
+                </a:cxn>
+                <a:cxn ang="0">
+                  <a:pos x="csX8" y="csY8"/>
+                </a:cxn>
+                <a:cxn ang="0">
+                  <a:pos x="csX9" y="csY9"/>
+                </a:cxn>
+                <a:cxn ang="0">
+                  <a:pos x="csX10" y="csY10"/>
+                </a:cxn>
+                <a:cxn ang="0">
+                  <a:pos x="csX11" y="csY11"/>
+                </a:cxn>
+                <a:cxn ang="0">
+                  <a:pos x="csX12" y="csY12"/>
+                </a:cxn>
+                <a:cxn ang="0">
+                  <a:pos x="csX13" y="csY13"/>
+                </a:cxn>
+                <a:cxn ang="0">
+                  <a:pos x="csX14" y="csY14"/>
+                </a:cxn>
+                <a:cxn ang="0">
+                  <a:pos x="csX15" y="csY15"/>
+                </a:cxn>
+              </a:cxnLst>
+              <a:rect l="l" t="t" r="r" b="b"/>
+              <a:pathLst>
+                <a:path w="1761688" h="1291904">
+                  <a:moveTo>
+                    <a:pt x="0" y="0"/>
+                  </a:moveTo>
+                  <a:lnTo>
+                    <a:pt x="75501" y="0"/>
+                  </a:lnTo>
+                  <a:lnTo>
+                    <a:pt x="1686187" y="0"/>
+                  </a:lnTo>
+                  <a:lnTo>
+                    <a:pt x="1761688" y="0"/>
+                  </a:lnTo>
+                  <a:lnTo>
+                    <a:pt x="1761688" y="102765"/>
+                  </a:lnTo>
+                  <a:lnTo>
+                    <a:pt x="1686187" y="102765"/>
+                  </a:lnTo>
+                  <a:lnTo>
+                    <a:pt x="1686187" y="1189139"/>
+                  </a:lnTo>
+                  <a:lnTo>
+                    <a:pt x="1761688" y="1189139"/>
+                  </a:lnTo>
+                  <a:lnTo>
+                    <a:pt x="1761688" y="1291904"/>
+                  </a:lnTo>
+                  <a:lnTo>
+                    <a:pt x="1686187" y="1291904"/>
+                  </a:lnTo>
+                  <a:lnTo>
+                    <a:pt x="75501" y="1291904"/>
+                  </a:lnTo>
+                  <a:lnTo>
+                    <a:pt x="0" y="1291904"/>
+                  </a:lnTo>
+                  <a:lnTo>
+                    <a:pt x="0" y="1189139"/>
+                  </a:lnTo>
+                  <a:lnTo>
+                    <a:pt x="75501" y="1189139"/>
+                  </a:lnTo>
+                  <a:lnTo>
+                    <a:pt x="75501" y="102765"/>
+                  </a:lnTo>
+                  <a:lnTo>
+                    <a:pt x="0" y="102765"/>
+                  </a:lnTo>
+                  <a:close/>
+                </a:path>
+              </a:pathLst>
+            </a:custGeom>
+            <a:gradFill flip="none" rotWithShape="1">
+              <a:gsLst>
+                <a:gs pos="76000">
+                  <a:schemeClr val="bg1">
+                    <a:alpha val="0"/>
+                  </a:schemeClr>
+                </a:gs>
+                <a:gs pos="24000">
+                  <a:srgbClr val="FFC000"/>
+                </a:gs>
+              </a:gsLst>
+              <a:path path="circle">
+                <a:fillToRect l="100000" b="100000"/>
+              </a:path>
+              <a:tileRect t="-100000" r="-100000"/>
+            </a:gradFill>
+            <a:ln>
+              <a:noFill/>
+            </a:ln>
+          </p:spPr>
+          <p:style>
+            <a:lnRef idx="2">
+              <a:schemeClr val="accent1">
+                <a:shade val="15000"/>
+              </a:schemeClr>
+            </a:lnRef>
+            <a:fillRef idx="1">
+              <a:schemeClr val="accent1"/>
+            </a:fillRef>
+            <a:effectRef idx="0">
+              <a:schemeClr val="accent1"/>
+            </a:effectRef>
+            <a:fontRef idx="minor">
+              <a:schemeClr val="lt1"/>
+            </a:fontRef>
+          </p:style>
+          <p:txBody>
+            <a:bodyPr wrap="square" rtlCol="0" anchor="ctr">
+              <a:noAutofit/>
+            </a:bodyPr>
+            <a:lstStyle/>
+            <a:p>
+              <a:pPr algn="ctr"/>
+              <a:endParaRPr lang="en-US"/>
+            </a:p>
+          </p:txBody>
+        </p:sp>
+        <p:sp>
+          <p:nvSpPr>
+            <p:cNvPr id="11" name="Freeform: Shape 10">
+              <a:extLst>
+                <a:ext uri="{FF2B5EF4-FFF2-40B4-BE49-F238E27FC236}">
+                  <a16:creationId xmlns:a16="http://schemas.microsoft.com/office/drawing/2014/main" id="{B87719E0-411A-C23C-7444-B0244385B9F5}"/>
+                </a:ext>
+              </a:extLst>
+            </p:cNvPr>
+            <p:cNvSpPr/>
+            <p:nvPr/>
+          </p:nvSpPr>
+          <p:spPr>
+            <a:xfrm rot="16200000" flipV="1">
+              <a:off x="5198786" y="4144929"/>
+              <a:ext cx="652164" cy="937260"/>
+            </a:xfrm>
+            <a:custGeom>
+              <a:avLst/>
+              <a:gdLst>
+                <a:gd name="csX0" fmla="*/ 0 w 1291905"/>
+                <a:gd name="csY0" fmla="*/ 0 h 1770078"/>
+                <a:gd name="csX1" fmla="*/ 0 w 1291905"/>
+                <a:gd name="csY1" fmla="*/ 478173 h 1770078"/>
+                <a:gd name="csX2" fmla="*/ 0 w 1291905"/>
+                <a:gd name="csY2" fmla="*/ 1291905 h 1770078"/>
+                <a:gd name="csX3" fmla="*/ 0 w 1291905"/>
+                <a:gd name="csY3" fmla="*/ 1770078 h 1770078"/>
+                <a:gd name="csX4" fmla="*/ 6123 w 1291905"/>
+                <a:gd name="csY4" fmla="*/ 1770078 h 1770078"/>
+                <a:gd name="csX5" fmla="*/ 109381 w 1291905"/>
+                <a:gd name="csY5" fmla="*/ 1658008 h 1770078"/>
+                <a:gd name="csX6" fmla="*/ 212639 w 1291905"/>
+                <a:gd name="csY6" fmla="*/ 1770078 h 1770078"/>
+                <a:gd name="csX7" fmla="*/ 221976 w 1291905"/>
+                <a:gd name="csY7" fmla="*/ 1770078 h 1770078"/>
+                <a:gd name="csX8" fmla="*/ 325234 w 1291905"/>
+                <a:gd name="csY8" fmla="*/ 1658008 h 1770078"/>
+                <a:gd name="csX9" fmla="*/ 428492 w 1291905"/>
+                <a:gd name="csY9" fmla="*/ 1770078 h 1770078"/>
+                <a:gd name="csX10" fmla="*/ 437829 w 1291905"/>
+                <a:gd name="csY10" fmla="*/ 1770078 h 1770078"/>
+                <a:gd name="csX11" fmla="*/ 541087 w 1291905"/>
+                <a:gd name="csY11" fmla="*/ 1658008 h 1770078"/>
+                <a:gd name="csX12" fmla="*/ 644346 w 1291905"/>
+                <a:gd name="csY12" fmla="*/ 1770078 h 1770078"/>
+                <a:gd name="csX13" fmla="*/ 653683 w 1291905"/>
+                <a:gd name="csY13" fmla="*/ 1770078 h 1770078"/>
+                <a:gd name="csX14" fmla="*/ 756941 w 1291905"/>
+                <a:gd name="csY14" fmla="*/ 1658008 h 1770078"/>
+                <a:gd name="csX15" fmla="*/ 860199 w 1291905"/>
+                <a:gd name="csY15" fmla="*/ 1770078 h 1770078"/>
+                <a:gd name="csX16" fmla="*/ 869536 w 1291905"/>
+                <a:gd name="csY16" fmla="*/ 1770078 h 1770078"/>
+                <a:gd name="csX17" fmla="*/ 972794 w 1291905"/>
+                <a:gd name="csY17" fmla="*/ 1658008 h 1770078"/>
+                <a:gd name="csX18" fmla="*/ 1076052 w 1291905"/>
+                <a:gd name="csY18" fmla="*/ 1770078 h 1770078"/>
+                <a:gd name="csX19" fmla="*/ 1085389 w 1291905"/>
+                <a:gd name="csY19" fmla="*/ 1770078 h 1770078"/>
+                <a:gd name="csX20" fmla="*/ 1188647 w 1291905"/>
+                <a:gd name="csY20" fmla="*/ 1658008 h 1770078"/>
+                <a:gd name="csX21" fmla="*/ 1291905 w 1291905"/>
+                <a:gd name="csY21" fmla="*/ 1770078 h 1770078"/>
+                <a:gd name="csX22" fmla="*/ 1291905 w 1291905"/>
+                <a:gd name="csY22" fmla="*/ 1291905 h 1770078"/>
+                <a:gd name="csX23" fmla="*/ 1291905 w 1291905"/>
+                <a:gd name="csY23" fmla="*/ 478173 h 1770078"/>
+                <a:gd name="csX24" fmla="*/ 1291905 w 1291905"/>
+                <a:gd name="csY24" fmla="*/ 0 h 1770078"/>
+                <a:gd name="csX25" fmla="*/ 1188647 w 1291905"/>
+                <a:gd name="csY25" fmla="*/ 112070 h 1770078"/>
+                <a:gd name="csX26" fmla="*/ 1085389 w 1291905"/>
+                <a:gd name="csY26" fmla="*/ 0 h 1770078"/>
+                <a:gd name="csX27" fmla="*/ 1076052 w 1291905"/>
+                <a:gd name="csY27" fmla="*/ 0 h 1770078"/>
+                <a:gd name="csX28" fmla="*/ 972794 w 1291905"/>
+                <a:gd name="csY28" fmla="*/ 112070 h 1770078"/>
+                <a:gd name="csX29" fmla="*/ 869536 w 1291905"/>
+                <a:gd name="csY29" fmla="*/ 0 h 1770078"/>
+                <a:gd name="csX30" fmla="*/ 860199 w 1291905"/>
+                <a:gd name="csY30" fmla="*/ 0 h 1770078"/>
+                <a:gd name="csX31" fmla="*/ 756941 w 1291905"/>
+                <a:gd name="csY31" fmla="*/ 112070 h 1770078"/>
+                <a:gd name="csX32" fmla="*/ 653683 w 1291905"/>
+                <a:gd name="csY32" fmla="*/ 0 h 1770078"/>
+                <a:gd name="csX33" fmla="*/ 644346 w 1291905"/>
+                <a:gd name="csY33" fmla="*/ 0 h 1770078"/>
+                <a:gd name="csX34" fmla="*/ 541087 w 1291905"/>
+                <a:gd name="csY34" fmla="*/ 112070 h 1770078"/>
+                <a:gd name="csX35" fmla="*/ 437829 w 1291905"/>
+                <a:gd name="csY35" fmla="*/ 0 h 1770078"/>
+                <a:gd name="csX36" fmla="*/ 428492 w 1291905"/>
+                <a:gd name="csY36" fmla="*/ 0 h 1770078"/>
+                <a:gd name="csX37" fmla="*/ 325234 w 1291905"/>
+                <a:gd name="csY37" fmla="*/ 112070 h 1770078"/>
+                <a:gd name="csX38" fmla="*/ 221976 w 1291905"/>
+                <a:gd name="csY38" fmla="*/ 0 h 1770078"/>
+                <a:gd name="csX39" fmla="*/ 212639 w 1291905"/>
+                <a:gd name="csY39" fmla="*/ 0 h 1770078"/>
+                <a:gd name="csX40" fmla="*/ 109381 w 1291905"/>
+                <a:gd name="csY40" fmla="*/ 112070 h 1770078"/>
+                <a:gd name="csX41" fmla="*/ 6123 w 1291905"/>
+                <a:gd name="csY41" fmla="*/ 0 h 1770078"/>
+              </a:gdLst>
+              <a:ahLst/>
+              <a:cxnLst>
+                <a:cxn ang="0">
+                  <a:pos x="csX0" y="csY0"/>
+                </a:cxn>
+                <a:cxn ang="0">
+                  <a:pos x="csX1" y="csY1"/>
+                </a:cxn>
+                <a:cxn ang="0">
+                  <a:pos x="csX2" y="csY2"/>
+                </a:cxn>
+                <a:cxn ang="0">
+                  <a:pos x="csX3" y="csY3"/>
+                </a:cxn>
+                <a:cxn ang="0">
+                  <a:pos x="csX4" y="csY4"/>
+                </a:cxn>
+                <a:cxn ang="0">
+                  <a:pos x="csX5" y="csY5"/>
+                </a:cxn>
+                <a:cxn ang="0">
+                  <a:pos x="csX6" y="csY6"/>
+                </a:cxn>
+                <a:cxn ang="0">
+                  <a:pos x="csX7" y="csY7"/>
+                </a:cxn>
+                <a:cxn ang="0">
+                  <a:pos x="csX8" y="csY8"/>
+                </a:cxn>
+                <a:cxn ang="0">
+                  <a:pos x="csX9" y="csY9"/>
+                </a:cxn>
+                <a:cxn ang="0">
+                  <a:pos x="csX10" y="csY10"/>
+                </a:cxn>
+                <a:cxn ang="0">
+                  <a:pos x="csX11" y="csY11"/>
+                </a:cxn>
+                <a:cxn ang="0">
+                  <a:pos x="csX12" y="csY12"/>
+                </a:cxn>
+                <a:cxn ang="0">
+                  <a:pos x="csX13" y="csY13"/>
+                </a:cxn>
+                <a:cxn ang="0">
+                  <a:pos x="csX14" y="csY14"/>
+                </a:cxn>
+                <a:cxn ang="0">
+                  <a:pos x="csX15" y="csY15"/>
+                </a:cxn>
+                <a:cxn ang="0">
+                  <a:pos x="csX16" y="csY16"/>
+                </a:cxn>
+                <a:cxn ang="0">
+                  <a:pos x="csX17" y="csY17"/>
+                </a:cxn>
+                <a:cxn ang="0">
+                  <a:pos x="csX18" y="csY18"/>
+                </a:cxn>
+                <a:cxn ang="0">
+                  <a:pos x="csX19" y="csY19"/>
+                </a:cxn>
+                <a:cxn ang="0">
+                  <a:pos x="csX20" y="csY20"/>
+                </a:cxn>
+                <a:cxn ang="0">
+                  <a:pos x="csX21" y="csY21"/>
+                </a:cxn>
+                <a:cxn ang="0">
+                  <a:pos x="csX22" y="csY22"/>
+                </a:cxn>
+                <a:cxn ang="0">
+                  <a:pos x="csX23" y="csY23"/>
+                </a:cxn>
+                <a:cxn ang="0">
+                  <a:pos x="csX24" y="csY24"/>
+                </a:cxn>
+                <a:cxn ang="0">
+                  <a:pos x="csX25" y="csY25"/>
+                </a:cxn>
+                <a:cxn ang="0">
+                  <a:pos x="csX26" y="csY26"/>
+                </a:cxn>
+                <a:cxn ang="0">
+                  <a:pos x="csX27" y="csY27"/>
+                </a:cxn>
+                <a:cxn ang="0">
+                  <a:pos x="csX28" y="csY28"/>
+                </a:cxn>
+                <a:cxn ang="0">
+                  <a:pos x="csX29" y="csY29"/>
+                </a:cxn>
+                <a:cxn ang="0">
+                  <a:pos x="csX30" y="csY30"/>
+                </a:cxn>
+                <a:cxn ang="0">
+                  <a:pos x="csX31" y="csY31"/>
+                </a:cxn>
+                <a:cxn ang="0">
+                  <a:pos x="csX32" y="csY32"/>
+                </a:cxn>
+                <a:cxn ang="0">
+                  <a:pos x="csX33" y="csY33"/>
+                </a:cxn>
+                <a:cxn ang="0">
+                  <a:pos x="csX34" y="csY34"/>
+                </a:cxn>
+                <a:cxn ang="0">
+                  <a:pos x="csX35" y="csY35"/>
+                </a:cxn>
+                <a:cxn ang="0">
+                  <a:pos x="csX36" y="csY36"/>
+                </a:cxn>
+                <a:cxn ang="0">
+                  <a:pos x="csX37" y="csY37"/>
+                </a:cxn>
+                <a:cxn ang="0">
+                  <a:pos x="csX38" y="csY38"/>
+                </a:cxn>
+                <a:cxn ang="0">
+                  <a:pos x="csX39" y="csY39"/>
+                </a:cxn>
+                <a:cxn ang="0">
+                  <a:pos x="csX40" y="csY40"/>
+                </a:cxn>
+                <a:cxn ang="0">
+                  <a:pos x="csX41" y="csY41"/>
+                </a:cxn>
+              </a:cxnLst>
+              <a:rect l="l" t="t" r="r" b="b"/>
+              <a:pathLst>
+                <a:path w="1291905" h="1770078">
+                  <a:moveTo>
+                    <a:pt x="0" y="0"/>
+                  </a:moveTo>
+                  <a:lnTo>
+                    <a:pt x="0" y="478173"/>
+                  </a:lnTo>
+                  <a:lnTo>
+                    <a:pt x="0" y="1291905"/>
+                  </a:lnTo>
+                  <a:lnTo>
+                    <a:pt x="0" y="1770078"/>
+                  </a:lnTo>
+                  <a:lnTo>
+                    <a:pt x="6123" y="1770078"/>
+                  </a:lnTo>
+                  <a:lnTo>
+                    <a:pt x="109381" y="1658008"/>
+                  </a:lnTo>
+                  <a:lnTo>
+                    <a:pt x="212639" y="1770078"/>
+                  </a:lnTo>
+                  <a:lnTo>
+                    <a:pt x="221976" y="1770078"/>
+                  </a:lnTo>
+                  <a:lnTo>
+                    <a:pt x="325234" y="1658008"/>
+                  </a:lnTo>
+                  <a:lnTo>
+                    <a:pt x="428492" y="1770078"/>
+                  </a:lnTo>
+                  <a:lnTo>
+                    <a:pt x="437829" y="1770078"/>
+                  </a:lnTo>
+                  <a:lnTo>
+                    <a:pt x="541087" y="1658008"/>
+                  </a:lnTo>
+                  <a:lnTo>
+                    <a:pt x="644346" y="1770078"/>
+                  </a:lnTo>
+                  <a:lnTo>
+                    <a:pt x="653683" y="1770078"/>
+                  </a:lnTo>
+                  <a:lnTo>
+                    <a:pt x="756941" y="1658008"/>
+                  </a:lnTo>
+                  <a:lnTo>
+                    <a:pt x="860199" y="1770078"/>
+                  </a:lnTo>
+                  <a:lnTo>
+                    <a:pt x="869536" y="1770078"/>
+                  </a:lnTo>
+                  <a:lnTo>
+                    <a:pt x="972794" y="1658008"/>
+                  </a:lnTo>
+                  <a:lnTo>
+                    <a:pt x="1076052" y="1770078"/>
+                  </a:lnTo>
+                  <a:lnTo>
+                    <a:pt x="1085389" y="1770078"/>
+                  </a:lnTo>
+                  <a:lnTo>
+                    <a:pt x="1188647" y="1658008"/>
+                  </a:lnTo>
+                  <a:lnTo>
+                    <a:pt x="1291905" y="1770078"/>
+                  </a:lnTo>
+                  <a:lnTo>
+                    <a:pt x="1291905" y="1291905"/>
+                  </a:lnTo>
+                  <a:lnTo>
+                    <a:pt x="1291905" y="478173"/>
+                  </a:lnTo>
+                  <a:lnTo>
+                    <a:pt x="1291905" y="0"/>
+                  </a:lnTo>
+                  <a:lnTo>
+                    <a:pt x="1188647" y="112070"/>
+                  </a:lnTo>
+                  <a:lnTo>
+                    <a:pt x="1085389" y="0"/>
+                  </a:lnTo>
+                  <a:lnTo>
+                    <a:pt x="1076052" y="0"/>
+                  </a:lnTo>
+                  <a:lnTo>
+                    <a:pt x="972794" y="112070"/>
+                  </a:lnTo>
+                  <a:lnTo>
+                    <a:pt x="869536" y="0"/>
+                  </a:lnTo>
+                  <a:lnTo>
+                    <a:pt x="860199" y="0"/>
+                  </a:lnTo>
+                  <a:lnTo>
+                    <a:pt x="756941" y="112070"/>
+                  </a:lnTo>
+                  <a:lnTo>
+                    <a:pt x="653683" y="0"/>
+                  </a:lnTo>
+                  <a:lnTo>
+                    <a:pt x="644346" y="0"/>
+                  </a:lnTo>
+                  <a:lnTo>
+                    <a:pt x="541087" y="112070"/>
+                  </a:lnTo>
+                  <a:lnTo>
+                    <a:pt x="437829" y="0"/>
+                  </a:lnTo>
+                  <a:lnTo>
+                    <a:pt x="428492" y="0"/>
+                  </a:lnTo>
+                  <a:lnTo>
+                    <a:pt x="325234" y="112070"/>
+                  </a:lnTo>
+                  <a:lnTo>
+                    <a:pt x="221976" y="0"/>
+                  </a:lnTo>
+                  <a:lnTo>
+                    <a:pt x="212639" y="0"/>
+                  </a:lnTo>
+                  <a:lnTo>
+                    <a:pt x="109381" y="112070"/>
+                  </a:lnTo>
+                  <a:lnTo>
+                    <a:pt x="6123" y="0"/>
+                  </a:lnTo>
+                  <a:close/>
+                </a:path>
+              </a:pathLst>
+            </a:custGeom>
+            <a:gradFill flip="none" rotWithShape="1">
+              <a:gsLst>
+                <a:gs pos="81000">
+                  <a:schemeClr val="bg1">
+                    <a:alpha val="0"/>
+                  </a:schemeClr>
+                </a:gs>
+                <a:gs pos="0">
+                  <a:srgbClr val="FF0000"/>
+                </a:gs>
+              </a:gsLst>
+              <a:path path="circle">
+                <a:fillToRect l="100000" b="100000"/>
+              </a:path>
+              <a:tileRect t="-100000" r="-100000"/>
+            </a:gradFill>
+            <a:ln>
+              <a:noFill/>
+            </a:ln>
+          </p:spPr>
+          <p:style>
+            <a:lnRef idx="2">
+              <a:schemeClr val="accent1">
+                <a:shade val="15000"/>
+              </a:schemeClr>
+            </a:lnRef>
+            <a:fillRef idx="1">
+              <a:schemeClr val="accent1"/>
+            </a:fillRef>
+            <a:effectRef idx="0">
+              <a:schemeClr val="accent1"/>
+            </a:effectRef>
+            <a:fontRef idx="minor">
+              <a:schemeClr val="lt1"/>
+            </a:fontRef>
+          </p:style>
+          <p:txBody>
+            <a:bodyPr wrap="square" rtlCol="0" anchor="ctr">
+              <a:noAutofit/>
+            </a:bodyPr>
+            <a:lstStyle/>
+            <a:p>
+              <a:pPr algn="ctr"/>
+              <a:endParaRPr lang="en-US"/>
+            </a:p>
+          </p:txBody>
+        </p:sp>
+        <p:sp>
+          <p:nvSpPr>
+            <p:cNvPr id="12" name="Freeform: Shape 11">
+              <a:extLst>
+                <a:ext uri="{FF2B5EF4-FFF2-40B4-BE49-F238E27FC236}">
+                  <a16:creationId xmlns:a16="http://schemas.microsoft.com/office/drawing/2014/main" id="{F0AB5DE3-67E0-6F10-0D54-02CC4161605B}"/>
+                </a:ext>
+              </a:extLst>
+            </p:cNvPr>
+            <p:cNvSpPr/>
+            <p:nvPr/>
+          </p:nvSpPr>
+          <p:spPr>
+            <a:xfrm>
+              <a:off x="3879920" y="4287477"/>
+              <a:ext cx="937260" cy="652164"/>
+            </a:xfrm>
+            <a:custGeom>
+              <a:avLst/>
+              <a:gdLst>
+                <a:gd name="csX0" fmla="*/ 885039 w 1770078"/>
+                <a:gd name="csY0" fmla="*/ 0 h 1291903"/>
+                <a:gd name="csX1" fmla="*/ 1752097 w 1770078"/>
+                <a:gd name="csY1" fmla="*/ 364364 h 1291903"/>
+                <a:gd name="csX2" fmla="*/ 1756386 w 1770078"/>
+                <a:gd name="csY2" fmla="*/ 378854 h 1291903"/>
+                <a:gd name="csX3" fmla="*/ 1770078 w 1770078"/>
+                <a:gd name="csY3" fmla="*/ 378854 h 1291903"/>
+                <a:gd name="csX4" fmla="*/ 1770078 w 1770078"/>
+                <a:gd name="csY4" fmla="*/ 456330 h 1291903"/>
+                <a:gd name="csX5" fmla="*/ 1770078 w 1770078"/>
+                <a:gd name="csY5" fmla="*/ 1291903 h 1291903"/>
+                <a:gd name="csX6" fmla="*/ 0 w 1770078"/>
+                <a:gd name="csY6" fmla="*/ 1291903 h 1291903"/>
+                <a:gd name="csX7" fmla="*/ 0 w 1770078"/>
+                <a:gd name="csY7" fmla="*/ 456330 h 1291903"/>
+                <a:gd name="csX8" fmla="*/ 0 w 1770078"/>
+                <a:gd name="csY8" fmla="*/ 378854 h 1291903"/>
+                <a:gd name="csX9" fmla="*/ 13692 w 1770078"/>
+                <a:gd name="csY9" fmla="*/ 378854 h 1291903"/>
+                <a:gd name="csX10" fmla="*/ 17981 w 1770078"/>
+                <a:gd name="csY10" fmla="*/ 364364 h 1291903"/>
+                <a:gd name="csX11" fmla="*/ 885039 w 1770078"/>
+                <a:gd name="csY11" fmla="*/ 0 h 1291903"/>
+                <a:gd name="csX0" fmla="*/ 885039 w 1770078"/>
+                <a:gd name="csY0" fmla="*/ 0 h 1291903"/>
+                <a:gd name="csX1" fmla="*/ 1752097 w 1770078"/>
+                <a:gd name="csY1" fmla="*/ 364364 h 1291903"/>
+                <a:gd name="csX2" fmla="*/ 1756386 w 1770078"/>
+                <a:gd name="csY2" fmla="*/ 378854 h 1291903"/>
+                <a:gd name="csX3" fmla="*/ 1770078 w 1770078"/>
+                <a:gd name="csY3" fmla="*/ 378854 h 1291903"/>
+                <a:gd name="csX4" fmla="*/ 1770078 w 1770078"/>
+                <a:gd name="csY4" fmla="*/ 456330 h 1291903"/>
+                <a:gd name="csX5" fmla="*/ 1770078 w 1770078"/>
+                <a:gd name="csY5" fmla="*/ 1291903 h 1291903"/>
+                <a:gd name="csX6" fmla="*/ 0 w 1770078"/>
+                <a:gd name="csY6" fmla="*/ 1291903 h 1291903"/>
+                <a:gd name="csX7" fmla="*/ 0 w 1770078"/>
+                <a:gd name="csY7" fmla="*/ 456330 h 1291903"/>
+                <a:gd name="csX8" fmla="*/ 13692 w 1770078"/>
+                <a:gd name="csY8" fmla="*/ 378854 h 1291903"/>
+                <a:gd name="csX9" fmla="*/ 17981 w 1770078"/>
+                <a:gd name="csY9" fmla="*/ 364364 h 1291903"/>
+                <a:gd name="csX10" fmla="*/ 885039 w 1770078"/>
+                <a:gd name="csY10" fmla="*/ 0 h 1291903"/>
+                <a:gd name="csX0" fmla="*/ 885039 w 1770078"/>
+                <a:gd name="csY0" fmla="*/ 0 h 1291903"/>
+                <a:gd name="csX1" fmla="*/ 1752097 w 1770078"/>
+                <a:gd name="csY1" fmla="*/ 364364 h 1291903"/>
+                <a:gd name="csX2" fmla="*/ 1756386 w 1770078"/>
+                <a:gd name="csY2" fmla="*/ 378854 h 1291903"/>
+                <a:gd name="csX3" fmla="*/ 1770078 w 1770078"/>
+                <a:gd name="csY3" fmla="*/ 378854 h 1291903"/>
+                <a:gd name="csX4" fmla="*/ 1770078 w 1770078"/>
+                <a:gd name="csY4" fmla="*/ 456330 h 1291903"/>
+                <a:gd name="csX5" fmla="*/ 1770078 w 1770078"/>
+                <a:gd name="csY5" fmla="*/ 1291903 h 1291903"/>
+                <a:gd name="csX6" fmla="*/ 0 w 1770078"/>
+                <a:gd name="csY6" fmla="*/ 1291903 h 1291903"/>
+                <a:gd name="csX7" fmla="*/ 0 w 1770078"/>
+                <a:gd name="csY7" fmla="*/ 456330 h 1291903"/>
+                <a:gd name="csX8" fmla="*/ 17981 w 1770078"/>
+                <a:gd name="csY8" fmla="*/ 364364 h 1291903"/>
+                <a:gd name="csX9" fmla="*/ 885039 w 1770078"/>
+                <a:gd name="csY9" fmla="*/ 0 h 1291903"/>
+                <a:gd name="csX0" fmla="*/ 885039 w 1770078"/>
+                <a:gd name="csY0" fmla="*/ 0 h 1291903"/>
+                <a:gd name="csX1" fmla="*/ 1752097 w 1770078"/>
+                <a:gd name="csY1" fmla="*/ 364364 h 1291903"/>
+                <a:gd name="csX2" fmla="*/ 1756386 w 1770078"/>
+                <a:gd name="csY2" fmla="*/ 378854 h 1291903"/>
+                <a:gd name="csX3" fmla="*/ 1770078 w 1770078"/>
+                <a:gd name="csY3" fmla="*/ 456330 h 1291903"/>
+                <a:gd name="csX4" fmla="*/ 1770078 w 1770078"/>
+                <a:gd name="csY4" fmla="*/ 1291903 h 1291903"/>
+                <a:gd name="csX5" fmla="*/ 0 w 1770078"/>
+                <a:gd name="csY5" fmla="*/ 1291903 h 1291903"/>
+                <a:gd name="csX6" fmla="*/ 0 w 1770078"/>
+                <a:gd name="csY6" fmla="*/ 456330 h 1291903"/>
+                <a:gd name="csX7" fmla="*/ 17981 w 1770078"/>
+                <a:gd name="csY7" fmla="*/ 364364 h 1291903"/>
+                <a:gd name="csX8" fmla="*/ 885039 w 1770078"/>
+                <a:gd name="csY8" fmla="*/ 0 h 1291903"/>
+                <a:gd name="csX0" fmla="*/ 885039 w 1770078"/>
+                <a:gd name="csY0" fmla="*/ 0 h 1291903"/>
+                <a:gd name="csX1" fmla="*/ 1752097 w 1770078"/>
+                <a:gd name="csY1" fmla="*/ 364364 h 1291903"/>
+                <a:gd name="csX2" fmla="*/ 1770078 w 1770078"/>
+                <a:gd name="csY2" fmla="*/ 456330 h 1291903"/>
+                <a:gd name="csX3" fmla="*/ 1770078 w 1770078"/>
+                <a:gd name="csY3" fmla="*/ 1291903 h 1291903"/>
+                <a:gd name="csX4" fmla="*/ 0 w 1770078"/>
+                <a:gd name="csY4" fmla="*/ 1291903 h 1291903"/>
+                <a:gd name="csX5" fmla="*/ 0 w 1770078"/>
+                <a:gd name="csY5" fmla="*/ 456330 h 1291903"/>
+                <a:gd name="csX6" fmla="*/ 17981 w 1770078"/>
+                <a:gd name="csY6" fmla="*/ 364364 h 1291903"/>
+                <a:gd name="csX7" fmla="*/ 885039 w 1770078"/>
+                <a:gd name="csY7" fmla="*/ 0 h 1291903"/>
+              </a:gdLst>
+              <a:ahLst/>
+              <a:cxnLst>
+                <a:cxn ang="0">
+                  <a:pos x="csX0" y="csY0"/>
+                </a:cxn>
+                <a:cxn ang="0">
+                  <a:pos x="csX1" y="csY1"/>
+                </a:cxn>
+                <a:cxn ang="0">
+                  <a:pos x="csX2" y="csY2"/>
+                </a:cxn>
+                <a:cxn ang="0">
+                  <a:pos x="csX3" y="csY3"/>
+                </a:cxn>
+                <a:cxn ang="0">
+                  <a:pos x="csX4" y="csY4"/>
+                </a:cxn>
+                <a:cxn ang="0">
+                  <a:pos x="csX5" y="csY5"/>
+                </a:cxn>
+                <a:cxn ang="0">
+                  <a:pos x="csX6" y="csY6"/>
+                </a:cxn>
+                <a:cxn ang="0">
+                  <a:pos x="csX7" y="csY7"/>
+                </a:cxn>
+              </a:cxnLst>
+              <a:rect l="l" t="t" r="r" b="b"/>
+              <a:pathLst>
+                <a:path w="1770078" h="1291903">
+                  <a:moveTo>
+                    <a:pt x="885039" y="0"/>
+                  </a:moveTo>
+                  <a:cubicBezTo>
+                    <a:pt x="1312734" y="0"/>
+                    <a:pt x="1669571" y="156422"/>
+                    <a:pt x="1752097" y="364364"/>
+                  </a:cubicBezTo>
+                  <a:lnTo>
+                    <a:pt x="1770078" y="456330"/>
+                  </a:lnTo>
+                  <a:lnTo>
+                    <a:pt x="1770078" y="1291903"/>
+                  </a:lnTo>
+                  <a:lnTo>
+                    <a:pt x="0" y="1291903"/>
+                  </a:lnTo>
+                  <a:lnTo>
+                    <a:pt x="0" y="456330"/>
+                  </a:lnTo>
+                  <a:lnTo>
+                    <a:pt x="17981" y="364364"/>
+                  </a:lnTo>
+                  <a:cubicBezTo>
+                    <a:pt x="100507" y="156422"/>
+                    <a:pt x="457344" y="0"/>
+                    <a:pt x="885039" y="0"/>
+                  </a:cubicBezTo>
+                  <a:close/>
+                </a:path>
+              </a:pathLst>
+            </a:custGeom>
+            <a:gradFill flip="none" rotWithShape="1">
+              <a:gsLst>
+                <a:gs pos="69000">
+                  <a:schemeClr val="bg1">
+                    <a:alpha val="0"/>
+                  </a:schemeClr>
+                </a:gs>
+                <a:gs pos="0">
+                  <a:srgbClr val="0070C0"/>
+                </a:gs>
+              </a:gsLst>
+              <a:path path="circle">
+                <a:fillToRect l="100000" b="100000"/>
+              </a:path>
+              <a:tileRect t="-100000" r="-100000"/>
+            </a:gradFill>
+            <a:ln>
+              <a:noFill/>
+            </a:ln>
+          </p:spPr>
+          <p:style>
+            <a:lnRef idx="2">
+              <a:schemeClr val="accent1">
+                <a:shade val="15000"/>
+              </a:schemeClr>
+            </a:lnRef>
+            <a:fillRef idx="1">
+              <a:schemeClr val="accent1"/>
+            </a:fillRef>
+            <a:effectRef idx="0">
+              <a:schemeClr val="accent1"/>
+            </a:effectRef>
+            <a:fontRef idx="minor">
+              <a:schemeClr val="lt1"/>
+            </a:fontRef>
+          </p:style>
+          <p:txBody>
+            <a:bodyPr wrap="square" rtlCol="0" anchor="ctr">
+              <a:noAutofit/>
+            </a:bodyPr>
+            <a:lstStyle/>
+            <a:p>
+              <a:pPr algn="ctr"/>
+              <a:endParaRPr lang="en-US"/>
+            </a:p>
+          </p:txBody>
+        </p:sp>
+        <p:sp>
+          <p:nvSpPr>
+            <p:cNvPr id="13" name="Freeform: Shape 12">
+              <a:extLst>
+                <a:ext uri="{FF2B5EF4-FFF2-40B4-BE49-F238E27FC236}">
+                  <a16:creationId xmlns:a16="http://schemas.microsoft.com/office/drawing/2014/main" id="{34F43306-2E56-1231-5A31-4E0C47BC9C37}"/>
+                </a:ext>
+              </a:extLst>
+            </p:cNvPr>
+            <p:cNvSpPr/>
+            <p:nvPr/>
+          </p:nvSpPr>
+          <p:spPr>
+            <a:xfrm>
+              <a:off x="6235672" y="4287477"/>
+              <a:ext cx="937260" cy="652165"/>
+            </a:xfrm>
+            <a:custGeom>
+              <a:avLst/>
+              <a:gdLst>
+                <a:gd name="csX0" fmla="*/ 0 w 937260"/>
+                <a:gd name="csY0" fmla="*/ 0 h 652165"/>
+                <a:gd name="csX1" fmla="*/ 179 w 937260"/>
+                <a:gd name="csY1" fmla="*/ 0 h 652165"/>
+                <a:gd name="csX2" fmla="*/ 116373 w 937260"/>
+                <a:gd name="csY2" fmla="*/ 31552 h 652165"/>
+                <a:gd name="csX3" fmla="*/ 468630 w 937260"/>
+                <a:gd name="csY3" fmla="*/ 67131 h 652165"/>
+                <a:gd name="csX4" fmla="*/ 820887 w 937260"/>
+                <a:gd name="csY4" fmla="*/ 31552 h 652165"/>
+                <a:gd name="csX5" fmla="*/ 937081 w 937260"/>
+                <a:gd name="csY5" fmla="*/ 0 h 652165"/>
+                <a:gd name="csX6" fmla="*/ 937260 w 937260"/>
+                <a:gd name="csY6" fmla="*/ 0 h 652165"/>
+                <a:gd name="csX7" fmla="*/ 937260 w 937260"/>
+                <a:gd name="csY7" fmla="*/ 652165 h 652165"/>
+                <a:gd name="csX8" fmla="*/ 937078 w 937260"/>
+                <a:gd name="csY8" fmla="*/ 652165 h 652165"/>
+                <a:gd name="csX9" fmla="*/ 820887 w 937260"/>
+                <a:gd name="csY9" fmla="*/ 620614 h 652165"/>
+                <a:gd name="csX10" fmla="*/ 468630 w 937260"/>
+                <a:gd name="csY10" fmla="*/ 585035 h 652165"/>
+                <a:gd name="csX11" fmla="*/ 116373 w 937260"/>
+                <a:gd name="csY11" fmla="*/ 620614 h 652165"/>
+                <a:gd name="csX12" fmla="*/ 183 w 937260"/>
+                <a:gd name="csY12" fmla="*/ 652165 h 652165"/>
+                <a:gd name="csX13" fmla="*/ 0 w 937260"/>
+                <a:gd name="csY13" fmla="*/ 652165 h 652165"/>
+              </a:gdLst>
+              <a:ahLst/>
+              <a:cxnLst>
+                <a:cxn ang="0">
+                  <a:pos x="csX0" y="csY0"/>
+                </a:cxn>
+                <a:cxn ang="0">
+                  <a:pos x="csX1" y="csY1"/>
+                </a:cxn>
+                <a:cxn ang="0">
+                  <a:pos x="csX2" y="csY2"/>
+                </a:cxn>
+                <a:cxn ang="0">
+                  <a:pos x="csX3" y="csY3"/>
+                </a:cxn>
+                <a:cxn ang="0">
+                  <a:pos x="csX4" y="csY4"/>
+                </a:cxn>
+                <a:cxn ang="0">
+                  <a:pos x="csX5" y="csY5"/>
+                </a:cxn>
+                <a:cxn ang="0">
+                  <a:pos x="csX6" y="csY6"/>
+                </a:cxn>
+                <a:cxn ang="0">
+                  <a:pos x="csX7" y="csY7"/>
+                </a:cxn>
+                <a:cxn ang="0">
+                  <a:pos x="csX8" y="csY8"/>
+                </a:cxn>
+                <a:cxn ang="0">
+                  <a:pos x="csX9" y="csY9"/>
+                </a:cxn>
+                <a:cxn ang="0">
+                  <a:pos x="csX10" y="csY10"/>
+                </a:cxn>
+                <a:cxn ang="0">
+                  <a:pos x="csX11" y="csY11"/>
+                </a:cxn>
+                <a:cxn ang="0">
+                  <a:pos x="csX12" y="csY12"/>
+                </a:cxn>
+                <a:cxn ang="0">
+                  <a:pos x="csX13" y="csY13"/>
+                </a:cxn>
+              </a:cxnLst>
+              <a:rect l="l" t="t" r="r" b="b"/>
+              <a:pathLst>
+                <a:path w="937260" h="652165">
+                  <a:moveTo>
+                    <a:pt x="0" y="0"/>
+                  </a:moveTo>
+                  <a:lnTo>
+                    <a:pt x="179" y="0"/>
+                  </a:lnTo>
+                  <a:lnTo>
+                    <a:pt x="116373" y="31552"/>
+                  </a:lnTo>
+                  <a:cubicBezTo>
+                    <a:pt x="224643" y="54462"/>
+                    <a:pt x="343679" y="67131"/>
+                    <a:pt x="468630" y="67131"/>
+                  </a:cubicBezTo>
+                  <a:cubicBezTo>
+                    <a:pt x="593581" y="67131"/>
+                    <a:pt x="712618" y="54462"/>
+                    <a:pt x="820887" y="31552"/>
+                  </a:cubicBezTo>
+                  <a:lnTo>
+                    <a:pt x="937081" y="0"/>
+                  </a:lnTo>
+                  <a:lnTo>
+                    <a:pt x="937260" y="0"/>
+                  </a:lnTo>
+                  <a:lnTo>
+                    <a:pt x="937260" y="652165"/>
+                  </a:lnTo>
+                  <a:lnTo>
+                    <a:pt x="937078" y="652165"/>
+                  </a:lnTo>
+                  <a:lnTo>
+                    <a:pt x="820887" y="620614"/>
+                  </a:lnTo>
+                  <a:cubicBezTo>
+                    <a:pt x="712618" y="597704"/>
+                    <a:pt x="593581" y="585035"/>
+                    <a:pt x="468630" y="585035"/>
+                  </a:cubicBezTo>
+                  <a:cubicBezTo>
+                    <a:pt x="343679" y="585035"/>
+                    <a:pt x="224643" y="597704"/>
+                    <a:pt x="116373" y="620614"/>
+                  </a:cubicBezTo>
+                  <a:lnTo>
+                    <a:pt x="183" y="652165"/>
+                  </a:lnTo>
+                  <a:lnTo>
+                    <a:pt x="0" y="652165"/>
+                  </a:lnTo>
+                  <a:close/>
+                </a:path>
+              </a:pathLst>
+            </a:custGeom>
+            <a:gradFill flip="none" rotWithShape="1">
+              <a:gsLst>
+                <a:gs pos="83000">
+                  <a:schemeClr val="bg1">
+                    <a:alpha val="0"/>
+                  </a:schemeClr>
+                </a:gs>
+                <a:gs pos="0">
+                  <a:srgbClr val="00B050"/>
+                </a:gs>
+              </a:gsLst>
+              <a:path path="circle">
+                <a:fillToRect l="100000" b="100000"/>
+              </a:path>
+              <a:tileRect t="-100000" r="-100000"/>
+            </a:gradFill>
+            <a:ln>
+              <a:noFill/>
+            </a:ln>
+          </p:spPr>
+          <p:style>
+            <a:lnRef idx="2">
+              <a:schemeClr val="accent1">
+                <a:shade val="15000"/>
+              </a:schemeClr>
+            </a:lnRef>
+            <a:fillRef idx="1">
+              <a:schemeClr val="accent1"/>
+            </a:fillRef>
+            <a:effectRef idx="0">
+              <a:schemeClr val="accent1"/>
+            </a:effectRef>
+            <a:fontRef idx="minor">
+              <a:schemeClr val="lt1"/>
+            </a:fontRef>
+          </p:style>
+          <p:txBody>
+            <a:bodyPr wrap="square" rtlCol="0" anchor="ctr">
+              <a:noAutofit/>
+            </a:bodyPr>
+            <a:lstStyle/>
+            <a:p>
+              <a:pPr algn="ctr"/>
+              <a:endParaRPr lang="en-US"/>
+            </a:p>
+          </p:txBody>
+        </p:sp>
+      </p:grpSp>
       <p:sp>
         <p:nvSpPr>
-          <p:cNvPr id="33" name="TextBox 32">
+          <p:cNvPr id="22" name="Rectangle: Rounded Corners 21">
             <a:extLst>
               <a:ext uri="{FF2B5EF4-FFF2-40B4-BE49-F238E27FC236}">
-                <a16:creationId xmlns:a16="http://schemas.microsoft.com/office/drawing/2014/main" id="{44D6A337-A633-B877-B90D-71E3502CAC70}"/>
-              </a:ext>
-            </a:extLst>
-          </p:cNvPr>
-          <p:cNvSpPr txBox="1"/>
-          <p:nvPr/>
-        </p:nvSpPr>
-        <p:spPr>
-          <a:xfrm>
-            <a:off x="3930488" y="2648739"/>
-            <a:ext cx="282450" cy="369332"/>
-          </a:xfrm>
-          <a:prstGeom prst="rect">
-            <a:avLst/>
-          </a:prstGeom>
-          <a:noFill/>
-        </p:spPr>
-        <p:txBody>
-          <a:bodyPr wrap="none" rtlCol="0">
-            <a:spAutoFit/>
-          </a:bodyPr>
-          <a:lstStyle/>
-          <a:p>
-            <a:r>
-              <a:rPr lang="en-US" dirty="0"/>
-              <a:t>c</a:t>
-            </a:r>
-          </a:p>
-        </p:txBody>
-      </p:sp>
-      <p:sp>
-        <p:nvSpPr>
-          <p:cNvPr id="34" name="TextBox 33">
-            <a:extLst>
-              <a:ext uri="{FF2B5EF4-FFF2-40B4-BE49-F238E27FC236}">
-                <a16:creationId xmlns:a16="http://schemas.microsoft.com/office/drawing/2014/main" id="{96FE4204-BEDE-AB1A-FDC6-CE2BC2D0C466}"/>
-              </a:ext>
-            </a:extLst>
-          </p:cNvPr>
-          <p:cNvSpPr txBox="1"/>
-          <p:nvPr/>
-        </p:nvSpPr>
-        <p:spPr>
-          <a:xfrm>
-            <a:off x="7757048" y="2648739"/>
-            <a:ext cx="261610" cy="369332"/>
-          </a:xfrm>
-          <a:prstGeom prst="rect">
-            <a:avLst/>
-          </a:prstGeom>
-          <a:noFill/>
-        </p:spPr>
-        <p:txBody>
-          <a:bodyPr wrap="none" rtlCol="0">
-            <a:spAutoFit/>
-          </a:bodyPr>
-          <a:lstStyle/>
-          <a:p>
-            <a:r>
-              <a:rPr lang="en-US" dirty="0"/>
-              <a:t>t</a:t>
-            </a:r>
-          </a:p>
-        </p:txBody>
-      </p:sp>
-      <p:sp>
-        <p:nvSpPr>
-          <p:cNvPr id="35" name="Rectangle: Rounded Corners 34">
-            <a:extLst>
-              <a:ext uri="{FF2B5EF4-FFF2-40B4-BE49-F238E27FC236}">
-                <a16:creationId xmlns:a16="http://schemas.microsoft.com/office/drawing/2014/main" id="{4FBA92A9-9010-7BFC-681C-4B863379BF47}"/>
+                <a16:creationId xmlns:a16="http://schemas.microsoft.com/office/drawing/2014/main" id="{04BD6A4C-1DF2-97B0-CDDE-ED2A12EB5A2D}"/>
               </a:ext>
             </a:extLst>
           </p:cNvPr>
@@ -1957,17 +5282,19 @@
         </p:nvSpPr>
         <p:spPr>
           <a:xfrm>
-            <a:off x="1528959" y="3293572"/>
+            <a:off x="2546329" y="4351605"/>
             <a:ext cx="937260" cy="652166"/>
           </a:xfrm>
           <a:prstGeom prst="roundRect">
             <a:avLst/>
           </a:prstGeom>
           <a:solidFill>
-            <a:schemeClr val="bg1"/>
+            <a:srgbClr val="C775E7"/>
           </a:solidFill>
-          <a:ln>
-            <a:noFill/>
+          <a:ln w="3175">
+            <a:solidFill>
+              <a:srgbClr val="7030A0"/>
+            </a:solidFill>
           </a:ln>
         </p:spPr>
         <p:style>
@@ -1997,10 +5324,10 @@
       </p:sp>
       <p:sp>
         <p:nvSpPr>
-          <p:cNvPr id="36" name="Freeform: Shape 35">
+          <p:cNvPr id="23" name="Freeform: Shape 22">
             <a:extLst>
               <a:ext uri="{FF2B5EF4-FFF2-40B4-BE49-F238E27FC236}">
-                <a16:creationId xmlns:a16="http://schemas.microsoft.com/office/drawing/2014/main" id="{AE0A9775-16AC-CC28-A936-FF5C937D2C3D}"/>
+                <a16:creationId xmlns:a16="http://schemas.microsoft.com/office/drawing/2014/main" id="{9750E4F2-092D-D55C-C68A-477569CD3EDD}"/>
               </a:ext>
             </a:extLst>
           </p:cNvPr>
@@ -2009,7 +5336,7 @@
         </p:nvSpPr>
         <p:spPr>
           <a:xfrm>
-            <a:off x="7421444" y="3293573"/>
+            <a:off x="7698281" y="4351606"/>
             <a:ext cx="932818" cy="652165"/>
           </a:xfrm>
           <a:custGeom>
@@ -2155,10 +5482,14 @@
             </a:pathLst>
           </a:custGeom>
           <a:solidFill>
-            <a:schemeClr val="bg1"/>
+            <a:srgbClr val="ECC31D"/>
           </a:solidFill>
-          <a:ln>
-            <a:noFill/>
+          <a:ln w="3175">
+            <a:solidFill>
+              <a:schemeClr val="accent4">
+                <a:lumMod val="75000"/>
+              </a:schemeClr>
+            </a:solidFill>
           </a:ln>
         </p:spPr>
         <p:style>
@@ -2190,64 +5521,10 @@
       </p:sp>
       <p:sp>
         <p:nvSpPr>
-          <p:cNvPr id="37" name="Rectangle 36">
+          <p:cNvPr id="24" name="Freeform: Shape 23">
             <a:extLst>
               <a:ext uri="{FF2B5EF4-FFF2-40B4-BE49-F238E27FC236}">
-                <a16:creationId xmlns:a16="http://schemas.microsoft.com/office/drawing/2014/main" id="{2E4D4FE2-C49A-ACF6-691E-6898E3D2089D}"/>
-              </a:ext>
-            </a:extLst>
-          </p:cNvPr>
-          <p:cNvSpPr/>
-          <p:nvPr/>
-        </p:nvSpPr>
-        <p:spPr>
-          <a:xfrm>
-            <a:off x="5958835" y="3293573"/>
-            <a:ext cx="937260" cy="652165"/>
-          </a:xfrm>
-          <a:prstGeom prst="rect">
-            <a:avLst/>
-          </a:prstGeom>
-          <a:solidFill>
-            <a:schemeClr val="bg1"/>
-          </a:solidFill>
-          <a:ln>
-            <a:noFill/>
-          </a:ln>
-        </p:spPr>
-        <p:style>
-          <a:lnRef idx="2">
-            <a:schemeClr val="accent1">
-              <a:shade val="15000"/>
-            </a:schemeClr>
-          </a:lnRef>
-          <a:fillRef idx="1">
-            <a:schemeClr val="accent1"/>
-          </a:fillRef>
-          <a:effectRef idx="0">
-            <a:schemeClr val="accent1"/>
-          </a:effectRef>
-          <a:fontRef idx="minor">
-            <a:schemeClr val="lt1"/>
-          </a:fontRef>
-        </p:style>
-        <p:txBody>
-          <a:bodyPr wrap="square" rtlCol="0" anchor="ctr">
-            <a:noAutofit/>
-          </a:bodyPr>
-          <a:lstStyle/>
-          <a:p>
-            <a:pPr algn="ctr"/>
-            <a:endParaRPr lang="en-US"/>
-          </a:p>
-        </p:txBody>
-      </p:sp>
-      <p:sp>
-        <p:nvSpPr>
-          <p:cNvPr id="38" name="Freeform: Shape 37">
-            <a:extLst>
-              <a:ext uri="{FF2B5EF4-FFF2-40B4-BE49-F238E27FC236}">
-                <a16:creationId xmlns:a16="http://schemas.microsoft.com/office/drawing/2014/main" id="{F763365D-02FA-E1A3-5EDF-709DE02770B6}"/>
+                <a16:creationId xmlns:a16="http://schemas.microsoft.com/office/drawing/2014/main" id="{B371E4BC-2DC4-9584-3E97-146A28B7BF4D}"/>
               </a:ext>
             </a:extLst>
           </p:cNvPr>
@@ -2256,7 +5533,7 @@
         </p:nvSpPr>
         <p:spPr>
           <a:xfrm rot="16200000" flipH="1">
-            <a:off x="4921949" y="3151026"/>
+            <a:off x="5198786" y="4209059"/>
             <a:ext cx="652164" cy="937260"/>
           </a:xfrm>
           <a:custGeom>
@@ -2610,10 +5887,12 @@
             </a:pathLst>
           </a:custGeom>
           <a:solidFill>
-            <a:schemeClr val="bg1"/>
+            <a:srgbClr val="E94B3A"/>
           </a:solidFill>
-          <a:ln>
-            <a:noFill/>
+          <a:ln w="3175">
+            <a:solidFill>
+              <a:srgbClr val="C00000"/>
+            </a:solidFill>
           </a:ln>
         </p:spPr>
         <p:style>
@@ -2645,10 +5924,10 @@
       </p:sp>
       <p:sp>
         <p:nvSpPr>
-          <p:cNvPr id="39" name="Freeform: Shape 38">
+          <p:cNvPr id="26" name="Freeform: Shape 25">
             <a:extLst>
               <a:ext uri="{FF2B5EF4-FFF2-40B4-BE49-F238E27FC236}">
-                <a16:creationId xmlns:a16="http://schemas.microsoft.com/office/drawing/2014/main" id="{E4031813-5928-9A4C-032E-FF7B84B47C4B}"/>
+                <a16:creationId xmlns:a16="http://schemas.microsoft.com/office/drawing/2014/main" id="{0A94A3C3-53FE-2FEC-298B-03D9F582B428}"/>
               </a:ext>
             </a:extLst>
           </p:cNvPr>
@@ -2657,7 +5936,7 @@
         </p:nvSpPr>
         <p:spPr>
           <a:xfrm>
-            <a:off x="3603083" y="3293573"/>
+            <a:off x="3879920" y="4351606"/>
             <a:ext cx="937260" cy="652164"/>
           </a:xfrm>
           <a:custGeom>
@@ -2827,10 +6106,12 @@
             </a:pathLst>
           </a:custGeom>
           <a:solidFill>
-            <a:schemeClr val="bg1"/>
+            <a:srgbClr val="3BA8F0"/>
           </a:solidFill>
-          <a:ln>
-            <a:noFill/>
+          <a:ln w="3175">
+            <a:solidFill>
+              <a:srgbClr val="0070C0"/>
+            </a:solidFill>
           </a:ln>
         </p:spPr>
         <p:style>
@@ -2862,10 +6143,10 @@
       </p:sp>
       <p:sp>
         <p:nvSpPr>
-          <p:cNvPr id="18" name="Freeform: Shape 17">
+          <p:cNvPr id="27" name="Freeform: Shape 26">
             <a:extLst>
               <a:ext uri="{FF2B5EF4-FFF2-40B4-BE49-F238E27FC236}">
-                <a16:creationId xmlns:a16="http://schemas.microsoft.com/office/drawing/2014/main" id="{2C865D70-0832-B887-4436-883C59050DA9}"/>
+                <a16:creationId xmlns:a16="http://schemas.microsoft.com/office/drawing/2014/main" id="{6E1F0008-F991-AD16-8A3D-DA5DD5F510EE}"/>
               </a:ext>
             </a:extLst>
           </p:cNvPr>
@@ -2874,160 +6155,7 @@
         </p:nvSpPr>
         <p:spPr>
           <a:xfrm>
-            <a:off x="5958835" y="834530"/>
-            <a:ext cx="937260" cy="649524"/>
-          </a:xfrm>
-          <a:custGeom>
-            <a:avLst/>
-            <a:gdLst>
-              <a:gd name="csX0" fmla="*/ 0 w 937260"/>
-              <a:gd name="csY0" fmla="*/ 0 h 649524"/>
-              <a:gd name="csX1" fmla="*/ 29480 w 937260"/>
-              <a:gd name="csY1" fmla="*/ 6421 h 649524"/>
-              <a:gd name="csX2" fmla="*/ 468630 w 937260"/>
-              <a:gd name="csY2" fmla="*/ 42000 h 649524"/>
-              <a:gd name="csX3" fmla="*/ 907780 w 937260"/>
-              <a:gd name="csY3" fmla="*/ 6421 h 649524"/>
-              <a:gd name="csX4" fmla="*/ 937260 w 937260"/>
-              <a:gd name="csY4" fmla="*/ 0 h 649524"/>
-              <a:gd name="csX5" fmla="*/ 937260 w 937260"/>
-              <a:gd name="csY5" fmla="*/ 649524 h 649524"/>
-              <a:gd name="csX6" fmla="*/ 907780 w 937260"/>
-              <a:gd name="csY6" fmla="*/ 643103 h 649524"/>
-              <a:gd name="csX7" fmla="*/ 468630 w 937260"/>
-              <a:gd name="csY7" fmla="*/ 607524 h 649524"/>
-              <a:gd name="csX8" fmla="*/ 29480 w 937260"/>
-              <a:gd name="csY8" fmla="*/ 643103 h 649524"/>
-              <a:gd name="csX9" fmla="*/ 0 w 937260"/>
-              <a:gd name="csY9" fmla="*/ 649524 h 649524"/>
-            </a:gdLst>
-            <a:ahLst/>
-            <a:cxnLst>
-              <a:cxn ang="0">
-                <a:pos x="csX0" y="csY0"/>
-              </a:cxn>
-              <a:cxn ang="0">
-                <a:pos x="csX1" y="csY1"/>
-              </a:cxn>
-              <a:cxn ang="0">
-                <a:pos x="csX2" y="csY2"/>
-              </a:cxn>
-              <a:cxn ang="0">
-                <a:pos x="csX3" y="csY3"/>
-              </a:cxn>
-              <a:cxn ang="0">
-                <a:pos x="csX4" y="csY4"/>
-              </a:cxn>
-              <a:cxn ang="0">
-                <a:pos x="csX5" y="csY5"/>
-              </a:cxn>
-              <a:cxn ang="0">
-                <a:pos x="csX6" y="csY6"/>
-              </a:cxn>
-              <a:cxn ang="0">
-                <a:pos x="csX7" y="csY7"/>
-              </a:cxn>
-              <a:cxn ang="0">
-                <a:pos x="csX8" y="csY8"/>
-              </a:cxn>
-              <a:cxn ang="0">
-                <a:pos x="csX9" y="csY9"/>
-              </a:cxn>
-            </a:cxnLst>
-            <a:rect l="l" t="t" r="r" b="b"/>
-            <a:pathLst>
-              <a:path w="937260" h="649524">
-                <a:moveTo>
-                  <a:pt x="0" y="0"/>
-                </a:moveTo>
-                <a:lnTo>
-                  <a:pt x="29480" y="6421"/>
-                </a:lnTo>
-                <a:cubicBezTo>
-                  <a:pt x="164457" y="29331"/>
-                  <a:pt x="312857" y="42000"/>
-                  <a:pt x="468630" y="42000"/>
-                </a:cubicBezTo>
-                <a:cubicBezTo>
-                  <a:pt x="624404" y="42000"/>
-                  <a:pt x="772803" y="29331"/>
-                  <a:pt x="907780" y="6421"/>
-                </a:cubicBezTo>
-                <a:lnTo>
-                  <a:pt x="937260" y="0"/>
-                </a:lnTo>
-                <a:lnTo>
-                  <a:pt x="937260" y="649524"/>
-                </a:lnTo>
-                <a:lnTo>
-                  <a:pt x="907780" y="643103"/>
-                </a:lnTo>
-                <a:cubicBezTo>
-                  <a:pt x="772803" y="620193"/>
-                  <a:pt x="624404" y="607524"/>
-                  <a:pt x="468630" y="607524"/>
-                </a:cubicBezTo>
-                <a:cubicBezTo>
-                  <a:pt x="312857" y="607524"/>
-                  <a:pt x="164457" y="620193"/>
-                  <a:pt x="29480" y="643103"/>
-                </a:cubicBezTo>
-                <a:lnTo>
-                  <a:pt x="0" y="649524"/>
-                </a:lnTo>
-                <a:close/>
-              </a:path>
-            </a:pathLst>
-          </a:custGeom>
-          <a:solidFill>
-            <a:srgbClr val="36E67F"/>
-          </a:solidFill>
-          <a:ln>
-            <a:noFill/>
-          </a:ln>
-        </p:spPr>
-        <p:style>
-          <a:lnRef idx="2">
-            <a:schemeClr val="accent1">
-              <a:shade val="15000"/>
-            </a:schemeClr>
-          </a:lnRef>
-          <a:fillRef idx="1">
-            <a:schemeClr val="accent1"/>
-          </a:fillRef>
-          <a:effectRef idx="0">
-            <a:schemeClr val="accent1"/>
-          </a:effectRef>
-          <a:fontRef idx="minor">
-            <a:schemeClr val="lt1"/>
-          </a:fontRef>
-        </p:style>
-        <p:txBody>
-          <a:bodyPr wrap="square" rtlCol="0" anchor="ctr">
-            <a:noAutofit/>
-          </a:bodyPr>
-          <a:lstStyle/>
-          <a:p>
-            <a:pPr algn="ctr"/>
-            <a:endParaRPr lang="en-US"/>
-          </a:p>
-        </p:txBody>
-      </p:sp>
-      <p:sp>
-        <p:nvSpPr>
-          <p:cNvPr id="15" name="Freeform: Shape 14">
-            <a:extLst>
-              <a:ext uri="{FF2B5EF4-FFF2-40B4-BE49-F238E27FC236}">
-                <a16:creationId xmlns:a16="http://schemas.microsoft.com/office/drawing/2014/main" id="{B231A9A5-1710-4C6B-848A-D5C60834FE34}"/>
-              </a:ext>
-            </a:extLst>
-          </p:cNvPr>
-          <p:cNvSpPr/>
-          <p:nvPr/>
-        </p:nvSpPr>
-        <p:spPr>
-          <a:xfrm>
-            <a:off x="5958835" y="46959"/>
+            <a:off x="6235672" y="4351606"/>
             <a:ext cx="937260" cy="652165"/>
           </a:xfrm>
           <a:custGeom>
@@ -3166,6 +6294,2439 @@
           </a:custGeom>
           <a:solidFill>
             <a:srgbClr val="36E67F"/>
+          </a:solidFill>
+          <a:ln w="3175">
+            <a:solidFill>
+              <a:srgbClr val="00B050"/>
+            </a:solidFill>
+          </a:ln>
+        </p:spPr>
+        <p:style>
+          <a:lnRef idx="2">
+            <a:schemeClr val="accent1">
+              <a:shade val="15000"/>
+            </a:schemeClr>
+          </a:lnRef>
+          <a:fillRef idx="1">
+            <a:schemeClr val="accent1"/>
+          </a:fillRef>
+          <a:effectRef idx="0">
+            <a:schemeClr val="accent1"/>
+          </a:effectRef>
+          <a:fontRef idx="minor">
+            <a:schemeClr val="lt1"/>
+          </a:fontRef>
+        </p:style>
+        <p:txBody>
+          <a:bodyPr wrap="square" rtlCol="0" anchor="ctr">
+            <a:noAutofit/>
+          </a:bodyPr>
+          <a:lstStyle/>
+          <a:p>
+            <a:pPr algn="ctr"/>
+            <a:endParaRPr lang="en-US"/>
+          </a:p>
+        </p:txBody>
+      </p:sp>
+      <p:sp>
+        <p:nvSpPr>
+          <p:cNvPr id="40" name="Rectangle: Rounded Corners 39">
+            <a:extLst>
+              <a:ext uri="{FF2B5EF4-FFF2-40B4-BE49-F238E27FC236}">
+                <a16:creationId xmlns:a16="http://schemas.microsoft.com/office/drawing/2014/main" id="{89392FCD-1BF2-D49D-59C8-CF3D31931DF8}"/>
+              </a:ext>
+            </a:extLst>
+          </p:cNvPr>
+          <p:cNvSpPr/>
+          <p:nvPr/>
+        </p:nvSpPr>
+        <p:spPr>
+          <a:xfrm>
+            <a:off x="2546329" y="4351605"/>
+            <a:ext cx="937260" cy="652166"/>
+          </a:xfrm>
+          <a:prstGeom prst="roundRect">
+            <a:avLst/>
+          </a:prstGeom>
+          <a:gradFill flip="none" rotWithShape="1">
+            <a:gsLst>
+              <a:gs pos="100000">
+                <a:schemeClr val="bg1">
+                  <a:alpha val="46000"/>
+                </a:schemeClr>
+              </a:gs>
+              <a:gs pos="0">
+                <a:schemeClr val="accent1">
+                  <a:tint val="23500"/>
+                  <a:satMod val="160000"/>
+                  <a:alpha val="0"/>
+                </a:schemeClr>
+              </a:gs>
+            </a:gsLst>
+            <a:path path="circle">
+              <a:fillToRect l="100000" t="100000"/>
+            </a:path>
+            <a:tileRect r="-100000" b="-100000"/>
+          </a:gradFill>
+          <a:ln>
+            <a:noFill/>
+          </a:ln>
+        </p:spPr>
+        <p:style>
+          <a:lnRef idx="2">
+            <a:schemeClr val="accent1">
+              <a:shade val="15000"/>
+            </a:schemeClr>
+          </a:lnRef>
+          <a:fillRef idx="1">
+            <a:schemeClr val="accent1"/>
+          </a:fillRef>
+          <a:effectRef idx="0">
+            <a:schemeClr val="accent1"/>
+          </a:effectRef>
+          <a:fontRef idx="minor">
+            <a:schemeClr val="lt1"/>
+          </a:fontRef>
+        </p:style>
+        <p:txBody>
+          <a:bodyPr rtlCol="0" anchor="ctr"/>
+          <a:lstStyle/>
+          <a:p>
+            <a:pPr algn="ctr"/>
+            <a:endParaRPr lang="en-US"/>
+          </a:p>
+        </p:txBody>
+      </p:sp>
+      <p:sp>
+        <p:nvSpPr>
+          <p:cNvPr id="41" name="Freeform: Shape 40">
+            <a:extLst>
+              <a:ext uri="{FF2B5EF4-FFF2-40B4-BE49-F238E27FC236}">
+                <a16:creationId xmlns:a16="http://schemas.microsoft.com/office/drawing/2014/main" id="{9BCAF1F1-9E2A-5A10-5A33-DE1FCE7BF266}"/>
+              </a:ext>
+            </a:extLst>
+          </p:cNvPr>
+          <p:cNvSpPr/>
+          <p:nvPr/>
+        </p:nvSpPr>
+        <p:spPr>
+          <a:xfrm>
+            <a:off x="7698281" y="4351606"/>
+            <a:ext cx="932818" cy="652165"/>
+          </a:xfrm>
+          <a:custGeom>
+            <a:avLst/>
+            <a:gdLst>
+              <a:gd name="csX0" fmla="*/ 0 w 1761688"/>
+              <a:gd name="csY0" fmla="*/ 0 h 1291904"/>
+              <a:gd name="csX1" fmla="*/ 75501 w 1761688"/>
+              <a:gd name="csY1" fmla="*/ 0 h 1291904"/>
+              <a:gd name="csX2" fmla="*/ 1686187 w 1761688"/>
+              <a:gd name="csY2" fmla="*/ 0 h 1291904"/>
+              <a:gd name="csX3" fmla="*/ 1761688 w 1761688"/>
+              <a:gd name="csY3" fmla="*/ 0 h 1291904"/>
+              <a:gd name="csX4" fmla="*/ 1761688 w 1761688"/>
+              <a:gd name="csY4" fmla="*/ 102765 h 1291904"/>
+              <a:gd name="csX5" fmla="*/ 1686187 w 1761688"/>
+              <a:gd name="csY5" fmla="*/ 102765 h 1291904"/>
+              <a:gd name="csX6" fmla="*/ 1686187 w 1761688"/>
+              <a:gd name="csY6" fmla="*/ 1189139 h 1291904"/>
+              <a:gd name="csX7" fmla="*/ 1761688 w 1761688"/>
+              <a:gd name="csY7" fmla="*/ 1189139 h 1291904"/>
+              <a:gd name="csX8" fmla="*/ 1761688 w 1761688"/>
+              <a:gd name="csY8" fmla="*/ 1291904 h 1291904"/>
+              <a:gd name="csX9" fmla="*/ 1686187 w 1761688"/>
+              <a:gd name="csY9" fmla="*/ 1291904 h 1291904"/>
+              <a:gd name="csX10" fmla="*/ 75501 w 1761688"/>
+              <a:gd name="csY10" fmla="*/ 1291904 h 1291904"/>
+              <a:gd name="csX11" fmla="*/ 0 w 1761688"/>
+              <a:gd name="csY11" fmla="*/ 1291904 h 1291904"/>
+              <a:gd name="csX12" fmla="*/ 0 w 1761688"/>
+              <a:gd name="csY12" fmla="*/ 1189139 h 1291904"/>
+              <a:gd name="csX13" fmla="*/ 75501 w 1761688"/>
+              <a:gd name="csY13" fmla="*/ 1189139 h 1291904"/>
+              <a:gd name="csX14" fmla="*/ 75501 w 1761688"/>
+              <a:gd name="csY14" fmla="*/ 102765 h 1291904"/>
+              <a:gd name="csX15" fmla="*/ 0 w 1761688"/>
+              <a:gd name="csY15" fmla="*/ 102765 h 1291904"/>
+            </a:gdLst>
+            <a:ahLst/>
+            <a:cxnLst>
+              <a:cxn ang="0">
+                <a:pos x="csX0" y="csY0"/>
+              </a:cxn>
+              <a:cxn ang="0">
+                <a:pos x="csX1" y="csY1"/>
+              </a:cxn>
+              <a:cxn ang="0">
+                <a:pos x="csX2" y="csY2"/>
+              </a:cxn>
+              <a:cxn ang="0">
+                <a:pos x="csX3" y="csY3"/>
+              </a:cxn>
+              <a:cxn ang="0">
+                <a:pos x="csX4" y="csY4"/>
+              </a:cxn>
+              <a:cxn ang="0">
+                <a:pos x="csX5" y="csY5"/>
+              </a:cxn>
+              <a:cxn ang="0">
+                <a:pos x="csX6" y="csY6"/>
+              </a:cxn>
+              <a:cxn ang="0">
+                <a:pos x="csX7" y="csY7"/>
+              </a:cxn>
+              <a:cxn ang="0">
+                <a:pos x="csX8" y="csY8"/>
+              </a:cxn>
+              <a:cxn ang="0">
+                <a:pos x="csX9" y="csY9"/>
+              </a:cxn>
+              <a:cxn ang="0">
+                <a:pos x="csX10" y="csY10"/>
+              </a:cxn>
+              <a:cxn ang="0">
+                <a:pos x="csX11" y="csY11"/>
+              </a:cxn>
+              <a:cxn ang="0">
+                <a:pos x="csX12" y="csY12"/>
+              </a:cxn>
+              <a:cxn ang="0">
+                <a:pos x="csX13" y="csY13"/>
+              </a:cxn>
+              <a:cxn ang="0">
+                <a:pos x="csX14" y="csY14"/>
+              </a:cxn>
+              <a:cxn ang="0">
+                <a:pos x="csX15" y="csY15"/>
+              </a:cxn>
+            </a:cxnLst>
+            <a:rect l="l" t="t" r="r" b="b"/>
+            <a:pathLst>
+              <a:path w="1761688" h="1291904">
+                <a:moveTo>
+                  <a:pt x="0" y="0"/>
+                </a:moveTo>
+                <a:lnTo>
+                  <a:pt x="75501" y="0"/>
+                </a:lnTo>
+                <a:lnTo>
+                  <a:pt x="1686187" y="0"/>
+                </a:lnTo>
+                <a:lnTo>
+                  <a:pt x="1761688" y="0"/>
+                </a:lnTo>
+                <a:lnTo>
+                  <a:pt x="1761688" y="102765"/>
+                </a:lnTo>
+                <a:lnTo>
+                  <a:pt x="1686187" y="102765"/>
+                </a:lnTo>
+                <a:lnTo>
+                  <a:pt x="1686187" y="1189139"/>
+                </a:lnTo>
+                <a:lnTo>
+                  <a:pt x="1761688" y="1189139"/>
+                </a:lnTo>
+                <a:lnTo>
+                  <a:pt x="1761688" y="1291904"/>
+                </a:lnTo>
+                <a:lnTo>
+                  <a:pt x="1686187" y="1291904"/>
+                </a:lnTo>
+                <a:lnTo>
+                  <a:pt x="75501" y="1291904"/>
+                </a:lnTo>
+                <a:lnTo>
+                  <a:pt x="0" y="1291904"/>
+                </a:lnTo>
+                <a:lnTo>
+                  <a:pt x="0" y="1189139"/>
+                </a:lnTo>
+                <a:lnTo>
+                  <a:pt x="75501" y="1189139"/>
+                </a:lnTo>
+                <a:lnTo>
+                  <a:pt x="75501" y="102765"/>
+                </a:lnTo>
+                <a:lnTo>
+                  <a:pt x="0" y="102765"/>
+                </a:lnTo>
+                <a:close/>
+              </a:path>
+            </a:pathLst>
+          </a:custGeom>
+          <a:gradFill flip="none" rotWithShape="1">
+            <a:gsLst>
+              <a:gs pos="100000">
+                <a:schemeClr val="bg1">
+                  <a:alpha val="46000"/>
+                </a:schemeClr>
+              </a:gs>
+              <a:gs pos="0">
+                <a:schemeClr val="accent1">
+                  <a:tint val="23500"/>
+                  <a:satMod val="160000"/>
+                  <a:alpha val="0"/>
+                </a:schemeClr>
+              </a:gs>
+            </a:gsLst>
+            <a:path path="circle">
+              <a:fillToRect l="100000" t="100000"/>
+            </a:path>
+            <a:tileRect r="-100000" b="-100000"/>
+          </a:gradFill>
+          <a:ln>
+            <a:noFill/>
+          </a:ln>
+        </p:spPr>
+        <p:style>
+          <a:lnRef idx="2">
+            <a:schemeClr val="accent1">
+              <a:shade val="15000"/>
+            </a:schemeClr>
+          </a:lnRef>
+          <a:fillRef idx="1">
+            <a:schemeClr val="accent1"/>
+          </a:fillRef>
+          <a:effectRef idx="0">
+            <a:schemeClr val="accent1"/>
+          </a:effectRef>
+          <a:fontRef idx="minor">
+            <a:schemeClr val="lt1"/>
+          </a:fontRef>
+        </p:style>
+        <p:txBody>
+          <a:bodyPr wrap="square" rtlCol="0" anchor="ctr">
+            <a:noAutofit/>
+          </a:bodyPr>
+          <a:lstStyle/>
+          <a:p>
+            <a:pPr algn="ctr"/>
+            <a:endParaRPr lang="en-US"/>
+          </a:p>
+        </p:txBody>
+      </p:sp>
+      <p:sp>
+        <p:nvSpPr>
+          <p:cNvPr id="42" name="Freeform: Shape 41">
+            <a:extLst>
+              <a:ext uri="{FF2B5EF4-FFF2-40B4-BE49-F238E27FC236}">
+                <a16:creationId xmlns:a16="http://schemas.microsoft.com/office/drawing/2014/main" id="{8FE09A29-1662-8CD5-0334-02F4A401BD08}"/>
+              </a:ext>
+            </a:extLst>
+          </p:cNvPr>
+          <p:cNvSpPr/>
+          <p:nvPr/>
+        </p:nvSpPr>
+        <p:spPr>
+          <a:xfrm rot="16200000" flipH="1">
+            <a:off x="5198786" y="4209059"/>
+            <a:ext cx="652164" cy="937260"/>
+          </a:xfrm>
+          <a:custGeom>
+            <a:avLst/>
+            <a:gdLst>
+              <a:gd name="csX0" fmla="*/ 0 w 1291905"/>
+              <a:gd name="csY0" fmla="*/ 0 h 1770078"/>
+              <a:gd name="csX1" fmla="*/ 0 w 1291905"/>
+              <a:gd name="csY1" fmla="*/ 478173 h 1770078"/>
+              <a:gd name="csX2" fmla="*/ 0 w 1291905"/>
+              <a:gd name="csY2" fmla="*/ 1291905 h 1770078"/>
+              <a:gd name="csX3" fmla="*/ 0 w 1291905"/>
+              <a:gd name="csY3" fmla="*/ 1770078 h 1770078"/>
+              <a:gd name="csX4" fmla="*/ 6123 w 1291905"/>
+              <a:gd name="csY4" fmla="*/ 1770078 h 1770078"/>
+              <a:gd name="csX5" fmla="*/ 109381 w 1291905"/>
+              <a:gd name="csY5" fmla="*/ 1658008 h 1770078"/>
+              <a:gd name="csX6" fmla="*/ 212639 w 1291905"/>
+              <a:gd name="csY6" fmla="*/ 1770078 h 1770078"/>
+              <a:gd name="csX7" fmla="*/ 221976 w 1291905"/>
+              <a:gd name="csY7" fmla="*/ 1770078 h 1770078"/>
+              <a:gd name="csX8" fmla="*/ 325234 w 1291905"/>
+              <a:gd name="csY8" fmla="*/ 1658008 h 1770078"/>
+              <a:gd name="csX9" fmla="*/ 428492 w 1291905"/>
+              <a:gd name="csY9" fmla="*/ 1770078 h 1770078"/>
+              <a:gd name="csX10" fmla="*/ 437829 w 1291905"/>
+              <a:gd name="csY10" fmla="*/ 1770078 h 1770078"/>
+              <a:gd name="csX11" fmla="*/ 541087 w 1291905"/>
+              <a:gd name="csY11" fmla="*/ 1658008 h 1770078"/>
+              <a:gd name="csX12" fmla="*/ 644346 w 1291905"/>
+              <a:gd name="csY12" fmla="*/ 1770078 h 1770078"/>
+              <a:gd name="csX13" fmla="*/ 653683 w 1291905"/>
+              <a:gd name="csY13" fmla="*/ 1770078 h 1770078"/>
+              <a:gd name="csX14" fmla="*/ 756941 w 1291905"/>
+              <a:gd name="csY14" fmla="*/ 1658008 h 1770078"/>
+              <a:gd name="csX15" fmla="*/ 860199 w 1291905"/>
+              <a:gd name="csY15" fmla="*/ 1770078 h 1770078"/>
+              <a:gd name="csX16" fmla="*/ 869536 w 1291905"/>
+              <a:gd name="csY16" fmla="*/ 1770078 h 1770078"/>
+              <a:gd name="csX17" fmla="*/ 972794 w 1291905"/>
+              <a:gd name="csY17" fmla="*/ 1658008 h 1770078"/>
+              <a:gd name="csX18" fmla="*/ 1076052 w 1291905"/>
+              <a:gd name="csY18" fmla="*/ 1770078 h 1770078"/>
+              <a:gd name="csX19" fmla="*/ 1085389 w 1291905"/>
+              <a:gd name="csY19" fmla="*/ 1770078 h 1770078"/>
+              <a:gd name="csX20" fmla="*/ 1188647 w 1291905"/>
+              <a:gd name="csY20" fmla="*/ 1658008 h 1770078"/>
+              <a:gd name="csX21" fmla="*/ 1291905 w 1291905"/>
+              <a:gd name="csY21" fmla="*/ 1770078 h 1770078"/>
+              <a:gd name="csX22" fmla="*/ 1291905 w 1291905"/>
+              <a:gd name="csY22" fmla="*/ 1291905 h 1770078"/>
+              <a:gd name="csX23" fmla="*/ 1291905 w 1291905"/>
+              <a:gd name="csY23" fmla="*/ 478173 h 1770078"/>
+              <a:gd name="csX24" fmla="*/ 1291905 w 1291905"/>
+              <a:gd name="csY24" fmla="*/ 0 h 1770078"/>
+              <a:gd name="csX25" fmla="*/ 1188647 w 1291905"/>
+              <a:gd name="csY25" fmla="*/ 112070 h 1770078"/>
+              <a:gd name="csX26" fmla="*/ 1085389 w 1291905"/>
+              <a:gd name="csY26" fmla="*/ 0 h 1770078"/>
+              <a:gd name="csX27" fmla="*/ 1076052 w 1291905"/>
+              <a:gd name="csY27" fmla="*/ 0 h 1770078"/>
+              <a:gd name="csX28" fmla="*/ 972794 w 1291905"/>
+              <a:gd name="csY28" fmla="*/ 112070 h 1770078"/>
+              <a:gd name="csX29" fmla="*/ 869536 w 1291905"/>
+              <a:gd name="csY29" fmla="*/ 0 h 1770078"/>
+              <a:gd name="csX30" fmla="*/ 860199 w 1291905"/>
+              <a:gd name="csY30" fmla="*/ 0 h 1770078"/>
+              <a:gd name="csX31" fmla="*/ 756941 w 1291905"/>
+              <a:gd name="csY31" fmla="*/ 112070 h 1770078"/>
+              <a:gd name="csX32" fmla="*/ 653683 w 1291905"/>
+              <a:gd name="csY32" fmla="*/ 0 h 1770078"/>
+              <a:gd name="csX33" fmla="*/ 644346 w 1291905"/>
+              <a:gd name="csY33" fmla="*/ 0 h 1770078"/>
+              <a:gd name="csX34" fmla="*/ 541087 w 1291905"/>
+              <a:gd name="csY34" fmla="*/ 112070 h 1770078"/>
+              <a:gd name="csX35" fmla="*/ 437829 w 1291905"/>
+              <a:gd name="csY35" fmla="*/ 0 h 1770078"/>
+              <a:gd name="csX36" fmla="*/ 428492 w 1291905"/>
+              <a:gd name="csY36" fmla="*/ 0 h 1770078"/>
+              <a:gd name="csX37" fmla="*/ 325234 w 1291905"/>
+              <a:gd name="csY37" fmla="*/ 112070 h 1770078"/>
+              <a:gd name="csX38" fmla="*/ 221976 w 1291905"/>
+              <a:gd name="csY38" fmla="*/ 0 h 1770078"/>
+              <a:gd name="csX39" fmla="*/ 212639 w 1291905"/>
+              <a:gd name="csY39" fmla="*/ 0 h 1770078"/>
+              <a:gd name="csX40" fmla="*/ 109381 w 1291905"/>
+              <a:gd name="csY40" fmla="*/ 112070 h 1770078"/>
+              <a:gd name="csX41" fmla="*/ 6123 w 1291905"/>
+              <a:gd name="csY41" fmla="*/ 0 h 1770078"/>
+            </a:gdLst>
+            <a:ahLst/>
+            <a:cxnLst>
+              <a:cxn ang="0">
+                <a:pos x="csX0" y="csY0"/>
+              </a:cxn>
+              <a:cxn ang="0">
+                <a:pos x="csX1" y="csY1"/>
+              </a:cxn>
+              <a:cxn ang="0">
+                <a:pos x="csX2" y="csY2"/>
+              </a:cxn>
+              <a:cxn ang="0">
+                <a:pos x="csX3" y="csY3"/>
+              </a:cxn>
+              <a:cxn ang="0">
+                <a:pos x="csX4" y="csY4"/>
+              </a:cxn>
+              <a:cxn ang="0">
+                <a:pos x="csX5" y="csY5"/>
+              </a:cxn>
+              <a:cxn ang="0">
+                <a:pos x="csX6" y="csY6"/>
+              </a:cxn>
+              <a:cxn ang="0">
+                <a:pos x="csX7" y="csY7"/>
+              </a:cxn>
+              <a:cxn ang="0">
+                <a:pos x="csX8" y="csY8"/>
+              </a:cxn>
+              <a:cxn ang="0">
+                <a:pos x="csX9" y="csY9"/>
+              </a:cxn>
+              <a:cxn ang="0">
+                <a:pos x="csX10" y="csY10"/>
+              </a:cxn>
+              <a:cxn ang="0">
+                <a:pos x="csX11" y="csY11"/>
+              </a:cxn>
+              <a:cxn ang="0">
+                <a:pos x="csX12" y="csY12"/>
+              </a:cxn>
+              <a:cxn ang="0">
+                <a:pos x="csX13" y="csY13"/>
+              </a:cxn>
+              <a:cxn ang="0">
+                <a:pos x="csX14" y="csY14"/>
+              </a:cxn>
+              <a:cxn ang="0">
+                <a:pos x="csX15" y="csY15"/>
+              </a:cxn>
+              <a:cxn ang="0">
+                <a:pos x="csX16" y="csY16"/>
+              </a:cxn>
+              <a:cxn ang="0">
+                <a:pos x="csX17" y="csY17"/>
+              </a:cxn>
+              <a:cxn ang="0">
+                <a:pos x="csX18" y="csY18"/>
+              </a:cxn>
+              <a:cxn ang="0">
+                <a:pos x="csX19" y="csY19"/>
+              </a:cxn>
+              <a:cxn ang="0">
+                <a:pos x="csX20" y="csY20"/>
+              </a:cxn>
+              <a:cxn ang="0">
+                <a:pos x="csX21" y="csY21"/>
+              </a:cxn>
+              <a:cxn ang="0">
+                <a:pos x="csX22" y="csY22"/>
+              </a:cxn>
+              <a:cxn ang="0">
+                <a:pos x="csX23" y="csY23"/>
+              </a:cxn>
+              <a:cxn ang="0">
+                <a:pos x="csX24" y="csY24"/>
+              </a:cxn>
+              <a:cxn ang="0">
+                <a:pos x="csX25" y="csY25"/>
+              </a:cxn>
+              <a:cxn ang="0">
+                <a:pos x="csX26" y="csY26"/>
+              </a:cxn>
+              <a:cxn ang="0">
+                <a:pos x="csX27" y="csY27"/>
+              </a:cxn>
+              <a:cxn ang="0">
+                <a:pos x="csX28" y="csY28"/>
+              </a:cxn>
+              <a:cxn ang="0">
+                <a:pos x="csX29" y="csY29"/>
+              </a:cxn>
+              <a:cxn ang="0">
+                <a:pos x="csX30" y="csY30"/>
+              </a:cxn>
+              <a:cxn ang="0">
+                <a:pos x="csX31" y="csY31"/>
+              </a:cxn>
+              <a:cxn ang="0">
+                <a:pos x="csX32" y="csY32"/>
+              </a:cxn>
+              <a:cxn ang="0">
+                <a:pos x="csX33" y="csY33"/>
+              </a:cxn>
+              <a:cxn ang="0">
+                <a:pos x="csX34" y="csY34"/>
+              </a:cxn>
+              <a:cxn ang="0">
+                <a:pos x="csX35" y="csY35"/>
+              </a:cxn>
+              <a:cxn ang="0">
+                <a:pos x="csX36" y="csY36"/>
+              </a:cxn>
+              <a:cxn ang="0">
+                <a:pos x="csX37" y="csY37"/>
+              </a:cxn>
+              <a:cxn ang="0">
+                <a:pos x="csX38" y="csY38"/>
+              </a:cxn>
+              <a:cxn ang="0">
+                <a:pos x="csX39" y="csY39"/>
+              </a:cxn>
+              <a:cxn ang="0">
+                <a:pos x="csX40" y="csY40"/>
+              </a:cxn>
+              <a:cxn ang="0">
+                <a:pos x="csX41" y="csY41"/>
+              </a:cxn>
+            </a:cxnLst>
+            <a:rect l="l" t="t" r="r" b="b"/>
+            <a:pathLst>
+              <a:path w="1291905" h="1770078">
+                <a:moveTo>
+                  <a:pt x="0" y="0"/>
+                </a:moveTo>
+                <a:lnTo>
+                  <a:pt x="0" y="478173"/>
+                </a:lnTo>
+                <a:lnTo>
+                  <a:pt x="0" y="1291905"/>
+                </a:lnTo>
+                <a:lnTo>
+                  <a:pt x="0" y="1770078"/>
+                </a:lnTo>
+                <a:lnTo>
+                  <a:pt x="6123" y="1770078"/>
+                </a:lnTo>
+                <a:lnTo>
+                  <a:pt x="109381" y="1658008"/>
+                </a:lnTo>
+                <a:lnTo>
+                  <a:pt x="212639" y="1770078"/>
+                </a:lnTo>
+                <a:lnTo>
+                  <a:pt x="221976" y="1770078"/>
+                </a:lnTo>
+                <a:lnTo>
+                  <a:pt x="325234" y="1658008"/>
+                </a:lnTo>
+                <a:lnTo>
+                  <a:pt x="428492" y="1770078"/>
+                </a:lnTo>
+                <a:lnTo>
+                  <a:pt x="437829" y="1770078"/>
+                </a:lnTo>
+                <a:lnTo>
+                  <a:pt x="541087" y="1658008"/>
+                </a:lnTo>
+                <a:lnTo>
+                  <a:pt x="644346" y="1770078"/>
+                </a:lnTo>
+                <a:lnTo>
+                  <a:pt x="653683" y="1770078"/>
+                </a:lnTo>
+                <a:lnTo>
+                  <a:pt x="756941" y="1658008"/>
+                </a:lnTo>
+                <a:lnTo>
+                  <a:pt x="860199" y="1770078"/>
+                </a:lnTo>
+                <a:lnTo>
+                  <a:pt x="869536" y="1770078"/>
+                </a:lnTo>
+                <a:lnTo>
+                  <a:pt x="972794" y="1658008"/>
+                </a:lnTo>
+                <a:lnTo>
+                  <a:pt x="1076052" y="1770078"/>
+                </a:lnTo>
+                <a:lnTo>
+                  <a:pt x="1085389" y="1770078"/>
+                </a:lnTo>
+                <a:lnTo>
+                  <a:pt x="1188647" y="1658008"/>
+                </a:lnTo>
+                <a:lnTo>
+                  <a:pt x="1291905" y="1770078"/>
+                </a:lnTo>
+                <a:lnTo>
+                  <a:pt x="1291905" y="1291905"/>
+                </a:lnTo>
+                <a:lnTo>
+                  <a:pt x="1291905" y="478173"/>
+                </a:lnTo>
+                <a:lnTo>
+                  <a:pt x="1291905" y="0"/>
+                </a:lnTo>
+                <a:lnTo>
+                  <a:pt x="1188647" y="112070"/>
+                </a:lnTo>
+                <a:lnTo>
+                  <a:pt x="1085389" y="0"/>
+                </a:lnTo>
+                <a:lnTo>
+                  <a:pt x="1076052" y="0"/>
+                </a:lnTo>
+                <a:lnTo>
+                  <a:pt x="972794" y="112070"/>
+                </a:lnTo>
+                <a:lnTo>
+                  <a:pt x="869536" y="0"/>
+                </a:lnTo>
+                <a:lnTo>
+                  <a:pt x="860199" y="0"/>
+                </a:lnTo>
+                <a:lnTo>
+                  <a:pt x="756941" y="112070"/>
+                </a:lnTo>
+                <a:lnTo>
+                  <a:pt x="653683" y="0"/>
+                </a:lnTo>
+                <a:lnTo>
+                  <a:pt x="644346" y="0"/>
+                </a:lnTo>
+                <a:lnTo>
+                  <a:pt x="541087" y="112070"/>
+                </a:lnTo>
+                <a:lnTo>
+                  <a:pt x="437829" y="0"/>
+                </a:lnTo>
+                <a:lnTo>
+                  <a:pt x="428492" y="0"/>
+                </a:lnTo>
+                <a:lnTo>
+                  <a:pt x="325234" y="112070"/>
+                </a:lnTo>
+                <a:lnTo>
+                  <a:pt x="221976" y="0"/>
+                </a:lnTo>
+                <a:lnTo>
+                  <a:pt x="212639" y="0"/>
+                </a:lnTo>
+                <a:lnTo>
+                  <a:pt x="109381" y="112070"/>
+                </a:lnTo>
+                <a:lnTo>
+                  <a:pt x="6123" y="0"/>
+                </a:lnTo>
+                <a:close/>
+              </a:path>
+            </a:pathLst>
+          </a:custGeom>
+          <a:gradFill flip="none" rotWithShape="1">
+            <a:gsLst>
+              <a:gs pos="100000">
+                <a:schemeClr val="bg1">
+                  <a:alpha val="46000"/>
+                </a:schemeClr>
+              </a:gs>
+              <a:gs pos="0">
+                <a:schemeClr val="accent1">
+                  <a:tint val="23500"/>
+                  <a:satMod val="160000"/>
+                  <a:alpha val="0"/>
+                </a:schemeClr>
+              </a:gs>
+            </a:gsLst>
+            <a:path path="circle">
+              <a:fillToRect l="100000" t="100000"/>
+            </a:path>
+            <a:tileRect r="-100000" b="-100000"/>
+          </a:gradFill>
+          <a:ln>
+            <a:noFill/>
+          </a:ln>
+        </p:spPr>
+        <p:style>
+          <a:lnRef idx="2">
+            <a:schemeClr val="accent1">
+              <a:shade val="15000"/>
+            </a:schemeClr>
+          </a:lnRef>
+          <a:fillRef idx="1">
+            <a:schemeClr val="accent1"/>
+          </a:fillRef>
+          <a:effectRef idx="0">
+            <a:schemeClr val="accent1"/>
+          </a:effectRef>
+          <a:fontRef idx="minor">
+            <a:schemeClr val="lt1"/>
+          </a:fontRef>
+        </p:style>
+        <p:txBody>
+          <a:bodyPr wrap="square" rtlCol="0" anchor="ctr">
+            <a:noAutofit/>
+          </a:bodyPr>
+          <a:lstStyle/>
+          <a:p>
+            <a:pPr algn="ctr"/>
+            <a:endParaRPr lang="en-US"/>
+          </a:p>
+        </p:txBody>
+      </p:sp>
+      <p:sp>
+        <p:nvSpPr>
+          <p:cNvPr id="43" name="Freeform: Shape 42">
+            <a:extLst>
+              <a:ext uri="{FF2B5EF4-FFF2-40B4-BE49-F238E27FC236}">
+                <a16:creationId xmlns:a16="http://schemas.microsoft.com/office/drawing/2014/main" id="{C9ABB434-3C06-ED09-B083-3E5B8DA11418}"/>
+              </a:ext>
+            </a:extLst>
+          </p:cNvPr>
+          <p:cNvSpPr/>
+          <p:nvPr/>
+        </p:nvSpPr>
+        <p:spPr>
+          <a:xfrm>
+            <a:off x="3879920" y="4351606"/>
+            <a:ext cx="937260" cy="652164"/>
+          </a:xfrm>
+          <a:custGeom>
+            <a:avLst/>
+            <a:gdLst>
+              <a:gd name="csX0" fmla="*/ 885039 w 1770078"/>
+              <a:gd name="csY0" fmla="*/ 0 h 1291903"/>
+              <a:gd name="csX1" fmla="*/ 1752097 w 1770078"/>
+              <a:gd name="csY1" fmla="*/ 364364 h 1291903"/>
+              <a:gd name="csX2" fmla="*/ 1756386 w 1770078"/>
+              <a:gd name="csY2" fmla="*/ 378854 h 1291903"/>
+              <a:gd name="csX3" fmla="*/ 1770078 w 1770078"/>
+              <a:gd name="csY3" fmla="*/ 378854 h 1291903"/>
+              <a:gd name="csX4" fmla="*/ 1770078 w 1770078"/>
+              <a:gd name="csY4" fmla="*/ 456330 h 1291903"/>
+              <a:gd name="csX5" fmla="*/ 1770078 w 1770078"/>
+              <a:gd name="csY5" fmla="*/ 1291903 h 1291903"/>
+              <a:gd name="csX6" fmla="*/ 0 w 1770078"/>
+              <a:gd name="csY6" fmla="*/ 1291903 h 1291903"/>
+              <a:gd name="csX7" fmla="*/ 0 w 1770078"/>
+              <a:gd name="csY7" fmla="*/ 456330 h 1291903"/>
+              <a:gd name="csX8" fmla="*/ 0 w 1770078"/>
+              <a:gd name="csY8" fmla="*/ 378854 h 1291903"/>
+              <a:gd name="csX9" fmla="*/ 13692 w 1770078"/>
+              <a:gd name="csY9" fmla="*/ 378854 h 1291903"/>
+              <a:gd name="csX10" fmla="*/ 17981 w 1770078"/>
+              <a:gd name="csY10" fmla="*/ 364364 h 1291903"/>
+              <a:gd name="csX11" fmla="*/ 885039 w 1770078"/>
+              <a:gd name="csY11" fmla="*/ 0 h 1291903"/>
+              <a:gd name="csX0" fmla="*/ 885039 w 1770078"/>
+              <a:gd name="csY0" fmla="*/ 0 h 1291903"/>
+              <a:gd name="csX1" fmla="*/ 1752097 w 1770078"/>
+              <a:gd name="csY1" fmla="*/ 364364 h 1291903"/>
+              <a:gd name="csX2" fmla="*/ 1756386 w 1770078"/>
+              <a:gd name="csY2" fmla="*/ 378854 h 1291903"/>
+              <a:gd name="csX3" fmla="*/ 1770078 w 1770078"/>
+              <a:gd name="csY3" fmla="*/ 378854 h 1291903"/>
+              <a:gd name="csX4" fmla="*/ 1770078 w 1770078"/>
+              <a:gd name="csY4" fmla="*/ 456330 h 1291903"/>
+              <a:gd name="csX5" fmla="*/ 1770078 w 1770078"/>
+              <a:gd name="csY5" fmla="*/ 1291903 h 1291903"/>
+              <a:gd name="csX6" fmla="*/ 0 w 1770078"/>
+              <a:gd name="csY6" fmla="*/ 1291903 h 1291903"/>
+              <a:gd name="csX7" fmla="*/ 0 w 1770078"/>
+              <a:gd name="csY7" fmla="*/ 456330 h 1291903"/>
+              <a:gd name="csX8" fmla="*/ 13692 w 1770078"/>
+              <a:gd name="csY8" fmla="*/ 378854 h 1291903"/>
+              <a:gd name="csX9" fmla="*/ 17981 w 1770078"/>
+              <a:gd name="csY9" fmla="*/ 364364 h 1291903"/>
+              <a:gd name="csX10" fmla="*/ 885039 w 1770078"/>
+              <a:gd name="csY10" fmla="*/ 0 h 1291903"/>
+              <a:gd name="csX0" fmla="*/ 885039 w 1770078"/>
+              <a:gd name="csY0" fmla="*/ 0 h 1291903"/>
+              <a:gd name="csX1" fmla="*/ 1752097 w 1770078"/>
+              <a:gd name="csY1" fmla="*/ 364364 h 1291903"/>
+              <a:gd name="csX2" fmla="*/ 1756386 w 1770078"/>
+              <a:gd name="csY2" fmla="*/ 378854 h 1291903"/>
+              <a:gd name="csX3" fmla="*/ 1770078 w 1770078"/>
+              <a:gd name="csY3" fmla="*/ 378854 h 1291903"/>
+              <a:gd name="csX4" fmla="*/ 1770078 w 1770078"/>
+              <a:gd name="csY4" fmla="*/ 456330 h 1291903"/>
+              <a:gd name="csX5" fmla="*/ 1770078 w 1770078"/>
+              <a:gd name="csY5" fmla="*/ 1291903 h 1291903"/>
+              <a:gd name="csX6" fmla="*/ 0 w 1770078"/>
+              <a:gd name="csY6" fmla="*/ 1291903 h 1291903"/>
+              <a:gd name="csX7" fmla="*/ 0 w 1770078"/>
+              <a:gd name="csY7" fmla="*/ 456330 h 1291903"/>
+              <a:gd name="csX8" fmla="*/ 17981 w 1770078"/>
+              <a:gd name="csY8" fmla="*/ 364364 h 1291903"/>
+              <a:gd name="csX9" fmla="*/ 885039 w 1770078"/>
+              <a:gd name="csY9" fmla="*/ 0 h 1291903"/>
+              <a:gd name="csX0" fmla="*/ 885039 w 1770078"/>
+              <a:gd name="csY0" fmla="*/ 0 h 1291903"/>
+              <a:gd name="csX1" fmla="*/ 1752097 w 1770078"/>
+              <a:gd name="csY1" fmla="*/ 364364 h 1291903"/>
+              <a:gd name="csX2" fmla="*/ 1756386 w 1770078"/>
+              <a:gd name="csY2" fmla="*/ 378854 h 1291903"/>
+              <a:gd name="csX3" fmla="*/ 1770078 w 1770078"/>
+              <a:gd name="csY3" fmla="*/ 456330 h 1291903"/>
+              <a:gd name="csX4" fmla="*/ 1770078 w 1770078"/>
+              <a:gd name="csY4" fmla="*/ 1291903 h 1291903"/>
+              <a:gd name="csX5" fmla="*/ 0 w 1770078"/>
+              <a:gd name="csY5" fmla="*/ 1291903 h 1291903"/>
+              <a:gd name="csX6" fmla="*/ 0 w 1770078"/>
+              <a:gd name="csY6" fmla="*/ 456330 h 1291903"/>
+              <a:gd name="csX7" fmla="*/ 17981 w 1770078"/>
+              <a:gd name="csY7" fmla="*/ 364364 h 1291903"/>
+              <a:gd name="csX8" fmla="*/ 885039 w 1770078"/>
+              <a:gd name="csY8" fmla="*/ 0 h 1291903"/>
+              <a:gd name="csX0" fmla="*/ 885039 w 1770078"/>
+              <a:gd name="csY0" fmla="*/ 0 h 1291903"/>
+              <a:gd name="csX1" fmla="*/ 1752097 w 1770078"/>
+              <a:gd name="csY1" fmla="*/ 364364 h 1291903"/>
+              <a:gd name="csX2" fmla="*/ 1770078 w 1770078"/>
+              <a:gd name="csY2" fmla="*/ 456330 h 1291903"/>
+              <a:gd name="csX3" fmla="*/ 1770078 w 1770078"/>
+              <a:gd name="csY3" fmla="*/ 1291903 h 1291903"/>
+              <a:gd name="csX4" fmla="*/ 0 w 1770078"/>
+              <a:gd name="csY4" fmla="*/ 1291903 h 1291903"/>
+              <a:gd name="csX5" fmla="*/ 0 w 1770078"/>
+              <a:gd name="csY5" fmla="*/ 456330 h 1291903"/>
+              <a:gd name="csX6" fmla="*/ 17981 w 1770078"/>
+              <a:gd name="csY6" fmla="*/ 364364 h 1291903"/>
+              <a:gd name="csX7" fmla="*/ 885039 w 1770078"/>
+              <a:gd name="csY7" fmla="*/ 0 h 1291903"/>
+            </a:gdLst>
+            <a:ahLst/>
+            <a:cxnLst>
+              <a:cxn ang="0">
+                <a:pos x="csX0" y="csY0"/>
+              </a:cxn>
+              <a:cxn ang="0">
+                <a:pos x="csX1" y="csY1"/>
+              </a:cxn>
+              <a:cxn ang="0">
+                <a:pos x="csX2" y="csY2"/>
+              </a:cxn>
+              <a:cxn ang="0">
+                <a:pos x="csX3" y="csY3"/>
+              </a:cxn>
+              <a:cxn ang="0">
+                <a:pos x="csX4" y="csY4"/>
+              </a:cxn>
+              <a:cxn ang="0">
+                <a:pos x="csX5" y="csY5"/>
+              </a:cxn>
+              <a:cxn ang="0">
+                <a:pos x="csX6" y="csY6"/>
+              </a:cxn>
+              <a:cxn ang="0">
+                <a:pos x="csX7" y="csY7"/>
+              </a:cxn>
+            </a:cxnLst>
+            <a:rect l="l" t="t" r="r" b="b"/>
+            <a:pathLst>
+              <a:path w="1770078" h="1291903">
+                <a:moveTo>
+                  <a:pt x="885039" y="0"/>
+                </a:moveTo>
+                <a:cubicBezTo>
+                  <a:pt x="1312734" y="0"/>
+                  <a:pt x="1669571" y="156422"/>
+                  <a:pt x="1752097" y="364364"/>
+                </a:cubicBezTo>
+                <a:lnTo>
+                  <a:pt x="1770078" y="456330"/>
+                </a:lnTo>
+                <a:lnTo>
+                  <a:pt x="1770078" y="1291903"/>
+                </a:lnTo>
+                <a:lnTo>
+                  <a:pt x="0" y="1291903"/>
+                </a:lnTo>
+                <a:lnTo>
+                  <a:pt x="0" y="456330"/>
+                </a:lnTo>
+                <a:lnTo>
+                  <a:pt x="17981" y="364364"/>
+                </a:lnTo>
+                <a:cubicBezTo>
+                  <a:pt x="100507" y="156422"/>
+                  <a:pt x="457344" y="0"/>
+                  <a:pt x="885039" y="0"/>
+                </a:cubicBezTo>
+                <a:close/>
+              </a:path>
+            </a:pathLst>
+          </a:custGeom>
+          <a:gradFill flip="none" rotWithShape="1">
+            <a:gsLst>
+              <a:gs pos="100000">
+                <a:schemeClr val="bg1">
+                  <a:alpha val="46000"/>
+                </a:schemeClr>
+              </a:gs>
+              <a:gs pos="0">
+                <a:schemeClr val="accent1">
+                  <a:tint val="23500"/>
+                  <a:satMod val="160000"/>
+                  <a:alpha val="0"/>
+                </a:schemeClr>
+              </a:gs>
+            </a:gsLst>
+            <a:path path="circle">
+              <a:fillToRect l="100000" t="100000"/>
+            </a:path>
+            <a:tileRect r="-100000" b="-100000"/>
+          </a:gradFill>
+          <a:ln>
+            <a:noFill/>
+          </a:ln>
+        </p:spPr>
+        <p:style>
+          <a:lnRef idx="2">
+            <a:schemeClr val="accent1">
+              <a:shade val="15000"/>
+            </a:schemeClr>
+          </a:lnRef>
+          <a:fillRef idx="1">
+            <a:schemeClr val="accent1"/>
+          </a:fillRef>
+          <a:effectRef idx="0">
+            <a:schemeClr val="accent1"/>
+          </a:effectRef>
+          <a:fontRef idx="minor">
+            <a:schemeClr val="lt1"/>
+          </a:fontRef>
+        </p:style>
+        <p:txBody>
+          <a:bodyPr wrap="square" rtlCol="0" anchor="ctr">
+            <a:noAutofit/>
+          </a:bodyPr>
+          <a:lstStyle/>
+          <a:p>
+            <a:pPr algn="ctr"/>
+            <a:endParaRPr lang="en-US"/>
+          </a:p>
+        </p:txBody>
+      </p:sp>
+      <p:sp>
+        <p:nvSpPr>
+          <p:cNvPr id="44" name="Freeform: Shape 43">
+            <a:extLst>
+              <a:ext uri="{FF2B5EF4-FFF2-40B4-BE49-F238E27FC236}">
+                <a16:creationId xmlns:a16="http://schemas.microsoft.com/office/drawing/2014/main" id="{9F143377-1F13-7440-784E-D6B996921272}"/>
+              </a:ext>
+            </a:extLst>
+          </p:cNvPr>
+          <p:cNvSpPr/>
+          <p:nvPr/>
+        </p:nvSpPr>
+        <p:spPr>
+          <a:xfrm>
+            <a:off x="6235672" y="4351606"/>
+            <a:ext cx="937260" cy="652165"/>
+          </a:xfrm>
+          <a:custGeom>
+            <a:avLst/>
+            <a:gdLst>
+              <a:gd name="csX0" fmla="*/ 0 w 937260"/>
+              <a:gd name="csY0" fmla="*/ 0 h 652165"/>
+              <a:gd name="csX1" fmla="*/ 179 w 937260"/>
+              <a:gd name="csY1" fmla="*/ 0 h 652165"/>
+              <a:gd name="csX2" fmla="*/ 116373 w 937260"/>
+              <a:gd name="csY2" fmla="*/ 31552 h 652165"/>
+              <a:gd name="csX3" fmla="*/ 468630 w 937260"/>
+              <a:gd name="csY3" fmla="*/ 67131 h 652165"/>
+              <a:gd name="csX4" fmla="*/ 820887 w 937260"/>
+              <a:gd name="csY4" fmla="*/ 31552 h 652165"/>
+              <a:gd name="csX5" fmla="*/ 937081 w 937260"/>
+              <a:gd name="csY5" fmla="*/ 0 h 652165"/>
+              <a:gd name="csX6" fmla="*/ 937260 w 937260"/>
+              <a:gd name="csY6" fmla="*/ 0 h 652165"/>
+              <a:gd name="csX7" fmla="*/ 937260 w 937260"/>
+              <a:gd name="csY7" fmla="*/ 652165 h 652165"/>
+              <a:gd name="csX8" fmla="*/ 937078 w 937260"/>
+              <a:gd name="csY8" fmla="*/ 652165 h 652165"/>
+              <a:gd name="csX9" fmla="*/ 820887 w 937260"/>
+              <a:gd name="csY9" fmla="*/ 620614 h 652165"/>
+              <a:gd name="csX10" fmla="*/ 468630 w 937260"/>
+              <a:gd name="csY10" fmla="*/ 585035 h 652165"/>
+              <a:gd name="csX11" fmla="*/ 116373 w 937260"/>
+              <a:gd name="csY11" fmla="*/ 620614 h 652165"/>
+              <a:gd name="csX12" fmla="*/ 183 w 937260"/>
+              <a:gd name="csY12" fmla="*/ 652165 h 652165"/>
+              <a:gd name="csX13" fmla="*/ 0 w 937260"/>
+              <a:gd name="csY13" fmla="*/ 652165 h 652165"/>
+            </a:gdLst>
+            <a:ahLst/>
+            <a:cxnLst>
+              <a:cxn ang="0">
+                <a:pos x="csX0" y="csY0"/>
+              </a:cxn>
+              <a:cxn ang="0">
+                <a:pos x="csX1" y="csY1"/>
+              </a:cxn>
+              <a:cxn ang="0">
+                <a:pos x="csX2" y="csY2"/>
+              </a:cxn>
+              <a:cxn ang="0">
+                <a:pos x="csX3" y="csY3"/>
+              </a:cxn>
+              <a:cxn ang="0">
+                <a:pos x="csX4" y="csY4"/>
+              </a:cxn>
+              <a:cxn ang="0">
+                <a:pos x="csX5" y="csY5"/>
+              </a:cxn>
+              <a:cxn ang="0">
+                <a:pos x="csX6" y="csY6"/>
+              </a:cxn>
+              <a:cxn ang="0">
+                <a:pos x="csX7" y="csY7"/>
+              </a:cxn>
+              <a:cxn ang="0">
+                <a:pos x="csX8" y="csY8"/>
+              </a:cxn>
+              <a:cxn ang="0">
+                <a:pos x="csX9" y="csY9"/>
+              </a:cxn>
+              <a:cxn ang="0">
+                <a:pos x="csX10" y="csY10"/>
+              </a:cxn>
+              <a:cxn ang="0">
+                <a:pos x="csX11" y="csY11"/>
+              </a:cxn>
+              <a:cxn ang="0">
+                <a:pos x="csX12" y="csY12"/>
+              </a:cxn>
+              <a:cxn ang="0">
+                <a:pos x="csX13" y="csY13"/>
+              </a:cxn>
+            </a:cxnLst>
+            <a:rect l="l" t="t" r="r" b="b"/>
+            <a:pathLst>
+              <a:path w="937260" h="652165">
+                <a:moveTo>
+                  <a:pt x="0" y="0"/>
+                </a:moveTo>
+                <a:lnTo>
+                  <a:pt x="179" y="0"/>
+                </a:lnTo>
+                <a:lnTo>
+                  <a:pt x="116373" y="31552"/>
+                </a:lnTo>
+                <a:cubicBezTo>
+                  <a:pt x="224643" y="54462"/>
+                  <a:pt x="343679" y="67131"/>
+                  <a:pt x="468630" y="67131"/>
+                </a:cubicBezTo>
+                <a:cubicBezTo>
+                  <a:pt x="593581" y="67131"/>
+                  <a:pt x="712618" y="54462"/>
+                  <a:pt x="820887" y="31552"/>
+                </a:cubicBezTo>
+                <a:lnTo>
+                  <a:pt x="937081" y="0"/>
+                </a:lnTo>
+                <a:lnTo>
+                  <a:pt x="937260" y="0"/>
+                </a:lnTo>
+                <a:lnTo>
+                  <a:pt x="937260" y="652165"/>
+                </a:lnTo>
+                <a:lnTo>
+                  <a:pt x="937078" y="652165"/>
+                </a:lnTo>
+                <a:lnTo>
+                  <a:pt x="820887" y="620614"/>
+                </a:lnTo>
+                <a:cubicBezTo>
+                  <a:pt x="712618" y="597704"/>
+                  <a:pt x="593581" y="585035"/>
+                  <a:pt x="468630" y="585035"/>
+                </a:cubicBezTo>
+                <a:cubicBezTo>
+                  <a:pt x="343679" y="585035"/>
+                  <a:pt x="224643" y="597704"/>
+                  <a:pt x="116373" y="620614"/>
+                </a:cubicBezTo>
+                <a:lnTo>
+                  <a:pt x="183" y="652165"/>
+                </a:lnTo>
+                <a:lnTo>
+                  <a:pt x="0" y="652165"/>
+                </a:lnTo>
+                <a:close/>
+              </a:path>
+            </a:pathLst>
+          </a:custGeom>
+          <a:gradFill flip="none" rotWithShape="1">
+            <a:gsLst>
+              <a:gs pos="100000">
+                <a:schemeClr val="bg1">
+                  <a:alpha val="46000"/>
+                </a:schemeClr>
+              </a:gs>
+              <a:gs pos="0">
+                <a:schemeClr val="accent1">
+                  <a:tint val="23500"/>
+                  <a:satMod val="160000"/>
+                  <a:alpha val="0"/>
+                </a:schemeClr>
+              </a:gs>
+            </a:gsLst>
+            <a:path path="circle">
+              <a:fillToRect l="100000" t="100000"/>
+            </a:path>
+            <a:tileRect r="-100000" b="-100000"/>
+          </a:gradFill>
+          <a:ln>
+            <a:noFill/>
+          </a:ln>
+        </p:spPr>
+        <p:style>
+          <a:lnRef idx="2">
+            <a:schemeClr val="accent1">
+              <a:shade val="15000"/>
+            </a:schemeClr>
+          </a:lnRef>
+          <a:fillRef idx="1">
+            <a:schemeClr val="accent1"/>
+          </a:fillRef>
+          <a:effectRef idx="0">
+            <a:schemeClr val="accent1"/>
+          </a:effectRef>
+          <a:fontRef idx="minor">
+            <a:schemeClr val="lt1"/>
+          </a:fontRef>
+        </p:style>
+        <p:txBody>
+          <a:bodyPr wrap="square" rtlCol="0" anchor="ctr">
+            <a:noAutofit/>
+          </a:bodyPr>
+          <a:lstStyle/>
+          <a:p>
+            <a:pPr algn="ctr"/>
+            <a:endParaRPr lang="en-US"/>
+          </a:p>
+        </p:txBody>
+      </p:sp>
+      <p:sp>
+        <p:nvSpPr>
+          <p:cNvPr id="46" name="Rectangle: Rounded Corners 45">
+            <a:extLst>
+              <a:ext uri="{FF2B5EF4-FFF2-40B4-BE49-F238E27FC236}">
+                <a16:creationId xmlns:a16="http://schemas.microsoft.com/office/drawing/2014/main" id="{B7556BA3-B4F7-C145-8E04-7821A3972EFE}"/>
+              </a:ext>
+            </a:extLst>
+          </p:cNvPr>
+          <p:cNvSpPr/>
+          <p:nvPr/>
+        </p:nvSpPr>
+        <p:spPr>
+          <a:xfrm>
+            <a:off x="2539535" y="4351605"/>
+            <a:ext cx="937260" cy="652166"/>
+          </a:xfrm>
+          <a:prstGeom prst="roundRect">
+            <a:avLst/>
+          </a:prstGeom>
+          <a:gradFill flip="none" rotWithShape="1">
+            <a:gsLst>
+              <a:gs pos="78000">
+                <a:schemeClr val="bg1">
+                  <a:alpha val="0"/>
+                </a:schemeClr>
+              </a:gs>
+              <a:gs pos="0">
+                <a:srgbClr val="7030A0"/>
+              </a:gs>
+            </a:gsLst>
+            <a:path path="circle">
+              <a:fillToRect l="100000" b="100000"/>
+            </a:path>
+            <a:tileRect t="-100000" r="-100000"/>
+          </a:gradFill>
+          <a:ln>
+            <a:noFill/>
+          </a:ln>
+        </p:spPr>
+        <p:style>
+          <a:lnRef idx="2">
+            <a:schemeClr val="accent1">
+              <a:shade val="15000"/>
+            </a:schemeClr>
+          </a:lnRef>
+          <a:fillRef idx="1">
+            <a:schemeClr val="accent1"/>
+          </a:fillRef>
+          <a:effectRef idx="0">
+            <a:schemeClr val="accent1"/>
+          </a:effectRef>
+          <a:fontRef idx="minor">
+            <a:schemeClr val="lt1"/>
+          </a:fontRef>
+        </p:style>
+        <p:txBody>
+          <a:bodyPr rtlCol="0" anchor="ctr"/>
+          <a:lstStyle/>
+          <a:p>
+            <a:pPr algn="ctr"/>
+            <a:endParaRPr lang="en-US"/>
+          </a:p>
+        </p:txBody>
+      </p:sp>
+      <p:sp>
+        <p:nvSpPr>
+          <p:cNvPr id="47" name="Freeform: Shape 46">
+            <a:extLst>
+              <a:ext uri="{FF2B5EF4-FFF2-40B4-BE49-F238E27FC236}">
+                <a16:creationId xmlns:a16="http://schemas.microsoft.com/office/drawing/2014/main" id="{C283FF18-3963-DCCC-A7FA-A8FC208C87AE}"/>
+              </a:ext>
+            </a:extLst>
+          </p:cNvPr>
+          <p:cNvSpPr/>
+          <p:nvPr/>
+        </p:nvSpPr>
+        <p:spPr>
+          <a:xfrm>
+            <a:off x="7698281" y="4351606"/>
+            <a:ext cx="932818" cy="652165"/>
+          </a:xfrm>
+          <a:custGeom>
+            <a:avLst/>
+            <a:gdLst>
+              <a:gd name="csX0" fmla="*/ 0 w 1761688"/>
+              <a:gd name="csY0" fmla="*/ 0 h 1291904"/>
+              <a:gd name="csX1" fmla="*/ 75501 w 1761688"/>
+              <a:gd name="csY1" fmla="*/ 0 h 1291904"/>
+              <a:gd name="csX2" fmla="*/ 1686187 w 1761688"/>
+              <a:gd name="csY2" fmla="*/ 0 h 1291904"/>
+              <a:gd name="csX3" fmla="*/ 1761688 w 1761688"/>
+              <a:gd name="csY3" fmla="*/ 0 h 1291904"/>
+              <a:gd name="csX4" fmla="*/ 1761688 w 1761688"/>
+              <a:gd name="csY4" fmla="*/ 102765 h 1291904"/>
+              <a:gd name="csX5" fmla="*/ 1686187 w 1761688"/>
+              <a:gd name="csY5" fmla="*/ 102765 h 1291904"/>
+              <a:gd name="csX6" fmla="*/ 1686187 w 1761688"/>
+              <a:gd name="csY6" fmla="*/ 1189139 h 1291904"/>
+              <a:gd name="csX7" fmla="*/ 1761688 w 1761688"/>
+              <a:gd name="csY7" fmla="*/ 1189139 h 1291904"/>
+              <a:gd name="csX8" fmla="*/ 1761688 w 1761688"/>
+              <a:gd name="csY8" fmla="*/ 1291904 h 1291904"/>
+              <a:gd name="csX9" fmla="*/ 1686187 w 1761688"/>
+              <a:gd name="csY9" fmla="*/ 1291904 h 1291904"/>
+              <a:gd name="csX10" fmla="*/ 75501 w 1761688"/>
+              <a:gd name="csY10" fmla="*/ 1291904 h 1291904"/>
+              <a:gd name="csX11" fmla="*/ 0 w 1761688"/>
+              <a:gd name="csY11" fmla="*/ 1291904 h 1291904"/>
+              <a:gd name="csX12" fmla="*/ 0 w 1761688"/>
+              <a:gd name="csY12" fmla="*/ 1189139 h 1291904"/>
+              <a:gd name="csX13" fmla="*/ 75501 w 1761688"/>
+              <a:gd name="csY13" fmla="*/ 1189139 h 1291904"/>
+              <a:gd name="csX14" fmla="*/ 75501 w 1761688"/>
+              <a:gd name="csY14" fmla="*/ 102765 h 1291904"/>
+              <a:gd name="csX15" fmla="*/ 0 w 1761688"/>
+              <a:gd name="csY15" fmla="*/ 102765 h 1291904"/>
+            </a:gdLst>
+            <a:ahLst/>
+            <a:cxnLst>
+              <a:cxn ang="0">
+                <a:pos x="csX0" y="csY0"/>
+              </a:cxn>
+              <a:cxn ang="0">
+                <a:pos x="csX1" y="csY1"/>
+              </a:cxn>
+              <a:cxn ang="0">
+                <a:pos x="csX2" y="csY2"/>
+              </a:cxn>
+              <a:cxn ang="0">
+                <a:pos x="csX3" y="csY3"/>
+              </a:cxn>
+              <a:cxn ang="0">
+                <a:pos x="csX4" y="csY4"/>
+              </a:cxn>
+              <a:cxn ang="0">
+                <a:pos x="csX5" y="csY5"/>
+              </a:cxn>
+              <a:cxn ang="0">
+                <a:pos x="csX6" y="csY6"/>
+              </a:cxn>
+              <a:cxn ang="0">
+                <a:pos x="csX7" y="csY7"/>
+              </a:cxn>
+              <a:cxn ang="0">
+                <a:pos x="csX8" y="csY8"/>
+              </a:cxn>
+              <a:cxn ang="0">
+                <a:pos x="csX9" y="csY9"/>
+              </a:cxn>
+              <a:cxn ang="0">
+                <a:pos x="csX10" y="csY10"/>
+              </a:cxn>
+              <a:cxn ang="0">
+                <a:pos x="csX11" y="csY11"/>
+              </a:cxn>
+              <a:cxn ang="0">
+                <a:pos x="csX12" y="csY12"/>
+              </a:cxn>
+              <a:cxn ang="0">
+                <a:pos x="csX13" y="csY13"/>
+              </a:cxn>
+              <a:cxn ang="0">
+                <a:pos x="csX14" y="csY14"/>
+              </a:cxn>
+              <a:cxn ang="0">
+                <a:pos x="csX15" y="csY15"/>
+              </a:cxn>
+            </a:cxnLst>
+            <a:rect l="l" t="t" r="r" b="b"/>
+            <a:pathLst>
+              <a:path w="1761688" h="1291904">
+                <a:moveTo>
+                  <a:pt x="0" y="0"/>
+                </a:moveTo>
+                <a:lnTo>
+                  <a:pt x="75501" y="0"/>
+                </a:lnTo>
+                <a:lnTo>
+                  <a:pt x="1686187" y="0"/>
+                </a:lnTo>
+                <a:lnTo>
+                  <a:pt x="1761688" y="0"/>
+                </a:lnTo>
+                <a:lnTo>
+                  <a:pt x="1761688" y="102765"/>
+                </a:lnTo>
+                <a:lnTo>
+                  <a:pt x="1686187" y="102765"/>
+                </a:lnTo>
+                <a:lnTo>
+                  <a:pt x="1686187" y="1189139"/>
+                </a:lnTo>
+                <a:lnTo>
+                  <a:pt x="1761688" y="1189139"/>
+                </a:lnTo>
+                <a:lnTo>
+                  <a:pt x="1761688" y="1291904"/>
+                </a:lnTo>
+                <a:lnTo>
+                  <a:pt x="1686187" y="1291904"/>
+                </a:lnTo>
+                <a:lnTo>
+                  <a:pt x="75501" y="1291904"/>
+                </a:lnTo>
+                <a:lnTo>
+                  <a:pt x="0" y="1291904"/>
+                </a:lnTo>
+                <a:lnTo>
+                  <a:pt x="0" y="1189139"/>
+                </a:lnTo>
+                <a:lnTo>
+                  <a:pt x="75501" y="1189139"/>
+                </a:lnTo>
+                <a:lnTo>
+                  <a:pt x="75501" y="102765"/>
+                </a:lnTo>
+                <a:lnTo>
+                  <a:pt x="0" y="102765"/>
+                </a:lnTo>
+                <a:close/>
+              </a:path>
+            </a:pathLst>
+          </a:custGeom>
+          <a:gradFill flip="none" rotWithShape="1">
+            <a:gsLst>
+              <a:gs pos="76000">
+                <a:schemeClr val="bg1">
+                  <a:alpha val="0"/>
+                </a:schemeClr>
+              </a:gs>
+              <a:gs pos="24000">
+                <a:srgbClr val="FFC000"/>
+              </a:gs>
+            </a:gsLst>
+            <a:path path="circle">
+              <a:fillToRect l="100000" b="100000"/>
+            </a:path>
+            <a:tileRect t="-100000" r="-100000"/>
+          </a:gradFill>
+          <a:ln>
+            <a:noFill/>
+          </a:ln>
+        </p:spPr>
+        <p:style>
+          <a:lnRef idx="2">
+            <a:schemeClr val="accent1">
+              <a:shade val="15000"/>
+            </a:schemeClr>
+          </a:lnRef>
+          <a:fillRef idx="1">
+            <a:schemeClr val="accent1"/>
+          </a:fillRef>
+          <a:effectRef idx="0">
+            <a:schemeClr val="accent1"/>
+          </a:effectRef>
+          <a:fontRef idx="minor">
+            <a:schemeClr val="lt1"/>
+          </a:fontRef>
+        </p:style>
+        <p:txBody>
+          <a:bodyPr wrap="square" rtlCol="0" anchor="ctr">
+            <a:noAutofit/>
+          </a:bodyPr>
+          <a:lstStyle/>
+          <a:p>
+            <a:pPr algn="ctr"/>
+            <a:endParaRPr lang="en-US"/>
+          </a:p>
+        </p:txBody>
+      </p:sp>
+      <p:sp>
+        <p:nvSpPr>
+          <p:cNvPr id="48" name="Freeform: Shape 47">
+            <a:extLst>
+              <a:ext uri="{FF2B5EF4-FFF2-40B4-BE49-F238E27FC236}">
+                <a16:creationId xmlns:a16="http://schemas.microsoft.com/office/drawing/2014/main" id="{86095542-DB0B-13A3-41B4-1E9C805B1DE8}"/>
+              </a:ext>
+            </a:extLst>
+          </p:cNvPr>
+          <p:cNvSpPr/>
+          <p:nvPr/>
+        </p:nvSpPr>
+        <p:spPr>
+          <a:xfrm rot="16200000" flipV="1">
+            <a:off x="5198786" y="4209059"/>
+            <a:ext cx="652164" cy="937260"/>
+          </a:xfrm>
+          <a:custGeom>
+            <a:avLst/>
+            <a:gdLst>
+              <a:gd name="csX0" fmla="*/ 0 w 1291905"/>
+              <a:gd name="csY0" fmla="*/ 0 h 1770078"/>
+              <a:gd name="csX1" fmla="*/ 0 w 1291905"/>
+              <a:gd name="csY1" fmla="*/ 478173 h 1770078"/>
+              <a:gd name="csX2" fmla="*/ 0 w 1291905"/>
+              <a:gd name="csY2" fmla="*/ 1291905 h 1770078"/>
+              <a:gd name="csX3" fmla="*/ 0 w 1291905"/>
+              <a:gd name="csY3" fmla="*/ 1770078 h 1770078"/>
+              <a:gd name="csX4" fmla="*/ 6123 w 1291905"/>
+              <a:gd name="csY4" fmla="*/ 1770078 h 1770078"/>
+              <a:gd name="csX5" fmla="*/ 109381 w 1291905"/>
+              <a:gd name="csY5" fmla="*/ 1658008 h 1770078"/>
+              <a:gd name="csX6" fmla="*/ 212639 w 1291905"/>
+              <a:gd name="csY6" fmla="*/ 1770078 h 1770078"/>
+              <a:gd name="csX7" fmla="*/ 221976 w 1291905"/>
+              <a:gd name="csY7" fmla="*/ 1770078 h 1770078"/>
+              <a:gd name="csX8" fmla="*/ 325234 w 1291905"/>
+              <a:gd name="csY8" fmla="*/ 1658008 h 1770078"/>
+              <a:gd name="csX9" fmla="*/ 428492 w 1291905"/>
+              <a:gd name="csY9" fmla="*/ 1770078 h 1770078"/>
+              <a:gd name="csX10" fmla="*/ 437829 w 1291905"/>
+              <a:gd name="csY10" fmla="*/ 1770078 h 1770078"/>
+              <a:gd name="csX11" fmla="*/ 541087 w 1291905"/>
+              <a:gd name="csY11" fmla="*/ 1658008 h 1770078"/>
+              <a:gd name="csX12" fmla="*/ 644346 w 1291905"/>
+              <a:gd name="csY12" fmla="*/ 1770078 h 1770078"/>
+              <a:gd name="csX13" fmla="*/ 653683 w 1291905"/>
+              <a:gd name="csY13" fmla="*/ 1770078 h 1770078"/>
+              <a:gd name="csX14" fmla="*/ 756941 w 1291905"/>
+              <a:gd name="csY14" fmla="*/ 1658008 h 1770078"/>
+              <a:gd name="csX15" fmla="*/ 860199 w 1291905"/>
+              <a:gd name="csY15" fmla="*/ 1770078 h 1770078"/>
+              <a:gd name="csX16" fmla="*/ 869536 w 1291905"/>
+              <a:gd name="csY16" fmla="*/ 1770078 h 1770078"/>
+              <a:gd name="csX17" fmla="*/ 972794 w 1291905"/>
+              <a:gd name="csY17" fmla="*/ 1658008 h 1770078"/>
+              <a:gd name="csX18" fmla="*/ 1076052 w 1291905"/>
+              <a:gd name="csY18" fmla="*/ 1770078 h 1770078"/>
+              <a:gd name="csX19" fmla="*/ 1085389 w 1291905"/>
+              <a:gd name="csY19" fmla="*/ 1770078 h 1770078"/>
+              <a:gd name="csX20" fmla="*/ 1188647 w 1291905"/>
+              <a:gd name="csY20" fmla="*/ 1658008 h 1770078"/>
+              <a:gd name="csX21" fmla="*/ 1291905 w 1291905"/>
+              <a:gd name="csY21" fmla="*/ 1770078 h 1770078"/>
+              <a:gd name="csX22" fmla="*/ 1291905 w 1291905"/>
+              <a:gd name="csY22" fmla="*/ 1291905 h 1770078"/>
+              <a:gd name="csX23" fmla="*/ 1291905 w 1291905"/>
+              <a:gd name="csY23" fmla="*/ 478173 h 1770078"/>
+              <a:gd name="csX24" fmla="*/ 1291905 w 1291905"/>
+              <a:gd name="csY24" fmla="*/ 0 h 1770078"/>
+              <a:gd name="csX25" fmla="*/ 1188647 w 1291905"/>
+              <a:gd name="csY25" fmla="*/ 112070 h 1770078"/>
+              <a:gd name="csX26" fmla="*/ 1085389 w 1291905"/>
+              <a:gd name="csY26" fmla="*/ 0 h 1770078"/>
+              <a:gd name="csX27" fmla="*/ 1076052 w 1291905"/>
+              <a:gd name="csY27" fmla="*/ 0 h 1770078"/>
+              <a:gd name="csX28" fmla="*/ 972794 w 1291905"/>
+              <a:gd name="csY28" fmla="*/ 112070 h 1770078"/>
+              <a:gd name="csX29" fmla="*/ 869536 w 1291905"/>
+              <a:gd name="csY29" fmla="*/ 0 h 1770078"/>
+              <a:gd name="csX30" fmla="*/ 860199 w 1291905"/>
+              <a:gd name="csY30" fmla="*/ 0 h 1770078"/>
+              <a:gd name="csX31" fmla="*/ 756941 w 1291905"/>
+              <a:gd name="csY31" fmla="*/ 112070 h 1770078"/>
+              <a:gd name="csX32" fmla="*/ 653683 w 1291905"/>
+              <a:gd name="csY32" fmla="*/ 0 h 1770078"/>
+              <a:gd name="csX33" fmla="*/ 644346 w 1291905"/>
+              <a:gd name="csY33" fmla="*/ 0 h 1770078"/>
+              <a:gd name="csX34" fmla="*/ 541087 w 1291905"/>
+              <a:gd name="csY34" fmla="*/ 112070 h 1770078"/>
+              <a:gd name="csX35" fmla="*/ 437829 w 1291905"/>
+              <a:gd name="csY35" fmla="*/ 0 h 1770078"/>
+              <a:gd name="csX36" fmla="*/ 428492 w 1291905"/>
+              <a:gd name="csY36" fmla="*/ 0 h 1770078"/>
+              <a:gd name="csX37" fmla="*/ 325234 w 1291905"/>
+              <a:gd name="csY37" fmla="*/ 112070 h 1770078"/>
+              <a:gd name="csX38" fmla="*/ 221976 w 1291905"/>
+              <a:gd name="csY38" fmla="*/ 0 h 1770078"/>
+              <a:gd name="csX39" fmla="*/ 212639 w 1291905"/>
+              <a:gd name="csY39" fmla="*/ 0 h 1770078"/>
+              <a:gd name="csX40" fmla="*/ 109381 w 1291905"/>
+              <a:gd name="csY40" fmla="*/ 112070 h 1770078"/>
+              <a:gd name="csX41" fmla="*/ 6123 w 1291905"/>
+              <a:gd name="csY41" fmla="*/ 0 h 1770078"/>
+            </a:gdLst>
+            <a:ahLst/>
+            <a:cxnLst>
+              <a:cxn ang="0">
+                <a:pos x="csX0" y="csY0"/>
+              </a:cxn>
+              <a:cxn ang="0">
+                <a:pos x="csX1" y="csY1"/>
+              </a:cxn>
+              <a:cxn ang="0">
+                <a:pos x="csX2" y="csY2"/>
+              </a:cxn>
+              <a:cxn ang="0">
+                <a:pos x="csX3" y="csY3"/>
+              </a:cxn>
+              <a:cxn ang="0">
+                <a:pos x="csX4" y="csY4"/>
+              </a:cxn>
+              <a:cxn ang="0">
+                <a:pos x="csX5" y="csY5"/>
+              </a:cxn>
+              <a:cxn ang="0">
+                <a:pos x="csX6" y="csY6"/>
+              </a:cxn>
+              <a:cxn ang="0">
+                <a:pos x="csX7" y="csY7"/>
+              </a:cxn>
+              <a:cxn ang="0">
+                <a:pos x="csX8" y="csY8"/>
+              </a:cxn>
+              <a:cxn ang="0">
+                <a:pos x="csX9" y="csY9"/>
+              </a:cxn>
+              <a:cxn ang="0">
+                <a:pos x="csX10" y="csY10"/>
+              </a:cxn>
+              <a:cxn ang="0">
+                <a:pos x="csX11" y="csY11"/>
+              </a:cxn>
+              <a:cxn ang="0">
+                <a:pos x="csX12" y="csY12"/>
+              </a:cxn>
+              <a:cxn ang="0">
+                <a:pos x="csX13" y="csY13"/>
+              </a:cxn>
+              <a:cxn ang="0">
+                <a:pos x="csX14" y="csY14"/>
+              </a:cxn>
+              <a:cxn ang="0">
+                <a:pos x="csX15" y="csY15"/>
+              </a:cxn>
+              <a:cxn ang="0">
+                <a:pos x="csX16" y="csY16"/>
+              </a:cxn>
+              <a:cxn ang="0">
+                <a:pos x="csX17" y="csY17"/>
+              </a:cxn>
+              <a:cxn ang="0">
+                <a:pos x="csX18" y="csY18"/>
+              </a:cxn>
+              <a:cxn ang="0">
+                <a:pos x="csX19" y="csY19"/>
+              </a:cxn>
+              <a:cxn ang="0">
+                <a:pos x="csX20" y="csY20"/>
+              </a:cxn>
+              <a:cxn ang="0">
+                <a:pos x="csX21" y="csY21"/>
+              </a:cxn>
+              <a:cxn ang="0">
+                <a:pos x="csX22" y="csY22"/>
+              </a:cxn>
+              <a:cxn ang="0">
+                <a:pos x="csX23" y="csY23"/>
+              </a:cxn>
+              <a:cxn ang="0">
+                <a:pos x="csX24" y="csY24"/>
+              </a:cxn>
+              <a:cxn ang="0">
+                <a:pos x="csX25" y="csY25"/>
+              </a:cxn>
+              <a:cxn ang="0">
+                <a:pos x="csX26" y="csY26"/>
+              </a:cxn>
+              <a:cxn ang="0">
+                <a:pos x="csX27" y="csY27"/>
+              </a:cxn>
+              <a:cxn ang="0">
+                <a:pos x="csX28" y="csY28"/>
+              </a:cxn>
+              <a:cxn ang="0">
+                <a:pos x="csX29" y="csY29"/>
+              </a:cxn>
+              <a:cxn ang="0">
+                <a:pos x="csX30" y="csY30"/>
+              </a:cxn>
+              <a:cxn ang="0">
+                <a:pos x="csX31" y="csY31"/>
+              </a:cxn>
+              <a:cxn ang="0">
+                <a:pos x="csX32" y="csY32"/>
+              </a:cxn>
+              <a:cxn ang="0">
+                <a:pos x="csX33" y="csY33"/>
+              </a:cxn>
+              <a:cxn ang="0">
+                <a:pos x="csX34" y="csY34"/>
+              </a:cxn>
+              <a:cxn ang="0">
+                <a:pos x="csX35" y="csY35"/>
+              </a:cxn>
+              <a:cxn ang="0">
+                <a:pos x="csX36" y="csY36"/>
+              </a:cxn>
+              <a:cxn ang="0">
+                <a:pos x="csX37" y="csY37"/>
+              </a:cxn>
+              <a:cxn ang="0">
+                <a:pos x="csX38" y="csY38"/>
+              </a:cxn>
+              <a:cxn ang="0">
+                <a:pos x="csX39" y="csY39"/>
+              </a:cxn>
+              <a:cxn ang="0">
+                <a:pos x="csX40" y="csY40"/>
+              </a:cxn>
+              <a:cxn ang="0">
+                <a:pos x="csX41" y="csY41"/>
+              </a:cxn>
+            </a:cxnLst>
+            <a:rect l="l" t="t" r="r" b="b"/>
+            <a:pathLst>
+              <a:path w="1291905" h="1770078">
+                <a:moveTo>
+                  <a:pt x="0" y="0"/>
+                </a:moveTo>
+                <a:lnTo>
+                  <a:pt x="0" y="478173"/>
+                </a:lnTo>
+                <a:lnTo>
+                  <a:pt x="0" y="1291905"/>
+                </a:lnTo>
+                <a:lnTo>
+                  <a:pt x="0" y="1770078"/>
+                </a:lnTo>
+                <a:lnTo>
+                  <a:pt x="6123" y="1770078"/>
+                </a:lnTo>
+                <a:lnTo>
+                  <a:pt x="109381" y="1658008"/>
+                </a:lnTo>
+                <a:lnTo>
+                  <a:pt x="212639" y="1770078"/>
+                </a:lnTo>
+                <a:lnTo>
+                  <a:pt x="221976" y="1770078"/>
+                </a:lnTo>
+                <a:lnTo>
+                  <a:pt x="325234" y="1658008"/>
+                </a:lnTo>
+                <a:lnTo>
+                  <a:pt x="428492" y="1770078"/>
+                </a:lnTo>
+                <a:lnTo>
+                  <a:pt x="437829" y="1770078"/>
+                </a:lnTo>
+                <a:lnTo>
+                  <a:pt x="541087" y="1658008"/>
+                </a:lnTo>
+                <a:lnTo>
+                  <a:pt x="644346" y="1770078"/>
+                </a:lnTo>
+                <a:lnTo>
+                  <a:pt x="653683" y="1770078"/>
+                </a:lnTo>
+                <a:lnTo>
+                  <a:pt x="756941" y="1658008"/>
+                </a:lnTo>
+                <a:lnTo>
+                  <a:pt x="860199" y="1770078"/>
+                </a:lnTo>
+                <a:lnTo>
+                  <a:pt x="869536" y="1770078"/>
+                </a:lnTo>
+                <a:lnTo>
+                  <a:pt x="972794" y="1658008"/>
+                </a:lnTo>
+                <a:lnTo>
+                  <a:pt x="1076052" y="1770078"/>
+                </a:lnTo>
+                <a:lnTo>
+                  <a:pt x="1085389" y="1770078"/>
+                </a:lnTo>
+                <a:lnTo>
+                  <a:pt x="1188647" y="1658008"/>
+                </a:lnTo>
+                <a:lnTo>
+                  <a:pt x="1291905" y="1770078"/>
+                </a:lnTo>
+                <a:lnTo>
+                  <a:pt x="1291905" y="1291905"/>
+                </a:lnTo>
+                <a:lnTo>
+                  <a:pt x="1291905" y="478173"/>
+                </a:lnTo>
+                <a:lnTo>
+                  <a:pt x="1291905" y="0"/>
+                </a:lnTo>
+                <a:lnTo>
+                  <a:pt x="1188647" y="112070"/>
+                </a:lnTo>
+                <a:lnTo>
+                  <a:pt x="1085389" y="0"/>
+                </a:lnTo>
+                <a:lnTo>
+                  <a:pt x="1076052" y="0"/>
+                </a:lnTo>
+                <a:lnTo>
+                  <a:pt x="972794" y="112070"/>
+                </a:lnTo>
+                <a:lnTo>
+                  <a:pt x="869536" y="0"/>
+                </a:lnTo>
+                <a:lnTo>
+                  <a:pt x="860199" y="0"/>
+                </a:lnTo>
+                <a:lnTo>
+                  <a:pt x="756941" y="112070"/>
+                </a:lnTo>
+                <a:lnTo>
+                  <a:pt x="653683" y="0"/>
+                </a:lnTo>
+                <a:lnTo>
+                  <a:pt x="644346" y="0"/>
+                </a:lnTo>
+                <a:lnTo>
+                  <a:pt x="541087" y="112070"/>
+                </a:lnTo>
+                <a:lnTo>
+                  <a:pt x="437829" y="0"/>
+                </a:lnTo>
+                <a:lnTo>
+                  <a:pt x="428492" y="0"/>
+                </a:lnTo>
+                <a:lnTo>
+                  <a:pt x="325234" y="112070"/>
+                </a:lnTo>
+                <a:lnTo>
+                  <a:pt x="221976" y="0"/>
+                </a:lnTo>
+                <a:lnTo>
+                  <a:pt x="212639" y="0"/>
+                </a:lnTo>
+                <a:lnTo>
+                  <a:pt x="109381" y="112070"/>
+                </a:lnTo>
+                <a:lnTo>
+                  <a:pt x="6123" y="0"/>
+                </a:lnTo>
+                <a:close/>
+              </a:path>
+            </a:pathLst>
+          </a:custGeom>
+          <a:gradFill flip="none" rotWithShape="1">
+            <a:gsLst>
+              <a:gs pos="81000">
+                <a:schemeClr val="bg1">
+                  <a:alpha val="0"/>
+                </a:schemeClr>
+              </a:gs>
+              <a:gs pos="0">
+                <a:srgbClr val="FF0000"/>
+              </a:gs>
+            </a:gsLst>
+            <a:path path="circle">
+              <a:fillToRect l="100000" b="100000"/>
+            </a:path>
+            <a:tileRect t="-100000" r="-100000"/>
+          </a:gradFill>
+          <a:ln>
+            <a:noFill/>
+          </a:ln>
+        </p:spPr>
+        <p:style>
+          <a:lnRef idx="2">
+            <a:schemeClr val="accent1">
+              <a:shade val="15000"/>
+            </a:schemeClr>
+          </a:lnRef>
+          <a:fillRef idx="1">
+            <a:schemeClr val="accent1"/>
+          </a:fillRef>
+          <a:effectRef idx="0">
+            <a:schemeClr val="accent1"/>
+          </a:effectRef>
+          <a:fontRef idx="minor">
+            <a:schemeClr val="lt1"/>
+          </a:fontRef>
+        </p:style>
+        <p:txBody>
+          <a:bodyPr wrap="square" rtlCol="0" anchor="ctr">
+            <a:noAutofit/>
+          </a:bodyPr>
+          <a:lstStyle/>
+          <a:p>
+            <a:pPr algn="ctr"/>
+            <a:endParaRPr lang="en-US"/>
+          </a:p>
+        </p:txBody>
+      </p:sp>
+      <p:sp>
+        <p:nvSpPr>
+          <p:cNvPr id="49" name="Freeform: Shape 48">
+            <a:extLst>
+              <a:ext uri="{FF2B5EF4-FFF2-40B4-BE49-F238E27FC236}">
+                <a16:creationId xmlns:a16="http://schemas.microsoft.com/office/drawing/2014/main" id="{CFCE63B5-CC96-2583-618E-6957E064CBFA}"/>
+              </a:ext>
+            </a:extLst>
+          </p:cNvPr>
+          <p:cNvSpPr/>
+          <p:nvPr/>
+        </p:nvSpPr>
+        <p:spPr>
+          <a:xfrm>
+            <a:off x="3879920" y="4351606"/>
+            <a:ext cx="937260" cy="652164"/>
+          </a:xfrm>
+          <a:custGeom>
+            <a:avLst/>
+            <a:gdLst>
+              <a:gd name="csX0" fmla="*/ 885039 w 1770078"/>
+              <a:gd name="csY0" fmla="*/ 0 h 1291903"/>
+              <a:gd name="csX1" fmla="*/ 1752097 w 1770078"/>
+              <a:gd name="csY1" fmla="*/ 364364 h 1291903"/>
+              <a:gd name="csX2" fmla="*/ 1756386 w 1770078"/>
+              <a:gd name="csY2" fmla="*/ 378854 h 1291903"/>
+              <a:gd name="csX3" fmla="*/ 1770078 w 1770078"/>
+              <a:gd name="csY3" fmla="*/ 378854 h 1291903"/>
+              <a:gd name="csX4" fmla="*/ 1770078 w 1770078"/>
+              <a:gd name="csY4" fmla="*/ 456330 h 1291903"/>
+              <a:gd name="csX5" fmla="*/ 1770078 w 1770078"/>
+              <a:gd name="csY5" fmla="*/ 1291903 h 1291903"/>
+              <a:gd name="csX6" fmla="*/ 0 w 1770078"/>
+              <a:gd name="csY6" fmla="*/ 1291903 h 1291903"/>
+              <a:gd name="csX7" fmla="*/ 0 w 1770078"/>
+              <a:gd name="csY7" fmla="*/ 456330 h 1291903"/>
+              <a:gd name="csX8" fmla="*/ 0 w 1770078"/>
+              <a:gd name="csY8" fmla="*/ 378854 h 1291903"/>
+              <a:gd name="csX9" fmla="*/ 13692 w 1770078"/>
+              <a:gd name="csY9" fmla="*/ 378854 h 1291903"/>
+              <a:gd name="csX10" fmla="*/ 17981 w 1770078"/>
+              <a:gd name="csY10" fmla="*/ 364364 h 1291903"/>
+              <a:gd name="csX11" fmla="*/ 885039 w 1770078"/>
+              <a:gd name="csY11" fmla="*/ 0 h 1291903"/>
+              <a:gd name="csX0" fmla="*/ 885039 w 1770078"/>
+              <a:gd name="csY0" fmla="*/ 0 h 1291903"/>
+              <a:gd name="csX1" fmla="*/ 1752097 w 1770078"/>
+              <a:gd name="csY1" fmla="*/ 364364 h 1291903"/>
+              <a:gd name="csX2" fmla="*/ 1756386 w 1770078"/>
+              <a:gd name="csY2" fmla="*/ 378854 h 1291903"/>
+              <a:gd name="csX3" fmla="*/ 1770078 w 1770078"/>
+              <a:gd name="csY3" fmla="*/ 378854 h 1291903"/>
+              <a:gd name="csX4" fmla="*/ 1770078 w 1770078"/>
+              <a:gd name="csY4" fmla="*/ 456330 h 1291903"/>
+              <a:gd name="csX5" fmla="*/ 1770078 w 1770078"/>
+              <a:gd name="csY5" fmla="*/ 1291903 h 1291903"/>
+              <a:gd name="csX6" fmla="*/ 0 w 1770078"/>
+              <a:gd name="csY6" fmla="*/ 1291903 h 1291903"/>
+              <a:gd name="csX7" fmla="*/ 0 w 1770078"/>
+              <a:gd name="csY7" fmla="*/ 456330 h 1291903"/>
+              <a:gd name="csX8" fmla="*/ 13692 w 1770078"/>
+              <a:gd name="csY8" fmla="*/ 378854 h 1291903"/>
+              <a:gd name="csX9" fmla="*/ 17981 w 1770078"/>
+              <a:gd name="csY9" fmla="*/ 364364 h 1291903"/>
+              <a:gd name="csX10" fmla="*/ 885039 w 1770078"/>
+              <a:gd name="csY10" fmla="*/ 0 h 1291903"/>
+              <a:gd name="csX0" fmla="*/ 885039 w 1770078"/>
+              <a:gd name="csY0" fmla="*/ 0 h 1291903"/>
+              <a:gd name="csX1" fmla="*/ 1752097 w 1770078"/>
+              <a:gd name="csY1" fmla="*/ 364364 h 1291903"/>
+              <a:gd name="csX2" fmla="*/ 1756386 w 1770078"/>
+              <a:gd name="csY2" fmla="*/ 378854 h 1291903"/>
+              <a:gd name="csX3" fmla="*/ 1770078 w 1770078"/>
+              <a:gd name="csY3" fmla="*/ 378854 h 1291903"/>
+              <a:gd name="csX4" fmla="*/ 1770078 w 1770078"/>
+              <a:gd name="csY4" fmla="*/ 456330 h 1291903"/>
+              <a:gd name="csX5" fmla="*/ 1770078 w 1770078"/>
+              <a:gd name="csY5" fmla="*/ 1291903 h 1291903"/>
+              <a:gd name="csX6" fmla="*/ 0 w 1770078"/>
+              <a:gd name="csY6" fmla="*/ 1291903 h 1291903"/>
+              <a:gd name="csX7" fmla="*/ 0 w 1770078"/>
+              <a:gd name="csY7" fmla="*/ 456330 h 1291903"/>
+              <a:gd name="csX8" fmla="*/ 17981 w 1770078"/>
+              <a:gd name="csY8" fmla="*/ 364364 h 1291903"/>
+              <a:gd name="csX9" fmla="*/ 885039 w 1770078"/>
+              <a:gd name="csY9" fmla="*/ 0 h 1291903"/>
+              <a:gd name="csX0" fmla="*/ 885039 w 1770078"/>
+              <a:gd name="csY0" fmla="*/ 0 h 1291903"/>
+              <a:gd name="csX1" fmla="*/ 1752097 w 1770078"/>
+              <a:gd name="csY1" fmla="*/ 364364 h 1291903"/>
+              <a:gd name="csX2" fmla="*/ 1756386 w 1770078"/>
+              <a:gd name="csY2" fmla="*/ 378854 h 1291903"/>
+              <a:gd name="csX3" fmla="*/ 1770078 w 1770078"/>
+              <a:gd name="csY3" fmla="*/ 456330 h 1291903"/>
+              <a:gd name="csX4" fmla="*/ 1770078 w 1770078"/>
+              <a:gd name="csY4" fmla="*/ 1291903 h 1291903"/>
+              <a:gd name="csX5" fmla="*/ 0 w 1770078"/>
+              <a:gd name="csY5" fmla="*/ 1291903 h 1291903"/>
+              <a:gd name="csX6" fmla="*/ 0 w 1770078"/>
+              <a:gd name="csY6" fmla="*/ 456330 h 1291903"/>
+              <a:gd name="csX7" fmla="*/ 17981 w 1770078"/>
+              <a:gd name="csY7" fmla="*/ 364364 h 1291903"/>
+              <a:gd name="csX8" fmla="*/ 885039 w 1770078"/>
+              <a:gd name="csY8" fmla="*/ 0 h 1291903"/>
+              <a:gd name="csX0" fmla="*/ 885039 w 1770078"/>
+              <a:gd name="csY0" fmla="*/ 0 h 1291903"/>
+              <a:gd name="csX1" fmla="*/ 1752097 w 1770078"/>
+              <a:gd name="csY1" fmla="*/ 364364 h 1291903"/>
+              <a:gd name="csX2" fmla="*/ 1770078 w 1770078"/>
+              <a:gd name="csY2" fmla="*/ 456330 h 1291903"/>
+              <a:gd name="csX3" fmla="*/ 1770078 w 1770078"/>
+              <a:gd name="csY3" fmla="*/ 1291903 h 1291903"/>
+              <a:gd name="csX4" fmla="*/ 0 w 1770078"/>
+              <a:gd name="csY4" fmla="*/ 1291903 h 1291903"/>
+              <a:gd name="csX5" fmla="*/ 0 w 1770078"/>
+              <a:gd name="csY5" fmla="*/ 456330 h 1291903"/>
+              <a:gd name="csX6" fmla="*/ 17981 w 1770078"/>
+              <a:gd name="csY6" fmla="*/ 364364 h 1291903"/>
+              <a:gd name="csX7" fmla="*/ 885039 w 1770078"/>
+              <a:gd name="csY7" fmla="*/ 0 h 1291903"/>
+            </a:gdLst>
+            <a:ahLst/>
+            <a:cxnLst>
+              <a:cxn ang="0">
+                <a:pos x="csX0" y="csY0"/>
+              </a:cxn>
+              <a:cxn ang="0">
+                <a:pos x="csX1" y="csY1"/>
+              </a:cxn>
+              <a:cxn ang="0">
+                <a:pos x="csX2" y="csY2"/>
+              </a:cxn>
+              <a:cxn ang="0">
+                <a:pos x="csX3" y="csY3"/>
+              </a:cxn>
+              <a:cxn ang="0">
+                <a:pos x="csX4" y="csY4"/>
+              </a:cxn>
+              <a:cxn ang="0">
+                <a:pos x="csX5" y="csY5"/>
+              </a:cxn>
+              <a:cxn ang="0">
+                <a:pos x="csX6" y="csY6"/>
+              </a:cxn>
+              <a:cxn ang="0">
+                <a:pos x="csX7" y="csY7"/>
+              </a:cxn>
+            </a:cxnLst>
+            <a:rect l="l" t="t" r="r" b="b"/>
+            <a:pathLst>
+              <a:path w="1770078" h="1291903">
+                <a:moveTo>
+                  <a:pt x="885039" y="0"/>
+                </a:moveTo>
+                <a:cubicBezTo>
+                  <a:pt x="1312734" y="0"/>
+                  <a:pt x="1669571" y="156422"/>
+                  <a:pt x="1752097" y="364364"/>
+                </a:cubicBezTo>
+                <a:lnTo>
+                  <a:pt x="1770078" y="456330"/>
+                </a:lnTo>
+                <a:lnTo>
+                  <a:pt x="1770078" y="1291903"/>
+                </a:lnTo>
+                <a:lnTo>
+                  <a:pt x="0" y="1291903"/>
+                </a:lnTo>
+                <a:lnTo>
+                  <a:pt x="0" y="456330"/>
+                </a:lnTo>
+                <a:lnTo>
+                  <a:pt x="17981" y="364364"/>
+                </a:lnTo>
+                <a:cubicBezTo>
+                  <a:pt x="100507" y="156422"/>
+                  <a:pt x="457344" y="0"/>
+                  <a:pt x="885039" y="0"/>
+                </a:cubicBezTo>
+                <a:close/>
+              </a:path>
+            </a:pathLst>
+          </a:custGeom>
+          <a:gradFill flip="none" rotWithShape="1">
+            <a:gsLst>
+              <a:gs pos="69000">
+                <a:schemeClr val="bg1">
+                  <a:alpha val="0"/>
+                </a:schemeClr>
+              </a:gs>
+              <a:gs pos="0">
+                <a:srgbClr val="0070C0"/>
+              </a:gs>
+            </a:gsLst>
+            <a:path path="circle">
+              <a:fillToRect l="100000" b="100000"/>
+            </a:path>
+            <a:tileRect t="-100000" r="-100000"/>
+          </a:gradFill>
+          <a:ln>
+            <a:noFill/>
+          </a:ln>
+        </p:spPr>
+        <p:style>
+          <a:lnRef idx="2">
+            <a:schemeClr val="accent1">
+              <a:shade val="15000"/>
+            </a:schemeClr>
+          </a:lnRef>
+          <a:fillRef idx="1">
+            <a:schemeClr val="accent1"/>
+          </a:fillRef>
+          <a:effectRef idx="0">
+            <a:schemeClr val="accent1"/>
+          </a:effectRef>
+          <a:fontRef idx="minor">
+            <a:schemeClr val="lt1"/>
+          </a:fontRef>
+        </p:style>
+        <p:txBody>
+          <a:bodyPr wrap="square" rtlCol="0" anchor="ctr">
+            <a:noAutofit/>
+          </a:bodyPr>
+          <a:lstStyle/>
+          <a:p>
+            <a:pPr algn="ctr"/>
+            <a:endParaRPr lang="en-US"/>
+          </a:p>
+        </p:txBody>
+      </p:sp>
+      <p:sp>
+        <p:nvSpPr>
+          <p:cNvPr id="50" name="Freeform: Shape 49">
+            <a:extLst>
+              <a:ext uri="{FF2B5EF4-FFF2-40B4-BE49-F238E27FC236}">
+                <a16:creationId xmlns:a16="http://schemas.microsoft.com/office/drawing/2014/main" id="{615C66A9-F525-F4F5-91FA-E8615F062D6F}"/>
+              </a:ext>
+            </a:extLst>
+          </p:cNvPr>
+          <p:cNvSpPr/>
+          <p:nvPr/>
+        </p:nvSpPr>
+        <p:spPr>
+          <a:xfrm>
+            <a:off x="6235672" y="4351606"/>
+            <a:ext cx="937260" cy="652165"/>
+          </a:xfrm>
+          <a:custGeom>
+            <a:avLst/>
+            <a:gdLst>
+              <a:gd name="csX0" fmla="*/ 0 w 937260"/>
+              <a:gd name="csY0" fmla="*/ 0 h 652165"/>
+              <a:gd name="csX1" fmla="*/ 179 w 937260"/>
+              <a:gd name="csY1" fmla="*/ 0 h 652165"/>
+              <a:gd name="csX2" fmla="*/ 116373 w 937260"/>
+              <a:gd name="csY2" fmla="*/ 31552 h 652165"/>
+              <a:gd name="csX3" fmla="*/ 468630 w 937260"/>
+              <a:gd name="csY3" fmla="*/ 67131 h 652165"/>
+              <a:gd name="csX4" fmla="*/ 820887 w 937260"/>
+              <a:gd name="csY4" fmla="*/ 31552 h 652165"/>
+              <a:gd name="csX5" fmla="*/ 937081 w 937260"/>
+              <a:gd name="csY5" fmla="*/ 0 h 652165"/>
+              <a:gd name="csX6" fmla="*/ 937260 w 937260"/>
+              <a:gd name="csY6" fmla="*/ 0 h 652165"/>
+              <a:gd name="csX7" fmla="*/ 937260 w 937260"/>
+              <a:gd name="csY7" fmla="*/ 652165 h 652165"/>
+              <a:gd name="csX8" fmla="*/ 937078 w 937260"/>
+              <a:gd name="csY8" fmla="*/ 652165 h 652165"/>
+              <a:gd name="csX9" fmla="*/ 820887 w 937260"/>
+              <a:gd name="csY9" fmla="*/ 620614 h 652165"/>
+              <a:gd name="csX10" fmla="*/ 468630 w 937260"/>
+              <a:gd name="csY10" fmla="*/ 585035 h 652165"/>
+              <a:gd name="csX11" fmla="*/ 116373 w 937260"/>
+              <a:gd name="csY11" fmla="*/ 620614 h 652165"/>
+              <a:gd name="csX12" fmla="*/ 183 w 937260"/>
+              <a:gd name="csY12" fmla="*/ 652165 h 652165"/>
+              <a:gd name="csX13" fmla="*/ 0 w 937260"/>
+              <a:gd name="csY13" fmla="*/ 652165 h 652165"/>
+            </a:gdLst>
+            <a:ahLst/>
+            <a:cxnLst>
+              <a:cxn ang="0">
+                <a:pos x="csX0" y="csY0"/>
+              </a:cxn>
+              <a:cxn ang="0">
+                <a:pos x="csX1" y="csY1"/>
+              </a:cxn>
+              <a:cxn ang="0">
+                <a:pos x="csX2" y="csY2"/>
+              </a:cxn>
+              <a:cxn ang="0">
+                <a:pos x="csX3" y="csY3"/>
+              </a:cxn>
+              <a:cxn ang="0">
+                <a:pos x="csX4" y="csY4"/>
+              </a:cxn>
+              <a:cxn ang="0">
+                <a:pos x="csX5" y="csY5"/>
+              </a:cxn>
+              <a:cxn ang="0">
+                <a:pos x="csX6" y="csY6"/>
+              </a:cxn>
+              <a:cxn ang="0">
+                <a:pos x="csX7" y="csY7"/>
+              </a:cxn>
+              <a:cxn ang="0">
+                <a:pos x="csX8" y="csY8"/>
+              </a:cxn>
+              <a:cxn ang="0">
+                <a:pos x="csX9" y="csY9"/>
+              </a:cxn>
+              <a:cxn ang="0">
+                <a:pos x="csX10" y="csY10"/>
+              </a:cxn>
+              <a:cxn ang="0">
+                <a:pos x="csX11" y="csY11"/>
+              </a:cxn>
+              <a:cxn ang="0">
+                <a:pos x="csX12" y="csY12"/>
+              </a:cxn>
+              <a:cxn ang="0">
+                <a:pos x="csX13" y="csY13"/>
+              </a:cxn>
+            </a:cxnLst>
+            <a:rect l="l" t="t" r="r" b="b"/>
+            <a:pathLst>
+              <a:path w="937260" h="652165">
+                <a:moveTo>
+                  <a:pt x="0" y="0"/>
+                </a:moveTo>
+                <a:lnTo>
+                  <a:pt x="179" y="0"/>
+                </a:lnTo>
+                <a:lnTo>
+                  <a:pt x="116373" y="31552"/>
+                </a:lnTo>
+                <a:cubicBezTo>
+                  <a:pt x="224643" y="54462"/>
+                  <a:pt x="343679" y="67131"/>
+                  <a:pt x="468630" y="67131"/>
+                </a:cubicBezTo>
+                <a:cubicBezTo>
+                  <a:pt x="593581" y="67131"/>
+                  <a:pt x="712618" y="54462"/>
+                  <a:pt x="820887" y="31552"/>
+                </a:cubicBezTo>
+                <a:lnTo>
+                  <a:pt x="937081" y="0"/>
+                </a:lnTo>
+                <a:lnTo>
+                  <a:pt x="937260" y="0"/>
+                </a:lnTo>
+                <a:lnTo>
+                  <a:pt x="937260" y="652165"/>
+                </a:lnTo>
+                <a:lnTo>
+                  <a:pt x="937078" y="652165"/>
+                </a:lnTo>
+                <a:lnTo>
+                  <a:pt x="820887" y="620614"/>
+                </a:lnTo>
+                <a:cubicBezTo>
+                  <a:pt x="712618" y="597704"/>
+                  <a:pt x="593581" y="585035"/>
+                  <a:pt x="468630" y="585035"/>
+                </a:cubicBezTo>
+                <a:cubicBezTo>
+                  <a:pt x="343679" y="585035"/>
+                  <a:pt x="224643" y="597704"/>
+                  <a:pt x="116373" y="620614"/>
+                </a:cubicBezTo>
+                <a:lnTo>
+                  <a:pt x="183" y="652165"/>
+                </a:lnTo>
+                <a:lnTo>
+                  <a:pt x="0" y="652165"/>
+                </a:lnTo>
+                <a:close/>
+              </a:path>
+            </a:pathLst>
+          </a:custGeom>
+          <a:gradFill flip="none" rotWithShape="1">
+            <a:gsLst>
+              <a:gs pos="83000">
+                <a:schemeClr val="bg1">
+                  <a:alpha val="0"/>
+                </a:schemeClr>
+              </a:gs>
+              <a:gs pos="0">
+                <a:srgbClr val="00B050"/>
+              </a:gs>
+            </a:gsLst>
+            <a:path path="circle">
+              <a:fillToRect l="100000" b="100000"/>
+            </a:path>
+            <a:tileRect t="-100000" r="-100000"/>
+          </a:gradFill>
+          <a:ln>
+            <a:noFill/>
+          </a:ln>
+        </p:spPr>
+        <p:style>
+          <a:lnRef idx="2">
+            <a:schemeClr val="accent1">
+              <a:shade val="15000"/>
+            </a:schemeClr>
+          </a:lnRef>
+          <a:fillRef idx="1">
+            <a:schemeClr val="accent1"/>
+          </a:fillRef>
+          <a:effectRef idx="0">
+            <a:schemeClr val="accent1"/>
+          </a:effectRef>
+          <a:fontRef idx="minor">
+            <a:schemeClr val="lt1"/>
+          </a:fontRef>
+        </p:style>
+        <p:txBody>
+          <a:bodyPr wrap="square" rtlCol="0" anchor="ctr">
+            <a:noAutofit/>
+          </a:bodyPr>
+          <a:lstStyle/>
+          <a:p>
+            <a:pPr algn="ctr"/>
+            <a:endParaRPr lang="en-US"/>
+          </a:p>
+        </p:txBody>
+      </p:sp>
+      <p:sp>
+        <p:nvSpPr>
+          <p:cNvPr id="91" name="Freeform: Shape 90">
+            <a:extLst>
+              <a:ext uri="{FF2B5EF4-FFF2-40B4-BE49-F238E27FC236}">
+                <a16:creationId xmlns:a16="http://schemas.microsoft.com/office/drawing/2014/main" id="{C35C7B59-CB09-AB2D-8F58-3134166692C1}"/>
+              </a:ext>
+            </a:extLst>
+          </p:cNvPr>
+          <p:cNvSpPr/>
+          <p:nvPr/>
+        </p:nvSpPr>
+        <p:spPr>
+          <a:xfrm>
+            <a:off x="6235672" y="812169"/>
+            <a:ext cx="937260" cy="652165"/>
+          </a:xfrm>
+          <a:custGeom>
+            <a:avLst/>
+            <a:gdLst>
+              <a:gd name="csX0" fmla="*/ 0 w 937260"/>
+              <a:gd name="csY0" fmla="*/ 0 h 652165"/>
+              <a:gd name="csX1" fmla="*/ 179 w 937260"/>
+              <a:gd name="csY1" fmla="*/ 0 h 652165"/>
+              <a:gd name="csX2" fmla="*/ 116373 w 937260"/>
+              <a:gd name="csY2" fmla="*/ 31552 h 652165"/>
+              <a:gd name="csX3" fmla="*/ 468630 w 937260"/>
+              <a:gd name="csY3" fmla="*/ 67131 h 652165"/>
+              <a:gd name="csX4" fmla="*/ 820887 w 937260"/>
+              <a:gd name="csY4" fmla="*/ 31552 h 652165"/>
+              <a:gd name="csX5" fmla="*/ 937081 w 937260"/>
+              <a:gd name="csY5" fmla="*/ 0 h 652165"/>
+              <a:gd name="csX6" fmla="*/ 937260 w 937260"/>
+              <a:gd name="csY6" fmla="*/ 0 h 652165"/>
+              <a:gd name="csX7" fmla="*/ 937260 w 937260"/>
+              <a:gd name="csY7" fmla="*/ 652165 h 652165"/>
+              <a:gd name="csX8" fmla="*/ 937078 w 937260"/>
+              <a:gd name="csY8" fmla="*/ 652165 h 652165"/>
+              <a:gd name="csX9" fmla="*/ 820887 w 937260"/>
+              <a:gd name="csY9" fmla="*/ 620614 h 652165"/>
+              <a:gd name="csX10" fmla="*/ 468630 w 937260"/>
+              <a:gd name="csY10" fmla="*/ 585035 h 652165"/>
+              <a:gd name="csX11" fmla="*/ 116373 w 937260"/>
+              <a:gd name="csY11" fmla="*/ 620614 h 652165"/>
+              <a:gd name="csX12" fmla="*/ 183 w 937260"/>
+              <a:gd name="csY12" fmla="*/ 652165 h 652165"/>
+              <a:gd name="csX13" fmla="*/ 0 w 937260"/>
+              <a:gd name="csY13" fmla="*/ 652165 h 652165"/>
+            </a:gdLst>
+            <a:ahLst/>
+            <a:cxnLst>
+              <a:cxn ang="0">
+                <a:pos x="csX0" y="csY0"/>
+              </a:cxn>
+              <a:cxn ang="0">
+                <a:pos x="csX1" y="csY1"/>
+              </a:cxn>
+              <a:cxn ang="0">
+                <a:pos x="csX2" y="csY2"/>
+              </a:cxn>
+              <a:cxn ang="0">
+                <a:pos x="csX3" y="csY3"/>
+              </a:cxn>
+              <a:cxn ang="0">
+                <a:pos x="csX4" y="csY4"/>
+              </a:cxn>
+              <a:cxn ang="0">
+                <a:pos x="csX5" y="csY5"/>
+              </a:cxn>
+              <a:cxn ang="0">
+                <a:pos x="csX6" y="csY6"/>
+              </a:cxn>
+              <a:cxn ang="0">
+                <a:pos x="csX7" y="csY7"/>
+              </a:cxn>
+              <a:cxn ang="0">
+                <a:pos x="csX8" y="csY8"/>
+              </a:cxn>
+              <a:cxn ang="0">
+                <a:pos x="csX9" y="csY9"/>
+              </a:cxn>
+              <a:cxn ang="0">
+                <a:pos x="csX10" y="csY10"/>
+              </a:cxn>
+              <a:cxn ang="0">
+                <a:pos x="csX11" y="csY11"/>
+              </a:cxn>
+              <a:cxn ang="0">
+                <a:pos x="csX12" y="csY12"/>
+              </a:cxn>
+              <a:cxn ang="0">
+                <a:pos x="csX13" y="csY13"/>
+              </a:cxn>
+            </a:cxnLst>
+            <a:rect l="l" t="t" r="r" b="b"/>
+            <a:pathLst>
+              <a:path w="937260" h="652165">
+                <a:moveTo>
+                  <a:pt x="0" y="0"/>
+                </a:moveTo>
+                <a:lnTo>
+                  <a:pt x="179" y="0"/>
+                </a:lnTo>
+                <a:lnTo>
+                  <a:pt x="116373" y="31552"/>
+                </a:lnTo>
+                <a:cubicBezTo>
+                  <a:pt x="224643" y="54462"/>
+                  <a:pt x="343679" y="67131"/>
+                  <a:pt x="468630" y="67131"/>
+                </a:cubicBezTo>
+                <a:cubicBezTo>
+                  <a:pt x="593581" y="67131"/>
+                  <a:pt x="712618" y="54462"/>
+                  <a:pt x="820887" y="31552"/>
+                </a:cubicBezTo>
+                <a:lnTo>
+                  <a:pt x="937081" y="0"/>
+                </a:lnTo>
+                <a:lnTo>
+                  <a:pt x="937260" y="0"/>
+                </a:lnTo>
+                <a:lnTo>
+                  <a:pt x="937260" y="652165"/>
+                </a:lnTo>
+                <a:lnTo>
+                  <a:pt x="937078" y="652165"/>
+                </a:lnTo>
+                <a:lnTo>
+                  <a:pt x="820887" y="620614"/>
+                </a:lnTo>
+                <a:cubicBezTo>
+                  <a:pt x="712618" y="597704"/>
+                  <a:pt x="593581" y="585035"/>
+                  <a:pt x="468630" y="585035"/>
+                </a:cubicBezTo>
+                <a:cubicBezTo>
+                  <a:pt x="343679" y="585035"/>
+                  <a:pt x="224643" y="597704"/>
+                  <a:pt x="116373" y="620614"/>
+                </a:cubicBezTo>
+                <a:lnTo>
+                  <a:pt x="183" y="652165"/>
+                </a:lnTo>
+                <a:lnTo>
+                  <a:pt x="0" y="652165"/>
+                </a:lnTo>
+                <a:close/>
+              </a:path>
+            </a:pathLst>
+          </a:custGeom>
+          <a:solidFill>
+            <a:schemeClr val="bg1"/>
           </a:solidFill>
           <a:ln>
             <a:noFill/>

--- a/Icons_UI/bcpst.pptx
+++ b/Icons_UI/bcpst.pptx
@@ -5268,12 +5268,3339 @@
           </p:txBody>
         </p:sp>
       </p:grpSp>
+      <p:grpSp>
+        <p:nvGrpSpPr>
+          <p:cNvPr id="51" name="Group 50">
+            <a:extLst>
+              <a:ext uri="{FF2B5EF4-FFF2-40B4-BE49-F238E27FC236}">
+                <a16:creationId xmlns:a16="http://schemas.microsoft.com/office/drawing/2014/main" id="{8EAD12E2-3DF6-563B-DDA6-6C10894F6389}"/>
+              </a:ext>
+            </a:extLst>
+          </p:cNvPr>
+          <p:cNvGrpSpPr/>
+          <p:nvPr/>
+        </p:nvGrpSpPr>
+        <p:grpSpPr>
+          <a:xfrm>
+            <a:off x="2539535" y="4022577"/>
+            <a:ext cx="6091564" cy="652166"/>
+            <a:chOff x="2539535" y="4022577"/>
+            <a:chExt cx="6091564" cy="652166"/>
+          </a:xfrm>
+        </p:grpSpPr>
+        <p:sp>
+          <p:nvSpPr>
+            <p:cNvPr id="22" name="Rectangle: Rounded Corners 21">
+              <a:extLst>
+                <a:ext uri="{FF2B5EF4-FFF2-40B4-BE49-F238E27FC236}">
+                  <a16:creationId xmlns:a16="http://schemas.microsoft.com/office/drawing/2014/main" id="{04BD6A4C-1DF2-97B0-CDDE-ED2A12EB5A2D}"/>
+                </a:ext>
+              </a:extLst>
+            </p:cNvPr>
+            <p:cNvSpPr/>
+            <p:nvPr/>
+          </p:nvSpPr>
+          <p:spPr>
+            <a:xfrm>
+              <a:off x="2546329" y="4022577"/>
+              <a:ext cx="937260" cy="652166"/>
+            </a:xfrm>
+            <a:prstGeom prst="roundRect">
+              <a:avLst/>
+            </a:prstGeom>
+            <a:solidFill>
+              <a:srgbClr val="C775E7"/>
+            </a:solidFill>
+            <a:ln w="3175">
+              <a:solidFill>
+                <a:srgbClr val="7030A0"/>
+              </a:solidFill>
+            </a:ln>
+          </p:spPr>
+          <p:style>
+            <a:lnRef idx="2">
+              <a:schemeClr val="accent1">
+                <a:shade val="15000"/>
+              </a:schemeClr>
+            </a:lnRef>
+            <a:fillRef idx="1">
+              <a:schemeClr val="accent1"/>
+            </a:fillRef>
+            <a:effectRef idx="0">
+              <a:schemeClr val="accent1"/>
+            </a:effectRef>
+            <a:fontRef idx="minor">
+              <a:schemeClr val="lt1"/>
+            </a:fontRef>
+          </p:style>
+          <p:txBody>
+            <a:bodyPr rtlCol="0" anchor="ctr"/>
+            <a:lstStyle/>
+            <a:p>
+              <a:pPr algn="ctr"/>
+              <a:endParaRPr lang="en-US"/>
+            </a:p>
+          </p:txBody>
+        </p:sp>
+        <p:sp>
+          <p:nvSpPr>
+            <p:cNvPr id="23" name="Freeform: Shape 22">
+              <a:extLst>
+                <a:ext uri="{FF2B5EF4-FFF2-40B4-BE49-F238E27FC236}">
+                  <a16:creationId xmlns:a16="http://schemas.microsoft.com/office/drawing/2014/main" id="{9750E4F2-092D-D55C-C68A-477569CD3EDD}"/>
+                </a:ext>
+              </a:extLst>
+            </p:cNvPr>
+            <p:cNvSpPr/>
+            <p:nvPr/>
+          </p:nvSpPr>
+          <p:spPr>
+            <a:xfrm>
+              <a:off x="7698281" y="4022578"/>
+              <a:ext cx="932818" cy="652165"/>
+            </a:xfrm>
+            <a:custGeom>
+              <a:avLst/>
+              <a:gdLst>
+                <a:gd name="csX0" fmla="*/ 0 w 1761688"/>
+                <a:gd name="csY0" fmla="*/ 0 h 1291904"/>
+                <a:gd name="csX1" fmla="*/ 75501 w 1761688"/>
+                <a:gd name="csY1" fmla="*/ 0 h 1291904"/>
+                <a:gd name="csX2" fmla="*/ 1686187 w 1761688"/>
+                <a:gd name="csY2" fmla="*/ 0 h 1291904"/>
+                <a:gd name="csX3" fmla="*/ 1761688 w 1761688"/>
+                <a:gd name="csY3" fmla="*/ 0 h 1291904"/>
+                <a:gd name="csX4" fmla="*/ 1761688 w 1761688"/>
+                <a:gd name="csY4" fmla="*/ 102765 h 1291904"/>
+                <a:gd name="csX5" fmla="*/ 1686187 w 1761688"/>
+                <a:gd name="csY5" fmla="*/ 102765 h 1291904"/>
+                <a:gd name="csX6" fmla="*/ 1686187 w 1761688"/>
+                <a:gd name="csY6" fmla="*/ 1189139 h 1291904"/>
+                <a:gd name="csX7" fmla="*/ 1761688 w 1761688"/>
+                <a:gd name="csY7" fmla="*/ 1189139 h 1291904"/>
+                <a:gd name="csX8" fmla="*/ 1761688 w 1761688"/>
+                <a:gd name="csY8" fmla="*/ 1291904 h 1291904"/>
+                <a:gd name="csX9" fmla="*/ 1686187 w 1761688"/>
+                <a:gd name="csY9" fmla="*/ 1291904 h 1291904"/>
+                <a:gd name="csX10" fmla="*/ 75501 w 1761688"/>
+                <a:gd name="csY10" fmla="*/ 1291904 h 1291904"/>
+                <a:gd name="csX11" fmla="*/ 0 w 1761688"/>
+                <a:gd name="csY11" fmla="*/ 1291904 h 1291904"/>
+                <a:gd name="csX12" fmla="*/ 0 w 1761688"/>
+                <a:gd name="csY12" fmla="*/ 1189139 h 1291904"/>
+                <a:gd name="csX13" fmla="*/ 75501 w 1761688"/>
+                <a:gd name="csY13" fmla="*/ 1189139 h 1291904"/>
+                <a:gd name="csX14" fmla="*/ 75501 w 1761688"/>
+                <a:gd name="csY14" fmla="*/ 102765 h 1291904"/>
+                <a:gd name="csX15" fmla="*/ 0 w 1761688"/>
+                <a:gd name="csY15" fmla="*/ 102765 h 1291904"/>
+              </a:gdLst>
+              <a:ahLst/>
+              <a:cxnLst>
+                <a:cxn ang="0">
+                  <a:pos x="csX0" y="csY0"/>
+                </a:cxn>
+                <a:cxn ang="0">
+                  <a:pos x="csX1" y="csY1"/>
+                </a:cxn>
+                <a:cxn ang="0">
+                  <a:pos x="csX2" y="csY2"/>
+                </a:cxn>
+                <a:cxn ang="0">
+                  <a:pos x="csX3" y="csY3"/>
+                </a:cxn>
+                <a:cxn ang="0">
+                  <a:pos x="csX4" y="csY4"/>
+                </a:cxn>
+                <a:cxn ang="0">
+                  <a:pos x="csX5" y="csY5"/>
+                </a:cxn>
+                <a:cxn ang="0">
+                  <a:pos x="csX6" y="csY6"/>
+                </a:cxn>
+                <a:cxn ang="0">
+                  <a:pos x="csX7" y="csY7"/>
+                </a:cxn>
+                <a:cxn ang="0">
+                  <a:pos x="csX8" y="csY8"/>
+                </a:cxn>
+                <a:cxn ang="0">
+                  <a:pos x="csX9" y="csY9"/>
+                </a:cxn>
+                <a:cxn ang="0">
+                  <a:pos x="csX10" y="csY10"/>
+                </a:cxn>
+                <a:cxn ang="0">
+                  <a:pos x="csX11" y="csY11"/>
+                </a:cxn>
+                <a:cxn ang="0">
+                  <a:pos x="csX12" y="csY12"/>
+                </a:cxn>
+                <a:cxn ang="0">
+                  <a:pos x="csX13" y="csY13"/>
+                </a:cxn>
+                <a:cxn ang="0">
+                  <a:pos x="csX14" y="csY14"/>
+                </a:cxn>
+                <a:cxn ang="0">
+                  <a:pos x="csX15" y="csY15"/>
+                </a:cxn>
+              </a:cxnLst>
+              <a:rect l="l" t="t" r="r" b="b"/>
+              <a:pathLst>
+                <a:path w="1761688" h="1291904">
+                  <a:moveTo>
+                    <a:pt x="0" y="0"/>
+                  </a:moveTo>
+                  <a:lnTo>
+                    <a:pt x="75501" y="0"/>
+                  </a:lnTo>
+                  <a:lnTo>
+                    <a:pt x="1686187" y="0"/>
+                  </a:lnTo>
+                  <a:lnTo>
+                    <a:pt x="1761688" y="0"/>
+                  </a:lnTo>
+                  <a:lnTo>
+                    <a:pt x="1761688" y="102765"/>
+                  </a:lnTo>
+                  <a:lnTo>
+                    <a:pt x="1686187" y="102765"/>
+                  </a:lnTo>
+                  <a:lnTo>
+                    <a:pt x="1686187" y="1189139"/>
+                  </a:lnTo>
+                  <a:lnTo>
+                    <a:pt x="1761688" y="1189139"/>
+                  </a:lnTo>
+                  <a:lnTo>
+                    <a:pt x="1761688" y="1291904"/>
+                  </a:lnTo>
+                  <a:lnTo>
+                    <a:pt x="1686187" y="1291904"/>
+                  </a:lnTo>
+                  <a:lnTo>
+                    <a:pt x="75501" y="1291904"/>
+                  </a:lnTo>
+                  <a:lnTo>
+                    <a:pt x="0" y="1291904"/>
+                  </a:lnTo>
+                  <a:lnTo>
+                    <a:pt x="0" y="1189139"/>
+                  </a:lnTo>
+                  <a:lnTo>
+                    <a:pt x="75501" y="1189139"/>
+                  </a:lnTo>
+                  <a:lnTo>
+                    <a:pt x="75501" y="102765"/>
+                  </a:lnTo>
+                  <a:lnTo>
+                    <a:pt x="0" y="102765"/>
+                  </a:lnTo>
+                  <a:close/>
+                </a:path>
+              </a:pathLst>
+            </a:custGeom>
+            <a:solidFill>
+              <a:srgbClr val="ECC31D"/>
+            </a:solidFill>
+            <a:ln w="3175">
+              <a:solidFill>
+                <a:schemeClr val="accent4">
+                  <a:lumMod val="75000"/>
+                </a:schemeClr>
+              </a:solidFill>
+            </a:ln>
+          </p:spPr>
+          <p:style>
+            <a:lnRef idx="2">
+              <a:schemeClr val="accent1">
+                <a:shade val="15000"/>
+              </a:schemeClr>
+            </a:lnRef>
+            <a:fillRef idx="1">
+              <a:schemeClr val="accent1"/>
+            </a:fillRef>
+            <a:effectRef idx="0">
+              <a:schemeClr val="accent1"/>
+            </a:effectRef>
+            <a:fontRef idx="minor">
+              <a:schemeClr val="lt1"/>
+            </a:fontRef>
+          </p:style>
+          <p:txBody>
+            <a:bodyPr wrap="square" rtlCol="0" anchor="ctr">
+              <a:noAutofit/>
+            </a:bodyPr>
+            <a:lstStyle/>
+            <a:p>
+              <a:pPr algn="ctr"/>
+              <a:endParaRPr lang="en-US"/>
+            </a:p>
+          </p:txBody>
+        </p:sp>
+        <p:sp>
+          <p:nvSpPr>
+            <p:cNvPr id="24" name="Freeform: Shape 23">
+              <a:extLst>
+                <a:ext uri="{FF2B5EF4-FFF2-40B4-BE49-F238E27FC236}">
+                  <a16:creationId xmlns:a16="http://schemas.microsoft.com/office/drawing/2014/main" id="{B371E4BC-2DC4-9584-3E97-146A28B7BF4D}"/>
+                </a:ext>
+              </a:extLst>
+            </p:cNvPr>
+            <p:cNvSpPr/>
+            <p:nvPr/>
+          </p:nvSpPr>
+          <p:spPr>
+            <a:xfrm rot="16200000" flipH="1">
+              <a:off x="5198786" y="3880031"/>
+              <a:ext cx="652164" cy="937260"/>
+            </a:xfrm>
+            <a:custGeom>
+              <a:avLst/>
+              <a:gdLst>
+                <a:gd name="csX0" fmla="*/ 0 w 1291905"/>
+                <a:gd name="csY0" fmla="*/ 0 h 1770078"/>
+                <a:gd name="csX1" fmla="*/ 0 w 1291905"/>
+                <a:gd name="csY1" fmla="*/ 478173 h 1770078"/>
+                <a:gd name="csX2" fmla="*/ 0 w 1291905"/>
+                <a:gd name="csY2" fmla="*/ 1291905 h 1770078"/>
+                <a:gd name="csX3" fmla="*/ 0 w 1291905"/>
+                <a:gd name="csY3" fmla="*/ 1770078 h 1770078"/>
+                <a:gd name="csX4" fmla="*/ 6123 w 1291905"/>
+                <a:gd name="csY4" fmla="*/ 1770078 h 1770078"/>
+                <a:gd name="csX5" fmla="*/ 109381 w 1291905"/>
+                <a:gd name="csY5" fmla="*/ 1658008 h 1770078"/>
+                <a:gd name="csX6" fmla="*/ 212639 w 1291905"/>
+                <a:gd name="csY6" fmla="*/ 1770078 h 1770078"/>
+                <a:gd name="csX7" fmla="*/ 221976 w 1291905"/>
+                <a:gd name="csY7" fmla="*/ 1770078 h 1770078"/>
+                <a:gd name="csX8" fmla="*/ 325234 w 1291905"/>
+                <a:gd name="csY8" fmla="*/ 1658008 h 1770078"/>
+                <a:gd name="csX9" fmla="*/ 428492 w 1291905"/>
+                <a:gd name="csY9" fmla="*/ 1770078 h 1770078"/>
+                <a:gd name="csX10" fmla="*/ 437829 w 1291905"/>
+                <a:gd name="csY10" fmla="*/ 1770078 h 1770078"/>
+                <a:gd name="csX11" fmla="*/ 541087 w 1291905"/>
+                <a:gd name="csY11" fmla="*/ 1658008 h 1770078"/>
+                <a:gd name="csX12" fmla="*/ 644346 w 1291905"/>
+                <a:gd name="csY12" fmla="*/ 1770078 h 1770078"/>
+                <a:gd name="csX13" fmla="*/ 653683 w 1291905"/>
+                <a:gd name="csY13" fmla="*/ 1770078 h 1770078"/>
+                <a:gd name="csX14" fmla="*/ 756941 w 1291905"/>
+                <a:gd name="csY14" fmla="*/ 1658008 h 1770078"/>
+                <a:gd name="csX15" fmla="*/ 860199 w 1291905"/>
+                <a:gd name="csY15" fmla="*/ 1770078 h 1770078"/>
+                <a:gd name="csX16" fmla="*/ 869536 w 1291905"/>
+                <a:gd name="csY16" fmla="*/ 1770078 h 1770078"/>
+                <a:gd name="csX17" fmla="*/ 972794 w 1291905"/>
+                <a:gd name="csY17" fmla="*/ 1658008 h 1770078"/>
+                <a:gd name="csX18" fmla="*/ 1076052 w 1291905"/>
+                <a:gd name="csY18" fmla="*/ 1770078 h 1770078"/>
+                <a:gd name="csX19" fmla="*/ 1085389 w 1291905"/>
+                <a:gd name="csY19" fmla="*/ 1770078 h 1770078"/>
+                <a:gd name="csX20" fmla="*/ 1188647 w 1291905"/>
+                <a:gd name="csY20" fmla="*/ 1658008 h 1770078"/>
+                <a:gd name="csX21" fmla="*/ 1291905 w 1291905"/>
+                <a:gd name="csY21" fmla="*/ 1770078 h 1770078"/>
+                <a:gd name="csX22" fmla="*/ 1291905 w 1291905"/>
+                <a:gd name="csY22" fmla="*/ 1291905 h 1770078"/>
+                <a:gd name="csX23" fmla="*/ 1291905 w 1291905"/>
+                <a:gd name="csY23" fmla="*/ 478173 h 1770078"/>
+                <a:gd name="csX24" fmla="*/ 1291905 w 1291905"/>
+                <a:gd name="csY24" fmla="*/ 0 h 1770078"/>
+                <a:gd name="csX25" fmla="*/ 1188647 w 1291905"/>
+                <a:gd name="csY25" fmla="*/ 112070 h 1770078"/>
+                <a:gd name="csX26" fmla="*/ 1085389 w 1291905"/>
+                <a:gd name="csY26" fmla="*/ 0 h 1770078"/>
+                <a:gd name="csX27" fmla="*/ 1076052 w 1291905"/>
+                <a:gd name="csY27" fmla="*/ 0 h 1770078"/>
+                <a:gd name="csX28" fmla="*/ 972794 w 1291905"/>
+                <a:gd name="csY28" fmla="*/ 112070 h 1770078"/>
+                <a:gd name="csX29" fmla="*/ 869536 w 1291905"/>
+                <a:gd name="csY29" fmla="*/ 0 h 1770078"/>
+                <a:gd name="csX30" fmla="*/ 860199 w 1291905"/>
+                <a:gd name="csY30" fmla="*/ 0 h 1770078"/>
+                <a:gd name="csX31" fmla="*/ 756941 w 1291905"/>
+                <a:gd name="csY31" fmla="*/ 112070 h 1770078"/>
+                <a:gd name="csX32" fmla="*/ 653683 w 1291905"/>
+                <a:gd name="csY32" fmla="*/ 0 h 1770078"/>
+                <a:gd name="csX33" fmla="*/ 644346 w 1291905"/>
+                <a:gd name="csY33" fmla="*/ 0 h 1770078"/>
+                <a:gd name="csX34" fmla="*/ 541087 w 1291905"/>
+                <a:gd name="csY34" fmla="*/ 112070 h 1770078"/>
+                <a:gd name="csX35" fmla="*/ 437829 w 1291905"/>
+                <a:gd name="csY35" fmla="*/ 0 h 1770078"/>
+                <a:gd name="csX36" fmla="*/ 428492 w 1291905"/>
+                <a:gd name="csY36" fmla="*/ 0 h 1770078"/>
+                <a:gd name="csX37" fmla="*/ 325234 w 1291905"/>
+                <a:gd name="csY37" fmla="*/ 112070 h 1770078"/>
+                <a:gd name="csX38" fmla="*/ 221976 w 1291905"/>
+                <a:gd name="csY38" fmla="*/ 0 h 1770078"/>
+                <a:gd name="csX39" fmla="*/ 212639 w 1291905"/>
+                <a:gd name="csY39" fmla="*/ 0 h 1770078"/>
+                <a:gd name="csX40" fmla="*/ 109381 w 1291905"/>
+                <a:gd name="csY40" fmla="*/ 112070 h 1770078"/>
+                <a:gd name="csX41" fmla="*/ 6123 w 1291905"/>
+                <a:gd name="csY41" fmla="*/ 0 h 1770078"/>
+              </a:gdLst>
+              <a:ahLst/>
+              <a:cxnLst>
+                <a:cxn ang="0">
+                  <a:pos x="csX0" y="csY0"/>
+                </a:cxn>
+                <a:cxn ang="0">
+                  <a:pos x="csX1" y="csY1"/>
+                </a:cxn>
+                <a:cxn ang="0">
+                  <a:pos x="csX2" y="csY2"/>
+                </a:cxn>
+                <a:cxn ang="0">
+                  <a:pos x="csX3" y="csY3"/>
+                </a:cxn>
+                <a:cxn ang="0">
+                  <a:pos x="csX4" y="csY4"/>
+                </a:cxn>
+                <a:cxn ang="0">
+                  <a:pos x="csX5" y="csY5"/>
+                </a:cxn>
+                <a:cxn ang="0">
+                  <a:pos x="csX6" y="csY6"/>
+                </a:cxn>
+                <a:cxn ang="0">
+                  <a:pos x="csX7" y="csY7"/>
+                </a:cxn>
+                <a:cxn ang="0">
+                  <a:pos x="csX8" y="csY8"/>
+                </a:cxn>
+                <a:cxn ang="0">
+                  <a:pos x="csX9" y="csY9"/>
+                </a:cxn>
+                <a:cxn ang="0">
+                  <a:pos x="csX10" y="csY10"/>
+                </a:cxn>
+                <a:cxn ang="0">
+                  <a:pos x="csX11" y="csY11"/>
+                </a:cxn>
+                <a:cxn ang="0">
+                  <a:pos x="csX12" y="csY12"/>
+                </a:cxn>
+                <a:cxn ang="0">
+                  <a:pos x="csX13" y="csY13"/>
+                </a:cxn>
+                <a:cxn ang="0">
+                  <a:pos x="csX14" y="csY14"/>
+                </a:cxn>
+                <a:cxn ang="0">
+                  <a:pos x="csX15" y="csY15"/>
+                </a:cxn>
+                <a:cxn ang="0">
+                  <a:pos x="csX16" y="csY16"/>
+                </a:cxn>
+                <a:cxn ang="0">
+                  <a:pos x="csX17" y="csY17"/>
+                </a:cxn>
+                <a:cxn ang="0">
+                  <a:pos x="csX18" y="csY18"/>
+                </a:cxn>
+                <a:cxn ang="0">
+                  <a:pos x="csX19" y="csY19"/>
+                </a:cxn>
+                <a:cxn ang="0">
+                  <a:pos x="csX20" y="csY20"/>
+                </a:cxn>
+                <a:cxn ang="0">
+                  <a:pos x="csX21" y="csY21"/>
+                </a:cxn>
+                <a:cxn ang="0">
+                  <a:pos x="csX22" y="csY22"/>
+                </a:cxn>
+                <a:cxn ang="0">
+                  <a:pos x="csX23" y="csY23"/>
+                </a:cxn>
+                <a:cxn ang="0">
+                  <a:pos x="csX24" y="csY24"/>
+                </a:cxn>
+                <a:cxn ang="0">
+                  <a:pos x="csX25" y="csY25"/>
+                </a:cxn>
+                <a:cxn ang="0">
+                  <a:pos x="csX26" y="csY26"/>
+                </a:cxn>
+                <a:cxn ang="0">
+                  <a:pos x="csX27" y="csY27"/>
+                </a:cxn>
+                <a:cxn ang="0">
+                  <a:pos x="csX28" y="csY28"/>
+                </a:cxn>
+                <a:cxn ang="0">
+                  <a:pos x="csX29" y="csY29"/>
+                </a:cxn>
+                <a:cxn ang="0">
+                  <a:pos x="csX30" y="csY30"/>
+                </a:cxn>
+                <a:cxn ang="0">
+                  <a:pos x="csX31" y="csY31"/>
+                </a:cxn>
+                <a:cxn ang="0">
+                  <a:pos x="csX32" y="csY32"/>
+                </a:cxn>
+                <a:cxn ang="0">
+                  <a:pos x="csX33" y="csY33"/>
+                </a:cxn>
+                <a:cxn ang="0">
+                  <a:pos x="csX34" y="csY34"/>
+                </a:cxn>
+                <a:cxn ang="0">
+                  <a:pos x="csX35" y="csY35"/>
+                </a:cxn>
+                <a:cxn ang="0">
+                  <a:pos x="csX36" y="csY36"/>
+                </a:cxn>
+                <a:cxn ang="0">
+                  <a:pos x="csX37" y="csY37"/>
+                </a:cxn>
+                <a:cxn ang="0">
+                  <a:pos x="csX38" y="csY38"/>
+                </a:cxn>
+                <a:cxn ang="0">
+                  <a:pos x="csX39" y="csY39"/>
+                </a:cxn>
+                <a:cxn ang="0">
+                  <a:pos x="csX40" y="csY40"/>
+                </a:cxn>
+                <a:cxn ang="0">
+                  <a:pos x="csX41" y="csY41"/>
+                </a:cxn>
+              </a:cxnLst>
+              <a:rect l="l" t="t" r="r" b="b"/>
+              <a:pathLst>
+                <a:path w="1291905" h="1770078">
+                  <a:moveTo>
+                    <a:pt x="0" y="0"/>
+                  </a:moveTo>
+                  <a:lnTo>
+                    <a:pt x="0" y="478173"/>
+                  </a:lnTo>
+                  <a:lnTo>
+                    <a:pt x="0" y="1291905"/>
+                  </a:lnTo>
+                  <a:lnTo>
+                    <a:pt x="0" y="1770078"/>
+                  </a:lnTo>
+                  <a:lnTo>
+                    <a:pt x="6123" y="1770078"/>
+                  </a:lnTo>
+                  <a:lnTo>
+                    <a:pt x="109381" y="1658008"/>
+                  </a:lnTo>
+                  <a:lnTo>
+                    <a:pt x="212639" y="1770078"/>
+                  </a:lnTo>
+                  <a:lnTo>
+                    <a:pt x="221976" y="1770078"/>
+                  </a:lnTo>
+                  <a:lnTo>
+                    <a:pt x="325234" y="1658008"/>
+                  </a:lnTo>
+                  <a:lnTo>
+                    <a:pt x="428492" y="1770078"/>
+                  </a:lnTo>
+                  <a:lnTo>
+                    <a:pt x="437829" y="1770078"/>
+                  </a:lnTo>
+                  <a:lnTo>
+                    <a:pt x="541087" y="1658008"/>
+                  </a:lnTo>
+                  <a:lnTo>
+                    <a:pt x="644346" y="1770078"/>
+                  </a:lnTo>
+                  <a:lnTo>
+                    <a:pt x="653683" y="1770078"/>
+                  </a:lnTo>
+                  <a:lnTo>
+                    <a:pt x="756941" y="1658008"/>
+                  </a:lnTo>
+                  <a:lnTo>
+                    <a:pt x="860199" y="1770078"/>
+                  </a:lnTo>
+                  <a:lnTo>
+                    <a:pt x="869536" y="1770078"/>
+                  </a:lnTo>
+                  <a:lnTo>
+                    <a:pt x="972794" y="1658008"/>
+                  </a:lnTo>
+                  <a:lnTo>
+                    <a:pt x="1076052" y="1770078"/>
+                  </a:lnTo>
+                  <a:lnTo>
+                    <a:pt x="1085389" y="1770078"/>
+                  </a:lnTo>
+                  <a:lnTo>
+                    <a:pt x="1188647" y="1658008"/>
+                  </a:lnTo>
+                  <a:lnTo>
+                    <a:pt x="1291905" y="1770078"/>
+                  </a:lnTo>
+                  <a:lnTo>
+                    <a:pt x="1291905" y="1291905"/>
+                  </a:lnTo>
+                  <a:lnTo>
+                    <a:pt x="1291905" y="478173"/>
+                  </a:lnTo>
+                  <a:lnTo>
+                    <a:pt x="1291905" y="0"/>
+                  </a:lnTo>
+                  <a:lnTo>
+                    <a:pt x="1188647" y="112070"/>
+                  </a:lnTo>
+                  <a:lnTo>
+                    <a:pt x="1085389" y="0"/>
+                  </a:lnTo>
+                  <a:lnTo>
+                    <a:pt x="1076052" y="0"/>
+                  </a:lnTo>
+                  <a:lnTo>
+                    <a:pt x="972794" y="112070"/>
+                  </a:lnTo>
+                  <a:lnTo>
+                    <a:pt x="869536" y="0"/>
+                  </a:lnTo>
+                  <a:lnTo>
+                    <a:pt x="860199" y="0"/>
+                  </a:lnTo>
+                  <a:lnTo>
+                    <a:pt x="756941" y="112070"/>
+                  </a:lnTo>
+                  <a:lnTo>
+                    <a:pt x="653683" y="0"/>
+                  </a:lnTo>
+                  <a:lnTo>
+                    <a:pt x="644346" y="0"/>
+                  </a:lnTo>
+                  <a:lnTo>
+                    <a:pt x="541087" y="112070"/>
+                  </a:lnTo>
+                  <a:lnTo>
+                    <a:pt x="437829" y="0"/>
+                  </a:lnTo>
+                  <a:lnTo>
+                    <a:pt x="428492" y="0"/>
+                  </a:lnTo>
+                  <a:lnTo>
+                    <a:pt x="325234" y="112070"/>
+                  </a:lnTo>
+                  <a:lnTo>
+                    <a:pt x="221976" y="0"/>
+                  </a:lnTo>
+                  <a:lnTo>
+                    <a:pt x="212639" y="0"/>
+                  </a:lnTo>
+                  <a:lnTo>
+                    <a:pt x="109381" y="112070"/>
+                  </a:lnTo>
+                  <a:lnTo>
+                    <a:pt x="6123" y="0"/>
+                  </a:lnTo>
+                  <a:close/>
+                </a:path>
+              </a:pathLst>
+            </a:custGeom>
+            <a:solidFill>
+              <a:srgbClr val="E94B3A"/>
+            </a:solidFill>
+            <a:ln w="3175">
+              <a:solidFill>
+                <a:srgbClr val="C00000"/>
+              </a:solidFill>
+            </a:ln>
+          </p:spPr>
+          <p:style>
+            <a:lnRef idx="2">
+              <a:schemeClr val="accent1">
+                <a:shade val="15000"/>
+              </a:schemeClr>
+            </a:lnRef>
+            <a:fillRef idx="1">
+              <a:schemeClr val="accent1"/>
+            </a:fillRef>
+            <a:effectRef idx="0">
+              <a:schemeClr val="accent1"/>
+            </a:effectRef>
+            <a:fontRef idx="minor">
+              <a:schemeClr val="lt1"/>
+            </a:fontRef>
+          </p:style>
+          <p:txBody>
+            <a:bodyPr wrap="square" rtlCol="0" anchor="ctr">
+              <a:noAutofit/>
+            </a:bodyPr>
+            <a:lstStyle/>
+            <a:p>
+              <a:pPr algn="ctr"/>
+              <a:endParaRPr lang="en-US"/>
+            </a:p>
+          </p:txBody>
+        </p:sp>
+        <p:sp>
+          <p:nvSpPr>
+            <p:cNvPr id="26" name="Freeform: Shape 25">
+              <a:extLst>
+                <a:ext uri="{FF2B5EF4-FFF2-40B4-BE49-F238E27FC236}">
+                  <a16:creationId xmlns:a16="http://schemas.microsoft.com/office/drawing/2014/main" id="{0A94A3C3-53FE-2FEC-298B-03D9F582B428}"/>
+                </a:ext>
+              </a:extLst>
+            </p:cNvPr>
+            <p:cNvSpPr/>
+            <p:nvPr/>
+          </p:nvSpPr>
+          <p:spPr>
+            <a:xfrm>
+              <a:off x="3879920" y="4022578"/>
+              <a:ext cx="937260" cy="652164"/>
+            </a:xfrm>
+            <a:custGeom>
+              <a:avLst/>
+              <a:gdLst>
+                <a:gd name="csX0" fmla="*/ 885039 w 1770078"/>
+                <a:gd name="csY0" fmla="*/ 0 h 1291903"/>
+                <a:gd name="csX1" fmla="*/ 1752097 w 1770078"/>
+                <a:gd name="csY1" fmla="*/ 364364 h 1291903"/>
+                <a:gd name="csX2" fmla="*/ 1756386 w 1770078"/>
+                <a:gd name="csY2" fmla="*/ 378854 h 1291903"/>
+                <a:gd name="csX3" fmla="*/ 1770078 w 1770078"/>
+                <a:gd name="csY3" fmla="*/ 378854 h 1291903"/>
+                <a:gd name="csX4" fmla="*/ 1770078 w 1770078"/>
+                <a:gd name="csY4" fmla="*/ 456330 h 1291903"/>
+                <a:gd name="csX5" fmla="*/ 1770078 w 1770078"/>
+                <a:gd name="csY5" fmla="*/ 1291903 h 1291903"/>
+                <a:gd name="csX6" fmla="*/ 0 w 1770078"/>
+                <a:gd name="csY6" fmla="*/ 1291903 h 1291903"/>
+                <a:gd name="csX7" fmla="*/ 0 w 1770078"/>
+                <a:gd name="csY7" fmla="*/ 456330 h 1291903"/>
+                <a:gd name="csX8" fmla="*/ 0 w 1770078"/>
+                <a:gd name="csY8" fmla="*/ 378854 h 1291903"/>
+                <a:gd name="csX9" fmla="*/ 13692 w 1770078"/>
+                <a:gd name="csY9" fmla="*/ 378854 h 1291903"/>
+                <a:gd name="csX10" fmla="*/ 17981 w 1770078"/>
+                <a:gd name="csY10" fmla="*/ 364364 h 1291903"/>
+                <a:gd name="csX11" fmla="*/ 885039 w 1770078"/>
+                <a:gd name="csY11" fmla="*/ 0 h 1291903"/>
+                <a:gd name="csX0" fmla="*/ 885039 w 1770078"/>
+                <a:gd name="csY0" fmla="*/ 0 h 1291903"/>
+                <a:gd name="csX1" fmla="*/ 1752097 w 1770078"/>
+                <a:gd name="csY1" fmla="*/ 364364 h 1291903"/>
+                <a:gd name="csX2" fmla="*/ 1756386 w 1770078"/>
+                <a:gd name="csY2" fmla="*/ 378854 h 1291903"/>
+                <a:gd name="csX3" fmla="*/ 1770078 w 1770078"/>
+                <a:gd name="csY3" fmla="*/ 378854 h 1291903"/>
+                <a:gd name="csX4" fmla="*/ 1770078 w 1770078"/>
+                <a:gd name="csY4" fmla="*/ 456330 h 1291903"/>
+                <a:gd name="csX5" fmla="*/ 1770078 w 1770078"/>
+                <a:gd name="csY5" fmla="*/ 1291903 h 1291903"/>
+                <a:gd name="csX6" fmla="*/ 0 w 1770078"/>
+                <a:gd name="csY6" fmla="*/ 1291903 h 1291903"/>
+                <a:gd name="csX7" fmla="*/ 0 w 1770078"/>
+                <a:gd name="csY7" fmla="*/ 456330 h 1291903"/>
+                <a:gd name="csX8" fmla="*/ 13692 w 1770078"/>
+                <a:gd name="csY8" fmla="*/ 378854 h 1291903"/>
+                <a:gd name="csX9" fmla="*/ 17981 w 1770078"/>
+                <a:gd name="csY9" fmla="*/ 364364 h 1291903"/>
+                <a:gd name="csX10" fmla="*/ 885039 w 1770078"/>
+                <a:gd name="csY10" fmla="*/ 0 h 1291903"/>
+                <a:gd name="csX0" fmla="*/ 885039 w 1770078"/>
+                <a:gd name="csY0" fmla="*/ 0 h 1291903"/>
+                <a:gd name="csX1" fmla="*/ 1752097 w 1770078"/>
+                <a:gd name="csY1" fmla="*/ 364364 h 1291903"/>
+                <a:gd name="csX2" fmla="*/ 1756386 w 1770078"/>
+                <a:gd name="csY2" fmla="*/ 378854 h 1291903"/>
+                <a:gd name="csX3" fmla="*/ 1770078 w 1770078"/>
+                <a:gd name="csY3" fmla="*/ 378854 h 1291903"/>
+                <a:gd name="csX4" fmla="*/ 1770078 w 1770078"/>
+                <a:gd name="csY4" fmla="*/ 456330 h 1291903"/>
+                <a:gd name="csX5" fmla="*/ 1770078 w 1770078"/>
+                <a:gd name="csY5" fmla="*/ 1291903 h 1291903"/>
+                <a:gd name="csX6" fmla="*/ 0 w 1770078"/>
+                <a:gd name="csY6" fmla="*/ 1291903 h 1291903"/>
+                <a:gd name="csX7" fmla="*/ 0 w 1770078"/>
+                <a:gd name="csY7" fmla="*/ 456330 h 1291903"/>
+                <a:gd name="csX8" fmla="*/ 17981 w 1770078"/>
+                <a:gd name="csY8" fmla="*/ 364364 h 1291903"/>
+                <a:gd name="csX9" fmla="*/ 885039 w 1770078"/>
+                <a:gd name="csY9" fmla="*/ 0 h 1291903"/>
+                <a:gd name="csX0" fmla="*/ 885039 w 1770078"/>
+                <a:gd name="csY0" fmla="*/ 0 h 1291903"/>
+                <a:gd name="csX1" fmla="*/ 1752097 w 1770078"/>
+                <a:gd name="csY1" fmla="*/ 364364 h 1291903"/>
+                <a:gd name="csX2" fmla="*/ 1756386 w 1770078"/>
+                <a:gd name="csY2" fmla="*/ 378854 h 1291903"/>
+                <a:gd name="csX3" fmla="*/ 1770078 w 1770078"/>
+                <a:gd name="csY3" fmla="*/ 456330 h 1291903"/>
+                <a:gd name="csX4" fmla="*/ 1770078 w 1770078"/>
+                <a:gd name="csY4" fmla="*/ 1291903 h 1291903"/>
+                <a:gd name="csX5" fmla="*/ 0 w 1770078"/>
+                <a:gd name="csY5" fmla="*/ 1291903 h 1291903"/>
+                <a:gd name="csX6" fmla="*/ 0 w 1770078"/>
+                <a:gd name="csY6" fmla="*/ 456330 h 1291903"/>
+                <a:gd name="csX7" fmla="*/ 17981 w 1770078"/>
+                <a:gd name="csY7" fmla="*/ 364364 h 1291903"/>
+                <a:gd name="csX8" fmla="*/ 885039 w 1770078"/>
+                <a:gd name="csY8" fmla="*/ 0 h 1291903"/>
+                <a:gd name="csX0" fmla="*/ 885039 w 1770078"/>
+                <a:gd name="csY0" fmla="*/ 0 h 1291903"/>
+                <a:gd name="csX1" fmla="*/ 1752097 w 1770078"/>
+                <a:gd name="csY1" fmla="*/ 364364 h 1291903"/>
+                <a:gd name="csX2" fmla="*/ 1770078 w 1770078"/>
+                <a:gd name="csY2" fmla="*/ 456330 h 1291903"/>
+                <a:gd name="csX3" fmla="*/ 1770078 w 1770078"/>
+                <a:gd name="csY3" fmla="*/ 1291903 h 1291903"/>
+                <a:gd name="csX4" fmla="*/ 0 w 1770078"/>
+                <a:gd name="csY4" fmla="*/ 1291903 h 1291903"/>
+                <a:gd name="csX5" fmla="*/ 0 w 1770078"/>
+                <a:gd name="csY5" fmla="*/ 456330 h 1291903"/>
+                <a:gd name="csX6" fmla="*/ 17981 w 1770078"/>
+                <a:gd name="csY6" fmla="*/ 364364 h 1291903"/>
+                <a:gd name="csX7" fmla="*/ 885039 w 1770078"/>
+                <a:gd name="csY7" fmla="*/ 0 h 1291903"/>
+              </a:gdLst>
+              <a:ahLst/>
+              <a:cxnLst>
+                <a:cxn ang="0">
+                  <a:pos x="csX0" y="csY0"/>
+                </a:cxn>
+                <a:cxn ang="0">
+                  <a:pos x="csX1" y="csY1"/>
+                </a:cxn>
+                <a:cxn ang="0">
+                  <a:pos x="csX2" y="csY2"/>
+                </a:cxn>
+                <a:cxn ang="0">
+                  <a:pos x="csX3" y="csY3"/>
+                </a:cxn>
+                <a:cxn ang="0">
+                  <a:pos x="csX4" y="csY4"/>
+                </a:cxn>
+                <a:cxn ang="0">
+                  <a:pos x="csX5" y="csY5"/>
+                </a:cxn>
+                <a:cxn ang="0">
+                  <a:pos x="csX6" y="csY6"/>
+                </a:cxn>
+                <a:cxn ang="0">
+                  <a:pos x="csX7" y="csY7"/>
+                </a:cxn>
+              </a:cxnLst>
+              <a:rect l="l" t="t" r="r" b="b"/>
+              <a:pathLst>
+                <a:path w="1770078" h="1291903">
+                  <a:moveTo>
+                    <a:pt x="885039" y="0"/>
+                  </a:moveTo>
+                  <a:cubicBezTo>
+                    <a:pt x="1312734" y="0"/>
+                    <a:pt x="1669571" y="156422"/>
+                    <a:pt x="1752097" y="364364"/>
+                  </a:cubicBezTo>
+                  <a:lnTo>
+                    <a:pt x="1770078" y="456330"/>
+                  </a:lnTo>
+                  <a:lnTo>
+                    <a:pt x="1770078" y="1291903"/>
+                  </a:lnTo>
+                  <a:lnTo>
+                    <a:pt x="0" y="1291903"/>
+                  </a:lnTo>
+                  <a:lnTo>
+                    <a:pt x="0" y="456330"/>
+                  </a:lnTo>
+                  <a:lnTo>
+                    <a:pt x="17981" y="364364"/>
+                  </a:lnTo>
+                  <a:cubicBezTo>
+                    <a:pt x="100507" y="156422"/>
+                    <a:pt x="457344" y="0"/>
+                    <a:pt x="885039" y="0"/>
+                  </a:cubicBezTo>
+                  <a:close/>
+                </a:path>
+              </a:pathLst>
+            </a:custGeom>
+            <a:solidFill>
+              <a:srgbClr val="3BA8F0"/>
+            </a:solidFill>
+            <a:ln w="3175">
+              <a:solidFill>
+                <a:srgbClr val="0070C0"/>
+              </a:solidFill>
+            </a:ln>
+          </p:spPr>
+          <p:style>
+            <a:lnRef idx="2">
+              <a:schemeClr val="accent1">
+                <a:shade val="15000"/>
+              </a:schemeClr>
+            </a:lnRef>
+            <a:fillRef idx="1">
+              <a:schemeClr val="accent1"/>
+            </a:fillRef>
+            <a:effectRef idx="0">
+              <a:schemeClr val="accent1"/>
+            </a:effectRef>
+            <a:fontRef idx="minor">
+              <a:schemeClr val="lt1"/>
+            </a:fontRef>
+          </p:style>
+          <p:txBody>
+            <a:bodyPr wrap="square" rtlCol="0" anchor="ctr">
+              <a:noAutofit/>
+            </a:bodyPr>
+            <a:lstStyle/>
+            <a:p>
+              <a:pPr algn="ctr"/>
+              <a:endParaRPr lang="en-US"/>
+            </a:p>
+          </p:txBody>
+        </p:sp>
+        <p:sp>
+          <p:nvSpPr>
+            <p:cNvPr id="27" name="Freeform: Shape 26">
+              <a:extLst>
+                <a:ext uri="{FF2B5EF4-FFF2-40B4-BE49-F238E27FC236}">
+                  <a16:creationId xmlns:a16="http://schemas.microsoft.com/office/drawing/2014/main" id="{6E1F0008-F991-AD16-8A3D-DA5DD5F510EE}"/>
+                </a:ext>
+              </a:extLst>
+            </p:cNvPr>
+            <p:cNvSpPr/>
+            <p:nvPr/>
+          </p:nvSpPr>
+          <p:spPr>
+            <a:xfrm>
+              <a:off x="6235672" y="4022578"/>
+              <a:ext cx="937260" cy="652165"/>
+            </a:xfrm>
+            <a:custGeom>
+              <a:avLst/>
+              <a:gdLst>
+                <a:gd name="csX0" fmla="*/ 0 w 937260"/>
+                <a:gd name="csY0" fmla="*/ 0 h 652165"/>
+                <a:gd name="csX1" fmla="*/ 179 w 937260"/>
+                <a:gd name="csY1" fmla="*/ 0 h 652165"/>
+                <a:gd name="csX2" fmla="*/ 116373 w 937260"/>
+                <a:gd name="csY2" fmla="*/ 31552 h 652165"/>
+                <a:gd name="csX3" fmla="*/ 468630 w 937260"/>
+                <a:gd name="csY3" fmla="*/ 67131 h 652165"/>
+                <a:gd name="csX4" fmla="*/ 820887 w 937260"/>
+                <a:gd name="csY4" fmla="*/ 31552 h 652165"/>
+                <a:gd name="csX5" fmla="*/ 937081 w 937260"/>
+                <a:gd name="csY5" fmla="*/ 0 h 652165"/>
+                <a:gd name="csX6" fmla="*/ 937260 w 937260"/>
+                <a:gd name="csY6" fmla="*/ 0 h 652165"/>
+                <a:gd name="csX7" fmla="*/ 937260 w 937260"/>
+                <a:gd name="csY7" fmla="*/ 652165 h 652165"/>
+                <a:gd name="csX8" fmla="*/ 937078 w 937260"/>
+                <a:gd name="csY8" fmla="*/ 652165 h 652165"/>
+                <a:gd name="csX9" fmla="*/ 820887 w 937260"/>
+                <a:gd name="csY9" fmla="*/ 620614 h 652165"/>
+                <a:gd name="csX10" fmla="*/ 468630 w 937260"/>
+                <a:gd name="csY10" fmla="*/ 585035 h 652165"/>
+                <a:gd name="csX11" fmla="*/ 116373 w 937260"/>
+                <a:gd name="csY11" fmla="*/ 620614 h 652165"/>
+                <a:gd name="csX12" fmla="*/ 183 w 937260"/>
+                <a:gd name="csY12" fmla="*/ 652165 h 652165"/>
+                <a:gd name="csX13" fmla="*/ 0 w 937260"/>
+                <a:gd name="csY13" fmla="*/ 652165 h 652165"/>
+              </a:gdLst>
+              <a:ahLst/>
+              <a:cxnLst>
+                <a:cxn ang="0">
+                  <a:pos x="csX0" y="csY0"/>
+                </a:cxn>
+                <a:cxn ang="0">
+                  <a:pos x="csX1" y="csY1"/>
+                </a:cxn>
+                <a:cxn ang="0">
+                  <a:pos x="csX2" y="csY2"/>
+                </a:cxn>
+                <a:cxn ang="0">
+                  <a:pos x="csX3" y="csY3"/>
+                </a:cxn>
+                <a:cxn ang="0">
+                  <a:pos x="csX4" y="csY4"/>
+                </a:cxn>
+                <a:cxn ang="0">
+                  <a:pos x="csX5" y="csY5"/>
+                </a:cxn>
+                <a:cxn ang="0">
+                  <a:pos x="csX6" y="csY6"/>
+                </a:cxn>
+                <a:cxn ang="0">
+                  <a:pos x="csX7" y="csY7"/>
+                </a:cxn>
+                <a:cxn ang="0">
+                  <a:pos x="csX8" y="csY8"/>
+                </a:cxn>
+                <a:cxn ang="0">
+                  <a:pos x="csX9" y="csY9"/>
+                </a:cxn>
+                <a:cxn ang="0">
+                  <a:pos x="csX10" y="csY10"/>
+                </a:cxn>
+                <a:cxn ang="0">
+                  <a:pos x="csX11" y="csY11"/>
+                </a:cxn>
+                <a:cxn ang="0">
+                  <a:pos x="csX12" y="csY12"/>
+                </a:cxn>
+                <a:cxn ang="0">
+                  <a:pos x="csX13" y="csY13"/>
+                </a:cxn>
+              </a:cxnLst>
+              <a:rect l="l" t="t" r="r" b="b"/>
+              <a:pathLst>
+                <a:path w="937260" h="652165">
+                  <a:moveTo>
+                    <a:pt x="0" y="0"/>
+                  </a:moveTo>
+                  <a:lnTo>
+                    <a:pt x="179" y="0"/>
+                  </a:lnTo>
+                  <a:lnTo>
+                    <a:pt x="116373" y="31552"/>
+                  </a:lnTo>
+                  <a:cubicBezTo>
+                    <a:pt x="224643" y="54462"/>
+                    <a:pt x="343679" y="67131"/>
+                    <a:pt x="468630" y="67131"/>
+                  </a:cubicBezTo>
+                  <a:cubicBezTo>
+                    <a:pt x="593581" y="67131"/>
+                    <a:pt x="712618" y="54462"/>
+                    <a:pt x="820887" y="31552"/>
+                  </a:cubicBezTo>
+                  <a:lnTo>
+                    <a:pt x="937081" y="0"/>
+                  </a:lnTo>
+                  <a:lnTo>
+                    <a:pt x="937260" y="0"/>
+                  </a:lnTo>
+                  <a:lnTo>
+                    <a:pt x="937260" y="652165"/>
+                  </a:lnTo>
+                  <a:lnTo>
+                    <a:pt x="937078" y="652165"/>
+                  </a:lnTo>
+                  <a:lnTo>
+                    <a:pt x="820887" y="620614"/>
+                  </a:lnTo>
+                  <a:cubicBezTo>
+                    <a:pt x="712618" y="597704"/>
+                    <a:pt x="593581" y="585035"/>
+                    <a:pt x="468630" y="585035"/>
+                  </a:cubicBezTo>
+                  <a:cubicBezTo>
+                    <a:pt x="343679" y="585035"/>
+                    <a:pt x="224643" y="597704"/>
+                    <a:pt x="116373" y="620614"/>
+                  </a:cubicBezTo>
+                  <a:lnTo>
+                    <a:pt x="183" y="652165"/>
+                  </a:lnTo>
+                  <a:lnTo>
+                    <a:pt x="0" y="652165"/>
+                  </a:lnTo>
+                  <a:close/>
+                </a:path>
+              </a:pathLst>
+            </a:custGeom>
+            <a:solidFill>
+              <a:srgbClr val="36E67F"/>
+            </a:solidFill>
+            <a:ln w="3175">
+              <a:solidFill>
+                <a:srgbClr val="00B050"/>
+              </a:solidFill>
+            </a:ln>
+          </p:spPr>
+          <p:style>
+            <a:lnRef idx="2">
+              <a:schemeClr val="accent1">
+                <a:shade val="15000"/>
+              </a:schemeClr>
+            </a:lnRef>
+            <a:fillRef idx="1">
+              <a:schemeClr val="accent1"/>
+            </a:fillRef>
+            <a:effectRef idx="0">
+              <a:schemeClr val="accent1"/>
+            </a:effectRef>
+            <a:fontRef idx="minor">
+              <a:schemeClr val="lt1"/>
+            </a:fontRef>
+          </p:style>
+          <p:txBody>
+            <a:bodyPr wrap="square" rtlCol="0" anchor="ctr">
+              <a:noAutofit/>
+            </a:bodyPr>
+            <a:lstStyle/>
+            <a:p>
+              <a:pPr algn="ctr"/>
+              <a:endParaRPr lang="en-US"/>
+            </a:p>
+          </p:txBody>
+        </p:sp>
+        <p:sp>
+          <p:nvSpPr>
+            <p:cNvPr id="40" name="Rectangle: Rounded Corners 39">
+              <a:extLst>
+                <a:ext uri="{FF2B5EF4-FFF2-40B4-BE49-F238E27FC236}">
+                  <a16:creationId xmlns:a16="http://schemas.microsoft.com/office/drawing/2014/main" id="{89392FCD-1BF2-D49D-59C8-CF3D31931DF8}"/>
+                </a:ext>
+              </a:extLst>
+            </p:cNvPr>
+            <p:cNvSpPr/>
+            <p:nvPr/>
+          </p:nvSpPr>
+          <p:spPr>
+            <a:xfrm>
+              <a:off x="2546329" y="4022577"/>
+              <a:ext cx="937260" cy="652166"/>
+            </a:xfrm>
+            <a:prstGeom prst="roundRect">
+              <a:avLst/>
+            </a:prstGeom>
+            <a:gradFill flip="none" rotWithShape="1">
+              <a:gsLst>
+                <a:gs pos="100000">
+                  <a:schemeClr val="bg1">
+                    <a:alpha val="46000"/>
+                  </a:schemeClr>
+                </a:gs>
+                <a:gs pos="0">
+                  <a:schemeClr val="accent1">
+                    <a:tint val="23500"/>
+                    <a:satMod val="160000"/>
+                    <a:alpha val="0"/>
+                  </a:schemeClr>
+                </a:gs>
+              </a:gsLst>
+              <a:path path="circle">
+                <a:fillToRect l="100000" t="100000"/>
+              </a:path>
+              <a:tileRect r="-100000" b="-100000"/>
+            </a:gradFill>
+            <a:ln>
+              <a:noFill/>
+            </a:ln>
+          </p:spPr>
+          <p:style>
+            <a:lnRef idx="2">
+              <a:schemeClr val="accent1">
+                <a:shade val="15000"/>
+              </a:schemeClr>
+            </a:lnRef>
+            <a:fillRef idx="1">
+              <a:schemeClr val="accent1"/>
+            </a:fillRef>
+            <a:effectRef idx="0">
+              <a:schemeClr val="accent1"/>
+            </a:effectRef>
+            <a:fontRef idx="minor">
+              <a:schemeClr val="lt1"/>
+            </a:fontRef>
+          </p:style>
+          <p:txBody>
+            <a:bodyPr rtlCol="0" anchor="ctr"/>
+            <a:lstStyle/>
+            <a:p>
+              <a:pPr algn="ctr"/>
+              <a:endParaRPr lang="en-US"/>
+            </a:p>
+          </p:txBody>
+        </p:sp>
+        <p:sp>
+          <p:nvSpPr>
+            <p:cNvPr id="41" name="Freeform: Shape 40">
+              <a:extLst>
+                <a:ext uri="{FF2B5EF4-FFF2-40B4-BE49-F238E27FC236}">
+                  <a16:creationId xmlns:a16="http://schemas.microsoft.com/office/drawing/2014/main" id="{9BCAF1F1-9E2A-5A10-5A33-DE1FCE7BF266}"/>
+                </a:ext>
+              </a:extLst>
+            </p:cNvPr>
+            <p:cNvSpPr/>
+            <p:nvPr/>
+          </p:nvSpPr>
+          <p:spPr>
+            <a:xfrm>
+              <a:off x="7698281" y="4022578"/>
+              <a:ext cx="932818" cy="652165"/>
+            </a:xfrm>
+            <a:custGeom>
+              <a:avLst/>
+              <a:gdLst>
+                <a:gd name="csX0" fmla="*/ 0 w 1761688"/>
+                <a:gd name="csY0" fmla="*/ 0 h 1291904"/>
+                <a:gd name="csX1" fmla="*/ 75501 w 1761688"/>
+                <a:gd name="csY1" fmla="*/ 0 h 1291904"/>
+                <a:gd name="csX2" fmla="*/ 1686187 w 1761688"/>
+                <a:gd name="csY2" fmla="*/ 0 h 1291904"/>
+                <a:gd name="csX3" fmla="*/ 1761688 w 1761688"/>
+                <a:gd name="csY3" fmla="*/ 0 h 1291904"/>
+                <a:gd name="csX4" fmla="*/ 1761688 w 1761688"/>
+                <a:gd name="csY4" fmla="*/ 102765 h 1291904"/>
+                <a:gd name="csX5" fmla="*/ 1686187 w 1761688"/>
+                <a:gd name="csY5" fmla="*/ 102765 h 1291904"/>
+                <a:gd name="csX6" fmla="*/ 1686187 w 1761688"/>
+                <a:gd name="csY6" fmla="*/ 1189139 h 1291904"/>
+                <a:gd name="csX7" fmla="*/ 1761688 w 1761688"/>
+                <a:gd name="csY7" fmla="*/ 1189139 h 1291904"/>
+                <a:gd name="csX8" fmla="*/ 1761688 w 1761688"/>
+                <a:gd name="csY8" fmla="*/ 1291904 h 1291904"/>
+                <a:gd name="csX9" fmla="*/ 1686187 w 1761688"/>
+                <a:gd name="csY9" fmla="*/ 1291904 h 1291904"/>
+                <a:gd name="csX10" fmla="*/ 75501 w 1761688"/>
+                <a:gd name="csY10" fmla="*/ 1291904 h 1291904"/>
+                <a:gd name="csX11" fmla="*/ 0 w 1761688"/>
+                <a:gd name="csY11" fmla="*/ 1291904 h 1291904"/>
+                <a:gd name="csX12" fmla="*/ 0 w 1761688"/>
+                <a:gd name="csY12" fmla="*/ 1189139 h 1291904"/>
+                <a:gd name="csX13" fmla="*/ 75501 w 1761688"/>
+                <a:gd name="csY13" fmla="*/ 1189139 h 1291904"/>
+                <a:gd name="csX14" fmla="*/ 75501 w 1761688"/>
+                <a:gd name="csY14" fmla="*/ 102765 h 1291904"/>
+                <a:gd name="csX15" fmla="*/ 0 w 1761688"/>
+                <a:gd name="csY15" fmla="*/ 102765 h 1291904"/>
+              </a:gdLst>
+              <a:ahLst/>
+              <a:cxnLst>
+                <a:cxn ang="0">
+                  <a:pos x="csX0" y="csY0"/>
+                </a:cxn>
+                <a:cxn ang="0">
+                  <a:pos x="csX1" y="csY1"/>
+                </a:cxn>
+                <a:cxn ang="0">
+                  <a:pos x="csX2" y="csY2"/>
+                </a:cxn>
+                <a:cxn ang="0">
+                  <a:pos x="csX3" y="csY3"/>
+                </a:cxn>
+                <a:cxn ang="0">
+                  <a:pos x="csX4" y="csY4"/>
+                </a:cxn>
+                <a:cxn ang="0">
+                  <a:pos x="csX5" y="csY5"/>
+                </a:cxn>
+                <a:cxn ang="0">
+                  <a:pos x="csX6" y="csY6"/>
+                </a:cxn>
+                <a:cxn ang="0">
+                  <a:pos x="csX7" y="csY7"/>
+                </a:cxn>
+                <a:cxn ang="0">
+                  <a:pos x="csX8" y="csY8"/>
+                </a:cxn>
+                <a:cxn ang="0">
+                  <a:pos x="csX9" y="csY9"/>
+                </a:cxn>
+                <a:cxn ang="0">
+                  <a:pos x="csX10" y="csY10"/>
+                </a:cxn>
+                <a:cxn ang="0">
+                  <a:pos x="csX11" y="csY11"/>
+                </a:cxn>
+                <a:cxn ang="0">
+                  <a:pos x="csX12" y="csY12"/>
+                </a:cxn>
+                <a:cxn ang="0">
+                  <a:pos x="csX13" y="csY13"/>
+                </a:cxn>
+                <a:cxn ang="0">
+                  <a:pos x="csX14" y="csY14"/>
+                </a:cxn>
+                <a:cxn ang="0">
+                  <a:pos x="csX15" y="csY15"/>
+                </a:cxn>
+              </a:cxnLst>
+              <a:rect l="l" t="t" r="r" b="b"/>
+              <a:pathLst>
+                <a:path w="1761688" h="1291904">
+                  <a:moveTo>
+                    <a:pt x="0" y="0"/>
+                  </a:moveTo>
+                  <a:lnTo>
+                    <a:pt x="75501" y="0"/>
+                  </a:lnTo>
+                  <a:lnTo>
+                    <a:pt x="1686187" y="0"/>
+                  </a:lnTo>
+                  <a:lnTo>
+                    <a:pt x="1761688" y="0"/>
+                  </a:lnTo>
+                  <a:lnTo>
+                    <a:pt x="1761688" y="102765"/>
+                  </a:lnTo>
+                  <a:lnTo>
+                    <a:pt x="1686187" y="102765"/>
+                  </a:lnTo>
+                  <a:lnTo>
+                    <a:pt x="1686187" y="1189139"/>
+                  </a:lnTo>
+                  <a:lnTo>
+                    <a:pt x="1761688" y="1189139"/>
+                  </a:lnTo>
+                  <a:lnTo>
+                    <a:pt x="1761688" y="1291904"/>
+                  </a:lnTo>
+                  <a:lnTo>
+                    <a:pt x="1686187" y="1291904"/>
+                  </a:lnTo>
+                  <a:lnTo>
+                    <a:pt x="75501" y="1291904"/>
+                  </a:lnTo>
+                  <a:lnTo>
+                    <a:pt x="0" y="1291904"/>
+                  </a:lnTo>
+                  <a:lnTo>
+                    <a:pt x="0" y="1189139"/>
+                  </a:lnTo>
+                  <a:lnTo>
+                    <a:pt x="75501" y="1189139"/>
+                  </a:lnTo>
+                  <a:lnTo>
+                    <a:pt x="75501" y="102765"/>
+                  </a:lnTo>
+                  <a:lnTo>
+                    <a:pt x="0" y="102765"/>
+                  </a:lnTo>
+                  <a:close/>
+                </a:path>
+              </a:pathLst>
+            </a:custGeom>
+            <a:gradFill flip="none" rotWithShape="1">
+              <a:gsLst>
+                <a:gs pos="100000">
+                  <a:schemeClr val="bg1">
+                    <a:alpha val="46000"/>
+                  </a:schemeClr>
+                </a:gs>
+                <a:gs pos="0">
+                  <a:schemeClr val="accent1">
+                    <a:tint val="23500"/>
+                    <a:satMod val="160000"/>
+                    <a:alpha val="0"/>
+                  </a:schemeClr>
+                </a:gs>
+              </a:gsLst>
+              <a:path path="circle">
+                <a:fillToRect l="100000" t="100000"/>
+              </a:path>
+              <a:tileRect r="-100000" b="-100000"/>
+            </a:gradFill>
+            <a:ln>
+              <a:noFill/>
+            </a:ln>
+          </p:spPr>
+          <p:style>
+            <a:lnRef idx="2">
+              <a:schemeClr val="accent1">
+                <a:shade val="15000"/>
+              </a:schemeClr>
+            </a:lnRef>
+            <a:fillRef idx="1">
+              <a:schemeClr val="accent1"/>
+            </a:fillRef>
+            <a:effectRef idx="0">
+              <a:schemeClr val="accent1"/>
+            </a:effectRef>
+            <a:fontRef idx="minor">
+              <a:schemeClr val="lt1"/>
+            </a:fontRef>
+          </p:style>
+          <p:txBody>
+            <a:bodyPr wrap="square" rtlCol="0" anchor="ctr">
+              <a:noAutofit/>
+            </a:bodyPr>
+            <a:lstStyle/>
+            <a:p>
+              <a:pPr algn="ctr"/>
+              <a:endParaRPr lang="en-US"/>
+            </a:p>
+          </p:txBody>
+        </p:sp>
+        <p:sp>
+          <p:nvSpPr>
+            <p:cNvPr id="42" name="Freeform: Shape 41">
+              <a:extLst>
+                <a:ext uri="{FF2B5EF4-FFF2-40B4-BE49-F238E27FC236}">
+                  <a16:creationId xmlns:a16="http://schemas.microsoft.com/office/drawing/2014/main" id="{8FE09A29-1662-8CD5-0334-02F4A401BD08}"/>
+                </a:ext>
+              </a:extLst>
+            </p:cNvPr>
+            <p:cNvSpPr/>
+            <p:nvPr/>
+          </p:nvSpPr>
+          <p:spPr>
+            <a:xfrm rot="16200000" flipH="1">
+              <a:off x="5198786" y="3880031"/>
+              <a:ext cx="652164" cy="937260"/>
+            </a:xfrm>
+            <a:custGeom>
+              <a:avLst/>
+              <a:gdLst>
+                <a:gd name="csX0" fmla="*/ 0 w 1291905"/>
+                <a:gd name="csY0" fmla="*/ 0 h 1770078"/>
+                <a:gd name="csX1" fmla="*/ 0 w 1291905"/>
+                <a:gd name="csY1" fmla="*/ 478173 h 1770078"/>
+                <a:gd name="csX2" fmla="*/ 0 w 1291905"/>
+                <a:gd name="csY2" fmla="*/ 1291905 h 1770078"/>
+                <a:gd name="csX3" fmla="*/ 0 w 1291905"/>
+                <a:gd name="csY3" fmla="*/ 1770078 h 1770078"/>
+                <a:gd name="csX4" fmla="*/ 6123 w 1291905"/>
+                <a:gd name="csY4" fmla="*/ 1770078 h 1770078"/>
+                <a:gd name="csX5" fmla="*/ 109381 w 1291905"/>
+                <a:gd name="csY5" fmla="*/ 1658008 h 1770078"/>
+                <a:gd name="csX6" fmla="*/ 212639 w 1291905"/>
+                <a:gd name="csY6" fmla="*/ 1770078 h 1770078"/>
+                <a:gd name="csX7" fmla="*/ 221976 w 1291905"/>
+                <a:gd name="csY7" fmla="*/ 1770078 h 1770078"/>
+                <a:gd name="csX8" fmla="*/ 325234 w 1291905"/>
+                <a:gd name="csY8" fmla="*/ 1658008 h 1770078"/>
+                <a:gd name="csX9" fmla="*/ 428492 w 1291905"/>
+                <a:gd name="csY9" fmla="*/ 1770078 h 1770078"/>
+                <a:gd name="csX10" fmla="*/ 437829 w 1291905"/>
+                <a:gd name="csY10" fmla="*/ 1770078 h 1770078"/>
+                <a:gd name="csX11" fmla="*/ 541087 w 1291905"/>
+                <a:gd name="csY11" fmla="*/ 1658008 h 1770078"/>
+                <a:gd name="csX12" fmla="*/ 644346 w 1291905"/>
+                <a:gd name="csY12" fmla="*/ 1770078 h 1770078"/>
+                <a:gd name="csX13" fmla="*/ 653683 w 1291905"/>
+                <a:gd name="csY13" fmla="*/ 1770078 h 1770078"/>
+                <a:gd name="csX14" fmla="*/ 756941 w 1291905"/>
+                <a:gd name="csY14" fmla="*/ 1658008 h 1770078"/>
+                <a:gd name="csX15" fmla="*/ 860199 w 1291905"/>
+                <a:gd name="csY15" fmla="*/ 1770078 h 1770078"/>
+                <a:gd name="csX16" fmla="*/ 869536 w 1291905"/>
+                <a:gd name="csY16" fmla="*/ 1770078 h 1770078"/>
+                <a:gd name="csX17" fmla="*/ 972794 w 1291905"/>
+                <a:gd name="csY17" fmla="*/ 1658008 h 1770078"/>
+                <a:gd name="csX18" fmla="*/ 1076052 w 1291905"/>
+                <a:gd name="csY18" fmla="*/ 1770078 h 1770078"/>
+                <a:gd name="csX19" fmla="*/ 1085389 w 1291905"/>
+                <a:gd name="csY19" fmla="*/ 1770078 h 1770078"/>
+                <a:gd name="csX20" fmla="*/ 1188647 w 1291905"/>
+                <a:gd name="csY20" fmla="*/ 1658008 h 1770078"/>
+                <a:gd name="csX21" fmla="*/ 1291905 w 1291905"/>
+                <a:gd name="csY21" fmla="*/ 1770078 h 1770078"/>
+                <a:gd name="csX22" fmla="*/ 1291905 w 1291905"/>
+                <a:gd name="csY22" fmla="*/ 1291905 h 1770078"/>
+                <a:gd name="csX23" fmla="*/ 1291905 w 1291905"/>
+                <a:gd name="csY23" fmla="*/ 478173 h 1770078"/>
+                <a:gd name="csX24" fmla="*/ 1291905 w 1291905"/>
+                <a:gd name="csY24" fmla="*/ 0 h 1770078"/>
+                <a:gd name="csX25" fmla="*/ 1188647 w 1291905"/>
+                <a:gd name="csY25" fmla="*/ 112070 h 1770078"/>
+                <a:gd name="csX26" fmla="*/ 1085389 w 1291905"/>
+                <a:gd name="csY26" fmla="*/ 0 h 1770078"/>
+                <a:gd name="csX27" fmla="*/ 1076052 w 1291905"/>
+                <a:gd name="csY27" fmla="*/ 0 h 1770078"/>
+                <a:gd name="csX28" fmla="*/ 972794 w 1291905"/>
+                <a:gd name="csY28" fmla="*/ 112070 h 1770078"/>
+                <a:gd name="csX29" fmla="*/ 869536 w 1291905"/>
+                <a:gd name="csY29" fmla="*/ 0 h 1770078"/>
+                <a:gd name="csX30" fmla="*/ 860199 w 1291905"/>
+                <a:gd name="csY30" fmla="*/ 0 h 1770078"/>
+                <a:gd name="csX31" fmla="*/ 756941 w 1291905"/>
+                <a:gd name="csY31" fmla="*/ 112070 h 1770078"/>
+                <a:gd name="csX32" fmla="*/ 653683 w 1291905"/>
+                <a:gd name="csY32" fmla="*/ 0 h 1770078"/>
+                <a:gd name="csX33" fmla="*/ 644346 w 1291905"/>
+                <a:gd name="csY33" fmla="*/ 0 h 1770078"/>
+                <a:gd name="csX34" fmla="*/ 541087 w 1291905"/>
+                <a:gd name="csY34" fmla="*/ 112070 h 1770078"/>
+                <a:gd name="csX35" fmla="*/ 437829 w 1291905"/>
+                <a:gd name="csY35" fmla="*/ 0 h 1770078"/>
+                <a:gd name="csX36" fmla="*/ 428492 w 1291905"/>
+                <a:gd name="csY36" fmla="*/ 0 h 1770078"/>
+                <a:gd name="csX37" fmla="*/ 325234 w 1291905"/>
+                <a:gd name="csY37" fmla="*/ 112070 h 1770078"/>
+                <a:gd name="csX38" fmla="*/ 221976 w 1291905"/>
+                <a:gd name="csY38" fmla="*/ 0 h 1770078"/>
+                <a:gd name="csX39" fmla="*/ 212639 w 1291905"/>
+                <a:gd name="csY39" fmla="*/ 0 h 1770078"/>
+                <a:gd name="csX40" fmla="*/ 109381 w 1291905"/>
+                <a:gd name="csY40" fmla="*/ 112070 h 1770078"/>
+                <a:gd name="csX41" fmla="*/ 6123 w 1291905"/>
+                <a:gd name="csY41" fmla="*/ 0 h 1770078"/>
+              </a:gdLst>
+              <a:ahLst/>
+              <a:cxnLst>
+                <a:cxn ang="0">
+                  <a:pos x="csX0" y="csY0"/>
+                </a:cxn>
+                <a:cxn ang="0">
+                  <a:pos x="csX1" y="csY1"/>
+                </a:cxn>
+                <a:cxn ang="0">
+                  <a:pos x="csX2" y="csY2"/>
+                </a:cxn>
+                <a:cxn ang="0">
+                  <a:pos x="csX3" y="csY3"/>
+                </a:cxn>
+                <a:cxn ang="0">
+                  <a:pos x="csX4" y="csY4"/>
+                </a:cxn>
+                <a:cxn ang="0">
+                  <a:pos x="csX5" y="csY5"/>
+                </a:cxn>
+                <a:cxn ang="0">
+                  <a:pos x="csX6" y="csY6"/>
+                </a:cxn>
+                <a:cxn ang="0">
+                  <a:pos x="csX7" y="csY7"/>
+                </a:cxn>
+                <a:cxn ang="0">
+                  <a:pos x="csX8" y="csY8"/>
+                </a:cxn>
+                <a:cxn ang="0">
+                  <a:pos x="csX9" y="csY9"/>
+                </a:cxn>
+                <a:cxn ang="0">
+                  <a:pos x="csX10" y="csY10"/>
+                </a:cxn>
+                <a:cxn ang="0">
+                  <a:pos x="csX11" y="csY11"/>
+                </a:cxn>
+                <a:cxn ang="0">
+                  <a:pos x="csX12" y="csY12"/>
+                </a:cxn>
+                <a:cxn ang="0">
+                  <a:pos x="csX13" y="csY13"/>
+                </a:cxn>
+                <a:cxn ang="0">
+                  <a:pos x="csX14" y="csY14"/>
+                </a:cxn>
+                <a:cxn ang="0">
+                  <a:pos x="csX15" y="csY15"/>
+                </a:cxn>
+                <a:cxn ang="0">
+                  <a:pos x="csX16" y="csY16"/>
+                </a:cxn>
+                <a:cxn ang="0">
+                  <a:pos x="csX17" y="csY17"/>
+                </a:cxn>
+                <a:cxn ang="0">
+                  <a:pos x="csX18" y="csY18"/>
+                </a:cxn>
+                <a:cxn ang="0">
+                  <a:pos x="csX19" y="csY19"/>
+                </a:cxn>
+                <a:cxn ang="0">
+                  <a:pos x="csX20" y="csY20"/>
+                </a:cxn>
+                <a:cxn ang="0">
+                  <a:pos x="csX21" y="csY21"/>
+                </a:cxn>
+                <a:cxn ang="0">
+                  <a:pos x="csX22" y="csY22"/>
+                </a:cxn>
+                <a:cxn ang="0">
+                  <a:pos x="csX23" y="csY23"/>
+                </a:cxn>
+                <a:cxn ang="0">
+                  <a:pos x="csX24" y="csY24"/>
+                </a:cxn>
+                <a:cxn ang="0">
+                  <a:pos x="csX25" y="csY25"/>
+                </a:cxn>
+                <a:cxn ang="0">
+                  <a:pos x="csX26" y="csY26"/>
+                </a:cxn>
+                <a:cxn ang="0">
+                  <a:pos x="csX27" y="csY27"/>
+                </a:cxn>
+                <a:cxn ang="0">
+                  <a:pos x="csX28" y="csY28"/>
+                </a:cxn>
+                <a:cxn ang="0">
+                  <a:pos x="csX29" y="csY29"/>
+                </a:cxn>
+                <a:cxn ang="0">
+                  <a:pos x="csX30" y="csY30"/>
+                </a:cxn>
+                <a:cxn ang="0">
+                  <a:pos x="csX31" y="csY31"/>
+                </a:cxn>
+                <a:cxn ang="0">
+                  <a:pos x="csX32" y="csY32"/>
+                </a:cxn>
+                <a:cxn ang="0">
+                  <a:pos x="csX33" y="csY33"/>
+                </a:cxn>
+                <a:cxn ang="0">
+                  <a:pos x="csX34" y="csY34"/>
+                </a:cxn>
+                <a:cxn ang="0">
+                  <a:pos x="csX35" y="csY35"/>
+                </a:cxn>
+                <a:cxn ang="0">
+                  <a:pos x="csX36" y="csY36"/>
+                </a:cxn>
+                <a:cxn ang="0">
+                  <a:pos x="csX37" y="csY37"/>
+                </a:cxn>
+                <a:cxn ang="0">
+                  <a:pos x="csX38" y="csY38"/>
+                </a:cxn>
+                <a:cxn ang="0">
+                  <a:pos x="csX39" y="csY39"/>
+                </a:cxn>
+                <a:cxn ang="0">
+                  <a:pos x="csX40" y="csY40"/>
+                </a:cxn>
+                <a:cxn ang="0">
+                  <a:pos x="csX41" y="csY41"/>
+                </a:cxn>
+              </a:cxnLst>
+              <a:rect l="l" t="t" r="r" b="b"/>
+              <a:pathLst>
+                <a:path w="1291905" h="1770078">
+                  <a:moveTo>
+                    <a:pt x="0" y="0"/>
+                  </a:moveTo>
+                  <a:lnTo>
+                    <a:pt x="0" y="478173"/>
+                  </a:lnTo>
+                  <a:lnTo>
+                    <a:pt x="0" y="1291905"/>
+                  </a:lnTo>
+                  <a:lnTo>
+                    <a:pt x="0" y="1770078"/>
+                  </a:lnTo>
+                  <a:lnTo>
+                    <a:pt x="6123" y="1770078"/>
+                  </a:lnTo>
+                  <a:lnTo>
+                    <a:pt x="109381" y="1658008"/>
+                  </a:lnTo>
+                  <a:lnTo>
+                    <a:pt x="212639" y="1770078"/>
+                  </a:lnTo>
+                  <a:lnTo>
+                    <a:pt x="221976" y="1770078"/>
+                  </a:lnTo>
+                  <a:lnTo>
+                    <a:pt x="325234" y="1658008"/>
+                  </a:lnTo>
+                  <a:lnTo>
+                    <a:pt x="428492" y="1770078"/>
+                  </a:lnTo>
+                  <a:lnTo>
+                    <a:pt x="437829" y="1770078"/>
+                  </a:lnTo>
+                  <a:lnTo>
+                    <a:pt x="541087" y="1658008"/>
+                  </a:lnTo>
+                  <a:lnTo>
+                    <a:pt x="644346" y="1770078"/>
+                  </a:lnTo>
+                  <a:lnTo>
+                    <a:pt x="653683" y="1770078"/>
+                  </a:lnTo>
+                  <a:lnTo>
+                    <a:pt x="756941" y="1658008"/>
+                  </a:lnTo>
+                  <a:lnTo>
+                    <a:pt x="860199" y="1770078"/>
+                  </a:lnTo>
+                  <a:lnTo>
+                    <a:pt x="869536" y="1770078"/>
+                  </a:lnTo>
+                  <a:lnTo>
+                    <a:pt x="972794" y="1658008"/>
+                  </a:lnTo>
+                  <a:lnTo>
+                    <a:pt x="1076052" y="1770078"/>
+                  </a:lnTo>
+                  <a:lnTo>
+                    <a:pt x="1085389" y="1770078"/>
+                  </a:lnTo>
+                  <a:lnTo>
+                    <a:pt x="1188647" y="1658008"/>
+                  </a:lnTo>
+                  <a:lnTo>
+                    <a:pt x="1291905" y="1770078"/>
+                  </a:lnTo>
+                  <a:lnTo>
+                    <a:pt x="1291905" y="1291905"/>
+                  </a:lnTo>
+                  <a:lnTo>
+                    <a:pt x="1291905" y="478173"/>
+                  </a:lnTo>
+                  <a:lnTo>
+                    <a:pt x="1291905" y="0"/>
+                  </a:lnTo>
+                  <a:lnTo>
+                    <a:pt x="1188647" y="112070"/>
+                  </a:lnTo>
+                  <a:lnTo>
+                    <a:pt x="1085389" y="0"/>
+                  </a:lnTo>
+                  <a:lnTo>
+                    <a:pt x="1076052" y="0"/>
+                  </a:lnTo>
+                  <a:lnTo>
+                    <a:pt x="972794" y="112070"/>
+                  </a:lnTo>
+                  <a:lnTo>
+                    <a:pt x="869536" y="0"/>
+                  </a:lnTo>
+                  <a:lnTo>
+                    <a:pt x="860199" y="0"/>
+                  </a:lnTo>
+                  <a:lnTo>
+                    <a:pt x="756941" y="112070"/>
+                  </a:lnTo>
+                  <a:lnTo>
+                    <a:pt x="653683" y="0"/>
+                  </a:lnTo>
+                  <a:lnTo>
+                    <a:pt x="644346" y="0"/>
+                  </a:lnTo>
+                  <a:lnTo>
+                    <a:pt x="541087" y="112070"/>
+                  </a:lnTo>
+                  <a:lnTo>
+                    <a:pt x="437829" y="0"/>
+                  </a:lnTo>
+                  <a:lnTo>
+                    <a:pt x="428492" y="0"/>
+                  </a:lnTo>
+                  <a:lnTo>
+                    <a:pt x="325234" y="112070"/>
+                  </a:lnTo>
+                  <a:lnTo>
+                    <a:pt x="221976" y="0"/>
+                  </a:lnTo>
+                  <a:lnTo>
+                    <a:pt x="212639" y="0"/>
+                  </a:lnTo>
+                  <a:lnTo>
+                    <a:pt x="109381" y="112070"/>
+                  </a:lnTo>
+                  <a:lnTo>
+                    <a:pt x="6123" y="0"/>
+                  </a:lnTo>
+                  <a:close/>
+                </a:path>
+              </a:pathLst>
+            </a:custGeom>
+            <a:gradFill flip="none" rotWithShape="1">
+              <a:gsLst>
+                <a:gs pos="100000">
+                  <a:schemeClr val="bg1">
+                    <a:alpha val="46000"/>
+                  </a:schemeClr>
+                </a:gs>
+                <a:gs pos="0">
+                  <a:schemeClr val="accent1">
+                    <a:tint val="23500"/>
+                    <a:satMod val="160000"/>
+                    <a:alpha val="0"/>
+                  </a:schemeClr>
+                </a:gs>
+              </a:gsLst>
+              <a:path path="circle">
+                <a:fillToRect l="100000" t="100000"/>
+              </a:path>
+              <a:tileRect r="-100000" b="-100000"/>
+            </a:gradFill>
+            <a:ln>
+              <a:noFill/>
+            </a:ln>
+          </p:spPr>
+          <p:style>
+            <a:lnRef idx="2">
+              <a:schemeClr val="accent1">
+                <a:shade val="15000"/>
+              </a:schemeClr>
+            </a:lnRef>
+            <a:fillRef idx="1">
+              <a:schemeClr val="accent1"/>
+            </a:fillRef>
+            <a:effectRef idx="0">
+              <a:schemeClr val="accent1"/>
+            </a:effectRef>
+            <a:fontRef idx="minor">
+              <a:schemeClr val="lt1"/>
+            </a:fontRef>
+          </p:style>
+          <p:txBody>
+            <a:bodyPr wrap="square" rtlCol="0" anchor="ctr">
+              <a:noAutofit/>
+            </a:bodyPr>
+            <a:lstStyle/>
+            <a:p>
+              <a:pPr algn="ctr"/>
+              <a:endParaRPr lang="en-US"/>
+            </a:p>
+          </p:txBody>
+        </p:sp>
+        <p:sp>
+          <p:nvSpPr>
+            <p:cNvPr id="43" name="Freeform: Shape 42">
+              <a:extLst>
+                <a:ext uri="{FF2B5EF4-FFF2-40B4-BE49-F238E27FC236}">
+                  <a16:creationId xmlns:a16="http://schemas.microsoft.com/office/drawing/2014/main" id="{C9ABB434-3C06-ED09-B083-3E5B8DA11418}"/>
+                </a:ext>
+              </a:extLst>
+            </p:cNvPr>
+            <p:cNvSpPr/>
+            <p:nvPr/>
+          </p:nvSpPr>
+          <p:spPr>
+            <a:xfrm>
+              <a:off x="3879920" y="4022578"/>
+              <a:ext cx="937260" cy="652164"/>
+            </a:xfrm>
+            <a:custGeom>
+              <a:avLst/>
+              <a:gdLst>
+                <a:gd name="csX0" fmla="*/ 885039 w 1770078"/>
+                <a:gd name="csY0" fmla="*/ 0 h 1291903"/>
+                <a:gd name="csX1" fmla="*/ 1752097 w 1770078"/>
+                <a:gd name="csY1" fmla="*/ 364364 h 1291903"/>
+                <a:gd name="csX2" fmla="*/ 1756386 w 1770078"/>
+                <a:gd name="csY2" fmla="*/ 378854 h 1291903"/>
+                <a:gd name="csX3" fmla="*/ 1770078 w 1770078"/>
+                <a:gd name="csY3" fmla="*/ 378854 h 1291903"/>
+                <a:gd name="csX4" fmla="*/ 1770078 w 1770078"/>
+                <a:gd name="csY4" fmla="*/ 456330 h 1291903"/>
+                <a:gd name="csX5" fmla="*/ 1770078 w 1770078"/>
+                <a:gd name="csY5" fmla="*/ 1291903 h 1291903"/>
+                <a:gd name="csX6" fmla="*/ 0 w 1770078"/>
+                <a:gd name="csY6" fmla="*/ 1291903 h 1291903"/>
+                <a:gd name="csX7" fmla="*/ 0 w 1770078"/>
+                <a:gd name="csY7" fmla="*/ 456330 h 1291903"/>
+                <a:gd name="csX8" fmla="*/ 0 w 1770078"/>
+                <a:gd name="csY8" fmla="*/ 378854 h 1291903"/>
+                <a:gd name="csX9" fmla="*/ 13692 w 1770078"/>
+                <a:gd name="csY9" fmla="*/ 378854 h 1291903"/>
+                <a:gd name="csX10" fmla="*/ 17981 w 1770078"/>
+                <a:gd name="csY10" fmla="*/ 364364 h 1291903"/>
+                <a:gd name="csX11" fmla="*/ 885039 w 1770078"/>
+                <a:gd name="csY11" fmla="*/ 0 h 1291903"/>
+                <a:gd name="csX0" fmla="*/ 885039 w 1770078"/>
+                <a:gd name="csY0" fmla="*/ 0 h 1291903"/>
+                <a:gd name="csX1" fmla="*/ 1752097 w 1770078"/>
+                <a:gd name="csY1" fmla="*/ 364364 h 1291903"/>
+                <a:gd name="csX2" fmla="*/ 1756386 w 1770078"/>
+                <a:gd name="csY2" fmla="*/ 378854 h 1291903"/>
+                <a:gd name="csX3" fmla="*/ 1770078 w 1770078"/>
+                <a:gd name="csY3" fmla="*/ 378854 h 1291903"/>
+                <a:gd name="csX4" fmla="*/ 1770078 w 1770078"/>
+                <a:gd name="csY4" fmla="*/ 456330 h 1291903"/>
+                <a:gd name="csX5" fmla="*/ 1770078 w 1770078"/>
+                <a:gd name="csY5" fmla="*/ 1291903 h 1291903"/>
+                <a:gd name="csX6" fmla="*/ 0 w 1770078"/>
+                <a:gd name="csY6" fmla="*/ 1291903 h 1291903"/>
+                <a:gd name="csX7" fmla="*/ 0 w 1770078"/>
+                <a:gd name="csY7" fmla="*/ 456330 h 1291903"/>
+                <a:gd name="csX8" fmla="*/ 13692 w 1770078"/>
+                <a:gd name="csY8" fmla="*/ 378854 h 1291903"/>
+                <a:gd name="csX9" fmla="*/ 17981 w 1770078"/>
+                <a:gd name="csY9" fmla="*/ 364364 h 1291903"/>
+                <a:gd name="csX10" fmla="*/ 885039 w 1770078"/>
+                <a:gd name="csY10" fmla="*/ 0 h 1291903"/>
+                <a:gd name="csX0" fmla="*/ 885039 w 1770078"/>
+                <a:gd name="csY0" fmla="*/ 0 h 1291903"/>
+                <a:gd name="csX1" fmla="*/ 1752097 w 1770078"/>
+                <a:gd name="csY1" fmla="*/ 364364 h 1291903"/>
+                <a:gd name="csX2" fmla="*/ 1756386 w 1770078"/>
+                <a:gd name="csY2" fmla="*/ 378854 h 1291903"/>
+                <a:gd name="csX3" fmla="*/ 1770078 w 1770078"/>
+                <a:gd name="csY3" fmla="*/ 378854 h 1291903"/>
+                <a:gd name="csX4" fmla="*/ 1770078 w 1770078"/>
+                <a:gd name="csY4" fmla="*/ 456330 h 1291903"/>
+                <a:gd name="csX5" fmla="*/ 1770078 w 1770078"/>
+                <a:gd name="csY5" fmla="*/ 1291903 h 1291903"/>
+                <a:gd name="csX6" fmla="*/ 0 w 1770078"/>
+                <a:gd name="csY6" fmla="*/ 1291903 h 1291903"/>
+                <a:gd name="csX7" fmla="*/ 0 w 1770078"/>
+                <a:gd name="csY7" fmla="*/ 456330 h 1291903"/>
+                <a:gd name="csX8" fmla="*/ 17981 w 1770078"/>
+                <a:gd name="csY8" fmla="*/ 364364 h 1291903"/>
+                <a:gd name="csX9" fmla="*/ 885039 w 1770078"/>
+                <a:gd name="csY9" fmla="*/ 0 h 1291903"/>
+                <a:gd name="csX0" fmla="*/ 885039 w 1770078"/>
+                <a:gd name="csY0" fmla="*/ 0 h 1291903"/>
+                <a:gd name="csX1" fmla="*/ 1752097 w 1770078"/>
+                <a:gd name="csY1" fmla="*/ 364364 h 1291903"/>
+                <a:gd name="csX2" fmla="*/ 1756386 w 1770078"/>
+                <a:gd name="csY2" fmla="*/ 378854 h 1291903"/>
+                <a:gd name="csX3" fmla="*/ 1770078 w 1770078"/>
+                <a:gd name="csY3" fmla="*/ 456330 h 1291903"/>
+                <a:gd name="csX4" fmla="*/ 1770078 w 1770078"/>
+                <a:gd name="csY4" fmla="*/ 1291903 h 1291903"/>
+                <a:gd name="csX5" fmla="*/ 0 w 1770078"/>
+                <a:gd name="csY5" fmla="*/ 1291903 h 1291903"/>
+                <a:gd name="csX6" fmla="*/ 0 w 1770078"/>
+                <a:gd name="csY6" fmla="*/ 456330 h 1291903"/>
+                <a:gd name="csX7" fmla="*/ 17981 w 1770078"/>
+                <a:gd name="csY7" fmla="*/ 364364 h 1291903"/>
+                <a:gd name="csX8" fmla="*/ 885039 w 1770078"/>
+                <a:gd name="csY8" fmla="*/ 0 h 1291903"/>
+                <a:gd name="csX0" fmla="*/ 885039 w 1770078"/>
+                <a:gd name="csY0" fmla="*/ 0 h 1291903"/>
+                <a:gd name="csX1" fmla="*/ 1752097 w 1770078"/>
+                <a:gd name="csY1" fmla="*/ 364364 h 1291903"/>
+                <a:gd name="csX2" fmla="*/ 1770078 w 1770078"/>
+                <a:gd name="csY2" fmla="*/ 456330 h 1291903"/>
+                <a:gd name="csX3" fmla="*/ 1770078 w 1770078"/>
+                <a:gd name="csY3" fmla="*/ 1291903 h 1291903"/>
+                <a:gd name="csX4" fmla="*/ 0 w 1770078"/>
+                <a:gd name="csY4" fmla="*/ 1291903 h 1291903"/>
+                <a:gd name="csX5" fmla="*/ 0 w 1770078"/>
+                <a:gd name="csY5" fmla="*/ 456330 h 1291903"/>
+                <a:gd name="csX6" fmla="*/ 17981 w 1770078"/>
+                <a:gd name="csY6" fmla="*/ 364364 h 1291903"/>
+                <a:gd name="csX7" fmla="*/ 885039 w 1770078"/>
+                <a:gd name="csY7" fmla="*/ 0 h 1291903"/>
+              </a:gdLst>
+              <a:ahLst/>
+              <a:cxnLst>
+                <a:cxn ang="0">
+                  <a:pos x="csX0" y="csY0"/>
+                </a:cxn>
+                <a:cxn ang="0">
+                  <a:pos x="csX1" y="csY1"/>
+                </a:cxn>
+                <a:cxn ang="0">
+                  <a:pos x="csX2" y="csY2"/>
+                </a:cxn>
+                <a:cxn ang="0">
+                  <a:pos x="csX3" y="csY3"/>
+                </a:cxn>
+                <a:cxn ang="0">
+                  <a:pos x="csX4" y="csY4"/>
+                </a:cxn>
+                <a:cxn ang="0">
+                  <a:pos x="csX5" y="csY5"/>
+                </a:cxn>
+                <a:cxn ang="0">
+                  <a:pos x="csX6" y="csY6"/>
+                </a:cxn>
+                <a:cxn ang="0">
+                  <a:pos x="csX7" y="csY7"/>
+                </a:cxn>
+              </a:cxnLst>
+              <a:rect l="l" t="t" r="r" b="b"/>
+              <a:pathLst>
+                <a:path w="1770078" h="1291903">
+                  <a:moveTo>
+                    <a:pt x="885039" y="0"/>
+                  </a:moveTo>
+                  <a:cubicBezTo>
+                    <a:pt x="1312734" y="0"/>
+                    <a:pt x="1669571" y="156422"/>
+                    <a:pt x="1752097" y="364364"/>
+                  </a:cubicBezTo>
+                  <a:lnTo>
+                    <a:pt x="1770078" y="456330"/>
+                  </a:lnTo>
+                  <a:lnTo>
+                    <a:pt x="1770078" y="1291903"/>
+                  </a:lnTo>
+                  <a:lnTo>
+                    <a:pt x="0" y="1291903"/>
+                  </a:lnTo>
+                  <a:lnTo>
+                    <a:pt x="0" y="456330"/>
+                  </a:lnTo>
+                  <a:lnTo>
+                    <a:pt x="17981" y="364364"/>
+                  </a:lnTo>
+                  <a:cubicBezTo>
+                    <a:pt x="100507" y="156422"/>
+                    <a:pt x="457344" y="0"/>
+                    <a:pt x="885039" y="0"/>
+                  </a:cubicBezTo>
+                  <a:close/>
+                </a:path>
+              </a:pathLst>
+            </a:custGeom>
+            <a:gradFill flip="none" rotWithShape="1">
+              <a:gsLst>
+                <a:gs pos="100000">
+                  <a:schemeClr val="bg1">
+                    <a:alpha val="46000"/>
+                  </a:schemeClr>
+                </a:gs>
+                <a:gs pos="0">
+                  <a:schemeClr val="accent1">
+                    <a:tint val="23500"/>
+                    <a:satMod val="160000"/>
+                    <a:alpha val="0"/>
+                  </a:schemeClr>
+                </a:gs>
+              </a:gsLst>
+              <a:path path="circle">
+                <a:fillToRect l="100000" t="100000"/>
+              </a:path>
+              <a:tileRect r="-100000" b="-100000"/>
+            </a:gradFill>
+            <a:ln>
+              <a:noFill/>
+            </a:ln>
+          </p:spPr>
+          <p:style>
+            <a:lnRef idx="2">
+              <a:schemeClr val="accent1">
+                <a:shade val="15000"/>
+              </a:schemeClr>
+            </a:lnRef>
+            <a:fillRef idx="1">
+              <a:schemeClr val="accent1"/>
+            </a:fillRef>
+            <a:effectRef idx="0">
+              <a:schemeClr val="accent1"/>
+            </a:effectRef>
+            <a:fontRef idx="minor">
+              <a:schemeClr val="lt1"/>
+            </a:fontRef>
+          </p:style>
+          <p:txBody>
+            <a:bodyPr wrap="square" rtlCol="0" anchor="ctr">
+              <a:noAutofit/>
+            </a:bodyPr>
+            <a:lstStyle/>
+            <a:p>
+              <a:pPr algn="ctr"/>
+              <a:endParaRPr lang="en-US"/>
+            </a:p>
+          </p:txBody>
+        </p:sp>
+        <p:sp>
+          <p:nvSpPr>
+            <p:cNvPr id="44" name="Freeform: Shape 43">
+              <a:extLst>
+                <a:ext uri="{FF2B5EF4-FFF2-40B4-BE49-F238E27FC236}">
+                  <a16:creationId xmlns:a16="http://schemas.microsoft.com/office/drawing/2014/main" id="{9F143377-1F13-7440-784E-D6B996921272}"/>
+                </a:ext>
+              </a:extLst>
+            </p:cNvPr>
+            <p:cNvSpPr/>
+            <p:nvPr/>
+          </p:nvSpPr>
+          <p:spPr>
+            <a:xfrm>
+              <a:off x="6235672" y="4022578"/>
+              <a:ext cx="937260" cy="652165"/>
+            </a:xfrm>
+            <a:custGeom>
+              <a:avLst/>
+              <a:gdLst>
+                <a:gd name="csX0" fmla="*/ 0 w 937260"/>
+                <a:gd name="csY0" fmla="*/ 0 h 652165"/>
+                <a:gd name="csX1" fmla="*/ 179 w 937260"/>
+                <a:gd name="csY1" fmla="*/ 0 h 652165"/>
+                <a:gd name="csX2" fmla="*/ 116373 w 937260"/>
+                <a:gd name="csY2" fmla="*/ 31552 h 652165"/>
+                <a:gd name="csX3" fmla="*/ 468630 w 937260"/>
+                <a:gd name="csY3" fmla="*/ 67131 h 652165"/>
+                <a:gd name="csX4" fmla="*/ 820887 w 937260"/>
+                <a:gd name="csY4" fmla="*/ 31552 h 652165"/>
+                <a:gd name="csX5" fmla="*/ 937081 w 937260"/>
+                <a:gd name="csY5" fmla="*/ 0 h 652165"/>
+                <a:gd name="csX6" fmla="*/ 937260 w 937260"/>
+                <a:gd name="csY6" fmla="*/ 0 h 652165"/>
+                <a:gd name="csX7" fmla="*/ 937260 w 937260"/>
+                <a:gd name="csY7" fmla="*/ 652165 h 652165"/>
+                <a:gd name="csX8" fmla="*/ 937078 w 937260"/>
+                <a:gd name="csY8" fmla="*/ 652165 h 652165"/>
+                <a:gd name="csX9" fmla="*/ 820887 w 937260"/>
+                <a:gd name="csY9" fmla="*/ 620614 h 652165"/>
+                <a:gd name="csX10" fmla="*/ 468630 w 937260"/>
+                <a:gd name="csY10" fmla="*/ 585035 h 652165"/>
+                <a:gd name="csX11" fmla="*/ 116373 w 937260"/>
+                <a:gd name="csY11" fmla="*/ 620614 h 652165"/>
+                <a:gd name="csX12" fmla="*/ 183 w 937260"/>
+                <a:gd name="csY12" fmla="*/ 652165 h 652165"/>
+                <a:gd name="csX13" fmla="*/ 0 w 937260"/>
+                <a:gd name="csY13" fmla="*/ 652165 h 652165"/>
+              </a:gdLst>
+              <a:ahLst/>
+              <a:cxnLst>
+                <a:cxn ang="0">
+                  <a:pos x="csX0" y="csY0"/>
+                </a:cxn>
+                <a:cxn ang="0">
+                  <a:pos x="csX1" y="csY1"/>
+                </a:cxn>
+                <a:cxn ang="0">
+                  <a:pos x="csX2" y="csY2"/>
+                </a:cxn>
+                <a:cxn ang="0">
+                  <a:pos x="csX3" y="csY3"/>
+                </a:cxn>
+                <a:cxn ang="0">
+                  <a:pos x="csX4" y="csY4"/>
+                </a:cxn>
+                <a:cxn ang="0">
+                  <a:pos x="csX5" y="csY5"/>
+                </a:cxn>
+                <a:cxn ang="0">
+                  <a:pos x="csX6" y="csY6"/>
+                </a:cxn>
+                <a:cxn ang="0">
+                  <a:pos x="csX7" y="csY7"/>
+                </a:cxn>
+                <a:cxn ang="0">
+                  <a:pos x="csX8" y="csY8"/>
+                </a:cxn>
+                <a:cxn ang="0">
+                  <a:pos x="csX9" y="csY9"/>
+                </a:cxn>
+                <a:cxn ang="0">
+                  <a:pos x="csX10" y="csY10"/>
+                </a:cxn>
+                <a:cxn ang="0">
+                  <a:pos x="csX11" y="csY11"/>
+                </a:cxn>
+                <a:cxn ang="0">
+                  <a:pos x="csX12" y="csY12"/>
+                </a:cxn>
+                <a:cxn ang="0">
+                  <a:pos x="csX13" y="csY13"/>
+                </a:cxn>
+              </a:cxnLst>
+              <a:rect l="l" t="t" r="r" b="b"/>
+              <a:pathLst>
+                <a:path w="937260" h="652165">
+                  <a:moveTo>
+                    <a:pt x="0" y="0"/>
+                  </a:moveTo>
+                  <a:lnTo>
+                    <a:pt x="179" y="0"/>
+                  </a:lnTo>
+                  <a:lnTo>
+                    <a:pt x="116373" y="31552"/>
+                  </a:lnTo>
+                  <a:cubicBezTo>
+                    <a:pt x="224643" y="54462"/>
+                    <a:pt x="343679" y="67131"/>
+                    <a:pt x="468630" y="67131"/>
+                  </a:cubicBezTo>
+                  <a:cubicBezTo>
+                    <a:pt x="593581" y="67131"/>
+                    <a:pt x="712618" y="54462"/>
+                    <a:pt x="820887" y="31552"/>
+                  </a:cubicBezTo>
+                  <a:lnTo>
+                    <a:pt x="937081" y="0"/>
+                  </a:lnTo>
+                  <a:lnTo>
+                    <a:pt x="937260" y="0"/>
+                  </a:lnTo>
+                  <a:lnTo>
+                    <a:pt x="937260" y="652165"/>
+                  </a:lnTo>
+                  <a:lnTo>
+                    <a:pt x="937078" y="652165"/>
+                  </a:lnTo>
+                  <a:lnTo>
+                    <a:pt x="820887" y="620614"/>
+                  </a:lnTo>
+                  <a:cubicBezTo>
+                    <a:pt x="712618" y="597704"/>
+                    <a:pt x="593581" y="585035"/>
+                    <a:pt x="468630" y="585035"/>
+                  </a:cubicBezTo>
+                  <a:cubicBezTo>
+                    <a:pt x="343679" y="585035"/>
+                    <a:pt x="224643" y="597704"/>
+                    <a:pt x="116373" y="620614"/>
+                  </a:cubicBezTo>
+                  <a:lnTo>
+                    <a:pt x="183" y="652165"/>
+                  </a:lnTo>
+                  <a:lnTo>
+                    <a:pt x="0" y="652165"/>
+                  </a:lnTo>
+                  <a:close/>
+                </a:path>
+              </a:pathLst>
+            </a:custGeom>
+            <a:gradFill flip="none" rotWithShape="1">
+              <a:gsLst>
+                <a:gs pos="100000">
+                  <a:schemeClr val="bg1">
+                    <a:alpha val="46000"/>
+                  </a:schemeClr>
+                </a:gs>
+                <a:gs pos="0">
+                  <a:schemeClr val="accent1">
+                    <a:tint val="23500"/>
+                    <a:satMod val="160000"/>
+                    <a:alpha val="0"/>
+                  </a:schemeClr>
+                </a:gs>
+              </a:gsLst>
+              <a:path path="circle">
+                <a:fillToRect l="100000" t="100000"/>
+              </a:path>
+              <a:tileRect r="-100000" b="-100000"/>
+            </a:gradFill>
+            <a:ln>
+              <a:noFill/>
+            </a:ln>
+          </p:spPr>
+          <p:style>
+            <a:lnRef idx="2">
+              <a:schemeClr val="accent1">
+                <a:shade val="15000"/>
+              </a:schemeClr>
+            </a:lnRef>
+            <a:fillRef idx="1">
+              <a:schemeClr val="accent1"/>
+            </a:fillRef>
+            <a:effectRef idx="0">
+              <a:schemeClr val="accent1"/>
+            </a:effectRef>
+            <a:fontRef idx="minor">
+              <a:schemeClr val="lt1"/>
+            </a:fontRef>
+          </p:style>
+          <p:txBody>
+            <a:bodyPr wrap="square" rtlCol="0" anchor="ctr">
+              <a:noAutofit/>
+            </a:bodyPr>
+            <a:lstStyle/>
+            <a:p>
+              <a:pPr algn="ctr"/>
+              <a:endParaRPr lang="en-US"/>
+            </a:p>
+          </p:txBody>
+        </p:sp>
+        <p:sp>
+          <p:nvSpPr>
+            <p:cNvPr id="46" name="Rectangle: Rounded Corners 45">
+              <a:extLst>
+                <a:ext uri="{FF2B5EF4-FFF2-40B4-BE49-F238E27FC236}">
+                  <a16:creationId xmlns:a16="http://schemas.microsoft.com/office/drawing/2014/main" id="{B7556BA3-B4F7-C145-8E04-7821A3972EFE}"/>
+                </a:ext>
+              </a:extLst>
+            </p:cNvPr>
+            <p:cNvSpPr/>
+            <p:nvPr/>
+          </p:nvSpPr>
+          <p:spPr>
+            <a:xfrm>
+              <a:off x="2539535" y="4022577"/>
+              <a:ext cx="937260" cy="652166"/>
+            </a:xfrm>
+            <a:prstGeom prst="roundRect">
+              <a:avLst/>
+            </a:prstGeom>
+            <a:gradFill flip="none" rotWithShape="1">
+              <a:gsLst>
+                <a:gs pos="78000">
+                  <a:schemeClr val="bg1">
+                    <a:alpha val="0"/>
+                  </a:schemeClr>
+                </a:gs>
+                <a:gs pos="0">
+                  <a:srgbClr val="7030A0"/>
+                </a:gs>
+              </a:gsLst>
+              <a:path path="circle">
+                <a:fillToRect l="100000" b="100000"/>
+              </a:path>
+              <a:tileRect t="-100000" r="-100000"/>
+            </a:gradFill>
+            <a:ln>
+              <a:noFill/>
+            </a:ln>
+          </p:spPr>
+          <p:style>
+            <a:lnRef idx="2">
+              <a:schemeClr val="accent1">
+                <a:shade val="15000"/>
+              </a:schemeClr>
+            </a:lnRef>
+            <a:fillRef idx="1">
+              <a:schemeClr val="accent1"/>
+            </a:fillRef>
+            <a:effectRef idx="0">
+              <a:schemeClr val="accent1"/>
+            </a:effectRef>
+            <a:fontRef idx="minor">
+              <a:schemeClr val="lt1"/>
+            </a:fontRef>
+          </p:style>
+          <p:txBody>
+            <a:bodyPr rtlCol="0" anchor="ctr"/>
+            <a:lstStyle/>
+            <a:p>
+              <a:pPr algn="ctr"/>
+              <a:endParaRPr lang="en-US"/>
+            </a:p>
+          </p:txBody>
+        </p:sp>
+        <p:sp>
+          <p:nvSpPr>
+            <p:cNvPr id="47" name="Freeform: Shape 46">
+              <a:extLst>
+                <a:ext uri="{FF2B5EF4-FFF2-40B4-BE49-F238E27FC236}">
+                  <a16:creationId xmlns:a16="http://schemas.microsoft.com/office/drawing/2014/main" id="{C283FF18-3963-DCCC-A7FA-A8FC208C87AE}"/>
+                </a:ext>
+              </a:extLst>
+            </p:cNvPr>
+            <p:cNvSpPr/>
+            <p:nvPr/>
+          </p:nvSpPr>
+          <p:spPr>
+            <a:xfrm>
+              <a:off x="7698281" y="4022578"/>
+              <a:ext cx="932818" cy="652165"/>
+            </a:xfrm>
+            <a:custGeom>
+              <a:avLst/>
+              <a:gdLst>
+                <a:gd name="csX0" fmla="*/ 0 w 1761688"/>
+                <a:gd name="csY0" fmla="*/ 0 h 1291904"/>
+                <a:gd name="csX1" fmla="*/ 75501 w 1761688"/>
+                <a:gd name="csY1" fmla="*/ 0 h 1291904"/>
+                <a:gd name="csX2" fmla="*/ 1686187 w 1761688"/>
+                <a:gd name="csY2" fmla="*/ 0 h 1291904"/>
+                <a:gd name="csX3" fmla="*/ 1761688 w 1761688"/>
+                <a:gd name="csY3" fmla="*/ 0 h 1291904"/>
+                <a:gd name="csX4" fmla="*/ 1761688 w 1761688"/>
+                <a:gd name="csY4" fmla="*/ 102765 h 1291904"/>
+                <a:gd name="csX5" fmla="*/ 1686187 w 1761688"/>
+                <a:gd name="csY5" fmla="*/ 102765 h 1291904"/>
+                <a:gd name="csX6" fmla="*/ 1686187 w 1761688"/>
+                <a:gd name="csY6" fmla="*/ 1189139 h 1291904"/>
+                <a:gd name="csX7" fmla="*/ 1761688 w 1761688"/>
+                <a:gd name="csY7" fmla="*/ 1189139 h 1291904"/>
+                <a:gd name="csX8" fmla="*/ 1761688 w 1761688"/>
+                <a:gd name="csY8" fmla="*/ 1291904 h 1291904"/>
+                <a:gd name="csX9" fmla="*/ 1686187 w 1761688"/>
+                <a:gd name="csY9" fmla="*/ 1291904 h 1291904"/>
+                <a:gd name="csX10" fmla="*/ 75501 w 1761688"/>
+                <a:gd name="csY10" fmla="*/ 1291904 h 1291904"/>
+                <a:gd name="csX11" fmla="*/ 0 w 1761688"/>
+                <a:gd name="csY11" fmla="*/ 1291904 h 1291904"/>
+                <a:gd name="csX12" fmla="*/ 0 w 1761688"/>
+                <a:gd name="csY12" fmla="*/ 1189139 h 1291904"/>
+                <a:gd name="csX13" fmla="*/ 75501 w 1761688"/>
+                <a:gd name="csY13" fmla="*/ 1189139 h 1291904"/>
+                <a:gd name="csX14" fmla="*/ 75501 w 1761688"/>
+                <a:gd name="csY14" fmla="*/ 102765 h 1291904"/>
+                <a:gd name="csX15" fmla="*/ 0 w 1761688"/>
+                <a:gd name="csY15" fmla="*/ 102765 h 1291904"/>
+              </a:gdLst>
+              <a:ahLst/>
+              <a:cxnLst>
+                <a:cxn ang="0">
+                  <a:pos x="csX0" y="csY0"/>
+                </a:cxn>
+                <a:cxn ang="0">
+                  <a:pos x="csX1" y="csY1"/>
+                </a:cxn>
+                <a:cxn ang="0">
+                  <a:pos x="csX2" y="csY2"/>
+                </a:cxn>
+                <a:cxn ang="0">
+                  <a:pos x="csX3" y="csY3"/>
+                </a:cxn>
+                <a:cxn ang="0">
+                  <a:pos x="csX4" y="csY4"/>
+                </a:cxn>
+                <a:cxn ang="0">
+                  <a:pos x="csX5" y="csY5"/>
+                </a:cxn>
+                <a:cxn ang="0">
+                  <a:pos x="csX6" y="csY6"/>
+                </a:cxn>
+                <a:cxn ang="0">
+                  <a:pos x="csX7" y="csY7"/>
+                </a:cxn>
+                <a:cxn ang="0">
+                  <a:pos x="csX8" y="csY8"/>
+                </a:cxn>
+                <a:cxn ang="0">
+                  <a:pos x="csX9" y="csY9"/>
+                </a:cxn>
+                <a:cxn ang="0">
+                  <a:pos x="csX10" y="csY10"/>
+                </a:cxn>
+                <a:cxn ang="0">
+                  <a:pos x="csX11" y="csY11"/>
+                </a:cxn>
+                <a:cxn ang="0">
+                  <a:pos x="csX12" y="csY12"/>
+                </a:cxn>
+                <a:cxn ang="0">
+                  <a:pos x="csX13" y="csY13"/>
+                </a:cxn>
+                <a:cxn ang="0">
+                  <a:pos x="csX14" y="csY14"/>
+                </a:cxn>
+                <a:cxn ang="0">
+                  <a:pos x="csX15" y="csY15"/>
+                </a:cxn>
+              </a:cxnLst>
+              <a:rect l="l" t="t" r="r" b="b"/>
+              <a:pathLst>
+                <a:path w="1761688" h="1291904">
+                  <a:moveTo>
+                    <a:pt x="0" y="0"/>
+                  </a:moveTo>
+                  <a:lnTo>
+                    <a:pt x="75501" y="0"/>
+                  </a:lnTo>
+                  <a:lnTo>
+                    <a:pt x="1686187" y="0"/>
+                  </a:lnTo>
+                  <a:lnTo>
+                    <a:pt x="1761688" y="0"/>
+                  </a:lnTo>
+                  <a:lnTo>
+                    <a:pt x="1761688" y="102765"/>
+                  </a:lnTo>
+                  <a:lnTo>
+                    <a:pt x="1686187" y="102765"/>
+                  </a:lnTo>
+                  <a:lnTo>
+                    <a:pt x="1686187" y="1189139"/>
+                  </a:lnTo>
+                  <a:lnTo>
+                    <a:pt x="1761688" y="1189139"/>
+                  </a:lnTo>
+                  <a:lnTo>
+                    <a:pt x="1761688" y="1291904"/>
+                  </a:lnTo>
+                  <a:lnTo>
+                    <a:pt x="1686187" y="1291904"/>
+                  </a:lnTo>
+                  <a:lnTo>
+                    <a:pt x="75501" y="1291904"/>
+                  </a:lnTo>
+                  <a:lnTo>
+                    <a:pt x="0" y="1291904"/>
+                  </a:lnTo>
+                  <a:lnTo>
+                    <a:pt x="0" y="1189139"/>
+                  </a:lnTo>
+                  <a:lnTo>
+                    <a:pt x="75501" y="1189139"/>
+                  </a:lnTo>
+                  <a:lnTo>
+                    <a:pt x="75501" y="102765"/>
+                  </a:lnTo>
+                  <a:lnTo>
+                    <a:pt x="0" y="102765"/>
+                  </a:lnTo>
+                  <a:close/>
+                </a:path>
+              </a:pathLst>
+            </a:custGeom>
+            <a:gradFill flip="none" rotWithShape="1">
+              <a:gsLst>
+                <a:gs pos="76000">
+                  <a:schemeClr val="bg1">
+                    <a:alpha val="0"/>
+                  </a:schemeClr>
+                </a:gs>
+                <a:gs pos="24000">
+                  <a:srgbClr val="FFC000"/>
+                </a:gs>
+              </a:gsLst>
+              <a:path path="circle">
+                <a:fillToRect l="100000" b="100000"/>
+              </a:path>
+              <a:tileRect t="-100000" r="-100000"/>
+            </a:gradFill>
+            <a:ln>
+              <a:noFill/>
+            </a:ln>
+          </p:spPr>
+          <p:style>
+            <a:lnRef idx="2">
+              <a:schemeClr val="accent1">
+                <a:shade val="15000"/>
+              </a:schemeClr>
+            </a:lnRef>
+            <a:fillRef idx="1">
+              <a:schemeClr val="accent1"/>
+            </a:fillRef>
+            <a:effectRef idx="0">
+              <a:schemeClr val="accent1"/>
+            </a:effectRef>
+            <a:fontRef idx="minor">
+              <a:schemeClr val="lt1"/>
+            </a:fontRef>
+          </p:style>
+          <p:txBody>
+            <a:bodyPr wrap="square" rtlCol="0" anchor="ctr">
+              <a:noAutofit/>
+            </a:bodyPr>
+            <a:lstStyle/>
+            <a:p>
+              <a:pPr algn="ctr"/>
+              <a:endParaRPr lang="en-US"/>
+            </a:p>
+          </p:txBody>
+        </p:sp>
+        <p:sp>
+          <p:nvSpPr>
+            <p:cNvPr id="48" name="Freeform: Shape 47">
+              <a:extLst>
+                <a:ext uri="{FF2B5EF4-FFF2-40B4-BE49-F238E27FC236}">
+                  <a16:creationId xmlns:a16="http://schemas.microsoft.com/office/drawing/2014/main" id="{86095542-DB0B-13A3-41B4-1E9C805B1DE8}"/>
+                </a:ext>
+              </a:extLst>
+            </p:cNvPr>
+            <p:cNvSpPr/>
+            <p:nvPr/>
+          </p:nvSpPr>
+          <p:spPr>
+            <a:xfrm rot="16200000" flipV="1">
+              <a:off x="5198786" y="3880031"/>
+              <a:ext cx="652164" cy="937260"/>
+            </a:xfrm>
+            <a:custGeom>
+              <a:avLst/>
+              <a:gdLst>
+                <a:gd name="csX0" fmla="*/ 0 w 1291905"/>
+                <a:gd name="csY0" fmla="*/ 0 h 1770078"/>
+                <a:gd name="csX1" fmla="*/ 0 w 1291905"/>
+                <a:gd name="csY1" fmla="*/ 478173 h 1770078"/>
+                <a:gd name="csX2" fmla="*/ 0 w 1291905"/>
+                <a:gd name="csY2" fmla="*/ 1291905 h 1770078"/>
+                <a:gd name="csX3" fmla="*/ 0 w 1291905"/>
+                <a:gd name="csY3" fmla="*/ 1770078 h 1770078"/>
+                <a:gd name="csX4" fmla="*/ 6123 w 1291905"/>
+                <a:gd name="csY4" fmla="*/ 1770078 h 1770078"/>
+                <a:gd name="csX5" fmla="*/ 109381 w 1291905"/>
+                <a:gd name="csY5" fmla="*/ 1658008 h 1770078"/>
+                <a:gd name="csX6" fmla="*/ 212639 w 1291905"/>
+                <a:gd name="csY6" fmla="*/ 1770078 h 1770078"/>
+                <a:gd name="csX7" fmla="*/ 221976 w 1291905"/>
+                <a:gd name="csY7" fmla="*/ 1770078 h 1770078"/>
+                <a:gd name="csX8" fmla="*/ 325234 w 1291905"/>
+                <a:gd name="csY8" fmla="*/ 1658008 h 1770078"/>
+                <a:gd name="csX9" fmla="*/ 428492 w 1291905"/>
+                <a:gd name="csY9" fmla="*/ 1770078 h 1770078"/>
+                <a:gd name="csX10" fmla="*/ 437829 w 1291905"/>
+                <a:gd name="csY10" fmla="*/ 1770078 h 1770078"/>
+                <a:gd name="csX11" fmla="*/ 541087 w 1291905"/>
+                <a:gd name="csY11" fmla="*/ 1658008 h 1770078"/>
+                <a:gd name="csX12" fmla="*/ 644346 w 1291905"/>
+                <a:gd name="csY12" fmla="*/ 1770078 h 1770078"/>
+                <a:gd name="csX13" fmla="*/ 653683 w 1291905"/>
+                <a:gd name="csY13" fmla="*/ 1770078 h 1770078"/>
+                <a:gd name="csX14" fmla="*/ 756941 w 1291905"/>
+                <a:gd name="csY14" fmla="*/ 1658008 h 1770078"/>
+                <a:gd name="csX15" fmla="*/ 860199 w 1291905"/>
+                <a:gd name="csY15" fmla="*/ 1770078 h 1770078"/>
+                <a:gd name="csX16" fmla="*/ 869536 w 1291905"/>
+                <a:gd name="csY16" fmla="*/ 1770078 h 1770078"/>
+                <a:gd name="csX17" fmla="*/ 972794 w 1291905"/>
+                <a:gd name="csY17" fmla="*/ 1658008 h 1770078"/>
+                <a:gd name="csX18" fmla="*/ 1076052 w 1291905"/>
+                <a:gd name="csY18" fmla="*/ 1770078 h 1770078"/>
+                <a:gd name="csX19" fmla="*/ 1085389 w 1291905"/>
+                <a:gd name="csY19" fmla="*/ 1770078 h 1770078"/>
+                <a:gd name="csX20" fmla="*/ 1188647 w 1291905"/>
+                <a:gd name="csY20" fmla="*/ 1658008 h 1770078"/>
+                <a:gd name="csX21" fmla="*/ 1291905 w 1291905"/>
+                <a:gd name="csY21" fmla="*/ 1770078 h 1770078"/>
+                <a:gd name="csX22" fmla="*/ 1291905 w 1291905"/>
+                <a:gd name="csY22" fmla="*/ 1291905 h 1770078"/>
+                <a:gd name="csX23" fmla="*/ 1291905 w 1291905"/>
+                <a:gd name="csY23" fmla="*/ 478173 h 1770078"/>
+                <a:gd name="csX24" fmla="*/ 1291905 w 1291905"/>
+                <a:gd name="csY24" fmla="*/ 0 h 1770078"/>
+                <a:gd name="csX25" fmla="*/ 1188647 w 1291905"/>
+                <a:gd name="csY25" fmla="*/ 112070 h 1770078"/>
+                <a:gd name="csX26" fmla="*/ 1085389 w 1291905"/>
+                <a:gd name="csY26" fmla="*/ 0 h 1770078"/>
+                <a:gd name="csX27" fmla="*/ 1076052 w 1291905"/>
+                <a:gd name="csY27" fmla="*/ 0 h 1770078"/>
+                <a:gd name="csX28" fmla="*/ 972794 w 1291905"/>
+                <a:gd name="csY28" fmla="*/ 112070 h 1770078"/>
+                <a:gd name="csX29" fmla="*/ 869536 w 1291905"/>
+                <a:gd name="csY29" fmla="*/ 0 h 1770078"/>
+                <a:gd name="csX30" fmla="*/ 860199 w 1291905"/>
+                <a:gd name="csY30" fmla="*/ 0 h 1770078"/>
+                <a:gd name="csX31" fmla="*/ 756941 w 1291905"/>
+                <a:gd name="csY31" fmla="*/ 112070 h 1770078"/>
+                <a:gd name="csX32" fmla="*/ 653683 w 1291905"/>
+                <a:gd name="csY32" fmla="*/ 0 h 1770078"/>
+                <a:gd name="csX33" fmla="*/ 644346 w 1291905"/>
+                <a:gd name="csY33" fmla="*/ 0 h 1770078"/>
+                <a:gd name="csX34" fmla="*/ 541087 w 1291905"/>
+                <a:gd name="csY34" fmla="*/ 112070 h 1770078"/>
+                <a:gd name="csX35" fmla="*/ 437829 w 1291905"/>
+                <a:gd name="csY35" fmla="*/ 0 h 1770078"/>
+                <a:gd name="csX36" fmla="*/ 428492 w 1291905"/>
+                <a:gd name="csY36" fmla="*/ 0 h 1770078"/>
+                <a:gd name="csX37" fmla="*/ 325234 w 1291905"/>
+                <a:gd name="csY37" fmla="*/ 112070 h 1770078"/>
+                <a:gd name="csX38" fmla="*/ 221976 w 1291905"/>
+                <a:gd name="csY38" fmla="*/ 0 h 1770078"/>
+                <a:gd name="csX39" fmla="*/ 212639 w 1291905"/>
+                <a:gd name="csY39" fmla="*/ 0 h 1770078"/>
+                <a:gd name="csX40" fmla="*/ 109381 w 1291905"/>
+                <a:gd name="csY40" fmla="*/ 112070 h 1770078"/>
+                <a:gd name="csX41" fmla="*/ 6123 w 1291905"/>
+                <a:gd name="csY41" fmla="*/ 0 h 1770078"/>
+              </a:gdLst>
+              <a:ahLst/>
+              <a:cxnLst>
+                <a:cxn ang="0">
+                  <a:pos x="csX0" y="csY0"/>
+                </a:cxn>
+                <a:cxn ang="0">
+                  <a:pos x="csX1" y="csY1"/>
+                </a:cxn>
+                <a:cxn ang="0">
+                  <a:pos x="csX2" y="csY2"/>
+                </a:cxn>
+                <a:cxn ang="0">
+                  <a:pos x="csX3" y="csY3"/>
+                </a:cxn>
+                <a:cxn ang="0">
+                  <a:pos x="csX4" y="csY4"/>
+                </a:cxn>
+                <a:cxn ang="0">
+                  <a:pos x="csX5" y="csY5"/>
+                </a:cxn>
+                <a:cxn ang="0">
+                  <a:pos x="csX6" y="csY6"/>
+                </a:cxn>
+                <a:cxn ang="0">
+                  <a:pos x="csX7" y="csY7"/>
+                </a:cxn>
+                <a:cxn ang="0">
+                  <a:pos x="csX8" y="csY8"/>
+                </a:cxn>
+                <a:cxn ang="0">
+                  <a:pos x="csX9" y="csY9"/>
+                </a:cxn>
+                <a:cxn ang="0">
+                  <a:pos x="csX10" y="csY10"/>
+                </a:cxn>
+                <a:cxn ang="0">
+                  <a:pos x="csX11" y="csY11"/>
+                </a:cxn>
+                <a:cxn ang="0">
+                  <a:pos x="csX12" y="csY12"/>
+                </a:cxn>
+                <a:cxn ang="0">
+                  <a:pos x="csX13" y="csY13"/>
+                </a:cxn>
+                <a:cxn ang="0">
+                  <a:pos x="csX14" y="csY14"/>
+                </a:cxn>
+                <a:cxn ang="0">
+                  <a:pos x="csX15" y="csY15"/>
+                </a:cxn>
+                <a:cxn ang="0">
+                  <a:pos x="csX16" y="csY16"/>
+                </a:cxn>
+                <a:cxn ang="0">
+                  <a:pos x="csX17" y="csY17"/>
+                </a:cxn>
+                <a:cxn ang="0">
+                  <a:pos x="csX18" y="csY18"/>
+                </a:cxn>
+                <a:cxn ang="0">
+                  <a:pos x="csX19" y="csY19"/>
+                </a:cxn>
+                <a:cxn ang="0">
+                  <a:pos x="csX20" y="csY20"/>
+                </a:cxn>
+                <a:cxn ang="0">
+                  <a:pos x="csX21" y="csY21"/>
+                </a:cxn>
+                <a:cxn ang="0">
+                  <a:pos x="csX22" y="csY22"/>
+                </a:cxn>
+                <a:cxn ang="0">
+                  <a:pos x="csX23" y="csY23"/>
+                </a:cxn>
+                <a:cxn ang="0">
+                  <a:pos x="csX24" y="csY24"/>
+                </a:cxn>
+                <a:cxn ang="0">
+                  <a:pos x="csX25" y="csY25"/>
+                </a:cxn>
+                <a:cxn ang="0">
+                  <a:pos x="csX26" y="csY26"/>
+                </a:cxn>
+                <a:cxn ang="0">
+                  <a:pos x="csX27" y="csY27"/>
+                </a:cxn>
+                <a:cxn ang="0">
+                  <a:pos x="csX28" y="csY28"/>
+                </a:cxn>
+                <a:cxn ang="0">
+                  <a:pos x="csX29" y="csY29"/>
+                </a:cxn>
+                <a:cxn ang="0">
+                  <a:pos x="csX30" y="csY30"/>
+                </a:cxn>
+                <a:cxn ang="0">
+                  <a:pos x="csX31" y="csY31"/>
+                </a:cxn>
+                <a:cxn ang="0">
+                  <a:pos x="csX32" y="csY32"/>
+                </a:cxn>
+                <a:cxn ang="0">
+                  <a:pos x="csX33" y="csY33"/>
+                </a:cxn>
+                <a:cxn ang="0">
+                  <a:pos x="csX34" y="csY34"/>
+                </a:cxn>
+                <a:cxn ang="0">
+                  <a:pos x="csX35" y="csY35"/>
+                </a:cxn>
+                <a:cxn ang="0">
+                  <a:pos x="csX36" y="csY36"/>
+                </a:cxn>
+                <a:cxn ang="0">
+                  <a:pos x="csX37" y="csY37"/>
+                </a:cxn>
+                <a:cxn ang="0">
+                  <a:pos x="csX38" y="csY38"/>
+                </a:cxn>
+                <a:cxn ang="0">
+                  <a:pos x="csX39" y="csY39"/>
+                </a:cxn>
+                <a:cxn ang="0">
+                  <a:pos x="csX40" y="csY40"/>
+                </a:cxn>
+                <a:cxn ang="0">
+                  <a:pos x="csX41" y="csY41"/>
+                </a:cxn>
+              </a:cxnLst>
+              <a:rect l="l" t="t" r="r" b="b"/>
+              <a:pathLst>
+                <a:path w="1291905" h="1770078">
+                  <a:moveTo>
+                    <a:pt x="0" y="0"/>
+                  </a:moveTo>
+                  <a:lnTo>
+                    <a:pt x="0" y="478173"/>
+                  </a:lnTo>
+                  <a:lnTo>
+                    <a:pt x="0" y="1291905"/>
+                  </a:lnTo>
+                  <a:lnTo>
+                    <a:pt x="0" y="1770078"/>
+                  </a:lnTo>
+                  <a:lnTo>
+                    <a:pt x="6123" y="1770078"/>
+                  </a:lnTo>
+                  <a:lnTo>
+                    <a:pt x="109381" y="1658008"/>
+                  </a:lnTo>
+                  <a:lnTo>
+                    <a:pt x="212639" y="1770078"/>
+                  </a:lnTo>
+                  <a:lnTo>
+                    <a:pt x="221976" y="1770078"/>
+                  </a:lnTo>
+                  <a:lnTo>
+                    <a:pt x="325234" y="1658008"/>
+                  </a:lnTo>
+                  <a:lnTo>
+                    <a:pt x="428492" y="1770078"/>
+                  </a:lnTo>
+                  <a:lnTo>
+                    <a:pt x="437829" y="1770078"/>
+                  </a:lnTo>
+                  <a:lnTo>
+                    <a:pt x="541087" y="1658008"/>
+                  </a:lnTo>
+                  <a:lnTo>
+                    <a:pt x="644346" y="1770078"/>
+                  </a:lnTo>
+                  <a:lnTo>
+                    <a:pt x="653683" y="1770078"/>
+                  </a:lnTo>
+                  <a:lnTo>
+                    <a:pt x="756941" y="1658008"/>
+                  </a:lnTo>
+                  <a:lnTo>
+                    <a:pt x="860199" y="1770078"/>
+                  </a:lnTo>
+                  <a:lnTo>
+                    <a:pt x="869536" y="1770078"/>
+                  </a:lnTo>
+                  <a:lnTo>
+                    <a:pt x="972794" y="1658008"/>
+                  </a:lnTo>
+                  <a:lnTo>
+                    <a:pt x="1076052" y="1770078"/>
+                  </a:lnTo>
+                  <a:lnTo>
+                    <a:pt x="1085389" y="1770078"/>
+                  </a:lnTo>
+                  <a:lnTo>
+                    <a:pt x="1188647" y="1658008"/>
+                  </a:lnTo>
+                  <a:lnTo>
+                    <a:pt x="1291905" y="1770078"/>
+                  </a:lnTo>
+                  <a:lnTo>
+                    <a:pt x="1291905" y="1291905"/>
+                  </a:lnTo>
+                  <a:lnTo>
+                    <a:pt x="1291905" y="478173"/>
+                  </a:lnTo>
+                  <a:lnTo>
+                    <a:pt x="1291905" y="0"/>
+                  </a:lnTo>
+                  <a:lnTo>
+                    <a:pt x="1188647" y="112070"/>
+                  </a:lnTo>
+                  <a:lnTo>
+                    <a:pt x="1085389" y="0"/>
+                  </a:lnTo>
+                  <a:lnTo>
+                    <a:pt x="1076052" y="0"/>
+                  </a:lnTo>
+                  <a:lnTo>
+                    <a:pt x="972794" y="112070"/>
+                  </a:lnTo>
+                  <a:lnTo>
+                    <a:pt x="869536" y="0"/>
+                  </a:lnTo>
+                  <a:lnTo>
+                    <a:pt x="860199" y="0"/>
+                  </a:lnTo>
+                  <a:lnTo>
+                    <a:pt x="756941" y="112070"/>
+                  </a:lnTo>
+                  <a:lnTo>
+                    <a:pt x="653683" y="0"/>
+                  </a:lnTo>
+                  <a:lnTo>
+                    <a:pt x="644346" y="0"/>
+                  </a:lnTo>
+                  <a:lnTo>
+                    <a:pt x="541087" y="112070"/>
+                  </a:lnTo>
+                  <a:lnTo>
+                    <a:pt x="437829" y="0"/>
+                  </a:lnTo>
+                  <a:lnTo>
+                    <a:pt x="428492" y="0"/>
+                  </a:lnTo>
+                  <a:lnTo>
+                    <a:pt x="325234" y="112070"/>
+                  </a:lnTo>
+                  <a:lnTo>
+                    <a:pt x="221976" y="0"/>
+                  </a:lnTo>
+                  <a:lnTo>
+                    <a:pt x="212639" y="0"/>
+                  </a:lnTo>
+                  <a:lnTo>
+                    <a:pt x="109381" y="112070"/>
+                  </a:lnTo>
+                  <a:lnTo>
+                    <a:pt x="6123" y="0"/>
+                  </a:lnTo>
+                  <a:close/>
+                </a:path>
+              </a:pathLst>
+            </a:custGeom>
+            <a:gradFill flip="none" rotWithShape="1">
+              <a:gsLst>
+                <a:gs pos="81000">
+                  <a:schemeClr val="bg1">
+                    <a:alpha val="0"/>
+                  </a:schemeClr>
+                </a:gs>
+                <a:gs pos="0">
+                  <a:srgbClr val="FF0000"/>
+                </a:gs>
+              </a:gsLst>
+              <a:path path="circle">
+                <a:fillToRect l="100000" b="100000"/>
+              </a:path>
+              <a:tileRect t="-100000" r="-100000"/>
+            </a:gradFill>
+            <a:ln>
+              <a:noFill/>
+            </a:ln>
+          </p:spPr>
+          <p:style>
+            <a:lnRef idx="2">
+              <a:schemeClr val="accent1">
+                <a:shade val="15000"/>
+              </a:schemeClr>
+            </a:lnRef>
+            <a:fillRef idx="1">
+              <a:schemeClr val="accent1"/>
+            </a:fillRef>
+            <a:effectRef idx="0">
+              <a:schemeClr val="accent1"/>
+            </a:effectRef>
+            <a:fontRef idx="minor">
+              <a:schemeClr val="lt1"/>
+            </a:fontRef>
+          </p:style>
+          <p:txBody>
+            <a:bodyPr wrap="square" rtlCol="0" anchor="ctr">
+              <a:noAutofit/>
+            </a:bodyPr>
+            <a:lstStyle/>
+            <a:p>
+              <a:pPr algn="ctr"/>
+              <a:endParaRPr lang="en-US"/>
+            </a:p>
+          </p:txBody>
+        </p:sp>
+        <p:sp>
+          <p:nvSpPr>
+            <p:cNvPr id="49" name="Freeform: Shape 48">
+              <a:extLst>
+                <a:ext uri="{FF2B5EF4-FFF2-40B4-BE49-F238E27FC236}">
+                  <a16:creationId xmlns:a16="http://schemas.microsoft.com/office/drawing/2014/main" id="{CFCE63B5-CC96-2583-618E-6957E064CBFA}"/>
+                </a:ext>
+              </a:extLst>
+            </p:cNvPr>
+            <p:cNvSpPr/>
+            <p:nvPr/>
+          </p:nvSpPr>
+          <p:spPr>
+            <a:xfrm>
+              <a:off x="3879920" y="4022578"/>
+              <a:ext cx="937260" cy="652164"/>
+            </a:xfrm>
+            <a:custGeom>
+              <a:avLst/>
+              <a:gdLst>
+                <a:gd name="csX0" fmla="*/ 885039 w 1770078"/>
+                <a:gd name="csY0" fmla="*/ 0 h 1291903"/>
+                <a:gd name="csX1" fmla="*/ 1752097 w 1770078"/>
+                <a:gd name="csY1" fmla="*/ 364364 h 1291903"/>
+                <a:gd name="csX2" fmla="*/ 1756386 w 1770078"/>
+                <a:gd name="csY2" fmla="*/ 378854 h 1291903"/>
+                <a:gd name="csX3" fmla="*/ 1770078 w 1770078"/>
+                <a:gd name="csY3" fmla="*/ 378854 h 1291903"/>
+                <a:gd name="csX4" fmla="*/ 1770078 w 1770078"/>
+                <a:gd name="csY4" fmla="*/ 456330 h 1291903"/>
+                <a:gd name="csX5" fmla="*/ 1770078 w 1770078"/>
+                <a:gd name="csY5" fmla="*/ 1291903 h 1291903"/>
+                <a:gd name="csX6" fmla="*/ 0 w 1770078"/>
+                <a:gd name="csY6" fmla="*/ 1291903 h 1291903"/>
+                <a:gd name="csX7" fmla="*/ 0 w 1770078"/>
+                <a:gd name="csY7" fmla="*/ 456330 h 1291903"/>
+                <a:gd name="csX8" fmla="*/ 0 w 1770078"/>
+                <a:gd name="csY8" fmla="*/ 378854 h 1291903"/>
+                <a:gd name="csX9" fmla="*/ 13692 w 1770078"/>
+                <a:gd name="csY9" fmla="*/ 378854 h 1291903"/>
+                <a:gd name="csX10" fmla="*/ 17981 w 1770078"/>
+                <a:gd name="csY10" fmla="*/ 364364 h 1291903"/>
+                <a:gd name="csX11" fmla="*/ 885039 w 1770078"/>
+                <a:gd name="csY11" fmla="*/ 0 h 1291903"/>
+                <a:gd name="csX0" fmla="*/ 885039 w 1770078"/>
+                <a:gd name="csY0" fmla="*/ 0 h 1291903"/>
+                <a:gd name="csX1" fmla="*/ 1752097 w 1770078"/>
+                <a:gd name="csY1" fmla="*/ 364364 h 1291903"/>
+                <a:gd name="csX2" fmla="*/ 1756386 w 1770078"/>
+                <a:gd name="csY2" fmla="*/ 378854 h 1291903"/>
+                <a:gd name="csX3" fmla="*/ 1770078 w 1770078"/>
+                <a:gd name="csY3" fmla="*/ 378854 h 1291903"/>
+                <a:gd name="csX4" fmla="*/ 1770078 w 1770078"/>
+                <a:gd name="csY4" fmla="*/ 456330 h 1291903"/>
+                <a:gd name="csX5" fmla="*/ 1770078 w 1770078"/>
+                <a:gd name="csY5" fmla="*/ 1291903 h 1291903"/>
+                <a:gd name="csX6" fmla="*/ 0 w 1770078"/>
+                <a:gd name="csY6" fmla="*/ 1291903 h 1291903"/>
+                <a:gd name="csX7" fmla="*/ 0 w 1770078"/>
+                <a:gd name="csY7" fmla="*/ 456330 h 1291903"/>
+                <a:gd name="csX8" fmla="*/ 13692 w 1770078"/>
+                <a:gd name="csY8" fmla="*/ 378854 h 1291903"/>
+                <a:gd name="csX9" fmla="*/ 17981 w 1770078"/>
+                <a:gd name="csY9" fmla="*/ 364364 h 1291903"/>
+                <a:gd name="csX10" fmla="*/ 885039 w 1770078"/>
+                <a:gd name="csY10" fmla="*/ 0 h 1291903"/>
+                <a:gd name="csX0" fmla="*/ 885039 w 1770078"/>
+                <a:gd name="csY0" fmla="*/ 0 h 1291903"/>
+                <a:gd name="csX1" fmla="*/ 1752097 w 1770078"/>
+                <a:gd name="csY1" fmla="*/ 364364 h 1291903"/>
+                <a:gd name="csX2" fmla="*/ 1756386 w 1770078"/>
+                <a:gd name="csY2" fmla="*/ 378854 h 1291903"/>
+                <a:gd name="csX3" fmla="*/ 1770078 w 1770078"/>
+                <a:gd name="csY3" fmla="*/ 378854 h 1291903"/>
+                <a:gd name="csX4" fmla="*/ 1770078 w 1770078"/>
+                <a:gd name="csY4" fmla="*/ 456330 h 1291903"/>
+                <a:gd name="csX5" fmla="*/ 1770078 w 1770078"/>
+                <a:gd name="csY5" fmla="*/ 1291903 h 1291903"/>
+                <a:gd name="csX6" fmla="*/ 0 w 1770078"/>
+                <a:gd name="csY6" fmla="*/ 1291903 h 1291903"/>
+                <a:gd name="csX7" fmla="*/ 0 w 1770078"/>
+                <a:gd name="csY7" fmla="*/ 456330 h 1291903"/>
+                <a:gd name="csX8" fmla="*/ 17981 w 1770078"/>
+                <a:gd name="csY8" fmla="*/ 364364 h 1291903"/>
+                <a:gd name="csX9" fmla="*/ 885039 w 1770078"/>
+                <a:gd name="csY9" fmla="*/ 0 h 1291903"/>
+                <a:gd name="csX0" fmla="*/ 885039 w 1770078"/>
+                <a:gd name="csY0" fmla="*/ 0 h 1291903"/>
+                <a:gd name="csX1" fmla="*/ 1752097 w 1770078"/>
+                <a:gd name="csY1" fmla="*/ 364364 h 1291903"/>
+                <a:gd name="csX2" fmla="*/ 1756386 w 1770078"/>
+                <a:gd name="csY2" fmla="*/ 378854 h 1291903"/>
+                <a:gd name="csX3" fmla="*/ 1770078 w 1770078"/>
+                <a:gd name="csY3" fmla="*/ 456330 h 1291903"/>
+                <a:gd name="csX4" fmla="*/ 1770078 w 1770078"/>
+                <a:gd name="csY4" fmla="*/ 1291903 h 1291903"/>
+                <a:gd name="csX5" fmla="*/ 0 w 1770078"/>
+                <a:gd name="csY5" fmla="*/ 1291903 h 1291903"/>
+                <a:gd name="csX6" fmla="*/ 0 w 1770078"/>
+                <a:gd name="csY6" fmla="*/ 456330 h 1291903"/>
+                <a:gd name="csX7" fmla="*/ 17981 w 1770078"/>
+                <a:gd name="csY7" fmla="*/ 364364 h 1291903"/>
+                <a:gd name="csX8" fmla="*/ 885039 w 1770078"/>
+                <a:gd name="csY8" fmla="*/ 0 h 1291903"/>
+                <a:gd name="csX0" fmla="*/ 885039 w 1770078"/>
+                <a:gd name="csY0" fmla="*/ 0 h 1291903"/>
+                <a:gd name="csX1" fmla="*/ 1752097 w 1770078"/>
+                <a:gd name="csY1" fmla="*/ 364364 h 1291903"/>
+                <a:gd name="csX2" fmla="*/ 1770078 w 1770078"/>
+                <a:gd name="csY2" fmla="*/ 456330 h 1291903"/>
+                <a:gd name="csX3" fmla="*/ 1770078 w 1770078"/>
+                <a:gd name="csY3" fmla="*/ 1291903 h 1291903"/>
+                <a:gd name="csX4" fmla="*/ 0 w 1770078"/>
+                <a:gd name="csY4" fmla="*/ 1291903 h 1291903"/>
+                <a:gd name="csX5" fmla="*/ 0 w 1770078"/>
+                <a:gd name="csY5" fmla="*/ 456330 h 1291903"/>
+                <a:gd name="csX6" fmla="*/ 17981 w 1770078"/>
+                <a:gd name="csY6" fmla="*/ 364364 h 1291903"/>
+                <a:gd name="csX7" fmla="*/ 885039 w 1770078"/>
+                <a:gd name="csY7" fmla="*/ 0 h 1291903"/>
+              </a:gdLst>
+              <a:ahLst/>
+              <a:cxnLst>
+                <a:cxn ang="0">
+                  <a:pos x="csX0" y="csY0"/>
+                </a:cxn>
+                <a:cxn ang="0">
+                  <a:pos x="csX1" y="csY1"/>
+                </a:cxn>
+                <a:cxn ang="0">
+                  <a:pos x="csX2" y="csY2"/>
+                </a:cxn>
+                <a:cxn ang="0">
+                  <a:pos x="csX3" y="csY3"/>
+                </a:cxn>
+                <a:cxn ang="0">
+                  <a:pos x="csX4" y="csY4"/>
+                </a:cxn>
+                <a:cxn ang="0">
+                  <a:pos x="csX5" y="csY5"/>
+                </a:cxn>
+                <a:cxn ang="0">
+                  <a:pos x="csX6" y="csY6"/>
+                </a:cxn>
+                <a:cxn ang="0">
+                  <a:pos x="csX7" y="csY7"/>
+                </a:cxn>
+              </a:cxnLst>
+              <a:rect l="l" t="t" r="r" b="b"/>
+              <a:pathLst>
+                <a:path w="1770078" h="1291903">
+                  <a:moveTo>
+                    <a:pt x="885039" y="0"/>
+                  </a:moveTo>
+                  <a:cubicBezTo>
+                    <a:pt x="1312734" y="0"/>
+                    <a:pt x="1669571" y="156422"/>
+                    <a:pt x="1752097" y="364364"/>
+                  </a:cubicBezTo>
+                  <a:lnTo>
+                    <a:pt x="1770078" y="456330"/>
+                  </a:lnTo>
+                  <a:lnTo>
+                    <a:pt x="1770078" y="1291903"/>
+                  </a:lnTo>
+                  <a:lnTo>
+                    <a:pt x="0" y="1291903"/>
+                  </a:lnTo>
+                  <a:lnTo>
+                    <a:pt x="0" y="456330"/>
+                  </a:lnTo>
+                  <a:lnTo>
+                    <a:pt x="17981" y="364364"/>
+                  </a:lnTo>
+                  <a:cubicBezTo>
+                    <a:pt x="100507" y="156422"/>
+                    <a:pt x="457344" y="0"/>
+                    <a:pt x="885039" y="0"/>
+                  </a:cubicBezTo>
+                  <a:close/>
+                </a:path>
+              </a:pathLst>
+            </a:custGeom>
+            <a:gradFill flip="none" rotWithShape="1">
+              <a:gsLst>
+                <a:gs pos="69000">
+                  <a:schemeClr val="bg1">
+                    <a:alpha val="0"/>
+                  </a:schemeClr>
+                </a:gs>
+                <a:gs pos="0">
+                  <a:srgbClr val="0070C0"/>
+                </a:gs>
+              </a:gsLst>
+              <a:path path="circle">
+                <a:fillToRect l="100000" b="100000"/>
+              </a:path>
+              <a:tileRect t="-100000" r="-100000"/>
+            </a:gradFill>
+            <a:ln>
+              <a:noFill/>
+            </a:ln>
+          </p:spPr>
+          <p:style>
+            <a:lnRef idx="2">
+              <a:schemeClr val="accent1">
+                <a:shade val="15000"/>
+              </a:schemeClr>
+            </a:lnRef>
+            <a:fillRef idx="1">
+              <a:schemeClr val="accent1"/>
+            </a:fillRef>
+            <a:effectRef idx="0">
+              <a:schemeClr val="accent1"/>
+            </a:effectRef>
+            <a:fontRef idx="minor">
+              <a:schemeClr val="lt1"/>
+            </a:fontRef>
+          </p:style>
+          <p:txBody>
+            <a:bodyPr wrap="square" rtlCol="0" anchor="ctr">
+              <a:noAutofit/>
+            </a:bodyPr>
+            <a:lstStyle/>
+            <a:p>
+              <a:pPr algn="ctr"/>
+              <a:endParaRPr lang="en-US"/>
+            </a:p>
+          </p:txBody>
+        </p:sp>
+        <p:sp>
+          <p:nvSpPr>
+            <p:cNvPr id="50" name="Freeform: Shape 49">
+              <a:extLst>
+                <a:ext uri="{FF2B5EF4-FFF2-40B4-BE49-F238E27FC236}">
+                  <a16:creationId xmlns:a16="http://schemas.microsoft.com/office/drawing/2014/main" id="{615C66A9-F525-F4F5-91FA-E8615F062D6F}"/>
+                </a:ext>
+              </a:extLst>
+            </p:cNvPr>
+            <p:cNvSpPr/>
+            <p:nvPr/>
+          </p:nvSpPr>
+          <p:spPr>
+            <a:xfrm>
+              <a:off x="6235672" y="4022578"/>
+              <a:ext cx="937260" cy="652165"/>
+            </a:xfrm>
+            <a:custGeom>
+              <a:avLst/>
+              <a:gdLst>
+                <a:gd name="csX0" fmla="*/ 0 w 937260"/>
+                <a:gd name="csY0" fmla="*/ 0 h 652165"/>
+                <a:gd name="csX1" fmla="*/ 179 w 937260"/>
+                <a:gd name="csY1" fmla="*/ 0 h 652165"/>
+                <a:gd name="csX2" fmla="*/ 116373 w 937260"/>
+                <a:gd name="csY2" fmla="*/ 31552 h 652165"/>
+                <a:gd name="csX3" fmla="*/ 468630 w 937260"/>
+                <a:gd name="csY3" fmla="*/ 67131 h 652165"/>
+                <a:gd name="csX4" fmla="*/ 820887 w 937260"/>
+                <a:gd name="csY4" fmla="*/ 31552 h 652165"/>
+                <a:gd name="csX5" fmla="*/ 937081 w 937260"/>
+                <a:gd name="csY5" fmla="*/ 0 h 652165"/>
+                <a:gd name="csX6" fmla="*/ 937260 w 937260"/>
+                <a:gd name="csY6" fmla="*/ 0 h 652165"/>
+                <a:gd name="csX7" fmla="*/ 937260 w 937260"/>
+                <a:gd name="csY7" fmla="*/ 652165 h 652165"/>
+                <a:gd name="csX8" fmla="*/ 937078 w 937260"/>
+                <a:gd name="csY8" fmla="*/ 652165 h 652165"/>
+                <a:gd name="csX9" fmla="*/ 820887 w 937260"/>
+                <a:gd name="csY9" fmla="*/ 620614 h 652165"/>
+                <a:gd name="csX10" fmla="*/ 468630 w 937260"/>
+                <a:gd name="csY10" fmla="*/ 585035 h 652165"/>
+                <a:gd name="csX11" fmla="*/ 116373 w 937260"/>
+                <a:gd name="csY11" fmla="*/ 620614 h 652165"/>
+                <a:gd name="csX12" fmla="*/ 183 w 937260"/>
+                <a:gd name="csY12" fmla="*/ 652165 h 652165"/>
+                <a:gd name="csX13" fmla="*/ 0 w 937260"/>
+                <a:gd name="csY13" fmla="*/ 652165 h 652165"/>
+              </a:gdLst>
+              <a:ahLst/>
+              <a:cxnLst>
+                <a:cxn ang="0">
+                  <a:pos x="csX0" y="csY0"/>
+                </a:cxn>
+                <a:cxn ang="0">
+                  <a:pos x="csX1" y="csY1"/>
+                </a:cxn>
+                <a:cxn ang="0">
+                  <a:pos x="csX2" y="csY2"/>
+                </a:cxn>
+                <a:cxn ang="0">
+                  <a:pos x="csX3" y="csY3"/>
+                </a:cxn>
+                <a:cxn ang="0">
+                  <a:pos x="csX4" y="csY4"/>
+                </a:cxn>
+                <a:cxn ang="0">
+                  <a:pos x="csX5" y="csY5"/>
+                </a:cxn>
+                <a:cxn ang="0">
+                  <a:pos x="csX6" y="csY6"/>
+                </a:cxn>
+                <a:cxn ang="0">
+                  <a:pos x="csX7" y="csY7"/>
+                </a:cxn>
+                <a:cxn ang="0">
+                  <a:pos x="csX8" y="csY8"/>
+                </a:cxn>
+                <a:cxn ang="0">
+                  <a:pos x="csX9" y="csY9"/>
+                </a:cxn>
+                <a:cxn ang="0">
+                  <a:pos x="csX10" y="csY10"/>
+                </a:cxn>
+                <a:cxn ang="0">
+                  <a:pos x="csX11" y="csY11"/>
+                </a:cxn>
+                <a:cxn ang="0">
+                  <a:pos x="csX12" y="csY12"/>
+                </a:cxn>
+                <a:cxn ang="0">
+                  <a:pos x="csX13" y="csY13"/>
+                </a:cxn>
+              </a:cxnLst>
+              <a:rect l="l" t="t" r="r" b="b"/>
+              <a:pathLst>
+                <a:path w="937260" h="652165">
+                  <a:moveTo>
+                    <a:pt x="0" y="0"/>
+                  </a:moveTo>
+                  <a:lnTo>
+                    <a:pt x="179" y="0"/>
+                  </a:lnTo>
+                  <a:lnTo>
+                    <a:pt x="116373" y="31552"/>
+                  </a:lnTo>
+                  <a:cubicBezTo>
+                    <a:pt x="224643" y="54462"/>
+                    <a:pt x="343679" y="67131"/>
+                    <a:pt x="468630" y="67131"/>
+                  </a:cubicBezTo>
+                  <a:cubicBezTo>
+                    <a:pt x="593581" y="67131"/>
+                    <a:pt x="712618" y="54462"/>
+                    <a:pt x="820887" y="31552"/>
+                  </a:cubicBezTo>
+                  <a:lnTo>
+                    <a:pt x="937081" y="0"/>
+                  </a:lnTo>
+                  <a:lnTo>
+                    <a:pt x="937260" y="0"/>
+                  </a:lnTo>
+                  <a:lnTo>
+                    <a:pt x="937260" y="652165"/>
+                  </a:lnTo>
+                  <a:lnTo>
+                    <a:pt x="937078" y="652165"/>
+                  </a:lnTo>
+                  <a:lnTo>
+                    <a:pt x="820887" y="620614"/>
+                  </a:lnTo>
+                  <a:cubicBezTo>
+                    <a:pt x="712618" y="597704"/>
+                    <a:pt x="593581" y="585035"/>
+                    <a:pt x="468630" y="585035"/>
+                  </a:cubicBezTo>
+                  <a:cubicBezTo>
+                    <a:pt x="343679" y="585035"/>
+                    <a:pt x="224643" y="597704"/>
+                    <a:pt x="116373" y="620614"/>
+                  </a:cubicBezTo>
+                  <a:lnTo>
+                    <a:pt x="183" y="652165"/>
+                  </a:lnTo>
+                  <a:lnTo>
+                    <a:pt x="0" y="652165"/>
+                  </a:lnTo>
+                  <a:close/>
+                </a:path>
+              </a:pathLst>
+            </a:custGeom>
+            <a:gradFill flip="none" rotWithShape="1">
+              <a:gsLst>
+                <a:gs pos="83000">
+                  <a:schemeClr val="bg1">
+                    <a:alpha val="0"/>
+                  </a:schemeClr>
+                </a:gs>
+                <a:gs pos="0">
+                  <a:srgbClr val="00B050"/>
+                </a:gs>
+              </a:gsLst>
+              <a:path path="circle">
+                <a:fillToRect l="100000" b="100000"/>
+              </a:path>
+              <a:tileRect t="-100000" r="-100000"/>
+            </a:gradFill>
+            <a:ln>
+              <a:noFill/>
+            </a:ln>
+          </p:spPr>
+          <p:style>
+            <a:lnRef idx="2">
+              <a:schemeClr val="accent1">
+                <a:shade val="15000"/>
+              </a:schemeClr>
+            </a:lnRef>
+            <a:fillRef idx="1">
+              <a:schemeClr val="accent1"/>
+            </a:fillRef>
+            <a:effectRef idx="0">
+              <a:schemeClr val="accent1"/>
+            </a:effectRef>
+            <a:fontRef idx="minor">
+              <a:schemeClr val="lt1"/>
+            </a:fontRef>
+          </p:style>
+          <p:txBody>
+            <a:bodyPr wrap="square" rtlCol="0" anchor="ctr">
+              <a:noAutofit/>
+            </a:bodyPr>
+            <a:lstStyle/>
+            <a:p>
+              <a:pPr algn="ctr"/>
+              <a:endParaRPr lang="en-US"/>
+            </a:p>
+          </p:txBody>
+        </p:sp>
+      </p:grpSp>
       <p:sp>
         <p:nvSpPr>
-          <p:cNvPr id="22" name="Rectangle: Rounded Corners 21">
+          <p:cNvPr id="91" name="Freeform: Shape 90">
             <a:extLst>
               <a:ext uri="{FF2B5EF4-FFF2-40B4-BE49-F238E27FC236}">
-                <a16:creationId xmlns:a16="http://schemas.microsoft.com/office/drawing/2014/main" id="{04BD6A4C-1DF2-97B0-CDDE-ED2A12EB5A2D}"/>
+                <a16:creationId xmlns:a16="http://schemas.microsoft.com/office/drawing/2014/main" id="{C35C7B59-CB09-AB2D-8F58-3134166692C1}"/>
               </a:ext>
             </a:extLst>
           </p:cNvPr>
@@ -5282,20 +8609,208 @@
         </p:nvSpPr>
         <p:spPr>
           <a:xfrm>
-            <a:off x="2546329" y="4351605"/>
-            <a:ext cx="937260" cy="652166"/>
+            <a:off x="6235672" y="812169"/>
+            <a:ext cx="937260" cy="652165"/>
+          </a:xfrm>
+          <a:custGeom>
+            <a:avLst/>
+            <a:gdLst>
+              <a:gd name="csX0" fmla="*/ 0 w 937260"/>
+              <a:gd name="csY0" fmla="*/ 0 h 652165"/>
+              <a:gd name="csX1" fmla="*/ 179 w 937260"/>
+              <a:gd name="csY1" fmla="*/ 0 h 652165"/>
+              <a:gd name="csX2" fmla="*/ 116373 w 937260"/>
+              <a:gd name="csY2" fmla="*/ 31552 h 652165"/>
+              <a:gd name="csX3" fmla="*/ 468630 w 937260"/>
+              <a:gd name="csY3" fmla="*/ 67131 h 652165"/>
+              <a:gd name="csX4" fmla="*/ 820887 w 937260"/>
+              <a:gd name="csY4" fmla="*/ 31552 h 652165"/>
+              <a:gd name="csX5" fmla="*/ 937081 w 937260"/>
+              <a:gd name="csY5" fmla="*/ 0 h 652165"/>
+              <a:gd name="csX6" fmla="*/ 937260 w 937260"/>
+              <a:gd name="csY6" fmla="*/ 0 h 652165"/>
+              <a:gd name="csX7" fmla="*/ 937260 w 937260"/>
+              <a:gd name="csY7" fmla="*/ 652165 h 652165"/>
+              <a:gd name="csX8" fmla="*/ 937078 w 937260"/>
+              <a:gd name="csY8" fmla="*/ 652165 h 652165"/>
+              <a:gd name="csX9" fmla="*/ 820887 w 937260"/>
+              <a:gd name="csY9" fmla="*/ 620614 h 652165"/>
+              <a:gd name="csX10" fmla="*/ 468630 w 937260"/>
+              <a:gd name="csY10" fmla="*/ 585035 h 652165"/>
+              <a:gd name="csX11" fmla="*/ 116373 w 937260"/>
+              <a:gd name="csY11" fmla="*/ 620614 h 652165"/>
+              <a:gd name="csX12" fmla="*/ 183 w 937260"/>
+              <a:gd name="csY12" fmla="*/ 652165 h 652165"/>
+              <a:gd name="csX13" fmla="*/ 0 w 937260"/>
+              <a:gd name="csY13" fmla="*/ 652165 h 652165"/>
+            </a:gdLst>
+            <a:ahLst/>
+            <a:cxnLst>
+              <a:cxn ang="0">
+                <a:pos x="csX0" y="csY0"/>
+              </a:cxn>
+              <a:cxn ang="0">
+                <a:pos x="csX1" y="csY1"/>
+              </a:cxn>
+              <a:cxn ang="0">
+                <a:pos x="csX2" y="csY2"/>
+              </a:cxn>
+              <a:cxn ang="0">
+                <a:pos x="csX3" y="csY3"/>
+              </a:cxn>
+              <a:cxn ang="0">
+                <a:pos x="csX4" y="csY4"/>
+              </a:cxn>
+              <a:cxn ang="0">
+                <a:pos x="csX5" y="csY5"/>
+              </a:cxn>
+              <a:cxn ang="0">
+                <a:pos x="csX6" y="csY6"/>
+              </a:cxn>
+              <a:cxn ang="0">
+                <a:pos x="csX7" y="csY7"/>
+              </a:cxn>
+              <a:cxn ang="0">
+                <a:pos x="csX8" y="csY8"/>
+              </a:cxn>
+              <a:cxn ang="0">
+                <a:pos x="csX9" y="csY9"/>
+              </a:cxn>
+              <a:cxn ang="0">
+                <a:pos x="csX10" y="csY10"/>
+              </a:cxn>
+              <a:cxn ang="0">
+                <a:pos x="csX11" y="csY11"/>
+              </a:cxn>
+              <a:cxn ang="0">
+                <a:pos x="csX12" y="csY12"/>
+              </a:cxn>
+              <a:cxn ang="0">
+                <a:pos x="csX13" y="csY13"/>
+              </a:cxn>
+            </a:cxnLst>
+            <a:rect l="l" t="t" r="r" b="b"/>
+            <a:pathLst>
+              <a:path w="937260" h="652165">
+                <a:moveTo>
+                  <a:pt x="0" y="0"/>
+                </a:moveTo>
+                <a:lnTo>
+                  <a:pt x="179" y="0"/>
+                </a:lnTo>
+                <a:lnTo>
+                  <a:pt x="116373" y="31552"/>
+                </a:lnTo>
+                <a:cubicBezTo>
+                  <a:pt x="224643" y="54462"/>
+                  <a:pt x="343679" y="67131"/>
+                  <a:pt x="468630" y="67131"/>
+                </a:cubicBezTo>
+                <a:cubicBezTo>
+                  <a:pt x="593581" y="67131"/>
+                  <a:pt x="712618" y="54462"/>
+                  <a:pt x="820887" y="31552"/>
+                </a:cubicBezTo>
+                <a:lnTo>
+                  <a:pt x="937081" y="0"/>
+                </a:lnTo>
+                <a:lnTo>
+                  <a:pt x="937260" y="0"/>
+                </a:lnTo>
+                <a:lnTo>
+                  <a:pt x="937260" y="652165"/>
+                </a:lnTo>
+                <a:lnTo>
+                  <a:pt x="937078" y="652165"/>
+                </a:lnTo>
+                <a:lnTo>
+                  <a:pt x="820887" y="620614"/>
+                </a:lnTo>
+                <a:cubicBezTo>
+                  <a:pt x="712618" y="597704"/>
+                  <a:pt x="593581" y="585035"/>
+                  <a:pt x="468630" y="585035"/>
+                </a:cubicBezTo>
+                <a:cubicBezTo>
+                  <a:pt x="343679" y="585035"/>
+                  <a:pt x="224643" y="597704"/>
+                  <a:pt x="116373" y="620614"/>
+                </a:cubicBezTo>
+                <a:lnTo>
+                  <a:pt x="183" y="652165"/>
+                </a:lnTo>
+                <a:lnTo>
+                  <a:pt x="0" y="652165"/>
+                </a:lnTo>
+                <a:close/>
+              </a:path>
+            </a:pathLst>
+          </a:custGeom>
+          <a:solidFill>
+            <a:schemeClr val="bg1"/>
+          </a:solidFill>
+          <a:ln>
+            <a:noFill/>
+          </a:ln>
+        </p:spPr>
+        <p:style>
+          <a:lnRef idx="2">
+            <a:schemeClr val="accent1">
+              <a:shade val="15000"/>
+            </a:schemeClr>
+          </a:lnRef>
+          <a:fillRef idx="1">
+            <a:schemeClr val="accent1"/>
+          </a:fillRef>
+          <a:effectRef idx="0">
+            <a:schemeClr val="accent1"/>
+          </a:effectRef>
+          <a:fontRef idx="minor">
+            <a:schemeClr val="lt1"/>
+          </a:fontRef>
+        </p:style>
+        <p:txBody>
+          <a:bodyPr wrap="square" rtlCol="0" anchor="ctr">
+            <a:noAutofit/>
+          </a:bodyPr>
+          <a:lstStyle/>
+          <a:p>
+            <a:pPr algn="ctr"/>
+            <a:endParaRPr lang="en-US"/>
+          </a:p>
+        </p:txBody>
+      </p:sp>
+      <p:sp>
+        <p:nvSpPr>
+          <p:cNvPr id="18" name="Rectangle: Rounded Corners 17">
+            <a:extLst>
+              <a:ext uri="{FF2B5EF4-FFF2-40B4-BE49-F238E27FC236}">
+                <a16:creationId xmlns:a16="http://schemas.microsoft.com/office/drawing/2014/main" id="{0C258499-7BFA-B668-638C-EF67C217B11B}"/>
+              </a:ext>
+            </a:extLst>
+          </p:cNvPr>
+          <p:cNvSpPr/>
+          <p:nvPr/>
+        </p:nvSpPr>
+        <p:spPr>
+          <a:xfrm>
+            <a:off x="2455026" y="5392320"/>
+            <a:ext cx="1119866" cy="779228"/>
           </a:xfrm>
           <a:prstGeom prst="roundRect">
             <a:avLst/>
           </a:prstGeom>
           <a:solidFill>
-            <a:srgbClr val="C775E7"/>
+            <a:schemeClr val="bg1">
+              <a:lumMod val="65000"/>
+            </a:schemeClr>
           </a:solidFill>
-          <a:ln w="3175">
-            <a:solidFill>
-              <a:srgbClr val="7030A0"/>
-            </a:solidFill>
+          <a:ln>
+            <a:noFill/>
           </a:ln>
+          <a:effectLst>
+            <a:softEdge rad="63500"/>
+          </a:effectLst>
         </p:spPr>
         <p:style>
           <a:lnRef idx="2">
@@ -5324,10 +8839,10 @@
       </p:sp>
       <p:sp>
         <p:nvSpPr>
-          <p:cNvPr id="23" name="Freeform: Shape 22">
+          <p:cNvPr id="19" name="Freeform: Shape 18">
             <a:extLst>
               <a:ext uri="{FF2B5EF4-FFF2-40B4-BE49-F238E27FC236}">
-                <a16:creationId xmlns:a16="http://schemas.microsoft.com/office/drawing/2014/main" id="{9750E4F2-092D-D55C-C68A-477569CD3EDD}"/>
+                <a16:creationId xmlns:a16="http://schemas.microsoft.com/office/drawing/2014/main" id="{9D6E2E98-8500-C887-096F-88AC402AC551}"/>
               </a:ext>
             </a:extLst>
           </p:cNvPr>
@@ -5336,8 +8851,8 @@
         </p:nvSpPr>
         <p:spPr>
           <a:xfrm>
-            <a:off x="7698281" y="4351606"/>
-            <a:ext cx="932818" cy="652165"/>
+            <a:off x="7607411" y="5392323"/>
+            <a:ext cx="1114558" cy="779224"/>
           </a:xfrm>
           <a:custGeom>
             <a:avLst/>
@@ -5482,15 +8997,16 @@
             </a:pathLst>
           </a:custGeom>
           <a:solidFill>
-            <a:srgbClr val="ECC31D"/>
+            <a:schemeClr val="bg1">
+              <a:lumMod val="65000"/>
+            </a:schemeClr>
           </a:solidFill>
-          <a:ln w="3175">
-            <a:solidFill>
-              <a:schemeClr val="accent4">
-                <a:lumMod val="75000"/>
-              </a:schemeClr>
-            </a:solidFill>
+          <a:ln>
+            <a:noFill/>
           </a:ln>
+          <a:effectLst>
+            <a:softEdge rad="63500"/>
+          </a:effectLst>
         </p:spPr>
         <p:style>
           <a:lnRef idx="2">
@@ -5509,9 +9025,7 @@
           </a:fontRef>
         </p:style>
         <p:txBody>
-          <a:bodyPr wrap="square" rtlCol="0" anchor="ctr">
-            <a:noAutofit/>
-          </a:bodyPr>
+          <a:bodyPr rtlCol="0" anchor="ctr"/>
           <a:lstStyle/>
           <a:p>
             <a:pPr algn="ctr"/>
@@ -5521,10 +9035,10 @@
       </p:sp>
       <p:sp>
         <p:nvSpPr>
-          <p:cNvPr id="24" name="Freeform: Shape 23">
+          <p:cNvPr id="20" name="Freeform: Shape 19">
             <a:extLst>
               <a:ext uri="{FF2B5EF4-FFF2-40B4-BE49-F238E27FC236}">
-                <a16:creationId xmlns:a16="http://schemas.microsoft.com/office/drawing/2014/main" id="{B371E4BC-2DC4-9584-3E97-146A28B7BF4D}"/>
+                <a16:creationId xmlns:a16="http://schemas.microsoft.com/office/drawing/2014/main" id="{3CDBA04C-4415-6DCC-31D0-1F5B0CBE4CEC}"/>
               </a:ext>
             </a:extLst>
           </p:cNvPr>
@@ -5533,8 +9047,8 @@
         </p:nvSpPr>
         <p:spPr>
           <a:xfrm rot="16200000" flipH="1">
-            <a:off x="5198786" y="4209059"/>
-            <a:ext cx="652164" cy="937260"/>
+            <a:off x="5135256" y="5222001"/>
+            <a:ext cx="779224" cy="1119866"/>
           </a:xfrm>
           <a:custGeom>
             <a:avLst/>
@@ -5887,13 +9401,16 @@
             </a:pathLst>
           </a:custGeom>
           <a:solidFill>
-            <a:srgbClr val="E94B3A"/>
+            <a:schemeClr val="bg1">
+              <a:lumMod val="65000"/>
+            </a:schemeClr>
           </a:solidFill>
-          <a:ln w="3175">
-            <a:solidFill>
-              <a:srgbClr val="C00000"/>
-            </a:solidFill>
+          <a:ln>
+            <a:noFill/>
           </a:ln>
+          <a:effectLst>
+            <a:softEdge rad="63500"/>
+          </a:effectLst>
         </p:spPr>
         <p:style>
           <a:lnRef idx="2">
@@ -5912,9 +9429,7 @@
           </a:fontRef>
         </p:style>
         <p:txBody>
-          <a:bodyPr wrap="square" rtlCol="0" anchor="ctr">
-            <a:noAutofit/>
-          </a:bodyPr>
+          <a:bodyPr rtlCol="0" anchor="ctr"/>
           <a:lstStyle/>
           <a:p>
             <a:pPr algn="ctr"/>
@@ -5924,10 +9439,10 @@
       </p:sp>
       <p:sp>
         <p:nvSpPr>
-          <p:cNvPr id="26" name="Freeform: Shape 25">
+          <p:cNvPr id="21" name="Freeform: Shape 20">
             <a:extLst>
               <a:ext uri="{FF2B5EF4-FFF2-40B4-BE49-F238E27FC236}">
-                <a16:creationId xmlns:a16="http://schemas.microsoft.com/office/drawing/2014/main" id="{0A94A3C3-53FE-2FEC-298B-03D9F582B428}"/>
+                <a16:creationId xmlns:a16="http://schemas.microsoft.com/office/drawing/2014/main" id="{E29B2D5B-76F2-6081-B812-1673044E4E65}"/>
               </a:ext>
             </a:extLst>
           </p:cNvPr>
@@ -5936,8 +9451,8 @@
         </p:nvSpPr>
         <p:spPr>
           <a:xfrm>
-            <a:off x="3879920" y="4351606"/>
-            <a:ext cx="937260" cy="652164"/>
+            <a:off x="3788617" y="5392322"/>
+            <a:ext cx="1119866" cy="779224"/>
           </a:xfrm>
           <a:custGeom>
             <a:avLst/>
@@ -6106,13 +9621,16 @@
             </a:pathLst>
           </a:custGeom>
           <a:solidFill>
-            <a:srgbClr val="3BA8F0"/>
+            <a:schemeClr val="bg1">
+              <a:lumMod val="65000"/>
+            </a:schemeClr>
           </a:solidFill>
-          <a:ln w="3175">
-            <a:solidFill>
-              <a:srgbClr val="0070C0"/>
-            </a:solidFill>
+          <a:ln>
+            <a:noFill/>
           </a:ln>
+          <a:effectLst>
+            <a:softEdge rad="63500"/>
+          </a:effectLst>
         </p:spPr>
         <p:style>
           <a:lnRef idx="2">
@@ -6131,9 +9649,7 @@
           </a:fontRef>
         </p:style>
         <p:txBody>
-          <a:bodyPr wrap="square" rtlCol="0" anchor="ctr">
-            <a:noAutofit/>
-          </a:bodyPr>
+          <a:bodyPr rtlCol="0" anchor="ctr"/>
           <a:lstStyle/>
           <a:p>
             <a:pPr algn="ctr"/>
@@ -6143,10 +9659,10 @@
       </p:sp>
       <p:sp>
         <p:nvSpPr>
-          <p:cNvPr id="27" name="Freeform: Shape 26">
+          <p:cNvPr id="28" name="Freeform: Shape 27">
             <a:extLst>
               <a:ext uri="{FF2B5EF4-FFF2-40B4-BE49-F238E27FC236}">
-                <a16:creationId xmlns:a16="http://schemas.microsoft.com/office/drawing/2014/main" id="{6E1F0008-F991-AD16-8A3D-DA5DD5F510EE}"/>
+                <a16:creationId xmlns:a16="http://schemas.microsoft.com/office/drawing/2014/main" id="{1A0BF110-1D3A-A1BE-7C60-69C6793DB6E7}"/>
               </a:ext>
             </a:extLst>
           </p:cNvPr>
@@ -6155,8 +9671,8 @@
         </p:nvSpPr>
         <p:spPr>
           <a:xfrm>
-            <a:off x="6235672" y="4351606"/>
-            <a:ext cx="937260" cy="652165"/>
+            <a:off x="6144369" y="5392323"/>
+            <a:ext cx="1119866" cy="779224"/>
           </a:xfrm>
           <a:custGeom>
             <a:avLst/>
@@ -6293,84 +9809,16 @@
             </a:pathLst>
           </a:custGeom>
           <a:solidFill>
-            <a:srgbClr val="36E67F"/>
+            <a:schemeClr val="bg1">
+              <a:lumMod val="65000"/>
+            </a:schemeClr>
           </a:solidFill>
-          <a:ln w="3175">
-            <a:solidFill>
-              <a:srgbClr val="00B050"/>
-            </a:solidFill>
-          </a:ln>
-        </p:spPr>
-        <p:style>
-          <a:lnRef idx="2">
-            <a:schemeClr val="accent1">
-              <a:shade val="15000"/>
-            </a:schemeClr>
-          </a:lnRef>
-          <a:fillRef idx="1">
-            <a:schemeClr val="accent1"/>
-          </a:fillRef>
-          <a:effectRef idx="0">
-            <a:schemeClr val="accent1"/>
-          </a:effectRef>
-          <a:fontRef idx="minor">
-            <a:schemeClr val="lt1"/>
-          </a:fontRef>
-        </p:style>
-        <p:txBody>
-          <a:bodyPr wrap="square" rtlCol="0" anchor="ctr">
-            <a:noAutofit/>
-          </a:bodyPr>
-          <a:lstStyle/>
-          <a:p>
-            <a:pPr algn="ctr"/>
-            <a:endParaRPr lang="en-US"/>
-          </a:p>
-        </p:txBody>
-      </p:sp>
-      <p:sp>
-        <p:nvSpPr>
-          <p:cNvPr id="40" name="Rectangle: Rounded Corners 39">
-            <a:extLst>
-              <a:ext uri="{FF2B5EF4-FFF2-40B4-BE49-F238E27FC236}">
-                <a16:creationId xmlns:a16="http://schemas.microsoft.com/office/drawing/2014/main" id="{89392FCD-1BF2-D49D-59C8-CF3D31931DF8}"/>
-              </a:ext>
-            </a:extLst>
-          </p:cNvPr>
-          <p:cNvSpPr/>
-          <p:nvPr/>
-        </p:nvSpPr>
-        <p:spPr>
-          <a:xfrm>
-            <a:off x="2546329" y="4351605"/>
-            <a:ext cx="937260" cy="652166"/>
-          </a:xfrm>
-          <a:prstGeom prst="roundRect">
-            <a:avLst/>
-          </a:prstGeom>
-          <a:gradFill flip="none" rotWithShape="1">
-            <a:gsLst>
-              <a:gs pos="100000">
-                <a:schemeClr val="bg1">
-                  <a:alpha val="46000"/>
-                </a:schemeClr>
-              </a:gs>
-              <a:gs pos="0">
-                <a:schemeClr val="accent1">
-                  <a:tint val="23500"/>
-                  <a:satMod val="160000"/>
-                  <a:alpha val="0"/>
-                </a:schemeClr>
-              </a:gs>
-            </a:gsLst>
-            <a:path path="circle">
-              <a:fillToRect l="100000" t="100000"/>
-            </a:path>
-            <a:tileRect r="-100000" b="-100000"/>
-          </a:gradFill>
           <a:ln>
             <a:noFill/>
           </a:ln>
+          <a:effectLst>
+            <a:softEdge rad="63500"/>
+          </a:effectLst>
         </p:spPr>
         <p:style>
           <a:lnRef idx="2">
@@ -6399,2363 +9847,40 @@
       </p:sp>
       <p:sp>
         <p:nvSpPr>
-          <p:cNvPr id="41" name="Freeform: Shape 40">
+          <p:cNvPr id="68" name="TextBox 67">
             <a:extLst>
               <a:ext uri="{FF2B5EF4-FFF2-40B4-BE49-F238E27FC236}">
-                <a16:creationId xmlns:a16="http://schemas.microsoft.com/office/drawing/2014/main" id="{9BCAF1F1-9E2A-5A10-5A33-DE1FCE7BF266}"/>
+                <a16:creationId xmlns:a16="http://schemas.microsoft.com/office/drawing/2014/main" id="{D01BAB7F-B945-F16E-F32C-8EFDDD3570CA}"/>
               </a:ext>
             </a:extLst>
           </p:cNvPr>
-          <p:cNvSpPr/>
+          <p:cNvSpPr txBox="1"/>
           <p:nvPr/>
         </p:nvSpPr>
         <p:spPr>
           <a:xfrm>
-            <a:off x="7698281" y="4351606"/>
-            <a:ext cx="932818" cy="652165"/>
+            <a:off x="9065145" y="5597267"/>
+            <a:ext cx="2565061" cy="369332"/>
           </a:xfrm>
-          <a:custGeom>
+          <a:prstGeom prst="rect">
             <a:avLst/>
-            <a:gdLst>
-              <a:gd name="csX0" fmla="*/ 0 w 1761688"/>
-              <a:gd name="csY0" fmla="*/ 0 h 1291904"/>
-              <a:gd name="csX1" fmla="*/ 75501 w 1761688"/>
-              <a:gd name="csY1" fmla="*/ 0 h 1291904"/>
-              <a:gd name="csX2" fmla="*/ 1686187 w 1761688"/>
-              <a:gd name="csY2" fmla="*/ 0 h 1291904"/>
-              <a:gd name="csX3" fmla="*/ 1761688 w 1761688"/>
-              <a:gd name="csY3" fmla="*/ 0 h 1291904"/>
-              <a:gd name="csX4" fmla="*/ 1761688 w 1761688"/>
-              <a:gd name="csY4" fmla="*/ 102765 h 1291904"/>
-              <a:gd name="csX5" fmla="*/ 1686187 w 1761688"/>
-              <a:gd name="csY5" fmla="*/ 102765 h 1291904"/>
-              <a:gd name="csX6" fmla="*/ 1686187 w 1761688"/>
-              <a:gd name="csY6" fmla="*/ 1189139 h 1291904"/>
-              <a:gd name="csX7" fmla="*/ 1761688 w 1761688"/>
-              <a:gd name="csY7" fmla="*/ 1189139 h 1291904"/>
-              <a:gd name="csX8" fmla="*/ 1761688 w 1761688"/>
-              <a:gd name="csY8" fmla="*/ 1291904 h 1291904"/>
-              <a:gd name="csX9" fmla="*/ 1686187 w 1761688"/>
-              <a:gd name="csY9" fmla="*/ 1291904 h 1291904"/>
-              <a:gd name="csX10" fmla="*/ 75501 w 1761688"/>
-              <a:gd name="csY10" fmla="*/ 1291904 h 1291904"/>
-              <a:gd name="csX11" fmla="*/ 0 w 1761688"/>
-              <a:gd name="csY11" fmla="*/ 1291904 h 1291904"/>
-              <a:gd name="csX12" fmla="*/ 0 w 1761688"/>
-              <a:gd name="csY12" fmla="*/ 1189139 h 1291904"/>
-              <a:gd name="csX13" fmla="*/ 75501 w 1761688"/>
-              <a:gd name="csY13" fmla="*/ 1189139 h 1291904"/>
-              <a:gd name="csX14" fmla="*/ 75501 w 1761688"/>
-              <a:gd name="csY14" fmla="*/ 102765 h 1291904"/>
-              <a:gd name="csX15" fmla="*/ 0 w 1761688"/>
-              <a:gd name="csY15" fmla="*/ 102765 h 1291904"/>
-            </a:gdLst>
-            <a:ahLst/>
-            <a:cxnLst>
-              <a:cxn ang="0">
-                <a:pos x="csX0" y="csY0"/>
-              </a:cxn>
-              <a:cxn ang="0">
-                <a:pos x="csX1" y="csY1"/>
-              </a:cxn>
-              <a:cxn ang="0">
-                <a:pos x="csX2" y="csY2"/>
-              </a:cxn>
-              <a:cxn ang="0">
-                <a:pos x="csX3" y="csY3"/>
-              </a:cxn>
-              <a:cxn ang="0">
-                <a:pos x="csX4" y="csY4"/>
-              </a:cxn>
-              <a:cxn ang="0">
-                <a:pos x="csX5" y="csY5"/>
-              </a:cxn>
-              <a:cxn ang="0">
-                <a:pos x="csX6" y="csY6"/>
-              </a:cxn>
-              <a:cxn ang="0">
-                <a:pos x="csX7" y="csY7"/>
-              </a:cxn>
-              <a:cxn ang="0">
-                <a:pos x="csX8" y="csY8"/>
-              </a:cxn>
-              <a:cxn ang="0">
-                <a:pos x="csX9" y="csY9"/>
-              </a:cxn>
-              <a:cxn ang="0">
-                <a:pos x="csX10" y="csY10"/>
-              </a:cxn>
-              <a:cxn ang="0">
-                <a:pos x="csX11" y="csY11"/>
-              </a:cxn>
-              <a:cxn ang="0">
-                <a:pos x="csX12" y="csY12"/>
-              </a:cxn>
-              <a:cxn ang="0">
-                <a:pos x="csX13" y="csY13"/>
-              </a:cxn>
-              <a:cxn ang="0">
-                <a:pos x="csX14" y="csY14"/>
-              </a:cxn>
-              <a:cxn ang="0">
-                <a:pos x="csX15" y="csY15"/>
-              </a:cxn>
-            </a:cxnLst>
-            <a:rect l="l" t="t" r="r" b="b"/>
-            <a:pathLst>
-              <a:path w="1761688" h="1291904">
-                <a:moveTo>
-                  <a:pt x="0" y="0"/>
-                </a:moveTo>
-                <a:lnTo>
-                  <a:pt x="75501" y="0"/>
-                </a:lnTo>
-                <a:lnTo>
-                  <a:pt x="1686187" y="0"/>
-                </a:lnTo>
-                <a:lnTo>
-                  <a:pt x="1761688" y="0"/>
-                </a:lnTo>
-                <a:lnTo>
-                  <a:pt x="1761688" y="102765"/>
-                </a:lnTo>
-                <a:lnTo>
-                  <a:pt x="1686187" y="102765"/>
-                </a:lnTo>
-                <a:lnTo>
-                  <a:pt x="1686187" y="1189139"/>
-                </a:lnTo>
-                <a:lnTo>
-                  <a:pt x="1761688" y="1189139"/>
-                </a:lnTo>
-                <a:lnTo>
-                  <a:pt x="1761688" y="1291904"/>
-                </a:lnTo>
-                <a:lnTo>
-                  <a:pt x="1686187" y="1291904"/>
-                </a:lnTo>
-                <a:lnTo>
-                  <a:pt x="75501" y="1291904"/>
-                </a:lnTo>
-                <a:lnTo>
-                  <a:pt x="0" y="1291904"/>
-                </a:lnTo>
-                <a:lnTo>
-                  <a:pt x="0" y="1189139"/>
-                </a:lnTo>
-                <a:lnTo>
-                  <a:pt x="75501" y="1189139"/>
-                </a:lnTo>
-                <a:lnTo>
-                  <a:pt x="75501" y="102765"/>
-                </a:lnTo>
-                <a:lnTo>
-                  <a:pt x="0" y="102765"/>
-                </a:lnTo>
-                <a:close/>
-              </a:path>
-            </a:pathLst>
-          </a:custGeom>
-          <a:gradFill flip="none" rotWithShape="1">
-            <a:gsLst>
-              <a:gs pos="100000">
-                <a:schemeClr val="bg1">
-                  <a:alpha val="46000"/>
-                </a:schemeClr>
-              </a:gs>
-              <a:gs pos="0">
-                <a:schemeClr val="accent1">
-                  <a:tint val="23500"/>
-                  <a:satMod val="160000"/>
-                  <a:alpha val="0"/>
-                </a:schemeClr>
-              </a:gs>
-            </a:gsLst>
-            <a:path path="circle">
-              <a:fillToRect l="100000" t="100000"/>
-            </a:path>
-            <a:tileRect r="-100000" b="-100000"/>
-          </a:gradFill>
-          <a:ln>
-            <a:noFill/>
-          </a:ln>
+          </a:prstGeom>
+          <a:noFill/>
         </p:spPr>
-        <p:style>
-          <a:lnRef idx="2">
-            <a:schemeClr val="accent1">
-              <a:shade val="15000"/>
-            </a:schemeClr>
-          </a:lnRef>
-          <a:fillRef idx="1">
-            <a:schemeClr val="accent1"/>
-          </a:fillRef>
-          <a:effectRef idx="0">
-            <a:schemeClr val="accent1"/>
-          </a:effectRef>
-          <a:fontRef idx="minor">
-            <a:schemeClr val="lt1"/>
-          </a:fontRef>
-        </p:style>
         <p:txBody>
-          <a:bodyPr wrap="square" rtlCol="0" anchor="ctr">
-            <a:noAutofit/>
+          <a:bodyPr wrap="none" rtlCol="0">
+            <a:spAutoFit/>
           </a:bodyPr>
           <a:lstStyle/>
           <a:p>
-            <a:pPr algn="ctr"/>
-            <a:endParaRPr lang="en-US"/>
-          </a:p>
-        </p:txBody>
-      </p:sp>
-      <p:sp>
-        <p:nvSpPr>
-          <p:cNvPr id="42" name="Freeform: Shape 41">
-            <a:extLst>
-              <a:ext uri="{FF2B5EF4-FFF2-40B4-BE49-F238E27FC236}">
-                <a16:creationId xmlns:a16="http://schemas.microsoft.com/office/drawing/2014/main" id="{8FE09A29-1662-8CD5-0334-02F4A401BD08}"/>
-              </a:ext>
-            </a:extLst>
-          </p:cNvPr>
-          <p:cNvSpPr/>
-          <p:nvPr/>
-        </p:nvSpPr>
-        <p:spPr>
-          <a:xfrm rot="16200000" flipH="1">
-            <a:off x="5198786" y="4209059"/>
-            <a:ext cx="652164" cy="937260"/>
-          </a:xfrm>
-          <a:custGeom>
-            <a:avLst/>
-            <a:gdLst>
-              <a:gd name="csX0" fmla="*/ 0 w 1291905"/>
-              <a:gd name="csY0" fmla="*/ 0 h 1770078"/>
-              <a:gd name="csX1" fmla="*/ 0 w 1291905"/>
-              <a:gd name="csY1" fmla="*/ 478173 h 1770078"/>
-              <a:gd name="csX2" fmla="*/ 0 w 1291905"/>
-              <a:gd name="csY2" fmla="*/ 1291905 h 1770078"/>
-              <a:gd name="csX3" fmla="*/ 0 w 1291905"/>
-              <a:gd name="csY3" fmla="*/ 1770078 h 1770078"/>
-              <a:gd name="csX4" fmla="*/ 6123 w 1291905"/>
-              <a:gd name="csY4" fmla="*/ 1770078 h 1770078"/>
-              <a:gd name="csX5" fmla="*/ 109381 w 1291905"/>
-              <a:gd name="csY5" fmla="*/ 1658008 h 1770078"/>
-              <a:gd name="csX6" fmla="*/ 212639 w 1291905"/>
-              <a:gd name="csY6" fmla="*/ 1770078 h 1770078"/>
-              <a:gd name="csX7" fmla="*/ 221976 w 1291905"/>
-              <a:gd name="csY7" fmla="*/ 1770078 h 1770078"/>
-              <a:gd name="csX8" fmla="*/ 325234 w 1291905"/>
-              <a:gd name="csY8" fmla="*/ 1658008 h 1770078"/>
-              <a:gd name="csX9" fmla="*/ 428492 w 1291905"/>
-              <a:gd name="csY9" fmla="*/ 1770078 h 1770078"/>
-              <a:gd name="csX10" fmla="*/ 437829 w 1291905"/>
-              <a:gd name="csY10" fmla="*/ 1770078 h 1770078"/>
-              <a:gd name="csX11" fmla="*/ 541087 w 1291905"/>
-              <a:gd name="csY11" fmla="*/ 1658008 h 1770078"/>
-              <a:gd name="csX12" fmla="*/ 644346 w 1291905"/>
-              <a:gd name="csY12" fmla="*/ 1770078 h 1770078"/>
-              <a:gd name="csX13" fmla="*/ 653683 w 1291905"/>
-              <a:gd name="csY13" fmla="*/ 1770078 h 1770078"/>
-              <a:gd name="csX14" fmla="*/ 756941 w 1291905"/>
-              <a:gd name="csY14" fmla="*/ 1658008 h 1770078"/>
-              <a:gd name="csX15" fmla="*/ 860199 w 1291905"/>
-              <a:gd name="csY15" fmla="*/ 1770078 h 1770078"/>
-              <a:gd name="csX16" fmla="*/ 869536 w 1291905"/>
-              <a:gd name="csY16" fmla="*/ 1770078 h 1770078"/>
-              <a:gd name="csX17" fmla="*/ 972794 w 1291905"/>
-              <a:gd name="csY17" fmla="*/ 1658008 h 1770078"/>
-              <a:gd name="csX18" fmla="*/ 1076052 w 1291905"/>
-              <a:gd name="csY18" fmla="*/ 1770078 h 1770078"/>
-              <a:gd name="csX19" fmla="*/ 1085389 w 1291905"/>
-              <a:gd name="csY19" fmla="*/ 1770078 h 1770078"/>
-              <a:gd name="csX20" fmla="*/ 1188647 w 1291905"/>
-              <a:gd name="csY20" fmla="*/ 1658008 h 1770078"/>
-              <a:gd name="csX21" fmla="*/ 1291905 w 1291905"/>
-              <a:gd name="csY21" fmla="*/ 1770078 h 1770078"/>
-              <a:gd name="csX22" fmla="*/ 1291905 w 1291905"/>
-              <a:gd name="csY22" fmla="*/ 1291905 h 1770078"/>
-              <a:gd name="csX23" fmla="*/ 1291905 w 1291905"/>
-              <a:gd name="csY23" fmla="*/ 478173 h 1770078"/>
-              <a:gd name="csX24" fmla="*/ 1291905 w 1291905"/>
-              <a:gd name="csY24" fmla="*/ 0 h 1770078"/>
-              <a:gd name="csX25" fmla="*/ 1188647 w 1291905"/>
-              <a:gd name="csY25" fmla="*/ 112070 h 1770078"/>
-              <a:gd name="csX26" fmla="*/ 1085389 w 1291905"/>
-              <a:gd name="csY26" fmla="*/ 0 h 1770078"/>
-              <a:gd name="csX27" fmla="*/ 1076052 w 1291905"/>
-              <a:gd name="csY27" fmla="*/ 0 h 1770078"/>
-              <a:gd name="csX28" fmla="*/ 972794 w 1291905"/>
-              <a:gd name="csY28" fmla="*/ 112070 h 1770078"/>
-              <a:gd name="csX29" fmla="*/ 869536 w 1291905"/>
-              <a:gd name="csY29" fmla="*/ 0 h 1770078"/>
-              <a:gd name="csX30" fmla="*/ 860199 w 1291905"/>
-              <a:gd name="csY30" fmla="*/ 0 h 1770078"/>
-              <a:gd name="csX31" fmla="*/ 756941 w 1291905"/>
-              <a:gd name="csY31" fmla="*/ 112070 h 1770078"/>
-              <a:gd name="csX32" fmla="*/ 653683 w 1291905"/>
-              <a:gd name="csY32" fmla="*/ 0 h 1770078"/>
-              <a:gd name="csX33" fmla="*/ 644346 w 1291905"/>
-              <a:gd name="csY33" fmla="*/ 0 h 1770078"/>
-              <a:gd name="csX34" fmla="*/ 541087 w 1291905"/>
-              <a:gd name="csY34" fmla="*/ 112070 h 1770078"/>
-              <a:gd name="csX35" fmla="*/ 437829 w 1291905"/>
-              <a:gd name="csY35" fmla="*/ 0 h 1770078"/>
-              <a:gd name="csX36" fmla="*/ 428492 w 1291905"/>
-              <a:gd name="csY36" fmla="*/ 0 h 1770078"/>
-              <a:gd name="csX37" fmla="*/ 325234 w 1291905"/>
-              <a:gd name="csY37" fmla="*/ 112070 h 1770078"/>
-              <a:gd name="csX38" fmla="*/ 221976 w 1291905"/>
-              <a:gd name="csY38" fmla="*/ 0 h 1770078"/>
-              <a:gd name="csX39" fmla="*/ 212639 w 1291905"/>
-              <a:gd name="csY39" fmla="*/ 0 h 1770078"/>
-              <a:gd name="csX40" fmla="*/ 109381 w 1291905"/>
-              <a:gd name="csY40" fmla="*/ 112070 h 1770078"/>
-              <a:gd name="csX41" fmla="*/ 6123 w 1291905"/>
-              <a:gd name="csY41" fmla="*/ 0 h 1770078"/>
-            </a:gdLst>
-            <a:ahLst/>
-            <a:cxnLst>
-              <a:cxn ang="0">
-                <a:pos x="csX0" y="csY0"/>
-              </a:cxn>
-              <a:cxn ang="0">
-                <a:pos x="csX1" y="csY1"/>
-              </a:cxn>
-              <a:cxn ang="0">
-                <a:pos x="csX2" y="csY2"/>
-              </a:cxn>
-              <a:cxn ang="0">
-                <a:pos x="csX3" y="csY3"/>
-              </a:cxn>
-              <a:cxn ang="0">
-                <a:pos x="csX4" y="csY4"/>
-              </a:cxn>
-              <a:cxn ang="0">
-                <a:pos x="csX5" y="csY5"/>
-              </a:cxn>
-              <a:cxn ang="0">
-                <a:pos x="csX6" y="csY6"/>
-              </a:cxn>
-              <a:cxn ang="0">
-                <a:pos x="csX7" y="csY7"/>
-              </a:cxn>
-              <a:cxn ang="0">
-                <a:pos x="csX8" y="csY8"/>
-              </a:cxn>
-              <a:cxn ang="0">
-                <a:pos x="csX9" y="csY9"/>
-              </a:cxn>
-              <a:cxn ang="0">
-                <a:pos x="csX10" y="csY10"/>
-              </a:cxn>
-              <a:cxn ang="0">
-                <a:pos x="csX11" y="csY11"/>
-              </a:cxn>
-              <a:cxn ang="0">
-                <a:pos x="csX12" y="csY12"/>
-              </a:cxn>
-              <a:cxn ang="0">
-                <a:pos x="csX13" y="csY13"/>
-              </a:cxn>
-              <a:cxn ang="0">
-                <a:pos x="csX14" y="csY14"/>
-              </a:cxn>
-              <a:cxn ang="0">
-                <a:pos x="csX15" y="csY15"/>
-              </a:cxn>
-              <a:cxn ang="0">
-                <a:pos x="csX16" y="csY16"/>
-              </a:cxn>
-              <a:cxn ang="0">
-                <a:pos x="csX17" y="csY17"/>
-              </a:cxn>
-              <a:cxn ang="0">
-                <a:pos x="csX18" y="csY18"/>
-              </a:cxn>
-              <a:cxn ang="0">
-                <a:pos x="csX19" y="csY19"/>
-              </a:cxn>
-              <a:cxn ang="0">
-                <a:pos x="csX20" y="csY20"/>
-              </a:cxn>
-              <a:cxn ang="0">
-                <a:pos x="csX21" y="csY21"/>
-              </a:cxn>
-              <a:cxn ang="0">
-                <a:pos x="csX22" y="csY22"/>
-              </a:cxn>
-              <a:cxn ang="0">
-                <a:pos x="csX23" y="csY23"/>
-              </a:cxn>
-              <a:cxn ang="0">
-                <a:pos x="csX24" y="csY24"/>
-              </a:cxn>
-              <a:cxn ang="0">
-                <a:pos x="csX25" y="csY25"/>
-              </a:cxn>
-              <a:cxn ang="0">
-                <a:pos x="csX26" y="csY26"/>
-              </a:cxn>
-              <a:cxn ang="0">
-                <a:pos x="csX27" y="csY27"/>
-              </a:cxn>
-              <a:cxn ang="0">
-                <a:pos x="csX28" y="csY28"/>
-              </a:cxn>
-              <a:cxn ang="0">
-                <a:pos x="csX29" y="csY29"/>
-              </a:cxn>
-              <a:cxn ang="0">
-                <a:pos x="csX30" y="csY30"/>
-              </a:cxn>
-              <a:cxn ang="0">
-                <a:pos x="csX31" y="csY31"/>
-              </a:cxn>
-              <a:cxn ang="0">
-                <a:pos x="csX32" y="csY32"/>
-              </a:cxn>
-              <a:cxn ang="0">
-                <a:pos x="csX33" y="csY33"/>
-              </a:cxn>
-              <a:cxn ang="0">
-                <a:pos x="csX34" y="csY34"/>
-              </a:cxn>
-              <a:cxn ang="0">
-                <a:pos x="csX35" y="csY35"/>
-              </a:cxn>
-              <a:cxn ang="0">
-                <a:pos x="csX36" y="csY36"/>
-              </a:cxn>
-              <a:cxn ang="0">
-                <a:pos x="csX37" y="csY37"/>
-              </a:cxn>
-              <a:cxn ang="0">
-                <a:pos x="csX38" y="csY38"/>
-              </a:cxn>
-              <a:cxn ang="0">
-                <a:pos x="csX39" y="csY39"/>
-              </a:cxn>
-              <a:cxn ang="0">
-                <a:pos x="csX40" y="csY40"/>
-              </a:cxn>
-              <a:cxn ang="0">
-                <a:pos x="csX41" y="csY41"/>
-              </a:cxn>
-            </a:cxnLst>
-            <a:rect l="l" t="t" r="r" b="b"/>
-            <a:pathLst>
-              <a:path w="1291905" h="1770078">
-                <a:moveTo>
-                  <a:pt x="0" y="0"/>
-                </a:moveTo>
-                <a:lnTo>
-                  <a:pt x="0" y="478173"/>
-                </a:lnTo>
-                <a:lnTo>
-                  <a:pt x="0" y="1291905"/>
-                </a:lnTo>
-                <a:lnTo>
-                  <a:pt x="0" y="1770078"/>
-                </a:lnTo>
-                <a:lnTo>
-                  <a:pt x="6123" y="1770078"/>
-                </a:lnTo>
-                <a:lnTo>
-                  <a:pt x="109381" y="1658008"/>
-                </a:lnTo>
-                <a:lnTo>
-                  <a:pt x="212639" y="1770078"/>
-                </a:lnTo>
-                <a:lnTo>
-                  <a:pt x="221976" y="1770078"/>
-                </a:lnTo>
-                <a:lnTo>
-                  <a:pt x="325234" y="1658008"/>
-                </a:lnTo>
-                <a:lnTo>
-                  <a:pt x="428492" y="1770078"/>
-                </a:lnTo>
-                <a:lnTo>
-                  <a:pt x="437829" y="1770078"/>
-                </a:lnTo>
-                <a:lnTo>
-                  <a:pt x="541087" y="1658008"/>
-                </a:lnTo>
-                <a:lnTo>
-                  <a:pt x="644346" y="1770078"/>
-                </a:lnTo>
-                <a:lnTo>
-                  <a:pt x="653683" y="1770078"/>
-                </a:lnTo>
-                <a:lnTo>
-                  <a:pt x="756941" y="1658008"/>
-                </a:lnTo>
-                <a:lnTo>
-                  <a:pt x="860199" y="1770078"/>
-                </a:lnTo>
-                <a:lnTo>
-                  <a:pt x="869536" y="1770078"/>
-                </a:lnTo>
-                <a:lnTo>
-                  <a:pt x="972794" y="1658008"/>
-                </a:lnTo>
-                <a:lnTo>
-                  <a:pt x="1076052" y="1770078"/>
-                </a:lnTo>
-                <a:lnTo>
-                  <a:pt x="1085389" y="1770078"/>
-                </a:lnTo>
-                <a:lnTo>
-                  <a:pt x="1188647" y="1658008"/>
-                </a:lnTo>
-                <a:lnTo>
-                  <a:pt x="1291905" y="1770078"/>
-                </a:lnTo>
-                <a:lnTo>
-                  <a:pt x="1291905" y="1291905"/>
-                </a:lnTo>
-                <a:lnTo>
-                  <a:pt x="1291905" y="478173"/>
-                </a:lnTo>
-                <a:lnTo>
-                  <a:pt x="1291905" y="0"/>
-                </a:lnTo>
-                <a:lnTo>
-                  <a:pt x="1188647" y="112070"/>
-                </a:lnTo>
-                <a:lnTo>
-                  <a:pt x="1085389" y="0"/>
-                </a:lnTo>
-                <a:lnTo>
-                  <a:pt x="1076052" y="0"/>
-                </a:lnTo>
-                <a:lnTo>
-                  <a:pt x="972794" y="112070"/>
-                </a:lnTo>
-                <a:lnTo>
-                  <a:pt x="869536" y="0"/>
-                </a:lnTo>
-                <a:lnTo>
-                  <a:pt x="860199" y="0"/>
-                </a:lnTo>
-                <a:lnTo>
-                  <a:pt x="756941" y="112070"/>
-                </a:lnTo>
-                <a:lnTo>
-                  <a:pt x="653683" y="0"/>
-                </a:lnTo>
-                <a:lnTo>
-                  <a:pt x="644346" y="0"/>
-                </a:lnTo>
-                <a:lnTo>
-                  <a:pt x="541087" y="112070"/>
-                </a:lnTo>
-                <a:lnTo>
-                  <a:pt x="437829" y="0"/>
-                </a:lnTo>
-                <a:lnTo>
-                  <a:pt x="428492" y="0"/>
-                </a:lnTo>
-                <a:lnTo>
-                  <a:pt x="325234" y="112070"/>
-                </a:lnTo>
-                <a:lnTo>
-                  <a:pt x="221976" y="0"/>
-                </a:lnTo>
-                <a:lnTo>
-                  <a:pt x="212639" y="0"/>
-                </a:lnTo>
-                <a:lnTo>
-                  <a:pt x="109381" y="112070"/>
-                </a:lnTo>
-                <a:lnTo>
-                  <a:pt x="6123" y="0"/>
-                </a:lnTo>
-                <a:close/>
-              </a:path>
-            </a:pathLst>
-          </a:custGeom>
-          <a:gradFill flip="none" rotWithShape="1">
-            <a:gsLst>
-              <a:gs pos="100000">
-                <a:schemeClr val="bg1">
-                  <a:alpha val="46000"/>
-                </a:schemeClr>
-              </a:gs>
-              <a:gs pos="0">
-                <a:schemeClr val="accent1">
-                  <a:tint val="23500"/>
-                  <a:satMod val="160000"/>
-                  <a:alpha val="0"/>
-                </a:schemeClr>
-              </a:gs>
-            </a:gsLst>
-            <a:path path="circle">
-              <a:fillToRect l="100000" t="100000"/>
-            </a:path>
-            <a:tileRect r="-100000" b="-100000"/>
-          </a:gradFill>
-          <a:ln>
-            <a:noFill/>
-          </a:ln>
-        </p:spPr>
-        <p:style>
-          <a:lnRef idx="2">
-            <a:schemeClr val="accent1">
-              <a:shade val="15000"/>
-            </a:schemeClr>
-          </a:lnRef>
-          <a:fillRef idx="1">
-            <a:schemeClr val="accent1"/>
-          </a:fillRef>
-          <a:effectRef idx="0">
-            <a:schemeClr val="accent1"/>
-          </a:effectRef>
-          <a:fontRef idx="minor">
-            <a:schemeClr val="lt1"/>
-          </a:fontRef>
-        </p:style>
-        <p:txBody>
-          <a:bodyPr wrap="square" rtlCol="0" anchor="ctr">
-            <a:noAutofit/>
-          </a:bodyPr>
-          <a:lstStyle/>
-          <a:p>
-            <a:pPr algn="ctr"/>
-            <a:endParaRPr lang="en-US"/>
-          </a:p>
-        </p:txBody>
-      </p:sp>
-      <p:sp>
-        <p:nvSpPr>
-          <p:cNvPr id="43" name="Freeform: Shape 42">
-            <a:extLst>
-              <a:ext uri="{FF2B5EF4-FFF2-40B4-BE49-F238E27FC236}">
-                <a16:creationId xmlns:a16="http://schemas.microsoft.com/office/drawing/2014/main" id="{C9ABB434-3C06-ED09-B083-3E5B8DA11418}"/>
-              </a:ext>
-            </a:extLst>
-          </p:cNvPr>
-          <p:cNvSpPr/>
-          <p:nvPr/>
-        </p:nvSpPr>
-        <p:spPr>
-          <a:xfrm>
-            <a:off x="3879920" y="4351606"/>
-            <a:ext cx="937260" cy="652164"/>
-          </a:xfrm>
-          <a:custGeom>
-            <a:avLst/>
-            <a:gdLst>
-              <a:gd name="csX0" fmla="*/ 885039 w 1770078"/>
-              <a:gd name="csY0" fmla="*/ 0 h 1291903"/>
-              <a:gd name="csX1" fmla="*/ 1752097 w 1770078"/>
-              <a:gd name="csY1" fmla="*/ 364364 h 1291903"/>
-              <a:gd name="csX2" fmla="*/ 1756386 w 1770078"/>
-              <a:gd name="csY2" fmla="*/ 378854 h 1291903"/>
-              <a:gd name="csX3" fmla="*/ 1770078 w 1770078"/>
-              <a:gd name="csY3" fmla="*/ 378854 h 1291903"/>
-              <a:gd name="csX4" fmla="*/ 1770078 w 1770078"/>
-              <a:gd name="csY4" fmla="*/ 456330 h 1291903"/>
-              <a:gd name="csX5" fmla="*/ 1770078 w 1770078"/>
-              <a:gd name="csY5" fmla="*/ 1291903 h 1291903"/>
-              <a:gd name="csX6" fmla="*/ 0 w 1770078"/>
-              <a:gd name="csY6" fmla="*/ 1291903 h 1291903"/>
-              <a:gd name="csX7" fmla="*/ 0 w 1770078"/>
-              <a:gd name="csY7" fmla="*/ 456330 h 1291903"/>
-              <a:gd name="csX8" fmla="*/ 0 w 1770078"/>
-              <a:gd name="csY8" fmla="*/ 378854 h 1291903"/>
-              <a:gd name="csX9" fmla="*/ 13692 w 1770078"/>
-              <a:gd name="csY9" fmla="*/ 378854 h 1291903"/>
-              <a:gd name="csX10" fmla="*/ 17981 w 1770078"/>
-              <a:gd name="csY10" fmla="*/ 364364 h 1291903"/>
-              <a:gd name="csX11" fmla="*/ 885039 w 1770078"/>
-              <a:gd name="csY11" fmla="*/ 0 h 1291903"/>
-              <a:gd name="csX0" fmla="*/ 885039 w 1770078"/>
-              <a:gd name="csY0" fmla="*/ 0 h 1291903"/>
-              <a:gd name="csX1" fmla="*/ 1752097 w 1770078"/>
-              <a:gd name="csY1" fmla="*/ 364364 h 1291903"/>
-              <a:gd name="csX2" fmla="*/ 1756386 w 1770078"/>
-              <a:gd name="csY2" fmla="*/ 378854 h 1291903"/>
-              <a:gd name="csX3" fmla="*/ 1770078 w 1770078"/>
-              <a:gd name="csY3" fmla="*/ 378854 h 1291903"/>
-              <a:gd name="csX4" fmla="*/ 1770078 w 1770078"/>
-              <a:gd name="csY4" fmla="*/ 456330 h 1291903"/>
-              <a:gd name="csX5" fmla="*/ 1770078 w 1770078"/>
-              <a:gd name="csY5" fmla="*/ 1291903 h 1291903"/>
-              <a:gd name="csX6" fmla="*/ 0 w 1770078"/>
-              <a:gd name="csY6" fmla="*/ 1291903 h 1291903"/>
-              <a:gd name="csX7" fmla="*/ 0 w 1770078"/>
-              <a:gd name="csY7" fmla="*/ 456330 h 1291903"/>
-              <a:gd name="csX8" fmla="*/ 13692 w 1770078"/>
-              <a:gd name="csY8" fmla="*/ 378854 h 1291903"/>
-              <a:gd name="csX9" fmla="*/ 17981 w 1770078"/>
-              <a:gd name="csY9" fmla="*/ 364364 h 1291903"/>
-              <a:gd name="csX10" fmla="*/ 885039 w 1770078"/>
-              <a:gd name="csY10" fmla="*/ 0 h 1291903"/>
-              <a:gd name="csX0" fmla="*/ 885039 w 1770078"/>
-              <a:gd name="csY0" fmla="*/ 0 h 1291903"/>
-              <a:gd name="csX1" fmla="*/ 1752097 w 1770078"/>
-              <a:gd name="csY1" fmla="*/ 364364 h 1291903"/>
-              <a:gd name="csX2" fmla="*/ 1756386 w 1770078"/>
-              <a:gd name="csY2" fmla="*/ 378854 h 1291903"/>
-              <a:gd name="csX3" fmla="*/ 1770078 w 1770078"/>
-              <a:gd name="csY3" fmla="*/ 378854 h 1291903"/>
-              <a:gd name="csX4" fmla="*/ 1770078 w 1770078"/>
-              <a:gd name="csY4" fmla="*/ 456330 h 1291903"/>
-              <a:gd name="csX5" fmla="*/ 1770078 w 1770078"/>
-              <a:gd name="csY5" fmla="*/ 1291903 h 1291903"/>
-              <a:gd name="csX6" fmla="*/ 0 w 1770078"/>
-              <a:gd name="csY6" fmla="*/ 1291903 h 1291903"/>
-              <a:gd name="csX7" fmla="*/ 0 w 1770078"/>
-              <a:gd name="csY7" fmla="*/ 456330 h 1291903"/>
-              <a:gd name="csX8" fmla="*/ 17981 w 1770078"/>
-              <a:gd name="csY8" fmla="*/ 364364 h 1291903"/>
-              <a:gd name="csX9" fmla="*/ 885039 w 1770078"/>
-              <a:gd name="csY9" fmla="*/ 0 h 1291903"/>
-              <a:gd name="csX0" fmla="*/ 885039 w 1770078"/>
-              <a:gd name="csY0" fmla="*/ 0 h 1291903"/>
-              <a:gd name="csX1" fmla="*/ 1752097 w 1770078"/>
-              <a:gd name="csY1" fmla="*/ 364364 h 1291903"/>
-              <a:gd name="csX2" fmla="*/ 1756386 w 1770078"/>
-              <a:gd name="csY2" fmla="*/ 378854 h 1291903"/>
-              <a:gd name="csX3" fmla="*/ 1770078 w 1770078"/>
-              <a:gd name="csY3" fmla="*/ 456330 h 1291903"/>
-              <a:gd name="csX4" fmla="*/ 1770078 w 1770078"/>
-              <a:gd name="csY4" fmla="*/ 1291903 h 1291903"/>
-              <a:gd name="csX5" fmla="*/ 0 w 1770078"/>
-              <a:gd name="csY5" fmla="*/ 1291903 h 1291903"/>
-              <a:gd name="csX6" fmla="*/ 0 w 1770078"/>
-              <a:gd name="csY6" fmla="*/ 456330 h 1291903"/>
-              <a:gd name="csX7" fmla="*/ 17981 w 1770078"/>
-              <a:gd name="csY7" fmla="*/ 364364 h 1291903"/>
-              <a:gd name="csX8" fmla="*/ 885039 w 1770078"/>
-              <a:gd name="csY8" fmla="*/ 0 h 1291903"/>
-              <a:gd name="csX0" fmla="*/ 885039 w 1770078"/>
-              <a:gd name="csY0" fmla="*/ 0 h 1291903"/>
-              <a:gd name="csX1" fmla="*/ 1752097 w 1770078"/>
-              <a:gd name="csY1" fmla="*/ 364364 h 1291903"/>
-              <a:gd name="csX2" fmla="*/ 1770078 w 1770078"/>
-              <a:gd name="csY2" fmla="*/ 456330 h 1291903"/>
-              <a:gd name="csX3" fmla="*/ 1770078 w 1770078"/>
-              <a:gd name="csY3" fmla="*/ 1291903 h 1291903"/>
-              <a:gd name="csX4" fmla="*/ 0 w 1770078"/>
-              <a:gd name="csY4" fmla="*/ 1291903 h 1291903"/>
-              <a:gd name="csX5" fmla="*/ 0 w 1770078"/>
-              <a:gd name="csY5" fmla="*/ 456330 h 1291903"/>
-              <a:gd name="csX6" fmla="*/ 17981 w 1770078"/>
-              <a:gd name="csY6" fmla="*/ 364364 h 1291903"/>
-              <a:gd name="csX7" fmla="*/ 885039 w 1770078"/>
-              <a:gd name="csY7" fmla="*/ 0 h 1291903"/>
-            </a:gdLst>
-            <a:ahLst/>
-            <a:cxnLst>
-              <a:cxn ang="0">
-                <a:pos x="csX0" y="csY0"/>
-              </a:cxn>
-              <a:cxn ang="0">
-                <a:pos x="csX1" y="csY1"/>
-              </a:cxn>
-              <a:cxn ang="0">
-                <a:pos x="csX2" y="csY2"/>
-              </a:cxn>
-              <a:cxn ang="0">
-                <a:pos x="csX3" y="csY3"/>
-              </a:cxn>
-              <a:cxn ang="0">
-                <a:pos x="csX4" y="csY4"/>
-              </a:cxn>
-              <a:cxn ang="0">
-                <a:pos x="csX5" y="csY5"/>
-              </a:cxn>
-              <a:cxn ang="0">
-                <a:pos x="csX6" y="csY6"/>
-              </a:cxn>
-              <a:cxn ang="0">
-                <a:pos x="csX7" y="csY7"/>
-              </a:cxn>
-            </a:cxnLst>
-            <a:rect l="l" t="t" r="r" b="b"/>
-            <a:pathLst>
-              <a:path w="1770078" h="1291903">
-                <a:moveTo>
-                  <a:pt x="885039" y="0"/>
-                </a:moveTo>
-                <a:cubicBezTo>
-                  <a:pt x="1312734" y="0"/>
-                  <a:pt x="1669571" y="156422"/>
-                  <a:pt x="1752097" y="364364"/>
-                </a:cubicBezTo>
-                <a:lnTo>
-                  <a:pt x="1770078" y="456330"/>
-                </a:lnTo>
-                <a:lnTo>
-                  <a:pt x="1770078" y="1291903"/>
-                </a:lnTo>
-                <a:lnTo>
-                  <a:pt x="0" y="1291903"/>
-                </a:lnTo>
-                <a:lnTo>
-                  <a:pt x="0" y="456330"/>
-                </a:lnTo>
-                <a:lnTo>
-                  <a:pt x="17981" y="364364"/>
-                </a:lnTo>
-                <a:cubicBezTo>
-                  <a:pt x="100507" y="156422"/>
-                  <a:pt x="457344" y="0"/>
-                  <a:pt x="885039" y="0"/>
-                </a:cubicBezTo>
-                <a:close/>
-              </a:path>
-            </a:pathLst>
-          </a:custGeom>
-          <a:gradFill flip="none" rotWithShape="1">
-            <a:gsLst>
-              <a:gs pos="100000">
-                <a:schemeClr val="bg1">
-                  <a:alpha val="46000"/>
-                </a:schemeClr>
-              </a:gs>
-              <a:gs pos="0">
-                <a:schemeClr val="accent1">
-                  <a:tint val="23500"/>
-                  <a:satMod val="160000"/>
-                  <a:alpha val="0"/>
-                </a:schemeClr>
-              </a:gs>
-            </a:gsLst>
-            <a:path path="circle">
-              <a:fillToRect l="100000" t="100000"/>
-            </a:path>
-            <a:tileRect r="-100000" b="-100000"/>
-          </a:gradFill>
-          <a:ln>
-            <a:noFill/>
-          </a:ln>
-        </p:spPr>
-        <p:style>
-          <a:lnRef idx="2">
-            <a:schemeClr val="accent1">
-              <a:shade val="15000"/>
-            </a:schemeClr>
-          </a:lnRef>
-          <a:fillRef idx="1">
-            <a:schemeClr val="accent1"/>
-          </a:fillRef>
-          <a:effectRef idx="0">
-            <a:schemeClr val="accent1"/>
-          </a:effectRef>
-          <a:fontRef idx="minor">
-            <a:schemeClr val="lt1"/>
-          </a:fontRef>
-        </p:style>
-        <p:txBody>
-          <a:bodyPr wrap="square" rtlCol="0" anchor="ctr">
-            <a:noAutofit/>
-          </a:bodyPr>
-          <a:lstStyle/>
-          <a:p>
-            <a:pPr algn="ctr"/>
-            <a:endParaRPr lang="en-US"/>
-          </a:p>
-        </p:txBody>
-      </p:sp>
-      <p:sp>
-        <p:nvSpPr>
-          <p:cNvPr id="44" name="Freeform: Shape 43">
-            <a:extLst>
-              <a:ext uri="{FF2B5EF4-FFF2-40B4-BE49-F238E27FC236}">
-                <a16:creationId xmlns:a16="http://schemas.microsoft.com/office/drawing/2014/main" id="{9F143377-1F13-7440-784E-D6B996921272}"/>
-              </a:ext>
-            </a:extLst>
-          </p:cNvPr>
-          <p:cNvSpPr/>
-          <p:nvPr/>
-        </p:nvSpPr>
-        <p:spPr>
-          <a:xfrm>
-            <a:off x="6235672" y="4351606"/>
-            <a:ext cx="937260" cy="652165"/>
-          </a:xfrm>
-          <a:custGeom>
-            <a:avLst/>
-            <a:gdLst>
-              <a:gd name="csX0" fmla="*/ 0 w 937260"/>
-              <a:gd name="csY0" fmla="*/ 0 h 652165"/>
-              <a:gd name="csX1" fmla="*/ 179 w 937260"/>
-              <a:gd name="csY1" fmla="*/ 0 h 652165"/>
-              <a:gd name="csX2" fmla="*/ 116373 w 937260"/>
-              <a:gd name="csY2" fmla="*/ 31552 h 652165"/>
-              <a:gd name="csX3" fmla="*/ 468630 w 937260"/>
-              <a:gd name="csY3" fmla="*/ 67131 h 652165"/>
-              <a:gd name="csX4" fmla="*/ 820887 w 937260"/>
-              <a:gd name="csY4" fmla="*/ 31552 h 652165"/>
-              <a:gd name="csX5" fmla="*/ 937081 w 937260"/>
-              <a:gd name="csY5" fmla="*/ 0 h 652165"/>
-              <a:gd name="csX6" fmla="*/ 937260 w 937260"/>
-              <a:gd name="csY6" fmla="*/ 0 h 652165"/>
-              <a:gd name="csX7" fmla="*/ 937260 w 937260"/>
-              <a:gd name="csY7" fmla="*/ 652165 h 652165"/>
-              <a:gd name="csX8" fmla="*/ 937078 w 937260"/>
-              <a:gd name="csY8" fmla="*/ 652165 h 652165"/>
-              <a:gd name="csX9" fmla="*/ 820887 w 937260"/>
-              <a:gd name="csY9" fmla="*/ 620614 h 652165"/>
-              <a:gd name="csX10" fmla="*/ 468630 w 937260"/>
-              <a:gd name="csY10" fmla="*/ 585035 h 652165"/>
-              <a:gd name="csX11" fmla="*/ 116373 w 937260"/>
-              <a:gd name="csY11" fmla="*/ 620614 h 652165"/>
-              <a:gd name="csX12" fmla="*/ 183 w 937260"/>
-              <a:gd name="csY12" fmla="*/ 652165 h 652165"/>
-              <a:gd name="csX13" fmla="*/ 0 w 937260"/>
-              <a:gd name="csY13" fmla="*/ 652165 h 652165"/>
-            </a:gdLst>
-            <a:ahLst/>
-            <a:cxnLst>
-              <a:cxn ang="0">
-                <a:pos x="csX0" y="csY0"/>
-              </a:cxn>
-              <a:cxn ang="0">
-                <a:pos x="csX1" y="csY1"/>
-              </a:cxn>
-              <a:cxn ang="0">
-                <a:pos x="csX2" y="csY2"/>
-              </a:cxn>
-              <a:cxn ang="0">
-                <a:pos x="csX3" y="csY3"/>
-              </a:cxn>
-              <a:cxn ang="0">
-                <a:pos x="csX4" y="csY4"/>
-              </a:cxn>
-              <a:cxn ang="0">
-                <a:pos x="csX5" y="csY5"/>
-              </a:cxn>
-              <a:cxn ang="0">
-                <a:pos x="csX6" y="csY6"/>
-              </a:cxn>
-              <a:cxn ang="0">
-                <a:pos x="csX7" y="csY7"/>
-              </a:cxn>
-              <a:cxn ang="0">
-                <a:pos x="csX8" y="csY8"/>
-              </a:cxn>
-              <a:cxn ang="0">
-                <a:pos x="csX9" y="csY9"/>
-              </a:cxn>
-              <a:cxn ang="0">
-                <a:pos x="csX10" y="csY10"/>
-              </a:cxn>
-              <a:cxn ang="0">
-                <a:pos x="csX11" y="csY11"/>
-              </a:cxn>
-              <a:cxn ang="0">
-                <a:pos x="csX12" y="csY12"/>
-              </a:cxn>
-              <a:cxn ang="0">
-                <a:pos x="csX13" y="csY13"/>
-              </a:cxn>
-            </a:cxnLst>
-            <a:rect l="l" t="t" r="r" b="b"/>
-            <a:pathLst>
-              <a:path w="937260" h="652165">
-                <a:moveTo>
-                  <a:pt x="0" y="0"/>
-                </a:moveTo>
-                <a:lnTo>
-                  <a:pt x="179" y="0"/>
-                </a:lnTo>
-                <a:lnTo>
-                  <a:pt x="116373" y="31552"/>
-                </a:lnTo>
-                <a:cubicBezTo>
-                  <a:pt x="224643" y="54462"/>
-                  <a:pt x="343679" y="67131"/>
-                  <a:pt x="468630" y="67131"/>
-                </a:cubicBezTo>
-                <a:cubicBezTo>
-                  <a:pt x="593581" y="67131"/>
-                  <a:pt x="712618" y="54462"/>
-                  <a:pt x="820887" y="31552"/>
-                </a:cubicBezTo>
-                <a:lnTo>
-                  <a:pt x="937081" y="0"/>
-                </a:lnTo>
-                <a:lnTo>
-                  <a:pt x="937260" y="0"/>
-                </a:lnTo>
-                <a:lnTo>
-                  <a:pt x="937260" y="652165"/>
-                </a:lnTo>
-                <a:lnTo>
-                  <a:pt x="937078" y="652165"/>
-                </a:lnTo>
-                <a:lnTo>
-                  <a:pt x="820887" y="620614"/>
-                </a:lnTo>
-                <a:cubicBezTo>
-                  <a:pt x="712618" y="597704"/>
-                  <a:pt x="593581" y="585035"/>
-                  <a:pt x="468630" y="585035"/>
-                </a:cubicBezTo>
-                <a:cubicBezTo>
-                  <a:pt x="343679" y="585035"/>
-                  <a:pt x="224643" y="597704"/>
-                  <a:pt x="116373" y="620614"/>
-                </a:cubicBezTo>
-                <a:lnTo>
-                  <a:pt x="183" y="652165"/>
-                </a:lnTo>
-                <a:lnTo>
-                  <a:pt x="0" y="652165"/>
-                </a:lnTo>
-                <a:close/>
-              </a:path>
-            </a:pathLst>
-          </a:custGeom>
-          <a:gradFill flip="none" rotWithShape="1">
-            <a:gsLst>
-              <a:gs pos="100000">
-                <a:schemeClr val="bg1">
-                  <a:alpha val="46000"/>
-                </a:schemeClr>
-              </a:gs>
-              <a:gs pos="0">
-                <a:schemeClr val="accent1">
-                  <a:tint val="23500"/>
-                  <a:satMod val="160000"/>
-                  <a:alpha val="0"/>
-                </a:schemeClr>
-              </a:gs>
-            </a:gsLst>
-            <a:path path="circle">
-              <a:fillToRect l="100000" t="100000"/>
-            </a:path>
-            <a:tileRect r="-100000" b="-100000"/>
-          </a:gradFill>
-          <a:ln>
-            <a:noFill/>
-          </a:ln>
-        </p:spPr>
-        <p:style>
-          <a:lnRef idx="2">
-            <a:schemeClr val="accent1">
-              <a:shade val="15000"/>
-            </a:schemeClr>
-          </a:lnRef>
-          <a:fillRef idx="1">
-            <a:schemeClr val="accent1"/>
-          </a:fillRef>
-          <a:effectRef idx="0">
-            <a:schemeClr val="accent1"/>
-          </a:effectRef>
-          <a:fontRef idx="minor">
-            <a:schemeClr val="lt1"/>
-          </a:fontRef>
-        </p:style>
-        <p:txBody>
-          <a:bodyPr wrap="square" rtlCol="0" anchor="ctr">
-            <a:noAutofit/>
-          </a:bodyPr>
-          <a:lstStyle/>
-          <a:p>
-            <a:pPr algn="ctr"/>
-            <a:endParaRPr lang="en-US"/>
-          </a:p>
-        </p:txBody>
-      </p:sp>
-      <p:sp>
-        <p:nvSpPr>
-          <p:cNvPr id="46" name="Rectangle: Rounded Corners 45">
-            <a:extLst>
-              <a:ext uri="{FF2B5EF4-FFF2-40B4-BE49-F238E27FC236}">
-                <a16:creationId xmlns:a16="http://schemas.microsoft.com/office/drawing/2014/main" id="{B7556BA3-B4F7-C145-8E04-7821A3972EFE}"/>
-              </a:ext>
-            </a:extLst>
-          </p:cNvPr>
-          <p:cNvSpPr/>
-          <p:nvPr/>
-        </p:nvSpPr>
-        <p:spPr>
-          <a:xfrm>
-            <a:off x="2539535" y="4351605"/>
-            <a:ext cx="937260" cy="652166"/>
-          </a:xfrm>
-          <a:prstGeom prst="roundRect">
-            <a:avLst/>
-          </a:prstGeom>
-          <a:gradFill flip="none" rotWithShape="1">
-            <a:gsLst>
-              <a:gs pos="78000">
-                <a:schemeClr val="bg1">
-                  <a:alpha val="0"/>
-                </a:schemeClr>
-              </a:gs>
-              <a:gs pos="0">
-                <a:srgbClr val="7030A0"/>
-              </a:gs>
-            </a:gsLst>
-            <a:path path="circle">
-              <a:fillToRect l="100000" b="100000"/>
-            </a:path>
-            <a:tileRect t="-100000" r="-100000"/>
-          </a:gradFill>
-          <a:ln>
-            <a:noFill/>
-          </a:ln>
-        </p:spPr>
-        <p:style>
-          <a:lnRef idx="2">
-            <a:schemeClr val="accent1">
-              <a:shade val="15000"/>
-            </a:schemeClr>
-          </a:lnRef>
-          <a:fillRef idx="1">
-            <a:schemeClr val="accent1"/>
-          </a:fillRef>
-          <a:effectRef idx="0">
-            <a:schemeClr val="accent1"/>
-          </a:effectRef>
-          <a:fontRef idx="minor">
-            <a:schemeClr val="lt1"/>
-          </a:fontRef>
-        </p:style>
-        <p:txBody>
-          <a:bodyPr rtlCol="0" anchor="ctr"/>
-          <a:lstStyle/>
-          <a:p>
-            <a:pPr algn="ctr"/>
-            <a:endParaRPr lang="en-US"/>
-          </a:p>
-        </p:txBody>
-      </p:sp>
-      <p:sp>
-        <p:nvSpPr>
-          <p:cNvPr id="47" name="Freeform: Shape 46">
-            <a:extLst>
-              <a:ext uri="{FF2B5EF4-FFF2-40B4-BE49-F238E27FC236}">
-                <a16:creationId xmlns:a16="http://schemas.microsoft.com/office/drawing/2014/main" id="{C283FF18-3963-DCCC-A7FA-A8FC208C87AE}"/>
-              </a:ext>
-            </a:extLst>
-          </p:cNvPr>
-          <p:cNvSpPr/>
-          <p:nvPr/>
-        </p:nvSpPr>
-        <p:spPr>
-          <a:xfrm>
-            <a:off x="7698281" y="4351606"/>
-            <a:ext cx="932818" cy="652165"/>
-          </a:xfrm>
-          <a:custGeom>
-            <a:avLst/>
-            <a:gdLst>
-              <a:gd name="csX0" fmla="*/ 0 w 1761688"/>
-              <a:gd name="csY0" fmla="*/ 0 h 1291904"/>
-              <a:gd name="csX1" fmla="*/ 75501 w 1761688"/>
-              <a:gd name="csY1" fmla="*/ 0 h 1291904"/>
-              <a:gd name="csX2" fmla="*/ 1686187 w 1761688"/>
-              <a:gd name="csY2" fmla="*/ 0 h 1291904"/>
-              <a:gd name="csX3" fmla="*/ 1761688 w 1761688"/>
-              <a:gd name="csY3" fmla="*/ 0 h 1291904"/>
-              <a:gd name="csX4" fmla="*/ 1761688 w 1761688"/>
-              <a:gd name="csY4" fmla="*/ 102765 h 1291904"/>
-              <a:gd name="csX5" fmla="*/ 1686187 w 1761688"/>
-              <a:gd name="csY5" fmla="*/ 102765 h 1291904"/>
-              <a:gd name="csX6" fmla="*/ 1686187 w 1761688"/>
-              <a:gd name="csY6" fmla="*/ 1189139 h 1291904"/>
-              <a:gd name="csX7" fmla="*/ 1761688 w 1761688"/>
-              <a:gd name="csY7" fmla="*/ 1189139 h 1291904"/>
-              <a:gd name="csX8" fmla="*/ 1761688 w 1761688"/>
-              <a:gd name="csY8" fmla="*/ 1291904 h 1291904"/>
-              <a:gd name="csX9" fmla="*/ 1686187 w 1761688"/>
-              <a:gd name="csY9" fmla="*/ 1291904 h 1291904"/>
-              <a:gd name="csX10" fmla="*/ 75501 w 1761688"/>
-              <a:gd name="csY10" fmla="*/ 1291904 h 1291904"/>
-              <a:gd name="csX11" fmla="*/ 0 w 1761688"/>
-              <a:gd name="csY11" fmla="*/ 1291904 h 1291904"/>
-              <a:gd name="csX12" fmla="*/ 0 w 1761688"/>
-              <a:gd name="csY12" fmla="*/ 1189139 h 1291904"/>
-              <a:gd name="csX13" fmla="*/ 75501 w 1761688"/>
-              <a:gd name="csY13" fmla="*/ 1189139 h 1291904"/>
-              <a:gd name="csX14" fmla="*/ 75501 w 1761688"/>
-              <a:gd name="csY14" fmla="*/ 102765 h 1291904"/>
-              <a:gd name="csX15" fmla="*/ 0 w 1761688"/>
-              <a:gd name="csY15" fmla="*/ 102765 h 1291904"/>
-            </a:gdLst>
-            <a:ahLst/>
-            <a:cxnLst>
-              <a:cxn ang="0">
-                <a:pos x="csX0" y="csY0"/>
-              </a:cxn>
-              <a:cxn ang="0">
-                <a:pos x="csX1" y="csY1"/>
-              </a:cxn>
-              <a:cxn ang="0">
-                <a:pos x="csX2" y="csY2"/>
-              </a:cxn>
-              <a:cxn ang="0">
-                <a:pos x="csX3" y="csY3"/>
-              </a:cxn>
-              <a:cxn ang="0">
-                <a:pos x="csX4" y="csY4"/>
-              </a:cxn>
-              <a:cxn ang="0">
-                <a:pos x="csX5" y="csY5"/>
-              </a:cxn>
-              <a:cxn ang="0">
-                <a:pos x="csX6" y="csY6"/>
-              </a:cxn>
-              <a:cxn ang="0">
-                <a:pos x="csX7" y="csY7"/>
-              </a:cxn>
-              <a:cxn ang="0">
-                <a:pos x="csX8" y="csY8"/>
-              </a:cxn>
-              <a:cxn ang="0">
-                <a:pos x="csX9" y="csY9"/>
-              </a:cxn>
-              <a:cxn ang="0">
-                <a:pos x="csX10" y="csY10"/>
-              </a:cxn>
-              <a:cxn ang="0">
-                <a:pos x="csX11" y="csY11"/>
-              </a:cxn>
-              <a:cxn ang="0">
-                <a:pos x="csX12" y="csY12"/>
-              </a:cxn>
-              <a:cxn ang="0">
-                <a:pos x="csX13" y="csY13"/>
-              </a:cxn>
-              <a:cxn ang="0">
-                <a:pos x="csX14" y="csY14"/>
-              </a:cxn>
-              <a:cxn ang="0">
-                <a:pos x="csX15" y="csY15"/>
-              </a:cxn>
-            </a:cxnLst>
-            <a:rect l="l" t="t" r="r" b="b"/>
-            <a:pathLst>
-              <a:path w="1761688" h="1291904">
-                <a:moveTo>
-                  <a:pt x="0" y="0"/>
-                </a:moveTo>
-                <a:lnTo>
-                  <a:pt x="75501" y="0"/>
-                </a:lnTo>
-                <a:lnTo>
-                  <a:pt x="1686187" y="0"/>
-                </a:lnTo>
-                <a:lnTo>
-                  <a:pt x="1761688" y="0"/>
-                </a:lnTo>
-                <a:lnTo>
-                  <a:pt x="1761688" y="102765"/>
-                </a:lnTo>
-                <a:lnTo>
-                  <a:pt x="1686187" y="102765"/>
-                </a:lnTo>
-                <a:lnTo>
-                  <a:pt x="1686187" y="1189139"/>
-                </a:lnTo>
-                <a:lnTo>
-                  <a:pt x="1761688" y="1189139"/>
-                </a:lnTo>
-                <a:lnTo>
-                  <a:pt x="1761688" y="1291904"/>
-                </a:lnTo>
-                <a:lnTo>
-                  <a:pt x="1686187" y="1291904"/>
-                </a:lnTo>
-                <a:lnTo>
-                  <a:pt x="75501" y="1291904"/>
-                </a:lnTo>
-                <a:lnTo>
-                  <a:pt x="0" y="1291904"/>
-                </a:lnTo>
-                <a:lnTo>
-                  <a:pt x="0" y="1189139"/>
-                </a:lnTo>
-                <a:lnTo>
-                  <a:pt x="75501" y="1189139"/>
-                </a:lnTo>
-                <a:lnTo>
-                  <a:pt x="75501" y="102765"/>
-                </a:lnTo>
-                <a:lnTo>
-                  <a:pt x="0" y="102765"/>
-                </a:lnTo>
-                <a:close/>
-              </a:path>
-            </a:pathLst>
-          </a:custGeom>
-          <a:gradFill flip="none" rotWithShape="1">
-            <a:gsLst>
-              <a:gs pos="76000">
-                <a:schemeClr val="bg1">
-                  <a:alpha val="0"/>
-                </a:schemeClr>
-              </a:gs>
-              <a:gs pos="24000">
-                <a:srgbClr val="FFC000"/>
-              </a:gs>
-            </a:gsLst>
-            <a:path path="circle">
-              <a:fillToRect l="100000" b="100000"/>
-            </a:path>
-            <a:tileRect t="-100000" r="-100000"/>
-          </a:gradFill>
-          <a:ln>
-            <a:noFill/>
-          </a:ln>
-        </p:spPr>
-        <p:style>
-          <a:lnRef idx="2">
-            <a:schemeClr val="accent1">
-              <a:shade val="15000"/>
-            </a:schemeClr>
-          </a:lnRef>
-          <a:fillRef idx="1">
-            <a:schemeClr val="accent1"/>
-          </a:fillRef>
-          <a:effectRef idx="0">
-            <a:schemeClr val="accent1"/>
-          </a:effectRef>
-          <a:fontRef idx="minor">
-            <a:schemeClr val="lt1"/>
-          </a:fontRef>
-        </p:style>
-        <p:txBody>
-          <a:bodyPr wrap="square" rtlCol="0" anchor="ctr">
-            <a:noAutofit/>
-          </a:bodyPr>
-          <a:lstStyle/>
-          <a:p>
-            <a:pPr algn="ctr"/>
-            <a:endParaRPr lang="en-US"/>
-          </a:p>
-        </p:txBody>
-      </p:sp>
-      <p:sp>
-        <p:nvSpPr>
-          <p:cNvPr id="48" name="Freeform: Shape 47">
-            <a:extLst>
-              <a:ext uri="{FF2B5EF4-FFF2-40B4-BE49-F238E27FC236}">
-                <a16:creationId xmlns:a16="http://schemas.microsoft.com/office/drawing/2014/main" id="{86095542-DB0B-13A3-41B4-1E9C805B1DE8}"/>
-              </a:ext>
-            </a:extLst>
-          </p:cNvPr>
-          <p:cNvSpPr/>
-          <p:nvPr/>
-        </p:nvSpPr>
-        <p:spPr>
-          <a:xfrm rot="16200000" flipV="1">
-            <a:off x="5198786" y="4209059"/>
-            <a:ext cx="652164" cy="937260"/>
-          </a:xfrm>
-          <a:custGeom>
-            <a:avLst/>
-            <a:gdLst>
-              <a:gd name="csX0" fmla="*/ 0 w 1291905"/>
-              <a:gd name="csY0" fmla="*/ 0 h 1770078"/>
-              <a:gd name="csX1" fmla="*/ 0 w 1291905"/>
-              <a:gd name="csY1" fmla="*/ 478173 h 1770078"/>
-              <a:gd name="csX2" fmla="*/ 0 w 1291905"/>
-              <a:gd name="csY2" fmla="*/ 1291905 h 1770078"/>
-              <a:gd name="csX3" fmla="*/ 0 w 1291905"/>
-              <a:gd name="csY3" fmla="*/ 1770078 h 1770078"/>
-              <a:gd name="csX4" fmla="*/ 6123 w 1291905"/>
-              <a:gd name="csY4" fmla="*/ 1770078 h 1770078"/>
-              <a:gd name="csX5" fmla="*/ 109381 w 1291905"/>
-              <a:gd name="csY5" fmla="*/ 1658008 h 1770078"/>
-              <a:gd name="csX6" fmla="*/ 212639 w 1291905"/>
-              <a:gd name="csY6" fmla="*/ 1770078 h 1770078"/>
-              <a:gd name="csX7" fmla="*/ 221976 w 1291905"/>
-              <a:gd name="csY7" fmla="*/ 1770078 h 1770078"/>
-              <a:gd name="csX8" fmla="*/ 325234 w 1291905"/>
-              <a:gd name="csY8" fmla="*/ 1658008 h 1770078"/>
-              <a:gd name="csX9" fmla="*/ 428492 w 1291905"/>
-              <a:gd name="csY9" fmla="*/ 1770078 h 1770078"/>
-              <a:gd name="csX10" fmla="*/ 437829 w 1291905"/>
-              <a:gd name="csY10" fmla="*/ 1770078 h 1770078"/>
-              <a:gd name="csX11" fmla="*/ 541087 w 1291905"/>
-              <a:gd name="csY11" fmla="*/ 1658008 h 1770078"/>
-              <a:gd name="csX12" fmla="*/ 644346 w 1291905"/>
-              <a:gd name="csY12" fmla="*/ 1770078 h 1770078"/>
-              <a:gd name="csX13" fmla="*/ 653683 w 1291905"/>
-              <a:gd name="csY13" fmla="*/ 1770078 h 1770078"/>
-              <a:gd name="csX14" fmla="*/ 756941 w 1291905"/>
-              <a:gd name="csY14" fmla="*/ 1658008 h 1770078"/>
-              <a:gd name="csX15" fmla="*/ 860199 w 1291905"/>
-              <a:gd name="csY15" fmla="*/ 1770078 h 1770078"/>
-              <a:gd name="csX16" fmla="*/ 869536 w 1291905"/>
-              <a:gd name="csY16" fmla="*/ 1770078 h 1770078"/>
-              <a:gd name="csX17" fmla="*/ 972794 w 1291905"/>
-              <a:gd name="csY17" fmla="*/ 1658008 h 1770078"/>
-              <a:gd name="csX18" fmla="*/ 1076052 w 1291905"/>
-              <a:gd name="csY18" fmla="*/ 1770078 h 1770078"/>
-              <a:gd name="csX19" fmla="*/ 1085389 w 1291905"/>
-              <a:gd name="csY19" fmla="*/ 1770078 h 1770078"/>
-              <a:gd name="csX20" fmla="*/ 1188647 w 1291905"/>
-              <a:gd name="csY20" fmla="*/ 1658008 h 1770078"/>
-              <a:gd name="csX21" fmla="*/ 1291905 w 1291905"/>
-              <a:gd name="csY21" fmla="*/ 1770078 h 1770078"/>
-              <a:gd name="csX22" fmla="*/ 1291905 w 1291905"/>
-              <a:gd name="csY22" fmla="*/ 1291905 h 1770078"/>
-              <a:gd name="csX23" fmla="*/ 1291905 w 1291905"/>
-              <a:gd name="csY23" fmla="*/ 478173 h 1770078"/>
-              <a:gd name="csX24" fmla="*/ 1291905 w 1291905"/>
-              <a:gd name="csY24" fmla="*/ 0 h 1770078"/>
-              <a:gd name="csX25" fmla="*/ 1188647 w 1291905"/>
-              <a:gd name="csY25" fmla="*/ 112070 h 1770078"/>
-              <a:gd name="csX26" fmla="*/ 1085389 w 1291905"/>
-              <a:gd name="csY26" fmla="*/ 0 h 1770078"/>
-              <a:gd name="csX27" fmla="*/ 1076052 w 1291905"/>
-              <a:gd name="csY27" fmla="*/ 0 h 1770078"/>
-              <a:gd name="csX28" fmla="*/ 972794 w 1291905"/>
-              <a:gd name="csY28" fmla="*/ 112070 h 1770078"/>
-              <a:gd name="csX29" fmla="*/ 869536 w 1291905"/>
-              <a:gd name="csY29" fmla="*/ 0 h 1770078"/>
-              <a:gd name="csX30" fmla="*/ 860199 w 1291905"/>
-              <a:gd name="csY30" fmla="*/ 0 h 1770078"/>
-              <a:gd name="csX31" fmla="*/ 756941 w 1291905"/>
-              <a:gd name="csY31" fmla="*/ 112070 h 1770078"/>
-              <a:gd name="csX32" fmla="*/ 653683 w 1291905"/>
-              <a:gd name="csY32" fmla="*/ 0 h 1770078"/>
-              <a:gd name="csX33" fmla="*/ 644346 w 1291905"/>
-              <a:gd name="csY33" fmla="*/ 0 h 1770078"/>
-              <a:gd name="csX34" fmla="*/ 541087 w 1291905"/>
-              <a:gd name="csY34" fmla="*/ 112070 h 1770078"/>
-              <a:gd name="csX35" fmla="*/ 437829 w 1291905"/>
-              <a:gd name="csY35" fmla="*/ 0 h 1770078"/>
-              <a:gd name="csX36" fmla="*/ 428492 w 1291905"/>
-              <a:gd name="csY36" fmla="*/ 0 h 1770078"/>
-              <a:gd name="csX37" fmla="*/ 325234 w 1291905"/>
-              <a:gd name="csY37" fmla="*/ 112070 h 1770078"/>
-              <a:gd name="csX38" fmla="*/ 221976 w 1291905"/>
-              <a:gd name="csY38" fmla="*/ 0 h 1770078"/>
-              <a:gd name="csX39" fmla="*/ 212639 w 1291905"/>
-              <a:gd name="csY39" fmla="*/ 0 h 1770078"/>
-              <a:gd name="csX40" fmla="*/ 109381 w 1291905"/>
-              <a:gd name="csY40" fmla="*/ 112070 h 1770078"/>
-              <a:gd name="csX41" fmla="*/ 6123 w 1291905"/>
-              <a:gd name="csY41" fmla="*/ 0 h 1770078"/>
-            </a:gdLst>
-            <a:ahLst/>
-            <a:cxnLst>
-              <a:cxn ang="0">
-                <a:pos x="csX0" y="csY0"/>
-              </a:cxn>
-              <a:cxn ang="0">
-                <a:pos x="csX1" y="csY1"/>
-              </a:cxn>
-              <a:cxn ang="0">
-                <a:pos x="csX2" y="csY2"/>
-              </a:cxn>
-              <a:cxn ang="0">
-                <a:pos x="csX3" y="csY3"/>
-              </a:cxn>
-              <a:cxn ang="0">
-                <a:pos x="csX4" y="csY4"/>
-              </a:cxn>
-              <a:cxn ang="0">
-                <a:pos x="csX5" y="csY5"/>
-              </a:cxn>
-              <a:cxn ang="0">
-                <a:pos x="csX6" y="csY6"/>
-              </a:cxn>
-              <a:cxn ang="0">
-                <a:pos x="csX7" y="csY7"/>
-              </a:cxn>
-              <a:cxn ang="0">
-                <a:pos x="csX8" y="csY8"/>
-              </a:cxn>
-              <a:cxn ang="0">
-                <a:pos x="csX9" y="csY9"/>
-              </a:cxn>
-              <a:cxn ang="0">
-                <a:pos x="csX10" y="csY10"/>
-              </a:cxn>
-              <a:cxn ang="0">
-                <a:pos x="csX11" y="csY11"/>
-              </a:cxn>
-              <a:cxn ang="0">
-                <a:pos x="csX12" y="csY12"/>
-              </a:cxn>
-              <a:cxn ang="0">
-                <a:pos x="csX13" y="csY13"/>
-              </a:cxn>
-              <a:cxn ang="0">
-                <a:pos x="csX14" y="csY14"/>
-              </a:cxn>
-              <a:cxn ang="0">
-                <a:pos x="csX15" y="csY15"/>
-              </a:cxn>
-              <a:cxn ang="0">
-                <a:pos x="csX16" y="csY16"/>
-              </a:cxn>
-              <a:cxn ang="0">
-                <a:pos x="csX17" y="csY17"/>
-              </a:cxn>
-              <a:cxn ang="0">
-                <a:pos x="csX18" y="csY18"/>
-              </a:cxn>
-              <a:cxn ang="0">
-                <a:pos x="csX19" y="csY19"/>
-              </a:cxn>
-              <a:cxn ang="0">
-                <a:pos x="csX20" y="csY20"/>
-              </a:cxn>
-              <a:cxn ang="0">
-                <a:pos x="csX21" y="csY21"/>
-              </a:cxn>
-              <a:cxn ang="0">
-                <a:pos x="csX22" y="csY22"/>
-              </a:cxn>
-              <a:cxn ang="0">
-                <a:pos x="csX23" y="csY23"/>
-              </a:cxn>
-              <a:cxn ang="0">
-                <a:pos x="csX24" y="csY24"/>
-              </a:cxn>
-              <a:cxn ang="0">
-                <a:pos x="csX25" y="csY25"/>
-              </a:cxn>
-              <a:cxn ang="0">
-                <a:pos x="csX26" y="csY26"/>
-              </a:cxn>
-              <a:cxn ang="0">
-                <a:pos x="csX27" y="csY27"/>
-              </a:cxn>
-              <a:cxn ang="0">
-                <a:pos x="csX28" y="csY28"/>
-              </a:cxn>
-              <a:cxn ang="0">
-                <a:pos x="csX29" y="csY29"/>
-              </a:cxn>
-              <a:cxn ang="0">
-                <a:pos x="csX30" y="csY30"/>
-              </a:cxn>
-              <a:cxn ang="0">
-                <a:pos x="csX31" y="csY31"/>
-              </a:cxn>
-              <a:cxn ang="0">
-                <a:pos x="csX32" y="csY32"/>
-              </a:cxn>
-              <a:cxn ang="0">
-                <a:pos x="csX33" y="csY33"/>
-              </a:cxn>
-              <a:cxn ang="0">
-                <a:pos x="csX34" y="csY34"/>
-              </a:cxn>
-              <a:cxn ang="0">
-                <a:pos x="csX35" y="csY35"/>
-              </a:cxn>
-              <a:cxn ang="0">
-                <a:pos x="csX36" y="csY36"/>
-              </a:cxn>
-              <a:cxn ang="0">
-                <a:pos x="csX37" y="csY37"/>
-              </a:cxn>
-              <a:cxn ang="0">
-                <a:pos x="csX38" y="csY38"/>
-              </a:cxn>
-              <a:cxn ang="0">
-                <a:pos x="csX39" y="csY39"/>
-              </a:cxn>
-              <a:cxn ang="0">
-                <a:pos x="csX40" y="csY40"/>
-              </a:cxn>
-              <a:cxn ang="0">
-                <a:pos x="csX41" y="csY41"/>
-              </a:cxn>
-            </a:cxnLst>
-            <a:rect l="l" t="t" r="r" b="b"/>
-            <a:pathLst>
-              <a:path w="1291905" h="1770078">
-                <a:moveTo>
-                  <a:pt x="0" y="0"/>
-                </a:moveTo>
-                <a:lnTo>
-                  <a:pt x="0" y="478173"/>
-                </a:lnTo>
-                <a:lnTo>
-                  <a:pt x="0" y="1291905"/>
-                </a:lnTo>
-                <a:lnTo>
-                  <a:pt x="0" y="1770078"/>
-                </a:lnTo>
-                <a:lnTo>
-                  <a:pt x="6123" y="1770078"/>
-                </a:lnTo>
-                <a:lnTo>
-                  <a:pt x="109381" y="1658008"/>
-                </a:lnTo>
-                <a:lnTo>
-                  <a:pt x="212639" y="1770078"/>
-                </a:lnTo>
-                <a:lnTo>
-                  <a:pt x="221976" y="1770078"/>
-                </a:lnTo>
-                <a:lnTo>
-                  <a:pt x="325234" y="1658008"/>
-                </a:lnTo>
-                <a:lnTo>
-                  <a:pt x="428492" y="1770078"/>
-                </a:lnTo>
-                <a:lnTo>
-                  <a:pt x="437829" y="1770078"/>
-                </a:lnTo>
-                <a:lnTo>
-                  <a:pt x="541087" y="1658008"/>
-                </a:lnTo>
-                <a:lnTo>
-                  <a:pt x="644346" y="1770078"/>
-                </a:lnTo>
-                <a:lnTo>
-                  <a:pt x="653683" y="1770078"/>
-                </a:lnTo>
-                <a:lnTo>
-                  <a:pt x="756941" y="1658008"/>
-                </a:lnTo>
-                <a:lnTo>
-                  <a:pt x="860199" y="1770078"/>
-                </a:lnTo>
-                <a:lnTo>
-                  <a:pt x="869536" y="1770078"/>
-                </a:lnTo>
-                <a:lnTo>
-                  <a:pt x="972794" y="1658008"/>
-                </a:lnTo>
-                <a:lnTo>
-                  <a:pt x="1076052" y="1770078"/>
-                </a:lnTo>
-                <a:lnTo>
-                  <a:pt x="1085389" y="1770078"/>
-                </a:lnTo>
-                <a:lnTo>
-                  <a:pt x="1188647" y="1658008"/>
-                </a:lnTo>
-                <a:lnTo>
-                  <a:pt x="1291905" y="1770078"/>
-                </a:lnTo>
-                <a:lnTo>
-                  <a:pt x="1291905" y="1291905"/>
-                </a:lnTo>
-                <a:lnTo>
-                  <a:pt x="1291905" y="478173"/>
-                </a:lnTo>
-                <a:lnTo>
-                  <a:pt x="1291905" y="0"/>
-                </a:lnTo>
-                <a:lnTo>
-                  <a:pt x="1188647" y="112070"/>
-                </a:lnTo>
-                <a:lnTo>
-                  <a:pt x="1085389" y="0"/>
-                </a:lnTo>
-                <a:lnTo>
-                  <a:pt x="1076052" y="0"/>
-                </a:lnTo>
-                <a:lnTo>
-                  <a:pt x="972794" y="112070"/>
-                </a:lnTo>
-                <a:lnTo>
-                  <a:pt x="869536" y="0"/>
-                </a:lnTo>
-                <a:lnTo>
-                  <a:pt x="860199" y="0"/>
-                </a:lnTo>
-                <a:lnTo>
-                  <a:pt x="756941" y="112070"/>
-                </a:lnTo>
-                <a:lnTo>
-                  <a:pt x="653683" y="0"/>
-                </a:lnTo>
-                <a:lnTo>
-                  <a:pt x="644346" y="0"/>
-                </a:lnTo>
-                <a:lnTo>
-                  <a:pt x="541087" y="112070"/>
-                </a:lnTo>
-                <a:lnTo>
-                  <a:pt x="437829" y="0"/>
-                </a:lnTo>
-                <a:lnTo>
-                  <a:pt x="428492" y="0"/>
-                </a:lnTo>
-                <a:lnTo>
-                  <a:pt x="325234" y="112070"/>
-                </a:lnTo>
-                <a:lnTo>
-                  <a:pt x="221976" y="0"/>
-                </a:lnTo>
-                <a:lnTo>
-                  <a:pt x="212639" y="0"/>
-                </a:lnTo>
-                <a:lnTo>
-                  <a:pt x="109381" y="112070"/>
-                </a:lnTo>
-                <a:lnTo>
-                  <a:pt x="6123" y="0"/>
-                </a:lnTo>
-                <a:close/>
-              </a:path>
-            </a:pathLst>
-          </a:custGeom>
-          <a:gradFill flip="none" rotWithShape="1">
-            <a:gsLst>
-              <a:gs pos="81000">
-                <a:schemeClr val="bg1">
-                  <a:alpha val="0"/>
-                </a:schemeClr>
-              </a:gs>
-              <a:gs pos="0">
-                <a:srgbClr val="FF0000"/>
-              </a:gs>
-            </a:gsLst>
-            <a:path path="circle">
-              <a:fillToRect l="100000" b="100000"/>
-            </a:path>
-            <a:tileRect t="-100000" r="-100000"/>
-          </a:gradFill>
-          <a:ln>
-            <a:noFill/>
-          </a:ln>
-        </p:spPr>
-        <p:style>
-          <a:lnRef idx="2">
-            <a:schemeClr val="accent1">
-              <a:shade val="15000"/>
-            </a:schemeClr>
-          </a:lnRef>
-          <a:fillRef idx="1">
-            <a:schemeClr val="accent1"/>
-          </a:fillRef>
-          <a:effectRef idx="0">
-            <a:schemeClr val="accent1"/>
-          </a:effectRef>
-          <a:fontRef idx="minor">
-            <a:schemeClr val="lt1"/>
-          </a:fontRef>
-        </p:style>
-        <p:txBody>
-          <a:bodyPr wrap="square" rtlCol="0" anchor="ctr">
-            <a:noAutofit/>
-          </a:bodyPr>
-          <a:lstStyle/>
-          <a:p>
-            <a:pPr algn="ctr"/>
-            <a:endParaRPr lang="en-US"/>
-          </a:p>
-        </p:txBody>
-      </p:sp>
-      <p:sp>
-        <p:nvSpPr>
-          <p:cNvPr id="49" name="Freeform: Shape 48">
-            <a:extLst>
-              <a:ext uri="{FF2B5EF4-FFF2-40B4-BE49-F238E27FC236}">
-                <a16:creationId xmlns:a16="http://schemas.microsoft.com/office/drawing/2014/main" id="{CFCE63B5-CC96-2583-618E-6957E064CBFA}"/>
-              </a:ext>
-            </a:extLst>
-          </p:cNvPr>
-          <p:cNvSpPr/>
-          <p:nvPr/>
-        </p:nvSpPr>
-        <p:spPr>
-          <a:xfrm>
-            <a:off x="3879920" y="4351606"/>
-            <a:ext cx="937260" cy="652164"/>
-          </a:xfrm>
-          <a:custGeom>
-            <a:avLst/>
-            <a:gdLst>
-              <a:gd name="csX0" fmla="*/ 885039 w 1770078"/>
-              <a:gd name="csY0" fmla="*/ 0 h 1291903"/>
-              <a:gd name="csX1" fmla="*/ 1752097 w 1770078"/>
-              <a:gd name="csY1" fmla="*/ 364364 h 1291903"/>
-              <a:gd name="csX2" fmla="*/ 1756386 w 1770078"/>
-              <a:gd name="csY2" fmla="*/ 378854 h 1291903"/>
-              <a:gd name="csX3" fmla="*/ 1770078 w 1770078"/>
-              <a:gd name="csY3" fmla="*/ 378854 h 1291903"/>
-              <a:gd name="csX4" fmla="*/ 1770078 w 1770078"/>
-              <a:gd name="csY4" fmla="*/ 456330 h 1291903"/>
-              <a:gd name="csX5" fmla="*/ 1770078 w 1770078"/>
-              <a:gd name="csY5" fmla="*/ 1291903 h 1291903"/>
-              <a:gd name="csX6" fmla="*/ 0 w 1770078"/>
-              <a:gd name="csY6" fmla="*/ 1291903 h 1291903"/>
-              <a:gd name="csX7" fmla="*/ 0 w 1770078"/>
-              <a:gd name="csY7" fmla="*/ 456330 h 1291903"/>
-              <a:gd name="csX8" fmla="*/ 0 w 1770078"/>
-              <a:gd name="csY8" fmla="*/ 378854 h 1291903"/>
-              <a:gd name="csX9" fmla="*/ 13692 w 1770078"/>
-              <a:gd name="csY9" fmla="*/ 378854 h 1291903"/>
-              <a:gd name="csX10" fmla="*/ 17981 w 1770078"/>
-              <a:gd name="csY10" fmla="*/ 364364 h 1291903"/>
-              <a:gd name="csX11" fmla="*/ 885039 w 1770078"/>
-              <a:gd name="csY11" fmla="*/ 0 h 1291903"/>
-              <a:gd name="csX0" fmla="*/ 885039 w 1770078"/>
-              <a:gd name="csY0" fmla="*/ 0 h 1291903"/>
-              <a:gd name="csX1" fmla="*/ 1752097 w 1770078"/>
-              <a:gd name="csY1" fmla="*/ 364364 h 1291903"/>
-              <a:gd name="csX2" fmla="*/ 1756386 w 1770078"/>
-              <a:gd name="csY2" fmla="*/ 378854 h 1291903"/>
-              <a:gd name="csX3" fmla="*/ 1770078 w 1770078"/>
-              <a:gd name="csY3" fmla="*/ 378854 h 1291903"/>
-              <a:gd name="csX4" fmla="*/ 1770078 w 1770078"/>
-              <a:gd name="csY4" fmla="*/ 456330 h 1291903"/>
-              <a:gd name="csX5" fmla="*/ 1770078 w 1770078"/>
-              <a:gd name="csY5" fmla="*/ 1291903 h 1291903"/>
-              <a:gd name="csX6" fmla="*/ 0 w 1770078"/>
-              <a:gd name="csY6" fmla="*/ 1291903 h 1291903"/>
-              <a:gd name="csX7" fmla="*/ 0 w 1770078"/>
-              <a:gd name="csY7" fmla="*/ 456330 h 1291903"/>
-              <a:gd name="csX8" fmla="*/ 13692 w 1770078"/>
-              <a:gd name="csY8" fmla="*/ 378854 h 1291903"/>
-              <a:gd name="csX9" fmla="*/ 17981 w 1770078"/>
-              <a:gd name="csY9" fmla="*/ 364364 h 1291903"/>
-              <a:gd name="csX10" fmla="*/ 885039 w 1770078"/>
-              <a:gd name="csY10" fmla="*/ 0 h 1291903"/>
-              <a:gd name="csX0" fmla="*/ 885039 w 1770078"/>
-              <a:gd name="csY0" fmla="*/ 0 h 1291903"/>
-              <a:gd name="csX1" fmla="*/ 1752097 w 1770078"/>
-              <a:gd name="csY1" fmla="*/ 364364 h 1291903"/>
-              <a:gd name="csX2" fmla="*/ 1756386 w 1770078"/>
-              <a:gd name="csY2" fmla="*/ 378854 h 1291903"/>
-              <a:gd name="csX3" fmla="*/ 1770078 w 1770078"/>
-              <a:gd name="csY3" fmla="*/ 378854 h 1291903"/>
-              <a:gd name="csX4" fmla="*/ 1770078 w 1770078"/>
-              <a:gd name="csY4" fmla="*/ 456330 h 1291903"/>
-              <a:gd name="csX5" fmla="*/ 1770078 w 1770078"/>
-              <a:gd name="csY5" fmla="*/ 1291903 h 1291903"/>
-              <a:gd name="csX6" fmla="*/ 0 w 1770078"/>
-              <a:gd name="csY6" fmla="*/ 1291903 h 1291903"/>
-              <a:gd name="csX7" fmla="*/ 0 w 1770078"/>
-              <a:gd name="csY7" fmla="*/ 456330 h 1291903"/>
-              <a:gd name="csX8" fmla="*/ 17981 w 1770078"/>
-              <a:gd name="csY8" fmla="*/ 364364 h 1291903"/>
-              <a:gd name="csX9" fmla="*/ 885039 w 1770078"/>
-              <a:gd name="csY9" fmla="*/ 0 h 1291903"/>
-              <a:gd name="csX0" fmla="*/ 885039 w 1770078"/>
-              <a:gd name="csY0" fmla="*/ 0 h 1291903"/>
-              <a:gd name="csX1" fmla="*/ 1752097 w 1770078"/>
-              <a:gd name="csY1" fmla="*/ 364364 h 1291903"/>
-              <a:gd name="csX2" fmla="*/ 1756386 w 1770078"/>
-              <a:gd name="csY2" fmla="*/ 378854 h 1291903"/>
-              <a:gd name="csX3" fmla="*/ 1770078 w 1770078"/>
-              <a:gd name="csY3" fmla="*/ 456330 h 1291903"/>
-              <a:gd name="csX4" fmla="*/ 1770078 w 1770078"/>
-              <a:gd name="csY4" fmla="*/ 1291903 h 1291903"/>
-              <a:gd name="csX5" fmla="*/ 0 w 1770078"/>
-              <a:gd name="csY5" fmla="*/ 1291903 h 1291903"/>
-              <a:gd name="csX6" fmla="*/ 0 w 1770078"/>
-              <a:gd name="csY6" fmla="*/ 456330 h 1291903"/>
-              <a:gd name="csX7" fmla="*/ 17981 w 1770078"/>
-              <a:gd name="csY7" fmla="*/ 364364 h 1291903"/>
-              <a:gd name="csX8" fmla="*/ 885039 w 1770078"/>
-              <a:gd name="csY8" fmla="*/ 0 h 1291903"/>
-              <a:gd name="csX0" fmla="*/ 885039 w 1770078"/>
-              <a:gd name="csY0" fmla="*/ 0 h 1291903"/>
-              <a:gd name="csX1" fmla="*/ 1752097 w 1770078"/>
-              <a:gd name="csY1" fmla="*/ 364364 h 1291903"/>
-              <a:gd name="csX2" fmla="*/ 1770078 w 1770078"/>
-              <a:gd name="csY2" fmla="*/ 456330 h 1291903"/>
-              <a:gd name="csX3" fmla="*/ 1770078 w 1770078"/>
-              <a:gd name="csY3" fmla="*/ 1291903 h 1291903"/>
-              <a:gd name="csX4" fmla="*/ 0 w 1770078"/>
-              <a:gd name="csY4" fmla="*/ 1291903 h 1291903"/>
-              <a:gd name="csX5" fmla="*/ 0 w 1770078"/>
-              <a:gd name="csY5" fmla="*/ 456330 h 1291903"/>
-              <a:gd name="csX6" fmla="*/ 17981 w 1770078"/>
-              <a:gd name="csY6" fmla="*/ 364364 h 1291903"/>
-              <a:gd name="csX7" fmla="*/ 885039 w 1770078"/>
-              <a:gd name="csY7" fmla="*/ 0 h 1291903"/>
-            </a:gdLst>
-            <a:ahLst/>
-            <a:cxnLst>
-              <a:cxn ang="0">
-                <a:pos x="csX0" y="csY0"/>
-              </a:cxn>
-              <a:cxn ang="0">
-                <a:pos x="csX1" y="csY1"/>
-              </a:cxn>
-              <a:cxn ang="0">
-                <a:pos x="csX2" y="csY2"/>
-              </a:cxn>
-              <a:cxn ang="0">
-                <a:pos x="csX3" y="csY3"/>
-              </a:cxn>
-              <a:cxn ang="0">
-                <a:pos x="csX4" y="csY4"/>
-              </a:cxn>
-              <a:cxn ang="0">
-                <a:pos x="csX5" y="csY5"/>
-              </a:cxn>
-              <a:cxn ang="0">
-                <a:pos x="csX6" y="csY6"/>
-              </a:cxn>
-              <a:cxn ang="0">
-                <a:pos x="csX7" y="csY7"/>
-              </a:cxn>
-            </a:cxnLst>
-            <a:rect l="l" t="t" r="r" b="b"/>
-            <a:pathLst>
-              <a:path w="1770078" h="1291903">
-                <a:moveTo>
-                  <a:pt x="885039" y="0"/>
-                </a:moveTo>
-                <a:cubicBezTo>
-                  <a:pt x="1312734" y="0"/>
-                  <a:pt x="1669571" y="156422"/>
-                  <a:pt x="1752097" y="364364"/>
-                </a:cubicBezTo>
-                <a:lnTo>
-                  <a:pt x="1770078" y="456330"/>
-                </a:lnTo>
-                <a:lnTo>
-                  <a:pt x="1770078" y="1291903"/>
-                </a:lnTo>
-                <a:lnTo>
-                  <a:pt x="0" y="1291903"/>
-                </a:lnTo>
-                <a:lnTo>
-                  <a:pt x="0" y="456330"/>
-                </a:lnTo>
-                <a:lnTo>
-                  <a:pt x="17981" y="364364"/>
-                </a:lnTo>
-                <a:cubicBezTo>
-                  <a:pt x="100507" y="156422"/>
-                  <a:pt x="457344" y="0"/>
-                  <a:pt x="885039" y="0"/>
-                </a:cubicBezTo>
-                <a:close/>
-              </a:path>
-            </a:pathLst>
-          </a:custGeom>
-          <a:gradFill flip="none" rotWithShape="1">
-            <a:gsLst>
-              <a:gs pos="69000">
-                <a:schemeClr val="bg1">
-                  <a:alpha val="0"/>
-                </a:schemeClr>
-              </a:gs>
-              <a:gs pos="0">
-                <a:srgbClr val="0070C0"/>
-              </a:gs>
-            </a:gsLst>
-            <a:path path="circle">
-              <a:fillToRect l="100000" b="100000"/>
-            </a:path>
-            <a:tileRect t="-100000" r="-100000"/>
-          </a:gradFill>
-          <a:ln>
-            <a:noFill/>
-          </a:ln>
-        </p:spPr>
-        <p:style>
-          <a:lnRef idx="2">
-            <a:schemeClr val="accent1">
-              <a:shade val="15000"/>
-            </a:schemeClr>
-          </a:lnRef>
-          <a:fillRef idx="1">
-            <a:schemeClr val="accent1"/>
-          </a:fillRef>
-          <a:effectRef idx="0">
-            <a:schemeClr val="accent1"/>
-          </a:effectRef>
-          <a:fontRef idx="minor">
-            <a:schemeClr val="lt1"/>
-          </a:fontRef>
-        </p:style>
-        <p:txBody>
-          <a:bodyPr wrap="square" rtlCol="0" anchor="ctr">
-            <a:noAutofit/>
-          </a:bodyPr>
-          <a:lstStyle/>
-          <a:p>
-            <a:pPr algn="ctr"/>
-            <a:endParaRPr lang="en-US"/>
-          </a:p>
-        </p:txBody>
-      </p:sp>
-      <p:sp>
-        <p:nvSpPr>
-          <p:cNvPr id="50" name="Freeform: Shape 49">
-            <a:extLst>
-              <a:ext uri="{FF2B5EF4-FFF2-40B4-BE49-F238E27FC236}">
-                <a16:creationId xmlns:a16="http://schemas.microsoft.com/office/drawing/2014/main" id="{615C66A9-F525-F4F5-91FA-E8615F062D6F}"/>
-              </a:ext>
-            </a:extLst>
-          </p:cNvPr>
-          <p:cNvSpPr/>
-          <p:nvPr/>
-        </p:nvSpPr>
-        <p:spPr>
-          <a:xfrm>
-            <a:off x="6235672" y="4351606"/>
-            <a:ext cx="937260" cy="652165"/>
-          </a:xfrm>
-          <a:custGeom>
-            <a:avLst/>
-            <a:gdLst>
-              <a:gd name="csX0" fmla="*/ 0 w 937260"/>
-              <a:gd name="csY0" fmla="*/ 0 h 652165"/>
-              <a:gd name="csX1" fmla="*/ 179 w 937260"/>
-              <a:gd name="csY1" fmla="*/ 0 h 652165"/>
-              <a:gd name="csX2" fmla="*/ 116373 w 937260"/>
-              <a:gd name="csY2" fmla="*/ 31552 h 652165"/>
-              <a:gd name="csX3" fmla="*/ 468630 w 937260"/>
-              <a:gd name="csY3" fmla="*/ 67131 h 652165"/>
-              <a:gd name="csX4" fmla="*/ 820887 w 937260"/>
-              <a:gd name="csY4" fmla="*/ 31552 h 652165"/>
-              <a:gd name="csX5" fmla="*/ 937081 w 937260"/>
-              <a:gd name="csY5" fmla="*/ 0 h 652165"/>
-              <a:gd name="csX6" fmla="*/ 937260 w 937260"/>
-              <a:gd name="csY6" fmla="*/ 0 h 652165"/>
-              <a:gd name="csX7" fmla="*/ 937260 w 937260"/>
-              <a:gd name="csY7" fmla="*/ 652165 h 652165"/>
-              <a:gd name="csX8" fmla="*/ 937078 w 937260"/>
-              <a:gd name="csY8" fmla="*/ 652165 h 652165"/>
-              <a:gd name="csX9" fmla="*/ 820887 w 937260"/>
-              <a:gd name="csY9" fmla="*/ 620614 h 652165"/>
-              <a:gd name="csX10" fmla="*/ 468630 w 937260"/>
-              <a:gd name="csY10" fmla="*/ 585035 h 652165"/>
-              <a:gd name="csX11" fmla="*/ 116373 w 937260"/>
-              <a:gd name="csY11" fmla="*/ 620614 h 652165"/>
-              <a:gd name="csX12" fmla="*/ 183 w 937260"/>
-              <a:gd name="csY12" fmla="*/ 652165 h 652165"/>
-              <a:gd name="csX13" fmla="*/ 0 w 937260"/>
-              <a:gd name="csY13" fmla="*/ 652165 h 652165"/>
-            </a:gdLst>
-            <a:ahLst/>
-            <a:cxnLst>
-              <a:cxn ang="0">
-                <a:pos x="csX0" y="csY0"/>
-              </a:cxn>
-              <a:cxn ang="0">
-                <a:pos x="csX1" y="csY1"/>
-              </a:cxn>
-              <a:cxn ang="0">
-                <a:pos x="csX2" y="csY2"/>
-              </a:cxn>
-              <a:cxn ang="0">
-                <a:pos x="csX3" y="csY3"/>
-              </a:cxn>
-              <a:cxn ang="0">
-                <a:pos x="csX4" y="csY4"/>
-              </a:cxn>
-              <a:cxn ang="0">
-                <a:pos x="csX5" y="csY5"/>
-              </a:cxn>
-              <a:cxn ang="0">
-                <a:pos x="csX6" y="csY6"/>
-              </a:cxn>
-              <a:cxn ang="0">
-                <a:pos x="csX7" y="csY7"/>
-              </a:cxn>
-              <a:cxn ang="0">
-                <a:pos x="csX8" y="csY8"/>
-              </a:cxn>
-              <a:cxn ang="0">
-                <a:pos x="csX9" y="csY9"/>
-              </a:cxn>
-              <a:cxn ang="0">
-                <a:pos x="csX10" y="csY10"/>
-              </a:cxn>
-              <a:cxn ang="0">
-                <a:pos x="csX11" y="csY11"/>
-              </a:cxn>
-              <a:cxn ang="0">
-                <a:pos x="csX12" y="csY12"/>
-              </a:cxn>
-              <a:cxn ang="0">
-                <a:pos x="csX13" y="csY13"/>
-              </a:cxn>
-            </a:cxnLst>
-            <a:rect l="l" t="t" r="r" b="b"/>
-            <a:pathLst>
-              <a:path w="937260" h="652165">
-                <a:moveTo>
-                  <a:pt x="0" y="0"/>
-                </a:moveTo>
-                <a:lnTo>
-                  <a:pt x="179" y="0"/>
-                </a:lnTo>
-                <a:lnTo>
-                  <a:pt x="116373" y="31552"/>
-                </a:lnTo>
-                <a:cubicBezTo>
-                  <a:pt x="224643" y="54462"/>
-                  <a:pt x="343679" y="67131"/>
-                  <a:pt x="468630" y="67131"/>
-                </a:cubicBezTo>
-                <a:cubicBezTo>
-                  <a:pt x="593581" y="67131"/>
-                  <a:pt x="712618" y="54462"/>
-                  <a:pt x="820887" y="31552"/>
-                </a:cubicBezTo>
-                <a:lnTo>
-                  <a:pt x="937081" y="0"/>
-                </a:lnTo>
-                <a:lnTo>
-                  <a:pt x="937260" y="0"/>
-                </a:lnTo>
-                <a:lnTo>
-                  <a:pt x="937260" y="652165"/>
-                </a:lnTo>
-                <a:lnTo>
-                  <a:pt x="937078" y="652165"/>
-                </a:lnTo>
-                <a:lnTo>
-                  <a:pt x="820887" y="620614"/>
-                </a:lnTo>
-                <a:cubicBezTo>
-                  <a:pt x="712618" y="597704"/>
-                  <a:pt x="593581" y="585035"/>
-                  <a:pt x="468630" y="585035"/>
-                </a:cubicBezTo>
-                <a:cubicBezTo>
-                  <a:pt x="343679" y="585035"/>
-                  <a:pt x="224643" y="597704"/>
-                  <a:pt x="116373" y="620614"/>
-                </a:cubicBezTo>
-                <a:lnTo>
-                  <a:pt x="183" y="652165"/>
-                </a:lnTo>
-                <a:lnTo>
-                  <a:pt x="0" y="652165"/>
-                </a:lnTo>
-                <a:close/>
-              </a:path>
-            </a:pathLst>
-          </a:custGeom>
-          <a:gradFill flip="none" rotWithShape="1">
-            <a:gsLst>
-              <a:gs pos="83000">
-                <a:schemeClr val="bg1">
-                  <a:alpha val="0"/>
-                </a:schemeClr>
-              </a:gs>
-              <a:gs pos="0">
-                <a:srgbClr val="00B050"/>
-              </a:gs>
-            </a:gsLst>
-            <a:path path="circle">
-              <a:fillToRect l="100000" b="100000"/>
-            </a:path>
-            <a:tileRect t="-100000" r="-100000"/>
-          </a:gradFill>
-          <a:ln>
-            <a:noFill/>
-          </a:ln>
-        </p:spPr>
-        <p:style>
-          <a:lnRef idx="2">
-            <a:schemeClr val="accent1">
-              <a:shade val="15000"/>
-            </a:schemeClr>
-          </a:lnRef>
-          <a:fillRef idx="1">
-            <a:schemeClr val="accent1"/>
-          </a:fillRef>
-          <a:effectRef idx="0">
-            <a:schemeClr val="accent1"/>
-          </a:effectRef>
-          <a:fontRef idx="minor">
-            <a:schemeClr val="lt1"/>
-          </a:fontRef>
-        </p:style>
-        <p:txBody>
-          <a:bodyPr wrap="square" rtlCol="0" anchor="ctr">
-            <a:noAutofit/>
-          </a:bodyPr>
-          <a:lstStyle/>
-          <a:p>
-            <a:pPr algn="ctr"/>
-            <a:endParaRPr lang="en-US"/>
-          </a:p>
-        </p:txBody>
-      </p:sp>
-      <p:sp>
-        <p:nvSpPr>
-          <p:cNvPr id="91" name="Freeform: Shape 90">
-            <a:extLst>
-              <a:ext uri="{FF2B5EF4-FFF2-40B4-BE49-F238E27FC236}">
-                <a16:creationId xmlns:a16="http://schemas.microsoft.com/office/drawing/2014/main" id="{C35C7B59-CB09-AB2D-8F58-3134166692C1}"/>
-              </a:ext>
-            </a:extLst>
-          </p:cNvPr>
-          <p:cNvSpPr/>
-          <p:nvPr/>
-        </p:nvSpPr>
-        <p:spPr>
-          <a:xfrm>
-            <a:off x="6235672" y="812169"/>
-            <a:ext cx="937260" cy="652165"/>
-          </a:xfrm>
-          <a:custGeom>
-            <a:avLst/>
-            <a:gdLst>
-              <a:gd name="csX0" fmla="*/ 0 w 937260"/>
-              <a:gd name="csY0" fmla="*/ 0 h 652165"/>
-              <a:gd name="csX1" fmla="*/ 179 w 937260"/>
-              <a:gd name="csY1" fmla="*/ 0 h 652165"/>
-              <a:gd name="csX2" fmla="*/ 116373 w 937260"/>
-              <a:gd name="csY2" fmla="*/ 31552 h 652165"/>
-              <a:gd name="csX3" fmla="*/ 468630 w 937260"/>
-              <a:gd name="csY3" fmla="*/ 67131 h 652165"/>
-              <a:gd name="csX4" fmla="*/ 820887 w 937260"/>
-              <a:gd name="csY4" fmla="*/ 31552 h 652165"/>
-              <a:gd name="csX5" fmla="*/ 937081 w 937260"/>
-              <a:gd name="csY5" fmla="*/ 0 h 652165"/>
-              <a:gd name="csX6" fmla="*/ 937260 w 937260"/>
-              <a:gd name="csY6" fmla="*/ 0 h 652165"/>
-              <a:gd name="csX7" fmla="*/ 937260 w 937260"/>
-              <a:gd name="csY7" fmla="*/ 652165 h 652165"/>
-              <a:gd name="csX8" fmla="*/ 937078 w 937260"/>
-              <a:gd name="csY8" fmla="*/ 652165 h 652165"/>
-              <a:gd name="csX9" fmla="*/ 820887 w 937260"/>
-              <a:gd name="csY9" fmla="*/ 620614 h 652165"/>
-              <a:gd name="csX10" fmla="*/ 468630 w 937260"/>
-              <a:gd name="csY10" fmla="*/ 585035 h 652165"/>
-              <a:gd name="csX11" fmla="*/ 116373 w 937260"/>
-              <a:gd name="csY11" fmla="*/ 620614 h 652165"/>
-              <a:gd name="csX12" fmla="*/ 183 w 937260"/>
-              <a:gd name="csY12" fmla="*/ 652165 h 652165"/>
-              <a:gd name="csX13" fmla="*/ 0 w 937260"/>
-              <a:gd name="csY13" fmla="*/ 652165 h 652165"/>
-            </a:gdLst>
-            <a:ahLst/>
-            <a:cxnLst>
-              <a:cxn ang="0">
-                <a:pos x="csX0" y="csY0"/>
-              </a:cxn>
-              <a:cxn ang="0">
-                <a:pos x="csX1" y="csY1"/>
-              </a:cxn>
-              <a:cxn ang="0">
-                <a:pos x="csX2" y="csY2"/>
-              </a:cxn>
-              <a:cxn ang="0">
-                <a:pos x="csX3" y="csY3"/>
-              </a:cxn>
-              <a:cxn ang="0">
-                <a:pos x="csX4" y="csY4"/>
-              </a:cxn>
-              <a:cxn ang="0">
-                <a:pos x="csX5" y="csY5"/>
-              </a:cxn>
-              <a:cxn ang="0">
-                <a:pos x="csX6" y="csY6"/>
-              </a:cxn>
-              <a:cxn ang="0">
-                <a:pos x="csX7" y="csY7"/>
-              </a:cxn>
-              <a:cxn ang="0">
-                <a:pos x="csX8" y="csY8"/>
-              </a:cxn>
-              <a:cxn ang="0">
-                <a:pos x="csX9" y="csY9"/>
-              </a:cxn>
-              <a:cxn ang="0">
-                <a:pos x="csX10" y="csY10"/>
-              </a:cxn>
-              <a:cxn ang="0">
-                <a:pos x="csX11" y="csY11"/>
-              </a:cxn>
-              <a:cxn ang="0">
-                <a:pos x="csX12" y="csY12"/>
-              </a:cxn>
-              <a:cxn ang="0">
-                <a:pos x="csX13" y="csY13"/>
-              </a:cxn>
-            </a:cxnLst>
-            <a:rect l="l" t="t" r="r" b="b"/>
-            <a:pathLst>
-              <a:path w="937260" h="652165">
-                <a:moveTo>
-                  <a:pt x="0" y="0"/>
-                </a:moveTo>
-                <a:lnTo>
-                  <a:pt x="179" y="0"/>
-                </a:lnTo>
-                <a:lnTo>
-                  <a:pt x="116373" y="31552"/>
-                </a:lnTo>
-                <a:cubicBezTo>
-                  <a:pt x="224643" y="54462"/>
-                  <a:pt x="343679" y="67131"/>
-                  <a:pt x="468630" y="67131"/>
-                </a:cubicBezTo>
-                <a:cubicBezTo>
-                  <a:pt x="593581" y="67131"/>
-                  <a:pt x="712618" y="54462"/>
-                  <a:pt x="820887" y="31552"/>
-                </a:cubicBezTo>
-                <a:lnTo>
-                  <a:pt x="937081" y="0"/>
-                </a:lnTo>
-                <a:lnTo>
-                  <a:pt x="937260" y="0"/>
-                </a:lnTo>
-                <a:lnTo>
-                  <a:pt x="937260" y="652165"/>
-                </a:lnTo>
-                <a:lnTo>
-                  <a:pt x="937078" y="652165"/>
-                </a:lnTo>
-                <a:lnTo>
-                  <a:pt x="820887" y="620614"/>
-                </a:lnTo>
-                <a:cubicBezTo>
-                  <a:pt x="712618" y="597704"/>
-                  <a:pt x="593581" y="585035"/>
-                  <a:pt x="468630" y="585035"/>
-                </a:cubicBezTo>
-                <a:cubicBezTo>
-                  <a:pt x="343679" y="585035"/>
-                  <a:pt x="224643" y="597704"/>
-                  <a:pt x="116373" y="620614"/>
-                </a:cubicBezTo>
-                <a:lnTo>
-                  <a:pt x="183" y="652165"/>
-                </a:lnTo>
-                <a:lnTo>
-                  <a:pt x="0" y="652165"/>
-                </a:lnTo>
-                <a:close/>
-              </a:path>
-            </a:pathLst>
-          </a:custGeom>
-          <a:solidFill>
-            <a:schemeClr val="bg1"/>
-          </a:solidFill>
-          <a:ln>
-            <a:noFill/>
-          </a:ln>
-        </p:spPr>
-        <p:style>
-          <a:lnRef idx="2">
-            <a:schemeClr val="accent1">
-              <a:shade val="15000"/>
-            </a:schemeClr>
-          </a:lnRef>
-          <a:fillRef idx="1">
-            <a:schemeClr val="accent1"/>
-          </a:fillRef>
-          <a:effectRef idx="0">
-            <a:schemeClr val="accent1"/>
-          </a:effectRef>
-          <a:fontRef idx="minor">
-            <a:schemeClr val="lt1"/>
-          </a:fontRef>
-        </p:style>
-        <p:txBody>
-          <a:bodyPr wrap="square" rtlCol="0" anchor="ctr">
-            <a:noAutofit/>
-          </a:bodyPr>
-          <a:lstStyle/>
-          <a:p>
-            <a:pPr algn="ctr"/>
-            <a:endParaRPr lang="en-US"/>
+            <a:r>
+              <a:rPr lang="en-US"/>
+              <a:t>shadows </a:t>
+            </a:r>
+            <a:r>
+              <a:rPr lang="en-US" dirty="0"/>
+              <a:t>using soft edges</a:t>
+            </a:r>
           </a:p>
         </p:txBody>
       </p:sp>

--- a/Icons_UI/bcpst.pptx
+++ b/Icons_UI/bcpst.pptx
@@ -6627,10 +6627,10 @@
       </p:grpSp>
       <p:grpSp>
         <p:nvGrpSpPr>
-          <p:cNvPr id="369" name="Group 368">
+          <p:cNvPr id="2" name="Group 1">
             <a:extLst>
               <a:ext uri="{FF2B5EF4-FFF2-40B4-BE49-F238E27FC236}">
-                <a16:creationId xmlns:a16="http://schemas.microsoft.com/office/drawing/2014/main" id="{CC89CD14-87F0-5850-D592-3757EE3C5BCE}"/>
+                <a16:creationId xmlns:a16="http://schemas.microsoft.com/office/drawing/2014/main" id="{B9663EDC-C74B-C560-C66F-213B956273D9}"/>
               </a:ext>
             </a:extLst>
           </p:cNvPr>
@@ -6639,10 +6639,10 @@
         </p:nvGrpSpPr>
         <p:grpSpPr>
           <a:xfrm>
-            <a:off x="3416303" y="4203447"/>
-            <a:ext cx="5359827" cy="652166"/>
-            <a:chOff x="172406" y="590657"/>
-            <a:chExt cx="5359827" cy="652166"/>
+            <a:off x="3409509" y="4203447"/>
+            <a:ext cx="944054" cy="652166"/>
+            <a:chOff x="3409509" y="4203447"/>
+            <a:chExt cx="944054" cy="652166"/>
           </a:xfrm>
         </p:grpSpPr>
         <p:sp>
@@ -6659,7 +6659,7 @@
           </p:nvSpPr>
           <p:spPr>
             <a:xfrm>
-              <a:off x="172406" y="590657"/>
+              <a:off x="3416303" y="4203447"/>
               <a:ext cx="937260" cy="652166"/>
             </a:xfrm>
             <a:prstGeom prst="roundRect">
@@ -6699,6 +6699,226 @@
         </p:sp>
         <p:sp>
           <p:nvSpPr>
+            <p:cNvPr id="376" name="Rectangle: Rounded Corners 375">
+              <a:extLst>
+                <a:ext uri="{FF2B5EF4-FFF2-40B4-BE49-F238E27FC236}">
+                  <a16:creationId xmlns:a16="http://schemas.microsoft.com/office/drawing/2014/main" id="{F3804E2B-2901-0CDE-8E0F-F7741192D75C}"/>
+                </a:ext>
+              </a:extLst>
+            </p:cNvPr>
+            <p:cNvSpPr/>
+            <p:nvPr/>
+          </p:nvSpPr>
+          <p:spPr>
+            <a:xfrm>
+              <a:off x="3416303" y="4203447"/>
+              <a:ext cx="937260" cy="652166"/>
+            </a:xfrm>
+            <a:prstGeom prst="roundRect">
+              <a:avLst/>
+            </a:prstGeom>
+            <a:gradFill flip="none" rotWithShape="1">
+              <a:gsLst>
+                <a:gs pos="100000">
+                  <a:schemeClr val="bg1">
+                    <a:alpha val="46000"/>
+                  </a:schemeClr>
+                </a:gs>
+                <a:gs pos="38000">
+                  <a:schemeClr val="accent1">
+                    <a:tint val="23500"/>
+                    <a:satMod val="160000"/>
+                    <a:alpha val="0"/>
+                  </a:schemeClr>
+                </a:gs>
+              </a:gsLst>
+              <a:path path="circle">
+                <a:fillToRect l="100000" t="100000"/>
+              </a:path>
+              <a:tileRect r="-100000" b="-100000"/>
+            </a:gradFill>
+            <a:ln>
+              <a:noFill/>
+            </a:ln>
+          </p:spPr>
+          <p:style>
+            <a:lnRef idx="2">
+              <a:schemeClr val="accent1">
+                <a:shade val="15000"/>
+              </a:schemeClr>
+            </a:lnRef>
+            <a:fillRef idx="1">
+              <a:schemeClr val="accent1"/>
+            </a:fillRef>
+            <a:effectRef idx="0">
+              <a:schemeClr val="accent1"/>
+            </a:effectRef>
+            <a:fontRef idx="minor">
+              <a:schemeClr val="lt1"/>
+            </a:fontRef>
+          </p:style>
+          <p:txBody>
+            <a:bodyPr rtlCol="0" anchor="ctr"/>
+            <a:lstStyle/>
+            <a:p>
+              <a:pPr algn="ctr"/>
+              <a:endParaRPr lang="en-US"/>
+            </a:p>
+          </p:txBody>
+        </p:sp>
+        <p:sp>
+          <p:nvSpPr>
+            <p:cNvPr id="382" name="Rectangle: Rounded Corners 381">
+              <a:extLst>
+                <a:ext uri="{FF2B5EF4-FFF2-40B4-BE49-F238E27FC236}">
+                  <a16:creationId xmlns:a16="http://schemas.microsoft.com/office/drawing/2014/main" id="{8614116D-99AE-6F24-502F-D2A00BD24662}"/>
+                </a:ext>
+              </a:extLst>
+            </p:cNvPr>
+            <p:cNvSpPr/>
+            <p:nvPr/>
+          </p:nvSpPr>
+          <p:spPr>
+            <a:xfrm>
+              <a:off x="3409509" y="4203447"/>
+              <a:ext cx="937260" cy="652166"/>
+            </a:xfrm>
+            <a:prstGeom prst="roundRect">
+              <a:avLst/>
+            </a:prstGeom>
+            <a:gradFill flip="none" rotWithShape="1">
+              <a:gsLst>
+                <a:gs pos="36000">
+                  <a:srgbClr val="C775E7">
+                    <a:alpha val="0"/>
+                  </a:srgbClr>
+                </a:gs>
+                <a:gs pos="100000">
+                  <a:srgbClr val="C269E5"/>
+                </a:gs>
+              </a:gsLst>
+              <a:path path="circle">
+                <a:fillToRect r="100000" b="100000"/>
+              </a:path>
+              <a:tileRect l="-100000" t="-100000"/>
+            </a:gradFill>
+            <a:ln>
+              <a:noFill/>
+            </a:ln>
+          </p:spPr>
+          <p:style>
+            <a:lnRef idx="2">
+              <a:schemeClr val="accent1">
+                <a:shade val="15000"/>
+              </a:schemeClr>
+            </a:lnRef>
+            <a:fillRef idx="1">
+              <a:schemeClr val="accent1"/>
+            </a:fillRef>
+            <a:effectRef idx="0">
+              <a:schemeClr val="accent1"/>
+            </a:effectRef>
+            <a:fontRef idx="minor">
+              <a:schemeClr val="lt1"/>
+            </a:fontRef>
+          </p:style>
+          <p:txBody>
+            <a:bodyPr rtlCol="0" anchor="ctr"/>
+            <a:lstStyle/>
+            <a:p>
+              <a:pPr algn="ctr"/>
+              <a:endParaRPr lang="en-US"/>
+            </a:p>
+          </p:txBody>
+        </p:sp>
+        <p:sp>
+          <p:nvSpPr>
+            <p:cNvPr id="388" name="Rectangle: Rounded Corners 387">
+              <a:extLst>
+                <a:ext uri="{FF2B5EF4-FFF2-40B4-BE49-F238E27FC236}">
+                  <a16:creationId xmlns:a16="http://schemas.microsoft.com/office/drawing/2014/main" id="{BD4FB305-52D2-88FD-1E49-42E87DFB74A4}"/>
+                </a:ext>
+              </a:extLst>
+            </p:cNvPr>
+            <p:cNvSpPr/>
+            <p:nvPr/>
+          </p:nvSpPr>
+          <p:spPr>
+            <a:xfrm>
+              <a:off x="3416303" y="4203447"/>
+              <a:ext cx="937260" cy="652166"/>
+            </a:xfrm>
+            <a:prstGeom prst="roundRect">
+              <a:avLst/>
+            </a:prstGeom>
+            <a:gradFill flip="none" rotWithShape="1">
+              <a:gsLst>
+                <a:gs pos="100000">
+                  <a:srgbClr val="00B0F0">
+                    <a:alpha val="34000"/>
+                  </a:srgbClr>
+                </a:gs>
+                <a:gs pos="56000">
+                  <a:srgbClr val="00B0F0">
+                    <a:alpha val="0"/>
+                  </a:srgbClr>
+                </a:gs>
+              </a:gsLst>
+              <a:lin ang="6600000" scaled="0"/>
+              <a:tileRect/>
+            </a:gradFill>
+            <a:ln>
+              <a:noFill/>
+            </a:ln>
+          </p:spPr>
+          <p:style>
+            <a:lnRef idx="2">
+              <a:schemeClr val="accent1">
+                <a:shade val="15000"/>
+              </a:schemeClr>
+            </a:lnRef>
+            <a:fillRef idx="1">
+              <a:schemeClr val="accent1"/>
+            </a:fillRef>
+            <a:effectRef idx="0">
+              <a:schemeClr val="accent1"/>
+            </a:effectRef>
+            <a:fontRef idx="minor">
+              <a:schemeClr val="lt1"/>
+            </a:fontRef>
+          </p:style>
+          <p:txBody>
+            <a:bodyPr rtlCol="0" anchor="ctr"/>
+            <a:lstStyle/>
+            <a:p>
+              <a:pPr algn="ctr"/>
+              <a:endParaRPr lang="en-US"/>
+            </a:p>
+          </p:txBody>
+        </p:sp>
+      </p:grpSp>
+      <p:grpSp>
+        <p:nvGrpSpPr>
+          <p:cNvPr id="11" name="Group 10">
+            <a:extLst>
+              <a:ext uri="{FF2B5EF4-FFF2-40B4-BE49-F238E27FC236}">
+                <a16:creationId xmlns:a16="http://schemas.microsoft.com/office/drawing/2014/main" id="{C2AD7BC6-3C67-9492-1C09-EFEC587FA6C2}"/>
+              </a:ext>
+            </a:extLst>
+          </p:cNvPr>
+          <p:cNvGrpSpPr/>
+          <p:nvPr/>
+        </p:nvGrpSpPr>
+        <p:grpSpPr>
+          <a:xfrm>
+            <a:off x="7843312" y="4203448"/>
+            <a:ext cx="932818" cy="652165"/>
+            <a:chOff x="7843312" y="4203448"/>
+            <a:chExt cx="932818" cy="652165"/>
+          </a:xfrm>
+        </p:grpSpPr>
+        <p:sp>
+          <p:nvSpPr>
             <p:cNvPr id="371" name="Freeform: Shape 370">
               <a:extLst>
                 <a:ext uri="{FF2B5EF4-FFF2-40B4-BE49-F238E27FC236}">
@@ -6711,7 +6931,7 @@
           </p:nvSpPr>
           <p:spPr>
             <a:xfrm>
-              <a:off x="4599415" y="590658"/>
+              <a:off x="7843312" y="4203448"/>
               <a:ext cx="932818" cy="652165"/>
             </a:xfrm>
             <a:custGeom>
@@ -6892,6 +7112,647 @@
         </p:sp>
         <p:sp>
           <p:nvSpPr>
+            <p:cNvPr id="377" name="Freeform: Shape 376">
+              <a:extLst>
+                <a:ext uri="{FF2B5EF4-FFF2-40B4-BE49-F238E27FC236}">
+                  <a16:creationId xmlns:a16="http://schemas.microsoft.com/office/drawing/2014/main" id="{D0B4D892-E91F-2462-7086-0D3804084EC6}"/>
+                </a:ext>
+              </a:extLst>
+            </p:cNvPr>
+            <p:cNvSpPr/>
+            <p:nvPr/>
+          </p:nvSpPr>
+          <p:spPr>
+            <a:xfrm>
+              <a:off x="7843312" y="4203448"/>
+              <a:ext cx="932818" cy="652165"/>
+            </a:xfrm>
+            <a:custGeom>
+              <a:avLst/>
+              <a:gdLst>
+                <a:gd name="csX0" fmla="*/ 0 w 1761688"/>
+                <a:gd name="csY0" fmla="*/ 0 h 1291904"/>
+                <a:gd name="csX1" fmla="*/ 75501 w 1761688"/>
+                <a:gd name="csY1" fmla="*/ 0 h 1291904"/>
+                <a:gd name="csX2" fmla="*/ 1686187 w 1761688"/>
+                <a:gd name="csY2" fmla="*/ 0 h 1291904"/>
+                <a:gd name="csX3" fmla="*/ 1761688 w 1761688"/>
+                <a:gd name="csY3" fmla="*/ 0 h 1291904"/>
+                <a:gd name="csX4" fmla="*/ 1761688 w 1761688"/>
+                <a:gd name="csY4" fmla="*/ 102765 h 1291904"/>
+                <a:gd name="csX5" fmla="*/ 1686187 w 1761688"/>
+                <a:gd name="csY5" fmla="*/ 102765 h 1291904"/>
+                <a:gd name="csX6" fmla="*/ 1686187 w 1761688"/>
+                <a:gd name="csY6" fmla="*/ 1189139 h 1291904"/>
+                <a:gd name="csX7" fmla="*/ 1761688 w 1761688"/>
+                <a:gd name="csY7" fmla="*/ 1189139 h 1291904"/>
+                <a:gd name="csX8" fmla="*/ 1761688 w 1761688"/>
+                <a:gd name="csY8" fmla="*/ 1291904 h 1291904"/>
+                <a:gd name="csX9" fmla="*/ 1686187 w 1761688"/>
+                <a:gd name="csY9" fmla="*/ 1291904 h 1291904"/>
+                <a:gd name="csX10" fmla="*/ 75501 w 1761688"/>
+                <a:gd name="csY10" fmla="*/ 1291904 h 1291904"/>
+                <a:gd name="csX11" fmla="*/ 0 w 1761688"/>
+                <a:gd name="csY11" fmla="*/ 1291904 h 1291904"/>
+                <a:gd name="csX12" fmla="*/ 0 w 1761688"/>
+                <a:gd name="csY12" fmla="*/ 1189139 h 1291904"/>
+                <a:gd name="csX13" fmla="*/ 75501 w 1761688"/>
+                <a:gd name="csY13" fmla="*/ 1189139 h 1291904"/>
+                <a:gd name="csX14" fmla="*/ 75501 w 1761688"/>
+                <a:gd name="csY14" fmla="*/ 102765 h 1291904"/>
+                <a:gd name="csX15" fmla="*/ 0 w 1761688"/>
+                <a:gd name="csY15" fmla="*/ 102765 h 1291904"/>
+              </a:gdLst>
+              <a:ahLst/>
+              <a:cxnLst>
+                <a:cxn ang="0">
+                  <a:pos x="csX0" y="csY0"/>
+                </a:cxn>
+                <a:cxn ang="0">
+                  <a:pos x="csX1" y="csY1"/>
+                </a:cxn>
+                <a:cxn ang="0">
+                  <a:pos x="csX2" y="csY2"/>
+                </a:cxn>
+                <a:cxn ang="0">
+                  <a:pos x="csX3" y="csY3"/>
+                </a:cxn>
+                <a:cxn ang="0">
+                  <a:pos x="csX4" y="csY4"/>
+                </a:cxn>
+                <a:cxn ang="0">
+                  <a:pos x="csX5" y="csY5"/>
+                </a:cxn>
+                <a:cxn ang="0">
+                  <a:pos x="csX6" y="csY6"/>
+                </a:cxn>
+                <a:cxn ang="0">
+                  <a:pos x="csX7" y="csY7"/>
+                </a:cxn>
+                <a:cxn ang="0">
+                  <a:pos x="csX8" y="csY8"/>
+                </a:cxn>
+                <a:cxn ang="0">
+                  <a:pos x="csX9" y="csY9"/>
+                </a:cxn>
+                <a:cxn ang="0">
+                  <a:pos x="csX10" y="csY10"/>
+                </a:cxn>
+                <a:cxn ang="0">
+                  <a:pos x="csX11" y="csY11"/>
+                </a:cxn>
+                <a:cxn ang="0">
+                  <a:pos x="csX12" y="csY12"/>
+                </a:cxn>
+                <a:cxn ang="0">
+                  <a:pos x="csX13" y="csY13"/>
+                </a:cxn>
+                <a:cxn ang="0">
+                  <a:pos x="csX14" y="csY14"/>
+                </a:cxn>
+                <a:cxn ang="0">
+                  <a:pos x="csX15" y="csY15"/>
+                </a:cxn>
+              </a:cxnLst>
+              <a:rect l="l" t="t" r="r" b="b"/>
+              <a:pathLst>
+                <a:path w="1761688" h="1291904">
+                  <a:moveTo>
+                    <a:pt x="0" y="0"/>
+                  </a:moveTo>
+                  <a:lnTo>
+                    <a:pt x="75501" y="0"/>
+                  </a:lnTo>
+                  <a:lnTo>
+                    <a:pt x="1686187" y="0"/>
+                  </a:lnTo>
+                  <a:lnTo>
+                    <a:pt x="1761688" y="0"/>
+                  </a:lnTo>
+                  <a:lnTo>
+                    <a:pt x="1761688" y="102765"/>
+                  </a:lnTo>
+                  <a:lnTo>
+                    <a:pt x="1686187" y="102765"/>
+                  </a:lnTo>
+                  <a:lnTo>
+                    <a:pt x="1686187" y="1189139"/>
+                  </a:lnTo>
+                  <a:lnTo>
+                    <a:pt x="1761688" y="1189139"/>
+                  </a:lnTo>
+                  <a:lnTo>
+                    <a:pt x="1761688" y="1291904"/>
+                  </a:lnTo>
+                  <a:lnTo>
+                    <a:pt x="1686187" y="1291904"/>
+                  </a:lnTo>
+                  <a:lnTo>
+                    <a:pt x="75501" y="1291904"/>
+                  </a:lnTo>
+                  <a:lnTo>
+                    <a:pt x="0" y="1291904"/>
+                  </a:lnTo>
+                  <a:lnTo>
+                    <a:pt x="0" y="1189139"/>
+                  </a:lnTo>
+                  <a:lnTo>
+                    <a:pt x="75501" y="1189139"/>
+                  </a:lnTo>
+                  <a:lnTo>
+                    <a:pt x="75501" y="102765"/>
+                  </a:lnTo>
+                  <a:lnTo>
+                    <a:pt x="0" y="102765"/>
+                  </a:lnTo>
+                  <a:close/>
+                </a:path>
+              </a:pathLst>
+            </a:custGeom>
+            <a:gradFill flip="none" rotWithShape="1">
+              <a:gsLst>
+                <a:gs pos="100000">
+                  <a:schemeClr val="bg1">
+                    <a:alpha val="46000"/>
+                  </a:schemeClr>
+                </a:gs>
+                <a:gs pos="32000">
+                  <a:schemeClr val="accent1">
+                    <a:tint val="23500"/>
+                    <a:satMod val="160000"/>
+                    <a:alpha val="0"/>
+                  </a:schemeClr>
+                </a:gs>
+              </a:gsLst>
+              <a:path path="circle">
+                <a:fillToRect l="100000" t="100000"/>
+              </a:path>
+              <a:tileRect r="-100000" b="-100000"/>
+            </a:gradFill>
+            <a:ln>
+              <a:noFill/>
+            </a:ln>
+          </p:spPr>
+          <p:style>
+            <a:lnRef idx="2">
+              <a:schemeClr val="accent1">
+                <a:shade val="15000"/>
+              </a:schemeClr>
+            </a:lnRef>
+            <a:fillRef idx="1">
+              <a:schemeClr val="accent1"/>
+            </a:fillRef>
+            <a:effectRef idx="0">
+              <a:schemeClr val="accent1"/>
+            </a:effectRef>
+            <a:fontRef idx="minor">
+              <a:schemeClr val="lt1"/>
+            </a:fontRef>
+          </p:style>
+          <p:txBody>
+            <a:bodyPr wrap="square" rtlCol="0" anchor="ctr">
+              <a:noAutofit/>
+            </a:bodyPr>
+            <a:lstStyle/>
+            <a:p>
+              <a:pPr algn="ctr"/>
+              <a:endParaRPr lang="en-US"/>
+            </a:p>
+          </p:txBody>
+        </p:sp>
+        <p:sp>
+          <p:nvSpPr>
+            <p:cNvPr id="383" name="Freeform: Shape 382">
+              <a:extLst>
+                <a:ext uri="{FF2B5EF4-FFF2-40B4-BE49-F238E27FC236}">
+                  <a16:creationId xmlns:a16="http://schemas.microsoft.com/office/drawing/2014/main" id="{159D3982-00BC-A35D-67B0-6F397C0C5400}"/>
+                </a:ext>
+              </a:extLst>
+            </p:cNvPr>
+            <p:cNvSpPr/>
+            <p:nvPr/>
+          </p:nvSpPr>
+          <p:spPr>
+            <a:xfrm>
+              <a:off x="7843312" y="4203448"/>
+              <a:ext cx="932818" cy="652165"/>
+            </a:xfrm>
+            <a:custGeom>
+              <a:avLst/>
+              <a:gdLst>
+                <a:gd name="csX0" fmla="*/ 0 w 1761688"/>
+                <a:gd name="csY0" fmla="*/ 0 h 1291904"/>
+                <a:gd name="csX1" fmla="*/ 75501 w 1761688"/>
+                <a:gd name="csY1" fmla="*/ 0 h 1291904"/>
+                <a:gd name="csX2" fmla="*/ 1686187 w 1761688"/>
+                <a:gd name="csY2" fmla="*/ 0 h 1291904"/>
+                <a:gd name="csX3" fmla="*/ 1761688 w 1761688"/>
+                <a:gd name="csY3" fmla="*/ 0 h 1291904"/>
+                <a:gd name="csX4" fmla="*/ 1761688 w 1761688"/>
+                <a:gd name="csY4" fmla="*/ 102765 h 1291904"/>
+                <a:gd name="csX5" fmla="*/ 1686187 w 1761688"/>
+                <a:gd name="csY5" fmla="*/ 102765 h 1291904"/>
+                <a:gd name="csX6" fmla="*/ 1686187 w 1761688"/>
+                <a:gd name="csY6" fmla="*/ 1189139 h 1291904"/>
+                <a:gd name="csX7" fmla="*/ 1761688 w 1761688"/>
+                <a:gd name="csY7" fmla="*/ 1189139 h 1291904"/>
+                <a:gd name="csX8" fmla="*/ 1761688 w 1761688"/>
+                <a:gd name="csY8" fmla="*/ 1291904 h 1291904"/>
+                <a:gd name="csX9" fmla="*/ 1686187 w 1761688"/>
+                <a:gd name="csY9" fmla="*/ 1291904 h 1291904"/>
+                <a:gd name="csX10" fmla="*/ 75501 w 1761688"/>
+                <a:gd name="csY10" fmla="*/ 1291904 h 1291904"/>
+                <a:gd name="csX11" fmla="*/ 0 w 1761688"/>
+                <a:gd name="csY11" fmla="*/ 1291904 h 1291904"/>
+                <a:gd name="csX12" fmla="*/ 0 w 1761688"/>
+                <a:gd name="csY12" fmla="*/ 1189139 h 1291904"/>
+                <a:gd name="csX13" fmla="*/ 75501 w 1761688"/>
+                <a:gd name="csY13" fmla="*/ 1189139 h 1291904"/>
+                <a:gd name="csX14" fmla="*/ 75501 w 1761688"/>
+                <a:gd name="csY14" fmla="*/ 102765 h 1291904"/>
+                <a:gd name="csX15" fmla="*/ 0 w 1761688"/>
+                <a:gd name="csY15" fmla="*/ 102765 h 1291904"/>
+              </a:gdLst>
+              <a:ahLst/>
+              <a:cxnLst>
+                <a:cxn ang="0">
+                  <a:pos x="csX0" y="csY0"/>
+                </a:cxn>
+                <a:cxn ang="0">
+                  <a:pos x="csX1" y="csY1"/>
+                </a:cxn>
+                <a:cxn ang="0">
+                  <a:pos x="csX2" y="csY2"/>
+                </a:cxn>
+                <a:cxn ang="0">
+                  <a:pos x="csX3" y="csY3"/>
+                </a:cxn>
+                <a:cxn ang="0">
+                  <a:pos x="csX4" y="csY4"/>
+                </a:cxn>
+                <a:cxn ang="0">
+                  <a:pos x="csX5" y="csY5"/>
+                </a:cxn>
+                <a:cxn ang="0">
+                  <a:pos x="csX6" y="csY6"/>
+                </a:cxn>
+                <a:cxn ang="0">
+                  <a:pos x="csX7" y="csY7"/>
+                </a:cxn>
+                <a:cxn ang="0">
+                  <a:pos x="csX8" y="csY8"/>
+                </a:cxn>
+                <a:cxn ang="0">
+                  <a:pos x="csX9" y="csY9"/>
+                </a:cxn>
+                <a:cxn ang="0">
+                  <a:pos x="csX10" y="csY10"/>
+                </a:cxn>
+                <a:cxn ang="0">
+                  <a:pos x="csX11" y="csY11"/>
+                </a:cxn>
+                <a:cxn ang="0">
+                  <a:pos x="csX12" y="csY12"/>
+                </a:cxn>
+                <a:cxn ang="0">
+                  <a:pos x="csX13" y="csY13"/>
+                </a:cxn>
+                <a:cxn ang="0">
+                  <a:pos x="csX14" y="csY14"/>
+                </a:cxn>
+                <a:cxn ang="0">
+                  <a:pos x="csX15" y="csY15"/>
+                </a:cxn>
+              </a:cxnLst>
+              <a:rect l="l" t="t" r="r" b="b"/>
+              <a:pathLst>
+                <a:path w="1761688" h="1291904">
+                  <a:moveTo>
+                    <a:pt x="0" y="0"/>
+                  </a:moveTo>
+                  <a:lnTo>
+                    <a:pt x="75501" y="0"/>
+                  </a:lnTo>
+                  <a:lnTo>
+                    <a:pt x="1686187" y="0"/>
+                  </a:lnTo>
+                  <a:lnTo>
+                    <a:pt x="1761688" y="0"/>
+                  </a:lnTo>
+                  <a:lnTo>
+                    <a:pt x="1761688" y="102765"/>
+                  </a:lnTo>
+                  <a:lnTo>
+                    <a:pt x="1686187" y="102765"/>
+                  </a:lnTo>
+                  <a:lnTo>
+                    <a:pt x="1686187" y="1189139"/>
+                  </a:lnTo>
+                  <a:lnTo>
+                    <a:pt x="1761688" y="1189139"/>
+                  </a:lnTo>
+                  <a:lnTo>
+                    <a:pt x="1761688" y="1291904"/>
+                  </a:lnTo>
+                  <a:lnTo>
+                    <a:pt x="1686187" y="1291904"/>
+                  </a:lnTo>
+                  <a:lnTo>
+                    <a:pt x="75501" y="1291904"/>
+                  </a:lnTo>
+                  <a:lnTo>
+                    <a:pt x="0" y="1291904"/>
+                  </a:lnTo>
+                  <a:lnTo>
+                    <a:pt x="0" y="1189139"/>
+                  </a:lnTo>
+                  <a:lnTo>
+                    <a:pt x="75501" y="1189139"/>
+                  </a:lnTo>
+                  <a:lnTo>
+                    <a:pt x="75501" y="102765"/>
+                  </a:lnTo>
+                  <a:lnTo>
+                    <a:pt x="0" y="102765"/>
+                  </a:lnTo>
+                  <a:close/>
+                </a:path>
+              </a:pathLst>
+            </a:custGeom>
+            <a:gradFill flip="none" rotWithShape="1">
+              <a:gsLst>
+                <a:gs pos="35000">
+                  <a:srgbClr val="FFC000">
+                    <a:alpha val="0"/>
+                  </a:srgbClr>
+                </a:gs>
+                <a:gs pos="100000">
+                  <a:srgbClr val="FFC000"/>
+                </a:gs>
+              </a:gsLst>
+              <a:path path="circle">
+                <a:fillToRect r="100000" b="100000"/>
+              </a:path>
+              <a:tileRect l="-100000" t="-100000"/>
+            </a:gradFill>
+            <a:ln>
+              <a:noFill/>
+            </a:ln>
+          </p:spPr>
+          <p:style>
+            <a:lnRef idx="2">
+              <a:schemeClr val="accent1">
+                <a:shade val="15000"/>
+              </a:schemeClr>
+            </a:lnRef>
+            <a:fillRef idx="1">
+              <a:schemeClr val="accent1"/>
+            </a:fillRef>
+            <a:effectRef idx="0">
+              <a:schemeClr val="accent1"/>
+            </a:effectRef>
+            <a:fontRef idx="minor">
+              <a:schemeClr val="lt1"/>
+            </a:fontRef>
+          </p:style>
+          <p:txBody>
+            <a:bodyPr wrap="square" rtlCol="0" anchor="ctr">
+              <a:noAutofit/>
+            </a:bodyPr>
+            <a:lstStyle/>
+            <a:p>
+              <a:pPr algn="ctr"/>
+              <a:endParaRPr lang="en-US"/>
+            </a:p>
+          </p:txBody>
+        </p:sp>
+        <p:sp>
+          <p:nvSpPr>
+            <p:cNvPr id="389" name="Freeform: Shape 388">
+              <a:extLst>
+                <a:ext uri="{FF2B5EF4-FFF2-40B4-BE49-F238E27FC236}">
+                  <a16:creationId xmlns:a16="http://schemas.microsoft.com/office/drawing/2014/main" id="{85A12986-16FB-F635-769E-8875AFAFFBF6}"/>
+                </a:ext>
+              </a:extLst>
+            </p:cNvPr>
+            <p:cNvSpPr/>
+            <p:nvPr/>
+          </p:nvSpPr>
+          <p:spPr>
+            <a:xfrm>
+              <a:off x="7843312" y="4203448"/>
+              <a:ext cx="932818" cy="652165"/>
+            </a:xfrm>
+            <a:custGeom>
+              <a:avLst/>
+              <a:gdLst>
+                <a:gd name="csX0" fmla="*/ 0 w 1761688"/>
+                <a:gd name="csY0" fmla="*/ 0 h 1291904"/>
+                <a:gd name="csX1" fmla="*/ 75501 w 1761688"/>
+                <a:gd name="csY1" fmla="*/ 0 h 1291904"/>
+                <a:gd name="csX2" fmla="*/ 1686187 w 1761688"/>
+                <a:gd name="csY2" fmla="*/ 0 h 1291904"/>
+                <a:gd name="csX3" fmla="*/ 1761688 w 1761688"/>
+                <a:gd name="csY3" fmla="*/ 0 h 1291904"/>
+                <a:gd name="csX4" fmla="*/ 1761688 w 1761688"/>
+                <a:gd name="csY4" fmla="*/ 102765 h 1291904"/>
+                <a:gd name="csX5" fmla="*/ 1686187 w 1761688"/>
+                <a:gd name="csY5" fmla="*/ 102765 h 1291904"/>
+                <a:gd name="csX6" fmla="*/ 1686187 w 1761688"/>
+                <a:gd name="csY6" fmla="*/ 1189139 h 1291904"/>
+                <a:gd name="csX7" fmla="*/ 1761688 w 1761688"/>
+                <a:gd name="csY7" fmla="*/ 1189139 h 1291904"/>
+                <a:gd name="csX8" fmla="*/ 1761688 w 1761688"/>
+                <a:gd name="csY8" fmla="*/ 1291904 h 1291904"/>
+                <a:gd name="csX9" fmla="*/ 1686187 w 1761688"/>
+                <a:gd name="csY9" fmla="*/ 1291904 h 1291904"/>
+                <a:gd name="csX10" fmla="*/ 75501 w 1761688"/>
+                <a:gd name="csY10" fmla="*/ 1291904 h 1291904"/>
+                <a:gd name="csX11" fmla="*/ 0 w 1761688"/>
+                <a:gd name="csY11" fmla="*/ 1291904 h 1291904"/>
+                <a:gd name="csX12" fmla="*/ 0 w 1761688"/>
+                <a:gd name="csY12" fmla="*/ 1189139 h 1291904"/>
+                <a:gd name="csX13" fmla="*/ 75501 w 1761688"/>
+                <a:gd name="csY13" fmla="*/ 1189139 h 1291904"/>
+                <a:gd name="csX14" fmla="*/ 75501 w 1761688"/>
+                <a:gd name="csY14" fmla="*/ 102765 h 1291904"/>
+                <a:gd name="csX15" fmla="*/ 0 w 1761688"/>
+                <a:gd name="csY15" fmla="*/ 102765 h 1291904"/>
+              </a:gdLst>
+              <a:ahLst/>
+              <a:cxnLst>
+                <a:cxn ang="0">
+                  <a:pos x="csX0" y="csY0"/>
+                </a:cxn>
+                <a:cxn ang="0">
+                  <a:pos x="csX1" y="csY1"/>
+                </a:cxn>
+                <a:cxn ang="0">
+                  <a:pos x="csX2" y="csY2"/>
+                </a:cxn>
+                <a:cxn ang="0">
+                  <a:pos x="csX3" y="csY3"/>
+                </a:cxn>
+                <a:cxn ang="0">
+                  <a:pos x="csX4" y="csY4"/>
+                </a:cxn>
+                <a:cxn ang="0">
+                  <a:pos x="csX5" y="csY5"/>
+                </a:cxn>
+                <a:cxn ang="0">
+                  <a:pos x="csX6" y="csY6"/>
+                </a:cxn>
+                <a:cxn ang="0">
+                  <a:pos x="csX7" y="csY7"/>
+                </a:cxn>
+                <a:cxn ang="0">
+                  <a:pos x="csX8" y="csY8"/>
+                </a:cxn>
+                <a:cxn ang="0">
+                  <a:pos x="csX9" y="csY9"/>
+                </a:cxn>
+                <a:cxn ang="0">
+                  <a:pos x="csX10" y="csY10"/>
+                </a:cxn>
+                <a:cxn ang="0">
+                  <a:pos x="csX11" y="csY11"/>
+                </a:cxn>
+                <a:cxn ang="0">
+                  <a:pos x="csX12" y="csY12"/>
+                </a:cxn>
+                <a:cxn ang="0">
+                  <a:pos x="csX13" y="csY13"/>
+                </a:cxn>
+                <a:cxn ang="0">
+                  <a:pos x="csX14" y="csY14"/>
+                </a:cxn>
+                <a:cxn ang="0">
+                  <a:pos x="csX15" y="csY15"/>
+                </a:cxn>
+              </a:cxnLst>
+              <a:rect l="l" t="t" r="r" b="b"/>
+              <a:pathLst>
+                <a:path w="1761688" h="1291904">
+                  <a:moveTo>
+                    <a:pt x="0" y="0"/>
+                  </a:moveTo>
+                  <a:lnTo>
+                    <a:pt x="75501" y="0"/>
+                  </a:lnTo>
+                  <a:lnTo>
+                    <a:pt x="1686187" y="0"/>
+                  </a:lnTo>
+                  <a:lnTo>
+                    <a:pt x="1761688" y="0"/>
+                  </a:lnTo>
+                  <a:lnTo>
+                    <a:pt x="1761688" y="102765"/>
+                  </a:lnTo>
+                  <a:lnTo>
+                    <a:pt x="1686187" y="102765"/>
+                  </a:lnTo>
+                  <a:lnTo>
+                    <a:pt x="1686187" y="1189139"/>
+                  </a:lnTo>
+                  <a:lnTo>
+                    <a:pt x="1761688" y="1189139"/>
+                  </a:lnTo>
+                  <a:lnTo>
+                    <a:pt x="1761688" y="1291904"/>
+                  </a:lnTo>
+                  <a:lnTo>
+                    <a:pt x="1686187" y="1291904"/>
+                  </a:lnTo>
+                  <a:lnTo>
+                    <a:pt x="75501" y="1291904"/>
+                  </a:lnTo>
+                  <a:lnTo>
+                    <a:pt x="0" y="1291904"/>
+                  </a:lnTo>
+                  <a:lnTo>
+                    <a:pt x="0" y="1189139"/>
+                  </a:lnTo>
+                  <a:lnTo>
+                    <a:pt x="75501" y="1189139"/>
+                  </a:lnTo>
+                  <a:lnTo>
+                    <a:pt x="75501" y="102765"/>
+                  </a:lnTo>
+                  <a:lnTo>
+                    <a:pt x="0" y="102765"/>
+                  </a:lnTo>
+                  <a:close/>
+                </a:path>
+              </a:pathLst>
+            </a:custGeom>
+            <a:gradFill flip="none" rotWithShape="1">
+              <a:gsLst>
+                <a:gs pos="95000">
+                  <a:srgbClr val="F74B29">
+                    <a:alpha val="25000"/>
+                  </a:srgbClr>
+                </a:gs>
+                <a:gs pos="52000">
+                  <a:srgbClr val="F74B29">
+                    <a:alpha val="0"/>
+                  </a:srgbClr>
+                </a:gs>
+              </a:gsLst>
+              <a:lin ang="6600000" scaled="0"/>
+              <a:tileRect/>
+            </a:gradFill>
+            <a:ln>
+              <a:noFill/>
+            </a:ln>
+          </p:spPr>
+          <p:style>
+            <a:lnRef idx="2">
+              <a:schemeClr val="accent1">
+                <a:shade val="15000"/>
+              </a:schemeClr>
+            </a:lnRef>
+            <a:fillRef idx="1">
+              <a:schemeClr val="accent1"/>
+            </a:fillRef>
+            <a:effectRef idx="0">
+              <a:schemeClr val="accent1"/>
+            </a:effectRef>
+            <a:fontRef idx="minor">
+              <a:schemeClr val="lt1"/>
+            </a:fontRef>
+          </p:style>
+          <p:txBody>
+            <a:bodyPr rtlCol="0" anchor="ctr"/>
+            <a:lstStyle/>
+            <a:p>
+              <a:pPr algn="ctr"/>
+              <a:endParaRPr lang="en-US"/>
+            </a:p>
+          </p:txBody>
+        </p:sp>
+      </p:grpSp>
+      <p:grpSp>
+        <p:nvGrpSpPr>
+          <p:cNvPr id="10" name="Group 9">
+            <a:extLst>
+              <a:ext uri="{FF2B5EF4-FFF2-40B4-BE49-F238E27FC236}">
+                <a16:creationId xmlns:a16="http://schemas.microsoft.com/office/drawing/2014/main" id="{2E7C8A94-B9FF-B529-7D46-0AEB7646C62C}"/>
+              </a:ext>
+            </a:extLst>
+          </p:cNvPr>
+          <p:cNvGrpSpPr/>
+          <p:nvPr/>
+        </p:nvGrpSpPr>
+        <p:grpSpPr>
+          <a:xfrm>
+            <a:off x="6736883" y="4203448"/>
+            <a:ext cx="937260" cy="652165"/>
+            <a:chOff x="6736883" y="4203448"/>
+            <a:chExt cx="937260" cy="652165"/>
+          </a:xfrm>
+        </p:grpSpPr>
+        <p:sp>
+          <p:nvSpPr>
             <p:cNvPr id="372" name="Freeform: Shape 371">
               <a:extLst>
                 <a:ext uri="{FF2B5EF4-FFF2-40B4-BE49-F238E27FC236}">
@@ -6904,7 +7765,7 @@
           </p:nvSpPr>
           <p:spPr>
             <a:xfrm>
-              <a:off x="3492986" y="590658"/>
+              <a:off x="6736883" y="4203448"/>
               <a:ext cx="937260" cy="652165"/>
             </a:xfrm>
             <a:custGeom>
@@ -7077,6 +7938,623 @@
         </p:sp>
         <p:sp>
           <p:nvSpPr>
+            <p:cNvPr id="378" name="Freeform: Shape 377">
+              <a:extLst>
+                <a:ext uri="{FF2B5EF4-FFF2-40B4-BE49-F238E27FC236}">
+                  <a16:creationId xmlns:a16="http://schemas.microsoft.com/office/drawing/2014/main" id="{95B86A62-56C5-7E39-49DA-2A8B8476931F}"/>
+                </a:ext>
+              </a:extLst>
+            </p:cNvPr>
+            <p:cNvSpPr/>
+            <p:nvPr/>
+          </p:nvSpPr>
+          <p:spPr>
+            <a:xfrm>
+              <a:off x="6736883" y="4203448"/>
+              <a:ext cx="937260" cy="652165"/>
+            </a:xfrm>
+            <a:custGeom>
+              <a:avLst/>
+              <a:gdLst>
+                <a:gd name="csX0" fmla="*/ 0 w 937260"/>
+                <a:gd name="csY0" fmla="*/ 0 h 652165"/>
+                <a:gd name="csX1" fmla="*/ 179 w 937260"/>
+                <a:gd name="csY1" fmla="*/ 0 h 652165"/>
+                <a:gd name="csX2" fmla="*/ 116373 w 937260"/>
+                <a:gd name="csY2" fmla="*/ 31552 h 652165"/>
+                <a:gd name="csX3" fmla="*/ 468630 w 937260"/>
+                <a:gd name="csY3" fmla="*/ 67131 h 652165"/>
+                <a:gd name="csX4" fmla="*/ 820887 w 937260"/>
+                <a:gd name="csY4" fmla="*/ 31552 h 652165"/>
+                <a:gd name="csX5" fmla="*/ 937081 w 937260"/>
+                <a:gd name="csY5" fmla="*/ 0 h 652165"/>
+                <a:gd name="csX6" fmla="*/ 937260 w 937260"/>
+                <a:gd name="csY6" fmla="*/ 0 h 652165"/>
+                <a:gd name="csX7" fmla="*/ 937260 w 937260"/>
+                <a:gd name="csY7" fmla="*/ 652165 h 652165"/>
+                <a:gd name="csX8" fmla="*/ 937078 w 937260"/>
+                <a:gd name="csY8" fmla="*/ 652165 h 652165"/>
+                <a:gd name="csX9" fmla="*/ 820887 w 937260"/>
+                <a:gd name="csY9" fmla="*/ 620614 h 652165"/>
+                <a:gd name="csX10" fmla="*/ 468630 w 937260"/>
+                <a:gd name="csY10" fmla="*/ 585035 h 652165"/>
+                <a:gd name="csX11" fmla="*/ 116373 w 937260"/>
+                <a:gd name="csY11" fmla="*/ 620614 h 652165"/>
+                <a:gd name="csX12" fmla="*/ 183 w 937260"/>
+                <a:gd name="csY12" fmla="*/ 652165 h 652165"/>
+                <a:gd name="csX13" fmla="*/ 0 w 937260"/>
+                <a:gd name="csY13" fmla="*/ 652165 h 652165"/>
+              </a:gdLst>
+              <a:ahLst/>
+              <a:cxnLst>
+                <a:cxn ang="0">
+                  <a:pos x="csX0" y="csY0"/>
+                </a:cxn>
+                <a:cxn ang="0">
+                  <a:pos x="csX1" y="csY1"/>
+                </a:cxn>
+                <a:cxn ang="0">
+                  <a:pos x="csX2" y="csY2"/>
+                </a:cxn>
+                <a:cxn ang="0">
+                  <a:pos x="csX3" y="csY3"/>
+                </a:cxn>
+                <a:cxn ang="0">
+                  <a:pos x="csX4" y="csY4"/>
+                </a:cxn>
+                <a:cxn ang="0">
+                  <a:pos x="csX5" y="csY5"/>
+                </a:cxn>
+                <a:cxn ang="0">
+                  <a:pos x="csX6" y="csY6"/>
+                </a:cxn>
+                <a:cxn ang="0">
+                  <a:pos x="csX7" y="csY7"/>
+                </a:cxn>
+                <a:cxn ang="0">
+                  <a:pos x="csX8" y="csY8"/>
+                </a:cxn>
+                <a:cxn ang="0">
+                  <a:pos x="csX9" y="csY9"/>
+                </a:cxn>
+                <a:cxn ang="0">
+                  <a:pos x="csX10" y="csY10"/>
+                </a:cxn>
+                <a:cxn ang="0">
+                  <a:pos x="csX11" y="csY11"/>
+                </a:cxn>
+                <a:cxn ang="0">
+                  <a:pos x="csX12" y="csY12"/>
+                </a:cxn>
+                <a:cxn ang="0">
+                  <a:pos x="csX13" y="csY13"/>
+                </a:cxn>
+              </a:cxnLst>
+              <a:rect l="l" t="t" r="r" b="b"/>
+              <a:pathLst>
+                <a:path w="937260" h="652165">
+                  <a:moveTo>
+                    <a:pt x="0" y="0"/>
+                  </a:moveTo>
+                  <a:lnTo>
+                    <a:pt x="179" y="0"/>
+                  </a:lnTo>
+                  <a:lnTo>
+                    <a:pt x="116373" y="31552"/>
+                  </a:lnTo>
+                  <a:cubicBezTo>
+                    <a:pt x="224643" y="54462"/>
+                    <a:pt x="343679" y="67131"/>
+                    <a:pt x="468630" y="67131"/>
+                  </a:cubicBezTo>
+                  <a:cubicBezTo>
+                    <a:pt x="593581" y="67131"/>
+                    <a:pt x="712618" y="54462"/>
+                    <a:pt x="820887" y="31552"/>
+                  </a:cubicBezTo>
+                  <a:lnTo>
+                    <a:pt x="937081" y="0"/>
+                  </a:lnTo>
+                  <a:lnTo>
+                    <a:pt x="937260" y="0"/>
+                  </a:lnTo>
+                  <a:lnTo>
+                    <a:pt x="937260" y="652165"/>
+                  </a:lnTo>
+                  <a:lnTo>
+                    <a:pt x="937078" y="652165"/>
+                  </a:lnTo>
+                  <a:lnTo>
+                    <a:pt x="820887" y="620614"/>
+                  </a:lnTo>
+                  <a:cubicBezTo>
+                    <a:pt x="712618" y="597704"/>
+                    <a:pt x="593581" y="585035"/>
+                    <a:pt x="468630" y="585035"/>
+                  </a:cubicBezTo>
+                  <a:cubicBezTo>
+                    <a:pt x="343679" y="585035"/>
+                    <a:pt x="224643" y="597704"/>
+                    <a:pt x="116373" y="620614"/>
+                  </a:cubicBezTo>
+                  <a:lnTo>
+                    <a:pt x="183" y="652165"/>
+                  </a:lnTo>
+                  <a:lnTo>
+                    <a:pt x="0" y="652165"/>
+                  </a:lnTo>
+                  <a:close/>
+                </a:path>
+              </a:pathLst>
+            </a:custGeom>
+            <a:gradFill flip="none" rotWithShape="1">
+              <a:gsLst>
+                <a:gs pos="100000">
+                  <a:schemeClr val="bg1">
+                    <a:alpha val="46000"/>
+                  </a:schemeClr>
+                </a:gs>
+                <a:gs pos="31000">
+                  <a:schemeClr val="accent1">
+                    <a:tint val="23500"/>
+                    <a:satMod val="160000"/>
+                    <a:alpha val="0"/>
+                  </a:schemeClr>
+                </a:gs>
+              </a:gsLst>
+              <a:path path="circle">
+                <a:fillToRect l="100000" t="100000"/>
+              </a:path>
+              <a:tileRect r="-100000" b="-100000"/>
+            </a:gradFill>
+            <a:ln>
+              <a:noFill/>
+            </a:ln>
+          </p:spPr>
+          <p:style>
+            <a:lnRef idx="2">
+              <a:schemeClr val="accent1">
+                <a:shade val="15000"/>
+              </a:schemeClr>
+            </a:lnRef>
+            <a:fillRef idx="1">
+              <a:schemeClr val="accent1"/>
+            </a:fillRef>
+            <a:effectRef idx="0">
+              <a:schemeClr val="accent1"/>
+            </a:effectRef>
+            <a:fontRef idx="minor">
+              <a:schemeClr val="lt1"/>
+            </a:fontRef>
+          </p:style>
+          <p:txBody>
+            <a:bodyPr wrap="square" rtlCol="0" anchor="ctr">
+              <a:noAutofit/>
+            </a:bodyPr>
+            <a:lstStyle/>
+            <a:p>
+              <a:pPr algn="ctr"/>
+              <a:endParaRPr lang="en-US"/>
+            </a:p>
+          </p:txBody>
+        </p:sp>
+        <p:sp>
+          <p:nvSpPr>
+            <p:cNvPr id="384" name="Freeform: Shape 383">
+              <a:extLst>
+                <a:ext uri="{FF2B5EF4-FFF2-40B4-BE49-F238E27FC236}">
+                  <a16:creationId xmlns:a16="http://schemas.microsoft.com/office/drawing/2014/main" id="{D13259C3-6F29-EA99-E506-F44CFE698053}"/>
+                </a:ext>
+              </a:extLst>
+            </p:cNvPr>
+            <p:cNvSpPr/>
+            <p:nvPr/>
+          </p:nvSpPr>
+          <p:spPr>
+            <a:xfrm>
+              <a:off x="6736883" y="4203448"/>
+              <a:ext cx="937260" cy="652165"/>
+            </a:xfrm>
+            <a:custGeom>
+              <a:avLst/>
+              <a:gdLst>
+                <a:gd name="csX0" fmla="*/ 0 w 937260"/>
+                <a:gd name="csY0" fmla="*/ 0 h 652165"/>
+                <a:gd name="csX1" fmla="*/ 179 w 937260"/>
+                <a:gd name="csY1" fmla="*/ 0 h 652165"/>
+                <a:gd name="csX2" fmla="*/ 116373 w 937260"/>
+                <a:gd name="csY2" fmla="*/ 31552 h 652165"/>
+                <a:gd name="csX3" fmla="*/ 468630 w 937260"/>
+                <a:gd name="csY3" fmla="*/ 67131 h 652165"/>
+                <a:gd name="csX4" fmla="*/ 820887 w 937260"/>
+                <a:gd name="csY4" fmla="*/ 31552 h 652165"/>
+                <a:gd name="csX5" fmla="*/ 937081 w 937260"/>
+                <a:gd name="csY5" fmla="*/ 0 h 652165"/>
+                <a:gd name="csX6" fmla="*/ 937260 w 937260"/>
+                <a:gd name="csY6" fmla="*/ 0 h 652165"/>
+                <a:gd name="csX7" fmla="*/ 937260 w 937260"/>
+                <a:gd name="csY7" fmla="*/ 652165 h 652165"/>
+                <a:gd name="csX8" fmla="*/ 937078 w 937260"/>
+                <a:gd name="csY8" fmla="*/ 652165 h 652165"/>
+                <a:gd name="csX9" fmla="*/ 820887 w 937260"/>
+                <a:gd name="csY9" fmla="*/ 620614 h 652165"/>
+                <a:gd name="csX10" fmla="*/ 468630 w 937260"/>
+                <a:gd name="csY10" fmla="*/ 585035 h 652165"/>
+                <a:gd name="csX11" fmla="*/ 116373 w 937260"/>
+                <a:gd name="csY11" fmla="*/ 620614 h 652165"/>
+                <a:gd name="csX12" fmla="*/ 183 w 937260"/>
+                <a:gd name="csY12" fmla="*/ 652165 h 652165"/>
+                <a:gd name="csX13" fmla="*/ 0 w 937260"/>
+                <a:gd name="csY13" fmla="*/ 652165 h 652165"/>
+              </a:gdLst>
+              <a:ahLst/>
+              <a:cxnLst>
+                <a:cxn ang="0">
+                  <a:pos x="csX0" y="csY0"/>
+                </a:cxn>
+                <a:cxn ang="0">
+                  <a:pos x="csX1" y="csY1"/>
+                </a:cxn>
+                <a:cxn ang="0">
+                  <a:pos x="csX2" y="csY2"/>
+                </a:cxn>
+                <a:cxn ang="0">
+                  <a:pos x="csX3" y="csY3"/>
+                </a:cxn>
+                <a:cxn ang="0">
+                  <a:pos x="csX4" y="csY4"/>
+                </a:cxn>
+                <a:cxn ang="0">
+                  <a:pos x="csX5" y="csY5"/>
+                </a:cxn>
+                <a:cxn ang="0">
+                  <a:pos x="csX6" y="csY6"/>
+                </a:cxn>
+                <a:cxn ang="0">
+                  <a:pos x="csX7" y="csY7"/>
+                </a:cxn>
+                <a:cxn ang="0">
+                  <a:pos x="csX8" y="csY8"/>
+                </a:cxn>
+                <a:cxn ang="0">
+                  <a:pos x="csX9" y="csY9"/>
+                </a:cxn>
+                <a:cxn ang="0">
+                  <a:pos x="csX10" y="csY10"/>
+                </a:cxn>
+                <a:cxn ang="0">
+                  <a:pos x="csX11" y="csY11"/>
+                </a:cxn>
+                <a:cxn ang="0">
+                  <a:pos x="csX12" y="csY12"/>
+                </a:cxn>
+                <a:cxn ang="0">
+                  <a:pos x="csX13" y="csY13"/>
+                </a:cxn>
+              </a:cxnLst>
+              <a:rect l="l" t="t" r="r" b="b"/>
+              <a:pathLst>
+                <a:path w="937260" h="652165">
+                  <a:moveTo>
+                    <a:pt x="0" y="0"/>
+                  </a:moveTo>
+                  <a:lnTo>
+                    <a:pt x="179" y="0"/>
+                  </a:lnTo>
+                  <a:lnTo>
+                    <a:pt x="116373" y="31552"/>
+                  </a:lnTo>
+                  <a:cubicBezTo>
+                    <a:pt x="224643" y="54462"/>
+                    <a:pt x="343679" y="67131"/>
+                    <a:pt x="468630" y="67131"/>
+                  </a:cubicBezTo>
+                  <a:cubicBezTo>
+                    <a:pt x="593581" y="67131"/>
+                    <a:pt x="712618" y="54462"/>
+                    <a:pt x="820887" y="31552"/>
+                  </a:cubicBezTo>
+                  <a:lnTo>
+                    <a:pt x="937081" y="0"/>
+                  </a:lnTo>
+                  <a:lnTo>
+                    <a:pt x="937260" y="0"/>
+                  </a:lnTo>
+                  <a:lnTo>
+                    <a:pt x="937260" y="652165"/>
+                  </a:lnTo>
+                  <a:lnTo>
+                    <a:pt x="937078" y="652165"/>
+                  </a:lnTo>
+                  <a:lnTo>
+                    <a:pt x="820887" y="620614"/>
+                  </a:lnTo>
+                  <a:cubicBezTo>
+                    <a:pt x="712618" y="597704"/>
+                    <a:pt x="593581" y="585035"/>
+                    <a:pt x="468630" y="585035"/>
+                  </a:cubicBezTo>
+                  <a:cubicBezTo>
+                    <a:pt x="343679" y="585035"/>
+                    <a:pt x="224643" y="597704"/>
+                    <a:pt x="116373" y="620614"/>
+                  </a:cubicBezTo>
+                  <a:lnTo>
+                    <a:pt x="183" y="652165"/>
+                  </a:lnTo>
+                  <a:lnTo>
+                    <a:pt x="0" y="652165"/>
+                  </a:lnTo>
+                  <a:close/>
+                </a:path>
+              </a:pathLst>
+            </a:custGeom>
+            <a:gradFill flip="none" rotWithShape="1">
+              <a:gsLst>
+                <a:gs pos="41000">
+                  <a:srgbClr val="00CC5C">
+                    <a:alpha val="0"/>
+                  </a:srgbClr>
+                </a:gs>
+                <a:gs pos="100000">
+                  <a:srgbClr val="00CC5C"/>
+                </a:gs>
+              </a:gsLst>
+              <a:path path="circle">
+                <a:fillToRect r="100000" b="100000"/>
+              </a:path>
+              <a:tileRect l="-100000" t="-100000"/>
+            </a:gradFill>
+            <a:ln>
+              <a:noFill/>
+            </a:ln>
+          </p:spPr>
+          <p:style>
+            <a:lnRef idx="2">
+              <a:schemeClr val="accent1">
+                <a:shade val="15000"/>
+              </a:schemeClr>
+            </a:lnRef>
+            <a:fillRef idx="1">
+              <a:schemeClr val="accent1"/>
+            </a:fillRef>
+            <a:effectRef idx="0">
+              <a:schemeClr val="accent1"/>
+            </a:effectRef>
+            <a:fontRef idx="minor">
+              <a:schemeClr val="lt1"/>
+            </a:fontRef>
+          </p:style>
+          <p:txBody>
+            <a:bodyPr wrap="square" rtlCol="0" anchor="ctr">
+              <a:noAutofit/>
+            </a:bodyPr>
+            <a:lstStyle/>
+            <a:p>
+              <a:pPr algn="ctr"/>
+              <a:endParaRPr lang="en-US"/>
+            </a:p>
+          </p:txBody>
+        </p:sp>
+        <p:sp>
+          <p:nvSpPr>
+            <p:cNvPr id="390" name="Freeform: Shape 389">
+              <a:extLst>
+                <a:ext uri="{FF2B5EF4-FFF2-40B4-BE49-F238E27FC236}">
+                  <a16:creationId xmlns:a16="http://schemas.microsoft.com/office/drawing/2014/main" id="{DB153151-5F39-E7DB-53AB-C319303C4144}"/>
+                </a:ext>
+              </a:extLst>
+            </p:cNvPr>
+            <p:cNvSpPr/>
+            <p:nvPr/>
+          </p:nvSpPr>
+          <p:spPr>
+            <a:xfrm>
+              <a:off x="6736883" y="4203448"/>
+              <a:ext cx="937260" cy="652165"/>
+            </a:xfrm>
+            <a:custGeom>
+              <a:avLst/>
+              <a:gdLst>
+                <a:gd name="csX0" fmla="*/ 0 w 937260"/>
+                <a:gd name="csY0" fmla="*/ 0 h 652165"/>
+                <a:gd name="csX1" fmla="*/ 179 w 937260"/>
+                <a:gd name="csY1" fmla="*/ 0 h 652165"/>
+                <a:gd name="csX2" fmla="*/ 116373 w 937260"/>
+                <a:gd name="csY2" fmla="*/ 31552 h 652165"/>
+                <a:gd name="csX3" fmla="*/ 468630 w 937260"/>
+                <a:gd name="csY3" fmla="*/ 67131 h 652165"/>
+                <a:gd name="csX4" fmla="*/ 820887 w 937260"/>
+                <a:gd name="csY4" fmla="*/ 31552 h 652165"/>
+                <a:gd name="csX5" fmla="*/ 937081 w 937260"/>
+                <a:gd name="csY5" fmla="*/ 0 h 652165"/>
+                <a:gd name="csX6" fmla="*/ 937260 w 937260"/>
+                <a:gd name="csY6" fmla="*/ 0 h 652165"/>
+                <a:gd name="csX7" fmla="*/ 937260 w 937260"/>
+                <a:gd name="csY7" fmla="*/ 652165 h 652165"/>
+                <a:gd name="csX8" fmla="*/ 937078 w 937260"/>
+                <a:gd name="csY8" fmla="*/ 652165 h 652165"/>
+                <a:gd name="csX9" fmla="*/ 820887 w 937260"/>
+                <a:gd name="csY9" fmla="*/ 620614 h 652165"/>
+                <a:gd name="csX10" fmla="*/ 468630 w 937260"/>
+                <a:gd name="csY10" fmla="*/ 585035 h 652165"/>
+                <a:gd name="csX11" fmla="*/ 116373 w 937260"/>
+                <a:gd name="csY11" fmla="*/ 620614 h 652165"/>
+                <a:gd name="csX12" fmla="*/ 183 w 937260"/>
+                <a:gd name="csY12" fmla="*/ 652165 h 652165"/>
+                <a:gd name="csX13" fmla="*/ 0 w 937260"/>
+                <a:gd name="csY13" fmla="*/ 652165 h 652165"/>
+              </a:gdLst>
+              <a:ahLst/>
+              <a:cxnLst>
+                <a:cxn ang="0">
+                  <a:pos x="csX0" y="csY0"/>
+                </a:cxn>
+                <a:cxn ang="0">
+                  <a:pos x="csX1" y="csY1"/>
+                </a:cxn>
+                <a:cxn ang="0">
+                  <a:pos x="csX2" y="csY2"/>
+                </a:cxn>
+                <a:cxn ang="0">
+                  <a:pos x="csX3" y="csY3"/>
+                </a:cxn>
+                <a:cxn ang="0">
+                  <a:pos x="csX4" y="csY4"/>
+                </a:cxn>
+                <a:cxn ang="0">
+                  <a:pos x="csX5" y="csY5"/>
+                </a:cxn>
+                <a:cxn ang="0">
+                  <a:pos x="csX6" y="csY6"/>
+                </a:cxn>
+                <a:cxn ang="0">
+                  <a:pos x="csX7" y="csY7"/>
+                </a:cxn>
+                <a:cxn ang="0">
+                  <a:pos x="csX8" y="csY8"/>
+                </a:cxn>
+                <a:cxn ang="0">
+                  <a:pos x="csX9" y="csY9"/>
+                </a:cxn>
+                <a:cxn ang="0">
+                  <a:pos x="csX10" y="csY10"/>
+                </a:cxn>
+                <a:cxn ang="0">
+                  <a:pos x="csX11" y="csY11"/>
+                </a:cxn>
+                <a:cxn ang="0">
+                  <a:pos x="csX12" y="csY12"/>
+                </a:cxn>
+                <a:cxn ang="0">
+                  <a:pos x="csX13" y="csY13"/>
+                </a:cxn>
+              </a:cxnLst>
+              <a:rect l="l" t="t" r="r" b="b"/>
+              <a:pathLst>
+                <a:path w="937260" h="652165">
+                  <a:moveTo>
+                    <a:pt x="0" y="0"/>
+                  </a:moveTo>
+                  <a:lnTo>
+                    <a:pt x="179" y="0"/>
+                  </a:lnTo>
+                  <a:lnTo>
+                    <a:pt x="116373" y="31552"/>
+                  </a:lnTo>
+                  <a:cubicBezTo>
+                    <a:pt x="224643" y="54462"/>
+                    <a:pt x="343679" y="67131"/>
+                    <a:pt x="468630" y="67131"/>
+                  </a:cubicBezTo>
+                  <a:cubicBezTo>
+                    <a:pt x="593581" y="67131"/>
+                    <a:pt x="712618" y="54462"/>
+                    <a:pt x="820887" y="31552"/>
+                  </a:cubicBezTo>
+                  <a:lnTo>
+                    <a:pt x="937081" y="0"/>
+                  </a:lnTo>
+                  <a:lnTo>
+                    <a:pt x="937260" y="0"/>
+                  </a:lnTo>
+                  <a:lnTo>
+                    <a:pt x="937260" y="652165"/>
+                  </a:lnTo>
+                  <a:lnTo>
+                    <a:pt x="937078" y="652165"/>
+                  </a:lnTo>
+                  <a:lnTo>
+                    <a:pt x="820887" y="620614"/>
+                  </a:lnTo>
+                  <a:cubicBezTo>
+                    <a:pt x="712618" y="597704"/>
+                    <a:pt x="593581" y="585035"/>
+                    <a:pt x="468630" y="585035"/>
+                  </a:cubicBezTo>
+                  <a:cubicBezTo>
+                    <a:pt x="343679" y="585035"/>
+                    <a:pt x="224643" y="597704"/>
+                    <a:pt x="116373" y="620614"/>
+                  </a:cubicBezTo>
+                  <a:lnTo>
+                    <a:pt x="183" y="652165"/>
+                  </a:lnTo>
+                  <a:lnTo>
+                    <a:pt x="0" y="652165"/>
+                  </a:lnTo>
+                  <a:close/>
+                </a:path>
+              </a:pathLst>
+            </a:custGeom>
+            <a:gradFill flip="none" rotWithShape="1">
+              <a:gsLst>
+                <a:gs pos="87000">
+                  <a:srgbClr val="00B0F0">
+                    <a:alpha val="34000"/>
+                  </a:srgbClr>
+                </a:gs>
+                <a:gs pos="56000">
+                  <a:srgbClr val="00B0F0">
+                    <a:alpha val="0"/>
+                  </a:srgbClr>
+                </a:gs>
+              </a:gsLst>
+              <a:lin ang="6600000" scaled="0"/>
+              <a:tileRect/>
+            </a:gradFill>
+            <a:ln>
+              <a:noFill/>
+            </a:ln>
+          </p:spPr>
+          <p:style>
+            <a:lnRef idx="2">
+              <a:schemeClr val="accent1">
+                <a:shade val="15000"/>
+              </a:schemeClr>
+            </a:lnRef>
+            <a:fillRef idx="1">
+              <a:schemeClr val="accent1"/>
+            </a:fillRef>
+            <a:effectRef idx="0">
+              <a:schemeClr val="accent1"/>
+            </a:effectRef>
+            <a:fontRef idx="minor">
+              <a:schemeClr val="lt1"/>
+            </a:fontRef>
+          </p:style>
+          <p:txBody>
+            <a:bodyPr rtlCol="0" anchor="ctr"/>
+            <a:lstStyle/>
+            <a:p>
+              <a:pPr algn="ctr"/>
+              <a:endParaRPr lang="en-US"/>
+            </a:p>
+          </p:txBody>
+        </p:sp>
+      </p:grpSp>
+      <p:grpSp>
+        <p:nvGrpSpPr>
+          <p:cNvPr id="8" name="Group 7">
+            <a:extLst>
+              <a:ext uri="{FF2B5EF4-FFF2-40B4-BE49-F238E27FC236}">
+                <a16:creationId xmlns:a16="http://schemas.microsoft.com/office/drawing/2014/main" id="{707984AD-93F2-AC20-03E3-ED315ABE85CD}"/>
+              </a:ext>
+            </a:extLst>
+          </p:cNvPr>
+          <p:cNvGrpSpPr/>
+          <p:nvPr/>
+        </p:nvGrpSpPr>
+        <p:grpSpPr>
+          <a:xfrm>
+            <a:off x="4523163" y="4203448"/>
+            <a:ext cx="937260" cy="652164"/>
+            <a:chOff x="4523163" y="4203448"/>
+            <a:chExt cx="937260" cy="652164"/>
+          </a:xfrm>
+        </p:grpSpPr>
+        <p:sp>
+          <p:nvSpPr>
             <p:cNvPr id="373" name="Freeform: Shape 372">
               <a:extLst>
                 <a:ext uri="{FF2B5EF4-FFF2-40B4-BE49-F238E27FC236}">
@@ -7089,7 +8567,7 @@
           </p:nvSpPr>
           <p:spPr>
             <a:xfrm>
-              <a:off x="1279266" y="590658"/>
+              <a:off x="4523163" y="4203448"/>
               <a:ext cx="937260" cy="652164"/>
             </a:xfrm>
             <a:custGeom>
@@ -7294,909 +8772,6 @@
         </p:sp>
         <p:sp>
           <p:nvSpPr>
-            <p:cNvPr id="374" name="Freeform: Shape 373">
-              <a:extLst>
-                <a:ext uri="{FF2B5EF4-FFF2-40B4-BE49-F238E27FC236}">
-                  <a16:creationId xmlns:a16="http://schemas.microsoft.com/office/drawing/2014/main" id="{FEC898AD-56E7-E960-36F7-45AEF59C0B1E}"/>
-                </a:ext>
-              </a:extLst>
-            </p:cNvPr>
-            <p:cNvSpPr/>
-            <p:nvPr/>
-          </p:nvSpPr>
-          <p:spPr>
-            <a:xfrm rot="16200000" flipH="1">
-              <a:off x="2528674" y="448110"/>
-              <a:ext cx="652164" cy="937260"/>
-            </a:xfrm>
-            <a:custGeom>
-              <a:avLst/>
-              <a:gdLst>
-                <a:gd name="csX0" fmla="*/ 0 w 1291905"/>
-                <a:gd name="csY0" fmla="*/ 0 h 1770078"/>
-                <a:gd name="csX1" fmla="*/ 0 w 1291905"/>
-                <a:gd name="csY1" fmla="*/ 478173 h 1770078"/>
-                <a:gd name="csX2" fmla="*/ 0 w 1291905"/>
-                <a:gd name="csY2" fmla="*/ 1291905 h 1770078"/>
-                <a:gd name="csX3" fmla="*/ 0 w 1291905"/>
-                <a:gd name="csY3" fmla="*/ 1770078 h 1770078"/>
-                <a:gd name="csX4" fmla="*/ 6123 w 1291905"/>
-                <a:gd name="csY4" fmla="*/ 1770078 h 1770078"/>
-                <a:gd name="csX5" fmla="*/ 109381 w 1291905"/>
-                <a:gd name="csY5" fmla="*/ 1658008 h 1770078"/>
-                <a:gd name="csX6" fmla="*/ 212639 w 1291905"/>
-                <a:gd name="csY6" fmla="*/ 1770078 h 1770078"/>
-                <a:gd name="csX7" fmla="*/ 221976 w 1291905"/>
-                <a:gd name="csY7" fmla="*/ 1770078 h 1770078"/>
-                <a:gd name="csX8" fmla="*/ 325234 w 1291905"/>
-                <a:gd name="csY8" fmla="*/ 1658008 h 1770078"/>
-                <a:gd name="csX9" fmla="*/ 428492 w 1291905"/>
-                <a:gd name="csY9" fmla="*/ 1770078 h 1770078"/>
-                <a:gd name="csX10" fmla="*/ 437829 w 1291905"/>
-                <a:gd name="csY10" fmla="*/ 1770078 h 1770078"/>
-                <a:gd name="csX11" fmla="*/ 541087 w 1291905"/>
-                <a:gd name="csY11" fmla="*/ 1658008 h 1770078"/>
-                <a:gd name="csX12" fmla="*/ 644346 w 1291905"/>
-                <a:gd name="csY12" fmla="*/ 1770078 h 1770078"/>
-                <a:gd name="csX13" fmla="*/ 653683 w 1291905"/>
-                <a:gd name="csY13" fmla="*/ 1770078 h 1770078"/>
-                <a:gd name="csX14" fmla="*/ 756941 w 1291905"/>
-                <a:gd name="csY14" fmla="*/ 1658008 h 1770078"/>
-                <a:gd name="csX15" fmla="*/ 860199 w 1291905"/>
-                <a:gd name="csY15" fmla="*/ 1770078 h 1770078"/>
-                <a:gd name="csX16" fmla="*/ 869536 w 1291905"/>
-                <a:gd name="csY16" fmla="*/ 1770078 h 1770078"/>
-                <a:gd name="csX17" fmla="*/ 972794 w 1291905"/>
-                <a:gd name="csY17" fmla="*/ 1658008 h 1770078"/>
-                <a:gd name="csX18" fmla="*/ 1076052 w 1291905"/>
-                <a:gd name="csY18" fmla="*/ 1770078 h 1770078"/>
-                <a:gd name="csX19" fmla="*/ 1085389 w 1291905"/>
-                <a:gd name="csY19" fmla="*/ 1770078 h 1770078"/>
-                <a:gd name="csX20" fmla="*/ 1188647 w 1291905"/>
-                <a:gd name="csY20" fmla="*/ 1658008 h 1770078"/>
-                <a:gd name="csX21" fmla="*/ 1291905 w 1291905"/>
-                <a:gd name="csY21" fmla="*/ 1770078 h 1770078"/>
-                <a:gd name="csX22" fmla="*/ 1291905 w 1291905"/>
-                <a:gd name="csY22" fmla="*/ 1291905 h 1770078"/>
-                <a:gd name="csX23" fmla="*/ 1291905 w 1291905"/>
-                <a:gd name="csY23" fmla="*/ 478173 h 1770078"/>
-                <a:gd name="csX24" fmla="*/ 1291905 w 1291905"/>
-                <a:gd name="csY24" fmla="*/ 0 h 1770078"/>
-                <a:gd name="csX25" fmla="*/ 1188647 w 1291905"/>
-                <a:gd name="csY25" fmla="*/ 112070 h 1770078"/>
-                <a:gd name="csX26" fmla="*/ 1085389 w 1291905"/>
-                <a:gd name="csY26" fmla="*/ 0 h 1770078"/>
-                <a:gd name="csX27" fmla="*/ 1076052 w 1291905"/>
-                <a:gd name="csY27" fmla="*/ 0 h 1770078"/>
-                <a:gd name="csX28" fmla="*/ 972794 w 1291905"/>
-                <a:gd name="csY28" fmla="*/ 112070 h 1770078"/>
-                <a:gd name="csX29" fmla="*/ 869536 w 1291905"/>
-                <a:gd name="csY29" fmla="*/ 0 h 1770078"/>
-                <a:gd name="csX30" fmla="*/ 860199 w 1291905"/>
-                <a:gd name="csY30" fmla="*/ 0 h 1770078"/>
-                <a:gd name="csX31" fmla="*/ 756941 w 1291905"/>
-                <a:gd name="csY31" fmla="*/ 112070 h 1770078"/>
-                <a:gd name="csX32" fmla="*/ 653683 w 1291905"/>
-                <a:gd name="csY32" fmla="*/ 0 h 1770078"/>
-                <a:gd name="csX33" fmla="*/ 644346 w 1291905"/>
-                <a:gd name="csY33" fmla="*/ 0 h 1770078"/>
-                <a:gd name="csX34" fmla="*/ 541087 w 1291905"/>
-                <a:gd name="csY34" fmla="*/ 112070 h 1770078"/>
-                <a:gd name="csX35" fmla="*/ 437829 w 1291905"/>
-                <a:gd name="csY35" fmla="*/ 0 h 1770078"/>
-                <a:gd name="csX36" fmla="*/ 428492 w 1291905"/>
-                <a:gd name="csY36" fmla="*/ 0 h 1770078"/>
-                <a:gd name="csX37" fmla="*/ 325234 w 1291905"/>
-                <a:gd name="csY37" fmla="*/ 112070 h 1770078"/>
-                <a:gd name="csX38" fmla="*/ 221976 w 1291905"/>
-                <a:gd name="csY38" fmla="*/ 0 h 1770078"/>
-                <a:gd name="csX39" fmla="*/ 212639 w 1291905"/>
-                <a:gd name="csY39" fmla="*/ 0 h 1770078"/>
-                <a:gd name="csX40" fmla="*/ 109381 w 1291905"/>
-                <a:gd name="csY40" fmla="*/ 112070 h 1770078"/>
-                <a:gd name="csX41" fmla="*/ 6123 w 1291905"/>
-                <a:gd name="csY41" fmla="*/ 0 h 1770078"/>
-              </a:gdLst>
-              <a:ahLst/>
-              <a:cxnLst>
-                <a:cxn ang="0">
-                  <a:pos x="csX0" y="csY0"/>
-                </a:cxn>
-                <a:cxn ang="0">
-                  <a:pos x="csX1" y="csY1"/>
-                </a:cxn>
-                <a:cxn ang="0">
-                  <a:pos x="csX2" y="csY2"/>
-                </a:cxn>
-                <a:cxn ang="0">
-                  <a:pos x="csX3" y="csY3"/>
-                </a:cxn>
-                <a:cxn ang="0">
-                  <a:pos x="csX4" y="csY4"/>
-                </a:cxn>
-                <a:cxn ang="0">
-                  <a:pos x="csX5" y="csY5"/>
-                </a:cxn>
-                <a:cxn ang="0">
-                  <a:pos x="csX6" y="csY6"/>
-                </a:cxn>
-                <a:cxn ang="0">
-                  <a:pos x="csX7" y="csY7"/>
-                </a:cxn>
-                <a:cxn ang="0">
-                  <a:pos x="csX8" y="csY8"/>
-                </a:cxn>
-                <a:cxn ang="0">
-                  <a:pos x="csX9" y="csY9"/>
-                </a:cxn>
-                <a:cxn ang="0">
-                  <a:pos x="csX10" y="csY10"/>
-                </a:cxn>
-                <a:cxn ang="0">
-                  <a:pos x="csX11" y="csY11"/>
-                </a:cxn>
-                <a:cxn ang="0">
-                  <a:pos x="csX12" y="csY12"/>
-                </a:cxn>
-                <a:cxn ang="0">
-                  <a:pos x="csX13" y="csY13"/>
-                </a:cxn>
-                <a:cxn ang="0">
-                  <a:pos x="csX14" y="csY14"/>
-                </a:cxn>
-                <a:cxn ang="0">
-                  <a:pos x="csX15" y="csY15"/>
-                </a:cxn>
-                <a:cxn ang="0">
-                  <a:pos x="csX16" y="csY16"/>
-                </a:cxn>
-                <a:cxn ang="0">
-                  <a:pos x="csX17" y="csY17"/>
-                </a:cxn>
-                <a:cxn ang="0">
-                  <a:pos x="csX18" y="csY18"/>
-                </a:cxn>
-                <a:cxn ang="0">
-                  <a:pos x="csX19" y="csY19"/>
-                </a:cxn>
-                <a:cxn ang="0">
-                  <a:pos x="csX20" y="csY20"/>
-                </a:cxn>
-                <a:cxn ang="0">
-                  <a:pos x="csX21" y="csY21"/>
-                </a:cxn>
-                <a:cxn ang="0">
-                  <a:pos x="csX22" y="csY22"/>
-                </a:cxn>
-                <a:cxn ang="0">
-                  <a:pos x="csX23" y="csY23"/>
-                </a:cxn>
-                <a:cxn ang="0">
-                  <a:pos x="csX24" y="csY24"/>
-                </a:cxn>
-                <a:cxn ang="0">
-                  <a:pos x="csX25" y="csY25"/>
-                </a:cxn>
-                <a:cxn ang="0">
-                  <a:pos x="csX26" y="csY26"/>
-                </a:cxn>
-                <a:cxn ang="0">
-                  <a:pos x="csX27" y="csY27"/>
-                </a:cxn>
-                <a:cxn ang="0">
-                  <a:pos x="csX28" y="csY28"/>
-                </a:cxn>
-                <a:cxn ang="0">
-                  <a:pos x="csX29" y="csY29"/>
-                </a:cxn>
-                <a:cxn ang="0">
-                  <a:pos x="csX30" y="csY30"/>
-                </a:cxn>
-                <a:cxn ang="0">
-                  <a:pos x="csX31" y="csY31"/>
-                </a:cxn>
-                <a:cxn ang="0">
-                  <a:pos x="csX32" y="csY32"/>
-                </a:cxn>
-                <a:cxn ang="0">
-                  <a:pos x="csX33" y="csY33"/>
-                </a:cxn>
-                <a:cxn ang="0">
-                  <a:pos x="csX34" y="csY34"/>
-                </a:cxn>
-                <a:cxn ang="0">
-                  <a:pos x="csX35" y="csY35"/>
-                </a:cxn>
-                <a:cxn ang="0">
-                  <a:pos x="csX36" y="csY36"/>
-                </a:cxn>
-                <a:cxn ang="0">
-                  <a:pos x="csX37" y="csY37"/>
-                </a:cxn>
-                <a:cxn ang="0">
-                  <a:pos x="csX38" y="csY38"/>
-                </a:cxn>
-                <a:cxn ang="0">
-                  <a:pos x="csX39" y="csY39"/>
-                </a:cxn>
-                <a:cxn ang="0">
-                  <a:pos x="csX40" y="csY40"/>
-                </a:cxn>
-                <a:cxn ang="0">
-                  <a:pos x="csX41" y="csY41"/>
-                </a:cxn>
-              </a:cxnLst>
-              <a:rect l="l" t="t" r="r" b="b"/>
-              <a:pathLst>
-                <a:path w="1291905" h="1770078">
-                  <a:moveTo>
-                    <a:pt x="0" y="0"/>
-                  </a:moveTo>
-                  <a:lnTo>
-                    <a:pt x="0" y="478173"/>
-                  </a:lnTo>
-                  <a:lnTo>
-                    <a:pt x="0" y="1291905"/>
-                  </a:lnTo>
-                  <a:lnTo>
-                    <a:pt x="0" y="1770078"/>
-                  </a:lnTo>
-                  <a:lnTo>
-                    <a:pt x="6123" y="1770078"/>
-                  </a:lnTo>
-                  <a:lnTo>
-                    <a:pt x="109381" y="1658008"/>
-                  </a:lnTo>
-                  <a:lnTo>
-                    <a:pt x="212639" y="1770078"/>
-                  </a:lnTo>
-                  <a:lnTo>
-                    <a:pt x="221976" y="1770078"/>
-                  </a:lnTo>
-                  <a:lnTo>
-                    <a:pt x="325234" y="1658008"/>
-                  </a:lnTo>
-                  <a:lnTo>
-                    <a:pt x="428492" y="1770078"/>
-                  </a:lnTo>
-                  <a:lnTo>
-                    <a:pt x="437829" y="1770078"/>
-                  </a:lnTo>
-                  <a:lnTo>
-                    <a:pt x="541087" y="1658008"/>
-                  </a:lnTo>
-                  <a:lnTo>
-                    <a:pt x="644346" y="1770078"/>
-                  </a:lnTo>
-                  <a:lnTo>
-                    <a:pt x="653683" y="1770078"/>
-                  </a:lnTo>
-                  <a:lnTo>
-                    <a:pt x="756941" y="1658008"/>
-                  </a:lnTo>
-                  <a:lnTo>
-                    <a:pt x="860199" y="1770078"/>
-                  </a:lnTo>
-                  <a:lnTo>
-                    <a:pt x="869536" y="1770078"/>
-                  </a:lnTo>
-                  <a:lnTo>
-                    <a:pt x="972794" y="1658008"/>
-                  </a:lnTo>
-                  <a:lnTo>
-                    <a:pt x="1076052" y="1770078"/>
-                  </a:lnTo>
-                  <a:lnTo>
-                    <a:pt x="1085389" y="1770078"/>
-                  </a:lnTo>
-                  <a:lnTo>
-                    <a:pt x="1188647" y="1658008"/>
-                  </a:lnTo>
-                  <a:lnTo>
-                    <a:pt x="1291905" y="1770078"/>
-                  </a:lnTo>
-                  <a:lnTo>
-                    <a:pt x="1291905" y="1291905"/>
-                  </a:lnTo>
-                  <a:lnTo>
-                    <a:pt x="1291905" y="478173"/>
-                  </a:lnTo>
-                  <a:lnTo>
-                    <a:pt x="1291905" y="0"/>
-                  </a:lnTo>
-                  <a:lnTo>
-                    <a:pt x="1188647" y="112070"/>
-                  </a:lnTo>
-                  <a:lnTo>
-                    <a:pt x="1085389" y="0"/>
-                  </a:lnTo>
-                  <a:lnTo>
-                    <a:pt x="1076052" y="0"/>
-                  </a:lnTo>
-                  <a:lnTo>
-                    <a:pt x="972794" y="112070"/>
-                  </a:lnTo>
-                  <a:lnTo>
-                    <a:pt x="869536" y="0"/>
-                  </a:lnTo>
-                  <a:lnTo>
-                    <a:pt x="860199" y="0"/>
-                  </a:lnTo>
-                  <a:lnTo>
-                    <a:pt x="756941" y="112070"/>
-                  </a:lnTo>
-                  <a:lnTo>
-                    <a:pt x="653683" y="0"/>
-                  </a:lnTo>
-                  <a:lnTo>
-                    <a:pt x="644346" y="0"/>
-                  </a:lnTo>
-                  <a:lnTo>
-                    <a:pt x="541087" y="112070"/>
-                  </a:lnTo>
-                  <a:lnTo>
-                    <a:pt x="437829" y="0"/>
-                  </a:lnTo>
-                  <a:lnTo>
-                    <a:pt x="428492" y="0"/>
-                  </a:lnTo>
-                  <a:lnTo>
-                    <a:pt x="325234" y="112070"/>
-                  </a:lnTo>
-                  <a:lnTo>
-                    <a:pt x="221976" y="0"/>
-                  </a:lnTo>
-                  <a:lnTo>
-                    <a:pt x="212639" y="0"/>
-                  </a:lnTo>
-                  <a:lnTo>
-                    <a:pt x="109381" y="112070"/>
-                  </a:lnTo>
-                  <a:lnTo>
-                    <a:pt x="6123" y="0"/>
-                  </a:lnTo>
-                  <a:close/>
-                </a:path>
-              </a:pathLst>
-            </a:custGeom>
-            <a:solidFill>
-              <a:srgbClr val="F86042"/>
-            </a:solidFill>
-            <a:ln w="3175">
-              <a:noFill/>
-            </a:ln>
-          </p:spPr>
-          <p:style>
-            <a:lnRef idx="2">
-              <a:schemeClr val="accent1">
-                <a:shade val="15000"/>
-              </a:schemeClr>
-            </a:lnRef>
-            <a:fillRef idx="1">
-              <a:schemeClr val="accent1"/>
-            </a:fillRef>
-            <a:effectRef idx="0">
-              <a:schemeClr val="accent1"/>
-            </a:effectRef>
-            <a:fontRef idx="minor">
-              <a:schemeClr val="lt1"/>
-            </a:fontRef>
-          </p:style>
-          <p:txBody>
-            <a:bodyPr wrap="square" rtlCol="0" anchor="ctr">
-              <a:noAutofit/>
-            </a:bodyPr>
-            <a:lstStyle/>
-            <a:p>
-              <a:pPr algn="ctr"/>
-              <a:endParaRPr lang="en-US"/>
-            </a:p>
-          </p:txBody>
-        </p:sp>
-      </p:grpSp>
-      <p:grpSp>
-        <p:nvGrpSpPr>
-          <p:cNvPr id="375" name="Group 374">
-            <a:extLst>
-              <a:ext uri="{FF2B5EF4-FFF2-40B4-BE49-F238E27FC236}">
-                <a16:creationId xmlns:a16="http://schemas.microsoft.com/office/drawing/2014/main" id="{C34BA581-6F6D-2640-FBE1-656C07843B4C}"/>
-              </a:ext>
-            </a:extLst>
-          </p:cNvPr>
-          <p:cNvGrpSpPr/>
-          <p:nvPr/>
-        </p:nvGrpSpPr>
-        <p:grpSpPr>
-          <a:xfrm>
-            <a:off x="3416303" y="4203447"/>
-            <a:ext cx="5359827" cy="652166"/>
-            <a:chOff x="172406" y="2006443"/>
-            <a:chExt cx="5359827" cy="652166"/>
-          </a:xfrm>
-        </p:grpSpPr>
-        <p:sp>
-          <p:nvSpPr>
-            <p:cNvPr id="376" name="Rectangle: Rounded Corners 375">
-              <a:extLst>
-                <a:ext uri="{FF2B5EF4-FFF2-40B4-BE49-F238E27FC236}">
-                  <a16:creationId xmlns:a16="http://schemas.microsoft.com/office/drawing/2014/main" id="{F3804E2B-2901-0CDE-8E0F-F7741192D75C}"/>
-                </a:ext>
-              </a:extLst>
-            </p:cNvPr>
-            <p:cNvSpPr/>
-            <p:nvPr/>
-          </p:nvSpPr>
-          <p:spPr>
-            <a:xfrm>
-              <a:off x="172406" y="2006443"/>
-              <a:ext cx="937260" cy="652166"/>
-            </a:xfrm>
-            <a:prstGeom prst="roundRect">
-              <a:avLst/>
-            </a:prstGeom>
-            <a:gradFill flip="none" rotWithShape="1">
-              <a:gsLst>
-                <a:gs pos="100000">
-                  <a:schemeClr val="bg1">
-                    <a:alpha val="46000"/>
-                  </a:schemeClr>
-                </a:gs>
-                <a:gs pos="38000">
-                  <a:schemeClr val="accent1">
-                    <a:tint val="23500"/>
-                    <a:satMod val="160000"/>
-                    <a:alpha val="0"/>
-                  </a:schemeClr>
-                </a:gs>
-              </a:gsLst>
-              <a:path path="circle">
-                <a:fillToRect l="100000" t="100000"/>
-              </a:path>
-              <a:tileRect r="-100000" b="-100000"/>
-            </a:gradFill>
-            <a:ln>
-              <a:noFill/>
-            </a:ln>
-          </p:spPr>
-          <p:style>
-            <a:lnRef idx="2">
-              <a:schemeClr val="accent1">
-                <a:shade val="15000"/>
-              </a:schemeClr>
-            </a:lnRef>
-            <a:fillRef idx="1">
-              <a:schemeClr val="accent1"/>
-            </a:fillRef>
-            <a:effectRef idx="0">
-              <a:schemeClr val="accent1"/>
-            </a:effectRef>
-            <a:fontRef idx="minor">
-              <a:schemeClr val="lt1"/>
-            </a:fontRef>
-          </p:style>
-          <p:txBody>
-            <a:bodyPr rtlCol="0" anchor="ctr"/>
-            <a:lstStyle/>
-            <a:p>
-              <a:pPr algn="ctr"/>
-              <a:endParaRPr lang="en-US"/>
-            </a:p>
-          </p:txBody>
-        </p:sp>
-        <p:sp>
-          <p:nvSpPr>
-            <p:cNvPr id="377" name="Freeform: Shape 376">
-              <a:extLst>
-                <a:ext uri="{FF2B5EF4-FFF2-40B4-BE49-F238E27FC236}">
-                  <a16:creationId xmlns:a16="http://schemas.microsoft.com/office/drawing/2014/main" id="{D0B4D892-E91F-2462-7086-0D3804084EC6}"/>
-                </a:ext>
-              </a:extLst>
-            </p:cNvPr>
-            <p:cNvSpPr/>
-            <p:nvPr/>
-          </p:nvSpPr>
-          <p:spPr>
-            <a:xfrm>
-              <a:off x="4599415" y="2006444"/>
-              <a:ext cx="932818" cy="652165"/>
-            </a:xfrm>
-            <a:custGeom>
-              <a:avLst/>
-              <a:gdLst>
-                <a:gd name="csX0" fmla="*/ 0 w 1761688"/>
-                <a:gd name="csY0" fmla="*/ 0 h 1291904"/>
-                <a:gd name="csX1" fmla="*/ 75501 w 1761688"/>
-                <a:gd name="csY1" fmla="*/ 0 h 1291904"/>
-                <a:gd name="csX2" fmla="*/ 1686187 w 1761688"/>
-                <a:gd name="csY2" fmla="*/ 0 h 1291904"/>
-                <a:gd name="csX3" fmla="*/ 1761688 w 1761688"/>
-                <a:gd name="csY3" fmla="*/ 0 h 1291904"/>
-                <a:gd name="csX4" fmla="*/ 1761688 w 1761688"/>
-                <a:gd name="csY4" fmla="*/ 102765 h 1291904"/>
-                <a:gd name="csX5" fmla="*/ 1686187 w 1761688"/>
-                <a:gd name="csY5" fmla="*/ 102765 h 1291904"/>
-                <a:gd name="csX6" fmla="*/ 1686187 w 1761688"/>
-                <a:gd name="csY6" fmla="*/ 1189139 h 1291904"/>
-                <a:gd name="csX7" fmla="*/ 1761688 w 1761688"/>
-                <a:gd name="csY7" fmla="*/ 1189139 h 1291904"/>
-                <a:gd name="csX8" fmla="*/ 1761688 w 1761688"/>
-                <a:gd name="csY8" fmla="*/ 1291904 h 1291904"/>
-                <a:gd name="csX9" fmla="*/ 1686187 w 1761688"/>
-                <a:gd name="csY9" fmla="*/ 1291904 h 1291904"/>
-                <a:gd name="csX10" fmla="*/ 75501 w 1761688"/>
-                <a:gd name="csY10" fmla="*/ 1291904 h 1291904"/>
-                <a:gd name="csX11" fmla="*/ 0 w 1761688"/>
-                <a:gd name="csY11" fmla="*/ 1291904 h 1291904"/>
-                <a:gd name="csX12" fmla="*/ 0 w 1761688"/>
-                <a:gd name="csY12" fmla="*/ 1189139 h 1291904"/>
-                <a:gd name="csX13" fmla="*/ 75501 w 1761688"/>
-                <a:gd name="csY13" fmla="*/ 1189139 h 1291904"/>
-                <a:gd name="csX14" fmla="*/ 75501 w 1761688"/>
-                <a:gd name="csY14" fmla="*/ 102765 h 1291904"/>
-                <a:gd name="csX15" fmla="*/ 0 w 1761688"/>
-                <a:gd name="csY15" fmla="*/ 102765 h 1291904"/>
-              </a:gdLst>
-              <a:ahLst/>
-              <a:cxnLst>
-                <a:cxn ang="0">
-                  <a:pos x="csX0" y="csY0"/>
-                </a:cxn>
-                <a:cxn ang="0">
-                  <a:pos x="csX1" y="csY1"/>
-                </a:cxn>
-                <a:cxn ang="0">
-                  <a:pos x="csX2" y="csY2"/>
-                </a:cxn>
-                <a:cxn ang="0">
-                  <a:pos x="csX3" y="csY3"/>
-                </a:cxn>
-                <a:cxn ang="0">
-                  <a:pos x="csX4" y="csY4"/>
-                </a:cxn>
-                <a:cxn ang="0">
-                  <a:pos x="csX5" y="csY5"/>
-                </a:cxn>
-                <a:cxn ang="0">
-                  <a:pos x="csX6" y="csY6"/>
-                </a:cxn>
-                <a:cxn ang="0">
-                  <a:pos x="csX7" y="csY7"/>
-                </a:cxn>
-                <a:cxn ang="0">
-                  <a:pos x="csX8" y="csY8"/>
-                </a:cxn>
-                <a:cxn ang="0">
-                  <a:pos x="csX9" y="csY9"/>
-                </a:cxn>
-                <a:cxn ang="0">
-                  <a:pos x="csX10" y="csY10"/>
-                </a:cxn>
-                <a:cxn ang="0">
-                  <a:pos x="csX11" y="csY11"/>
-                </a:cxn>
-                <a:cxn ang="0">
-                  <a:pos x="csX12" y="csY12"/>
-                </a:cxn>
-                <a:cxn ang="0">
-                  <a:pos x="csX13" y="csY13"/>
-                </a:cxn>
-                <a:cxn ang="0">
-                  <a:pos x="csX14" y="csY14"/>
-                </a:cxn>
-                <a:cxn ang="0">
-                  <a:pos x="csX15" y="csY15"/>
-                </a:cxn>
-              </a:cxnLst>
-              <a:rect l="l" t="t" r="r" b="b"/>
-              <a:pathLst>
-                <a:path w="1761688" h="1291904">
-                  <a:moveTo>
-                    <a:pt x="0" y="0"/>
-                  </a:moveTo>
-                  <a:lnTo>
-                    <a:pt x="75501" y="0"/>
-                  </a:lnTo>
-                  <a:lnTo>
-                    <a:pt x="1686187" y="0"/>
-                  </a:lnTo>
-                  <a:lnTo>
-                    <a:pt x="1761688" y="0"/>
-                  </a:lnTo>
-                  <a:lnTo>
-                    <a:pt x="1761688" y="102765"/>
-                  </a:lnTo>
-                  <a:lnTo>
-                    <a:pt x="1686187" y="102765"/>
-                  </a:lnTo>
-                  <a:lnTo>
-                    <a:pt x="1686187" y="1189139"/>
-                  </a:lnTo>
-                  <a:lnTo>
-                    <a:pt x="1761688" y="1189139"/>
-                  </a:lnTo>
-                  <a:lnTo>
-                    <a:pt x="1761688" y="1291904"/>
-                  </a:lnTo>
-                  <a:lnTo>
-                    <a:pt x="1686187" y="1291904"/>
-                  </a:lnTo>
-                  <a:lnTo>
-                    <a:pt x="75501" y="1291904"/>
-                  </a:lnTo>
-                  <a:lnTo>
-                    <a:pt x="0" y="1291904"/>
-                  </a:lnTo>
-                  <a:lnTo>
-                    <a:pt x="0" y="1189139"/>
-                  </a:lnTo>
-                  <a:lnTo>
-                    <a:pt x="75501" y="1189139"/>
-                  </a:lnTo>
-                  <a:lnTo>
-                    <a:pt x="75501" y="102765"/>
-                  </a:lnTo>
-                  <a:lnTo>
-                    <a:pt x="0" y="102765"/>
-                  </a:lnTo>
-                  <a:close/>
-                </a:path>
-              </a:pathLst>
-            </a:custGeom>
-            <a:gradFill flip="none" rotWithShape="1">
-              <a:gsLst>
-                <a:gs pos="100000">
-                  <a:schemeClr val="bg1">
-                    <a:alpha val="46000"/>
-                  </a:schemeClr>
-                </a:gs>
-                <a:gs pos="32000">
-                  <a:schemeClr val="accent1">
-                    <a:tint val="23500"/>
-                    <a:satMod val="160000"/>
-                    <a:alpha val="0"/>
-                  </a:schemeClr>
-                </a:gs>
-              </a:gsLst>
-              <a:path path="circle">
-                <a:fillToRect l="100000" t="100000"/>
-              </a:path>
-              <a:tileRect r="-100000" b="-100000"/>
-            </a:gradFill>
-            <a:ln>
-              <a:noFill/>
-            </a:ln>
-          </p:spPr>
-          <p:style>
-            <a:lnRef idx="2">
-              <a:schemeClr val="accent1">
-                <a:shade val="15000"/>
-              </a:schemeClr>
-            </a:lnRef>
-            <a:fillRef idx="1">
-              <a:schemeClr val="accent1"/>
-            </a:fillRef>
-            <a:effectRef idx="0">
-              <a:schemeClr val="accent1"/>
-            </a:effectRef>
-            <a:fontRef idx="minor">
-              <a:schemeClr val="lt1"/>
-            </a:fontRef>
-          </p:style>
-          <p:txBody>
-            <a:bodyPr wrap="square" rtlCol="0" anchor="ctr">
-              <a:noAutofit/>
-            </a:bodyPr>
-            <a:lstStyle/>
-            <a:p>
-              <a:pPr algn="ctr"/>
-              <a:endParaRPr lang="en-US"/>
-            </a:p>
-          </p:txBody>
-        </p:sp>
-        <p:sp>
-          <p:nvSpPr>
-            <p:cNvPr id="378" name="Freeform: Shape 377">
-              <a:extLst>
-                <a:ext uri="{FF2B5EF4-FFF2-40B4-BE49-F238E27FC236}">
-                  <a16:creationId xmlns:a16="http://schemas.microsoft.com/office/drawing/2014/main" id="{95B86A62-56C5-7E39-49DA-2A8B8476931F}"/>
-                </a:ext>
-              </a:extLst>
-            </p:cNvPr>
-            <p:cNvSpPr/>
-            <p:nvPr/>
-          </p:nvSpPr>
-          <p:spPr>
-            <a:xfrm>
-              <a:off x="3492986" y="2006444"/>
-              <a:ext cx="937260" cy="652165"/>
-            </a:xfrm>
-            <a:custGeom>
-              <a:avLst/>
-              <a:gdLst>
-                <a:gd name="csX0" fmla="*/ 0 w 937260"/>
-                <a:gd name="csY0" fmla="*/ 0 h 652165"/>
-                <a:gd name="csX1" fmla="*/ 179 w 937260"/>
-                <a:gd name="csY1" fmla="*/ 0 h 652165"/>
-                <a:gd name="csX2" fmla="*/ 116373 w 937260"/>
-                <a:gd name="csY2" fmla="*/ 31552 h 652165"/>
-                <a:gd name="csX3" fmla="*/ 468630 w 937260"/>
-                <a:gd name="csY3" fmla="*/ 67131 h 652165"/>
-                <a:gd name="csX4" fmla="*/ 820887 w 937260"/>
-                <a:gd name="csY4" fmla="*/ 31552 h 652165"/>
-                <a:gd name="csX5" fmla="*/ 937081 w 937260"/>
-                <a:gd name="csY5" fmla="*/ 0 h 652165"/>
-                <a:gd name="csX6" fmla="*/ 937260 w 937260"/>
-                <a:gd name="csY6" fmla="*/ 0 h 652165"/>
-                <a:gd name="csX7" fmla="*/ 937260 w 937260"/>
-                <a:gd name="csY7" fmla="*/ 652165 h 652165"/>
-                <a:gd name="csX8" fmla="*/ 937078 w 937260"/>
-                <a:gd name="csY8" fmla="*/ 652165 h 652165"/>
-                <a:gd name="csX9" fmla="*/ 820887 w 937260"/>
-                <a:gd name="csY9" fmla="*/ 620614 h 652165"/>
-                <a:gd name="csX10" fmla="*/ 468630 w 937260"/>
-                <a:gd name="csY10" fmla="*/ 585035 h 652165"/>
-                <a:gd name="csX11" fmla="*/ 116373 w 937260"/>
-                <a:gd name="csY11" fmla="*/ 620614 h 652165"/>
-                <a:gd name="csX12" fmla="*/ 183 w 937260"/>
-                <a:gd name="csY12" fmla="*/ 652165 h 652165"/>
-                <a:gd name="csX13" fmla="*/ 0 w 937260"/>
-                <a:gd name="csY13" fmla="*/ 652165 h 652165"/>
-              </a:gdLst>
-              <a:ahLst/>
-              <a:cxnLst>
-                <a:cxn ang="0">
-                  <a:pos x="csX0" y="csY0"/>
-                </a:cxn>
-                <a:cxn ang="0">
-                  <a:pos x="csX1" y="csY1"/>
-                </a:cxn>
-                <a:cxn ang="0">
-                  <a:pos x="csX2" y="csY2"/>
-                </a:cxn>
-                <a:cxn ang="0">
-                  <a:pos x="csX3" y="csY3"/>
-                </a:cxn>
-                <a:cxn ang="0">
-                  <a:pos x="csX4" y="csY4"/>
-                </a:cxn>
-                <a:cxn ang="0">
-                  <a:pos x="csX5" y="csY5"/>
-                </a:cxn>
-                <a:cxn ang="0">
-                  <a:pos x="csX6" y="csY6"/>
-                </a:cxn>
-                <a:cxn ang="0">
-                  <a:pos x="csX7" y="csY7"/>
-                </a:cxn>
-                <a:cxn ang="0">
-                  <a:pos x="csX8" y="csY8"/>
-                </a:cxn>
-                <a:cxn ang="0">
-                  <a:pos x="csX9" y="csY9"/>
-                </a:cxn>
-                <a:cxn ang="0">
-                  <a:pos x="csX10" y="csY10"/>
-                </a:cxn>
-                <a:cxn ang="0">
-                  <a:pos x="csX11" y="csY11"/>
-                </a:cxn>
-                <a:cxn ang="0">
-                  <a:pos x="csX12" y="csY12"/>
-                </a:cxn>
-                <a:cxn ang="0">
-                  <a:pos x="csX13" y="csY13"/>
-                </a:cxn>
-              </a:cxnLst>
-              <a:rect l="l" t="t" r="r" b="b"/>
-              <a:pathLst>
-                <a:path w="937260" h="652165">
-                  <a:moveTo>
-                    <a:pt x="0" y="0"/>
-                  </a:moveTo>
-                  <a:lnTo>
-                    <a:pt x="179" y="0"/>
-                  </a:lnTo>
-                  <a:lnTo>
-                    <a:pt x="116373" y="31552"/>
-                  </a:lnTo>
-                  <a:cubicBezTo>
-                    <a:pt x="224643" y="54462"/>
-                    <a:pt x="343679" y="67131"/>
-                    <a:pt x="468630" y="67131"/>
-                  </a:cubicBezTo>
-                  <a:cubicBezTo>
-                    <a:pt x="593581" y="67131"/>
-                    <a:pt x="712618" y="54462"/>
-                    <a:pt x="820887" y="31552"/>
-                  </a:cubicBezTo>
-                  <a:lnTo>
-                    <a:pt x="937081" y="0"/>
-                  </a:lnTo>
-                  <a:lnTo>
-                    <a:pt x="937260" y="0"/>
-                  </a:lnTo>
-                  <a:lnTo>
-                    <a:pt x="937260" y="652165"/>
-                  </a:lnTo>
-                  <a:lnTo>
-                    <a:pt x="937078" y="652165"/>
-                  </a:lnTo>
-                  <a:lnTo>
-                    <a:pt x="820887" y="620614"/>
-                  </a:lnTo>
-                  <a:cubicBezTo>
-                    <a:pt x="712618" y="597704"/>
-                    <a:pt x="593581" y="585035"/>
-                    <a:pt x="468630" y="585035"/>
-                  </a:cubicBezTo>
-                  <a:cubicBezTo>
-                    <a:pt x="343679" y="585035"/>
-                    <a:pt x="224643" y="597704"/>
-                    <a:pt x="116373" y="620614"/>
-                  </a:cubicBezTo>
-                  <a:lnTo>
-                    <a:pt x="183" y="652165"/>
-                  </a:lnTo>
-                  <a:lnTo>
-                    <a:pt x="0" y="652165"/>
-                  </a:lnTo>
-                  <a:close/>
-                </a:path>
-              </a:pathLst>
-            </a:custGeom>
-            <a:gradFill flip="none" rotWithShape="1">
-              <a:gsLst>
-                <a:gs pos="100000">
-                  <a:schemeClr val="bg1">
-                    <a:alpha val="46000"/>
-                  </a:schemeClr>
-                </a:gs>
-                <a:gs pos="31000">
-                  <a:schemeClr val="accent1">
-                    <a:tint val="23500"/>
-                    <a:satMod val="160000"/>
-                    <a:alpha val="0"/>
-                  </a:schemeClr>
-                </a:gs>
-              </a:gsLst>
-              <a:path path="circle">
-                <a:fillToRect l="100000" t="100000"/>
-              </a:path>
-              <a:tileRect r="-100000" b="-100000"/>
-            </a:gradFill>
-            <a:ln>
-              <a:noFill/>
-            </a:ln>
-          </p:spPr>
-          <p:style>
-            <a:lnRef idx="2">
-              <a:schemeClr val="accent1">
-                <a:shade val="15000"/>
-              </a:schemeClr>
-            </a:lnRef>
-            <a:fillRef idx="1">
-              <a:schemeClr val="accent1"/>
-            </a:fillRef>
-            <a:effectRef idx="0">
-              <a:schemeClr val="accent1"/>
-            </a:effectRef>
-            <a:fontRef idx="minor">
-              <a:schemeClr val="lt1"/>
-            </a:fontRef>
-          </p:style>
-          <p:txBody>
-            <a:bodyPr wrap="square" rtlCol="0" anchor="ctr">
-              <a:noAutofit/>
-            </a:bodyPr>
-            <a:lstStyle/>
-            <a:p>
-              <a:pPr algn="ctr"/>
-              <a:endParaRPr lang="en-US"/>
-            </a:p>
-          </p:txBody>
-        </p:sp>
-        <p:sp>
-          <p:nvSpPr>
             <p:cNvPr id="379" name="Freeform: Shape 378">
               <a:extLst>
                 <a:ext uri="{FF2B5EF4-FFF2-40B4-BE49-F238E27FC236}">
@@ -8209,7 +8784,7 @@
           </p:nvSpPr>
           <p:spPr>
             <a:xfrm>
-              <a:off x="1279266" y="2006444"/>
+              <a:off x="4523163" y="4203448"/>
               <a:ext cx="937260" cy="652164"/>
             </a:xfrm>
             <a:custGeom>
@@ -8431,914 +9006,6 @@
         </p:sp>
         <p:sp>
           <p:nvSpPr>
-            <p:cNvPr id="380" name="Freeform: Shape 379">
-              <a:extLst>
-                <a:ext uri="{FF2B5EF4-FFF2-40B4-BE49-F238E27FC236}">
-                  <a16:creationId xmlns:a16="http://schemas.microsoft.com/office/drawing/2014/main" id="{A4EC357D-111B-E447-3AE0-293A4C5A277F}"/>
-                </a:ext>
-              </a:extLst>
-            </p:cNvPr>
-            <p:cNvSpPr/>
-            <p:nvPr/>
-          </p:nvSpPr>
-          <p:spPr>
-            <a:xfrm rot="16200000" flipH="1">
-              <a:off x="2528674" y="1863896"/>
-              <a:ext cx="652164" cy="937260"/>
-            </a:xfrm>
-            <a:custGeom>
-              <a:avLst/>
-              <a:gdLst>
-                <a:gd name="csX0" fmla="*/ 0 w 1291905"/>
-                <a:gd name="csY0" fmla="*/ 0 h 1770078"/>
-                <a:gd name="csX1" fmla="*/ 0 w 1291905"/>
-                <a:gd name="csY1" fmla="*/ 478173 h 1770078"/>
-                <a:gd name="csX2" fmla="*/ 0 w 1291905"/>
-                <a:gd name="csY2" fmla="*/ 1291905 h 1770078"/>
-                <a:gd name="csX3" fmla="*/ 0 w 1291905"/>
-                <a:gd name="csY3" fmla="*/ 1770078 h 1770078"/>
-                <a:gd name="csX4" fmla="*/ 6123 w 1291905"/>
-                <a:gd name="csY4" fmla="*/ 1770078 h 1770078"/>
-                <a:gd name="csX5" fmla="*/ 109381 w 1291905"/>
-                <a:gd name="csY5" fmla="*/ 1658008 h 1770078"/>
-                <a:gd name="csX6" fmla="*/ 212639 w 1291905"/>
-                <a:gd name="csY6" fmla="*/ 1770078 h 1770078"/>
-                <a:gd name="csX7" fmla="*/ 221976 w 1291905"/>
-                <a:gd name="csY7" fmla="*/ 1770078 h 1770078"/>
-                <a:gd name="csX8" fmla="*/ 325234 w 1291905"/>
-                <a:gd name="csY8" fmla="*/ 1658008 h 1770078"/>
-                <a:gd name="csX9" fmla="*/ 428492 w 1291905"/>
-                <a:gd name="csY9" fmla="*/ 1770078 h 1770078"/>
-                <a:gd name="csX10" fmla="*/ 437829 w 1291905"/>
-                <a:gd name="csY10" fmla="*/ 1770078 h 1770078"/>
-                <a:gd name="csX11" fmla="*/ 541087 w 1291905"/>
-                <a:gd name="csY11" fmla="*/ 1658008 h 1770078"/>
-                <a:gd name="csX12" fmla="*/ 644346 w 1291905"/>
-                <a:gd name="csY12" fmla="*/ 1770078 h 1770078"/>
-                <a:gd name="csX13" fmla="*/ 653683 w 1291905"/>
-                <a:gd name="csY13" fmla="*/ 1770078 h 1770078"/>
-                <a:gd name="csX14" fmla="*/ 756941 w 1291905"/>
-                <a:gd name="csY14" fmla="*/ 1658008 h 1770078"/>
-                <a:gd name="csX15" fmla="*/ 860199 w 1291905"/>
-                <a:gd name="csY15" fmla="*/ 1770078 h 1770078"/>
-                <a:gd name="csX16" fmla="*/ 869536 w 1291905"/>
-                <a:gd name="csY16" fmla="*/ 1770078 h 1770078"/>
-                <a:gd name="csX17" fmla="*/ 972794 w 1291905"/>
-                <a:gd name="csY17" fmla="*/ 1658008 h 1770078"/>
-                <a:gd name="csX18" fmla="*/ 1076052 w 1291905"/>
-                <a:gd name="csY18" fmla="*/ 1770078 h 1770078"/>
-                <a:gd name="csX19" fmla="*/ 1085389 w 1291905"/>
-                <a:gd name="csY19" fmla="*/ 1770078 h 1770078"/>
-                <a:gd name="csX20" fmla="*/ 1188647 w 1291905"/>
-                <a:gd name="csY20" fmla="*/ 1658008 h 1770078"/>
-                <a:gd name="csX21" fmla="*/ 1291905 w 1291905"/>
-                <a:gd name="csY21" fmla="*/ 1770078 h 1770078"/>
-                <a:gd name="csX22" fmla="*/ 1291905 w 1291905"/>
-                <a:gd name="csY22" fmla="*/ 1291905 h 1770078"/>
-                <a:gd name="csX23" fmla="*/ 1291905 w 1291905"/>
-                <a:gd name="csY23" fmla="*/ 478173 h 1770078"/>
-                <a:gd name="csX24" fmla="*/ 1291905 w 1291905"/>
-                <a:gd name="csY24" fmla="*/ 0 h 1770078"/>
-                <a:gd name="csX25" fmla="*/ 1188647 w 1291905"/>
-                <a:gd name="csY25" fmla="*/ 112070 h 1770078"/>
-                <a:gd name="csX26" fmla="*/ 1085389 w 1291905"/>
-                <a:gd name="csY26" fmla="*/ 0 h 1770078"/>
-                <a:gd name="csX27" fmla="*/ 1076052 w 1291905"/>
-                <a:gd name="csY27" fmla="*/ 0 h 1770078"/>
-                <a:gd name="csX28" fmla="*/ 972794 w 1291905"/>
-                <a:gd name="csY28" fmla="*/ 112070 h 1770078"/>
-                <a:gd name="csX29" fmla="*/ 869536 w 1291905"/>
-                <a:gd name="csY29" fmla="*/ 0 h 1770078"/>
-                <a:gd name="csX30" fmla="*/ 860199 w 1291905"/>
-                <a:gd name="csY30" fmla="*/ 0 h 1770078"/>
-                <a:gd name="csX31" fmla="*/ 756941 w 1291905"/>
-                <a:gd name="csY31" fmla="*/ 112070 h 1770078"/>
-                <a:gd name="csX32" fmla="*/ 653683 w 1291905"/>
-                <a:gd name="csY32" fmla="*/ 0 h 1770078"/>
-                <a:gd name="csX33" fmla="*/ 644346 w 1291905"/>
-                <a:gd name="csY33" fmla="*/ 0 h 1770078"/>
-                <a:gd name="csX34" fmla="*/ 541087 w 1291905"/>
-                <a:gd name="csY34" fmla="*/ 112070 h 1770078"/>
-                <a:gd name="csX35" fmla="*/ 437829 w 1291905"/>
-                <a:gd name="csY35" fmla="*/ 0 h 1770078"/>
-                <a:gd name="csX36" fmla="*/ 428492 w 1291905"/>
-                <a:gd name="csY36" fmla="*/ 0 h 1770078"/>
-                <a:gd name="csX37" fmla="*/ 325234 w 1291905"/>
-                <a:gd name="csY37" fmla="*/ 112070 h 1770078"/>
-                <a:gd name="csX38" fmla="*/ 221976 w 1291905"/>
-                <a:gd name="csY38" fmla="*/ 0 h 1770078"/>
-                <a:gd name="csX39" fmla="*/ 212639 w 1291905"/>
-                <a:gd name="csY39" fmla="*/ 0 h 1770078"/>
-                <a:gd name="csX40" fmla="*/ 109381 w 1291905"/>
-                <a:gd name="csY40" fmla="*/ 112070 h 1770078"/>
-                <a:gd name="csX41" fmla="*/ 6123 w 1291905"/>
-                <a:gd name="csY41" fmla="*/ 0 h 1770078"/>
-              </a:gdLst>
-              <a:ahLst/>
-              <a:cxnLst>
-                <a:cxn ang="0">
-                  <a:pos x="csX0" y="csY0"/>
-                </a:cxn>
-                <a:cxn ang="0">
-                  <a:pos x="csX1" y="csY1"/>
-                </a:cxn>
-                <a:cxn ang="0">
-                  <a:pos x="csX2" y="csY2"/>
-                </a:cxn>
-                <a:cxn ang="0">
-                  <a:pos x="csX3" y="csY3"/>
-                </a:cxn>
-                <a:cxn ang="0">
-                  <a:pos x="csX4" y="csY4"/>
-                </a:cxn>
-                <a:cxn ang="0">
-                  <a:pos x="csX5" y="csY5"/>
-                </a:cxn>
-                <a:cxn ang="0">
-                  <a:pos x="csX6" y="csY6"/>
-                </a:cxn>
-                <a:cxn ang="0">
-                  <a:pos x="csX7" y="csY7"/>
-                </a:cxn>
-                <a:cxn ang="0">
-                  <a:pos x="csX8" y="csY8"/>
-                </a:cxn>
-                <a:cxn ang="0">
-                  <a:pos x="csX9" y="csY9"/>
-                </a:cxn>
-                <a:cxn ang="0">
-                  <a:pos x="csX10" y="csY10"/>
-                </a:cxn>
-                <a:cxn ang="0">
-                  <a:pos x="csX11" y="csY11"/>
-                </a:cxn>
-                <a:cxn ang="0">
-                  <a:pos x="csX12" y="csY12"/>
-                </a:cxn>
-                <a:cxn ang="0">
-                  <a:pos x="csX13" y="csY13"/>
-                </a:cxn>
-                <a:cxn ang="0">
-                  <a:pos x="csX14" y="csY14"/>
-                </a:cxn>
-                <a:cxn ang="0">
-                  <a:pos x="csX15" y="csY15"/>
-                </a:cxn>
-                <a:cxn ang="0">
-                  <a:pos x="csX16" y="csY16"/>
-                </a:cxn>
-                <a:cxn ang="0">
-                  <a:pos x="csX17" y="csY17"/>
-                </a:cxn>
-                <a:cxn ang="0">
-                  <a:pos x="csX18" y="csY18"/>
-                </a:cxn>
-                <a:cxn ang="0">
-                  <a:pos x="csX19" y="csY19"/>
-                </a:cxn>
-                <a:cxn ang="0">
-                  <a:pos x="csX20" y="csY20"/>
-                </a:cxn>
-                <a:cxn ang="0">
-                  <a:pos x="csX21" y="csY21"/>
-                </a:cxn>
-                <a:cxn ang="0">
-                  <a:pos x="csX22" y="csY22"/>
-                </a:cxn>
-                <a:cxn ang="0">
-                  <a:pos x="csX23" y="csY23"/>
-                </a:cxn>
-                <a:cxn ang="0">
-                  <a:pos x="csX24" y="csY24"/>
-                </a:cxn>
-                <a:cxn ang="0">
-                  <a:pos x="csX25" y="csY25"/>
-                </a:cxn>
-                <a:cxn ang="0">
-                  <a:pos x="csX26" y="csY26"/>
-                </a:cxn>
-                <a:cxn ang="0">
-                  <a:pos x="csX27" y="csY27"/>
-                </a:cxn>
-                <a:cxn ang="0">
-                  <a:pos x="csX28" y="csY28"/>
-                </a:cxn>
-                <a:cxn ang="0">
-                  <a:pos x="csX29" y="csY29"/>
-                </a:cxn>
-                <a:cxn ang="0">
-                  <a:pos x="csX30" y="csY30"/>
-                </a:cxn>
-                <a:cxn ang="0">
-                  <a:pos x="csX31" y="csY31"/>
-                </a:cxn>
-                <a:cxn ang="0">
-                  <a:pos x="csX32" y="csY32"/>
-                </a:cxn>
-                <a:cxn ang="0">
-                  <a:pos x="csX33" y="csY33"/>
-                </a:cxn>
-                <a:cxn ang="0">
-                  <a:pos x="csX34" y="csY34"/>
-                </a:cxn>
-                <a:cxn ang="0">
-                  <a:pos x="csX35" y="csY35"/>
-                </a:cxn>
-                <a:cxn ang="0">
-                  <a:pos x="csX36" y="csY36"/>
-                </a:cxn>
-                <a:cxn ang="0">
-                  <a:pos x="csX37" y="csY37"/>
-                </a:cxn>
-                <a:cxn ang="0">
-                  <a:pos x="csX38" y="csY38"/>
-                </a:cxn>
-                <a:cxn ang="0">
-                  <a:pos x="csX39" y="csY39"/>
-                </a:cxn>
-                <a:cxn ang="0">
-                  <a:pos x="csX40" y="csY40"/>
-                </a:cxn>
-                <a:cxn ang="0">
-                  <a:pos x="csX41" y="csY41"/>
-                </a:cxn>
-              </a:cxnLst>
-              <a:rect l="l" t="t" r="r" b="b"/>
-              <a:pathLst>
-                <a:path w="1291905" h="1770078">
-                  <a:moveTo>
-                    <a:pt x="0" y="0"/>
-                  </a:moveTo>
-                  <a:lnTo>
-                    <a:pt x="0" y="478173"/>
-                  </a:lnTo>
-                  <a:lnTo>
-                    <a:pt x="0" y="1291905"/>
-                  </a:lnTo>
-                  <a:lnTo>
-                    <a:pt x="0" y="1770078"/>
-                  </a:lnTo>
-                  <a:lnTo>
-                    <a:pt x="6123" y="1770078"/>
-                  </a:lnTo>
-                  <a:lnTo>
-                    <a:pt x="109381" y="1658008"/>
-                  </a:lnTo>
-                  <a:lnTo>
-                    <a:pt x="212639" y="1770078"/>
-                  </a:lnTo>
-                  <a:lnTo>
-                    <a:pt x="221976" y="1770078"/>
-                  </a:lnTo>
-                  <a:lnTo>
-                    <a:pt x="325234" y="1658008"/>
-                  </a:lnTo>
-                  <a:lnTo>
-                    <a:pt x="428492" y="1770078"/>
-                  </a:lnTo>
-                  <a:lnTo>
-                    <a:pt x="437829" y="1770078"/>
-                  </a:lnTo>
-                  <a:lnTo>
-                    <a:pt x="541087" y="1658008"/>
-                  </a:lnTo>
-                  <a:lnTo>
-                    <a:pt x="644346" y="1770078"/>
-                  </a:lnTo>
-                  <a:lnTo>
-                    <a:pt x="653683" y="1770078"/>
-                  </a:lnTo>
-                  <a:lnTo>
-                    <a:pt x="756941" y="1658008"/>
-                  </a:lnTo>
-                  <a:lnTo>
-                    <a:pt x="860199" y="1770078"/>
-                  </a:lnTo>
-                  <a:lnTo>
-                    <a:pt x="869536" y="1770078"/>
-                  </a:lnTo>
-                  <a:lnTo>
-                    <a:pt x="972794" y="1658008"/>
-                  </a:lnTo>
-                  <a:lnTo>
-                    <a:pt x="1076052" y="1770078"/>
-                  </a:lnTo>
-                  <a:lnTo>
-                    <a:pt x="1085389" y="1770078"/>
-                  </a:lnTo>
-                  <a:lnTo>
-                    <a:pt x="1188647" y="1658008"/>
-                  </a:lnTo>
-                  <a:lnTo>
-                    <a:pt x="1291905" y="1770078"/>
-                  </a:lnTo>
-                  <a:lnTo>
-                    <a:pt x="1291905" y="1291905"/>
-                  </a:lnTo>
-                  <a:lnTo>
-                    <a:pt x="1291905" y="478173"/>
-                  </a:lnTo>
-                  <a:lnTo>
-                    <a:pt x="1291905" y="0"/>
-                  </a:lnTo>
-                  <a:lnTo>
-                    <a:pt x="1188647" y="112070"/>
-                  </a:lnTo>
-                  <a:lnTo>
-                    <a:pt x="1085389" y="0"/>
-                  </a:lnTo>
-                  <a:lnTo>
-                    <a:pt x="1076052" y="0"/>
-                  </a:lnTo>
-                  <a:lnTo>
-                    <a:pt x="972794" y="112070"/>
-                  </a:lnTo>
-                  <a:lnTo>
-                    <a:pt x="869536" y="0"/>
-                  </a:lnTo>
-                  <a:lnTo>
-                    <a:pt x="860199" y="0"/>
-                  </a:lnTo>
-                  <a:lnTo>
-                    <a:pt x="756941" y="112070"/>
-                  </a:lnTo>
-                  <a:lnTo>
-                    <a:pt x="653683" y="0"/>
-                  </a:lnTo>
-                  <a:lnTo>
-                    <a:pt x="644346" y="0"/>
-                  </a:lnTo>
-                  <a:lnTo>
-                    <a:pt x="541087" y="112070"/>
-                  </a:lnTo>
-                  <a:lnTo>
-                    <a:pt x="437829" y="0"/>
-                  </a:lnTo>
-                  <a:lnTo>
-                    <a:pt x="428492" y="0"/>
-                  </a:lnTo>
-                  <a:lnTo>
-                    <a:pt x="325234" y="112070"/>
-                  </a:lnTo>
-                  <a:lnTo>
-                    <a:pt x="221976" y="0"/>
-                  </a:lnTo>
-                  <a:lnTo>
-                    <a:pt x="212639" y="0"/>
-                  </a:lnTo>
-                  <a:lnTo>
-                    <a:pt x="109381" y="112070"/>
-                  </a:lnTo>
-                  <a:lnTo>
-                    <a:pt x="6123" y="0"/>
-                  </a:lnTo>
-                  <a:close/>
-                </a:path>
-              </a:pathLst>
-            </a:custGeom>
-            <a:gradFill flip="none" rotWithShape="1">
-              <a:gsLst>
-                <a:gs pos="100000">
-                  <a:schemeClr val="bg1">
-                    <a:alpha val="46000"/>
-                  </a:schemeClr>
-                </a:gs>
-                <a:gs pos="35000">
-                  <a:schemeClr val="accent1">
-                    <a:tint val="23500"/>
-                    <a:satMod val="160000"/>
-                    <a:alpha val="0"/>
-                  </a:schemeClr>
-                </a:gs>
-              </a:gsLst>
-              <a:path path="circle">
-                <a:fillToRect l="100000" t="100000"/>
-              </a:path>
-              <a:tileRect r="-100000" b="-100000"/>
-            </a:gradFill>
-            <a:ln>
-              <a:noFill/>
-            </a:ln>
-          </p:spPr>
-          <p:style>
-            <a:lnRef idx="2">
-              <a:schemeClr val="accent1">
-                <a:shade val="15000"/>
-              </a:schemeClr>
-            </a:lnRef>
-            <a:fillRef idx="1">
-              <a:schemeClr val="accent1"/>
-            </a:fillRef>
-            <a:effectRef idx="0">
-              <a:schemeClr val="accent1"/>
-            </a:effectRef>
-            <a:fontRef idx="minor">
-              <a:schemeClr val="lt1"/>
-            </a:fontRef>
-          </p:style>
-          <p:txBody>
-            <a:bodyPr wrap="square" rtlCol="0" anchor="ctr">
-              <a:noAutofit/>
-            </a:bodyPr>
-            <a:lstStyle/>
-            <a:p>
-              <a:pPr algn="ctr"/>
-              <a:endParaRPr lang="en-US"/>
-            </a:p>
-          </p:txBody>
-        </p:sp>
-      </p:grpSp>
-      <p:grpSp>
-        <p:nvGrpSpPr>
-          <p:cNvPr id="381" name="Group 380">
-            <a:extLst>
-              <a:ext uri="{FF2B5EF4-FFF2-40B4-BE49-F238E27FC236}">
-                <a16:creationId xmlns:a16="http://schemas.microsoft.com/office/drawing/2014/main" id="{924E9443-2E7C-96AD-2422-F68FB05A835D}"/>
-              </a:ext>
-            </a:extLst>
-          </p:cNvPr>
-          <p:cNvGrpSpPr/>
-          <p:nvPr/>
-        </p:nvGrpSpPr>
-        <p:grpSpPr>
-          <a:xfrm>
-            <a:off x="3409509" y="4203447"/>
-            <a:ext cx="5366621" cy="652166"/>
-            <a:chOff x="165612" y="1298550"/>
-            <a:chExt cx="5366621" cy="652166"/>
-          </a:xfrm>
-        </p:grpSpPr>
-        <p:sp>
-          <p:nvSpPr>
-            <p:cNvPr id="382" name="Rectangle: Rounded Corners 381">
-              <a:extLst>
-                <a:ext uri="{FF2B5EF4-FFF2-40B4-BE49-F238E27FC236}">
-                  <a16:creationId xmlns:a16="http://schemas.microsoft.com/office/drawing/2014/main" id="{8614116D-99AE-6F24-502F-D2A00BD24662}"/>
-                </a:ext>
-              </a:extLst>
-            </p:cNvPr>
-            <p:cNvSpPr/>
-            <p:nvPr/>
-          </p:nvSpPr>
-          <p:spPr>
-            <a:xfrm>
-              <a:off x="165612" y="1298550"/>
-              <a:ext cx="937260" cy="652166"/>
-            </a:xfrm>
-            <a:prstGeom prst="roundRect">
-              <a:avLst/>
-            </a:prstGeom>
-            <a:gradFill flip="none" rotWithShape="1">
-              <a:gsLst>
-                <a:gs pos="36000">
-                  <a:srgbClr val="C775E7">
-                    <a:alpha val="0"/>
-                  </a:srgbClr>
-                </a:gs>
-                <a:gs pos="100000">
-                  <a:srgbClr val="C269E5"/>
-                </a:gs>
-              </a:gsLst>
-              <a:path path="circle">
-                <a:fillToRect r="100000" b="100000"/>
-              </a:path>
-              <a:tileRect l="-100000" t="-100000"/>
-            </a:gradFill>
-            <a:ln>
-              <a:noFill/>
-            </a:ln>
-          </p:spPr>
-          <p:style>
-            <a:lnRef idx="2">
-              <a:schemeClr val="accent1">
-                <a:shade val="15000"/>
-              </a:schemeClr>
-            </a:lnRef>
-            <a:fillRef idx="1">
-              <a:schemeClr val="accent1"/>
-            </a:fillRef>
-            <a:effectRef idx="0">
-              <a:schemeClr val="accent1"/>
-            </a:effectRef>
-            <a:fontRef idx="minor">
-              <a:schemeClr val="lt1"/>
-            </a:fontRef>
-          </p:style>
-          <p:txBody>
-            <a:bodyPr rtlCol="0" anchor="ctr"/>
-            <a:lstStyle/>
-            <a:p>
-              <a:pPr algn="ctr"/>
-              <a:endParaRPr lang="en-US"/>
-            </a:p>
-          </p:txBody>
-        </p:sp>
-        <p:sp>
-          <p:nvSpPr>
-            <p:cNvPr id="383" name="Freeform: Shape 382">
-              <a:extLst>
-                <a:ext uri="{FF2B5EF4-FFF2-40B4-BE49-F238E27FC236}">
-                  <a16:creationId xmlns:a16="http://schemas.microsoft.com/office/drawing/2014/main" id="{159D3982-00BC-A35D-67B0-6F397C0C5400}"/>
-                </a:ext>
-              </a:extLst>
-            </p:cNvPr>
-            <p:cNvSpPr/>
-            <p:nvPr/>
-          </p:nvSpPr>
-          <p:spPr>
-            <a:xfrm>
-              <a:off x="4599415" y="1298551"/>
-              <a:ext cx="932818" cy="652165"/>
-            </a:xfrm>
-            <a:custGeom>
-              <a:avLst/>
-              <a:gdLst>
-                <a:gd name="csX0" fmla="*/ 0 w 1761688"/>
-                <a:gd name="csY0" fmla="*/ 0 h 1291904"/>
-                <a:gd name="csX1" fmla="*/ 75501 w 1761688"/>
-                <a:gd name="csY1" fmla="*/ 0 h 1291904"/>
-                <a:gd name="csX2" fmla="*/ 1686187 w 1761688"/>
-                <a:gd name="csY2" fmla="*/ 0 h 1291904"/>
-                <a:gd name="csX3" fmla="*/ 1761688 w 1761688"/>
-                <a:gd name="csY3" fmla="*/ 0 h 1291904"/>
-                <a:gd name="csX4" fmla="*/ 1761688 w 1761688"/>
-                <a:gd name="csY4" fmla="*/ 102765 h 1291904"/>
-                <a:gd name="csX5" fmla="*/ 1686187 w 1761688"/>
-                <a:gd name="csY5" fmla="*/ 102765 h 1291904"/>
-                <a:gd name="csX6" fmla="*/ 1686187 w 1761688"/>
-                <a:gd name="csY6" fmla="*/ 1189139 h 1291904"/>
-                <a:gd name="csX7" fmla="*/ 1761688 w 1761688"/>
-                <a:gd name="csY7" fmla="*/ 1189139 h 1291904"/>
-                <a:gd name="csX8" fmla="*/ 1761688 w 1761688"/>
-                <a:gd name="csY8" fmla="*/ 1291904 h 1291904"/>
-                <a:gd name="csX9" fmla="*/ 1686187 w 1761688"/>
-                <a:gd name="csY9" fmla="*/ 1291904 h 1291904"/>
-                <a:gd name="csX10" fmla="*/ 75501 w 1761688"/>
-                <a:gd name="csY10" fmla="*/ 1291904 h 1291904"/>
-                <a:gd name="csX11" fmla="*/ 0 w 1761688"/>
-                <a:gd name="csY11" fmla="*/ 1291904 h 1291904"/>
-                <a:gd name="csX12" fmla="*/ 0 w 1761688"/>
-                <a:gd name="csY12" fmla="*/ 1189139 h 1291904"/>
-                <a:gd name="csX13" fmla="*/ 75501 w 1761688"/>
-                <a:gd name="csY13" fmla="*/ 1189139 h 1291904"/>
-                <a:gd name="csX14" fmla="*/ 75501 w 1761688"/>
-                <a:gd name="csY14" fmla="*/ 102765 h 1291904"/>
-                <a:gd name="csX15" fmla="*/ 0 w 1761688"/>
-                <a:gd name="csY15" fmla="*/ 102765 h 1291904"/>
-              </a:gdLst>
-              <a:ahLst/>
-              <a:cxnLst>
-                <a:cxn ang="0">
-                  <a:pos x="csX0" y="csY0"/>
-                </a:cxn>
-                <a:cxn ang="0">
-                  <a:pos x="csX1" y="csY1"/>
-                </a:cxn>
-                <a:cxn ang="0">
-                  <a:pos x="csX2" y="csY2"/>
-                </a:cxn>
-                <a:cxn ang="0">
-                  <a:pos x="csX3" y="csY3"/>
-                </a:cxn>
-                <a:cxn ang="0">
-                  <a:pos x="csX4" y="csY4"/>
-                </a:cxn>
-                <a:cxn ang="0">
-                  <a:pos x="csX5" y="csY5"/>
-                </a:cxn>
-                <a:cxn ang="0">
-                  <a:pos x="csX6" y="csY6"/>
-                </a:cxn>
-                <a:cxn ang="0">
-                  <a:pos x="csX7" y="csY7"/>
-                </a:cxn>
-                <a:cxn ang="0">
-                  <a:pos x="csX8" y="csY8"/>
-                </a:cxn>
-                <a:cxn ang="0">
-                  <a:pos x="csX9" y="csY9"/>
-                </a:cxn>
-                <a:cxn ang="0">
-                  <a:pos x="csX10" y="csY10"/>
-                </a:cxn>
-                <a:cxn ang="0">
-                  <a:pos x="csX11" y="csY11"/>
-                </a:cxn>
-                <a:cxn ang="0">
-                  <a:pos x="csX12" y="csY12"/>
-                </a:cxn>
-                <a:cxn ang="0">
-                  <a:pos x="csX13" y="csY13"/>
-                </a:cxn>
-                <a:cxn ang="0">
-                  <a:pos x="csX14" y="csY14"/>
-                </a:cxn>
-                <a:cxn ang="0">
-                  <a:pos x="csX15" y="csY15"/>
-                </a:cxn>
-              </a:cxnLst>
-              <a:rect l="l" t="t" r="r" b="b"/>
-              <a:pathLst>
-                <a:path w="1761688" h="1291904">
-                  <a:moveTo>
-                    <a:pt x="0" y="0"/>
-                  </a:moveTo>
-                  <a:lnTo>
-                    <a:pt x="75501" y="0"/>
-                  </a:lnTo>
-                  <a:lnTo>
-                    <a:pt x="1686187" y="0"/>
-                  </a:lnTo>
-                  <a:lnTo>
-                    <a:pt x="1761688" y="0"/>
-                  </a:lnTo>
-                  <a:lnTo>
-                    <a:pt x="1761688" y="102765"/>
-                  </a:lnTo>
-                  <a:lnTo>
-                    <a:pt x="1686187" y="102765"/>
-                  </a:lnTo>
-                  <a:lnTo>
-                    <a:pt x="1686187" y="1189139"/>
-                  </a:lnTo>
-                  <a:lnTo>
-                    <a:pt x="1761688" y="1189139"/>
-                  </a:lnTo>
-                  <a:lnTo>
-                    <a:pt x="1761688" y="1291904"/>
-                  </a:lnTo>
-                  <a:lnTo>
-                    <a:pt x="1686187" y="1291904"/>
-                  </a:lnTo>
-                  <a:lnTo>
-                    <a:pt x="75501" y="1291904"/>
-                  </a:lnTo>
-                  <a:lnTo>
-                    <a:pt x="0" y="1291904"/>
-                  </a:lnTo>
-                  <a:lnTo>
-                    <a:pt x="0" y="1189139"/>
-                  </a:lnTo>
-                  <a:lnTo>
-                    <a:pt x="75501" y="1189139"/>
-                  </a:lnTo>
-                  <a:lnTo>
-                    <a:pt x="75501" y="102765"/>
-                  </a:lnTo>
-                  <a:lnTo>
-                    <a:pt x="0" y="102765"/>
-                  </a:lnTo>
-                  <a:close/>
-                </a:path>
-              </a:pathLst>
-            </a:custGeom>
-            <a:gradFill flip="none" rotWithShape="1">
-              <a:gsLst>
-                <a:gs pos="35000">
-                  <a:srgbClr val="FFC000">
-                    <a:alpha val="0"/>
-                  </a:srgbClr>
-                </a:gs>
-                <a:gs pos="100000">
-                  <a:srgbClr val="FFC000"/>
-                </a:gs>
-              </a:gsLst>
-              <a:path path="circle">
-                <a:fillToRect r="100000" b="100000"/>
-              </a:path>
-              <a:tileRect l="-100000" t="-100000"/>
-            </a:gradFill>
-            <a:ln>
-              <a:noFill/>
-            </a:ln>
-          </p:spPr>
-          <p:style>
-            <a:lnRef idx="2">
-              <a:schemeClr val="accent1">
-                <a:shade val="15000"/>
-              </a:schemeClr>
-            </a:lnRef>
-            <a:fillRef idx="1">
-              <a:schemeClr val="accent1"/>
-            </a:fillRef>
-            <a:effectRef idx="0">
-              <a:schemeClr val="accent1"/>
-            </a:effectRef>
-            <a:fontRef idx="minor">
-              <a:schemeClr val="lt1"/>
-            </a:fontRef>
-          </p:style>
-          <p:txBody>
-            <a:bodyPr wrap="square" rtlCol="0" anchor="ctr">
-              <a:noAutofit/>
-            </a:bodyPr>
-            <a:lstStyle/>
-            <a:p>
-              <a:pPr algn="ctr"/>
-              <a:endParaRPr lang="en-US"/>
-            </a:p>
-          </p:txBody>
-        </p:sp>
-        <p:sp>
-          <p:nvSpPr>
-            <p:cNvPr id="384" name="Freeform: Shape 383">
-              <a:extLst>
-                <a:ext uri="{FF2B5EF4-FFF2-40B4-BE49-F238E27FC236}">
-                  <a16:creationId xmlns:a16="http://schemas.microsoft.com/office/drawing/2014/main" id="{D13259C3-6F29-EA99-E506-F44CFE698053}"/>
-                </a:ext>
-              </a:extLst>
-            </p:cNvPr>
-            <p:cNvSpPr/>
-            <p:nvPr/>
-          </p:nvSpPr>
-          <p:spPr>
-            <a:xfrm>
-              <a:off x="3492986" y="1298551"/>
-              <a:ext cx="937260" cy="652165"/>
-            </a:xfrm>
-            <a:custGeom>
-              <a:avLst/>
-              <a:gdLst>
-                <a:gd name="csX0" fmla="*/ 0 w 937260"/>
-                <a:gd name="csY0" fmla="*/ 0 h 652165"/>
-                <a:gd name="csX1" fmla="*/ 179 w 937260"/>
-                <a:gd name="csY1" fmla="*/ 0 h 652165"/>
-                <a:gd name="csX2" fmla="*/ 116373 w 937260"/>
-                <a:gd name="csY2" fmla="*/ 31552 h 652165"/>
-                <a:gd name="csX3" fmla="*/ 468630 w 937260"/>
-                <a:gd name="csY3" fmla="*/ 67131 h 652165"/>
-                <a:gd name="csX4" fmla="*/ 820887 w 937260"/>
-                <a:gd name="csY4" fmla="*/ 31552 h 652165"/>
-                <a:gd name="csX5" fmla="*/ 937081 w 937260"/>
-                <a:gd name="csY5" fmla="*/ 0 h 652165"/>
-                <a:gd name="csX6" fmla="*/ 937260 w 937260"/>
-                <a:gd name="csY6" fmla="*/ 0 h 652165"/>
-                <a:gd name="csX7" fmla="*/ 937260 w 937260"/>
-                <a:gd name="csY7" fmla="*/ 652165 h 652165"/>
-                <a:gd name="csX8" fmla="*/ 937078 w 937260"/>
-                <a:gd name="csY8" fmla="*/ 652165 h 652165"/>
-                <a:gd name="csX9" fmla="*/ 820887 w 937260"/>
-                <a:gd name="csY9" fmla="*/ 620614 h 652165"/>
-                <a:gd name="csX10" fmla="*/ 468630 w 937260"/>
-                <a:gd name="csY10" fmla="*/ 585035 h 652165"/>
-                <a:gd name="csX11" fmla="*/ 116373 w 937260"/>
-                <a:gd name="csY11" fmla="*/ 620614 h 652165"/>
-                <a:gd name="csX12" fmla="*/ 183 w 937260"/>
-                <a:gd name="csY12" fmla="*/ 652165 h 652165"/>
-                <a:gd name="csX13" fmla="*/ 0 w 937260"/>
-                <a:gd name="csY13" fmla="*/ 652165 h 652165"/>
-              </a:gdLst>
-              <a:ahLst/>
-              <a:cxnLst>
-                <a:cxn ang="0">
-                  <a:pos x="csX0" y="csY0"/>
-                </a:cxn>
-                <a:cxn ang="0">
-                  <a:pos x="csX1" y="csY1"/>
-                </a:cxn>
-                <a:cxn ang="0">
-                  <a:pos x="csX2" y="csY2"/>
-                </a:cxn>
-                <a:cxn ang="0">
-                  <a:pos x="csX3" y="csY3"/>
-                </a:cxn>
-                <a:cxn ang="0">
-                  <a:pos x="csX4" y="csY4"/>
-                </a:cxn>
-                <a:cxn ang="0">
-                  <a:pos x="csX5" y="csY5"/>
-                </a:cxn>
-                <a:cxn ang="0">
-                  <a:pos x="csX6" y="csY6"/>
-                </a:cxn>
-                <a:cxn ang="0">
-                  <a:pos x="csX7" y="csY7"/>
-                </a:cxn>
-                <a:cxn ang="0">
-                  <a:pos x="csX8" y="csY8"/>
-                </a:cxn>
-                <a:cxn ang="0">
-                  <a:pos x="csX9" y="csY9"/>
-                </a:cxn>
-                <a:cxn ang="0">
-                  <a:pos x="csX10" y="csY10"/>
-                </a:cxn>
-                <a:cxn ang="0">
-                  <a:pos x="csX11" y="csY11"/>
-                </a:cxn>
-                <a:cxn ang="0">
-                  <a:pos x="csX12" y="csY12"/>
-                </a:cxn>
-                <a:cxn ang="0">
-                  <a:pos x="csX13" y="csY13"/>
-                </a:cxn>
-              </a:cxnLst>
-              <a:rect l="l" t="t" r="r" b="b"/>
-              <a:pathLst>
-                <a:path w="937260" h="652165">
-                  <a:moveTo>
-                    <a:pt x="0" y="0"/>
-                  </a:moveTo>
-                  <a:lnTo>
-                    <a:pt x="179" y="0"/>
-                  </a:lnTo>
-                  <a:lnTo>
-                    <a:pt x="116373" y="31552"/>
-                  </a:lnTo>
-                  <a:cubicBezTo>
-                    <a:pt x="224643" y="54462"/>
-                    <a:pt x="343679" y="67131"/>
-                    <a:pt x="468630" y="67131"/>
-                  </a:cubicBezTo>
-                  <a:cubicBezTo>
-                    <a:pt x="593581" y="67131"/>
-                    <a:pt x="712618" y="54462"/>
-                    <a:pt x="820887" y="31552"/>
-                  </a:cubicBezTo>
-                  <a:lnTo>
-                    <a:pt x="937081" y="0"/>
-                  </a:lnTo>
-                  <a:lnTo>
-                    <a:pt x="937260" y="0"/>
-                  </a:lnTo>
-                  <a:lnTo>
-                    <a:pt x="937260" y="652165"/>
-                  </a:lnTo>
-                  <a:lnTo>
-                    <a:pt x="937078" y="652165"/>
-                  </a:lnTo>
-                  <a:lnTo>
-                    <a:pt x="820887" y="620614"/>
-                  </a:lnTo>
-                  <a:cubicBezTo>
-                    <a:pt x="712618" y="597704"/>
-                    <a:pt x="593581" y="585035"/>
-                    <a:pt x="468630" y="585035"/>
-                  </a:cubicBezTo>
-                  <a:cubicBezTo>
-                    <a:pt x="343679" y="585035"/>
-                    <a:pt x="224643" y="597704"/>
-                    <a:pt x="116373" y="620614"/>
-                  </a:cubicBezTo>
-                  <a:lnTo>
-                    <a:pt x="183" y="652165"/>
-                  </a:lnTo>
-                  <a:lnTo>
-                    <a:pt x="0" y="652165"/>
-                  </a:lnTo>
-                  <a:close/>
-                </a:path>
-              </a:pathLst>
-            </a:custGeom>
-            <a:gradFill flip="none" rotWithShape="1">
-              <a:gsLst>
-                <a:gs pos="41000">
-                  <a:srgbClr val="00CC5C">
-                    <a:alpha val="0"/>
-                  </a:srgbClr>
-                </a:gs>
-                <a:gs pos="100000">
-                  <a:srgbClr val="00CC5C"/>
-                </a:gs>
-              </a:gsLst>
-              <a:path path="circle">
-                <a:fillToRect r="100000" b="100000"/>
-              </a:path>
-              <a:tileRect l="-100000" t="-100000"/>
-            </a:gradFill>
-            <a:ln>
-              <a:noFill/>
-            </a:ln>
-          </p:spPr>
-          <p:style>
-            <a:lnRef idx="2">
-              <a:schemeClr val="accent1">
-                <a:shade val="15000"/>
-              </a:schemeClr>
-            </a:lnRef>
-            <a:fillRef idx="1">
-              <a:schemeClr val="accent1"/>
-            </a:fillRef>
-            <a:effectRef idx="0">
-              <a:schemeClr val="accent1"/>
-            </a:effectRef>
-            <a:fontRef idx="minor">
-              <a:schemeClr val="lt1"/>
-            </a:fontRef>
-          </p:style>
-          <p:txBody>
-            <a:bodyPr wrap="square" rtlCol="0" anchor="ctr">
-              <a:noAutofit/>
-            </a:bodyPr>
-            <a:lstStyle/>
-            <a:p>
-              <a:pPr algn="ctr"/>
-              <a:endParaRPr lang="en-US"/>
-            </a:p>
-          </p:txBody>
-        </p:sp>
-        <p:sp>
-          <p:nvSpPr>
             <p:cNvPr id="385" name="Freeform: Shape 384">
               <a:extLst>
                 <a:ext uri="{FF2B5EF4-FFF2-40B4-BE49-F238E27FC236}">
@@ -9351,7 +9018,7 @@
           </p:nvSpPr>
           <p:spPr>
             <a:xfrm>
-              <a:off x="1279266" y="1298551"/>
+              <a:off x="4523163" y="4203448"/>
               <a:ext cx="937260" cy="652164"/>
             </a:xfrm>
             <a:custGeom>
@@ -9567,10 +9234,10 @@
         </p:sp>
         <p:sp>
           <p:nvSpPr>
-            <p:cNvPr id="386" name="Freeform: Shape 385">
+            <p:cNvPr id="391" name="Freeform: Shape 390">
               <a:extLst>
                 <a:ext uri="{FF2B5EF4-FFF2-40B4-BE49-F238E27FC236}">
-                  <a16:creationId xmlns:a16="http://schemas.microsoft.com/office/drawing/2014/main" id="{BF0DED88-A4BF-F579-E38F-673F030F0383}"/>
+                  <a16:creationId xmlns:a16="http://schemas.microsoft.com/office/drawing/2014/main" id="{B285A4C6-ADD5-892E-5FDD-C3115FF2E191}"/>
                 </a:ext>
               </a:extLst>
             </p:cNvPr>
@@ -9578,8 +9245,257 @@
             <p:nvPr/>
           </p:nvSpPr>
           <p:spPr>
-            <a:xfrm rot="16200000" flipV="1">
-              <a:off x="2528674" y="1156004"/>
+            <a:xfrm>
+              <a:off x="4523163" y="4203448"/>
+              <a:ext cx="937260" cy="652164"/>
+            </a:xfrm>
+            <a:custGeom>
+              <a:avLst/>
+              <a:gdLst>
+                <a:gd name="csX0" fmla="*/ 885039 w 1770078"/>
+                <a:gd name="csY0" fmla="*/ 0 h 1291903"/>
+                <a:gd name="csX1" fmla="*/ 1752097 w 1770078"/>
+                <a:gd name="csY1" fmla="*/ 364364 h 1291903"/>
+                <a:gd name="csX2" fmla="*/ 1756386 w 1770078"/>
+                <a:gd name="csY2" fmla="*/ 378854 h 1291903"/>
+                <a:gd name="csX3" fmla="*/ 1770078 w 1770078"/>
+                <a:gd name="csY3" fmla="*/ 378854 h 1291903"/>
+                <a:gd name="csX4" fmla="*/ 1770078 w 1770078"/>
+                <a:gd name="csY4" fmla="*/ 456330 h 1291903"/>
+                <a:gd name="csX5" fmla="*/ 1770078 w 1770078"/>
+                <a:gd name="csY5" fmla="*/ 1291903 h 1291903"/>
+                <a:gd name="csX6" fmla="*/ 0 w 1770078"/>
+                <a:gd name="csY6" fmla="*/ 1291903 h 1291903"/>
+                <a:gd name="csX7" fmla="*/ 0 w 1770078"/>
+                <a:gd name="csY7" fmla="*/ 456330 h 1291903"/>
+                <a:gd name="csX8" fmla="*/ 0 w 1770078"/>
+                <a:gd name="csY8" fmla="*/ 378854 h 1291903"/>
+                <a:gd name="csX9" fmla="*/ 13692 w 1770078"/>
+                <a:gd name="csY9" fmla="*/ 378854 h 1291903"/>
+                <a:gd name="csX10" fmla="*/ 17981 w 1770078"/>
+                <a:gd name="csY10" fmla="*/ 364364 h 1291903"/>
+                <a:gd name="csX11" fmla="*/ 885039 w 1770078"/>
+                <a:gd name="csY11" fmla="*/ 0 h 1291903"/>
+                <a:gd name="csX0" fmla="*/ 885039 w 1770078"/>
+                <a:gd name="csY0" fmla="*/ 0 h 1291903"/>
+                <a:gd name="csX1" fmla="*/ 1752097 w 1770078"/>
+                <a:gd name="csY1" fmla="*/ 364364 h 1291903"/>
+                <a:gd name="csX2" fmla="*/ 1756386 w 1770078"/>
+                <a:gd name="csY2" fmla="*/ 378854 h 1291903"/>
+                <a:gd name="csX3" fmla="*/ 1770078 w 1770078"/>
+                <a:gd name="csY3" fmla="*/ 378854 h 1291903"/>
+                <a:gd name="csX4" fmla="*/ 1770078 w 1770078"/>
+                <a:gd name="csY4" fmla="*/ 456330 h 1291903"/>
+                <a:gd name="csX5" fmla="*/ 1770078 w 1770078"/>
+                <a:gd name="csY5" fmla="*/ 1291903 h 1291903"/>
+                <a:gd name="csX6" fmla="*/ 0 w 1770078"/>
+                <a:gd name="csY6" fmla="*/ 1291903 h 1291903"/>
+                <a:gd name="csX7" fmla="*/ 0 w 1770078"/>
+                <a:gd name="csY7" fmla="*/ 456330 h 1291903"/>
+                <a:gd name="csX8" fmla="*/ 13692 w 1770078"/>
+                <a:gd name="csY8" fmla="*/ 378854 h 1291903"/>
+                <a:gd name="csX9" fmla="*/ 17981 w 1770078"/>
+                <a:gd name="csY9" fmla="*/ 364364 h 1291903"/>
+                <a:gd name="csX10" fmla="*/ 885039 w 1770078"/>
+                <a:gd name="csY10" fmla="*/ 0 h 1291903"/>
+                <a:gd name="csX0" fmla="*/ 885039 w 1770078"/>
+                <a:gd name="csY0" fmla="*/ 0 h 1291903"/>
+                <a:gd name="csX1" fmla="*/ 1752097 w 1770078"/>
+                <a:gd name="csY1" fmla="*/ 364364 h 1291903"/>
+                <a:gd name="csX2" fmla="*/ 1756386 w 1770078"/>
+                <a:gd name="csY2" fmla="*/ 378854 h 1291903"/>
+                <a:gd name="csX3" fmla="*/ 1770078 w 1770078"/>
+                <a:gd name="csY3" fmla="*/ 378854 h 1291903"/>
+                <a:gd name="csX4" fmla="*/ 1770078 w 1770078"/>
+                <a:gd name="csY4" fmla="*/ 456330 h 1291903"/>
+                <a:gd name="csX5" fmla="*/ 1770078 w 1770078"/>
+                <a:gd name="csY5" fmla="*/ 1291903 h 1291903"/>
+                <a:gd name="csX6" fmla="*/ 0 w 1770078"/>
+                <a:gd name="csY6" fmla="*/ 1291903 h 1291903"/>
+                <a:gd name="csX7" fmla="*/ 0 w 1770078"/>
+                <a:gd name="csY7" fmla="*/ 456330 h 1291903"/>
+                <a:gd name="csX8" fmla="*/ 17981 w 1770078"/>
+                <a:gd name="csY8" fmla="*/ 364364 h 1291903"/>
+                <a:gd name="csX9" fmla="*/ 885039 w 1770078"/>
+                <a:gd name="csY9" fmla="*/ 0 h 1291903"/>
+                <a:gd name="csX0" fmla="*/ 885039 w 1770078"/>
+                <a:gd name="csY0" fmla="*/ 0 h 1291903"/>
+                <a:gd name="csX1" fmla="*/ 1752097 w 1770078"/>
+                <a:gd name="csY1" fmla="*/ 364364 h 1291903"/>
+                <a:gd name="csX2" fmla="*/ 1756386 w 1770078"/>
+                <a:gd name="csY2" fmla="*/ 378854 h 1291903"/>
+                <a:gd name="csX3" fmla="*/ 1770078 w 1770078"/>
+                <a:gd name="csY3" fmla="*/ 456330 h 1291903"/>
+                <a:gd name="csX4" fmla="*/ 1770078 w 1770078"/>
+                <a:gd name="csY4" fmla="*/ 1291903 h 1291903"/>
+                <a:gd name="csX5" fmla="*/ 0 w 1770078"/>
+                <a:gd name="csY5" fmla="*/ 1291903 h 1291903"/>
+                <a:gd name="csX6" fmla="*/ 0 w 1770078"/>
+                <a:gd name="csY6" fmla="*/ 456330 h 1291903"/>
+                <a:gd name="csX7" fmla="*/ 17981 w 1770078"/>
+                <a:gd name="csY7" fmla="*/ 364364 h 1291903"/>
+                <a:gd name="csX8" fmla="*/ 885039 w 1770078"/>
+                <a:gd name="csY8" fmla="*/ 0 h 1291903"/>
+                <a:gd name="csX0" fmla="*/ 885039 w 1770078"/>
+                <a:gd name="csY0" fmla="*/ 0 h 1291903"/>
+                <a:gd name="csX1" fmla="*/ 1752097 w 1770078"/>
+                <a:gd name="csY1" fmla="*/ 364364 h 1291903"/>
+                <a:gd name="csX2" fmla="*/ 1770078 w 1770078"/>
+                <a:gd name="csY2" fmla="*/ 456330 h 1291903"/>
+                <a:gd name="csX3" fmla="*/ 1770078 w 1770078"/>
+                <a:gd name="csY3" fmla="*/ 1291903 h 1291903"/>
+                <a:gd name="csX4" fmla="*/ 0 w 1770078"/>
+                <a:gd name="csY4" fmla="*/ 1291903 h 1291903"/>
+                <a:gd name="csX5" fmla="*/ 0 w 1770078"/>
+                <a:gd name="csY5" fmla="*/ 456330 h 1291903"/>
+                <a:gd name="csX6" fmla="*/ 17981 w 1770078"/>
+                <a:gd name="csY6" fmla="*/ 364364 h 1291903"/>
+                <a:gd name="csX7" fmla="*/ 885039 w 1770078"/>
+                <a:gd name="csY7" fmla="*/ 0 h 1291903"/>
+              </a:gdLst>
+              <a:ahLst/>
+              <a:cxnLst>
+                <a:cxn ang="0">
+                  <a:pos x="csX0" y="csY0"/>
+                </a:cxn>
+                <a:cxn ang="0">
+                  <a:pos x="csX1" y="csY1"/>
+                </a:cxn>
+                <a:cxn ang="0">
+                  <a:pos x="csX2" y="csY2"/>
+                </a:cxn>
+                <a:cxn ang="0">
+                  <a:pos x="csX3" y="csY3"/>
+                </a:cxn>
+                <a:cxn ang="0">
+                  <a:pos x="csX4" y="csY4"/>
+                </a:cxn>
+                <a:cxn ang="0">
+                  <a:pos x="csX5" y="csY5"/>
+                </a:cxn>
+                <a:cxn ang="0">
+                  <a:pos x="csX6" y="csY6"/>
+                </a:cxn>
+                <a:cxn ang="0">
+                  <a:pos x="csX7" y="csY7"/>
+                </a:cxn>
+              </a:cxnLst>
+              <a:rect l="l" t="t" r="r" b="b"/>
+              <a:pathLst>
+                <a:path w="1770078" h="1291903">
+                  <a:moveTo>
+                    <a:pt x="885039" y="0"/>
+                  </a:moveTo>
+                  <a:cubicBezTo>
+                    <a:pt x="1312734" y="0"/>
+                    <a:pt x="1669571" y="156422"/>
+                    <a:pt x="1752097" y="364364"/>
+                  </a:cubicBezTo>
+                  <a:lnTo>
+                    <a:pt x="1770078" y="456330"/>
+                  </a:lnTo>
+                  <a:lnTo>
+                    <a:pt x="1770078" y="1291903"/>
+                  </a:lnTo>
+                  <a:lnTo>
+                    <a:pt x="0" y="1291903"/>
+                  </a:lnTo>
+                  <a:lnTo>
+                    <a:pt x="0" y="456330"/>
+                  </a:lnTo>
+                  <a:lnTo>
+                    <a:pt x="17981" y="364364"/>
+                  </a:lnTo>
+                  <a:cubicBezTo>
+                    <a:pt x="100507" y="156422"/>
+                    <a:pt x="457344" y="0"/>
+                    <a:pt x="885039" y="0"/>
+                  </a:cubicBezTo>
+                  <a:close/>
+                </a:path>
+              </a:pathLst>
+            </a:custGeom>
+            <a:gradFill flip="none" rotWithShape="1">
+              <a:gsLst>
+                <a:gs pos="100000">
+                  <a:srgbClr val="00B050">
+                    <a:alpha val="67000"/>
+                  </a:srgbClr>
+                </a:gs>
+                <a:gs pos="73000">
+                  <a:srgbClr val="00B050">
+                    <a:alpha val="0"/>
+                  </a:srgbClr>
+                </a:gs>
+              </a:gsLst>
+              <a:lin ang="8400000" scaled="0"/>
+              <a:tileRect/>
+            </a:gradFill>
+            <a:ln>
+              <a:noFill/>
+            </a:ln>
+          </p:spPr>
+          <p:style>
+            <a:lnRef idx="2">
+              <a:schemeClr val="accent1">
+                <a:shade val="15000"/>
+              </a:schemeClr>
+            </a:lnRef>
+            <a:fillRef idx="1">
+              <a:schemeClr val="accent1"/>
+            </a:fillRef>
+            <a:effectRef idx="0">
+              <a:schemeClr val="accent1"/>
+            </a:effectRef>
+            <a:fontRef idx="minor">
+              <a:schemeClr val="lt1"/>
+            </a:fontRef>
+          </p:style>
+          <p:txBody>
+            <a:bodyPr rtlCol="0" anchor="ctr"/>
+            <a:lstStyle/>
+            <a:p>
+              <a:pPr algn="ctr"/>
+              <a:endParaRPr lang="en-US"/>
+            </a:p>
+          </p:txBody>
+        </p:sp>
+      </p:grpSp>
+      <p:grpSp>
+        <p:nvGrpSpPr>
+          <p:cNvPr id="9" name="Group 8">
+            <a:extLst>
+              <a:ext uri="{FF2B5EF4-FFF2-40B4-BE49-F238E27FC236}">
+                <a16:creationId xmlns:a16="http://schemas.microsoft.com/office/drawing/2014/main" id="{AC1A55BB-5A19-2645-B1A0-C9EE6B3C3752}"/>
+              </a:ext>
+            </a:extLst>
+          </p:cNvPr>
+          <p:cNvGrpSpPr/>
+          <p:nvPr/>
+        </p:nvGrpSpPr>
+        <p:grpSpPr>
+          <a:xfrm>
+            <a:off x="5630023" y="4203448"/>
+            <a:ext cx="937260" cy="652165"/>
+            <a:chOff x="5630023" y="4203448"/>
+            <a:chExt cx="937260" cy="652165"/>
+          </a:xfrm>
+        </p:grpSpPr>
+        <p:sp>
+          <p:nvSpPr>
+            <p:cNvPr id="374" name="Freeform: Shape 373">
+              <a:extLst>
+                <a:ext uri="{FF2B5EF4-FFF2-40B4-BE49-F238E27FC236}">
+                  <a16:creationId xmlns:a16="http://schemas.microsoft.com/office/drawing/2014/main" id="{FEC898AD-56E7-E960-36F7-45AEF59C0B1E}"/>
+                </a:ext>
+              </a:extLst>
+            </p:cNvPr>
+            <p:cNvSpPr/>
+            <p:nvPr/>
+          </p:nvSpPr>
+          <p:spPr>
+            <a:xfrm rot="16200000" flipH="1">
+              <a:off x="5772571" y="4060900"/>
               <a:ext cx="652164" cy="937260"/>
             </a:xfrm>
             <a:custGeom>
@@ -9932,6 +9848,825 @@
                 </a:path>
               </a:pathLst>
             </a:custGeom>
+            <a:solidFill>
+              <a:srgbClr val="F86042"/>
+            </a:solidFill>
+            <a:ln w="3175">
+              <a:noFill/>
+            </a:ln>
+          </p:spPr>
+          <p:style>
+            <a:lnRef idx="2">
+              <a:schemeClr val="accent1">
+                <a:shade val="15000"/>
+              </a:schemeClr>
+            </a:lnRef>
+            <a:fillRef idx="1">
+              <a:schemeClr val="accent1"/>
+            </a:fillRef>
+            <a:effectRef idx="0">
+              <a:schemeClr val="accent1"/>
+            </a:effectRef>
+            <a:fontRef idx="minor">
+              <a:schemeClr val="lt1"/>
+            </a:fontRef>
+          </p:style>
+          <p:txBody>
+            <a:bodyPr wrap="square" rtlCol="0" anchor="ctr">
+              <a:noAutofit/>
+            </a:bodyPr>
+            <a:lstStyle/>
+            <a:p>
+              <a:pPr algn="ctr"/>
+              <a:endParaRPr lang="en-US"/>
+            </a:p>
+          </p:txBody>
+        </p:sp>
+        <p:sp>
+          <p:nvSpPr>
+            <p:cNvPr id="380" name="Freeform: Shape 379">
+              <a:extLst>
+                <a:ext uri="{FF2B5EF4-FFF2-40B4-BE49-F238E27FC236}">
+                  <a16:creationId xmlns:a16="http://schemas.microsoft.com/office/drawing/2014/main" id="{A4EC357D-111B-E447-3AE0-293A4C5A277F}"/>
+                </a:ext>
+              </a:extLst>
+            </p:cNvPr>
+            <p:cNvSpPr/>
+            <p:nvPr/>
+          </p:nvSpPr>
+          <p:spPr>
+            <a:xfrm rot="16200000" flipH="1">
+              <a:off x="5772571" y="4060900"/>
+              <a:ext cx="652164" cy="937260"/>
+            </a:xfrm>
+            <a:custGeom>
+              <a:avLst/>
+              <a:gdLst>
+                <a:gd name="csX0" fmla="*/ 0 w 1291905"/>
+                <a:gd name="csY0" fmla="*/ 0 h 1770078"/>
+                <a:gd name="csX1" fmla="*/ 0 w 1291905"/>
+                <a:gd name="csY1" fmla="*/ 478173 h 1770078"/>
+                <a:gd name="csX2" fmla="*/ 0 w 1291905"/>
+                <a:gd name="csY2" fmla="*/ 1291905 h 1770078"/>
+                <a:gd name="csX3" fmla="*/ 0 w 1291905"/>
+                <a:gd name="csY3" fmla="*/ 1770078 h 1770078"/>
+                <a:gd name="csX4" fmla="*/ 6123 w 1291905"/>
+                <a:gd name="csY4" fmla="*/ 1770078 h 1770078"/>
+                <a:gd name="csX5" fmla="*/ 109381 w 1291905"/>
+                <a:gd name="csY5" fmla="*/ 1658008 h 1770078"/>
+                <a:gd name="csX6" fmla="*/ 212639 w 1291905"/>
+                <a:gd name="csY6" fmla="*/ 1770078 h 1770078"/>
+                <a:gd name="csX7" fmla="*/ 221976 w 1291905"/>
+                <a:gd name="csY7" fmla="*/ 1770078 h 1770078"/>
+                <a:gd name="csX8" fmla="*/ 325234 w 1291905"/>
+                <a:gd name="csY8" fmla="*/ 1658008 h 1770078"/>
+                <a:gd name="csX9" fmla="*/ 428492 w 1291905"/>
+                <a:gd name="csY9" fmla="*/ 1770078 h 1770078"/>
+                <a:gd name="csX10" fmla="*/ 437829 w 1291905"/>
+                <a:gd name="csY10" fmla="*/ 1770078 h 1770078"/>
+                <a:gd name="csX11" fmla="*/ 541087 w 1291905"/>
+                <a:gd name="csY11" fmla="*/ 1658008 h 1770078"/>
+                <a:gd name="csX12" fmla="*/ 644346 w 1291905"/>
+                <a:gd name="csY12" fmla="*/ 1770078 h 1770078"/>
+                <a:gd name="csX13" fmla="*/ 653683 w 1291905"/>
+                <a:gd name="csY13" fmla="*/ 1770078 h 1770078"/>
+                <a:gd name="csX14" fmla="*/ 756941 w 1291905"/>
+                <a:gd name="csY14" fmla="*/ 1658008 h 1770078"/>
+                <a:gd name="csX15" fmla="*/ 860199 w 1291905"/>
+                <a:gd name="csY15" fmla="*/ 1770078 h 1770078"/>
+                <a:gd name="csX16" fmla="*/ 869536 w 1291905"/>
+                <a:gd name="csY16" fmla="*/ 1770078 h 1770078"/>
+                <a:gd name="csX17" fmla="*/ 972794 w 1291905"/>
+                <a:gd name="csY17" fmla="*/ 1658008 h 1770078"/>
+                <a:gd name="csX18" fmla="*/ 1076052 w 1291905"/>
+                <a:gd name="csY18" fmla="*/ 1770078 h 1770078"/>
+                <a:gd name="csX19" fmla="*/ 1085389 w 1291905"/>
+                <a:gd name="csY19" fmla="*/ 1770078 h 1770078"/>
+                <a:gd name="csX20" fmla="*/ 1188647 w 1291905"/>
+                <a:gd name="csY20" fmla="*/ 1658008 h 1770078"/>
+                <a:gd name="csX21" fmla="*/ 1291905 w 1291905"/>
+                <a:gd name="csY21" fmla="*/ 1770078 h 1770078"/>
+                <a:gd name="csX22" fmla="*/ 1291905 w 1291905"/>
+                <a:gd name="csY22" fmla="*/ 1291905 h 1770078"/>
+                <a:gd name="csX23" fmla="*/ 1291905 w 1291905"/>
+                <a:gd name="csY23" fmla="*/ 478173 h 1770078"/>
+                <a:gd name="csX24" fmla="*/ 1291905 w 1291905"/>
+                <a:gd name="csY24" fmla="*/ 0 h 1770078"/>
+                <a:gd name="csX25" fmla="*/ 1188647 w 1291905"/>
+                <a:gd name="csY25" fmla="*/ 112070 h 1770078"/>
+                <a:gd name="csX26" fmla="*/ 1085389 w 1291905"/>
+                <a:gd name="csY26" fmla="*/ 0 h 1770078"/>
+                <a:gd name="csX27" fmla="*/ 1076052 w 1291905"/>
+                <a:gd name="csY27" fmla="*/ 0 h 1770078"/>
+                <a:gd name="csX28" fmla="*/ 972794 w 1291905"/>
+                <a:gd name="csY28" fmla="*/ 112070 h 1770078"/>
+                <a:gd name="csX29" fmla="*/ 869536 w 1291905"/>
+                <a:gd name="csY29" fmla="*/ 0 h 1770078"/>
+                <a:gd name="csX30" fmla="*/ 860199 w 1291905"/>
+                <a:gd name="csY30" fmla="*/ 0 h 1770078"/>
+                <a:gd name="csX31" fmla="*/ 756941 w 1291905"/>
+                <a:gd name="csY31" fmla="*/ 112070 h 1770078"/>
+                <a:gd name="csX32" fmla="*/ 653683 w 1291905"/>
+                <a:gd name="csY32" fmla="*/ 0 h 1770078"/>
+                <a:gd name="csX33" fmla="*/ 644346 w 1291905"/>
+                <a:gd name="csY33" fmla="*/ 0 h 1770078"/>
+                <a:gd name="csX34" fmla="*/ 541087 w 1291905"/>
+                <a:gd name="csY34" fmla="*/ 112070 h 1770078"/>
+                <a:gd name="csX35" fmla="*/ 437829 w 1291905"/>
+                <a:gd name="csY35" fmla="*/ 0 h 1770078"/>
+                <a:gd name="csX36" fmla="*/ 428492 w 1291905"/>
+                <a:gd name="csY36" fmla="*/ 0 h 1770078"/>
+                <a:gd name="csX37" fmla="*/ 325234 w 1291905"/>
+                <a:gd name="csY37" fmla="*/ 112070 h 1770078"/>
+                <a:gd name="csX38" fmla="*/ 221976 w 1291905"/>
+                <a:gd name="csY38" fmla="*/ 0 h 1770078"/>
+                <a:gd name="csX39" fmla="*/ 212639 w 1291905"/>
+                <a:gd name="csY39" fmla="*/ 0 h 1770078"/>
+                <a:gd name="csX40" fmla="*/ 109381 w 1291905"/>
+                <a:gd name="csY40" fmla="*/ 112070 h 1770078"/>
+                <a:gd name="csX41" fmla="*/ 6123 w 1291905"/>
+                <a:gd name="csY41" fmla="*/ 0 h 1770078"/>
+              </a:gdLst>
+              <a:ahLst/>
+              <a:cxnLst>
+                <a:cxn ang="0">
+                  <a:pos x="csX0" y="csY0"/>
+                </a:cxn>
+                <a:cxn ang="0">
+                  <a:pos x="csX1" y="csY1"/>
+                </a:cxn>
+                <a:cxn ang="0">
+                  <a:pos x="csX2" y="csY2"/>
+                </a:cxn>
+                <a:cxn ang="0">
+                  <a:pos x="csX3" y="csY3"/>
+                </a:cxn>
+                <a:cxn ang="0">
+                  <a:pos x="csX4" y="csY4"/>
+                </a:cxn>
+                <a:cxn ang="0">
+                  <a:pos x="csX5" y="csY5"/>
+                </a:cxn>
+                <a:cxn ang="0">
+                  <a:pos x="csX6" y="csY6"/>
+                </a:cxn>
+                <a:cxn ang="0">
+                  <a:pos x="csX7" y="csY7"/>
+                </a:cxn>
+                <a:cxn ang="0">
+                  <a:pos x="csX8" y="csY8"/>
+                </a:cxn>
+                <a:cxn ang="0">
+                  <a:pos x="csX9" y="csY9"/>
+                </a:cxn>
+                <a:cxn ang="0">
+                  <a:pos x="csX10" y="csY10"/>
+                </a:cxn>
+                <a:cxn ang="0">
+                  <a:pos x="csX11" y="csY11"/>
+                </a:cxn>
+                <a:cxn ang="0">
+                  <a:pos x="csX12" y="csY12"/>
+                </a:cxn>
+                <a:cxn ang="0">
+                  <a:pos x="csX13" y="csY13"/>
+                </a:cxn>
+                <a:cxn ang="0">
+                  <a:pos x="csX14" y="csY14"/>
+                </a:cxn>
+                <a:cxn ang="0">
+                  <a:pos x="csX15" y="csY15"/>
+                </a:cxn>
+                <a:cxn ang="0">
+                  <a:pos x="csX16" y="csY16"/>
+                </a:cxn>
+                <a:cxn ang="0">
+                  <a:pos x="csX17" y="csY17"/>
+                </a:cxn>
+                <a:cxn ang="0">
+                  <a:pos x="csX18" y="csY18"/>
+                </a:cxn>
+                <a:cxn ang="0">
+                  <a:pos x="csX19" y="csY19"/>
+                </a:cxn>
+                <a:cxn ang="0">
+                  <a:pos x="csX20" y="csY20"/>
+                </a:cxn>
+                <a:cxn ang="0">
+                  <a:pos x="csX21" y="csY21"/>
+                </a:cxn>
+                <a:cxn ang="0">
+                  <a:pos x="csX22" y="csY22"/>
+                </a:cxn>
+                <a:cxn ang="0">
+                  <a:pos x="csX23" y="csY23"/>
+                </a:cxn>
+                <a:cxn ang="0">
+                  <a:pos x="csX24" y="csY24"/>
+                </a:cxn>
+                <a:cxn ang="0">
+                  <a:pos x="csX25" y="csY25"/>
+                </a:cxn>
+                <a:cxn ang="0">
+                  <a:pos x="csX26" y="csY26"/>
+                </a:cxn>
+                <a:cxn ang="0">
+                  <a:pos x="csX27" y="csY27"/>
+                </a:cxn>
+                <a:cxn ang="0">
+                  <a:pos x="csX28" y="csY28"/>
+                </a:cxn>
+                <a:cxn ang="0">
+                  <a:pos x="csX29" y="csY29"/>
+                </a:cxn>
+                <a:cxn ang="0">
+                  <a:pos x="csX30" y="csY30"/>
+                </a:cxn>
+                <a:cxn ang="0">
+                  <a:pos x="csX31" y="csY31"/>
+                </a:cxn>
+                <a:cxn ang="0">
+                  <a:pos x="csX32" y="csY32"/>
+                </a:cxn>
+                <a:cxn ang="0">
+                  <a:pos x="csX33" y="csY33"/>
+                </a:cxn>
+                <a:cxn ang="0">
+                  <a:pos x="csX34" y="csY34"/>
+                </a:cxn>
+                <a:cxn ang="0">
+                  <a:pos x="csX35" y="csY35"/>
+                </a:cxn>
+                <a:cxn ang="0">
+                  <a:pos x="csX36" y="csY36"/>
+                </a:cxn>
+                <a:cxn ang="0">
+                  <a:pos x="csX37" y="csY37"/>
+                </a:cxn>
+                <a:cxn ang="0">
+                  <a:pos x="csX38" y="csY38"/>
+                </a:cxn>
+                <a:cxn ang="0">
+                  <a:pos x="csX39" y="csY39"/>
+                </a:cxn>
+                <a:cxn ang="0">
+                  <a:pos x="csX40" y="csY40"/>
+                </a:cxn>
+                <a:cxn ang="0">
+                  <a:pos x="csX41" y="csY41"/>
+                </a:cxn>
+              </a:cxnLst>
+              <a:rect l="l" t="t" r="r" b="b"/>
+              <a:pathLst>
+                <a:path w="1291905" h="1770078">
+                  <a:moveTo>
+                    <a:pt x="0" y="0"/>
+                  </a:moveTo>
+                  <a:lnTo>
+                    <a:pt x="0" y="478173"/>
+                  </a:lnTo>
+                  <a:lnTo>
+                    <a:pt x="0" y="1291905"/>
+                  </a:lnTo>
+                  <a:lnTo>
+                    <a:pt x="0" y="1770078"/>
+                  </a:lnTo>
+                  <a:lnTo>
+                    <a:pt x="6123" y="1770078"/>
+                  </a:lnTo>
+                  <a:lnTo>
+                    <a:pt x="109381" y="1658008"/>
+                  </a:lnTo>
+                  <a:lnTo>
+                    <a:pt x="212639" y="1770078"/>
+                  </a:lnTo>
+                  <a:lnTo>
+                    <a:pt x="221976" y="1770078"/>
+                  </a:lnTo>
+                  <a:lnTo>
+                    <a:pt x="325234" y="1658008"/>
+                  </a:lnTo>
+                  <a:lnTo>
+                    <a:pt x="428492" y="1770078"/>
+                  </a:lnTo>
+                  <a:lnTo>
+                    <a:pt x="437829" y="1770078"/>
+                  </a:lnTo>
+                  <a:lnTo>
+                    <a:pt x="541087" y="1658008"/>
+                  </a:lnTo>
+                  <a:lnTo>
+                    <a:pt x="644346" y="1770078"/>
+                  </a:lnTo>
+                  <a:lnTo>
+                    <a:pt x="653683" y="1770078"/>
+                  </a:lnTo>
+                  <a:lnTo>
+                    <a:pt x="756941" y="1658008"/>
+                  </a:lnTo>
+                  <a:lnTo>
+                    <a:pt x="860199" y="1770078"/>
+                  </a:lnTo>
+                  <a:lnTo>
+                    <a:pt x="869536" y="1770078"/>
+                  </a:lnTo>
+                  <a:lnTo>
+                    <a:pt x="972794" y="1658008"/>
+                  </a:lnTo>
+                  <a:lnTo>
+                    <a:pt x="1076052" y="1770078"/>
+                  </a:lnTo>
+                  <a:lnTo>
+                    <a:pt x="1085389" y="1770078"/>
+                  </a:lnTo>
+                  <a:lnTo>
+                    <a:pt x="1188647" y="1658008"/>
+                  </a:lnTo>
+                  <a:lnTo>
+                    <a:pt x="1291905" y="1770078"/>
+                  </a:lnTo>
+                  <a:lnTo>
+                    <a:pt x="1291905" y="1291905"/>
+                  </a:lnTo>
+                  <a:lnTo>
+                    <a:pt x="1291905" y="478173"/>
+                  </a:lnTo>
+                  <a:lnTo>
+                    <a:pt x="1291905" y="0"/>
+                  </a:lnTo>
+                  <a:lnTo>
+                    <a:pt x="1188647" y="112070"/>
+                  </a:lnTo>
+                  <a:lnTo>
+                    <a:pt x="1085389" y="0"/>
+                  </a:lnTo>
+                  <a:lnTo>
+                    <a:pt x="1076052" y="0"/>
+                  </a:lnTo>
+                  <a:lnTo>
+                    <a:pt x="972794" y="112070"/>
+                  </a:lnTo>
+                  <a:lnTo>
+                    <a:pt x="869536" y="0"/>
+                  </a:lnTo>
+                  <a:lnTo>
+                    <a:pt x="860199" y="0"/>
+                  </a:lnTo>
+                  <a:lnTo>
+                    <a:pt x="756941" y="112070"/>
+                  </a:lnTo>
+                  <a:lnTo>
+                    <a:pt x="653683" y="0"/>
+                  </a:lnTo>
+                  <a:lnTo>
+                    <a:pt x="644346" y="0"/>
+                  </a:lnTo>
+                  <a:lnTo>
+                    <a:pt x="541087" y="112070"/>
+                  </a:lnTo>
+                  <a:lnTo>
+                    <a:pt x="437829" y="0"/>
+                  </a:lnTo>
+                  <a:lnTo>
+                    <a:pt x="428492" y="0"/>
+                  </a:lnTo>
+                  <a:lnTo>
+                    <a:pt x="325234" y="112070"/>
+                  </a:lnTo>
+                  <a:lnTo>
+                    <a:pt x="221976" y="0"/>
+                  </a:lnTo>
+                  <a:lnTo>
+                    <a:pt x="212639" y="0"/>
+                  </a:lnTo>
+                  <a:lnTo>
+                    <a:pt x="109381" y="112070"/>
+                  </a:lnTo>
+                  <a:lnTo>
+                    <a:pt x="6123" y="0"/>
+                  </a:lnTo>
+                  <a:close/>
+                </a:path>
+              </a:pathLst>
+            </a:custGeom>
+            <a:gradFill flip="none" rotWithShape="1">
+              <a:gsLst>
+                <a:gs pos="100000">
+                  <a:schemeClr val="bg1">
+                    <a:alpha val="46000"/>
+                  </a:schemeClr>
+                </a:gs>
+                <a:gs pos="35000">
+                  <a:schemeClr val="accent1">
+                    <a:tint val="23500"/>
+                    <a:satMod val="160000"/>
+                    <a:alpha val="0"/>
+                  </a:schemeClr>
+                </a:gs>
+              </a:gsLst>
+              <a:path path="circle">
+                <a:fillToRect l="100000" t="100000"/>
+              </a:path>
+              <a:tileRect r="-100000" b="-100000"/>
+            </a:gradFill>
+            <a:ln>
+              <a:noFill/>
+            </a:ln>
+          </p:spPr>
+          <p:style>
+            <a:lnRef idx="2">
+              <a:schemeClr val="accent1">
+                <a:shade val="15000"/>
+              </a:schemeClr>
+            </a:lnRef>
+            <a:fillRef idx="1">
+              <a:schemeClr val="accent1"/>
+            </a:fillRef>
+            <a:effectRef idx="0">
+              <a:schemeClr val="accent1"/>
+            </a:effectRef>
+            <a:fontRef idx="minor">
+              <a:schemeClr val="lt1"/>
+            </a:fontRef>
+          </p:style>
+          <p:txBody>
+            <a:bodyPr wrap="square" rtlCol="0" anchor="ctr">
+              <a:noAutofit/>
+            </a:bodyPr>
+            <a:lstStyle/>
+            <a:p>
+              <a:pPr algn="ctr"/>
+              <a:endParaRPr lang="en-US"/>
+            </a:p>
+          </p:txBody>
+        </p:sp>
+        <p:sp>
+          <p:nvSpPr>
+            <p:cNvPr id="386" name="Freeform: Shape 385">
+              <a:extLst>
+                <a:ext uri="{FF2B5EF4-FFF2-40B4-BE49-F238E27FC236}">
+                  <a16:creationId xmlns:a16="http://schemas.microsoft.com/office/drawing/2014/main" id="{BF0DED88-A4BF-F579-E38F-673F030F0383}"/>
+                </a:ext>
+              </a:extLst>
+            </p:cNvPr>
+            <p:cNvSpPr/>
+            <p:nvPr/>
+          </p:nvSpPr>
+          <p:spPr>
+            <a:xfrm rot="16200000" flipV="1">
+              <a:off x="5772571" y="4060901"/>
+              <a:ext cx="652164" cy="937260"/>
+            </a:xfrm>
+            <a:custGeom>
+              <a:avLst/>
+              <a:gdLst>
+                <a:gd name="csX0" fmla="*/ 0 w 1291905"/>
+                <a:gd name="csY0" fmla="*/ 0 h 1770078"/>
+                <a:gd name="csX1" fmla="*/ 0 w 1291905"/>
+                <a:gd name="csY1" fmla="*/ 478173 h 1770078"/>
+                <a:gd name="csX2" fmla="*/ 0 w 1291905"/>
+                <a:gd name="csY2" fmla="*/ 1291905 h 1770078"/>
+                <a:gd name="csX3" fmla="*/ 0 w 1291905"/>
+                <a:gd name="csY3" fmla="*/ 1770078 h 1770078"/>
+                <a:gd name="csX4" fmla="*/ 6123 w 1291905"/>
+                <a:gd name="csY4" fmla="*/ 1770078 h 1770078"/>
+                <a:gd name="csX5" fmla="*/ 109381 w 1291905"/>
+                <a:gd name="csY5" fmla="*/ 1658008 h 1770078"/>
+                <a:gd name="csX6" fmla="*/ 212639 w 1291905"/>
+                <a:gd name="csY6" fmla="*/ 1770078 h 1770078"/>
+                <a:gd name="csX7" fmla="*/ 221976 w 1291905"/>
+                <a:gd name="csY7" fmla="*/ 1770078 h 1770078"/>
+                <a:gd name="csX8" fmla="*/ 325234 w 1291905"/>
+                <a:gd name="csY8" fmla="*/ 1658008 h 1770078"/>
+                <a:gd name="csX9" fmla="*/ 428492 w 1291905"/>
+                <a:gd name="csY9" fmla="*/ 1770078 h 1770078"/>
+                <a:gd name="csX10" fmla="*/ 437829 w 1291905"/>
+                <a:gd name="csY10" fmla="*/ 1770078 h 1770078"/>
+                <a:gd name="csX11" fmla="*/ 541087 w 1291905"/>
+                <a:gd name="csY11" fmla="*/ 1658008 h 1770078"/>
+                <a:gd name="csX12" fmla="*/ 644346 w 1291905"/>
+                <a:gd name="csY12" fmla="*/ 1770078 h 1770078"/>
+                <a:gd name="csX13" fmla="*/ 653683 w 1291905"/>
+                <a:gd name="csY13" fmla="*/ 1770078 h 1770078"/>
+                <a:gd name="csX14" fmla="*/ 756941 w 1291905"/>
+                <a:gd name="csY14" fmla="*/ 1658008 h 1770078"/>
+                <a:gd name="csX15" fmla="*/ 860199 w 1291905"/>
+                <a:gd name="csY15" fmla="*/ 1770078 h 1770078"/>
+                <a:gd name="csX16" fmla="*/ 869536 w 1291905"/>
+                <a:gd name="csY16" fmla="*/ 1770078 h 1770078"/>
+                <a:gd name="csX17" fmla="*/ 972794 w 1291905"/>
+                <a:gd name="csY17" fmla="*/ 1658008 h 1770078"/>
+                <a:gd name="csX18" fmla="*/ 1076052 w 1291905"/>
+                <a:gd name="csY18" fmla="*/ 1770078 h 1770078"/>
+                <a:gd name="csX19" fmla="*/ 1085389 w 1291905"/>
+                <a:gd name="csY19" fmla="*/ 1770078 h 1770078"/>
+                <a:gd name="csX20" fmla="*/ 1188647 w 1291905"/>
+                <a:gd name="csY20" fmla="*/ 1658008 h 1770078"/>
+                <a:gd name="csX21" fmla="*/ 1291905 w 1291905"/>
+                <a:gd name="csY21" fmla="*/ 1770078 h 1770078"/>
+                <a:gd name="csX22" fmla="*/ 1291905 w 1291905"/>
+                <a:gd name="csY22" fmla="*/ 1291905 h 1770078"/>
+                <a:gd name="csX23" fmla="*/ 1291905 w 1291905"/>
+                <a:gd name="csY23" fmla="*/ 478173 h 1770078"/>
+                <a:gd name="csX24" fmla="*/ 1291905 w 1291905"/>
+                <a:gd name="csY24" fmla="*/ 0 h 1770078"/>
+                <a:gd name="csX25" fmla="*/ 1188647 w 1291905"/>
+                <a:gd name="csY25" fmla="*/ 112070 h 1770078"/>
+                <a:gd name="csX26" fmla="*/ 1085389 w 1291905"/>
+                <a:gd name="csY26" fmla="*/ 0 h 1770078"/>
+                <a:gd name="csX27" fmla="*/ 1076052 w 1291905"/>
+                <a:gd name="csY27" fmla="*/ 0 h 1770078"/>
+                <a:gd name="csX28" fmla="*/ 972794 w 1291905"/>
+                <a:gd name="csY28" fmla="*/ 112070 h 1770078"/>
+                <a:gd name="csX29" fmla="*/ 869536 w 1291905"/>
+                <a:gd name="csY29" fmla="*/ 0 h 1770078"/>
+                <a:gd name="csX30" fmla="*/ 860199 w 1291905"/>
+                <a:gd name="csY30" fmla="*/ 0 h 1770078"/>
+                <a:gd name="csX31" fmla="*/ 756941 w 1291905"/>
+                <a:gd name="csY31" fmla="*/ 112070 h 1770078"/>
+                <a:gd name="csX32" fmla="*/ 653683 w 1291905"/>
+                <a:gd name="csY32" fmla="*/ 0 h 1770078"/>
+                <a:gd name="csX33" fmla="*/ 644346 w 1291905"/>
+                <a:gd name="csY33" fmla="*/ 0 h 1770078"/>
+                <a:gd name="csX34" fmla="*/ 541087 w 1291905"/>
+                <a:gd name="csY34" fmla="*/ 112070 h 1770078"/>
+                <a:gd name="csX35" fmla="*/ 437829 w 1291905"/>
+                <a:gd name="csY35" fmla="*/ 0 h 1770078"/>
+                <a:gd name="csX36" fmla="*/ 428492 w 1291905"/>
+                <a:gd name="csY36" fmla="*/ 0 h 1770078"/>
+                <a:gd name="csX37" fmla="*/ 325234 w 1291905"/>
+                <a:gd name="csY37" fmla="*/ 112070 h 1770078"/>
+                <a:gd name="csX38" fmla="*/ 221976 w 1291905"/>
+                <a:gd name="csY38" fmla="*/ 0 h 1770078"/>
+                <a:gd name="csX39" fmla="*/ 212639 w 1291905"/>
+                <a:gd name="csY39" fmla="*/ 0 h 1770078"/>
+                <a:gd name="csX40" fmla="*/ 109381 w 1291905"/>
+                <a:gd name="csY40" fmla="*/ 112070 h 1770078"/>
+                <a:gd name="csX41" fmla="*/ 6123 w 1291905"/>
+                <a:gd name="csY41" fmla="*/ 0 h 1770078"/>
+              </a:gdLst>
+              <a:ahLst/>
+              <a:cxnLst>
+                <a:cxn ang="0">
+                  <a:pos x="csX0" y="csY0"/>
+                </a:cxn>
+                <a:cxn ang="0">
+                  <a:pos x="csX1" y="csY1"/>
+                </a:cxn>
+                <a:cxn ang="0">
+                  <a:pos x="csX2" y="csY2"/>
+                </a:cxn>
+                <a:cxn ang="0">
+                  <a:pos x="csX3" y="csY3"/>
+                </a:cxn>
+                <a:cxn ang="0">
+                  <a:pos x="csX4" y="csY4"/>
+                </a:cxn>
+                <a:cxn ang="0">
+                  <a:pos x="csX5" y="csY5"/>
+                </a:cxn>
+                <a:cxn ang="0">
+                  <a:pos x="csX6" y="csY6"/>
+                </a:cxn>
+                <a:cxn ang="0">
+                  <a:pos x="csX7" y="csY7"/>
+                </a:cxn>
+                <a:cxn ang="0">
+                  <a:pos x="csX8" y="csY8"/>
+                </a:cxn>
+                <a:cxn ang="0">
+                  <a:pos x="csX9" y="csY9"/>
+                </a:cxn>
+                <a:cxn ang="0">
+                  <a:pos x="csX10" y="csY10"/>
+                </a:cxn>
+                <a:cxn ang="0">
+                  <a:pos x="csX11" y="csY11"/>
+                </a:cxn>
+                <a:cxn ang="0">
+                  <a:pos x="csX12" y="csY12"/>
+                </a:cxn>
+                <a:cxn ang="0">
+                  <a:pos x="csX13" y="csY13"/>
+                </a:cxn>
+                <a:cxn ang="0">
+                  <a:pos x="csX14" y="csY14"/>
+                </a:cxn>
+                <a:cxn ang="0">
+                  <a:pos x="csX15" y="csY15"/>
+                </a:cxn>
+                <a:cxn ang="0">
+                  <a:pos x="csX16" y="csY16"/>
+                </a:cxn>
+                <a:cxn ang="0">
+                  <a:pos x="csX17" y="csY17"/>
+                </a:cxn>
+                <a:cxn ang="0">
+                  <a:pos x="csX18" y="csY18"/>
+                </a:cxn>
+                <a:cxn ang="0">
+                  <a:pos x="csX19" y="csY19"/>
+                </a:cxn>
+                <a:cxn ang="0">
+                  <a:pos x="csX20" y="csY20"/>
+                </a:cxn>
+                <a:cxn ang="0">
+                  <a:pos x="csX21" y="csY21"/>
+                </a:cxn>
+                <a:cxn ang="0">
+                  <a:pos x="csX22" y="csY22"/>
+                </a:cxn>
+                <a:cxn ang="0">
+                  <a:pos x="csX23" y="csY23"/>
+                </a:cxn>
+                <a:cxn ang="0">
+                  <a:pos x="csX24" y="csY24"/>
+                </a:cxn>
+                <a:cxn ang="0">
+                  <a:pos x="csX25" y="csY25"/>
+                </a:cxn>
+                <a:cxn ang="0">
+                  <a:pos x="csX26" y="csY26"/>
+                </a:cxn>
+                <a:cxn ang="0">
+                  <a:pos x="csX27" y="csY27"/>
+                </a:cxn>
+                <a:cxn ang="0">
+                  <a:pos x="csX28" y="csY28"/>
+                </a:cxn>
+                <a:cxn ang="0">
+                  <a:pos x="csX29" y="csY29"/>
+                </a:cxn>
+                <a:cxn ang="0">
+                  <a:pos x="csX30" y="csY30"/>
+                </a:cxn>
+                <a:cxn ang="0">
+                  <a:pos x="csX31" y="csY31"/>
+                </a:cxn>
+                <a:cxn ang="0">
+                  <a:pos x="csX32" y="csY32"/>
+                </a:cxn>
+                <a:cxn ang="0">
+                  <a:pos x="csX33" y="csY33"/>
+                </a:cxn>
+                <a:cxn ang="0">
+                  <a:pos x="csX34" y="csY34"/>
+                </a:cxn>
+                <a:cxn ang="0">
+                  <a:pos x="csX35" y="csY35"/>
+                </a:cxn>
+                <a:cxn ang="0">
+                  <a:pos x="csX36" y="csY36"/>
+                </a:cxn>
+                <a:cxn ang="0">
+                  <a:pos x="csX37" y="csY37"/>
+                </a:cxn>
+                <a:cxn ang="0">
+                  <a:pos x="csX38" y="csY38"/>
+                </a:cxn>
+                <a:cxn ang="0">
+                  <a:pos x="csX39" y="csY39"/>
+                </a:cxn>
+                <a:cxn ang="0">
+                  <a:pos x="csX40" y="csY40"/>
+                </a:cxn>
+                <a:cxn ang="0">
+                  <a:pos x="csX41" y="csY41"/>
+                </a:cxn>
+              </a:cxnLst>
+              <a:rect l="l" t="t" r="r" b="b"/>
+              <a:pathLst>
+                <a:path w="1291905" h="1770078">
+                  <a:moveTo>
+                    <a:pt x="0" y="0"/>
+                  </a:moveTo>
+                  <a:lnTo>
+                    <a:pt x="0" y="478173"/>
+                  </a:lnTo>
+                  <a:lnTo>
+                    <a:pt x="0" y="1291905"/>
+                  </a:lnTo>
+                  <a:lnTo>
+                    <a:pt x="0" y="1770078"/>
+                  </a:lnTo>
+                  <a:lnTo>
+                    <a:pt x="6123" y="1770078"/>
+                  </a:lnTo>
+                  <a:lnTo>
+                    <a:pt x="109381" y="1658008"/>
+                  </a:lnTo>
+                  <a:lnTo>
+                    <a:pt x="212639" y="1770078"/>
+                  </a:lnTo>
+                  <a:lnTo>
+                    <a:pt x="221976" y="1770078"/>
+                  </a:lnTo>
+                  <a:lnTo>
+                    <a:pt x="325234" y="1658008"/>
+                  </a:lnTo>
+                  <a:lnTo>
+                    <a:pt x="428492" y="1770078"/>
+                  </a:lnTo>
+                  <a:lnTo>
+                    <a:pt x="437829" y="1770078"/>
+                  </a:lnTo>
+                  <a:lnTo>
+                    <a:pt x="541087" y="1658008"/>
+                  </a:lnTo>
+                  <a:lnTo>
+                    <a:pt x="644346" y="1770078"/>
+                  </a:lnTo>
+                  <a:lnTo>
+                    <a:pt x="653683" y="1770078"/>
+                  </a:lnTo>
+                  <a:lnTo>
+                    <a:pt x="756941" y="1658008"/>
+                  </a:lnTo>
+                  <a:lnTo>
+                    <a:pt x="860199" y="1770078"/>
+                  </a:lnTo>
+                  <a:lnTo>
+                    <a:pt x="869536" y="1770078"/>
+                  </a:lnTo>
+                  <a:lnTo>
+                    <a:pt x="972794" y="1658008"/>
+                  </a:lnTo>
+                  <a:lnTo>
+                    <a:pt x="1076052" y="1770078"/>
+                  </a:lnTo>
+                  <a:lnTo>
+                    <a:pt x="1085389" y="1770078"/>
+                  </a:lnTo>
+                  <a:lnTo>
+                    <a:pt x="1188647" y="1658008"/>
+                  </a:lnTo>
+                  <a:lnTo>
+                    <a:pt x="1291905" y="1770078"/>
+                  </a:lnTo>
+                  <a:lnTo>
+                    <a:pt x="1291905" y="1291905"/>
+                  </a:lnTo>
+                  <a:lnTo>
+                    <a:pt x="1291905" y="478173"/>
+                  </a:lnTo>
+                  <a:lnTo>
+                    <a:pt x="1291905" y="0"/>
+                  </a:lnTo>
+                  <a:lnTo>
+                    <a:pt x="1188647" y="112070"/>
+                  </a:lnTo>
+                  <a:lnTo>
+                    <a:pt x="1085389" y="0"/>
+                  </a:lnTo>
+                  <a:lnTo>
+                    <a:pt x="1076052" y="0"/>
+                  </a:lnTo>
+                  <a:lnTo>
+                    <a:pt x="972794" y="112070"/>
+                  </a:lnTo>
+                  <a:lnTo>
+                    <a:pt x="869536" y="0"/>
+                  </a:lnTo>
+                  <a:lnTo>
+                    <a:pt x="860199" y="0"/>
+                  </a:lnTo>
+                  <a:lnTo>
+                    <a:pt x="756941" y="112070"/>
+                  </a:lnTo>
+                  <a:lnTo>
+                    <a:pt x="653683" y="0"/>
+                  </a:lnTo>
+                  <a:lnTo>
+                    <a:pt x="644346" y="0"/>
+                  </a:lnTo>
+                  <a:lnTo>
+                    <a:pt x="541087" y="112070"/>
+                  </a:lnTo>
+                  <a:lnTo>
+                    <a:pt x="437829" y="0"/>
+                  </a:lnTo>
+                  <a:lnTo>
+                    <a:pt x="428492" y="0"/>
+                  </a:lnTo>
+                  <a:lnTo>
+                    <a:pt x="325234" y="112070"/>
+                  </a:lnTo>
+                  <a:lnTo>
+                    <a:pt x="221976" y="0"/>
+                  </a:lnTo>
+                  <a:lnTo>
+                    <a:pt x="212639" y="0"/>
+                  </a:lnTo>
+                  <a:lnTo>
+                    <a:pt x="109381" y="112070"/>
+                  </a:lnTo>
+                  <a:lnTo>
+                    <a:pt x="6123" y="0"/>
+                  </a:lnTo>
+                  <a:close/>
+                </a:path>
+              </a:pathLst>
+            </a:custGeom>
             <a:gradFill flip="none" rotWithShape="1">
               <a:gsLst>
                 <a:gs pos="41000">
@@ -9979,1112 +10714,419 @@
             </a:p>
           </p:txBody>
         </p:sp>
+        <p:sp>
+          <p:nvSpPr>
+            <p:cNvPr id="392" name="Freeform: Shape 391">
+              <a:extLst>
+                <a:ext uri="{FF2B5EF4-FFF2-40B4-BE49-F238E27FC236}">
+                  <a16:creationId xmlns:a16="http://schemas.microsoft.com/office/drawing/2014/main" id="{8D385030-0EF9-3401-EF2C-35E7E76EB50F}"/>
+                </a:ext>
+              </a:extLst>
+            </p:cNvPr>
+            <p:cNvSpPr/>
+            <p:nvPr/>
+          </p:nvSpPr>
+          <p:spPr>
+            <a:xfrm rot="16200000" flipH="1">
+              <a:off x="5772571" y="4060901"/>
+              <a:ext cx="652164" cy="937260"/>
+            </a:xfrm>
+            <a:custGeom>
+              <a:avLst/>
+              <a:gdLst>
+                <a:gd name="csX0" fmla="*/ 0 w 1291905"/>
+                <a:gd name="csY0" fmla="*/ 0 h 1770078"/>
+                <a:gd name="csX1" fmla="*/ 0 w 1291905"/>
+                <a:gd name="csY1" fmla="*/ 478173 h 1770078"/>
+                <a:gd name="csX2" fmla="*/ 0 w 1291905"/>
+                <a:gd name="csY2" fmla="*/ 1291905 h 1770078"/>
+                <a:gd name="csX3" fmla="*/ 0 w 1291905"/>
+                <a:gd name="csY3" fmla="*/ 1770078 h 1770078"/>
+                <a:gd name="csX4" fmla="*/ 6123 w 1291905"/>
+                <a:gd name="csY4" fmla="*/ 1770078 h 1770078"/>
+                <a:gd name="csX5" fmla="*/ 109381 w 1291905"/>
+                <a:gd name="csY5" fmla="*/ 1658008 h 1770078"/>
+                <a:gd name="csX6" fmla="*/ 212639 w 1291905"/>
+                <a:gd name="csY6" fmla="*/ 1770078 h 1770078"/>
+                <a:gd name="csX7" fmla="*/ 221976 w 1291905"/>
+                <a:gd name="csY7" fmla="*/ 1770078 h 1770078"/>
+                <a:gd name="csX8" fmla="*/ 325234 w 1291905"/>
+                <a:gd name="csY8" fmla="*/ 1658008 h 1770078"/>
+                <a:gd name="csX9" fmla="*/ 428492 w 1291905"/>
+                <a:gd name="csY9" fmla="*/ 1770078 h 1770078"/>
+                <a:gd name="csX10" fmla="*/ 437829 w 1291905"/>
+                <a:gd name="csY10" fmla="*/ 1770078 h 1770078"/>
+                <a:gd name="csX11" fmla="*/ 541087 w 1291905"/>
+                <a:gd name="csY11" fmla="*/ 1658008 h 1770078"/>
+                <a:gd name="csX12" fmla="*/ 644346 w 1291905"/>
+                <a:gd name="csY12" fmla="*/ 1770078 h 1770078"/>
+                <a:gd name="csX13" fmla="*/ 653683 w 1291905"/>
+                <a:gd name="csY13" fmla="*/ 1770078 h 1770078"/>
+                <a:gd name="csX14" fmla="*/ 756941 w 1291905"/>
+                <a:gd name="csY14" fmla="*/ 1658008 h 1770078"/>
+                <a:gd name="csX15" fmla="*/ 860199 w 1291905"/>
+                <a:gd name="csY15" fmla="*/ 1770078 h 1770078"/>
+                <a:gd name="csX16" fmla="*/ 869536 w 1291905"/>
+                <a:gd name="csY16" fmla="*/ 1770078 h 1770078"/>
+                <a:gd name="csX17" fmla="*/ 972794 w 1291905"/>
+                <a:gd name="csY17" fmla="*/ 1658008 h 1770078"/>
+                <a:gd name="csX18" fmla="*/ 1076052 w 1291905"/>
+                <a:gd name="csY18" fmla="*/ 1770078 h 1770078"/>
+                <a:gd name="csX19" fmla="*/ 1085389 w 1291905"/>
+                <a:gd name="csY19" fmla="*/ 1770078 h 1770078"/>
+                <a:gd name="csX20" fmla="*/ 1188647 w 1291905"/>
+                <a:gd name="csY20" fmla="*/ 1658008 h 1770078"/>
+                <a:gd name="csX21" fmla="*/ 1291905 w 1291905"/>
+                <a:gd name="csY21" fmla="*/ 1770078 h 1770078"/>
+                <a:gd name="csX22" fmla="*/ 1291905 w 1291905"/>
+                <a:gd name="csY22" fmla="*/ 1291905 h 1770078"/>
+                <a:gd name="csX23" fmla="*/ 1291905 w 1291905"/>
+                <a:gd name="csY23" fmla="*/ 478173 h 1770078"/>
+                <a:gd name="csX24" fmla="*/ 1291905 w 1291905"/>
+                <a:gd name="csY24" fmla="*/ 0 h 1770078"/>
+                <a:gd name="csX25" fmla="*/ 1188647 w 1291905"/>
+                <a:gd name="csY25" fmla="*/ 112070 h 1770078"/>
+                <a:gd name="csX26" fmla="*/ 1085389 w 1291905"/>
+                <a:gd name="csY26" fmla="*/ 0 h 1770078"/>
+                <a:gd name="csX27" fmla="*/ 1076052 w 1291905"/>
+                <a:gd name="csY27" fmla="*/ 0 h 1770078"/>
+                <a:gd name="csX28" fmla="*/ 972794 w 1291905"/>
+                <a:gd name="csY28" fmla="*/ 112070 h 1770078"/>
+                <a:gd name="csX29" fmla="*/ 869536 w 1291905"/>
+                <a:gd name="csY29" fmla="*/ 0 h 1770078"/>
+                <a:gd name="csX30" fmla="*/ 860199 w 1291905"/>
+                <a:gd name="csY30" fmla="*/ 0 h 1770078"/>
+                <a:gd name="csX31" fmla="*/ 756941 w 1291905"/>
+                <a:gd name="csY31" fmla="*/ 112070 h 1770078"/>
+                <a:gd name="csX32" fmla="*/ 653683 w 1291905"/>
+                <a:gd name="csY32" fmla="*/ 0 h 1770078"/>
+                <a:gd name="csX33" fmla="*/ 644346 w 1291905"/>
+                <a:gd name="csY33" fmla="*/ 0 h 1770078"/>
+                <a:gd name="csX34" fmla="*/ 541087 w 1291905"/>
+                <a:gd name="csY34" fmla="*/ 112070 h 1770078"/>
+                <a:gd name="csX35" fmla="*/ 437829 w 1291905"/>
+                <a:gd name="csY35" fmla="*/ 0 h 1770078"/>
+                <a:gd name="csX36" fmla="*/ 428492 w 1291905"/>
+                <a:gd name="csY36" fmla="*/ 0 h 1770078"/>
+                <a:gd name="csX37" fmla="*/ 325234 w 1291905"/>
+                <a:gd name="csY37" fmla="*/ 112070 h 1770078"/>
+                <a:gd name="csX38" fmla="*/ 221976 w 1291905"/>
+                <a:gd name="csY38" fmla="*/ 0 h 1770078"/>
+                <a:gd name="csX39" fmla="*/ 212639 w 1291905"/>
+                <a:gd name="csY39" fmla="*/ 0 h 1770078"/>
+                <a:gd name="csX40" fmla="*/ 109381 w 1291905"/>
+                <a:gd name="csY40" fmla="*/ 112070 h 1770078"/>
+                <a:gd name="csX41" fmla="*/ 6123 w 1291905"/>
+                <a:gd name="csY41" fmla="*/ 0 h 1770078"/>
+              </a:gdLst>
+              <a:ahLst/>
+              <a:cxnLst>
+                <a:cxn ang="0">
+                  <a:pos x="csX0" y="csY0"/>
+                </a:cxn>
+                <a:cxn ang="0">
+                  <a:pos x="csX1" y="csY1"/>
+                </a:cxn>
+                <a:cxn ang="0">
+                  <a:pos x="csX2" y="csY2"/>
+                </a:cxn>
+                <a:cxn ang="0">
+                  <a:pos x="csX3" y="csY3"/>
+                </a:cxn>
+                <a:cxn ang="0">
+                  <a:pos x="csX4" y="csY4"/>
+                </a:cxn>
+                <a:cxn ang="0">
+                  <a:pos x="csX5" y="csY5"/>
+                </a:cxn>
+                <a:cxn ang="0">
+                  <a:pos x="csX6" y="csY6"/>
+                </a:cxn>
+                <a:cxn ang="0">
+                  <a:pos x="csX7" y="csY7"/>
+                </a:cxn>
+                <a:cxn ang="0">
+                  <a:pos x="csX8" y="csY8"/>
+                </a:cxn>
+                <a:cxn ang="0">
+                  <a:pos x="csX9" y="csY9"/>
+                </a:cxn>
+                <a:cxn ang="0">
+                  <a:pos x="csX10" y="csY10"/>
+                </a:cxn>
+                <a:cxn ang="0">
+                  <a:pos x="csX11" y="csY11"/>
+                </a:cxn>
+                <a:cxn ang="0">
+                  <a:pos x="csX12" y="csY12"/>
+                </a:cxn>
+                <a:cxn ang="0">
+                  <a:pos x="csX13" y="csY13"/>
+                </a:cxn>
+                <a:cxn ang="0">
+                  <a:pos x="csX14" y="csY14"/>
+                </a:cxn>
+                <a:cxn ang="0">
+                  <a:pos x="csX15" y="csY15"/>
+                </a:cxn>
+                <a:cxn ang="0">
+                  <a:pos x="csX16" y="csY16"/>
+                </a:cxn>
+                <a:cxn ang="0">
+                  <a:pos x="csX17" y="csY17"/>
+                </a:cxn>
+                <a:cxn ang="0">
+                  <a:pos x="csX18" y="csY18"/>
+                </a:cxn>
+                <a:cxn ang="0">
+                  <a:pos x="csX19" y="csY19"/>
+                </a:cxn>
+                <a:cxn ang="0">
+                  <a:pos x="csX20" y="csY20"/>
+                </a:cxn>
+                <a:cxn ang="0">
+                  <a:pos x="csX21" y="csY21"/>
+                </a:cxn>
+                <a:cxn ang="0">
+                  <a:pos x="csX22" y="csY22"/>
+                </a:cxn>
+                <a:cxn ang="0">
+                  <a:pos x="csX23" y="csY23"/>
+                </a:cxn>
+                <a:cxn ang="0">
+                  <a:pos x="csX24" y="csY24"/>
+                </a:cxn>
+                <a:cxn ang="0">
+                  <a:pos x="csX25" y="csY25"/>
+                </a:cxn>
+                <a:cxn ang="0">
+                  <a:pos x="csX26" y="csY26"/>
+                </a:cxn>
+                <a:cxn ang="0">
+                  <a:pos x="csX27" y="csY27"/>
+                </a:cxn>
+                <a:cxn ang="0">
+                  <a:pos x="csX28" y="csY28"/>
+                </a:cxn>
+                <a:cxn ang="0">
+                  <a:pos x="csX29" y="csY29"/>
+                </a:cxn>
+                <a:cxn ang="0">
+                  <a:pos x="csX30" y="csY30"/>
+                </a:cxn>
+                <a:cxn ang="0">
+                  <a:pos x="csX31" y="csY31"/>
+                </a:cxn>
+                <a:cxn ang="0">
+                  <a:pos x="csX32" y="csY32"/>
+                </a:cxn>
+                <a:cxn ang="0">
+                  <a:pos x="csX33" y="csY33"/>
+                </a:cxn>
+                <a:cxn ang="0">
+                  <a:pos x="csX34" y="csY34"/>
+                </a:cxn>
+                <a:cxn ang="0">
+                  <a:pos x="csX35" y="csY35"/>
+                </a:cxn>
+                <a:cxn ang="0">
+                  <a:pos x="csX36" y="csY36"/>
+                </a:cxn>
+                <a:cxn ang="0">
+                  <a:pos x="csX37" y="csY37"/>
+                </a:cxn>
+                <a:cxn ang="0">
+                  <a:pos x="csX38" y="csY38"/>
+                </a:cxn>
+                <a:cxn ang="0">
+                  <a:pos x="csX39" y="csY39"/>
+                </a:cxn>
+                <a:cxn ang="0">
+                  <a:pos x="csX40" y="csY40"/>
+                </a:cxn>
+                <a:cxn ang="0">
+                  <a:pos x="csX41" y="csY41"/>
+                </a:cxn>
+              </a:cxnLst>
+              <a:rect l="l" t="t" r="r" b="b"/>
+              <a:pathLst>
+                <a:path w="1291905" h="1770078">
+                  <a:moveTo>
+                    <a:pt x="0" y="0"/>
+                  </a:moveTo>
+                  <a:lnTo>
+                    <a:pt x="0" y="478173"/>
+                  </a:lnTo>
+                  <a:lnTo>
+                    <a:pt x="0" y="1291905"/>
+                  </a:lnTo>
+                  <a:lnTo>
+                    <a:pt x="0" y="1770078"/>
+                  </a:lnTo>
+                  <a:lnTo>
+                    <a:pt x="6123" y="1770078"/>
+                  </a:lnTo>
+                  <a:lnTo>
+                    <a:pt x="109381" y="1658008"/>
+                  </a:lnTo>
+                  <a:lnTo>
+                    <a:pt x="212639" y="1770078"/>
+                  </a:lnTo>
+                  <a:lnTo>
+                    <a:pt x="221976" y="1770078"/>
+                  </a:lnTo>
+                  <a:lnTo>
+                    <a:pt x="325234" y="1658008"/>
+                  </a:lnTo>
+                  <a:lnTo>
+                    <a:pt x="428492" y="1770078"/>
+                  </a:lnTo>
+                  <a:lnTo>
+                    <a:pt x="437829" y="1770078"/>
+                  </a:lnTo>
+                  <a:lnTo>
+                    <a:pt x="541087" y="1658008"/>
+                  </a:lnTo>
+                  <a:lnTo>
+                    <a:pt x="644346" y="1770078"/>
+                  </a:lnTo>
+                  <a:lnTo>
+                    <a:pt x="653683" y="1770078"/>
+                  </a:lnTo>
+                  <a:lnTo>
+                    <a:pt x="756941" y="1658008"/>
+                  </a:lnTo>
+                  <a:lnTo>
+                    <a:pt x="860199" y="1770078"/>
+                  </a:lnTo>
+                  <a:lnTo>
+                    <a:pt x="869536" y="1770078"/>
+                  </a:lnTo>
+                  <a:lnTo>
+                    <a:pt x="972794" y="1658008"/>
+                  </a:lnTo>
+                  <a:lnTo>
+                    <a:pt x="1076052" y="1770078"/>
+                  </a:lnTo>
+                  <a:lnTo>
+                    <a:pt x="1085389" y="1770078"/>
+                  </a:lnTo>
+                  <a:lnTo>
+                    <a:pt x="1188647" y="1658008"/>
+                  </a:lnTo>
+                  <a:lnTo>
+                    <a:pt x="1291905" y="1770078"/>
+                  </a:lnTo>
+                  <a:lnTo>
+                    <a:pt x="1291905" y="1291905"/>
+                  </a:lnTo>
+                  <a:lnTo>
+                    <a:pt x="1291905" y="478173"/>
+                  </a:lnTo>
+                  <a:lnTo>
+                    <a:pt x="1291905" y="0"/>
+                  </a:lnTo>
+                  <a:lnTo>
+                    <a:pt x="1188647" y="112070"/>
+                  </a:lnTo>
+                  <a:lnTo>
+                    <a:pt x="1085389" y="0"/>
+                  </a:lnTo>
+                  <a:lnTo>
+                    <a:pt x="1076052" y="0"/>
+                  </a:lnTo>
+                  <a:lnTo>
+                    <a:pt x="972794" y="112070"/>
+                  </a:lnTo>
+                  <a:lnTo>
+                    <a:pt x="869536" y="0"/>
+                  </a:lnTo>
+                  <a:lnTo>
+                    <a:pt x="860199" y="0"/>
+                  </a:lnTo>
+                  <a:lnTo>
+                    <a:pt x="756941" y="112070"/>
+                  </a:lnTo>
+                  <a:lnTo>
+                    <a:pt x="653683" y="0"/>
+                  </a:lnTo>
+                  <a:lnTo>
+                    <a:pt x="644346" y="0"/>
+                  </a:lnTo>
+                  <a:lnTo>
+                    <a:pt x="541087" y="112070"/>
+                  </a:lnTo>
+                  <a:lnTo>
+                    <a:pt x="437829" y="0"/>
+                  </a:lnTo>
+                  <a:lnTo>
+                    <a:pt x="428492" y="0"/>
+                  </a:lnTo>
+                  <a:lnTo>
+                    <a:pt x="325234" y="112070"/>
+                  </a:lnTo>
+                  <a:lnTo>
+                    <a:pt x="221976" y="0"/>
+                  </a:lnTo>
+                  <a:lnTo>
+                    <a:pt x="212639" y="0"/>
+                  </a:lnTo>
+                  <a:lnTo>
+                    <a:pt x="109381" y="112070"/>
+                  </a:lnTo>
+                  <a:lnTo>
+                    <a:pt x="6123" y="0"/>
+                  </a:lnTo>
+                  <a:close/>
+                </a:path>
+              </a:pathLst>
+            </a:custGeom>
+            <a:gradFill flip="none" rotWithShape="1">
+              <a:gsLst>
+                <a:gs pos="100000">
+                  <a:srgbClr val="FBA305">
+                    <a:alpha val="67000"/>
+                  </a:srgbClr>
+                </a:gs>
+                <a:gs pos="56000">
+                  <a:srgbClr val="FFC000">
+                    <a:alpha val="0"/>
+                  </a:srgbClr>
+                </a:gs>
+              </a:gsLst>
+              <a:lin ang="20400000" scaled="0"/>
+              <a:tileRect/>
+            </a:gradFill>
+            <a:ln>
+              <a:noFill/>
+            </a:ln>
+          </p:spPr>
+          <p:style>
+            <a:lnRef idx="2">
+              <a:schemeClr val="accent1">
+                <a:shade val="15000"/>
+              </a:schemeClr>
+            </a:lnRef>
+            <a:fillRef idx="1">
+              <a:schemeClr val="accent1"/>
+            </a:fillRef>
+            <a:effectRef idx="0">
+              <a:schemeClr val="accent1"/>
+            </a:effectRef>
+            <a:fontRef idx="minor">
+              <a:schemeClr val="lt1"/>
+            </a:fontRef>
+          </p:style>
+          <p:txBody>
+            <a:bodyPr rtlCol="0" anchor="ctr"/>
+            <a:lstStyle/>
+            <a:p>
+              <a:pPr algn="ctr"/>
+              <a:endParaRPr lang="en-US"/>
+            </a:p>
+          </p:txBody>
+        </p:sp>
       </p:grpSp>
-      <p:sp>
-        <p:nvSpPr>
-          <p:cNvPr id="388" name="Rectangle: Rounded Corners 387">
-            <a:extLst>
-              <a:ext uri="{FF2B5EF4-FFF2-40B4-BE49-F238E27FC236}">
-                <a16:creationId xmlns:a16="http://schemas.microsoft.com/office/drawing/2014/main" id="{BD4FB305-52D2-88FD-1E49-42E87DFB74A4}"/>
-              </a:ext>
-            </a:extLst>
-          </p:cNvPr>
-          <p:cNvSpPr/>
-          <p:nvPr/>
-        </p:nvSpPr>
-        <p:spPr>
-          <a:xfrm>
-            <a:off x="3416303" y="4203447"/>
-            <a:ext cx="937260" cy="652166"/>
-          </a:xfrm>
-          <a:prstGeom prst="roundRect">
-            <a:avLst/>
-          </a:prstGeom>
-          <a:gradFill flip="none" rotWithShape="1">
-            <a:gsLst>
-              <a:gs pos="100000">
-                <a:srgbClr val="00B0F0">
-                  <a:alpha val="34000"/>
-                </a:srgbClr>
-              </a:gs>
-              <a:gs pos="56000">
-                <a:srgbClr val="00B0F0">
-                  <a:alpha val="0"/>
-                </a:srgbClr>
-              </a:gs>
-            </a:gsLst>
-            <a:lin ang="6600000" scaled="0"/>
-            <a:tileRect/>
-          </a:gradFill>
-          <a:ln>
-            <a:noFill/>
-          </a:ln>
-        </p:spPr>
-        <p:style>
-          <a:lnRef idx="2">
-            <a:schemeClr val="accent1">
-              <a:shade val="15000"/>
-            </a:schemeClr>
-          </a:lnRef>
-          <a:fillRef idx="1">
-            <a:schemeClr val="accent1"/>
-          </a:fillRef>
-          <a:effectRef idx="0">
-            <a:schemeClr val="accent1"/>
-          </a:effectRef>
-          <a:fontRef idx="minor">
-            <a:schemeClr val="lt1"/>
-          </a:fontRef>
-        </p:style>
-        <p:txBody>
-          <a:bodyPr rtlCol="0" anchor="ctr"/>
-          <a:lstStyle/>
-          <a:p>
-            <a:pPr algn="ctr"/>
-            <a:endParaRPr lang="en-US"/>
-          </a:p>
-        </p:txBody>
-      </p:sp>
-      <p:sp>
-        <p:nvSpPr>
-          <p:cNvPr id="389" name="Freeform: Shape 388">
-            <a:extLst>
-              <a:ext uri="{FF2B5EF4-FFF2-40B4-BE49-F238E27FC236}">
-                <a16:creationId xmlns:a16="http://schemas.microsoft.com/office/drawing/2014/main" id="{85A12986-16FB-F635-769E-8875AFAFFBF6}"/>
-              </a:ext>
-            </a:extLst>
-          </p:cNvPr>
-          <p:cNvSpPr/>
-          <p:nvPr/>
-        </p:nvSpPr>
-        <p:spPr>
-          <a:xfrm>
-            <a:off x="7843312" y="4203448"/>
-            <a:ext cx="932818" cy="652165"/>
-          </a:xfrm>
-          <a:custGeom>
-            <a:avLst/>
-            <a:gdLst>
-              <a:gd name="csX0" fmla="*/ 0 w 1761688"/>
-              <a:gd name="csY0" fmla="*/ 0 h 1291904"/>
-              <a:gd name="csX1" fmla="*/ 75501 w 1761688"/>
-              <a:gd name="csY1" fmla="*/ 0 h 1291904"/>
-              <a:gd name="csX2" fmla="*/ 1686187 w 1761688"/>
-              <a:gd name="csY2" fmla="*/ 0 h 1291904"/>
-              <a:gd name="csX3" fmla="*/ 1761688 w 1761688"/>
-              <a:gd name="csY3" fmla="*/ 0 h 1291904"/>
-              <a:gd name="csX4" fmla="*/ 1761688 w 1761688"/>
-              <a:gd name="csY4" fmla="*/ 102765 h 1291904"/>
-              <a:gd name="csX5" fmla="*/ 1686187 w 1761688"/>
-              <a:gd name="csY5" fmla="*/ 102765 h 1291904"/>
-              <a:gd name="csX6" fmla="*/ 1686187 w 1761688"/>
-              <a:gd name="csY6" fmla="*/ 1189139 h 1291904"/>
-              <a:gd name="csX7" fmla="*/ 1761688 w 1761688"/>
-              <a:gd name="csY7" fmla="*/ 1189139 h 1291904"/>
-              <a:gd name="csX8" fmla="*/ 1761688 w 1761688"/>
-              <a:gd name="csY8" fmla="*/ 1291904 h 1291904"/>
-              <a:gd name="csX9" fmla="*/ 1686187 w 1761688"/>
-              <a:gd name="csY9" fmla="*/ 1291904 h 1291904"/>
-              <a:gd name="csX10" fmla="*/ 75501 w 1761688"/>
-              <a:gd name="csY10" fmla="*/ 1291904 h 1291904"/>
-              <a:gd name="csX11" fmla="*/ 0 w 1761688"/>
-              <a:gd name="csY11" fmla="*/ 1291904 h 1291904"/>
-              <a:gd name="csX12" fmla="*/ 0 w 1761688"/>
-              <a:gd name="csY12" fmla="*/ 1189139 h 1291904"/>
-              <a:gd name="csX13" fmla="*/ 75501 w 1761688"/>
-              <a:gd name="csY13" fmla="*/ 1189139 h 1291904"/>
-              <a:gd name="csX14" fmla="*/ 75501 w 1761688"/>
-              <a:gd name="csY14" fmla="*/ 102765 h 1291904"/>
-              <a:gd name="csX15" fmla="*/ 0 w 1761688"/>
-              <a:gd name="csY15" fmla="*/ 102765 h 1291904"/>
-            </a:gdLst>
-            <a:ahLst/>
-            <a:cxnLst>
-              <a:cxn ang="0">
-                <a:pos x="csX0" y="csY0"/>
-              </a:cxn>
-              <a:cxn ang="0">
-                <a:pos x="csX1" y="csY1"/>
-              </a:cxn>
-              <a:cxn ang="0">
-                <a:pos x="csX2" y="csY2"/>
-              </a:cxn>
-              <a:cxn ang="0">
-                <a:pos x="csX3" y="csY3"/>
-              </a:cxn>
-              <a:cxn ang="0">
-                <a:pos x="csX4" y="csY4"/>
-              </a:cxn>
-              <a:cxn ang="0">
-                <a:pos x="csX5" y="csY5"/>
-              </a:cxn>
-              <a:cxn ang="0">
-                <a:pos x="csX6" y="csY6"/>
-              </a:cxn>
-              <a:cxn ang="0">
-                <a:pos x="csX7" y="csY7"/>
-              </a:cxn>
-              <a:cxn ang="0">
-                <a:pos x="csX8" y="csY8"/>
-              </a:cxn>
-              <a:cxn ang="0">
-                <a:pos x="csX9" y="csY9"/>
-              </a:cxn>
-              <a:cxn ang="0">
-                <a:pos x="csX10" y="csY10"/>
-              </a:cxn>
-              <a:cxn ang="0">
-                <a:pos x="csX11" y="csY11"/>
-              </a:cxn>
-              <a:cxn ang="0">
-                <a:pos x="csX12" y="csY12"/>
-              </a:cxn>
-              <a:cxn ang="0">
-                <a:pos x="csX13" y="csY13"/>
-              </a:cxn>
-              <a:cxn ang="0">
-                <a:pos x="csX14" y="csY14"/>
-              </a:cxn>
-              <a:cxn ang="0">
-                <a:pos x="csX15" y="csY15"/>
-              </a:cxn>
-            </a:cxnLst>
-            <a:rect l="l" t="t" r="r" b="b"/>
-            <a:pathLst>
-              <a:path w="1761688" h="1291904">
-                <a:moveTo>
-                  <a:pt x="0" y="0"/>
-                </a:moveTo>
-                <a:lnTo>
-                  <a:pt x="75501" y="0"/>
-                </a:lnTo>
-                <a:lnTo>
-                  <a:pt x="1686187" y="0"/>
-                </a:lnTo>
-                <a:lnTo>
-                  <a:pt x="1761688" y="0"/>
-                </a:lnTo>
-                <a:lnTo>
-                  <a:pt x="1761688" y="102765"/>
-                </a:lnTo>
-                <a:lnTo>
-                  <a:pt x="1686187" y="102765"/>
-                </a:lnTo>
-                <a:lnTo>
-                  <a:pt x="1686187" y="1189139"/>
-                </a:lnTo>
-                <a:lnTo>
-                  <a:pt x="1761688" y="1189139"/>
-                </a:lnTo>
-                <a:lnTo>
-                  <a:pt x="1761688" y="1291904"/>
-                </a:lnTo>
-                <a:lnTo>
-                  <a:pt x="1686187" y="1291904"/>
-                </a:lnTo>
-                <a:lnTo>
-                  <a:pt x="75501" y="1291904"/>
-                </a:lnTo>
-                <a:lnTo>
-                  <a:pt x="0" y="1291904"/>
-                </a:lnTo>
-                <a:lnTo>
-                  <a:pt x="0" y="1189139"/>
-                </a:lnTo>
-                <a:lnTo>
-                  <a:pt x="75501" y="1189139"/>
-                </a:lnTo>
-                <a:lnTo>
-                  <a:pt x="75501" y="102765"/>
-                </a:lnTo>
-                <a:lnTo>
-                  <a:pt x="0" y="102765"/>
-                </a:lnTo>
-                <a:close/>
-              </a:path>
-            </a:pathLst>
-          </a:custGeom>
-          <a:gradFill flip="none" rotWithShape="1">
-            <a:gsLst>
-              <a:gs pos="95000">
-                <a:srgbClr val="F74B29">
-                  <a:alpha val="25000"/>
-                </a:srgbClr>
-              </a:gs>
-              <a:gs pos="52000">
-                <a:srgbClr val="F74B29">
-                  <a:alpha val="0"/>
-                </a:srgbClr>
-              </a:gs>
-            </a:gsLst>
-            <a:lin ang="6600000" scaled="0"/>
-            <a:tileRect/>
-          </a:gradFill>
-          <a:ln>
-            <a:noFill/>
-          </a:ln>
-        </p:spPr>
-        <p:style>
-          <a:lnRef idx="2">
-            <a:schemeClr val="accent1">
-              <a:shade val="15000"/>
-            </a:schemeClr>
-          </a:lnRef>
-          <a:fillRef idx="1">
-            <a:schemeClr val="accent1"/>
-          </a:fillRef>
-          <a:effectRef idx="0">
-            <a:schemeClr val="accent1"/>
-          </a:effectRef>
-          <a:fontRef idx="minor">
-            <a:schemeClr val="lt1"/>
-          </a:fontRef>
-        </p:style>
-        <p:txBody>
-          <a:bodyPr rtlCol="0" anchor="ctr"/>
-          <a:lstStyle/>
-          <a:p>
-            <a:pPr algn="ctr"/>
-            <a:endParaRPr lang="en-US"/>
-          </a:p>
-        </p:txBody>
-      </p:sp>
-      <p:sp>
-        <p:nvSpPr>
-          <p:cNvPr id="390" name="Freeform: Shape 389">
-            <a:extLst>
-              <a:ext uri="{FF2B5EF4-FFF2-40B4-BE49-F238E27FC236}">
-                <a16:creationId xmlns:a16="http://schemas.microsoft.com/office/drawing/2014/main" id="{DB153151-5F39-E7DB-53AB-C319303C4144}"/>
-              </a:ext>
-            </a:extLst>
-          </p:cNvPr>
-          <p:cNvSpPr/>
-          <p:nvPr/>
-        </p:nvSpPr>
-        <p:spPr>
-          <a:xfrm>
-            <a:off x="6736883" y="4203448"/>
-            <a:ext cx="937260" cy="652165"/>
-          </a:xfrm>
-          <a:custGeom>
-            <a:avLst/>
-            <a:gdLst>
-              <a:gd name="csX0" fmla="*/ 0 w 937260"/>
-              <a:gd name="csY0" fmla="*/ 0 h 652165"/>
-              <a:gd name="csX1" fmla="*/ 179 w 937260"/>
-              <a:gd name="csY1" fmla="*/ 0 h 652165"/>
-              <a:gd name="csX2" fmla="*/ 116373 w 937260"/>
-              <a:gd name="csY2" fmla="*/ 31552 h 652165"/>
-              <a:gd name="csX3" fmla="*/ 468630 w 937260"/>
-              <a:gd name="csY3" fmla="*/ 67131 h 652165"/>
-              <a:gd name="csX4" fmla="*/ 820887 w 937260"/>
-              <a:gd name="csY4" fmla="*/ 31552 h 652165"/>
-              <a:gd name="csX5" fmla="*/ 937081 w 937260"/>
-              <a:gd name="csY5" fmla="*/ 0 h 652165"/>
-              <a:gd name="csX6" fmla="*/ 937260 w 937260"/>
-              <a:gd name="csY6" fmla="*/ 0 h 652165"/>
-              <a:gd name="csX7" fmla="*/ 937260 w 937260"/>
-              <a:gd name="csY7" fmla="*/ 652165 h 652165"/>
-              <a:gd name="csX8" fmla="*/ 937078 w 937260"/>
-              <a:gd name="csY8" fmla="*/ 652165 h 652165"/>
-              <a:gd name="csX9" fmla="*/ 820887 w 937260"/>
-              <a:gd name="csY9" fmla="*/ 620614 h 652165"/>
-              <a:gd name="csX10" fmla="*/ 468630 w 937260"/>
-              <a:gd name="csY10" fmla="*/ 585035 h 652165"/>
-              <a:gd name="csX11" fmla="*/ 116373 w 937260"/>
-              <a:gd name="csY11" fmla="*/ 620614 h 652165"/>
-              <a:gd name="csX12" fmla="*/ 183 w 937260"/>
-              <a:gd name="csY12" fmla="*/ 652165 h 652165"/>
-              <a:gd name="csX13" fmla="*/ 0 w 937260"/>
-              <a:gd name="csY13" fmla="*/ 652165 h 652165"/>
-            </a:gdLst>
-            <a:ahLst/>
-            <a:cxnLst>
-              <a:cxn ang="0">
-                <a:pos x="csX0" y="csY0"/>
-              </a:cxn>
-              <a:cxn ang="0">
-                <a:pos x="csX1" y="csY1"/>
-              </a:cxn>
-              <a:cxn ang="0">
-                <a:pos x="csX2" y="csY2"/>
-              </a:cxn>
-              <a:cxn ang="0">
-                <a:pos x="csX3" y="csY3"/>
-              </a:cxn>
-              <a:cxn ang="0">
-                <a:pos x="csX4" y="csY4"/>
-              </a:cxn>
-              <a:cxn ang="0">
-                <a:pos x="csX5" y="csY5"/>
-              </a:cxn>
-              <a:cxn ang="0">
-                <a:pos x="csX6" y="csY6"/>
-              </a:cxn>
-              <a:cxn ang="0">
-                <a:pos x="csX7" y="csY7"/>
-              </a:cxn>
-              <a:cxn ang="0">
-                <a:pos x="csX8" y="csY8"/>
-              </a:cxn>
-              <a:cxn ang="0">
-                <a:pos x="csX9" y="csY9"/>
-              </a:cxn>
-              <a:cxn ang="0">
-                <a:pos x="csX10" y="csY10"/>
-              </a:cxn>
-              <a:cxn ang="0">
-                <a:pos x="csX11" y="csY11"/>
-              </a:cxn>
-              <a:cxn ang="0">
-                <a:pos x="csX12" y="csY12"/>
-              </a:cxn>
-              <a:cxn ang="0">
-                <a:pos x="csX13" y="csY13"/>
-              </a:cxn>
-            </a:cxnLst>
-            <a:rect l="l" t="t" r="r" b="b"/>
-            <a:pathLst>
-              <a:path w="937260" h="652165">
-                <a:moveTo>
-                  <a:pt x="0" y="0"/>
-                </a:moveTo>
-                <a:lnTo>
-                  <a:pt x="179" y="0"/>
-                </a:lnTo>
-                <a:lnTo>
-                  <a:pt x="116373" y="31552"/>
-                </a:lnTo>
-                <a:cubicBezTo>
-                  <a:pt x="224643" y="54462"/>
-                  <a:pt x="343679" y="67131"/>
-                  <a:pt x="468630" y="67131"/>
-                </a:cubicBezTo>
-                <a:cubicBezTo>
-                  <a:pt x="593581" y="67131"/>
-                  <a:pt x="712618" y="54462"/>
-                  <a:pt x="820887" y="31552"/>
-                </a:cubicBezTo>
-                <a:lnTo>
-                  <a:pt x="937081" y="0"/>
-                </a:lnTo>
-                <a:lnTo>
-                  <a:pt x="937260" y="0"/>
-                </a:lnTo>
-                <a:lnTo>
-                  <a:pt x="937260" y="652165"/>
-                </a:lnTo>
-                <a:lnTo>
-                  <a:pt x="937078" y="652165"/>
-                </a:lnTo>
-                <a:lnTo>
-                  <a:pt x="820887" y="620614"/>
-                </a:lnTo>
-                <a:cubicBezTo>
-                  <a:pt x="712618" y="597704"/>
-                  <a:pt x="593581" y="585035"/>
-                  <a:pt x="468630" y="585035"/>
-                </a:cubicBezTo>
-                <a:cubicBezTo>
-                  <a:pt x="343679" y="585035"/>
-                  <a:pt x="224643" y="597704"/>
-                  <a:pt x="116373" y="620614"/>
-                </a:cubicBezTo>
-                <a:lnTo>
-                  <a:pt x="183" y="652165"/>
-                </a:lnTo>
-                <a:lnTo>
-                  <a:pt x="0" y="652165"/>
-                </a:lnTo>
-                <a:close/>
-              </a:path>
-            </a:pathLst>
-          </a:custGeom>
-          <a:gradFill flip="none" rotWithShape="1">
-            <a:gsLst>
-              <a:gs pos="87000">
-                <a:srgbClr val="00B0F0">
-                  <a:alpha val="34000"/>
-                </a:srgbClr>
-              </a:gs>
-              <a:gs pos="56000">
-                <a:srgbClr val="00B0F0">
-                  <a:alpha val="0"/>
-                </a:srgbClr>
-              </a:gs>
-            </a:gsLst>
-            <a:lin ang="6600000" scaled="0"/>
-            <a:tileRect/>
-          </a:gradFill>
-          <a:ln>
-            <a:noFill/>
-          </a:ln>
-        </p:spPr>
-        <p:style>
-          <a:lnRef idx="2">
-            <a:schemeClr val="accent1">
-              <a:shade val="15000"/>
-            </a:schemeClr>
-          </a:lnRef>
-          <a:fillRef idx="1">
-            <a:schemeClr val="accent1"/>
-          </a:fillRef>
-          <a:effectRef idx="0">
-            <a:schemeClr val="accent1"/>
-          </a:effectRef>
-          <a:fontRef idx="minor">
-            <a:schemeClr val="lt1"/>
-          </a:fontRef>
-        </p:style>
-        <p:txBody>
-          <a:bodyPr rtlCol="0" anchor="ctr"/>
-          <a:lstStyle/>
-          <a:p>
-            <a:pPr algn="ctr"/>
-            <a:endParaRPr lang="en-US"/>
-          </a:p>
-        </p:txBody>
-      </p:sp>
-      <p:sp>
-        <p:nvSpPr>
-          <p:cNvPr id="391" name="Freeform: Shape 390">
-            <a:extLst>
-              <a:ext uri="{FF2B5EF4-FFF2-40B4-BE49-F238E27FC236}">
-                <a16:creationId xmlns:a16="http://schemas.microsoft.com/office/drawing/2014/main" id="{B285A4C6-ADD5-892E-5FDD-C3115FF2E191}"/>
-              </a:ext>
-            </a:extLst>
-          </p:cNvPr>
-          <p:cNvSpPr/>
-          <p:nvPr/>
-        </p:nvSpPr>
-        <p:spPr>
-          <a:xfrm>
-            <a:off x="4523163" y="4203448"/>
-            <a:ext cx="937260" cy="652164"/>
-          </a:xfrm>
-          <a:custGeom>
-            <a:avLst/>
-            <a:gdLst>
-              <a:gd name="csX0" fmla="*/ 885039 w 1770078"/>
-              <a:gd name="csY0" fmla="*/ 0 h 1291903"/>
-              <a:gd name="csX1" fmla="*/ 1752097 w 1770078"/>
-              <a:gd name="csY1" fmla="*/ 364364 h 1291903"/>
-              <a:gd name="csX2" fmla="*/ 1756386 w 1770078"/>
-              <a:gd name="csY2" fmla="*/ 378854 h 1291903"/>
-              <a:gd name="csX3" fmla="*/ 1770078 w 1770078"/>
-              <a:gd name="csY3" fmla="*/ 378854 h 1291903"/>
-              <a:gd name="csX4" fmla="*/ 1770078 w 1770078"/>
-              <a:gd name="csY4" fmla="*/ 456330 h 1291903"/>
-              <a:gd name="csX5" fmla="*/ 1770078 w 1770078"/>
-              <a:gd name="csY5" fmla="*/ 1291903 h 1291903"/>
-              <a:gd name="csX6" fmla="*/ 0 w 1770078"/>
-              <a:gd name="csY6" fmla="*/ 1291903 h 1291903"/>
-              <a:gd name="csX7" fmla="*/ 0 w 1770078"/>
-              <a:gd name="csY7" fmla="*/ 456330 h 1291903"/>
-              <a:gd name="csX8" fmla="*/ 0 w 1770078"/>
-              <a:gd name="csY8" fmla="*/ 378854 h 1291903"/>
-              <a:gd name="csX9" fmla="*/ 13692 w 1770078"/>
-              <a:gd name="csY9" fmla="*/ 378854 h 1291903"/>
-              <a:gd name="csX10" fmla="*/ 17981 w 1770078"/>
-              <a:gd name="csY10" fmla="*/ 364364 h 1291903"/>
-              <a:gd name="csX11" fmla="*/ 885039 w 1770078"/>
-              <a:gd name="csY11" fmla="*/ 0 h 1291903"/>
-              <a:gd name="csX0" fmla="*/ 885039 w 1770078"/>
-              <a:gd name="csY0" fmla="*/ 0 h 1291903"/>
-              <a:gd name="csX1" fmla="*/ 1752097 w 1770078"/>
-              <a:gd name="csY1" fmla="*/ 364364 h 1291903"/>
-              <a:gd name="csX2" fmla="*/ 1756386 w 1770078"/>
-              <a:gd name="csY2" fmla="*/ 378854 h 1291903"/>
-              <a:gd name="csX3" fmla="*/ 1770078 w 1770078"/>
-              <a:gd name="csY3" fmla="*/ 378854 h 1291903"/>
-              <a:gd name="csX4" fmla="*/ 1770078 w 1770078"/>
-              <a:gd name="csY4" fmla="*/ 456330 h 1291903"/>
-              <a:gd name="csX5" fmla="*/ 1770078 w 1770078"/>
-              <a:gd name="csY5" fmla="*/ 1291903 h 1291903"/>
-              <a:gd name="csX6" fmla="*/ 0 w 1770078"/>
-              <a:gd name="csY6" fmla="*/ 1291903 h 1291903"/>
-              <a:gd name="csX7" fmla="*/ 0 w 1770078"/>
-              <a:gd name="csY7" fmla="*/ 456330 h 1291903"/>
-              <a:gd name="csX8" fmla="*/ 13692 w 1770078"/>
-              <a:gd name="csY8" fmla="*/ 378854 h 1291903"/>
-              <a:gd name="csX9" fmla="*/ 17981 w 1770078"/>
-              <a:gd name="csY9" fmla="*/ 364364 h 1291903"/>
-              <a:gd name="csX10" fmla="*/ 885039 w 1770078"/>
-              <a:gd name="csY10" fmla="*/ 0 h 1291903"/>
-              <a:gd name="csX0" fmla="*/ 885039 w 1770078"/>
-              <a:gd name="csY0" fmla="*/ 0 h 1291903"/>
-              <a:gd name="csX1" fmla="*/ 1752097 w 1770078"/>
-              <a:gd name="csY1" fmla="*/ 364364 h 1291903"/>
-              <a:gd name="csX2" fmla="*/ 1756386 w 1770078"/>
-              <a:gd name="csY2" fmla="*/ 378854 h 1291903"/>
-              <a:gd name="csX3" fmla="*/ 1770078 w 1770078"/>
-              <a:gd name="csY3" fmla="*/ 378854 h 1291903"/>
-              <a:gd name="csX4" fmla="*/ 1770078 w 1770078"/>
-              <a:gd name="csY4" fmla="*/ 456330 h 1291903"/>
-              <a:gd name="csX5" fmla="*/ 1770078 w 1770078"/>
-              <a:gd name="csY5" fmla="*/ 1291903 h 1291903"/>
-              <a:gd name="csX6" fmla="*/ 0 w 1770078"/>
-              <a:gd name="csY6" fmla="*/ 1291903 h 1291903"/>
-              <a:gd name="csX7" fmla="*/ 0 w 1770078"/>
-              <a:gd name="csY7" fmla="*/ 456330 h 1291903"/>
-              <a:gd name="csX8" fmla="*/ 17981 w 1770078"/>
-              <a:gd name="csY8" fmla="*/ 364364 h 1291903"/>
-              <a:gd name="csX9" fmla="*/ 885039 w 1770078"/>
-              <a:gd name="csY9" fmla="*/ 0 h 1291903"/>
-              <a:gd name="csX0" fmla="*/ 885039 w 1770078"/>
-              <a:gd name="csY0" fmla="*/ 0 h 1291903"/>
-              <a:gd name="csX1" fmla="*/ 1752097 w 1770078"/>
-              <a:gd name="csY1" fmla="*/ 364364 h 1291903"/>
-              <a:gd name="csX2" fmla="*/ 1756386 w 1770078"/>
-              <a:gd name="csY2" fmla="*/ 378854 h 1291903"/>
-              <a:gd name="csX3" fmla="*/ 1770078 w 1770078"/>
-              <a:gd name="csY3" fmla="*/ 456330 h 1291903"/>
-              <a:gd name="csX4" fmla="*/ 1770078 w 1770078"/>
-              <a:gd name="csY4" fmla="*/ 1291903 h 1291903"/>
-              <a:gd name="csX5" fmla="*/ 0 w 1770078"/>
-              <a:gd name="csY5" fmla="*/ 1291903 h 1291903"/>
-              <a:gd name="csX6" fmla="*/ 0 w 1770078"/>
-              <a:gd name="csY6" fmla="*/ 456330 h 1291903"/>
-              <a:gd name="csX7" fmla="*/ 17981 w 1770078"/>
-              <a:gd name="csY7" fmla="*/ 364364 h 1291903"/>
-              <a:gd name="csX8" fmla="*/ 885039 w 1770078"/>
-              <a:gd name="csY8" fmla="*/ 0 h 1291903"/>
-              <a:gd name="csX0" fmla="*/ 885039 w 1770078"/>
-              <a:gd name="csY0" fmla="*/ 0 h 1291903"/>
-              <a:gd name="csX1" fmla="*/ 1752097 w 1770078"/>
-              <a:gd name="csY1" fmla="*/ 364364 h 1291903"/>
-              <a:gd name="csX2" fmla="*/ 1770078 w 1770078"/>
-              <a:gd name="csY2" fmla="*/ 456330 h 1291903"/>
-              <a:gd name="csX3" fmla="*/ 1770078 w 1770078"/>
-              <a:gd name="csY3" fmla="*/ 1291903 h 1291903"/>
-              <a:gd name="csX4" fmla="*/ 0 w 1770078"/>
-              <a:gd name="csY4" fmla="*/ 1291903 h 1291903"/>
-              <a:gd name="csX5" fmla="*/ 0 w 1770078"/>
-              <a:gd name="csY5" fmla="*/ 456330 h 1291903"/>
-              <a:gd name="csX6" fmla="*/ 17981 w 1770078"/>
-              <a:gd name="csY6" fmla="*/ 364364 h 1291903"/>
-              <a:gd name="csX7" fmla="*/ 885039 w 1770078"/>
-              <a:gd name="csY7" fmla="*/ 0 h 1291903"/>
-            </a:gdLst>
-            <a:ahLst/>
-            <a:cxnLst>
-              <a:cxn ang="0">
-                <a:pos x="csX0" y="csY0"/>
-              </a:cxn>
-              <a:cxn ang="0">
-                <a:pos x="csX1" y="csY1"/>
-              </a:cxn>
-              <a:cxn ang="0">
-                <a:pos x="csX2" y="csY2"/>
-              </a:cxn>
-              <a:cxn ang="0">
-                <a:pos x="csX3" y="csY3"/>
-              </a:cxn>
-              <a:cxn ang="0">
-                <a:pos x="csX4" y="csY4"/>
-              </a:cxn>
-              <a:cxn ang="0">
-                <a:pos x="csX5" y="csY5"/>
-              </a:cxn>
-              <a:cxn ang="0">
-                <a:pos x="csX6" y="csY6"/>
-              </a:cxn>
-              <a:cxn ang="0">
-                <a:pos x="csX7" y="csY7"/>
-              </a:cxn>
-            </a:cxnLst>
-            <a:rect l="l" t="t" r="r" b="b"/>
-            <a:pathLst>
-              <a:path w="1770078" h="1291903">
-                <a:moveTo>
-                  <a:pt x="885039" y="0"/>
-                </a:moveTo>
-                <a:cubicBezTo>
-                  <a:pt x="1312734" y="0"/>
-                  <a:pt x="1669571" y="156422"/>
-                  <a:pt x="1752097" y="364364"/>
-                </a:cubicBezTo>
-                <a:lnTo>
-                  <a:pt x="1770078" y="456330"/>
-                </a:lnTo>
-                <a:lnTo>
-                  <a:pt x="1770078" y="1291903"/>
-                </a:lnTo>
-                <a:lnTo>
-                  <a:pt x="0" y="1291903"/>
-                </a:lnTo>
-                <a:lnTo>
-                  <a:pt x="0" y="456330"/>
-                </a:lnTo>
-                <a:lnTo>
-                  <a:pt x="17981" y="364364"/>
-                </a:lnTo>
-                <a:cubicBezTo>
-                  <a:pt x="100507" y="156422"/>
-                  <a:pt x="457344" y="0"/>
-                  <a:pt x="885039" y="0"/>
-                </a:cubicBezTo>
-                <a:close/>
-              </a:path>
-            </a:pathLst>
-          </a:custGeom>
-          <a:gradFill flip="none" rotWithShape="1">
-            <a:gsLst>
-              <a:gs pos="100000">
-                <a:srgbClr val="00B050">
-                  <a:alpha val="67000"/>
-                </a:srgbClr>
-              </a:gs>
-              <a:gs pos="73000">
-                <a:srgbClr val="00B050">
-                  <a:alpha val="0"/>
-                </a:srgbClr>
-              </a:gs>
-            </a:gsLst>
-            <a:lin ang="8400000" scaled="0"/>
-            <a:tileRect/>
-          </a:gradFill>
-          <a:ln>
-            <a:noFill/>
-          </a:ln>
-        </p:spPr>
-        <p:style>
-          <a:lnRef idx="2">
-            <a:schemeClr val="accent1">
-              <a:shade val="15000"/>
-            </a:schemeClr>
-          </a:lnRef>
-          <a:fillRef idx="1">
-            <a:schemeClr val="accent1"/>
-          </a:fillRef>
-          <a:effectRef idx="0">
-            <a:schemeClr val="accent1"/>
-          </a:effectRef>
-          <a:fontRef idx="minor">
-            <a:schemeClr val="lt1"/>
-          </a:fontRef>
-        </p:style>
-        <p:txBody>
-          <a:bodyPr rtlCol="0" anchor="ctr"/>
-          <a:lstStyle/>
-          <a:p>
-            <a:pPr algn="ctr"/>
-            <a:endParaRPr lang="en-US"/>
-          </a:p>
-        </p:txBody>
-      </p:sp>
-      <p:sp>
-        <p:nvSpPr>
-          <p:cNvPr id="392" name="Freeform: Shape 391">
-            <a:extLst>
-              <a:ext uri="{FF2B5EF4-FFF2-40B4-BE49-F238E27FC236}">
-                <a16:creationId xmlns:a16="http://schemas.microsoft.com/office/drawing/2014/main" id="{8D385030-0EF9-3401-EF2C-35E7E76EB50F}"/>
-              </a:ext>
-            </a:extLst>
-          </p:cNvPr>
-          <p:cNvSpPr/>
-          <p:nvPr/>
-        </p:nvSpPr>
-        <p:spPr>
-          <a:xfrm rot="16200000" flipH="1">
-            <a:off x="5772571" y="4060901"/>
-            <a:ext cx="652164" cy="937260"/>
-          </a:xfrm>
-          <a:custGeom>
-            <a:avLst/>
-            <a:gdLst>
-              <a:gd name="csX0" fmla="*/ 0 w 1291905"/>
-              <a:gd name="csY0" fmla="*/ 0 h 1770078"/>
-              <a:gd name="csX1" fmla="*/ 0 w 1291905"/>
-              <a:gd name="csY1" fmla="*/ 478173 h 1770078"/>
-              <a:gd name="csX2" fmla="*/ 0 w 1291905"/>
-              <a:gd name="csY2" fmla="*/ 1291905 h 1770078"/>
-              <a:gd name="csX3" fmla="*/ 0 w 1291905"/>
-              <a:gd name="csY3" fmla="*/ 1770078 h 1770078"/>
-              <a:gd name="csX4" fmla="*/ 6123 w 1291905"/>
-              <a:gd name="csY4" fmla="*/ 1770078 h 1770078"/>
-              <a:gd name="csX5" fmla="*/ 109381 w 1291905"/>
-              <a:gd name="csY5" fmla="*/ 1658008 h 1770078"/>
-              <a:gd name="csX6" fmla="*/ 212639 w 1291905"/>
-              <a:gd name="csY6" fmla="*/ 1770078 h 1770078"/>
-              <a:gd name="csX7" fmla="*/ 221976 w 1291905"/>
-              <a:gd name="csY7" fmla="*/ 1770078 h 1770078"/>
-              <a:gd name="csX8" fmla="*/ 325234 w 1291905"/>
-              <a:gd name="csY8" fmla="*/ 1658008 h 1770078"/>
-              <a:gd name="csX9" fmla="*/ 428492 w 1291905"/>
-              <a:gd name="csY9" fmla="*/ 1770078 h 1770078"/>
-              <a:gd name="csX10" fmla="*/ 437829 w 1291905"/>
-              <a:gd name="csY10" fmla="*/ 1770078 h 1770078"/>
-              <a:gd name="csX11" fmla="*/ 541087 w 1291905"/>
-              <a:gd name="csY11" fmla="*/ 1658008 h 1770078"/>
-              <a:gd name="csX12" fmla="*/ 644346 w 1291905"/>
-              <a:gd name="csY12" fmla="*/ 1770078 h 1770078"/>
-              <a:gd name="csX13" fmla="*/ 653683 w 1291905"/>
-              <a:gd name="csY13" fmla="*/ 1770078 h 1770078"/>
-              <a:gd name="csX14" fmla="*/ 756941 w 1291905"/>
-              <a:gd name="csY14" fmla="*/ 1658008 h 1770078"/>
-              <a:gd name="csX15" fmla="*/ 860199 w 1291905"/>
-              <a:gd name="csY15" fmla="*/ 1770078 h 1770078"/>
-              <a:gd name="csX16" fmla="*/ 869536 w 1291905"/>
-              <a:gd name="csY16" fmla="*/ 1770078 h 1770078"/>
-              <a:gd name="csX17" fmla="*/ 972794 w 1291905"/>
-              <a:gd name="csY17" fmla="*/ 1658008 h 1770078"/>
-              <a:gd name="csX18" fmla="*/ 1076052 w 1291905"/>
-              <a:gd name="csY18" fmla="*/ 1770078 h 1770078"/>
-              <a:gd name="csX19" fmla="*/ 1085389 w 1291905"/>
-              <a:gd name="csY19" fmla="*/ 1770078 h 1770078"/>
-              <a:gd name="csX20" fmla="*/ 1188647 w 1291905"/>
-              <a:gd name="csY20" fmla="*/ 1658008 h 1770078"/>
-              <a:gd name="csX21" fmla="*/ 1291905 w 1291905"/>
-              <a:gd name="csY21" fmla="*/ 1770078 h 1770078"/>
-              <a:gd name="csX22" fmla="*/ 1291905 w 1291905"/>
-              <a:gd name="csY22" fmla="*/ 1291905 h 1770078"/>
-              <a:gd name="csX23" fmla="*/ 1291905 w 1291905"/>
-              <a:gd name="csY23" fmla="*/ 478173 h 1770078"/>
-              <a:gd name="csX24" fmla="*/ 1291905 w 1291905"/>
-              <a:gd name="csY24" fmla="*/ 0 h 1770078"/>
-              <a:gd name="csX25" fmla="*/ 1188647 w 1291905"/>
-              <a:gd name="csY25" fmla="*/ 112070 h 1770078"/>
-              <a:gd name="csX26" fmla="*/ 1085389 w 1291905"/>
-              <a:gd name="csY26" fmla="*/ 0 h 1770078"/>
-              <a:gd name="csX27" fmla="*/ 1076052 w 1291905"/>
-              <a:gd name="csY27" fmla="*/ 0 h 1770078"/>
-              <a:gd name="csX28" fmla="*/ 972794 w 1291905"/>
-              <a:gd name="csY28" fmla="*/ 112070 h 1770078"/>
-              <a:gd name="csX29" fmla="*/ 869536 w 1291905"/>
-              <a:gd name="csY29" fmla="*/ 0 h 1770078"/>
-              <a:gd name="csX30" fmla="*/ 860199 w 1291905"/>
-              <a:gd name="csY30" fmla="*/ 0 h 1770078"/>
-              <a:gd name="csX31" fmla="*/ 756941 w 1291905"/>
-              <a:gd name="csY31" fmla="*/ 112070 h 1770078"/>
-              <a:gd name="csX32" fmla="*/ 653683 w 1291905"/>
-              <a:gd name="csY32" fmla="*/ 0 h 1770078"/>
-              <a:gd name="csX33" fmla="*/ 644346 w 1291905"/>
-              <a:gd name="csY33" fmla="*/ 0 h 1770078"/>
-              <a:gd name="csX34" fmla="*/ 541087 w 1291905"/>
-              <a:gd name="csY34" fmla="*/ 112070 h 1770078"/>
-              <a:gd name="csX35" fmla="*/ 437829 w 1291905"/>
-              <a:gd name="csY35" fmla="*/ 0 h 1770078"/>
-              <a:gd name="csX36" fmla="*/ 428492 w 1291905"/>
-              <a:gd name="csY36" fmla="*/ 0 h 1770078"/>
-              <a:gd name="csX37" fmla="*/ 325234 w 1291905"/>
-              <a:gd name="csY37" fmla="*/ 112070 h 1770078"/>
-              <a:gd name="csX38" fmla="*/ 221976 w 1291905"/>
-              <a:gd name="csY38" fmla="*/ 0 h 1770078"/>
-              <a:gd name="csX39" fmla="*/ 212639 w 1291905"/>
-              <a:gd name="csY39" fmla="*/ 0 h 1770078"/>
-              <a:gd name="csX40" fmla="*/ 109381 w 1291905"/>
-              <a:gd name="csY40" fmla="*/ 112070 h 1770078"/>
-              <a:gd name="csX41" fmla="*/ 6123 w 1291905"/>
-              <a:gd name="csY41" fmla="*/ 0 h 1770078"/>
-            </a:gdLst>
-            <a:ahLst/>
-            <a:cxnLst>
-              <a:cxn ang="0">
-                <a:pos x="csX0" y="csY0"/>
-              </a:cxn>
-              <a:cxn ang="0">
-                <a:pos x="csX1" y="csY1"/>
-              </a:cxn>
-              <a:cxn ang="0">
-                <a:pos x="csX2" y="csY2"/>
-              </a:cxn>
-              <a:cxn ang="0">
-                <a:pos x="csX3" y="csY3"/>
-              </a:cxn>
-              <a:cxn ang="0">
-                <a:pos x="csX4" y="csY4"/>
-              </a:cxn>
-              <a:cxn ang="0">
-                <a:pos x="csX5" y="csY5"/>
-              </a:cxn>
-              <a:cxn ang="0">
-                <a:pos x="csX6" y="csY6"/>
-              </a:cxn>
-              <a:cxn ang="0">
-                <a:pos x="csX7" y="csY7"/>
-              </a:cxn>
-              <a:cxn ang="0">
-                <a:pos x="csX8" y="csY8"/>
-              </a:cxn>
-              <a:cxn ang="0">
-                <a:pos x="csX9" y="csY9"/>
-              </a:cxn>
-              <a:cxn ang="0">
-                <a:pos x="csX10" y="csY10"/>
-              </a:cxn>
-              <a:cxn ang="0">
-                <a:pos x="csX11" y="csY11"/>
-              </a:cxn>
-              <a:cxn ang="0">
-                <a:pos x="csX12" y="csY12"/>
-              </a:cxn>
-              <a:cxn ang="0">
-                <a:pos x="csX13" y="csY13"/>
-              </a:cxn>
-              <a:cxn ang="0">
-                <a:pos x="csX14" y="csY14"/>
-              </a:cxn>
-              <a:cxn ang="0">
-                <a:pos x="csX15" y="csY15"/>
-              </a:cxn>
-              <a:cxn ang="0">
-                <a:pos x="csX16" y="csY16"/>
-              </a:cxn>
-              <a:cxn ang="0">
-                <a:pos x="csX17" y="csY17"/>
-              </a:cxn>
-              <a:cxn ang="0">
-                <a:pos x="csX18" y="csY18"/>
-              </a:cxn>
-              <a:cxn ang="0">
-                <a:pos x="csX19" y="csY19"/>
-              </a:cxn>
-              <a:cxn ang="0">
-                <a:pos x="csX20" y="csY20"/>
-              </a:cxn>
-              <a:cxn ang="0">
-                <a:pos x="csX21" y="csY21"/>
-              </a:cxn>
-              <a:cxn ang="0">
-                <a:pos x="csX22" y="csY22"/>
-              </a:cxn>
-              <a:cxn ang="0">
-                <a:pos x="csX23" y="csY23"/>
-              </a:cxn>
-              <a:cxn ang="0">
-                <a:pos x="csX24" y="csY24"/>
-              </a:cxn>
-              <a:cxn ang="0">
-                <a:pos x="csX25" y="csY25"/>
-              </a:cxn>
-              <a:cxn ang="0">
-                <a:pos x="csX26" y="csY26"/>
-              </a:cxn>
-              <a:cxn ang="0">
-                <a:pos x="csX27" y="csY27"/>
-              </a:cxn>
-              <a:cxn ang="0">
-                <a:pos x="csX28" y="csY28"/>
-              </a:cxn>
-              <a:cxn ang="0">
-                <a:pos x="csX29" y="csY29"/>
-              </a:cxn>
-              <a:cxn ang="0">
-                <a:pos x="csX30" y="csY30"/>
-              </a:cxn>
-              <a:cxn ang="0">
-                <a:pos x="csX31" y="csY31"/>
-              </a:cxn>
-              <a:cxn ang="0">
-                <a:pos x="csX32" y="csY32"/>
-              </a:cxn>
-              <a:cxn ang="0">
-                <a:pos x="csX33" y="csY33"/>
-              </a:cxn>
-              <a:cxn ang="0">
-                <a:pos x="csX34" y="csY34"/>
-              </a:cxn>
-              <a:cxn ang="0">
-                <a:pos x="csX35" y="csY35"/>
-              </a:cxn>
-              <a:cxn ang="0">
-                <a:pos x="csX36" y="csY36"/>
-              </a:cxn>
-              <a:cxn ang="0">
-                <a:pos x="csX37" y="csY37"/>
-              </a:cxn>
-              <a:cxn ang="0">
-                <a:pos x="csX38" y="csY38"/>
-              </a:cxn>
-              <a:cxn ang="0">
-                <a:pos x="csX39" y="csY39"/>
-              </a:cxn>
-              <a:cxn ang="0">
-                <a:pos x="csX40" y="csY40"/>
-              </a:cxn>
-              <a:cxn ang="0">
-                <a:pos x="csX41" y="csY41"/>
-              </a:cxn>
-            </a:cxnLst>
-            <a:rect l="l" t="t" r="r" b="b"/>
-            <a:pathLst>
-              <a:path w="1291905" h="1770078">
-                <a:moveTo>
-                  <a:pt x="0" y="0"/>
-                </a:moveTo>
-                <a:lnTo>
-                  <a:pt x="0" y="478173"/>
-                </a:lnTo>
-                <a:lnTo>
-                  <a:pt x="0" y="1291905"/>
-                </a:lnTo>
-                <a:lnTo>
-                  <a:pt x="0" y="1770078"/>
-                </a:lnTo>
-                <a:lnTo>
-                  <a:pt x="6123" y="1770078"/>
-                </a:lnTo>
-                <a:lnTo>
-                  <a:pt x="109381" y="1658008"/>
-                </a:lnTo>
-                <a:lnTo>
-                  <a:pt x="212639" y="1770078"/>
-                </a:lnTo>
-                <a:lnTo>
-                  <a:pt x="221976" y="1770078"/>
-                </a:lnTo>
-                <a:lnTo>
-                  <a:pt x="325234" y="1658008"/>
-                </a:lnTo>
-                <a:lnTo>
-                  <a:pt x="428492" y="1770078"/>
-                </a:lnTo>
-                <a:lnTo>
-                  <a:pt x="437829" y="1770078"/>
-                </a:lnTo>
-                <a:lnTo>
-                  <a:pt x="541087" y="1658008"/>
-                </a:lnTo>
-                <a:lnTo>
-                  <a:pt x="644346" y="1770078"/>
-                </a:lnTo>
-                <a:lnTo>
-                  <a:pt x="653683" y="1770078"/>
-                </a:lnTo>
-                <a:lnTo>
-                  <a:pt x="756941" y="1658008"/>
-                </a:lnTo>
-                <a:lnTo>
-                  <a:pt x="860199" y="1770078"/>
-                </a:lnTo>
-                <a:lnTo>
-                  <a:pt x="869536" y="1770078"/>
-                </a:lnTo>
-                <a:lnTo>
-                  <a:pt x="972794" y="1658008"/>
-                </a:lnTo>
-                <a:lnTo>
-                  <a:pt x="1076052" y="1770078"/>
-                </a:lnTo>
-                <a:lnTo>
-                  <a:pt x="1085389" y="1770078"/>
-                </a:lnTo>
-                <a:lnTo>
-                  <a:pt x="1188647" y="1658008"/>
-                </a:lnTo>
-                <a:lnTo>
-                  <a:pt x="1291905" y="1770078"/>
-                </a:lnTo>
-                <a:lnTo>
-                  <a:pt x="1291905" y="1291905"/>
-                </a:lnTo>
-                <a:lnTo>
-                  <a:pt x="1291905" y="478173"/>
-                </a:lnTo>
-                <a:lnTo>
-                  <a:pt x="1291905" y="0"/>
-                </a:lnTo>
-                <a:lnTo>
-                  <a:pt x="1188647" y="112070"/>
-                </a:lnTo>
-                <a:lnTo>
-                  <a:pt x="1085389" y="0"/>
-                </a:lnTo>
-                <a:lnTo>
-                  <a:pt x="1076052" y="0"/>
-                </a:lnTo>
-                <a:lnTo>
-                  <a:pt x="972794" y="112070"/>
-                </a:lnTo>
-                <a:lnTo>
-                  <a:pt x="869536" y="0"/>
-                </a:lnTo>
-                <a:lnTo>
-                  <a:pt x="860199" y="0"/>
-                </a:lnTo>
-                <a:lnTo>
-                  <a:pt x="756941" y="112070"/>
-                </a:lnTo>
-                <a:lnTo>
-                  <a:pt x="653683" y="0"/>
-                </a:lnTo>
-                <a:lnTo>
-                  <a:pt x="644346" y="0"/>
-                </a:lnTo>
-                <a:lnTo>
-                  <a:pt x="541087" y="112070"/>
-                </a:lnTo>
-                <a:lnTo>
-                  <a:pt x="437829" y="0"/>
-                </a:lnTo>
-                <a:lnTo>
-                  <a:pt x="428492" y="0"/>
-                </a:lnTo>
-                <a:lnTo>
-                  <a:pt x="325234" y="112070"/>
-                </a:lnTo>
-                <a:lnTo>
-                  <a:pt x="221976" y="0"/>
-                </a:lnTo>
-                <a:lnTo>
-                  <a:pt x="212639" y="0"/>
-                </a:lnTo>
-                <a:lnTo>
-                  <a:pt x="109381" y="112070"/>
-                </a:lnTo>
-                <a:lnTo>
-                  <a:pt x="6123" y="0"/>
-                </a:lnTo>
-                <a:close/>
-              </a:path>
-            </a:pathLst>
-          </a:custGeom>
-          <a:gradFill flip="none" rotWithShape="1">
-            <a:gsLst>
-              <a:gs pos="100000">
-                <a:srgbClr val="FBA305">
-                  <a:alpha val="67000"/>
-                </a:srgbClr>
-              </a:gs>
-              <a:gs pos="56000">
-                <a:srgbClr val="FFC000">
-                  <a:alpha val="0"/>
-                </a:srgbClr>
-              </a:gs>
-            </a:gsLst>
-            <a:lin ang="20400000" scaled="0"/>
-            <a:tileRect/>
-          </a:gradFill>
-          <a:ln>
-            <a:noFill/>
-          </a:ln>
-        </p:spPr>
-        <p:style>
-          <a:lnRef idx="2">
-            <a:schemeClr val="accent1">
-              <a:shade val="15000"/>
-            </a:schemeClr>
-          </a:lnRef>
-          <a:fillRef idx="1">
-            <a:schemeClr val="accent1"/>
-          </a:fillRef>
-          <a:effectRef idx="0">
-            <a:schemeClr val="accent1"/>
-          </a:effectRef>
-          <a:fontRef idx="minor">
-            <a:schemeClr val="lt1"/>
-          </a:fontRef>
-        </p:style>
-        <p:txBody>
-          <a:bodyPr rtlCol="0" anchor="ctr"/>
-          <a:lstStyle/>
-          <a:p>
-            <a:pPr algn="ctr"/>
-            <a:endParaRPr lang="en-US"/>
-          </a:p>
-        </p:txBody>
-      </p:sp>
     </p:spTree>
     <p:extLst>
       <p:ext uri="{BB962C8B-B14F-4D97-AF65-F5344CB8AC3E}">

--- a/Icons_UI/bcpst.pptx
+++ b/Icons_UI/bcpst.pptx
@@ -5499,1132 +5499,1111 @@
           </p:txBody>
         </p:sp>
       </p:grpSp>
-      <p:grpSp>
-        <p:nvGrpSpPr>
-          <p:cNvPr id="192" name="Group 191">
+      <p:sp>
+        <p:nvSpPr>
+          <p:cNvPr id="120" name="Rectangle: Rounded Corners 119">
             <a:extLst>
               <a:ext uri="{FF2B5EF4-FFF2-40B4-BE49-F238E27FC236}">
-                <a16:creationId xmlns:a16="http://schemas.microsoft.com/office/drawing/2014/main" id="{08720FBB-D719-CE4D-7347-9C401D59AB6D}"/>
+                <a16:creationId xmlns:a16="http://schemas.microsoft.com/office/drawing/2014/main" id="{60F01C77-54CA-92D8-3381-5289EF316187}"/>
               </a:ext>
             </a:extLst>
           </p:cNvPr>
-          <p:cNvGrpSpPr/>
+          <p:cNvSpPr/>
           <p:nvPr/>
-        </p:nvGrpSpPr>
-        <p:grpSpPr>
+        </p:nvSpPr>
+        <p:spPr>
           <a:xfrm>
             <a:off x="3416303" y="2628611"/>
-            <a:ext cx="5359827" cy="652166"/>
-            <a:chOff x="172406" y="2714336"/>
-            <a:chExt cx="5359827" cy="652166"/>
+            <a:ext cx="937260" cy="652166"/>
           </a:xfrm>
-        </p:grpSpPr>
-        <p:sp>
-          <p:nvSpPr>
-            <p:cNvPr id="120" name="Rectangle: Rounded Corners 119">
-              <a:extLst>
-                <a:ext uri="{FF2B5EF4-FFF2-40B4-BE49-F238E27FC236}">
-                  <a16:creationId xmlns:a16="http://schemas.microsoft.com/office/drawing/2014/main" id="{60F01C77-54CA-92D8-3381-5289EF316187}"/>
-                </a:ext>
-              </a:extLst>
-            </p:cNvPr>
-            <p:cNvSpPr/>
-            <p:nvPr/>
-          </p:nvSpPr>
-          <p:spPr>
-            <a:xfrm>
-              <a:off x="172406" y="2714336"/>
-              <a:ext cx="937260" cy="652166"/>
-            </a:xfrm>
-            <a:prstGeom prst="roundRect">
-              <a:avLst/>
-            </a:prstGeom>
-            <a:gradFill flip="none" rotWithShape="1">
-              <a:gsLst>
-                <a:gs pos="100000">
-                  <a:srgbClr val="00B0F0">
-                    <a:alpha val="34000"/>
-                  </a:srgbClr>
-                </a:gs>
-                <a:gs pos="56000">
-                  <a:srgbClr val="00B0F0">
-                    <a:alpha val="0"/>
-                  </a:srgbClr>
-                </a:gs>
-              </a:gsLst>
-              <a:lin ang="6600000" scaled="0"/>
-              <a:tileRect/>
-            </a:gradFill>
-            <a:ln>
-              <a:noFill/>
-            </a:ln>
-          </p:spPr>
-          <p:style>
-            <a:lnRef idx="2">
-              <a:schemeClr val="accent1">
-                <a:shade val="15000"/>
-              </a:schemeClr>
-            </a:lnRef>
-            <a:fillRef idx="1">
-              <a:schemeClr val="accent1"/>
-            </a:fillRef>
-            <a:effectRef idx="0">
-              <a:schemeClr val="accent1"/>
-            </a:effectRef>
-            <a:fontRef idx="minor">
-              <a:schemeClr val="lt1"/>
-            </a:fontRef>
-          </p:style>
-          <p:txBody>
-            <a:bodyPr rtlCol="0" anchor="ctr"/>
-            <a:lstStyle/>
-            <a:p>
-              <a:pPr algn="ctr"/>
-              <a:endParaRPr lang="en-US"/>
-            </a:p>
-          </p:txBody>
-        </p:sp>
-        <p:sp>
-          <p:nvSpPr>
-            <p:cNvPr id="121" name="Freeform: Shape 120">
-              <a:extLst>
-                <a:ext uri="{FF2B5EF4-FFF2-40B4-BE49-F238E27FC236}">
-                  <a16:creationId xmlns:a16="http://schemas.microsoft.com/office/drawing/2014/main" id="{05948047-C4B8-D6B9-DD83-C0F046BCE0AF}"/>
-                </a:ext>
-              </a:extLst>
-            </p:cNvPr>
-            <p:cNvSpPr/>
-            <p:nvPr/>
-          </p:nvSpPr>
-          <p:spPr>
-            <a:xfrm>
-              <a:off x="4599415" y="2714337"/>
-              <a:ext cx="932818" cy="652165"/>
-            </a:xfrm>
-            <a:custGeom>
-              <a:avLst/>
-              <a:gdLst>
-                <a:gd name="csX0" fmla="*/ 0 w 1761688"/>
-                <a:gd name="csY0" fmla="*/ 0 h 1291904"/>
-                <a:gd name="csX1" fmla="*/ 75501 w 1761688"/>
-                <a:gd name="csY1" fmla="*/ 0 h 1291904"/>
-                <a:gd name="csX2" fmla="*/ 1686187 w 1761688"/>
-                <a:gd name="csY2" fmla="*/ 0 h 1291904"/>
-                <a:gd name="csX3" fmla="*/ 1761688 w 1761688"/>
-                <a:gd name="csY3" fmla="*/ 0 h 1291904"/>
-                <a:gd name="csX4" fmla="*/ 1761688 w 1761688"/>
-                <a:gd name="csY4" fmla="*/ 102765 h 1291904"/>
-                <a:gd name="csX5" fmla="*/ 1686187 w 1761688"/>
-                <a:gd name="csY5" fmla="*/ 102765 h 1291904"/>
-                <a:gd name="csX6" fmla="*/ 1686187 w 1761688"/>
-                <a:gd name="csY6" fmla="*/ 1189139 h 1291904"/>
-                <a:gd name="csX7" fmla="*/ 1761688 w 1761688"/>
-                <a:gd name="csY7" fmla="*/ 1189139 h 1291904"/>
-                <a:gd name="csX8" fmla="*/ 1761688 w 1761688"/>
-                <a:gd name="csY8" fmla="*/ 1291904 h 1291904"/>
-                <a:gd name="csX9" fmla="*/ 1686187 w 1761688"/>
-                <a:gd name="csY9" fmla="*/ 1291904 h 1291904"/>
-                <a:gd name="csX10" fmla="*/ 75501 w 1761688"/>
-                <a:gd name="csY10" fmla="*/ 1291904 h 1291904"/>
-                <a:gd name="csX11" fmla="*/ 0 w 1761688"/>
-                <a:gd name="csY11" fmla="*/ 1291904 h 1291904"/>
-                <a:gd name="csX12" fmla="*/ 0 w 1761688"/>
-                <a:gd name="csY12" fmla="*/ 1189139 h 1291904"/>
-                <a:gd name="csX13" fmla="*/ 75501 w 1761688"/>
-                <a:gd name="csY13" fmla="*/ 1189139 h 1291904"/>
-                <a:gd name="csX14" fmla="*/ 75501 w 1761688"/>
-                <a:gd name="csY14" fmla="*/ 102765 h 1291904"/>
-                <a:gd name="csX15" fmla="*/ 0 w 1761688"/>
-                <a:gd name="csY15" fmla="*/ 102765 h 1291904"/>
-              </a:gdLst>
-              <a:ahLst/>
-              <a:cxnLst>
-                <a:cxn ang="0">
-                  <a:pos x="csX0" y="csY0"/>
-                </a:cxn>
-                <a:cxn ang="0">
-                  <a:pos x="csX1" y="csY1"/>
-                </a:cxn>
-                <a:cxn ang="0">
-                  <a:pos x="csX2" y="csY2"/>
-                </a:cxn>
-                <a:cxn ang="0">
-                  <a:pos x="csX3" y="csY3"/>
-                </a:cxn>
-                <a:cxn ang="0">
-                  <a:pos x="csX4" y="csY4"/>
-                </a:cxn>
-                <a:cxn ang="0">
-                  <a:pos x="csX5" y="csY5"/>
-                </a:cxn>
-                <a:cxn ang="0">
-                  <a:pos x="csX6" y="csY6"/>
-                </a:cxn>
-                <a:cxn ang="0">
-                  <a:pos x="csX7" y="csY7"/>
-                </a:cxn>
-                <a:cxn ang="0">
-                  <a:pos x="csX8" y="csY8"/>
-                </a:cxn>
-                <a:cxn ang="0">
-                  <a:pos x="csX9" y="csY9"/>
-                </a:cxn>
-                <a:cxn ang="0">
-                  <a:pos x="csX10" y="csY10"/>
-                </a:cxn>
-                <a:cxn ang="0">
-                  <a:pos x="csX11" y="csY11"/>
-                </a:cxn>
-                <a:cxn ang="0">
-                  <a:pos x="csX12" y="csY12"/>
-                </a:cxn>
-                <a:cxn ang="0">
-                  <a:pos x="csX13" y="csY13"/>
-                </a:cxn>
-                <a:cxn ang="0">
-                  <a:pos x="csX14" y="csY14"/>
-                </a:cxn>
-                <a:cxn ang="0">
-                  <a:pos x="csX15" y="csY15"/>
-                </a:cxn>
-              </a:cxnLst>
-              <a:rect l="l" t="t" r="r" b="b"/>
-              <a:pathLst>
-                <a:path w="1761688" h="1291904">
-                  <a:moveTo>
-                    <a:pt x="0" y="0"/>
-                  </a:moveTo>
-                  <a:lnTo>
-                    <a:pt x="75501" y="0"/>
-                  </a:lnTo>
-                  <a:lnTo>
-                    <a:pt x="1686187" y="0"/>
-                  </a:lnTo>
-                  <a:lnTo>
-                    <a:pt x="1761688" y="0"/>
-                  </a:lnTo>
-                  <a:lnTo>
-                    <a:pt x="1761688" y="102765"/>
-                  </a:lnTo>
-                  <a:lnTo>
-                    <a:pt x="1686187" y="102765"/>
-                  </a:lnTo>
-                  <a:lnTo>
-                    <a:pt x="1686187" y="1189139"/>
-                  </a:lnTo>
-                  <a:lnTo>
-                    <a:pt x="1761688" y="1189139"/>
-                  </a:lnTo>
-                  <a:lnTo>
-                    <a:pt x="1761688" y="1291904"/>
-                  </a:lnTo>
-                  <a:lnTo>
-                    <a:pt x="1686187" y="1291904"/>
-                  </a:lnTo>
-                  <a:lnTo>
-                    <a:pt x="75501" y="1291904"/>
-                  </a:lnTo>
-                  <a:lnTo>
-                    <a:pt x="0" y="1291904"/>
-                  </a:lnTo>
-                  <a:lnTo>
-                    <a:pt x="0" y="1189139"/>
-                  </a:lnTo>
-                  <a:lnTo>
-                    <a:pt x="75501" y="1189139"/>
-                  </a:lnTo>
-                  <a:lnTo>
-                    <a:pt x="75501" y="102765"/>
-                  </a:lnTo>
-                  <a:lnTo>
-                    <a:pt x="0" y="102765"/>
-                  </a:lnTo>
-                  <a:close/>
-                </a:path>
-              </a:pathLst>
-            </a:custGeom>
-            <a:gradFill flip="none" rotWithShape="1">
-              <a:gsLst>
-                <a:gs pos="95000">
-                  <a:srgbClr val="F74B29">
-                    <a:alpha val="25000"/>
-                  </a:srgbClr>
-                </a:gs>
-                <a:gs pos="52000">
-                  <a:srgbClr val="F74B29">
-                    <a:alpha val="0"/>
-                  </a:srgbClr>
-                </a:gs>
-              </a:gsLst>
-              <a:lin ang="6600000" scaled="0"/>
-              <a:tileRect/>
-            </a:gradFill>
-            <a:ln>
-              <a:noFill/>
-            </a:ln>
-          </p:spPr>
-          <p:style>
-            <a:lnRef idx="2">
-              <a:schemeClr val="accent1">
-                <a:shade val="15000"/>
-              </a:schemeClr>
-            </a:lnRef>
-            <a:fillRef idx="1">
-              <a:schemeClr val="accent1"/>
-            </a:fillRef>
-            <a:effectRef idx="0">
-              <a:schemeClr val="accent1"/>
-            </a:effectRef>
-            <a:fontRef idx="minor">
-              <a:schemeClr val="lt1"/>
-            </a:fontRef>
-          </p:style>
-          <p:txBody>
-            <a:bodyPr rtlCol="0" anchor="ctr"/>
-            <a:lstStyle/>
-            <a:p>
-              <a:pPr algn="ctr"/>
-              <a:endParaRPr lang="en-US"/>
-            </a:p>
-          </p:txBody>
-        </p:sp>
-        <p:sp>
-          <p:nvSpPr>
-            <p:cNvPr id="123" name="Freeform: Shape 122">
-              <a:extLst>
-                <a:ext uri="{FF2B5EF4-FFF2-40B4-BE49-F238E27FC236}">
-                  <a16:creationId xmlns:a16="http://schemas.microsoft.com/office/drawing/2014/main" id="{1149BC05-3D9A-33F0-793C-B70D4FABA8CE}"/>
-                </a:ext>
-              </a:extLst>
-            </p:cNvPr>
-            <p:cNvSpPr/>
-            <p:nvPr/>
-          </p:nvSpPr>
-          <p:spPr>
-            <a:xfrm>
-              <a:off x="3492986" y="2714337"/>
-              <a:ext cx="937260" cy="652165"/>
-            </a:xfrm>
-            <a:custGeom>
-              <a:avLst/>
-              <a:gdLst>
-                <a:gd name="csX0" fmla="*/ 0 w 937260"/>
-                <a:gd name="csY0" fmla="*/ 0 h 652165"/>
-                <a:gd name="csX1" fmla="*/ 179 w 937260"/>
-                <a:gd name="csY1" fmla="*/ 0 h 652165"/>
-                <a:gd name="csX2" fmla="*/ 116373 w 937260"/>
-                <a:gd name="csY2" fmla="*/ 31552 h 652165"/>
-                <a:gd name="csX3" fmla="*/ 468630 w 937260"/>
-                <a:gd name="csY3" fmla="*/ 67131 h 652165"/>
-                <a:gd name="csX4" fmla="*/ 820887 w 937260"/>
-                <a:gd name="csY4" fmla="*/ 31552 h 652165"/>
-                <a:gd name="csX5" fmla="*/ 937081 w 937260"/>
-                <a:gd name="csY5" fmla="*/ 0 h 652165"/>
-                <a:gd name="csX6" fmla="*/ 937260 w 937260"/>
-                <a:gd name="csY6" fmla="*/ 0 h 652165"/>
-                <a:gd name="csX7" fmla="*/ 937260 w 937260"/>
-                <a:gd name="csY7" fmla="*/ 652165 h 652165"/>
-                <a:gd name="csX8" fmla="*/ 937078 w 937260"/>
-                <a:gd name="csY8" fmla="*/ 652165 h 652165"/>
-                <a:gd name="csX9" fmla="*/ 820887 w 937260"/>
-                <a:gd name="csY9" fmla="*/ 620614 h 652165"/>
-                <a:gd name="csX10" fmla="*/ 468630 w 937260"/>
-                <a:gd name="csY10" fmla="*/ 585035 h 652165"/>
-                <a:gd name="csX11" fmla="*/ 116373 w 937260"/>
-                <a:gd name="csY11" fmla="*/ 620614 h 652165"/>
-                <a:gd name="csX12" fmla="*/ 183 w 937260"/>
-                <a:gd name="csY12" fmla="*/ 652165 h 652165"/>
-                <a:gd name="csX13" fmla="*/ 0 w 937260"/>
-                <a:gd name="csY13" fmla="*/ 652165 h 652165"/>
-              </a:gdLst>
-              <a:ahLst/>
-              <a:cxnLst>
-                <a:cxn ang="0">
-                  <a:pos x="csX0" y="csY0"/>
-                </a:cxn>
-                <a:cxn ang="0">
-                  <a:pos x="csX1" y="csY1"/>
-                </a:cxn>
-                <a:cxn ang="0">
-                  <a:pos x="csX2" y="csY2"/>
-                </a:cxn>
-                <a:cxn ang="0">
-                  <a:pos x="csX3" y="csY3"/>
-                </a:cxn>
-                <a:cxn ang="0">
-                  <a:pos x="csX4" y="csY4"/>
-                </a:cxn>
-                <a:cxn ang="0">
-                  <a:pos x="csX5" y="csY5"/>
-                </a:cxn>
-                <a:cxn ang="0">
-                  <a:pos x="csX6" y="csY6"/>
-                </a:cxn>
-                <a:cxn ang="0">
-                  <a:pos x="csX7" y="csY7"/>
-                </a:cxn>
-                <a:cxn ang="0">
-                  <a:pos x="csX8" y="csY8"/>
-                </a:cxn>
-                <a:cxn ang="0">
-                  <a:pos x="csX9" y="csY9"/>
-                </a:cxn>
-                <a:cxn ang="0">
-                  <a:pos x="csX10" y="csY10"/>
-                </a:cxn>
-                <a:cxn ang="0">
-                  <a:pos x="csX11" y="csY11"/>
-                </a:cxn>
-                <a:cxn ang="0">
-                  <a:pos x="csX12" y="csY12"/>
-                </a:cxn>
-                <a:cxn ang="0">
-                  <a:pos x="csX13" y="csY13"/>
-                </a:cxn>
-              </a:cxnLst>
-              <a:rect l="l" t="t" r="r" b="b"/>
-              <a:pathLst>
-                <a:path w="937260" h="652165">
-                  <a:moveTo>
-                    <a:pt x="0" y="0"/>
-                  </a:moveTo>
-                  <a:lnTo>
-                    <a:pt x="179" y="0"/>
-                  </a:lnTo>
-                  <a:lnTo>
-                    <a:pt x="116373" y="31552"/>
-                  </a:lnTo>
-                  <a:cubicBezTo>
-                    <a:pt x="224643" y="54462"/>
-                    <a:pt x="343679" y="67131"/>
-                    <a:pt x="468630" y="67131"/>
-                  </a:cubicBezTo>
-                  <a:cubicBezTo>
-                    <a:pt x="593581" y="67131"/>
-                    <a:pt x="712618" y="54462"/>
-                    <a:pt x="820887" y="31552"/>
-                  </a:cubicBezTo>
-                  <a:lnTo>
-                    <a:pt x="937081" y="0"/>
-                  </a:lnTo>
-                  <a:lnTo>
-                    <a:pt x="937260" y="0"/>
-                  </a:lnTo>
-                  <a:lnTo>
-                    <a:pt x="937260" y="652165"/>
-                  </a:lnTo>
-                  <a:lnTo>
-                    <a:pt x="937078" y="652165"/>
-                  </a:lnTo>
-                  <a:lnTo>
-                    <a:pt x="820887" y="620614"/>
-                  </a:lnTo>
-                  <a:cubicBezTo>
-                    <a:pt x="712618" y="597704"/>
-                    <a:pt x="593581" y="585035"/>
-                    <a:pt x="468630" y="585035"/>
-                  </a:cubicBezTo>
-                  <a:cubicBezTo>
-                    <a:pt x="343679" y="585035"/>
-                    <a:pt x="224643" y="597704"/>
-                    <a:pt x="116373" y="620614"/>
-                  </a:cubicBezTo>
-                  <a:lnTo>
-                    <a:pt x="183" y="652165"/>
-                  </a:lnTo>
-                  <a:lnTo>
-                    <a:pt x="0" y="652165"/>
-                  </a:lnTo>
-                  <a:close/>
-                </a:path>
-              </a:pathLst>
-            </a:custGeom>
-            <a:gradFill flip="none" rotWithShape="1">
-              <a:gsLst>
-                <a:gs pos="87000">
-                  <a:srgbClr val="00B0F0">
-                    <a:alpha val="34000"/>
-                  </a:srgbClr>
-                </a:gs>
-                <a:gs pos="56000">
-                  <a:srgbClr val="00B0F0">
-                    <a:alpha val="0"/>
-                  </a:srgbClr>
-                </a:gs>
-              </a:gsLst>
-              <a:lin ang="6600000" scaled="0"/>
-              <a:tileRect/>
-            </a:gradFill>
-            <a:ln>
-              <a:noFill/>
-            </a:ln>
-          </p:spPr>
-          <p:style>
-            <a:lnRef idx="2">
-              <a:schemeClr val="accent1">
-                <a:shade val="15000"/>
-              </a:schemeClr>
-            </a:lnRef>
-            <a:fillRef idx="1">
-              <a:schemeClr val="accent1"/>
-            </a:fillRef>
-            <a:effectRef idx="0">
-              <a:schemeClr val="accent1"/>
-            </a:effectRef>
-            <a:fontRef idx="minor">
-              <a:schemeClr val="lt1"/>
-            </a:fontRef>
-          </p:style>
-          <p:txBody>
-            <a:bodyPr rtlCol="0" anchor="ctr"/>
-            <a:lstStyle/>
-            <a:p>
-              <a:pPr algn="ctr"/>
-              <a:endParaRPr lang="en-US"/>
-            </a:p>
-          </p:txBody>
-        </p:sp>
-        <p:sp>
-          <p:nvSpPr>
-            <p:cNvPr id="125" name="Freeform: Shape 124">
-              <a:extLst>
-                <a:ext uri="{FF2B5EF4-FFF2-40B4-BE49-F238E27FC236}">
-                  <a16:creationId xmlns:a16="http://schemas.microsoft.com/office/drawing/2014/main" id="{2F462E7A-4D7E-FA9D-59EB-E3678288C5BE}"/>
-                </a:ext>
-              </a:extLst>
-            </p:cNvPr>
-            <p:cNvSpPr/>
-            <p:nvPr/>
-          </p:nvSpPr>
-          <p:spPr>
-            <a:xfrm>
-              <a:off x="1279266" y="2714337"/>
-              <a:ext cx="937260" cy="652164"/>
-            </a:xfrm>
-            <a:custGeom>
-              <a:avLst/>
-              <a:gdLst>
-                <a:gd name="csX0" fmla="*/ 885039 w 1770078"/>
-                <a:gd name="csY0" fmla="*/ 0 h 1291903"/>
-                <a:gd name="csX1" fmla="*/ 1752097 w 1770078"/>
-                <a:gd name="csY1" fmla="*/ 364364 h 1291903"/>
-                <a:gd name="csX2" fmla="*/ 1756386 w 1770078"/>
-                <a:gd name="csY2" fmla="*/ 378854 h 1291903"/>
-                <a:gd name="csX3" fmla="*/ 1770078 w 1770078"/>
-                <a:gd name="csY3" fmla="*/ 378854 h 1291903"/>
-                <a:gd name="csX4" fmla="*/ 1770078 w 1770078"/>
-                <a:gd name="csY4" fmla="*/ 456330 h 1291903"/>
-                <a:gd name="csX5" fmla="*/ 1770078 w 1770078"/>
-                <a:gd name="csY5" fmla="*/ 1291903 h 1291903"/>
-                <a:gd name="csX6" fmla="*/ 0 w 1770078"/>
-                <a:gd name="csY6" fmla="*/ 1291903 h 1291903"/>
-                <a:gd name="csX7" fmla="*/ 0 w 1770078"/>
-                <a:gd name="csY7" fmla="*/ 456330 h 1291903"/>
-                <a:gd name="csX8" fmla="*/ 0 w 1770078"/>
-                <a:gd name="csY8" fmla="*/ 378854 h 1291903"/>
-                <a:gd name="csX9" fmla="*/ 13692 w 1770078"/>
-                <a:gd name="csY9" fmla="*/ 378854 h 1291903"/>
-                <a:gd name="csX10" fmla="*/ 17981 w 1770078"/>
-                <a:gd name="csY10" fmla="*/ 364364 h 1291903"/>
-                <a:gd name="csX11" fmla="*/ 885039 w 1770078"/>
-                <a:gd name="csY11" fmla="*/ 0 h 1291903"/>
-                <a:gd name="csX0" fmla="*/ 885039 w 1770078"/>
-                <a:gd name="csY0" fmla="*/ 0 h 1291903"/>
-                <a:gd name="csX1" fmla="*/ 1752097 w 1770078"/>
-                <a:gd name="csY1" fmla="*/ 364364 h 1291903"/>
-                <a:gd name="csX2" fmla="*/ 1756386 w 1770078"/>
-                <a:gd name="csY2" fmla="*/ 378854 h 1291903"/>
-                <a:gd name="csX3" fmla="*/ 1770078 w 1770078"/>
-                <a:gd name="csY3" fmla="*/ 378854 h 1291903"/>
-                <a:gd name="csX4" fmla="*/ 1770078 w 1770078"/>
-                <a:gd name="csY4" fmla="*/ 456330 h 1291903"/>
-                <a:gd name="csX5" fmla="*/ 1770078 w 1770078"/>
-                <a:gd name="csY5" fmla="*/ 1291903 h 1291903"/>
-                <a:gd name="csX6" fmla="*/ 0 w 1770078"/>
-                <a:gd name="csY6" fmla="*/ 1291903 h 1291903"/>
-                <a:gd name="csX7" fmla="*/ 0 w 1770078"/>
-                <a:gd name="csY7" fmla="*/ 456330 h 1291903"/>
-                <a:gd name="csX8" fmla="*/ 13692 w 1770078"/>
-                <a:gd name="csY8" fmla="*/ 378854 h 1291903"/>
-                <a:gd name="csX9" fmla="*/ 17981 w 1770078"/>
-                <a:gd name="csY9" fmla="*/ 364364 h 1291903"/>
-                <a:gd name="csX10" fmla="*/ 885039 w 1770078"/>
-                <a:gd name="csY10" fmla="*/ 0 h 1291903"/>
-                <a:gd name="csX0" fmla="*/ 885039 w 1770078"/>
-                <a:gd name="csY0" fmla="*/ 0 h 1291903"/>
-                <a:gd name="csX1" fmla="*/ 1752097 w 1770078"/>
-                <a:gd name="csY1" fmla="*/ 364364 h 1291903"/>
-                <a:gd name="csX2" fmla="*/ 1756386 w 1770078"/>
-                <a:gd name="csY2" fmla="*/ 378854 h 1291903"/>
-                <a:gd name="csX3" fmla="*/ 1770078 w 1770078"/>
-                <a:gd name="csY3" fmla="*/ 378854 h 1291903"/>
-                <a:gd name="csX4" fmla="*/ 1770078 w 1770078"/>
-                <a:gd name="csY4" fmla="*/ 456330 h 1291903"/>
-                <a:gd name="csX5" fmla="*/ 1770078 w 1770078"/>
-                <a:gd name="csY5" fmla="*/ 1291903 h 1291903"/>
-                <a:gd name="csX6" fmla="*/ 0 w 1770078"/>
-                <a:gd name="csY6" fmla="*/ 1291903 h 1291903"/>
-                <a:gd name="csX7" fmla="*/ 0 w 1770078"/>
-                <a:gd name="csY7" fmla="*/ 456330 h 1291903"/>
-                <a:gd name="csX8" fmla="*/ 17981 w 1770078"/>
-                <a:gd name="csY8" fmla="*/ 364364 h 1291903"/>
-                <a:gd name="csX9" fmla="*/ 885039 w 1770078"/>
-                <a:gd name="csY9" fmla="*/ 0 h 1291903"/>
-                <a:gd name="csX0" fmla="*/ 885039 w 1770078"/>
-                <a:gd name="csY0" fmla="*/ 0 h 1291903"/>
-                <a:gd name="csX1" fmla="*/ 1752097 w 1770078"/>
-                <a:gd name="csY1" fmla="*/ 364364 h 1291903"/>
-                <a:gd name="csX2" fmla="*/ 1756386 w 1770078"/>
-                <a:gd name="csY2" fmla="*/ 378854 h 1291903"/>
-                <a:gd name="csX3" fmla="*/ 1770078 w 1770078"/>
-                <a:gd name="csY3" fmla="*/ 456330 h 1291903"/>
-                <a:gd name="csX4" fmla="*/ 1770078 w 1770078"/>
-                <a:gd name="csY4" fmla="*/ 1291903 h 1291903"/>
-                <a:gd name="csX5" fmla="*/ 0 w 1770078"/>
-                <a:gd name="csY5" fmla="*/ 1291903 h 1291903"/>
-                <a:gd name="csX6" fmla="*/ 0 w 1770078"/>
-                <a:gd name="csY6" fmla="*/ 456330 h 1291903"/>
-                <a:gd name="csX7" fmla="*/ 17981 w 1770078"/>
-                <a:gd name="csY7" fmla="*/ 364364 h 1291903"/>
-                <a:gd name="csX8" fmla="*/ 885039 w 1770078"/>
-                <a:gd name="csY8" fmla="*/ 0 h 1291903"/>
-                <a:gd name="csX0" fmla="*/ 885039 w 1770078"/>
-                <a:gd name="csY0" fmla="*/ 0 h 1291903"/>
-                <a:gd name="csX1" fmla="*/ 1752097 w 1770078"/>
-                <a:gd name="csY1" fmla="*/ 364364 h 1291903"/>
-                <a:gd name="csX2" fmla="*/ 1770078 w 1770078"/>
-                <a:gd name="csY2" fmla="*/ 456330 h 1291903"/>
-                <a:gd name="csX3" fmla="*/ 1770078 w 1770078"/>
-                <a:gd name="csY3" fmla="*/ 1291903 h 1291903"/>
-                <a:gd name="csX4" fmla="*/ 0 w 1770078"/>
-                <a:gd name="csY4" fmla="*/ 1291903 h 1291903"/>
-                <a:gd name="csX5" fmla="*/ 0 w 1770078"/>
-                <a:gd name="csY5" fmla="*/ 456330 h 1291903"/>
-                <a:gd name="csX6" fmla="*/ 17981 w 1770078"/>
-                <a:gd name="csY6" fmla="*/ 364364 h 1291903"/>
-                <a:gd name="csX7" fmla="*/ 885039 w 1770078"/>
-                <a:gd name="csY7" fmla="*/ 0 h 1291903"/>
-              </a:gdLst>
-              <a:ahLst/>
-              <a:cxnLst>
-                <a:cxn ang="0">
-                  <a:pos x="csX0" y="csY0"/>
-                </a:cxn>
-                <a:cxn ang="0">
-                  <a:pos x="csX1" y="csY1"/>
-                </a:cxn>
-                <a:cxn ang="0">
-                  <a:pos x="csX2" y="csY2"/>
-                </a:cxn>
-                <a:cxn ang="0">
-                  <a:pos x="csX3" y="csY3"/>
-                </a:cxn>
-                <a:cxn ang="0">
-                  <a:pos x="csX4" y="csY4"/>
-                </a:cxn>
-                <a:cxn ang="0">
-                  <a:pos x="csX5" y="csY5"/>
-                </a:cxn>
-                <a:cxn ang="0">
-                  <a:pos x="csX6" y="csY6"/>
-                </a:cxn>
-                <a:cxn ang="0">
-                  <a:pos x="csX7" y="csY7"/>
-                </a:cxn>
-              </a:cxnLst>
-              <a:rect l="l" t="t" r="r" b="b"/>
-              <a:pathLst>
-                <a:path w="1770078" h="1291903">
-                  <a:moveTo>
-                    <a:pt x="885039" y="0"/>
-                  </a:moveTo>
-                  <a:cubicBezTo>
-                    <a:pt x="1312734" y="0"/>
-                    <a:pt x="1669571" y="156422"/>
-                    <a:pt x="1752097" y="364364"/>
-                  </a:cubicBezTo>
-                  <a:lnTo>
-                    <a:pt x="1770078" y="456330"/>
-                  </a:lnTo>
-                  <a:lnTo>
-                    <a:pt x="1770078" y="1291903"/>
-                  </a:lnTo>
-                  <a:lnTo>
-                    <a:pt x="0" y="1291903"/>
-                  </a:lnTo>
-                  <a:lnTo>
-                    <a:pt x="0" y="456330"/>
-                  </a:lnTo>
-                  <a:lnTo>
-                    <a:pt x="17981" y="364364"/>
-                  </a:lnTo>
-                  <a:cubicBezTo>
-                    <a:pt x="100507" y="156422"/>
-                    <a:pt x="457344" y="0"/>
-                    <a:pt x="885039" y="0"/>
-                  </a:cubicBezTo>
-                  <a:close/>
-                </a:path>
-              </a:pathLst>
-            </a:custGeom>
-            <a:gradFill flip="none" rotWithShape="1">
-              <a:gsLst>
-                <a:gs pos="100000">
-                  <a:srgbClr val="00B050">
-                    <a:alpha val="67000"/>
-                  </a:srgbClr>
-                </a:gs>
-                <a:gs pos="73000">
-                  <a:srgbClr val="00B050">
-                    <a:alpha val="0"/>
-                  </a:srgbClr>
-                </a:gs>
-              </a:gsLst>
-              <a:lin ang="8400000" scaled="0"/>
-              <a:tileRect/>
-            </a:gradFill>
-            <a:ln>
-              <a:noFill/>
-            </a:ln>
-          </p:spPr>
-          <p:style>
-            <a:lnRef idx="2">
-              <a:schemeClr val="accent1">
-                <a:shade val="15000"/>
-              </a:schemeClr>
-            </a:lnRef>
-            <a:fillRef idx="1">
-              <a:schemeClr val="accent1"/>
-            </a:fillRef>
-            <a:effectRef idx="0">
-              <a:schemeClr val="accent1"/>
-            </a:effectRef>
-            <a:fontRef idx="minor">
-              <a:schemeClr val="lt1"/>
-            </a:fontRef>
-          </p:style>
-          <p:txBody>
-            <a:bodyPr rtlCol="0" anchor="ctr"/>
-            <a:lstStyle/>
-            <a:p>
-              <a:pPr algn="ctr"/>
-              <a:endParaRPr lang="en-US"/>
-            </a:p>
-          </p:txBody>
-        </p:sp>
-        <p:sp>
-          <p:nvSpPr>
-            <p:cNvPr id="126" name="Freeform: Shape 125">
-              <a:extLst>
-                <a:ext uri="{FF2B5EF4-FFF2-40B4-BE49-F238E27FC236}">
-                  <a16:creationId xmlns:a16="http://schemas.microsoft.com/office/drawing/2014/main" id="{D5CD0701-60E1-9FE1-480F-EE450A4A51A9}"/>
-                </a:ext>
-              </a:extLst>
-            </p:cNvPr>
-            <p:cNvSpPr/>
-            <p:nvPr/>
-          </p:nvSpPr>
-          <p:spPr>
-            <a:xfrm rot="16200000" flipH="1">
-              <a:off x="2528674" y="2571790"/>
-              <a:ext cx="652164" cy="937260"/>
-            </a:xfrm>
-            <a:custGeom>
-              <a:avLst/>
-              <a:gdLst>
-                <a:gd name="csX0" fmla="*/ 0 w 1291905"/>
-                <a:gd name="csY0" fmla="*/ 0 h 1770078"/>
-                <a:gd name="csX1" fmla="*/ 0 w 1291905"/>
-                <a:gd name="csY1" fmla="*/ 478173 h 1770078"/>
-                <a:gd name="csX2" fmla="*/ 0 w 1291905"/>
-                <a:gd name="csY2" fmla="*/ 1291905 h 1770078"/>
-                <a:gd name="csX3" fmla="*/ 0 w 1291905"/>
-                <a:gd name="csY3" fmla="*/ 1770078 h 1770078"/>
-                <a:gd name="csX4" fmla="*/ 6123 w 1291905"/>
-                <a:gd name="csY4" fmla="*/ 1770078 h 1770078"/>
-                <a:gd name="csX5" fmla="*/ 109381 w 1291905"/>
-                <a:gd name="csY5" fmla="*/ 1658008 h 1770078"/>
-                <a:gd name="csX6" fmla="*/ 212639 w 1291905"/>
-                <a:gd name="csY6" fmla="*/ 1770078 h 1770078"/>
-                <a:gd name="csX7" fmla="*/ 221976 w 1291905"/>
-                <a:gd name="csY7" fmla="*/ 1770078 h 1770078"/>
-                <a:gd name="csX8" fmla="*/ 325234 w 1291905"/>
-                <a:gd name="csY8" fmla="*/ 1658008 h 1770078"/>
-                <a:gd name="csX9" fmla="*/ 428492 w 1291905"/>
-                <a:gd name="csY9" fmla="*/ 1770078 h 1770078"/>
-                <a:gd name="csX10" fmla="*/ 437829 w 1291905"/>
-                <a:gd name="csY10" fmla="*/ 1770078 h 1770078"/>
-                <a:gd name="csX11" fmla="*/ 541087 w 1291905"/>
-                <a:gd name="csY11" fmla="*/ 1658008 h 1770078"/>
-                <a:gd name="csX12" fmla="*/ 644346 w 1291905"/>
-                <a:gd name="csY12" fmla="*/ 1770078 h 1770078"/>
-                <a:gd name="csX13" fmla="*/ 653683 w 1291905"/>
-                <a:gd name="csY13" fmla="*/ 1770078 h 1770078"/>
-                <a:gd name="csX14" fmla="*/ 756941 w 1291905"/>
-                <a:gd name="csY14" fmla="*/ 1658008 h 1770078"/>
-                <a:gd name="csX15" fmla="*/ 860199 w 1291905"/>
-                <a:gd name="csY15" fmla="*/ 1770078 h 1770078"/>
-                <a:gd name="csX16" fmla="*/ 869536 w 1291905"/>
-                <a:gd name="csY16" fmla="*/ 1770078 h 1770078"/>
-                <a:gd name="csX17" fmla="*/ 972794 w 1291905"/>
-                <a:gd name="csY17" fmla="*/ 1658008 h 1770078"/>
-                <a:gd name="csX18" fmla="*/ 1076052 w 1291905"/>
-                <a:gd name="csY18" fmla="*/ 1770078 h 1770078"/>
-                <a:gd name="csX19" fmla="*/ 1085389 w 1291905"/>
-                <a:gd name="csY19" fmla="*/ 1770078 h 1770078"/>
-                <a:gd name="csX20" fmla="*/ 1188647 w 1291905"/>
-                <a:gd name="csY20" fmla="*/ 1658008 h 1770078"/>
-                <a:gd name="csX21" fmla="*/ 1291905 w 1291905"/>
-                <a:gd name="csY21" fmla="*/ 1770078 h 1770078"/>
-                <a:gd name="csX22" fmla="*/ 1291905 w 1291905"/>
-                <a:gd name="csY22" fmla="*/ 1291905 h 1770078"/>
-                <a:gd name="csX23" fmla="*/ 1291905 w 1291905"/>
-                <a:gd name="csY23" fmla="*/ 478173 h 1770078"/>
-                <a:gd name="csX24" fmla="*/ 1291905 w 1291905"/>
-                <a:gd name="csY24" fmla="*/ 0 h 1770078"/>
-                <a:gd name="csX25" fmla="*/ 1188647 w 1291905"/>
-                <a:gd name="csY25" fmla="*/ 112070 h 1770078"/>
-                <a:gd name="csX26" fmla="*/ 1085389 w 1291905"/>
-                <a:gd name="csY26" fmla="*/ 0 h 1770078"/>
-                <a:gd name="csX27" fmla="*/ 1076052 w 1291905"/>
-                <a:gd name="csY27" fmla="*/ 0 h 1770078"/>
-                <a:gd name="csX28" fmla="*/ 972794 w 1291905"/>
-                <a:gd name="csY28" fmla="*/ 112070 h 1770078"/>
-                <a:gd name="csX29" fmla="*/ 869536 w 1291905"/>
-                <a:gd name="csY29" fmla="*/ 0 h 1770078"/>
-                <a:gd name="csX30" fmla="*/ 860199 w 1291905"/>
-                <a:gd name="csY30" fmla="*/ 0 h 1770078"/>
-                <a:gd name="csX31" fmla="*/ 756941 w 1291905"/>
-                <a:gd name="csY31" fmla="*/ 112070 h 1770078"/>
-                <a:gd name="csX32" fmla="*/ 653683 w 1291905"/>
-                <a:gd name="csY32" fmla="*/ 0 h 1770078"/>
-                <a:gd name="csX33" fmla="*/ 644346 w 1291905"/>
-                <a:gd name="csY33" fmla="*/ 0 h 1770078"/>
-                <a:gd name="csX34" fmla="*/ 541087 w 1291905"/>
-                <a:gd name="csY34" fmla="*/ 112070 h 1770078"/>
-                <a:gd name="csX35" fmla="*/ 437829 w 1291905"/>
-                <a:gd name="csY35" fmla="*/ 0 h 1770078"/>
-                <a:gd name="csX36" fmla="*/ 428492 w 1291905"/>
-                <a:gd name="csY36" fmla="*/ 0 h 1770078"/>
-                <a:gd name="csX37" fmla="*/ 325234 w 1291905"/>
-                <a:gd name="csY37" fmla="*/ 112070 h 1770078"/>
-                <a:gd name="csX38" fmla="*/ 221976 w 1291905"/>
-                <a:gd name="csY38" fmla="*/ 0 h 1770078"/>
-                <a:gd name="csX39" fmla="*/ 212639 w 1291905"/>
-                <a:gd name="csY39" fmla="*/ 0 h 1770078"/>
-                <a:gd name="csX40" fmla="*/ 109381 w 1291905"/>
-                <a:gd name="csY40" fmla="*/ 112070 h 1770078"/>
-                <a:gd name="csX41" fmla="*/ 6123 w 1291905"/>
-                <a:gd name="csY41" fmla="*/ 0 h 1770078"/>
-              </a:gdLst>
-              <a:ahLst/>
-              <a:cxnLst>
-                <a:cxn ang="0">
-                  <a:pos x="csX0" y="csY0"/>
-                </a:cxn>
-                <a:cxn ang="0">
-                  <a:pos x="csX1" y="csY1"/>
-                </a:cxn>
-                <a:cxn ang="0">
-                  <a:pos x="csX2" y="csY2"/>
-                </a:cxn>
-                <a:cxn ang="0">
-                  <a:pos x="csX3" y="csY3"/>
-                </a:cxn>
-                <a:cxn ang="0">
-                  <a:pos x="csX4" y="csY4"/>
-                </a:cxn>
-                <a:cxn ang="0">
-                  <a:pos x="csX5" y="csY5"/>
-                </a:cxn>
-                <a:cxn ang="0">
-                  <a:pos x="csX6" y="csY6"/>
-                </a:cxn>
-                <a:cxn ang="0">
-                  <a:pos x="csX7" y="csY7"/>
-                </a:cxn>
-                <a:cxn ang="0">
-                  <a:pos x="csX8" y="csY8"/>
-                </a:cxn>
-                <a:cxn ang="0">
-                  <a:pos x="csX9" y="csY9"/>
-                </a:cxn>
-                <a:cxn ang="0">
-                  <a:pos x="csX10" y="csY10"/>
-                </a:cxn>
-                <a:cxn ang="0">
-                  <a:pos x="csX11" y="csY11"/>
-                </a:cxn>
-                <a:cxn ang="0">
-                  <a:pos x="csX12" y="csY12"/>
-                </a:cxn>
-                <a:cxn ang="0">
-                  <a:pos x="csX13" y="csY13"/>
-                </a:cxn>
-                <a:cxn ang="0">
-                  <a:pos x="csX14" y="csY14"/>
-                </a:cxn>
-                <a:cxn ang="0">
-                  <a:pos x="csX15" y="csY15"/>
-                </a:cxn>
-                <a:cxn ang="0">
-                  <a:pos x="csX16" y="csY16"/>
-                </a:cxn>
-                <a:cxn ang="0">
-                  <a:pos x="csX17" y="csY17"/>
-                </a:cxn>
-                <a:cxn ang="0">
-                  <a:pos x="csX18" y="csY18"/>
-                </a:cxn>
-                <a:cxn ang="0">
-                  <a:pos x="csX19" y="csY19"/>
-                </a:cxn>
-                <a:cxn ang="0">
-                  <a:pos x="csX20" y="csY20"/>
-                </a:cxn>
-                <a:cxn ang="0">
-                  <a:pos x="csX21" y="csY21"/>
-                </a:cxn>
-                <a:cxn ang="0">
-                  <a:pos x="csX22" y="csY22"/>
-                </a:cxn>
-                <a:cxn ang="0">
-                  <a:pos x="csX23" y="csY23"/>
-                </a:cxn>
-                <a:cxn ang="0">
-                  <a:pos x="csX24" y="csY24"/>
-                </a:cxn>
-                <a:cxn ang="0">
-                  <a:pos x="csX25" y="csY25"/>
-                </a:cxn>
-                <a:cxn ang="0">
-                  <a:pos x="csX26" y="csY26"/>
-                </a:cxn>
-                <a:cxn ang="0">
-                  <a:pos x="csX27" y="csY27"/>
-                </a:cxn>
-                <a:cxn ang="0">
-                  <a:pos x="csX28" y="csY28"/>
-                </a:cxn>
-                <a:cxn ang="0">
-                  <a:pos x="csX29" y="csY29"/>
-                </a:cxn>
-                <a:cxn ang="0">
-                  <a:pos x="csX30" y="csY30"/>
-                </a:cxn>
-                <a:cxn ang="0">
-                  <a:pos x="csX31" y="csY31"/>
-                </a:cxn>
-                <a:cxn ang="0">
-                  <a:pos x="csX32" y="csY32"/>
-                </a:cxn>
-                <a:cxn ang="0">
-                  <a:pos x="csX33" y="csY33"/>
-                </a:cxn>
-                <a:cxn ang="0">
-                  <a:pos x="csX34" y="csY34"/>
-                </a:cxn>
-                <a:cxn ang="0">
-                  <a:pos x="csX35" y="csY35"/>
-                </a:cxn>
-                <a:cxn ang="0">
-                  <a:pos x="csX36" y="csY36"/>
-                </a:cxn>
-                <a:cxn ang="0">
-                  <a:pos x="csX37" y="csY37"/>
-                </a:cxn>
-                <a:cxn ang="0">
-                  <a:pos x="csX38" y="csY38"/>
-                </a:cxn>
-                <a:cxn ang="0">
-                  <a:pos x="csX39" y="csY39"/>
-                </a:cxn>
-                <a:cxn ang="0">
-                  <a:pos x="csX40" y="csY40"/>
-                </a:cxn>
-                <a:cxn ang="0">
-                  <a:pos x="csX41" y="csY41"/>
-                </a:cxn>
-              </a:cxnLst>
-              <a:rect l="l" t="t" r="r" b="b"/>
-              <a:pathLst>
-                <a:path w="1291905" h="1770078">
-                  <a:moveTo>
-                    <a:pt x="0" y="0"/>
-                  </a:moveTo>
-                  <a:lnTo>
-                    <a:pt x="0" y="478173"/>
-                  </a:lnTo>
-                  <a:lnTo>
-                    <a:pt x="0" y="1291905"/>
-                  </a:lnTo>
-                  <a:lnTo>
-                    <a:pt x="0" y="1770078"/>
-                  </a:lnTo>
-                  <a:lnTo>
-                    <a:pt x="6123" y="1770078"/>
-                  </a:lnTo>
-                  <a:lnTo>
-                    <a:pt x="109381" y="1658008"/>
-                  </a:lnTo>
-                  <a:lnTo>
-                    <a:pt x="212639" y="1770078"/>
-                  </a:lnTo>
-                  <a:lnTo>
-                    <a:pt x="221976" y="1770078"/>
-                  </a:lnTo>
-                  <a:lnTo>
-                    <a:pt x="325234" y="1658008"/>
-                  </a:lnTo>
-                  <a:lnTo>
-                    <a:pt x="428492" y="1770078"/>
-                  </a:lnTo>
-                  <a:lnTo>
-                    <a:pt x="437829" y="1770078"/>
-                  </a:lnTo>
-                  <a:lnTo>
-                    <a:pt x="541087" y="1658008"/>
-                  </a:lnTo>
-                  <a:lnTo>
-                    <a:pt x="644346" y="1770078"/>
-                  </a:lnTo>
-                  <a:lnTo>
-                    <a:pt x="653683" y="1770078"/>
-                  </a:lnTo>
-                  <a:lnTo>
-                    <a:pt x="756941" y="1658008"/>
-                  </a:lnTo>
-                  <a:lnTo>
-                    <a:pt x="860199" y="1770078"/>
-                  </a:lnTo>
-                  <a:lnTo>
-                    <a:pt x="869536" y="1770078"/>
-                  </a:lnTo>
-                  <a:lnTo>
-                    <a:pt x="972794" y="1658008"/>
-                  </a:lnTo>
-                  <a:lnTo>
-                    <a:pt x="1076052" y="1770078"/>
-                  </a:lnTo>
-                  <a:lnTo>
-                    <a:pt x="1085389" y="1770078"/>
-                  </a:lnTo>
-                  <a:lnTo>
-                    <a:pt x="1188647" y="1658008"/>
-                  </a:lnTo>
-                  <a:lnTo>
-                    <a:pt x="1291905" y="1770078"/>
-                  </a:lnTo>
-                  <a:lnTo>
-                    <a:pt x="1291905" y="1291905"/>
-                  </a:lnTo>
-                  <a:lnTo>
-                    <a:pt x="1291905" y="478173"/>
-                  </a:lnTo>
-                  <a:lnTo>
-                    <a:pt x="1291905" y="0"/>
-                  </a:lnTo>
-                  <a:lnTo>
-                    <a:pt x="1188647" y="112070"/>
-                  </a:lnTo>
-                  <a:lnTo>
-                    <a:pt x="1085389" y="0"/>
-                  </a:lnTo>
-                  <a:lnTo>
-                    <a:pt x="1076052" y="0"/>
-                  </a:lnTo>
-                  <a:lnTo>
-                    <a:pt x="972794" y="112070"/>
-                  </a:lnTo>
-                  <a:lnTo>
-                    <a:pt x="869536" y="0"/>
-                  </a:lnTo>
-                  <a:lnTo>
-                    <a:pt x="860199" y="0"/>
-                  </a:lnTo>
-                  <a:lnTo>
-                    <a:pt x="756941" y="112070"/>
-                  </a:lnTo>
-                  <a:lnTo>
-                    <a:pt x="653683" y="0"/>
-                  </a:lnTo>
-                  <a:lnTo>
-                    <a:pt x="644346" y="0"/>
-                  </a:lnTo>
-                  <a:lnTo>
-                    <a:pt x="541087" y="112070"/>
-                  </a:lnTo>
-                  <a:lnTo>
-                    <a:pt x="437829" y="0"/>
-                  </a:lnTo>
-                  <a:lnTo>
-                    <a:pt x="428492" y="0"/>
-                  </a:lnTo>
-                  <a:lnTo>
-                    <a:pt x="325234" y="112070"/>
-                  </a:lnTo>
-                  <a:lnTo>
-                    <a:pt x="221976" y="0"/>
-                  </a:lnTo>
-                  <a:lnTo>
-                    <a:pt x="212639" y="0"/>
-                  </a:lnTo>
-                  <a:lnTo>
-                    <a:pt x="109381" y="112070"/>
-                  </a:lnTo>
-                  <a:lnTo>
-                    <a:pt x="6123" y="0"/>
-                  </a:lnTo>
-                  <a:close/>
-                </a:path>
-              </a:pathLst>
-            </a:custGeom>
-            <a:gradFill flip="none" rotWithShape="1">
-              <a:gsLst>
-                <a:gs pos="100000">
-                  <a:srgbClr val="FBA305">
-                    <a:alpha val="67000"/>
-                  </a:srgbClr>
-                </a:gs>
-                <a:gs pos="56000">
-                  <a:srgbClr val="FFC000">
-                    <a:alpha val="0"/>
-                  </a:srgbClr>
-                </a:gs>
-              </a:gsLst>
-              <a:lin ang="20400000" scaled="0"/>
-              <a:tileRect/>
-            </a:gradFill>
-            <a:ln>
-              <a:noFill/>
-            </a:ln>
-          </p:spPr>
-          <p:style>
-            <a:lnRef idx="2">
-              <a:schemeClr val="accent1">
-                <a:shade val="15000"/>
-              </a:schemeClr>
-            </a:lnRef>
-            <a:fillRef idx="1">
-              <a:schemeClr val="accent1"/>
-            </a:fillRef>
-            <a:effectRef idx="0">
-              <a:schemeClr val="accent1"/>
-            </a:effectRef>
-            <a:fontRef idx="minor">
-              <a:schemeClr val="lt1"/>
-            </a:fontRef>
-          </p:style>
-          <p:txBody>
-            <a:bodyPr rtlCol="0" anchor="ctr"/>
-            <a:lstStyle/>
-            <a:p>
-              <a:pPr algn="ctr"/>
-              <a:endParaRPr lang="en-US"/>
-            </a:p>
-          </p:txBody>
-        </p:sp>
-      </p:grpSp>
+          <a:prstGeom prst="roundRect">
+            <a:avLst/>
+          </a:prstGeom>
+          <a:gradFill flip="none" rotWithShape="1">
+            <a:gsLst>
+              <a:gs pos="100000">
+                <a:srgbClr val="00B0F0">
+                  <a:alpha val="34000"/>
+                </a:srgbClr>
+              </a:gs>
+              <a:gs pos="56000">
+                <a:srgbClr val="00B0F0">
+                  <a:alpha val="0"/>
+                </a:srgbClr>
+              </a:gs>
+            </a:gsLst>
+            <a:lin ang="6600000" scaled="0"/>
+            <a:tileRect/>
+          </a:gradFill>
+          <a:ln>
+            <a:noFill/>
+          </a:ln>
+        </p:spPr>
+        <p:style>
+          <a:lnRef idx="2">
+            <a:schemeClr val="accent1">
+              <a:shade val="15000"/>
+            </a:schemeClr>
+          </a:lnRef>
+          <a:fillRef idx="1">
+            <a:schemeClr val="accent1"/>
+          </a:fillRef>
+          <a:effectRef idx="0">
+            <a:schemeClr val="accent1"/>
+          </a:effectRef>
+          <a:fontRef idx="minor">
+            <a:schemeClr val="lt1"/>
+          </a:fontRef>
+        </p:style>
+        <p:txBody>
+          <a:bodyPr rtlCol="0" anchor="ctr"/>
+          <a:lstStyle/>
+          <a:p>
+            <a:pPr algn="ctr"/>
+            <a:endParaRPr lang="en-US"/>
+          </a:p>
+        </p:txBody>
+      </p:sp>
+      <p:sp>
+        <p:nvSpPr>
+          <p:cNvPr id="121" name="Freeform: Shape 120">
+            <a:extLst>
+              <a:ext uri="{FF2B5EF4-FFF2-40B4-BE49-F238E27FC236}">
+                <a16:creationId xmlns:a16="http://schemas.microsoft.com/office/drawing/2014/main" id="{05948047-C4B8-D6B9-DD83-C0F046BCE0AF}"/>
+              </a:ext>
+            </a:extLst>
+          </p:cNvPr>
+          <p:cNvSpPr/>
+          <p:nvPr/>
+        </p:nvSpPr>
+        <p:spPr>
+          <a:xfrm>
+            <a:off x="7843312" y="2628612"/>
+            <a:ext cx="932818" cy="652165"/>
+          </a:xfrm>
+          <a:custGeom>
+            <a:avLst/>
+            <a:gdLst>
+              <a:gd name="csX0" fmla="*/ 0 w 1761688"/>
+              <a:gd name="csY0" fmla="*/ 0 h 1291904"/>
+              <a:gd name="csX1" fmla="*/ 75501 w 1761688"/>
+              <a:gd name="csY1" fmla="*/ 0 h 1291904"/>
+              <a:gd name="csX2" fmla="*/ 1686187 w 1761688"/>
+              <a:gd name="csY2" fmla="*/ 0 h 1291904"/>
+              <a:gd name="csX3" fmla="*/ 1761688 w 1761688"/>
+              <a:gd name="csY3" fmla="*/ 0 h 1291904"/>
+              <a:gd name="csX4" fmla="*/ 1761688 w 1761688"/>
+              <a:gd name="csY4" fmla="*/ 102765 h 1291904"/>
+              <a:gd name="csX5" fmla="*/ 1686187 w 1761688"/>
+              <a:gd name="csY5" fmla="*/ 102765 h 1291904"/>
+              <a:gd name="csX6" fmla="*/ 1686187 w 1761688"/>
+              <a:gd name="csY6" fmla="*/ 1189139 h 1291904"/>
+              <a:gd name="csX7" fmla="*/ 1761688 w 1761688"/>
+              <a:gd name="csY7" fmla="*/ 1189139 h 1291904"/>
+              <a:gd name="csX8" fmla="*/ 1761688 w 1761688"/>
+              <a:gd name="csY8" fmla="*/ 1291904 h 1291904"/>
+              <a:gd name="csX9" fmla="*/ 1686187 w 1761688"/>
+              <a:gd name="csY9" fmla="*/ 1291904 h 1291904"/>
+              <a:gd name="csX10" fmla="*/ 75501 w 1761688"/>
+              <a:gd name="csY10" fmla="*/ 1291904 h 1291904"/>
+              <a:gd name="csX11" fmla="*/ 0 w 1761688"/>
+              <a:gd name="csY11" fmla="*/ 1291904 h 1291904"/>
+              <a:gd name="csX12" fmla="*/ 0 w 1761688"/>
+              <a:gd name="csY12" fmla="*/ 1189139 h 1291904"/>
+              <a:gd name="csX13" fmla="*/ 75501 w 1761688"/>
+              <a:gd name="csY13" fmla="*/ 1189139 h 1291904"/>
+              <a:gd name="csX14" fmla="*/ 75501 w 1761688"/>
+              <a:gd name="csY14" fmla="*/ 102765 h 1291904"/>
+              <a:gd name="csX15" fmla="*/ 0 w 1761688"/>
+              <a:gd name="csY15" fmla="*/ 102765 h 1291904"/>
+            </a:gdLst>
+            <a:ahLst/>
+            <a:cxnLst>
+              <a:cxn ang="0">
+                <a:pos x="csX0" y="csY0"/>
+              </a:cxn>
+              <a:cxn ang="0">
+                <a:pos x="csX1" y="csY1"/>
+              </a:cxn>
+              <a:cxn ang="0">
+                <a:pos x="csX2" y="csY2"/>
+              </a:cxn>
+              <a:cxn ang="0">
+                <a:pos x="csX3" y="csY3"/>
+              </a:cxn>
+              <a:cxn ang="0">
+                <a:pos x="csX4" y="csY4"/>
+              </a:cxn>
+              <a:cxn ang="0">
+                <a:pos x="csX5" y="csY5"/>
+              </a:cxn>
+              <a:cxn ang="0">
+                <a:pos x="csX6" y="csY6"/>
+              </a:cxn>
+              <a:cxn ang="0">
+                <a:pos x="csX7" y="csY7"/>
+              </a:cxn>
+              <a:cxn ang="0">
+                <a:pos x="csX8" y="csY8"/>
+              </a:cxn>
+              <a:cxn ang="0">
+                <a:pos x="csX9" y="csY9"/>
+              </a:cxn>
+              <a:cxn ang="0">
+                <a:pos x="csX10" y="csY10"/>
+              </a:cxn>
+              <a:cxn ang="0">
+                <a:pos x="csX11" y="csY11"/>
+              </a:cxn>
+              <a:cxn ang="0">
+                <a:pos x="csX12" y="csY12"/>
+              </a:cxn>
+              <a:cxn ang="0">
+                <a:pos x="csX13" y="csY13"/>
+              </a:cxn>
+              <a:cxn ang="0">
+                <a:pos x="csX14" y="csY14"/>
+              </a:cxn>
+              <a:cxn ang="0">
+                <a:pos x="csX15" y="csY15"/>
+              </a:cxn>
+            </a:cxnLst>
+            <a:rect l="l" t="t" r="r" b="b"/>
+            <a:pathLst>
+              <a:path w="1761688" h="1291904">
+                <a:moveTo>
+                  <a:pt x="0" y="0"/>
+                </a:moveTo>
+                <a:lnTo>
+                  <a:pt x="75501" y="0"/>
+                </a:lnTo>
+                <a:lnTo>
+                  <a:pt x="1686187" y="0"/>
+                </a:lnTo>
+                <a:lnTo>
+                  <a:pt x="1761688" y="0"/>
+                </a:lnTo>
+                <a:lnTo>
+                  <a:pt x="1761688" y="102765"/>
+                </a:lnTo>
+                <a:lnTo>
+                  <a:pt x="1686187" y="102765"/>
+                </a:lnTo>
+                <a:lnTo>
+                  <a:pt x="1686187" y="1189139"/>
+                </a:lnTo>
+                <a:lnTo>
+                  <a:pt x="1761688" y="1189139"/>
+                </a:lnTo>
+                <a:lnTo>
+                  <a:pt x="1761688" y="1291904"/>
+                </a:lnTo>
+                <a:lnTo>
+                  <a:pt x="1686187" y="1291904"/>
+                </a:lnTo>
+                <a:lnTo>
+                  <a:pt x="75501" y="1291904"/>
+                </a:lnTo>
+                <a:lnTo>
+                  <a:pt x="0" y="1291904"/>
+                </a:lnTo>
+                <a:lnTo>
+                  <a:pt x="0" y="1189139"/>
+                </a:lnTo>
+                <a:lnTo>
+                  <a:pt x="75501" y="1189139"/>
+                </a:lnTo>
+                <a:lnTo>
+                  <a:pt x="75501" y="102765"/>
+                </a:lnTo>
+                <a:lnTo>
+                  <a:pt x="0" y="102765"/>
+                </a:lnTo>
+                <a:close/>
+              </a:path>
+            </a:pathLst>
+          </a:custGeom>
+          <a:gradFill flip="none" rotWithShape="1">
+            <a:gsLst>
+              <a:gs pos="95000">
+                <a:srgbClr val="F74B29">
+                  <a:alpha val="25000"/>
+                </a:srgbClr>
+              </a:gs>
+              <a:gs pos="52000">
+                <a:srgbClr val="F74B29">
+                  <a:alpha val="0"/>
+                </a:srgbClr>
+              </a:gs>
+            </a:gsLst>
+            <a:lin ang="6600000" scaled="0"/>
+            <a:tileRect/>
+          </a:gradFill>
+          <a:ln>
+            <a:noFill/>
+          </a:ln>
+        </p:spPr>
+        <p:style>
+          <a:lnRef idx="2">
+            <a:schemeClr val="accent1">
+              <a:shade val="15000"/>
+            </a:schemeClr>
+          </a:lnRef>
+          <a:fillRef idx="1">
+            <a:schemeClr val="accent1"/>
+          </a:fillRef>
+          <a:effectRef idx="0">
+            <a:schemeClr val="accent1"/>
+          </a:effectRef>
+          <a:fontRef idx="minor">
+            <a:schemeClr val="lt1"/>
+          </a:fontRef>
+        </p:style>
+        <p:txBody>
+          <a:bodyPr rtlCol="0" anchor="ctr"/>
+          <a:lstStyle/>
+          <a:p>
+            <a:pPr algn="ctr"/>
+            <a:endParaRPr lang="en-US"/>
+          </a:p>
+        </p:txBody>
+      </p:sp>
+      <p:sp>
+        <p:nvSpPr>
+          <p:cNvPr id="123" name="Freeform: Shape 122">
+            <a:extLst>
+              <a:ext uri="{FF2B5EF4-FFF2-40B4-BE49-F238E27FC236}">
+                <a16:creationId xmlns:a16="http://schemas.microsoft.com/office/drawing/2014/main" id="{1149BC05-3D9A-33F0-793C-B70D4FABA8CE}"/>
+              </a:ext>
+            </a:extLst>
+          </p:cNvPr>
+          <p:cNvSpPr/>
+          <p:nvPr/>
+        </p:nvSpPr>
+        <p:spPr>
+          <a:xfrm>
+            <a:off x="6736883" y="2628612"/>
+            <a:ext cx="937260" cy="652165"/>
+          </a:xfrm>
+          <a:custGeom>
+            <a:avLst/>
+            <a:gdLst>
+              <a:gd name="csX0" fmla="*/ 0 w 937260"/>
+              <a:gd name="csY0" fmla="*/ 0 h 652165"/>
+              <a:gd name="csX1" fmla="*/ 179 w 937260"/>
+              <a:gd name="csY1" fmla="*/ 0 h 652165"/>
+              <a:gd name="csX2" fmla="*/ 116373 w 937260"/>
+              <a:gd name="csY2" fmla="*/ 31552 h 652165"/>
+              <a:gd name="csX3" fmla="*/ 468630 w 937260"/>
+              <a:gd name="csY3" fmla="*/ 67131 h 652165"/>
+              <a:gd name="csX4" fmla="*/ 820887 w 937260"/>
+              <a:gd name="csY4" fmla="*/ 31552 h 652165"/>
+              <a:gd name="csX5" fmla="*/ 937081 w 937260"/>
+              <a:gd name="csY5" fmla="*/ 0 h 652165"/>
+              <a:gd name="csX6" fmla="*/ 937260 w 937260"/>
+              <a:gd name="csY6" fmla="*/ 0 h 652165"/>
+              <a:gd name="csX7" fmla="*/ 937260 w 937260"/>
+              <a:gd name="csY7" fmla="*/ 652165 h 652165"/>
+              <a:gd name="csX8" fmla="*/ 937078 w 937260"/>
+              <a:gd name="csY8" fmla="*/ 652165 h 652165"/>
+              <a:gd name="csX9" fmla="*/ 820887 w 937260"/>
+              <a:gd name="csY9" fmla="*/ 620614 h 652165"/>
+              <a:gd name="csX10" fmla="*/ 468630 w 937260"/>
+              <a:gd name="csY10" fmla="*/ 585035 h 652165"/>
+              <a:gd name="csX11" fmla="*/ 116373 w 937260"/>
+              <a:gd name="csY11" fmla="*/ 620614 h 652165"/>
+              <a:gd name="csX12" fmla="*/ 183 w 937260"/>
+              <a:gd name="csY12" fmla="*/ 652165 h 652165"/>
+              <a:gd name="csX13" fmla="*/ 0 w 937260"/>
+              <a:gd name="csY13" fmla="*/ 652165 h 652165"/>
+            </a:gdLst>
+            <a:ahLst/>
+            <a:cxnLst>
+              <a:cxn ang="0">
+                <a:pos x="csX0" y="csY0"/>
+              </a:cxn>
+              <a:cxn ang="0">
+                <a:pos x="csX1" y="csY1"/>
+              </a:cxn>
+              <a:cxn ang="0">
+                <a:pos x="csX2" y="csY2"/>
+              </a:cxn>
+              <a:cxn ang="0">
+                <a:pos x="csX3" y="csY3"/>
+              </a:cxn>
+              <a:cxn ang="0">
+                <a:pos x="csX4" y="csY4"/>
+              </a:cxn>
+              <a:cxn ang="0">
+                <a:pos x="csX5" y="csY5"/>
+              </a:cxn>
+              <a:cxn ang="0">
+                <a:pos x="csX6" y="csY6"/>
+              </a:cxn>
+              <a:cxn ang="0">
+                <a:pos x="csX7" y="csY7"/>
+              </a:cxn>
+              <a:cxn ang="0">
+                <a:pos x="csX8" y="csY8"/>
+              </a:cxn>
+              <a:cxn ang="0">
+                <a:pos x="csX9" y="csY9"/>
+              </a:cxn>
+              <a:cxn ang="0">
+                <a:pos x="csX10" y="csY10"/>
+              </a:cxn>
+              <a:cxn ang="0">
+                <a:pos x="csX11" y="csY11"/>
+              </a:cxn>
+              <a:cxn ang="0">
+                <a:pos x="csX12" y="csY12"/>
+              </a:cxn>
+              <a:cxn ang="0">
+                <a:pos x="csX13" y="csY13"/>
+              </a:cxn>
+            </a:cxnLst>
+            <a:rect l="l" t="t" r="r" b="b"/>
+            <a:pathLst>
+              <a:path w="937260" h="652165">
+                <a:moveTo>
+                  <a:pt x="0" y="0"/>
+                </a:moveTo>
+                <a:lnTo>
+                  <a:pt x="179" y="0"/>
+                </a:lnTo>
+                <a:lnTo>
+                  <a:pt x="116373" y="31552"/>
+                </a:lnTo>
+                <a:cubicBezTo>
+                  <a:pt x="224643" y="54462"/>
+                  <a:pt x="343679" y="67131"/>
+                  <a:pt x="468630" y="67131"/>
+                </a:cubicBezTo>
+                <a:cubicBezTo>
+                  <a:pt x="593581" y="67131"/>
+                  <a:pt x="712618" y="54462"/>
+                  <a:pt x="820887" y="31552"/>
+                </a:cubicBezTo>
+                <a:lnTo>
+                  <a:pt x="937081" y="0"/>
+                </a:lnTo>
+                <a:lnTo>
+                  <a:pt x="937260" y="0"/>
+                </a:lnTo>
+                <a:lnTo>
+                  <a:pt x="937260" y="652165"/>
+                </a:lnTo>
+                <a:lnTo>
+                  <a:pt x="937078" y="652165"/>
+                </a:lnTo>
+                <a:lnTo>
+                  <a:pt x="820887" y="620614"/>
+                </a:lnTo>
+                <a:cubicBezTo>
+                  <a:pt x="712618" y="597704"/>
+                  <a:pt x="593581" y="585035"/>
+                  <a:pt x="468630" y="585035"/>
+                </a:cubicBezTo>
+                <a:cubicBezTo>
+                  <a:pt x="343679" y="585035"/>
+                  <a:pt x="224643" y="597704"/>
+                  <a:pt x="116373" y="620614"/>
+                </a:cubicBezTo>
+                <a:lnTo>
+                  <a:pt x="183" y="652165"/>
+                </a:lnTo>
+                <a:lnTo>
+                  <a:pt x="0" y="652165"/>
+                </a:lnTo>
+                <a:close/>
+              </a:path>
+            </a:pathLst>
+          </a:custGeom>
+          <a:gradFill flip="none" rotWithShape="1">
+            <a:gsLst>
+              <a:gs pos="87000">
+                <a:srgbClr val="00B0F0">
+                  <a:alpha val="34000"/>
+                </a:srgbClr>
+              </a:gs>
+              <a:gs pos="56000">
+                <a:srgbClr val="00B0F0">
+                  <a:alpha val="0"/>
+                </a:srgbClr>
+              </a:gs>
+            </a:gsLst>
+            <a:lin ang="6600000" scaled="0"/>
+            <a:tileRect/>
+          </a:gradFill>
+          <a:ln>
+            <a:noFill/>
+          </a:ln>
+        </p:spPr>
+        <p:style>
+          <a:lnRef idx="2">
+            <a:schemeClr val="accent1">
+              <a:shade val="15000"/>
+            </a:schemeClr>
+          </a:lnRef>
+          <a:fillRef idx="1">
+            <a:schemeClr val="accent1"/>
+          </a:fillRef>
+          <a:effectRef idx="0">
+            <a:schemeClr val="accent1"/>
+          </a:effectRef>
+          <a:fontRef idx="minor">
+            <a:schemeClr val="lt1"/>
+          </a:fontRef>
+        </p:style>
+        <p:txBody>
+          <a:bodyPr rtlCol="0" anchor="ctr"/>
+          <a:lstStyle/>
+          <a:p>
+            <a:pPr algn="ctr"/>
+            <a:endParaRPr lang="en-US"/>
+          </a:p>
+        </p:txBody>
+      </p:sp>
+      <p:sp>
+        <p:nvSpPr>
+          <p:cNvPr id="125" name="Freeform: Shape 124">
+            <a:extLst>
+              <a:ext uri="{FF2B5EF4-FFF2-40B4-BE49-F238E27FC236}">
+                <a16:creationId xmlns:a16="http://schemas.microsoft.com/office/drawing/2014/main" id="{2F462E7A-4D7E-FA9D-59EB-E3678288C5BE}"/>
+              </a:ext>
+            </a:extLst>
+          </p:cNvPr>
+          <p:cNvSpPr/>
+          <p:nvPr/>
+        </p:nvSpPr>
+        <p:spPr>
+          <a:xfrm>
+            <a:off x="4523163" y="2628612"/>
+            <a:ext cx="937260" cy="652164"/>
+          </a:xfrm>
+          <a:custGeom>
+            <a:avLst/>
+            <a:gdLst>
+              <a:gd name="csX0" fmla="*/ 885039 w 1770078"/>
+              <a:gd name="csY0" fmla="*/ 0 h 1291903"/>
+              <a:gd name="csX1" fmla="*/ 1752097 w 1770078"/>
+              <a:gd name="csY1" fmla="*/ 364364 h 1291903"/>
+              <a:gd name="csX2" fmla="*/ 1756386 w 1770078"/>
+              <a:gd name="csY2" fmla="*/ 378854 h 1291903"/>
+              <a:gd name="csX3" fmla="*/ 1770078 w 1770078"/>
+              <a:gd name="csY3" fmla="*/ 378854 h 1291903"/>
+              <a:gd name="csX4" fmla="*/ 1770078 w 1770078"/>
+              <a:gd name="csY4" fmla="*/ 456330 h 1291903"/>
+              <a:gd name="csX5" fmla="*/ 1770078 w 1770078"/>
+              <a:gd name="csY5" fmla="*/ 1291903 h 1291903"/>
+              <a:gd name="csX6" fmla="*/ 0 w 1770078"/>
+              <a:gd name="csY6" fmla="*/ 1291903 h 1291903"/>
+              <a:gd name="csX7" fmla="*/ 0 w 1770078"/>
+              <a:gd name="csY7" fmla="*/ 456330 h 1291903"/>
+              <a:gd name="csX8" fmla="*/ 0 w 1770078"/>
+              <a:gd name="csY8" fmla="*/ 378854 h 1291903"/>
+              <a:gd name="csX9" fmla="*/ 13692 w 1770078"/>
+              <a:gd name="csY9" fmla="*/ 378854 h 1291903"/>
+              <a:gd name="csX10" fmla="*/ 17981 w 1770078"/>
+              <a:gd name="csY10" fmla="*/ 364364 h 1291903"/>
+              <a:gd name="csX11" fmla="*/ 885039 w 1770078"/>
+              <a:gd name="csY11" fmla="*/ 0 h 1291903"/>
+              <a:gd name="csX0" fmla="*/ 885039 w 1770078"/>
+              <a:gd name="csY0" fmla="*/ 0 h 1291903"/>
+              <a:gd name="csX1" fmla="*/ 1752097 w 1770078"/>
+              <a:gd name="csY1" fmla="*/ 364364 h 1291903"/>
+              <a:gd name="csX2" fmla="*/ 1756386 w 1770078"/>
+              <a:gd name="csY2" fmla="*/ 378854 h 1291903"/>
+              <a:gd name="csX3" fmla="*/ 1770078 w 1770078"/>
+              <a:gd name="csY3" fmla="*/ 378854 h 1291903"/>
+              <a:gd name="csX4" fmla="*/ 1770078 w 1770078"/>
+              <a:gd name="csY4" fmla="*/ 456330 h 1291903"/>
+              <a:gd name="csX5" fmla="*/ 1770078 w 1770078"/>
+              <a:gd name="csY5" fmla="*/ 1291903 h 1291903"/>
+              <a:gd name="csX6" fmla="*/ 0 w 1770078"/>
+              <a:gd name="csY6" fmla="*/ 1291903 h 1291903"/>
+              <a:gd name="csX7" fmla="*/ 0 w 1770078"/>
+              <a:gd name="csY7" fmla="*/ 456330 h 1291903"/>
+              <a:gd name="csX8" fmla="*/ 13692 w 1770078"/>
+              <a:gd name="csY8" fmla="*/ 378854 h 1291903"/>
+              <a:gd name="csX9" fmla="*/ 17981 w 1770078"/>
+              <a:gd name="csY9" fmla="*/ 364364 h 1291903"/>
+              <a:gd name="csX10" fmla="*/ 885039 w 1770078"/>
+              <a:gd name="csY10" fmla="*/ 0 h 1291903"/>
+              <a:gd name="csX0" fmla="*/ 885039 w 1770078"/>
+              <a:gd name="csY0" fmla="*/ 0 h 1291903"/>
+              <a:gd name="csX1" fmla="*/ 1752097 w 1770078"/>
+              <a:gd name="csY1" fmla="*/ 364364 h 1291903"/>
+              <a:gd name="csX2" fmla="*/ 1756386 w 1770078"/>
+              <a:gd name="csY2" fmla="*/ 378854 h 1291903"/>
+              <a:gd name="csX3" fmla="*/ 1770078 w 1770078"/>
+              <a:gd name="csY3" fmla="*/ 378854 h 1291903"/>
+              <a:gd name="csX4" fmla="*/ 1770078 w 1770078"/>
+              <a:gd name="csY4" fmla="*/ 456330 h 1291903"/>
+              <a:gd name="csX5" fmla="*/ 1770078 w 1770078"/>
+              <a:gd name="csY5" fmla="*/ 1291903 h 1291903"/>
+              <a:gd name="csX6" fmla="*/ 0 w 1770078"/>
+              <a:gd name="csY6" fmla="*/ 1291903 h 1291903"/>
+              <a:gd name="csX7" fmla="*/ 0 w 1770078"/>
+              <a:gd name="csY7" fmla="*/ 456330 h 1291903"/>
+              <a:gd name="csX8" fmla="*/ 17981 w 1770078"/>
+              <a:gd name="csY8" fmla="*/ 364364 h 1291903"/>
+              <a:gd name="csX9" fmla="*/ 885039 w 1770078"/>
+              <a:gd name="csY9" fmla="*/ 0 h 1291903"/>
+              <a:gd name="csX0" fmla="*/ 885039 w 1770078"/>
+              <a:gd name="csY0" fmla="*/ 0 h 1291903"/>
+              <a:gd name="csX1" fmla="*/ 1752097 w 1770078"/>
+              <a:gd name="csY1" fmla="*/ 364364 h 1291903"/>
+              <a:gd name="csX2" fmla="*/ 1756386 w 1770078"/>
+              <a:gd name="csY2" fmla="*/ 378854 h 1291903"/>
+              <a:gd name="csX3" fmla="*/ 1770078 w 1770078"/>
+              <a:gd name="csY3" fmla="*/ 456330 h 1291903"/>
+              <a:gd name="csX4" fmla="*/ 1770078 w 1770078"/>
+              <a:gd name="csY4" fmla="*/ 1291903 h 1291903"/>
+              <a:gd name="csX5" fmla="*/ 0 w 1770078"/>
+              <a:gd name="csY5" fmla="*/ 1291903 h 1291903"/>
+              <a:gd name="csX6" fmla="*/ 0 w 1770078"/>
+              <a:gd name="csY6" fmla="*/ 456330 h 1291903"/>
+              <a:gd name="csX7" fmla="*/ 17981 w 1770078"/>
+              <a:gd name="csY7" fmla="*/ 364364 h 1291903"/>
+              <a:gd name="csX8" fmla="*/ 885039 w 1770078"/>
+              <a:gd name="csY8" fmla="*/ 0 h 1291903"/>
+              <a:gd name="csX0" fmla="*/ 885039 w 1770078"/>
+              <a:gd name="csY0" fmla="*/ 0 h 1291903"/>
+              <a:gd name="csX1" fmla="*/ 1752097 w 1770078"/>
+              <a:gd name="csY1" fmla="*/ 364364 h 1291903"/>
+              <a:gd name="csX2" fmla="*/ 1770078 w 1770078"/>
+              <a:gd name="csY2" fmla="*/ 456330 h 1291903"/>
+              <a:gd name="csX3" fmla="*/ 1770078 w 1770078"/>
+              <a:gd name="csY3" fmla="*/ 1291903 h 1291903"/>
+              <a:gd name="csX4" fmla="*/ 0 w 1770078"/>
+              <a:gd name="csY4" fmla="*/ 1291903 h 1291903"/>
+              <a:gd name="csX5" fmla="*/ 0 w 1770078"/>
+              <a:gd name="csY5" fmla="*/ 456330 h 1291903"/>
+              <a:gd name="csX6" fmla="*/ 17981 w 1770078"/>
+              <a:gd name="csY6" fmla="*/ 364364 h 1291903"/>
+              <a:gd name="csX7" fmla="*/ 885039 w 1770078"/>
+              <a:gd name="csY7" fmla="*/ 0 h 1291903"/>
+            </a:gdLst>
+            <a:ahLst/>
+            <a:cxnLst>
+              <a:cxn ang="0">
+                <a:pos x="csX0" y="csY0"/>
+              </a:cxn>
+              <a:cxn ang="0">
+                <a:pos x="csX1" y="csY1"/>
+              </a:cxn>
+              <a:cxn ang="0">
+                <a:pos x="csX2" y="csY2"/>
+              </a:cxn>
+              <a:cxn ang="0">
+                <a:pos x="csX3" y="csY3"/>
+              </a:cxn>
+              <a:cxn ang="0">
+                <a:pos x="csX4" y="csY4"/>
+              </a:cxn>
+              <a:cxn ang="0">
+                <a:pos x="csX5" y="csY5"/>
+              </a:cxn>
+              <a:cxn ang="0">
+                <a:pos x="csX6" y="csY6"/>
+              </a:cxn>
+              <a:cxn ang="0">
+                <a:pos x="csX7" y="csY7"/>
+              </a:cxn>
+            </a:cxnLst>
+            <a:rect l="l" t="t" r="r" b="b"/>
+            <a:pathLst>
+              <a:path w="1770078" h="1291903">
+                <a:moveTo>
+                  <a:pt x="885039" y="0"/>
+                </a:moveTo>
+                <a:cubicBezTo>
+                  <a:pt x="1312734" y="0"/>
+                  <a:pt x="1669571" y="156422"/>
+                  <a:pt x="1752097" y="364364"/>
+                </a:cubicBezTo>
+                <a:lnTo>
+                  <a:pt x="1770078" y="456330"/>
+                </a:lnTo>
+                <a:lnTo>
+                  <a:pt x="1770078" y="1291903"/>
+                </a:lnTo>
+                <a:lnTo>
+                  <a:pt x="0" y="1291903"/>
+                </a:lnTo>
+                <a:lnTo>
+                  <a:pt x="0" y="456330"/>
+                </a:lnTo>
+                <a:lnTo>
+                  <a:pt x="17981" y="364364"/>
+                </a:lnTo>
+                <a:cubicBezTo>
+                  <a:pt x="100507" y="156422"/>
+                  <a:pt x="457344" y="0"/>
+                  <a:pt x="885039" y="0"/>
+                </a:cubicBezTo>
+                <a:close/>
+              </a:path>
+            </a:pathLst>
+          </a:custGeom>
+          <a:gradFill flip="none" rotWithShape="1">
+            <a:gsLst>
+              <a:gs pos="100000">
+                <a:srgbClr val="0070C0">
+                  <a:alpha val="67000"/>
+                </a:srgbClr>
+              </a:gs>
+              <a:gs pos="56000">
+                <a:srgbClr val="0070C0">
+                  <a:alpha val="0"/>
+                </a:srgbClr>
+              </a:gs>
+            </a:gsLst>
+            <a:lin ang="6600000" scaled="0"/>
+            <a:tileRect/>
+          </a:gradFill>
+          <a:ln>
+            <a:noFill/>
+          </a:ln>
+        </p:spPr>
+        <p:style>
+          <a:lnRef idx="2">
+            <a:schemeClr val="accent1">
+              <a:shade val="15000"/>
+            </a:schemeClr>
+          </a:lnRef>
+          <a:fillRef idx="1">
+            <a:schemeClr val="accent1"/>
+          </a:fillRef>
+          <a:effectRef idx="0">
+            <a:schemeClr val="accent1"/>
+          </a:effectRef>
+          <a:fontRef idx="minor">
+            <a:schemeClr val="lt1"/>
+          </a:fontRef>
+        </p:style>
+        <p:txBody>
+          <a:bodyPr rtlCol="0" anchor="ctr"/>
+          <a:lstStyle/>
+          <a:p>
+            <a:pPr algn="ctr"/>
+            <a:endParaRPr lang="en-US"/>
+          </a:p>
+        </p:txBody>
+      </p:sp>
+      <p:sp>
+        <p:nvSpPr>
+          <p:cNvPr id="126" name="Freeform: Shape 125">
+            <a:extLst>
+              <a:ext uri="{FF2B5EF4-FFF2-40B4-BE49-F238E27FC236}">
+                <a16:creationId xmlns:a16="http://schemas.microsoft.com/office/drawing/2014/main" id="{D5CD0701-60E1-9FE1-480F-EE450A4A51A9}"/>
+              </a:ext>
+            </a:extLst>
+          </p:cNvPr>
+          <p:cNvSpPr/>
+          <p:nvPr/>
+        </p:nvSpPr>
+        <p:spPr>
+          <a:xfrm rot="16200000" flipH="1">
+            <a:off x="5772571" y="2486065"/>
+            <a:ext cx="652164" cy="937260"/>
+          </a:xfrm>
+          <a:custGeom>
+            <a:avLst/>
+            <a:gdLst>
+              <a:gd name="csX0" fmla="*/ 0 w 1291905"/>
+              <a:gd name="csY0" fmla="*/ 0 h 1770078"/>
+              <a:gd name="csX1" fmla="*/ 0 w 1291905"/>
+              <a:gd name="csY1" fmla="*/ 478173 h 1770078"/>
+              <a:gd name="csX2" fmla="*/ 0 w 1291905"/>
+              <a:gd name="csY2" fmla="*/ 1291905 h 1770078"/>
+              <a:gd name="csX3" fmla="*/ 0 w 1291905"/>
+              <a:gd name="csY3" fmla="*/ 1770078 h 1770078"/>
+              <a:gd name="csX4" fmla="*/ 6123 w 1291905"/>
+              <a:gd name="csY4" fmla="*/ 1770078 h 1770078"/>
+              <a:gd name="csX5" fmla="*/ 109381 w 1291905"/>
+              <a:gd name="csY5" fmla="*/ 1658008 h 1770078"/>
+              <a:gd name="csX6" fmla="*/ 212639 w 1291905"/>
+              <a:gd name="csY6" fmla="*/ 1770078 h 1770078"/>
+              <a:gd name="csX7" fmla="*/ 221976 w 1291905"/>
+              <a:gd name="csY7" fmla="*/ 1770078 h 1770078"/>
+              <a:gd name="csX8" fmla="*/ 325234 w 1291905"/>
+              <a:gd name="csY8" fmla="*/ 1658008 h 1770078"/>
+              <a:gd name="csX9" fmla="*/ 428492 w 1291905"/>
+              <a:gd name="csY9" fmla="*/ 1770078 h 1770078"/>
+              <a:gd name="csX10" fmla="*/ 437829 w 1291905"/>
+              <a:gd name="csY10" fmla="*/ 1770078 h 1770078"/>
+              <a:gd name="csX11" fmla="*/ 541087 w 1291905"/>
+              <a:gd name="csY11" fmla="*/ 1658008 h 1770078"/>
+              <a:gd name="csX12" fmla="*/ 644346 w 1291905"/>
+              <a:gd name="csY12" fmla="*/ 1770078 h 1770078"/>
+              <a:gd name="csX13" fmla="*/ 653683 w 1291905"/>
+              <a:gd name="csY13" fmla="*/ 1770078 h 1770078"/>
+              <a:gd name="csX14" fmla="*/ 756941 w 1291905"/>
+              <a:gd name="csY14" fmla="*/ 1658008 h 1770078"/>
+              <a:gd name="csX15" fmla="*/ 860199 w 1291905"/>
+              <a:gd name="csY15" fmla="*/ 1770078 h 1770078"/>
+              <a:gd name="csX16" fmla="*/ 869536 w 1291905"/>
+              <a:gd name="csY16" fmla="*/ 1770078 h 1770078"/>
+              <a:gd name="csX17" fmla="*/ 972794 w 1291905"/>
+              <a:gd name="csY17" fmla="*/ 1658008 h 1770078"/>
+              <a:gd name="csX18" fmla="*/ 1076052 w 1291905"/>
+              <a:gd name="csY18" fmla="*/ 1770078 h 1770078"/>
+              <a:gd name="csX19" fmla="*/ 1085389 w 1291905"/>
+              <a:gd name="csY19" fmla="*/ 1770078 h 1770078"/>
+              <a:gd name="csX20" fmla="*/ 1188647 w 1291905"/>
+              <a:gd name="csY20" fmla="*/ 1658008 h 1770078"/>
+              <a:gd name="csX21" fmla="*/ 1291905 w 1291905"/>
+              <a:gd name="csY21" fmla="*/ 1770078 h 1770078"/>
+              <a:gd name="csX22" fmla="*/ 1291905 w 1291905"/>
+              <a:gd name="csY22" fmla="*/ 1291905 h 1770078"/>
+              <a:gd name="csX23" fmla="*/ 1291905 w 1291905"/>
+              <a:gd name="csY23" fmla="*/ 478173 h 1770078"/>
+              <a:gd name="csX24" fmla="*/ 1291905 w 1291905"/>
+              <a:gd name="csY24" fmla="*/ 0 h 1770078"/>
+              <a:gd name="csX25" fmla="*/ 1188647 w 1291905"/>
+              <a:gd name="csY25" fmla="*/ 112070 h 1770078"/>
+              <a:gd name="csX26" fmla="*/ 1085389 w 1291905"/>
+              <a:gd name="csY26" fmla="*/ 0 h 1770078"/>
+              <a:gd name="csX27" fmla="*/ 1076052 w 1291905"/>
+              <a:gd name="csY27" fmla="*/ 0 h 1770078"/>
+              <a:gd name="csX28" fmla="*/ 972794 w 1291905"/>
+              <a:gd name="csY28" fmla="*/ 112070 h 1770078"/>
+              <a:gd name="csX29" fmla="*/ 869536 w 1291905"/>
+              <a:gd name="csY29" fmla="*/ 0 h 1770078"/>
+              <a:gd name="csX30" fmla="*/ 860199 w 1291905"/>
+              <a:gd name="csY30" fmla="*/ 0 h 1770078"/>
+              <a:gd name="csX31" fmla="*/ 756941 w 1291905"/>
+              <a:gd name="csY31" fmla="*/ 112070 h 1770078"/>
+              <a:gd name="csX32" fmla="*/ 653683 w 1291905"/>
+              <a:gd name="csY32" fmla="*/ 0 h 1770078"/>
+              <a:gd name="csX33" fmla="*/ 644346 w 1291905"/>
+              <a:gd name="csY33" fmla="*/ 0 h 1770078"/>
+              <a:gd name="csX34" fmla="*/ 541087 w 1291905"/>
+              <a:gd name="csY34" fmla="*/ 112070 h 1770078"/>
+              <a:gd name="csX35" fmla="*/ 437829 w 1291905"/>
+              <a:gd name="csY35" fmla="*/ 0 h 1770078"/>
+              <a:gd name="csX36" fmla="*/ 428492 w 1291905"/>
+              <a:gd name="csY36" fmla="*/ 0 h 1770078"/>
+              <a:gd name="csX37" fmla="*/ 325234 w 1291905"/>
+              <a:gd name="csY37" fmla="*/ 112070 h 1770078"/>
+              <a:gd name="csX38" fmla="*/ 221976 w 1291905"/>
+              <a:gd name="csY38" fmla="*/ 0 h 1770078"/>
+              <a:gd name="csX39" fmla="*/ 212639 w 1291905"/>
+              <a:gd name="csY39" fmla="*/ 0 h 1770078"/>
+              <a:gd name="csX40" fmla="*/ 109381 w 1291905"/>
+              <a:gd name="csY40" fmla="*/ 112070 h 1770078"/>
+              <a:gd name="csX41" fmla="*/ 6123 w 1291905"/>
+              <a:gd name="csY41" fmla="*/ 0 h 1770078"/>
+            </a:gdLst>
+            <a:ahLst/>
+            <a:cxnLst>
+              <a:cxn ang="0">
+                <a:pos x="csX0" y="csY0"/>
+              </a:cxn>
+              <a:cxn ang="0">
+                <a:pos x="csX1" y="csY1"/>
+              </a:cxn>
+              <a:cxn ang="0">
+                <a:pos x="csX2" y="csY2"/>
+              </a:cxn>
+              <a:cxn ang="0">
+                <a:pos x="csX3" y="csY3"/>
+              </a:cxn>
+              <a:cxn ang="0">
+                <a:pos x="csX4" y="csY4"/>
+              </a:cxn>
+              <a:cxn ang="0">
+                <a:pos x="csX5" y="csY5"/>
+              </a:cxn>
+              <a:cxn ang="0">
+                <a:pos x="csX6" y="csY6"/>
+              </a:cxn>
+              <a:cxn ang="0">
+                <a:pos x="csX7" y="csY7"/>
+              </a:cxn>
+              <a:cxn ang="0">
+                <a:pos x="csX8" y="csY8"/>
+              </a:cxn>
+              <a:cxn ang="0">
+                <a:pos x="csX9" y="csY9"/>
+              </a:cxn>
+              <a:cxn ang="0">
+                <a:pos x="csX10" y="csY10"/>
+              </a:cxn>
+              <a:cxn ang="0">
+                <a:pos x="csX11" y="csY11"/>
+              </a:cxn>
+              <a:cxn ang="0">
+                <a:pos x="csX12" y="csY12"/>
+              </a:cxn>
+              <a:cxn ang="0">
+                <a:pos x="csX13" y="csY13"/>
+              </a:cxn>
+              <a:cxn ang="0">
+                <a:pos x="csX14" y="csY14"/>
+              </a:cxn>
+              <a:cxn ang="0">
+                <a:pos x="csX15" y="csY15"/>
+              </a:cxn>
+              <a:cxn ang="0">
+                <a:pos x="csX16" y="csY16"/>
+              </a:cxn>
+              <a:cxn ang="0">
+                <a:pos x="csX17" y="csY17"/>
+              </a:cxn>
+              <a:cxn ang="0">
+                <a:pos x="csX18" y="csY18"/>
+              </a:cxn>
+              <a:cxn ang="0">
+                <a:pos x="csX19" y="csY19"/>
+              </a:cxn>
+              <a:cxn ang="0">
+                <a:pos x="csX20" y="csY20"/>
+              </a:cxn>
+              <a:cxn ang="0">
+                <a:pos x="csX21" y="csY21"/>
+              </a:cxn>
+              <a:cxn ang="0">
+                <a:pos x="csX22" y="csY22"/>
+              </a:cxn>
+              <a:cxn ang="0">
+                <a:pos x="csX23" y="csY23"/>
+              </a:cxn>
+              <a:cxn ang="0">
+                <a:pos x="csX24" y="csY24"/>
+              </a:cxn>
+              <a:cxn ang="0">
+                <a:pos x="csX25" y="csY25"/>
+              </a:cxn>
+              <a:cxn ang="0">
+                <a:pos x="csX26" y="csY26"/>
+              </a:cxn>
+              <a:cxn ang="0">
+                <a:pos x="csX27" y="csY27"/>
+              </a:cxn>
+              <a:cxn ang="0">
+                <a:pos x="csX28" y="csY28"/>
+              </a:cxn>
+              <a:cxn ang="0">
+                <a:pos x="csX29" y="csY29"/>
+              </a:cxn>
+              <a:cxn ang="0">
+                <a:pos x="csX30" y="csY30"/>
+              </a:cxn>
+              <a:cxn ang="0">
+                <a:pos x="csX31" y="csY31"/>
+              </a:cxn>
+              <a:cxn ang="0">
+                <a:pos x="csX32" y="csY32"/>
+              </a:cxn>
+              <a:cxn ang="0">
+                <a:pos x="csX33" y="csY33"/>
+              </a:cxn>
+              <a:cxn ang="0">
+                <a:pos x="csX34" y="csY34"/>
+              </a:cxn>
+              <a:cxn ang="0">
+                <a:pos x="csX35" y="csY35"/>
+              </a:cxn>
+              <a:cxn ang="0">
+                <a:pos x="csX36" y="csY36"/>
+              </a:cxn>
+              <a:cxn ang="0">
+                <a:pos x="csX37" y="csY37"/>
+              </a:cxn>
+              <a:cxn ang="0">
+                <a:pos x="csX38" y="csY38"/>
+              </a:cxn>
+              <a:cxn ang="0">
+                <a:pos x="csX39" y="csY39"/>
+              </a:cxn>
+              <a:cxn ang="0">
+                <a:pos x="csX40" y="csY40"/>
+              </a:cxn>
+              <a:cxn ang="0">
+                <a:pos x="csX41" y="csY41"/>
+              </a:cxn>
+            </a:cxnLst>
+            <a:rect l="l" t="t" r="r" b="b"/>
+            <a:pathLst>
+              <a:path w="1291905" h="1770078">
+                <a:moveTo>
+                  <a:pt x="0" y="0"/>
+                </a:moveTo>
+                <a:lnTo>
+                  <a:pt x="0" y="478173"/>
+                </a:lnTo>
+                <a:lnTo>
+                  <a:pt x="0" y="1291905"/>
+                </a:lnTo>
+                <a:lnTo>
+                  <a:pt x="0" y="1770078"/>
+                </a:lnTo>
+                <a:lnTo>
+                  <a:pt x="6123" y="1770078"/>
+                </a:lnTo>
+                <a:lnTo>
+                  <a:pt x="109381" y="1658008"/>
+                </a:lnTo>
+                <a:lnTo>
+                  <a:pt x="212639" y="1770078"/>
+                </a:lnTo>
+                <a:lnTo>
+                  <a:pt x="221976" y="1770078"/>
+                </a:lnTo>
+                <a:lnTo>
+                  <a:pt x="325234" y="1658008"/>
+                </a:lnTo>
+                <a:lnTo>
+                  <a:pt x="428492" y="1770078"/>
+                </a:lnTo>
+                <a:lnTo>
+                  <a:pt x="437829" y="1770078"/>
+                </a:lnTo>
+                <a:lnTo>
+                  <a:pt x="541087" y="1658008"/>
+                </a:lnTo>
+                <a:lnTo>
+                  <a:pt x="644346" y="1770078"/>
+                </a:lnTo>
+                <a:lnTo>
+                  <a:pt x="653683" y="1770078"/>
+                </a:lnTo>
+                <a:lnTo>
+                  <a:pt x="756941" y="1658008"/>
+                </a:lnTo>
+                <a:lnTo>
+                  <a:pt x="860199" y="1770078"/>
+                </a:lnTo>
+                <a:lnTo>
+                  <a:pt x="869536" y="1770078"/>
+                </a:lnTo>
+                <a:lnTo>
+                  <a:pt x="972794" y="1658008"/>
+                </a:lnTo>
+                <a:lnTo>
+                  <a:pt x="1076052" y="1770078"/>
+                </a:lnTo>
+                <a:lnTo>
+                  <a:pt x="1085389" y="1770078"/>
+                </a:lnTo>
+                <a:lnTo>
+                  <a:pt x="1188647" y="1658008"/>
+                </a:lnTo>
+                <a:lnTo>
+                  <a:pt x="1291905" y="1770078"/>
+                </a:lnTo>
+                <a:lnTo>
+                  <a:pt x="1291905" y="1291905"/>
+                </a:lnTo>
+                <a:lnTo>
+                  <a:pt x="1291905" y="478173"/>
+                </a:lnTo>
+                <a:lnTo>
+                  <a:pt x="1291905" y="0"/>
+                </a:lnTo>
+                <a:lnTo>
+                  <a:pt x="1188647" y="112070"/>
+                </a:lnTo>
+                <a:lnTo>
+                  <a:pt x="1085389" y="0"/>
+                </a:lnTo>
+                <a:lnTo>
+                  <a:pt x="1076052" y="0"/>
+                </a:lnTo>
+                <a:lnTo>
+                  <a:pt x="972794" y="112070"/>
+                </a:lnTo>
+                <a:lnTo>
+                  <a:pt x="869536" y="0"/>
+                </a:lnTo>
+                <a:lnTo>
+                  <a:pt x="860199" y="0"/>
+                </a:lnTo>
+                <a:lnTo>
+                  <a:pt x="756941" y="112070"/>
+                </a:lnTo>
+                <a:lnTo>
+                  <a:pt x="653683" y="0"/>
+                </a:lnTo>
+                <a:lnTo>
+                  <a:pt x="644346" y="0"/>
+                </a:lnTo>
+                <a:lnTo>
+                  <a:pt x="541087" y="112070"/>
+                </a:lnTo>
+                <a:lnTo>
+                  <a:pt x="437829" y="0"/>
+                </a:lnTo>
+                <a:lnTo>
+                  <a:pt x="428492" y="0"/>
+                </a:lnTo>
+                <a:lnTo>
+                  <a:pt x="325234" y="112070"/>
+                </a:lnTo>
+                <a:lnTo>
+                  <a:pt x="221976" y="0"/>
+                </a:lnTo>
+                <a:lnTo>
+                  <a:pt x="212639" y="0"/>
+                </a:lnTo>
+                <a:lnTo>
+                  <a:pt x="109381" y="112070"/>
+                </a:lnTo>
+                <a:lnTo>
+                  <a:pt x="6123" y="0"/>
+                </a:lnTo>
+                <a:close/>
+              </a:path>
+            </a:pathLst>
+          </a:custGeom>
+          <a:gradFill flip="none" rotWithShape="1">
+            <a:gsLst>
+              <a:gs pos="100000">
+                <a:srgbClr val="C00000">
+                  <a:alpha val="52000"/>
+                </a:srgbClr>
+              </a:gs>
+              <a:gs pos="56000">
+                <a:srgbClr val="C00000">
+                  <a:alpha val="0"/>
+                </a:srgbClr>
+              </a:gs>
+            </a:gsLst>
+            <a:lin ang="20400000" scaled="0"/>
+            <a:tileRect/>
+          </a:gradFill>
+          <a:ln>
+            <a:noFill/>
+          </a:ln>
+        </p:spPr>
+        <p:style>
+          <a:lnRef idx="2">
+            <a:schemeClr val="accent1">
+              <a:shade val="15000"/>
+            </a:schemeClr>
+          </a:lnRef>
+          <a:fillRef idx="1">
+            <a:schemeClr val="accent1"/>
+          </a:fillRef>
+          <a:effectRef idx="0">
+            <a:schemeClr val="accent1"/>
+          </a:effectRef>
+          <a:fontRef idx="minor">
+            <a:schemeClr val="lt1"/>
+          </a:fontRef>
+        </p:style>
+        <p:txBody>
+          <a:bodyPr rtlCol="0" anchor="ctr"/>
+          <a:lstStyle/>
+          <a:p>
+            <a:pPr algn="ctr"/>
+            <a:endParaRPr lang="en-US"/>
+          </a:p>
+        </p:txBody>
+      </p:sp>
       <p:grpSp>
         <p:nvGrpSpPr>
           <p:cNvPr id="2" name="Group 1">
@@ -8490,14 +8469,18 @@
             <a:gradFill flip="none" rotWithShape="1">
               <a:gsLst>
                 <a:gs pos="87000">
-                  <a:srgbClr val="00B0F0">
-                    <a:alpha val="34000"/>
-                  </a:srgbClr>
+                  <a:schemeClr val="accent4">
+                    <a:lumMod val="60000"/>
+                    <a:lumOff val="40000"/>
+                    <a:alpha val="49000"/>
+                  </a:schemeClr>
                 </a:gs>
                 <a:gs pos="56000">
-                  <a:srgbClr val="00B0F0">
+                  <a:schemeClr val="accent4">
+                    <a:lumMod val="60000"/>
+                    <a:lumOff val="40000"/>
                     <a:alpha val="0"/>
-                  </a:srgbClr>
+                  </a:schemeClr>
                 </a:gs>
               </a:gsLst>
               <a:lin ang="6600000" scaled="0"/>
@@ -8535,10 +8518,10 @@
       </p:grpSp>
       <p:grpSp>
         <p:nvGrpSpPr>
-          <p:cNvPr id="8" name="Group 7">
+          <p:cNvPr id="12" name="Group 11">
             <a:extLst>
               <a:ext uri="{FF2B5EF4-FFF2-40B4-BE49-F238E27FC236}">
-                <a16:creationId xmlns:a16="http://schemas.microsoft.com/office/drawing/2014/main" id="{707984AD-93F2-AC20-03E3-ED315ABE85CD}"/>
+                <a16:creationId xmlns:a16="http://schemas.microsoft.com/office/drawing/2014/main" id="{0D668C26-BC2E-5B22-E5F7-5D73E1A67772}"/>
               </a:ext>
             </a:extLst>
           </p:cNvPr>
@@ -9418,17 +9401,17 @@
             <a:gradFill flip="none" rotWithShape="1">
               <a:gsLst>
                 <a:gs pos="100000">
-                  <a:srgbClr val="00B050">
+                  <a:srgbClr val="0070C0">
                     <a:alpha val="67000"/>
                   </a:srgbClr>
                 </a:gs>
-                <a:gs pos="73000">
-                  <a:srgbClr val="00B050">
+                <a:gs pos="56000">
+                  <a:srgbClr val="0070C0">
                     <a:alpha val="0"/>
                   </a:srgbClr>
                 </a:gs>
               </a:gsLst>
-              <a:lin ang="8400000" scaled="0"/>
+              <a:lin ang="6600000" scaled="0"/>
               <a:tileRect/>
             </a:gradFill>
             <a:ln>
@@ -11084,12 +11067,12 @@
             <a:gradFill flip="none" rotWithShape="1">
               <a:gsLst>
                 <a:gs pos="100000">
-                  <a:srgbClr val="FBA305">
-                    <a:alpha val="67000"/>
+                  <a:srgbClr val="C00000">
+                    <a:alpha val="52000"/>
                   </a:srgbClr>
                 </a:gs>
                 <a:gs pos="56000">
-                  <a:srgbClr val="FFC000">
+                  <a:srgbClr val="C00000">
                     <a:alpha val="0"/>
                   </a:srgbClr>
                 </a:gs>

--- a/Icons_UI/bcpst.pptx
+++ b/Icons_UI/bcpst.pptx
@@ -5,8 +5,9 @@
     <p:sldMasterId id="2147483648" r:id="rId1"/>
   </p:sldMasterIdLst>
   <p:sldIdLst>
-    <p:sldId id="257" r:id="rId2"/>
-    <p:sldId id="256" r:id="rId3"/>
+    <p:sldId id="258" r:id="rId2"/>
+    <p:sldId id="257" r:id="rId3"/>
+    <p:sldId id="256" r:id="rId4"/>
   </p:sldIdLst>
   <p:sldSz cx="12192000" cy="6858000"/>
   <p:notesSz cx="6858000" cy="9144000"/>
@@ -838,6 +839,636 @@
 <file path=ppt/slides/slide1.xml><?xml version="1.0" encoding="utf-8"?>
 <p:sld xmlns:a="http://schemas.openxmlformats.org/drawingml/2006/main" xmlns:r="http://schemas.openxmlformats.org/officeDocument/2006/relationships" xmlns:p="http://schemas.openxmlformats.org/presentationml/2006/main">
   <p:cSld>
+    <p:spTree>
+      <p:nvGrpSpPr>
+        <p:cNvPr id="1" name=""/>
+        <p:cNvGrpSpPr/>
+        <p:nvPr/>
+      </p:nvGrpSpPr>
+      <p:grpSpPr>
+        <a:xfrm>
+          <a:off x="0" y="0"/>
+          <a:ext cx="0" cy="0"/>
+          <a:chOff x="0" y="0"/>
+          <a:chExt cx="0" cy="0"/>
+        </a:xfrm>
+      </p:grpSpPr>
+      <p:pic>
+        <p:nvPicPr>
+          <p:cNvPr id="7" name="Graphic 6">
+            <a:extLst>
+              <a:ext uri="{FF2B5EF4-FFF2-40B4-BE49-F238E27FC236}">
+                <a16:creationId xmlns:a16="http://schemas.microsoft.com/office/drawing/2014/main" id="{E5EAD930-756B-D9F1-C4F3-6B4C9C051D26}"/>
+              </a:ext>
+            </a:extLst>
+          </p:cNvPr>
+          <p:cNvPicPr>
+            <a:picLocks noChangeAspect="1"/>
+          </p:cNvPicPr>
+          <p:nvPr/>
+        </p:nvPicPr>
+        <p:blipFill>
+          <a:blip r:embed="rId2">
+            <a:extLst>
+              <a:ext uri="{96DAC541-7B7A-43D3-8B79-37D633B846F1}">
+                <asvg:svgBlip xmlns:asvg="http://schemas.microsoft.com/office/drawing/2016/SVG/main" r:embed="rId3"/>
+              </a:ext>
+            </a:extLst>
+          </a:blip>
+          <a:stretch>
+            <a:fillRect/>
+          </a:stretch>
+        </p:blipFill>
+        <p:spPr>
+          <a:xfrm>
+            <a:off x="912827" y="746156"/>
+            <a:ext cx="1440000" cy="1040462"/>
+          </a:xfrm>
+          <a:prstGeom prst="rect">
+            <a:avLst/>
+          </a:prstGeom>
+        </p:spPr>
+      </p:pic>
+      <p:pic>
+        <p:nvPicPr>
+          <p:cNvPr id="9" name="Graphic 8">
+            <a:extLst>
+              <a:ext uri="{FF2B5EF4-FFF2-40B4-BE49-F238E27FC236}">
+                <a16:creationId xmlns:a16="http://schemas.microsoft.com/office/drawing/2014/main" id="{2DFC2D59-AF15-FFE3-B5EB-D19F3410AA20}"/>
+              </a:ext>
+            </a:extLst>
+          </p:cNvPr>
+          <p:cNvPicPr>
+            <a:picLocks noChangeAspect="1"/>
+          </p:cNvPicPr>
+          <p:nvPr/>
+        </p:nvPicPr>
+        <p:blipFill>
+          <a:blip r:embed="rId4">
+            <a:extLst>
+              <a:ext uri="{96DAC541-7B7A-43D3-8B79-37D633B846F1}">
+                <asvg:svgBlip xmlns:asvg="http://schemas.microsoft.com/office/drawing/2016/SVG/main" r:embed="rId5"/>
+              </a:ext>
+            </a:extLst>
+          </a:blip>
+          <a:stretch>
+            <a:fillRect/>
+          </a:stretch>
+        </p:blipFill>
+        <p:spPr>
+          <a:xfrm>
+            <a:off x="3162461" y="546387"/>
+            <a:ext cx="1358961" cy="1440000"/>
+          </a:xfrm>
+          <a:prstGeom prst="rect">
+            <a:avLst/>
+          </a:prstGeom>
+        </p:spPr>
+      </p:pic>
+      <p:pic>
+        <p:nvPicPr>
+          <p:cNvPr id="11" name="Graphic 10">
+            <a:extLst>
+              <a:ext uri="{FF2B5EF4-FFF2-40B4-BE49-F238E27FC236}">
+                <a16:creationId xmlns:a16="http://schemas.microsoft.com/office/drawing/2014/main" id="{82FFAE92-C5DA-96C4-03CA-25E48AA00A49}"/>
+              </a:ext>
+            </a:extLst>
+          </p:cNvPr>
+          <p:cNvPicPr>
+            <a:picLocks noChangeAspect="1"/>
+          </p:cNvPicPr>
+          <p:nvPr/>
+        </p:nvPicPr>
+        <p:blipFill>
+          <a:blip r:embed="rId6">
+            <a:extLst>
+              <a:ext uri="{96DAC541-7B7A-43D3-8B79-37D633B846F1}">
+                <asvg:svgBlip xmlns:asvg="http://schemas.microsoft.com/office/drawing/2016/SVG/main" r:embed="rId7"/>
+              </a:ext>
+            </a:extLst>
+          </a:blip>
+          <a:stretch>
+            <a:fillRect/>
+          </a:stretch>
+        </p:blipFill>
+        <p:spPr>
+          <a:xfrm>
+            <a:off x="5331056" y="550818"/>
+            <a:ext cx="1440000" cy="1431139"/>
+          </a:xfrm>
+          <a:prstGeom prst="rect">
+            <a:avLst/>
+          </a:prstGeom>
+        </p:spPr>
+      </p:pic>
+      <p:pic>
+        <p:nvPicPr>
+          <p:cNvPr id="13" name="Graphic 12">
+            <a:extLst>
+              <a:ext uri="{FF2B5EF4-FFF2-40B4-BE49-F238E27FC236}">
+                <a16:creationId xmlns:a16="http://schemas.microsoft.com/office/drawing/2014/main" id="{73E2A251-19FD-61F0-7453-5E34FE6644E5}"/>
+              </a:ext>
+            </a:extLst>
+          </p:cNvPr>
+          <p:cNvPicPr>
+            <a:picLocks noChangeAspect="1"/>
+          </p:cNvPicPr>
+          <p:nvPr/>
+        </p:nvPicPr>
+        <p:blipFill>
+          <a:blip r:embed="rId8">
+            <a:extLst>
+              <a:ext uri="{96DAC541-7B7A-43D3-8B79-37D633B846F1}">
+                <asvg:svgBlip xmlns:asvg="http://schemas.microsoft.com/office/drawing/2016/SVG/main" r:embed="rId9"/>
+              </a:ext>
+            </a:extLst>
+          </a:blip>
+          <a:stretch>
+            <a:fillRect/>
+          </a:stretch>
+        </p:blipFill>
+        <p:spPr>
+          <a:xfrm>
+            <a:off x="7580690" y="546387"/>
+            <a:ext cx="1440000" cy="1440000"/>
+          </a:xfrm>
+          <a:prstGeom prst="rect">
+            <a:avLst/>
+          </a:prstGeom>
+        </p:spPr>
+      </p:pic>
+      <p:pic>
+        <p:nvPicPr>
+          <p:cNvPr id="15" name="Graphic 14">
+            <a:extLst>
+              <a:ext uri="{FF2B5EF4-FFF2-40B4-BE49-F238E27FC236}">
+                <a16:creationId xmlns:a16="http://schemas.microsoft.com/office/drawing/2014/main" id="{6CC2A570-2385-2863-FE03-5BD02101E8EB}"/>
+              </a:ext>
+            </a:extLst>
+          </p:cNvPr>
+          <p:cNvPicPr>
+            <a:picLocks noChangeAspect="1"/>
+          </p:cNvPicPr>
+          <p:nvPr/>
+        </p:nvPicPr>
+        <p:blipFill>
+          <a:blip r:embed="rId10">
+            <a:extLst>
+              <a:ext uri="{96DAC541-7B7A-43D3-8B79-37D633B846F1}">
+                <asvg:svgBlip xmlns:asvg="http://schemas.microsoft.com/office/drawing/2016/SVG/main" r:embed="rId11"/>
+              </a:ext>
+            </a:extLst>
+          </a:blip>
+          <a:stretch>
+            <a:fillRect/>
+          </a:stretch>
+        </p:blipFill>
+        <p:spPr>
+          <a:xfrm>
+            <a:off x="9830323" y="546387"/>
+            <a:ext cx="1358960" cy="1440000"/>
+          </a:xfrm>
+          <a:prstGeom prst="rect">
+            <a:avLst/>
+          </a:prstGeom>
+        </p:spPr>
+      </p:pic>
+      <p:pic>
+        <p:nvPicPr>
+          <p:cNvPr id="75" name="Graphic 74">
+            <a:extLst>
+              <a:ext uri="{FF2B5EF4-FFF2-40B4-BE49-F238E27FC236}">
+                <a16:creationId xmlns:a16="http://schemas.microsoft.com/office/drawing/2014/main" id="{337DFBAF-91A8-CC5E-1CB7-682F863891E2}"/>
+              </a:ext>
+            </a:extLst>
+          </p:cNvPr>
+          <p:cNvPicPr>
+            <a:picLocks noChangeAspect="1"/>
+          </p:cNvPicPr>
+          <p:nvPr/>
+        </p:nvPicPr>
+        <p:blipFill>
+          <a:blip r:embed="rId2">
+            <a:alphaModFix/>
+            <a:extLst>
+              <a:ext uri="{96DAC541-7B7A-43D3-8B79-37D633B846F1}">
+                <asvg:svgBlip xmlns:asvg="http://schemas.microsoft.com/office/drawing/2016/SVG/main" r:embed="rId12"/>
+              </a:ext>
+            </a:extLst>
+          </a:blip>
+          <a:stretch>
+            <a:fillRect/>
+          </a:stretch>
+        </p:blipFill>
+        <p:spPr>
+          <a:xfrm>
+            <a:off x="911196" y="2908768"/>
+            <a:ext cx="1440000" cy="1040462"/>
+          </a:xfrm>
+          <a:prstGeom prst="rect">
+            <a:avLst/>
+          </a:prstGeom>
+          <a:effectLst>
+            <a:glow rad="368300">
+              <a:schemeClr val="bg1"/>
+            </a:glow>
+          </a:effectLst>
+        </p:spPr>
+      </p:pic>
+      <p:pic>
+        <p:nvPicPr>
+          <p:cNvPr id="76" name="Graphic 75">
+            <a:extLst>
+              <a:ext uri="{FF2B5EF4-FFF2-40B4-BE49-F238E27FC236}">
+                <a16:creationId xmlns:a16="http://schemas.microsoft.com/office/drawing/2014/main" id="{5BB39FE4-D280-618E-E641-347D42987130}"/>
+              </a:ext>
+            </a:extLst>
+          </p:cNvPr>
+          <p:cNvPicPr>
+            <a:picLocks noChangeAspect="1"/>
+          </p:cNvPicPr>
+          <p:nvPr/>
+        </p:nvPicPr>
+        <p:blipFill>
+          <a:blip r:embed="rId4">
+            <a:alphaModFix/>
+            <a:extLst>
+              <a:ext uri="{96DAC541-7B7A-43D3-8B79-37D633B846F1}">
+                <asvg:svgBlip xmlns:asvg="http://schemas.microsoft.com/office/drawing/2016/SVG/main" r:embed="rId13"/>
+              </a:ext>
+            </a:extLst>
+          </a:blip>
+          <a:stretch>
+            <a:fillRect/>
+          </a:stretch>
+        </p:blipFill>
+        <p:spPr>
+          <a:xfrm>
+            <a:off x="3149811" y="2708999"/>
+            <a:ext cx="1358961" cy="1440000"/>
+          </a:xfrm>
+          <a:prstGeom prst="rect">
+            <a:avLst/>
+          </a:prstGeom>
+          <a:effectLst>
+            <a:glow rad="368300">
+              <a:schemeClr val="bg1"/>
+            </a:glow>
+          </a:effectLst>
+        </p:spPr>
+      </p:pic>
+      <p:pic>
+        <p:nvPicPr>
+          <p:cNvPr id="77" name="Graphic 76">
+            <a:extLst>
+              <a:ext uri="{FF2B5EF4-FFF2-40B4-BE49-F238E27FC236}">
+                <a16:creationId xmlns:a16="http://schemas.microsoft.com/office/drawing/2014/main" id="{0648C269-76BD-0BEC-7F0B-96B390B95BA0}"/>
+              </a:ext>
+            </a:extLst>
+          </p:cNvPr>
+          <p:cNvPicPr>
+            <a:picLocks noChangeAspect="1"/>
+          </p:cNvPicPr>
+          <p:nvPr/>
+        </p:nvPicPr>
+        <p:blipFill>
+          <a:blip r:embed="rId6">
+            <a:alphaModFix/>
+            <a:extLst>
+              <a:ext uri="{96DAC541-7B7A-43D3-8B79-37D633B846F1}">
+                <asvg:svgBlip xmlns:asvg="http://schemas.microsoft.com/office/drawing/2016/SVG/main" r:embed="rId14"/>
+              </a:ext>
+            </a:extLst>
+          </a:blip>
+          <a:stretch>
+            <a:fillRect/>
+          </a:stretch>
+        </p:blipFill>
+        <p:spPr>
+          <a:xfrm>
+            <a:off x="5331056" y="2713430"/>
+            <a:ext cx="1440000" cy="1431139"/>
+          </a:xfrm>
+          <a:prstGeom prst="rect">
+            <a:avLst/>
+          </a:prstGeom>
+          <a:effectLst>
+            <a:glow rad="368300">
+              <a:schemeClr val="bg1"/>
+            </a:glow>
+          </a:effectLst>
+        </p:spPr>
+      </p:pic>
+      <p:pic>
+        <p:nvPicPr>
+          <p:cNvPr id="78" name="Graphic 77">
+            <a:extLst>
+              <a:ext uri="{FF2B5EF4-FFF2-40B4-BE49-F238E27FC236}">
+                <a16:creationId xmlns:a16="http://schemas.microsoft.com/office/drawing/2014/main" id="{C3E6FA7E-1389-7514-8A5E-AF2511A4A4F0}"/>
+              </a:ext>
+            </a:extLst>
+          </p:cNvPr>
+          <p:cNvPicPr>
+            <a:picLocks noChangeAspect="1"/>
+          </p:cNvPicPr>
+          <p:nvPr/>
+        </p:nvPicPr>
+        <p:blipFill>
+          <a:blip r:embed="rId8">
+            <a:alphaModFix/>
+            <a:extLst>
+              <a:ext uri="{96DAC541-7B7A-43D3-8B79-37D633B846F1}">
+                <asvg:svgBlip xmlns:asvg="http://schemas.microsoft.com/office/drawing/2016/SVG/main" r:embed="rId15"/>
+              </a:ext>
+            </a:extLst>
+          </a:blip>
+          <a:stretch>
+            <a:fillRect/>
+          </a:stretch>
+        </p:blipFill>
+        <p:spPr>
+          <a:xfrm>
+            <a:off x="7576444" y="2708999"/>
+            <a:ext cx="1440000" cy="1440000"/>
+          </a:xfrm>
+          <a:prstGeom prst="rect">
+            <a:avLst/>
+          </a:prstGeom>
+          <a:effectLst>
+            <a:glow rad="368300">
+              <a:schemeClr val="bg1"/>
+            </a:glow>
+          </a:effectLst>
+        </p:spPr>
+      </p:pic>
+      <p:pic>
+        <p:nvPicPr>
+          <p:cNvPr id="79" name="Graphic 78">
+            <a:extLst>
+              <a:ext uri="{FF2B5EF4-FFF2-40B4-BE49-F238E27FC236}">
+                <a16:creationId xmlns:a16="http://schemas.microsoft.com/office/drawing/2014/main" id="{441A969D-6069-F418-6C9B-1F7C243CCBBE}"/>
+              </a:ext>
+            </a:extLst>
+          </p:cNvPr>
+          <p:cNvPicPr>
+            <a:picLocks noChangeAspect="1"/>
+          </p:cNvPicPr>
+          <p:nvPr/>
+        </p:nvPicPr>
+        <p:blipFill>
+          <a:blip r:embed="rId10">
+            <a:alphaModFix/>
+            <a:extLst>
+              <a:ext uri="{96DAC541-7B7A-43D3-8B79-37D633B846F1}">
+                <asvg:svgBlip xmlns:asvg="http://schemas.microsoft.com/office/drawing/2016/SVG/main" r:embed="rId16"/>
+              </a:ext>
+            </a:extLst>
+          </a:blip>
+          <a:stretch>
+            <a:fillRect/>
+          </a:stretch>
+        </p:blipFill>
+        <p:spPr>
+          <a:xfrm>
+            <a:off x="9815059" y="2708999"/>
+            <a:ext cx="1358960" cy="1440000"/>
+          </a:xfrm>
+          <a:prstGeom prst="rect">
+            <a:avLst/>
+          </a:prstGeom>
+          <a:effectLst>
+            <a:glow rad="368300">
+              <a:schemeClr val="bg1"/>
+            </a:glow>
+          </a:effectLst>
+        </p:spPr>
+      </p:pic>
+      <p:pic>
+        <p:nvPicPr>
+          <p:cNvPr id="80" name="Graphic 79">
+            <a:extLst>
+              <a:ext uri="{FF2B5EF4-FFF2-40B4-BE49-F238E27FC236}">
+                <a16:creationId xmlns:a16="http://schemas.microsoft.com/office/drawing/2014/main" id="{B0FCB388-9DB9-3E5F-309F-A8B1726FF667}"/>
+              </a:ext>
+            </a:extLst>
+          </p:cNvPr>
+          <p:cNvPicPr>
+            <a:picLocks noChangeAspect="1"/>
+          </p:cNvPicPr>
+          <p:nvPr/>
+        </p:nvPicPr>
+        <p:blipFill>
+          <a:blip r:embed="rId2">
+            <a:alphaModFix/>
+            <a:extLst>
+              <a:ext uri="{96DAC541-7B7A-43D3-8B79-37D633B846F1}">
+                <asvg:svgBlip xmlns:asvg="http://schemas.microsoft.com/office/drawing/2016/SVG/main" r:embed="rId12"/>
+              </a:ext>
+            </a:extLst>
+          </a:blip>
+          <a:stretch>
+            <a:fillRect/>
+          </a:stretch>
+        </p:blipFill>
+        <p:spPr>
+          <a:xfrm>
+            <a:off x="911196" y="5071380"/>
+            <a:ext cx="1440000" cy="1040462"/>
+          </a:xfrm>
+          <a:prstGeom prst="rect">
+            <a:avLst/>
+          </a:prstGeom>
+          <a:effectLst>
+            <a:glow rad="368300">
+              <a:schemeClr val="tx1"/>
+            </a:glow>
+          </a:effectLst>
+        </p:spPr>
+      </p:pic>
+      <p:pic>
+        <p:nvPicPr>
+          <p:cNvPr id="81" name="Graphic 80">
+            <a:extLst>
+              <a:ext uri="{FF2B5EF4-FFF2-40B4-BE49-F238E27FC236}">
+                <a16:creationId xmlns:a16="http://schemas.microsoft.com/office/drawing/2014/main" id="{4F5ACCE8-29E9-DC36-2920-EB14B38741C1}"/>
+              </a:ext>
+            </a:extLst>
+          </p:cNvPr>
+          <p:cNvPicPr>
+            <a:picLocks noChangeAspect="1"/>
+          </p:cNvPicPr>
+          <p:nvPr/>
+        </p:nvPicPr>
+        <p:blipFill>
+          <a:blip r:embed="rId4">
+            <a:alphaModFix/>
+            <a:extLst>
+              <a:ext uri="{96DAC541-7B7A-43D3-8B79-37D633B846F1}">
+                <asvg:svgBlip xmlns:asvg="http://schemas.microsoft.com/office/drawing/2016/SVG/main" r:embed="rId13"/>
+              </a:ext>
+            </a:extLst>
+          </a:blip>
+          <a:stretch>
+            <a:fillRect/>
+          </a:stretch>
+        </p:blipFill>
+        <p:spPr>
+          <a:xfrm>
+            <a:off x="3149811" y="4871611"/>
+            <a:ext cx="1358961" cy="1440000"/>
+          </a:xfrm>
+          <a:prstGeom prst="rect">
+            <a:avLst/>
+          </a:prstGeom>
+          <a:effectLst>
+            <a:glow rad="368300">
+              <a:schemeClr val="tx1"/>
+            </a:glow>
+          </a:effectLst>
+        </p:spPr>
+      </p:pic>
+      <p:pic>
+        <p:nvPicPr>
+          <p:cNvPr id="82" name="Graphic 81">
+            <a:extLst>
+              <a:ext uri="{FF2B5EF4-FFF2-40B4-BE49-F238E27FC236}">
+                <a16:creationId xmlns:a16="http://schemas.microsoft.com/office/drawing/2014/main" id="{3A2CF5A8-D4A6-C5A8-AA0B-11BB6B2F0FBA}"/>
+              </a:ext>
+            </a:extLst>
+          </p:cNvPr>
+          <p:cNvPicPr>
+            <a:picLocks noChangeAspect="1"/>
+          </p:cNvPicPr>
+          <p:nvPr/>
+        </p:nvPicPr>
+        <p:blipFill>
+          <a:blip r:embed="rId6">
+            <a:alphaModFix/>
+            <a:extLst>
+              <a:ext uri="{96DAC541-7B7A-43D3-8B79-37D633B846F1}">
+                <asvg:svgBlip xmlns:asvg="http://schemas.microsoft.com/office/drawing/2016/SVG/main" r:embed="rId14"/>
+              </a:ext>
+            </a:extLst>
+          </a:blip>
+          <a:stretch>
+            <a:fillRect/>
+          </a:stretch>
+        </p:blipFill>
+        <p:spPr>
+          <a:xfrm>
+            <a:off x="5331056" y="4876042"/>
+            <a:ext cx="1440000" cy="1431139"/>
+          </a:xfrm>
+          <a:prstGeom prst="rect">
+            <a:avLst/>
+          </a:prstGeom>
+          <a:effectLst>
+            <a:glow rad="368300">
+              <a:schemeClr val="tx1"/>
+            </a:glow>
+          </a:effectLst>
+        </p:spPr>
+      </p:pic>
+      <p:pic>
+        <p:nvPicPr>
+          <p:cNvPr id="83" name="Graphic 82">
+            <a:extLst>
+              <a:ext uri="{FF2B5EF4-FFF2-40B4-BE49-F238E27FC236}">
+                <a16:creationId xmlns:a16="http://schemas.microsoft.com/office/drawing/2014/main" id="{2A933643-4786-C5B5-77B4-0EEABD319215}"/>
+              </a:ext>
+            </a:extLst>
+          </p:cNvPr>
+          <p:cNvPicPr>
+            <a:picLocks noChangeAspect="1"/>
+          </p:cNvPicPr>
+          <p:nvPr/>
+        </p:nvPicPr>
+        <p:blipFill>
+          <a:blip r:embed="rId8">
+            <a:alphaModFix/>
+            <a:extLst>
+              <a:ext uri="{96DAC541-7B7A-43D3-8B79-37D633B846F1}">
+                <asvg:svgBlip xmlns:asvg="http://schemas.microsoft.com/office/drawing/2016/SVG/main" r:embed="rId15"/>
+              </a:ext>
+            </a:extLst>
+          </a:blip>
+          <a:stretch>
+            <a:fillRect/>
+          </a:stretch>
+        </p:blipFill>
+        <p:spPr>
+          <a:xfrm>
+            <a:off x="7576444" y="4871611"/>
+            <a:ext cx="1440000" cy="1440000"/>
+          </a:xfrm>
+          <a:prstGeom prst="rect">
+            <a:avLst/>
+          </a:prstGeom>
+          <a:effectLst>
+            <a:glow rad="368300">
+              <a:schemeClr val="tx1"/>
+            </a:glow>
+          </a:effectLst>
+        </p:spPr>
+      </p:pic>
+      <p:pic>
+        <p:nvPicPr>
+          <p:cNvPr id="84" name="Graphic 83">
+            <a:extLst>
+              <a:ext uri="{FF2B5EF4-FFF2-40B4-BE49-F238E27FC236}">
+                <a16:creationId xmlns:a16="http://schemas.microsoft.com/office/drawing/2014/main" id="{E0861FB2-0FBE-944F-7B7C-7D913AEAF0BC}"/>
+              </a:ext>
+            </a:extLst>
+          </p:cNvPr>
+          <p:cNvPicPr>
+            <a:picLocks noChangeAspect="1"/>
+          </p:cNvPicPr>
+          <p:nvPr/>
+        </p:nvPicPr>
+        <p:blipFill>
+          <a:blip r:embed="rId10">
+            <a:alphaModFix/>
+            <a:extLst>
+              <a:ext uri="{96DAC541-7B7A-43D3-8B79-37D633B846F1}">
+                <asvg:svgBlip xmlns:asvg="http://schemas.microsoft.com/office/drawing/2016/SVG/main" r:embed="rId16"/>
+              </a:ext>
+            </a:extLst>
+          </a:blip>
+          <a:stretch>
+            <a:fillRect/>
+          </a:stretch>
+        </p:blipFill>
+        <p:spPr>
+          <a:xfrm>
+            <a:off x="9815059" y="4871611"/>
+            <a:ext cx="1358960" cy="1440000"/>
+          </a:xfrm>
+          <a:prstGeom prst="rect">
+            <a:avLst/>
+          </a:prstGeom>
+          <a:effectLst>
+            <a:glow rad="368300">
+              <a:schemeClr val="tx1"/>
+            </a:glow>
+          </a:effectLst>
+        </p:spPr>
+      </p:pic>
+    </p:spTree>
+    <p:extLst>
+      <p:ext uri="{BB962C8B-B14F-4D97-AF65-F5344CB8AC3E}">
+        <p14:creationId xmlns:p14="http://schemas.microsoft.com/office/powerpoint/2010/main" val="2982037225"/>
+      </p:ext>
+    </p:extLst>
+  </p:cSld>
+  <p:clrMapOvr>
+    <a:masterClrMapping/>
+  </p:clrMapOvr>
+</p:sld>
+</file>
+
+<file path=ppt/slides/slide2.xml><?xml version="1.0" encoding="utf-8"?>
+<p:sld xmlns:a="http://schemas.openxmlformats.org/drawingml/2006/main" xmlns:r="http://schemas.openxmlformats.org/officeDocument/2006/relationships" xmlns:p="http://schemas.openxmlformats.org/presentationml/2006/main">
+  <p:cSld>
     <p:bg>
       <p:bgPr>
         <a:solidFill>
@@ -11001,7 +11632,7 @@
 </p:sld>
 </file>
 
-<file path=ppt/slides/slide2.xml><?xml version="1.0" encoding="utf-8"?>
+<file path=ppt/slides/slide3.xml><?xml version="1.0" encoding="utf-8"?>
 <p:sld xmlns:a="http://schemas.openxmlformats.org/drawingml/2006/main" xmlns:r="http://schemas.openxmlformats.org/officeDocument/2006/relationships" xmlns:p="http://schemas.openxmlformats.org/presentationml/2006/main">
   <p:cSld>
     <p:bg>

--- a/Icons_UI/bcpst.pptx
+++ b/Icons_UI/bcpst.pptx
@@ -8,6 +8,7 @@
     <p:sldId id="258" r:id="rId2"/>
     <p:sldId id="257" r:id="rId3"/>
     <p:sldId id="256" r:id="rId4"/>
+    <p:sldId id="259" r:id="rId5"/>
   </p:sldIdLst>
   <p:sldSz cx="12192000" cy="6858000"/>
   <p:notesSz cx="6858000" cy="9144000"/>
@@ -20695,6 +20696,1700 @@
 </p:sld>
 </file>
 
+<file path=ppt/slides/slide4.xml><?xml version="1.0" encoding="utf-8"?>
+<p:sld xmlns:a="http://schemas.openxmlformats.org/drawingml/2006/main" xmlns:r="http://schemas.openxmlformats.org/officeDocument/2006/relationships" xmlns:p="http://schemas.openxmlformats.org/presentationml/2006/main">
+  <p:cSld>
+    <p:spTree>
+      <p:nvGrpSpPr>
+        <p:cNvPr id="1" name=""/>
+        <p:cNvGrpSpPr/>
+        <p:nvPr/>
+      </p:nvGrpSpPr>
+      <p:grpSpPr>
+        <a:xfrm>
+          <a:off x="0" y="0"/>
+          <a:ext cx="0" cy="0"/>
+          <a:chOff x="0" y="0"/>
+          <a:chExt cx="0" cy="0"/>
+        </a:xfrm>
+      </p:grpSpPr>
+      <p:grpSp>
+        <p:nvGrpSpPr>
+          <p:cNvPr id="49" name="Group 48">
+            <a:extLst>
+              <a:ext uri="{FF2B5EF4-FFF2-40B4-BE49-F238E27FC236}">
+                <a16:creationId xmlns:a16="http://schemas.microsoft.com/office/drawing/2014/main" id="{6D069D2A-1855-CB1E-2758-F3608123E3A4}"/>
+              </a:ext>
+            </a:extLst>
+          </p:cNvPr>
+          <p:cNvGrpSpPr/>
+          <p:nvPr/>
+        </p:nvGrpSpPr>
+        <p:grpSpPr>
+          <a:xfrm>
+            <a:off x="759600" y="293525"/>
+            <a:ext cx="1500000" cy="1500000"/>
+            <a:chOff x="759600" y="293525"/>
+            <a:chExt cx="1500000" cy="1500000"/>
+          </a:xfrm>
+        </p:grpSpPr>
+        <p:sp>
+          <p:nvSpPr>
+            <p:cNvPr id="22" name="Freeform: Shape 21">
+              <a:extLst>
+                <a:ext uri="{FF2B5EF4-FFF2-40B4-BE49-F238E27FC236}">
+                  <a16:creationId xmlns:a16="http://schemas.microsoft.com/office/drawing/2014/main" id="{B52F5A64-879F-C768-28E0-D3B56EACF34F}"/>
+                </a:ext>
+              </a:extLst>
+            </p:cNvPr>
+            <p:cNvSpPr/>
+            <p:nvPr/>
+          </p:nvSpPr>
+          <p:spPr>
+            <a:xfrm>
+              <a:off x="1434600" y="293525"/>
+              <a:ext cx="150000" cy="225000"/>
+            </a:xfrm>
+            <a:custGeom>
+              <a:avLst/>
+              <a:gdLst>
+                <a:gd name="csX0" fmla="*/ 75000 w 150000"/>
+                <a:gd name="csY0" fmla="*/ 0 h 225000"/>
+                <a:gd name="csX1" fmla="*/ 150000 w 150000"/>
+                <a:gd name="csY1" fmla="*/ 75000 h 225000"/>
+                <a:gd name="csX2" fmla="*/ 150000 w 150000"/>
+                <a:gd name="csY2" fmla="*/ 150000 h 225000"/>
+                <a:gd name="csX3" fmla="*/ 75000 w 150000"/>
+                <a:gd name="csY3" fmla="*/ 225000 h 225000"/>
+                <a:gd name="csX4" fmla="*/ 0 w 150000"/>
+                <a:gd name="csY4" fmla="*/ 150000 h 225000"/>
+                <a:gd name="csX5" fmla="*/ 0 w 150000"/>
+                <a:gd name="csY5" fmla="*/ 75000 h 225000"/>
+                <a:gd name="csX6" fmla="*/ 75000 w 150000"/>
+                <a:gd name="csY6" fmla="*/ 0 h 225000"/>
+              </a:gdLst>
+              <a:ahLst/>
+              <a:cxnLst>
+                <a:cxn ang="0">
+                  <a:pos x="csX0" y="csY0"/>
+                </a:cxn>
+                <a:cxn ang="0">
+                  <a:pos x="csX1" y="csY1"/>
+                </a:cxn>
+                <a:cxn ang="0">
+                  <a:pos x="csX2" y="csY2"/>
+                </a:cxn>
+                <a:cxn ang="0">
+                  <a:pos x="csX3" y="csY3"/>
+                </a:cxn>
+                <a:cxn ang="0">
+                  <a:pos x="csX4" y="csY4"/>
+                </a:cxn>
+                <a:cxn ang="0">
+                  <a:pos x="csX5" y="csY5"/>
+                </a:cxn>
+                <a:cxn ang="0">
+                  <a:pos x="csX6" y="csY6"/>
+                </a:cxn>
+              </a:cxnLst>
+              <a:rect l="l" t="t" r="r" b="b"/>
+              <a:pathLst>
+                <a:path w="150000" h="225000">
+                  <a:moveTo>
+                    <a:pt x="75000" y="0"/>
+                  </a:moveTo>
+                  <a:cubicBezTo>
+                    <a:pt x="116423" y="0"/>
+                    <a:pt x="150000" y="33579"/>
+                    <a:pt x="150000" y="75000"/>
+                  </a:cubicBezTo>
+                  <a:lnTo>
+                    <a:pt x="150000" y="150000"/>
+                  </a:lnTo>
+                  <a:cubicBezTo>
+                    <a:pt x="150000" y="191421"/>
+                    <a:pt x="116423" y="225000"/>
+                    <a:pt x="75000" y="225000"/>
+                  </a:cubicBezTo>
+                  <a:cubicBezTo>
+                    <a:pt x="33577" y="225000"/>
+                    <a:pt x="0" y="191421"/>
+                    <a:pt x="0" y="150000"/>
+                  </a:cubicBezTo>
+                  <a:lnTo>
+                    <a:pt x="0" y="75000"/>
+                  </a:lnTo>
+                  <a:cubicBezTo>
+                    <a:pt x="0" y="33579"/>
+                    <a:pt x="33577" y="0"/>
+                    <a:pt x="75000" y="0"/>
+                  </a:cubicBezTo>
+                  <a:close/>
+                </a:path>
+              </a:pathLst>
+            </a:custGeom>
+            <a:solidFill>
+              <a:srgbClr val="000000"/>
+            </a:solidFill>
+            <a:ln w="74613" cap="flat">
+              <a:noFill/>
+              <a:prstDash val="solid"/>
+              <a:miter/>
+            </a:ln>
+          </p:spPr>
+          <p:txBody>
+            <a:bodyPr/>
+            <a:lstStyle/>
+            <a:p>
+              <a:endParaRPr lang="en-US"/>
+            </a:p>
+          </p:txBody>
+        </p:sp>
+        <p:sp>
+          <p:nvSpPr>
+            <p:cNvPr id="38" name="Freeform: Shape 37">
+              <a:extLst>
+                <a:ext uri="{FF2B5EF4-FFF2-40B4-BE49-F238E27FC236}">
+                  <a16:creationId xmlns:a16="http://schemas.microsoft.com/office/drawing/2014/main" id="{614CA2FD-7C2B-17F3-8843-B1A04E6EFBB7}"/>
+                </a:ext>
+              </a:extLst>
+            </p:cNvPr>
+            <p:cNvSpPr/>
+            <p:nvPr/>
+          </p:nvSpPr>
+          <p:spPr>
+            <a:xfrm>
+              <a:off x="1059600" y="593525"/>
+              <a:ext cx="900000" cy="900000"/>
+            </a:xfrm>
+            <a:custGeom>
+              <a:avLst/>
+              <a:gdLst>
+                <a:gd name="csX0" fmla="*/ 450000 w 900000"/>
+                <a:gd name="csY0" fmla="*/ 124306 h 900000"/>
+                <a:gd name="csX1" fmla="*/ 124306 w 900000"/>
+                <a:gd name="csY1" fmla="*/ 450000 h 900000"/>
+                <a:gd name="csX2" fmla="*/ 450000 w 900000"/>
+                <a:gd name="csY2" fmla="*/ 775694 h 900000"/>
+                <a:gd name="csX3" fmla="*/ 775694 w 900000"/>
+                <a:gd name="csY3" fmla="*/ 450000 h 900000"/>
+                <a:gd name="csX4" fmla="*/ 450000 w 900000"/>
+                <a:gd name="csY4" fmla="*/ 124306 h 900000"/>
+                <a:gd name="csX5" fmla="*/ 450000 w 900000"/>
+                <a:gd name="csY5" fmla="*/ 0 h 900000"/>
+                <a:gd name="csX6" fmla="*/ 900000 w 900000"/>
+                <a:gd name="csY6" fmla="*/ 450000 h 900000"/>
+                <a:gd name="csX7" fmla="*/ 450000 w 900000"/>
+                <a:gd name="csY7" fmla="*/ 900000 h 900000"/>
+                <a:gd name="csX8" fmla="*/ 0 w 900000"/>
+                <a:gd name="csY8" fmla="*/ 450000 h 900000"/>
+                <a:gd name="csX9" fmla="*/ 450000 w 900000"/>
+                <a:gd name="csY9" fmla="*/ 0 h 900000"/>
+              </a:gdLst>
+              <a:ahLst/>
+              <a:cxnLst>
+                <a:cxn ang="0">
+                  <a:pos x="csX0" y="csY0"/>
+                </a:cxn>
+                <a:cxn ang="0">
+                  <a:pos x="csX1" y="csY1"/>
+                </a:cxn>
+                <a:cxn ang="0">
+                  <a:pos x="csX2" y="csY2"/>
+                </a:cxn>
+                <a:cxn ang="0">
+                  <a:pos x="csX3" y="csY3"/>
+                </a:cxn>
+                <a:cxn ang="0">
+                  <a:pos x="csX4" y="csY4"/>
+                </a:cxn>
+                <a:cxn ang="0">
+                  <a:pos x="csX5" y="csY5"/>
+                </a:cxn>
+                <a:cxn ang="0">
+                  <a:pos x="csX6" y="csY6"/>
+                </a:cxn>
+                <a:cxn ang="0">
+                  <a:pos x="csX7" y="csY7"/>
+                </a:cxn>
+                <a:cxn ang="0">
+                  <a:pos x="csX8" y="csY8"/>
+                </a:cxn>
+                <a:cxn ang="0">
+                  <a:pos x="csX9" y="csY9"/>
+                </a:cxn>
+              </a:cxnLst>
+              <a:rect l="l" t="t" r="r" b="b"/>
+              <a:pathLst>
+                <a:path w="900000" h="900000">
+                  <a:moveTo>
+                    <a:pt x="450000" y="124306"/>
+                  </a:moveTo>
+                  <a:cubicBezTo>
+                    <a:pt x="270125" y="124306"/>
+                    <a:pt x="124306" y="270124"/>
+                    <a:pt x="124306" y="450000"/>
+                  </a:cubicBezTo>
+                  <a:cubicBezTo>
+                    <a:pt x="124306" y="629876"/>
+                    <a:pt x="270125" y="775694"/>
+                    <a:pt x="450000" y="775694"/>
+                  </a:cubicBezTo>
+                  <a:cubicBezTo>
+                    <a:pt x="629876" y="775694"/>
+                    <a:pt x="775694" y="629876"/>
+                    <a:pt x="775694" y="450000"/>
+                  </a:cubicBezTo>
+                  <a:cubicBezTo>
+                    <a:pt x="775694" y="270124"/>
+                    <a:pt x="629876" y="124306"/>
+                    <a:pt x="450000" y="124306"/>
+                  </a:cubicBezTo>
+                  <a:close/>
+                  <a:moveTo>
+                    <a:pt x="450000" y="0"/>
+                  </a:moveTo>
+                  <a:cubicBezTo>
+                    <a:pt x="698528" y="0"/>
+                    <a:pt x="900000" y="201472"/>
+                    <a:pt x="900000" y="450000"/>
+                  </a:cubicBezTo>
+                  <a:cubicBezTo>
+                    <a:pt x="900000" y="698528"/>
+                    <a:pt x="698528" y="900000"/>
+                    <a:pt x="450000" y="900000"/>
+                  </a:cubicBezTo>
+                  <a:cubicBezTo>
+                    <a:pt x="201472" y="900000"/>
+                    <a:pt x="0" y="698528"/>
+                    <a:pt x="0" y="450000"/>
+                  </a:cubicBezTo>
+                  <a:cubicBezTo>
+                    <a:pt x="0" y="201472"/>
+                    <a:pt x="201472" y="0"/>
+                    <a:pt x="450000" y="0"/>
+                  </a:cubicBezTo>
+                  <a:close/>
+                </a:path>
+              </a:pathLst>
+            </a:custGeom>
+            <a:solidFill>
+              <a:srgbClr val="000000"/>
+            </a:solidFill>
+            <a:ln w="74613" cap="flat">
+              <a:noFill/>
+              <a:prstDash val="solid"/>
+              <a:miter/>
+            </a:ln>
+          </p:spPr>
+          <p:txBody>
+            <a:bodyPr wrap="square">
+              <a:noAutofit/>
+            </a:bodyPr>
+            <a:lstStyle/>
+            <a:p>
+              <a:endParaRPr lang="en-US"/>
+            </a:p>
+          </p:txBody>
+        </p:sp>
+        <p:sp>
+          <p:nvSpPr>
+            <p:cNvPr id="24" name="Freeform: Shape 23">
+              <a:extLst>
+                <a:ext uri="{FF2B5EF4-FFF2-40B4-BE49-F238E27FC236}">
+                  <a16:creationId xmlns:a16="http://schemas.microsoft.com/office/drawing/2014/main" id="{8B4BBF9B-402C-3079-F298-CFE0F242F85E}"/>
+                </a:ext>
+              </a:extLst>
+            </p:cNvPr>
+            <p:cNvSpPr/>
+            <p:nvPr/>
+          </p:nvSpPr>
+          <p:spPr>
+            <a:xfrm>
+              <a:off x="1434600" y="1568525"/>
+              <a:ext cx="150000" cy="225000"/>
+            </a:xfrm>
+            <a:custGeom>
+              <a:avLst/>
+              <a:gdLst>
+                <a:gd name="csX0" fmla="*/ 150000 w 150000"/>
+                <a:gd name="csY0" fmla="*/ 75000 h 225000"/>
+                <a:gd name="csX1" fmla="*/ 75000 w 150000"/>
+                <a:gd name="csY1" fmla="*/ 0 h 225000"/>
+                <a:gd name="csX2" fmla="*/ 0 w 150000"/>
+                <a:gd name="csY2" fmla="*/ 75000 h 225000"/>
+                <a:gd name="csX3" fmla="*/ 0 w 150000"/>
+                <a:gd name="csY3" fmla="*/ 150000 h 225000"/>
+                <a:gd name="csX4" fmla="*/ 75000 w 150000"/>
+                <a:gd name="csY4" fmla="*/ 225000 h 225000"/>
+                <a:gd name="csX5" fmla="*/ 150000 w 150000"/>
+                <a:gd name="csY5" fmla="*/ 150000 h 225000"/>
+              </a:gdLst>
+              <a:ahLst/>
+              <a:cxnLst>
+                <a:cxn ang="0">
+                  <a:pos x="csX0" y="csY0"/>
+                </a:cxn>
+                <a:cxn ang="0">
+                  <a:pos x="csX1" y="csY1"/>
+                </a:cxn>
+                <a:cxn ang="0">
+                  <a:pos x="csX2" y="csY2"/>
+                </a:cxn>
+                <a:cxn ang="0">
+                  <a:pos x="csX3" y="csY3"/>
+                </a:cxn>
+                <a:cxn ang="0">
+                  <a:pos x="csX4" y="csY4"/>
+                </a:cxn>
+                <a:cxn ang="0">
+                  <a:pos x="csX5" y="csY5"/>
+                </a:cxn>
+              </a:cxnLst>
+              <a:rect l="l" t="t" r="r" b="b"/>
+              <a:pathLst>
+                <a:path w="150000" h="225000">
+                  <a:moveTo>
+                    <a:pt x="150000" y="75000"/>
+                  </a:moveTo>
+                  <a:cubicBezTo>
+                    <a:pt x="150000" y="33578"/>
+                    <a:pt x="116423" y="0"/>
+                    <a:pt x="75000" y="0"/>
+                  </a:cubicBezTo>
+                  <a:cubicBezTo>
+                    <a:pt x="33577" y="0"/>
+                    <a:pt x="0" y="33578"/>
+                    <a:pt x="0" y="75000"/>
+                  </a:cubicBezTo>
+                  <a:lnTo>
+                    <a:pt x="0" y="150000"/>
+                  </a:lnTo>
+                  <a:cubicBezTo>
+                    <a:pt x="0" y="191422"/>
+                    <a:pt x="33577" y="225000"/>
+                    <a:pt x="75000" y="225000"/>
+                  </a:cubicBezTo>
+                  <a:cubicBezTo>
+                    <a:pt x="116423" y="225000"/>
+                    <a:pt x="150000" y="191422"/>
+                    <a:pt x="150000" y="150000"/>
+                  </a:cubicBezTo>
+                  <a:close/>
+                </a:path>
+              </a:pathLst>
+            </a:custGeom>
+            <a:solidFill>
+              <a:srgbClr val="000000"/>
+            </a:solidFill>
+            <a:ln w="74613" cap="flat">
+              <a:noFill/>
+              <a:prstDash val="solid"/>
+              <a:miter/>
+            </a:ln>
+          </p:spPr>
+          <p:txBody>
+            <a:bodyPr/>
+            <a:lstStyle/>
+            <a:p>
+              <a:endParaRPr lang="en-US"/>
+            </a:p>
+          </p:txBody>
+        </p:sp>
+        <p:sp>
+          <p:nvSpPr>
+            <p:cNvPr id="25" name="Freeform: Shape 24">
+              <a:extLst>
+                <a:ext uri="{FF2B5EF4-FFF2-40B4-BE49-F238E27FC236}">
+                  <a16:creationId xmlns:a16="http://schemas.microsoft.com/office/drawing/2014/main" id="{95888366-DFD7-6E5D-E6FA-F5DF4A019DBB}"/>
+                </a:ext>
+              </a:extLst>
+            </p:cNvPr>
+            <p:cNvSpPr/>
+            <p:nvPr/>
+          </p:nvSpPr>
+          <p:spPr>
+            <a:xfrm>
+              <a:off x="2034600" y="968525"/>
+              <a:ext cx="225000" cy="150000"/>
+            </a:xfrm>
+            <a:custGeom>
+              <a:avLst/>
+              <a:gdLst>
+                <a:gd name="csX0" fmla="*/ 225000 w 225000"/>
+                <a:gd name="csY0" fmla="*/ 75000 h 150000"/>
+                <a:gd name="csX1" fmla="*/ 150000 w 225000"/>
+                <a:gd name="csY1" fmla="*/ 150000 h 150000"/>
+                <a:gd name="csX2" fmla="*/ 75000 w 225000"/>
+                <a:gd name="csY2" fmla="*/ 150000 h 150000"/>
+                <a:gd name="csX3" fmla="*/ 0 w 225000"/>
+                <a:gd name="csY3" fmla="*/ 75000 h 150000"/>
+                <a:gd name="csX4" fmla="*/ 75000 w 225000"/>
+                <a:gd name="csY4" fmla="*/ 0 h 150000"/>
+                <a:gd name="csX5" fmla="*/ 150000 w 225000"/>
+                <a:gd name="csY5" fmla="*/ 0 h 150000"/>
+                <a:gd name="csX6" fmla="*/ 225000 w 225000"/>
+                <a:gd name="csY6" fmla="*/ 75000 h 150000"/>
+              </a:gdLst>
+              <a:ahLst/>
+              <a:cxnLst>
+                <a:cxn ang="0">
+                  <a:pos x="csX0" y="csY0"/>
+                </a:cxn>
+                <a:cxn ang="0">
+                  <a:pos x="csX1" y="csY1"/>
+                </a:cxn>
+                <a:cxn ang="0">
+                  <a:pos x="csX2" y="csY2"/>
+                </a:cxn>
+                <a:cxn ang="0">
+                  <a:pos x="csX3" y="csY3"/>
+                </a:cxn>
+                <a:cxn ang="0">
+                  <a:pos x="csX4" y="csY4"/>
+                </a:cxn>
+                <a:cxn ang="0">
+                  <a:pos x="csX5" y="csY5"/>
+                </a:cxn>
+                <a:cxn ang="0">
+                  <a:pos x="csX6" y="csY6"/>
+                </a:cxn>
+              </a:cxnLst>
+              <a:rect l="l" t="t" r="r" b="b"/>
+              <a:pathLst>
+                <a:path w="225000" h="150000">
+                  <a:moveTo>
+                    <a:pt x="225000" y="75000"/>
+                  </a:moveTo>
+                  <a:cubicBezTo>
+                    <a:pt x="225000" y="116423"/>
+                    <a:pt x="191422" y="150000"/>
+                    <a:pt x="150000" y="150000"/>
+                  </a:cubicBezTo>
+                  <a:lnTo>
+                    <a:pt x="75000" y="150000"/>
+                  </a:lnTo>
+                  <a:cubicBezTo>
+                    <a:pt x="33578" y="150000"/>
+                    <a:pt x="0" y="116423"/>
+                    <a:pt x="0" y="75000"/>
+                  </a:cubicBezTo>
+                  <a:cubicBezTo>
+                    <a:pt x="0" y="33577"/>
+                    <a:pt x="33578" y="0"/>
+                    <a:pt x="75000" y="0"/>
+                  </a:cubicBezTo>
+                  <a:lnTo>
+                    <a:pt x="150000" y="0"/>
+                  </a:lnTo>
+                  <a:cubicBezTo>
+                    <a:pt x="191422" y="0"/>
+                    <a:pt x="225000" y="33577"/>
+                    <a:pt x="225000" y="75000"/>
+                  </a:cubicBezTo>
+                  <a:close/>
+                </a:path>
+              </a:pathLst>
+            </a:custGeom>
+            <a:solidFill>
+              <a:srgbClr val="000000"/>
+            </a:solidFill>
+            <a:ln w="74613" cap="flat">
+              <a:noFill/>
+              <a:prstDash val="solid"/>
+              <a:miter/>
+            </a:ln>
+          </p:spPr>
+          <p:txBody>
+            <a:bodyPr/>
+            <a:lstStyle/>
+            <a:p>
+              <a:endParaRPr lang="en-US"/>
+            </a:p>
+          </p:txBody>
+        </p:sp>
+        <p:sp>
+          <p:nvSpPr>
+            <p:cNvPr id="26" name="Freeform: Shape 25">
+              <a:extLst>
+                <a:ext uri="{FF2B5EF4-FFF2-40B4-BE49-F238E27FC236}">
+                  <a16:creationId xmlns:a16="http://schemas.microsoft.com/office/drawing/2014/main" id="{0AAFEEE1-EF3F-5C43-C379-AA27E42FFA06}"/>
+                </a:ext>
+              </a:extLst>
+            </p:cNvPr>
+            <p:cNvSpPr/>
+            <p:nvPr/>
+          </p:nvSpPr>
+          <p:spPr>
+            <a:xfrm>
+              <a:off x="759600" y="968525"/>
+              <a:ext cx="225000" cy="150000"/>
+            </a:xfrm>
+            <a:custGeom>
+              <a:avLst/>
+              <a:gdLst>
+                <a:gd name="csX0" fmla="*/ 150000 w 225000"/>
+                <a:gd name="csY0" fmla="*/ 150000 h 150000"/>
+                <a:gd name="csX1" fmla="*/ 225000 w 225000"/>
+                <a:gd name="csY1" fmla="*/ 75000 h 150000"/>
+                <a:gd name="csX2" fmla="*/ 150000 w 225000"/>
+                <a:gd name="csY2" fmla="*/ 0 h 150000"/>
+                <a:gd name="csX3" fmla="*/ 75000 w 225000"/>
+                <a:gd name="csY3" fmla="*/ 0 h 150000"/>
+                <a:gd name="csX4" fmla="*/ 0 w 225000"/>
+                <a:gd name="csY4" fmla="*/ 75000 h 150000"/>
+                <a:gd name="csX5" fmla="*/ 75000 w 225000"/>
+                <a:gd name="csY5" fmla="*/ 150000 h 150000"/>
+              </a:gdLst>
+              <a:ahLst/>
+              <a:cxnLst>
+                <a:cxn ang="0">
+                  <a:pos x="csX0" y="csY0"/>
+                </a:cxn>
+                <a:cxn ang="0">
+                  <a:pos x="csX1" y="csY1"/>
+                </a:cxn>
+                <a:cxn ang="0">
+                  <a:pos x="csX2" y="csY2"/>
+                </a:cxn>
+                <a:cxn ang="0">
+                  <a:pos x="csX3" y="csY3"/>
+                </a:cxn>
+                <a:cxn ang="0">
+                  <a:pos x="csX4" y="csY4"/>
+                </a:cxn>
+                <a:cxn ang="0">
+                  <a:pos x="csX5" y="csY5"/>
+                </a:cxn>
+              </a:cxnLst>
+              <a:rect l="l" t="t" r="r" b="b"/>
+              <a:pathLst>
+                <a:path w="225000" h="150000">
+                  <a:moveTo>
+                    <a:pt x="150000" y="150000"/>
+                  </a:moveTo>
+                  <a:cubicBezTo>
+                    <a:pt x="191421" y="150000"/>
+                    <a:pt x="225000" y="116423"/>
+                    <a:pt x="225000" y="75000"/>
+                  </a:cubicBezTo>
+                  <a:cubicBezTo>
+                    <a:pt x="225000" y="33577"/>
+                    <a:pt x="191421" y="0"/>
+                    <a:pt x="150000" y="0"/>
+                  </a:cubicBezTo>
+                  <a:lnTo>
+                    <a:pt x="75000" y="0"/>
+                  </a:lnTo>
+                  <a:cubicBezTo>
+                    <a:pt x="33579" y="0"/>
+                    <a:pt x="0" y="33577"/>
+                    <a:pt x="0" y="75000"/>
+                  </a:cubicBezTo>
+                  <a:cubicBezTo>
+                    <a:pt x="0" y="116423"/>
+                    <a:pt x="33579" y="150000"/>
+                    <a:pt x="75000" y="150000"/>
+                  </a:cubicBezTo>
+                  <a:close/>
+                </a:path>
+              </a:pathLst>
+            </a:custGeom>
+            <a:solidFill>
+              <a:srgbClr val="000000"/>
+            </a:solidFill>
+            <a:ln w="74613" cap="flat">
+              <a:noFill/>
+              <a:prstDash val="solid"/>
+              <a:miter/>
+            </a:ln>
+          </p:spPr>
+          <p:txBody>
+            <a:bodyPr/>
+            <a:lstStyle/>
+            <a:p>
+              <a:endParaRPr lang="en-US"/>
+            </a:p>
+          </p:txBody>
+        </p:sp>
+        <p:sp>
+          <p:nvSpPr>
+            <p:cNvPr id="27" name="Freeform: Shape 26">
+              <a:extLst>
+                <a:ext uri="{FF2B5EF4-FFF2-40B4-BE49-F238E27FC236}">
+                  <a16:creationId xmlns:a16="http://schemas.microsoft.com/office/drawing/2014/main" id="{A197FA17-EF21-0C3C-E02F-642A97AFDAEA}"/>
+                </a:ext>
+              </a:extLst>
+            </p:cNvPr>
+            <p:cNvSpPr/>
+            <p:nvPr/>
+          </p:nvSpPr>
+          <p:spPr>
+            <a:xfrm>
+              <a:off x="1858863" y="491228"/>
+              <a:ext cx="203034" cy="203033"/>
+            </a:xfrm>
+            <a:custGeom>
+              <a:avLst/>
+              <a:gdLst>
+                <a:gd name="csX0" fmla="*/ 181069 w 203034"/>
+                <a:gd name="csY0" fmla="*/ 128033 h 203033"/>
+                <a:gd name="csX1" fmla="*/ 128036 w 203034"/>
+                <a:gd name="csY1" fmla="*/ 181066 h 203033"/>
+                <a:gd name="csX2" fmla="*/ 21971 w 203034"/>
+                <a:gd name="csY2" fmla="*/ 181066 h 203033"/>
+                <a:gd name="csX3" fmla="*/ 21971 w 203034"/>
+                <a:gd name="csY3" fmla="*/ 75000 h 203033"/>
+                <a:gd name="csX4" fmla="*/ 75004 w 203034"/>
+                <a:gd name="csY4" fmla="*/ 21967 h 203033"/>
+                <a:gd name="csX5" fmla="*/ 181069 w 203034"/>
+                <a:gd name="csY5" fmla="*/ 21967 h 203033"/>
+                <a:gd name="csX6" fmla="*/ 181069 w 203034"/>
+                <a:gd name="csY6" fmla="*/ 128033 h 203033"/>
+              </a:gdLst>
+              <a:ahLst/>
+              <a:cxnLst>
+                <a:cxn ang="0">
+                  <a:pos x="csX0" y="csY0"/>
+                </a:cxn>
+                <a:cxn ang="0">
+                  <a:pos x="csX1" y="csY1"/>
+                </a:cxn>
+                <a:cxn ang="0">
+                  <a:pos x="csX2" y="csY2"/>
+                </a:cxn>
+                <a:cxn ang="0">
+                  <a:pos x="csX3" y="csY3"/>
+                </a:cxn>
+                <a:cxn ang="0">
+                  <a:pos x="csX4" y="csY4"/>
+                </a:cxn>
+                <a:cxn ang="0">
+                  <a:pos x="csX5" y="csY5"/>
+                </a:cxn>
+                <a:cxn ang="0">
+                  <a:pos x="csX6" y="csY6"/>
+                </a:cxn>
+              </a:cxnLst>
+              <a:rect l="l" t="t" r="r" b="b"/>
+              <a:pathLst>
+                <a:path w="203034" h="203033">
+                  <a:moveTo>
+                    <a:pt x="181069" y="128033"/>
+                  </a:moveTo>
+                  <a:lnTo>
+                    <a:pt x="128036" y="181066"/>
+                  </a:lnTo>
+                  <a:cubicBezTo>
+                    <a:pt x="98741" y="210356"/>
+                    <a:pt x="51259" y="210356"/>
+                    <a:pt x="21971" y="181066"/>
+                  </a:cubicBezTo>
+                  <a:cubicBezTo>
+                    <a:pt x="-7324" y="151777"/>
+                    <a:pt x="-7324" y="104289"/>
+                    <a:pt x="21971" y="75000"/>
+                  </a:cubicBezTo>
+                  <a:lnTo>
+                    <a:pt x="75004" y="21967"/>
+                  </a:lnTo>
+                  <a:cubicBezTo>
+                    <a:pt x="104291" y="-7322"/>
+                    <a:pt x="151774" y="-7322"/>
+                    <a:pt x="181069" y="21967"/>
+                  </a:cubicBezTo>
+                  <a:cubicBezTo>
+                    <a:pt x="210356" y="51256"/>
+                    <a:pt x="210356" y="98743"/>
+                    <a:pt x="181069" y="128033"/>
+                  </a:cubicBezTo>
+                  <a:close/>
+                </a:path>
+              </a:pathLst>
+            </a:custGeom>
+            <a:solidFill>
+              <a:srgbClr val="000000"/>
+            </a:solidFill>
+            <a:ln w="74613" cap="flat">
+              <a:noFill/>
+              <a:prstDash val="solid"/>
+              <a:miter/>
+            </a:ln>
+          </p:spPr>
+          <p:txBody>
+            <a:bodyPr/>
+            <a:lstStyle/>
+            <a:p>
+              <a:endParaRPr lang="en-US"/>
+            </a:p>
+          </p:txBody>
+        </p:sp>
+        <p:sp>
+          <p:nvSpPr>
+            <p:cNvPr id="28" name="Freeform: Shape 27">
+              <a:extLst>
+                <a:ext uri="{FF2B5EF4-FFF2-40B4-BE49-F238E27FC236}">
+                  <a16:creationId xmlns:a16="http://schemas.microsoft.com/office/drawing/2014/main" id="{92176164-2296-22B1-0452-261DAB364F5F}"/>
+                </a:ext>
+              </a:extLst>
+            </p:cNvPr>
+            <p:cNvSpPr/>
+            <p:nvPr/>
+          </p:nvSpPr>
+          <p:spPr>
+            <a:xfrm>
+              <a:off x="957302" y="1392786"/>
+              <a:ext cx="203033" cy="203036"/>
+            </a:xfrm>
+            <a:custGeom>
+              <a:avLst/>
+              <a:gdLst>
+                <a:gd name="csX0" fmla="*/ 181066 w 203033"/>
+                <a:gd name="csY0" fmla="*/ 128038 h 203036"/>
+                <a:gd name="csX1" fmla="*/ 181066 w 203033"/>
+                <a:gd name="csY1" fmla="*/ 21966 h 203036"/>
+                <a:gd name="csX2" fmla="*/ 75000 w 203033"/>
+                <a:gd name="csY2" fmla="*/ 21966 h 203036"/>
+                <a:gd name="csX3" fmla="*/ 21967 w 203033"/>
+                <a:gd name="csY3" fmla="*/ 75006 h 203036"/>
+                <a:gd name="csX4" fmla="*/ 21967 w 203033"/>
+                <a:gd name="csY4" fmla="*/ 181071 h 203036"/>
+                <a:gd name="csX5" fmla="*/ 128033 w 203033"/>
+                <a:gd name="csY5" fmla="*/ 181071 h 203036"/>
+              </a:gdLst>
+              <a:ahLst/>
+              <a:cxnLst>
+                <a:cxn ang="0">
+                  <a:pos x="csX0" y="csY0"/>
+                </a:cxn>
+                <a:cxn ang="0">
+                  <a:pos x="csX1" y="csY1"/>
+                </a:cxn>
+                <a:cxn ang="0">
+                  <a:pos x="csX2" y="csY2"/>
+                </a:cxn>
+                <a:cxn ang="0">
+                  <a:pos x="csX3" y="csY3"/>
+                </a:cxn>
+                <a:cxn ang="0">
+                  <a:pos x="csX4" y="csY4"/>
+                </a:cxn>
+                <a:cxn ang="0">
+                  <a:pos x="csX5" y="csY5"/>
+                </a:cxn>
+              </a:cxnLst>
+              <a:rect l="l" t="t" r="r" b="b"/>
+              <a:pathLst>
+                <a:path w="203033" h="203036">
+                  <a:moveTo>
+                    <a:pt x="181066" y="128038"/>
+                  </a:moveTo>
+                  <a:cubicBezTo>
+                    <a:pt x="210355" y="98743"/>
+                    <a:pt x="210355" y="51261"/>
+                    <a:pt x="181066" y="21966"/>
+                  </a:cubicBezTo>
+                  <a:cubicBezTo>
+                    <a:pt x="151777" y="-7322"/>
+                    <a:pt x="104290" y="-7322"/>
+                    <a:pt x="75000" y="21966"/>
+                  </a:cubicBezTo>
+                  <a:lnTo>
+                    <a:pt x="21967" y="75006"/>
+                  </a:lnTo>
+                  <a:cubicBezTo>
+                    <a:pt x="-7322" y="104293"/>
+                    <a:pt x="-7322" y="151776"/>
+                    <a:pt x="21967" y="181071"/>
+                  </a:cubicBezTo>
+                  <a:cubicBezTo>
+                    <a:pt x="51256" y="210358"/>
+                    <a:pt x="98744" y="210358"/>
+                    <a:pt x="128033" y="181071"/>
+                  </a:cubicBezTo>
+                  <a:close/>
+                </a:path>
+              </a:pathLst>
+            </a:custGeom>
+            <a:solidFill>
+              <a:srgbClr val="000000"/>
+            </a:solidFill>
+            <a:ln w="74613" cap="flat">
+              <a:noFill/>
+              <a:prstDash val="solid"/>
+              <a:miter/>
+            </a:ln>
+          </p:spPr>
+          <p:txBody>
+            <a:bodyPr/>
+            <a:lstStyle/>
+            <a:p>
+              <a:endParaRPr lang="en-US"/>
+            </a:p>
+          </p:txBody>
+        </p:sp>
+        <p:sp>
+          <p:nvSpPr>
+            <p:cNvPr id="29" name="Freeform: Shape 28">
+              <a:extLst>
+                <a:ext uri="{FF2B5EF4-FFF2-40B4-BE49-F238E27FC236}">
+                  <a16:creationId xmlns:a16="http://schemas.microsoft.com/office/drawing/2014/main" id="{765E1BF9-A829-F404-54BD-0AC69E768EEB}"/>
+                </a:ext>
+              </a:extLst>
+            </p:cNvPr>
+            <p:cNvSpPr/>
+            <p:nvPr/>
+          </p:nvSpPr>
+          <p:spPr>
+            <a:xfrm>
+              <a:off x="1858863" y="1392786"/>
+              <a:ext cx="203034" cy="203036"/>
+            </a:xfrm>
+            <a:custGeom>
+              <a:avLst/>
+              <a:gdLst>
+                <a:gd name="csX0" fmla="*/ 75004 w 203034"/>
+                <a:gd name="csY0" fmla="*/ 181071 h 203036"/>
+                <a:gd name="csX1" fmla="*/ 21971 w 203034"/>
+                <a:gd name="csY1" fmla="*/ 128038 h 203036"/>
+                <a:gd name="csX2" fmla="*/ 21971 w 203034"/>
+                <a:gd name="csY2" fmla="*/ 21966 h 203036"/>
+                <a:gd name="csX3" fmla="*/ 128036 w 203034"/>
+                <a:gd name="csY3" fmla="*/ 21966 h 203036"/>
+                <a:gd name="csX4" fmla="*/ 181069 w 203034"/>
+                <a:gd name="csY4" fmla="*/ 75006 h 203036"/>
+                <a:gd name="csX5" fmla="*/ 181069 w 203034"/>
+                <a:gd name="csY5" fmla="*/ 181071 h 203036"/>
+                <a:gd name="csX6" fmla="*/ 75004 w 203034"/>
+                <a:gd name="csY6" fmla="*/ 181071 h 203036"/>
+              </a:gdLst>
+              <a:ahLst/>
+              <a:cxnLst>
+                <a:cxn ang="0">
+                  <a:pos x="csX0" y="csY0"/>
+                </a:cxn>
+                <a:cxn ang="0">
+                  <a:pos x="csX1" y="csY1"/>
+                </a:cxn>
+                <a:cxn ang="0">
+                  <a:pos x="csX2" y="csY2"/>
+                </a:cxn>
+                <a:cxn ang="0">
+                  <a:pos x="csX3" y="csY3"/>
+                </a:cxn>
+                <a:cxn ang="0">
+                  <a:pos x="csX4" y="csY4"/>
+                </a:cxn>
+                <a:cxn ang="0">
+                  <a:pos x="csX5" y="csY5"/>
+                </a:cxn>
+                <a:cxn ang="0">
+                  <a:pos x="csX6" y="csY6"/>
+                </a:cxn>
+              </a:cxnLst>
+              <a:rect l="l" t="t" r="r" b="b"/>
+              <a:pathLst>
+                <a:path w="203034" h="203036">
+                  <a:moveTo>
+                    <a:pt x="75004" y="181071"/>
+                  </a:moveTo>
+                  <a:lnTo>
+                    <a:pt x="21971" y="128038"/>
+                  </a:lnTo>
+                  <a:cubicBezTo>
+                    <a:pt x="-7324" y="98743"/>
+                    <a:pt x="-7324" y="51261"/>
+                    <a:pt x="21971" y="21966"/>
+                  </a:cubicBezTo>
+                  <a:cubicBezTo>
+                    <a:pt x="51259" y="-7322"/>
+                    <a:pt x="98741" y="-7322"/>
+                    <a:pt x="128036" y="21966"/>
+                  </a:cubicBezTo>
+                  <a:lnTo>
+                    <a:pt x="181069" y="75006"/>
+                  </a:lnTo>
+                  <a:cubicBezTo>
+                    <a:pt x="210356" y="104293"/>
+                    <a:pt x="210356" y="151776"/>
+                    <a:pt x="181069" y="181071"/>
+                  </a:cubicBezTo>
+                  <a:cubicBezTo>
+                    <a:pt x="151781" y="210358"/>
+                    <a:pt x="104291" y="210358"/>
+                    <a:pt x="75004" y="181071"/>
+                  </a:cubicBezTo>
+                  <a:close/>
+                </a:path>
+              </a:pathLst>
+            </a:custGeom>
+            <a:solidFill>
+              <a:srgbClr val="000000"/>
+            </a:solidFill>
+            <a:ln w="74613" cap="flat">
+              <a:noFill/>
+              <a:prstDash val="solid"/>
+              <a:miter/>
+            </a:ln>
+          </p:spPr>
+          <p:txBody>
+            <a:bodyPr/>
+            <a:lstStyle/>
+            <a:p>
+              <a:endParaRPr lang="en-US"/>
+            </a:p>
+          </p:txBody>
+        </p:sp>
+        <p:sp>
+          <p:nvSpPr>
+            <p:cNvPr id="30" name="Freeform: Shape 29">
+              <a:extLst>
+                <a:ext uri="{FF2B5EF4-FFF2-40B4-BE49-F238E27FC236}">
+                  <a16:creationId xmlns:a16="http://schemas.microsoft.com/office/drawing/2014/main" id="{17180D62-5E12-EB0C-ACB8-D6EBADECF2D0}"/>
+                </a:ext>
+              </a:extLst>
+            </p:cNvPr>
+            <p:cNvSpPr/>
+            <p:nvPr/>
+          </p:nvSpPr>
+          <p:spPr>
+            <a:xfrm>
+              <a:off x="957302" y="491228"/>
+              <a:ext cx="203033" cy="203033"/>
+            </a:xfrm>
+            <a:custGeom>
+              <a:avLst/>
+              <a:gdLst>
+                <a:gd name="csX0" fmla="*/ 75000 w 203033"/>
+                <a:gd name="csY0" fmla="*/ 181066 h 203033"/>
+                <a:gd name="csX1" fmla="*/ 181066 w 203033"/>
+                <a:gd name="csY1" fmla="*/ 181066 h 203033"/>
+                <a:gd name="csX2" fmla="*/ 181066 w 203033"/>
+                <a:gd name="csY2" fmla="*/ 75000 h 203033"/>
+                <a:gd name="csX3" fmla="*/ 128033 w 203033"/>
+                <a:gd name="csY3" fmla="*/ 21967 h 203033"/>
+                <a:gd name="csX4" fmla="*/ 21967 w 203033"/>
+                <a:gd name="csY4" fmla="*/ 21967 h 203033"/>
+                <a:gd name="csX5" fmla="*/ 21967 w 203033"/>
+                <a:gd name="csY5" fmla="*/ 128033 h 203033"/>
+              </a:gdLst>
+              <a:ahLst/>
+              <a:cxnLst>
+                <a:cxn ang="0">
+                  <a:pos x="csX0" y="csY0"/>
+                </a:cxn>
+                <a:cxn ang="0">
+                  <a:pos x="csX1" y="csY1"/>
+                </a:cxn>
+                <a:cxn ang="0">
+                  <a:pos x="csX2" y="csY2"/>
+                </a:cxn>
+                <a:cxn ang="0">
+                  <a:pos x="csX3" y="csY3"/>
+                </a:cxn>
+                <a:cxn ang="0">
+                  <a:pos x="csX4" y="csY4"/>
+                </a:cxn>
+                <a:cxn ang="0">
+                  <a:pos x="csX5" y="csY5"/>
+                </a:cxn>
+              </a:cxnLst>
+              <a:rect l="l" t="t" r="r" b="b"/>
+              <a:pathLst>
+                <a:path w="203033" h="203033">
+                  <a:moveTo>
+                    <a:pt x="75000" y="181066"/>
+                  </a:moveTo>
+                  <a:cubicBezTo>
+                    <a:pt x="104290" y="210356"/>
+                    <a:pt x="151777" y="210356"/>
+                    <a:pt x="181066" y="181066"/>
+                  </a:cubicBezTo>
+                  <a:cubicBezTo>
+                    <a:pt x="210355" y="151777"/>
+                    <a:pt x="210355" y="104289"/>
+                    <a:pt x="181066" y="75000"/>
+                  </a:cubicBezTo>
+                  <a:lnTo>
+                    <a:pt x="128033" y="21967"/>
+                  </a:lnTo>
+                  <a:cubicBezTo>
+                    <a:pt x="98744" y="-7322"/>
+                    <a:pt x="51256" y="-7322"/>
+                    <a:pt x="21967" y="21967"/>
+                  </a:cubicBezTo>
+                  <a:cubicBezTo>
+                    <a:pt x="-7322" y="51256"/>
+                    <a:pt x="-7322" y="98743"/>
+                    <a:pt x="21967" y="128033"/>
+                  </a:cubicBezTo>
+                  <a:close/>
+                </a:path>
+              </a:pathLst>
+            </a:custGeom>
+            <a:solidFill>
+              <a:srgbClr val="000000"/>
+            </a:solidFill>
+            <a:ln w="74613" cap="flat">
+              <a:noFill/>
+              <a:prstDash val="solid"/>
+              <a:miter/>
+            </a:ln>
+          </p:spPr>
+          <p:txBody>
+            <a:bodyPr/>
+            <a:lstStyle/>
+            <a:p>
+              <a:endParaRPr lang="en-US"/>
+            </a:p>
+          </p:txBody>
+        </p:sp>
+      </p:grpSp>
+      <p:sp>
+        <p:nvSpPr>
+          <p:cNvPr id="35" name="Freeform: Shape 34">
+            <a:extLst>
+              <a:ext uri="{FF2B5EF4-FFF2-40B4-BE49-F238E27FC236}">
+                <a16:creationId xmlns:a16="http://schemas.microsoft.com/office/drawing/2014/main" id="{DBFFE6FC-20FA-BDB9-9377-208B24B8D088}"/>
+              </a:ext>
+            </a:extLst>
+          </p:cNvPr>
+          <p:cNvSpPr/>
+          <p:nvPr/>
+        </p:nvSpPr>
+        <p:spPr>
+          <a:xfrm rot="19319567">
+            <a:off x="3611767" y="675989"/>
+            <a:ext cx="627137" cy="900000"/>
+          </a:xfrm>
+          <a:custGeom>
+            <a:avLst/>
+            <a:gdLst>
+              <a:gd name="csX0" fmla="*/ 450000 w 645150"/>
+              <a:gd name="csY0" fmla="*/ 0 h 900000"/>
+              <a:gd name="csX1" fmla="*/ 625161 w 645150"/>
+              <a:gd name="csY1" fmla="*/ 35364 h 900000"/>
+              <a:gd name="csX2" fmla="*/ 645150 w 645150"/>
+              <a:gd name="csY2" fmla="*/ 46214 h 900000"/>
+              <a:gd name="csX3" fmla="*/ 588701 w 645150"/>
+              <a:gd name="csY3" fmla="*/ 76853 h 900000"/>
+              <a:gd name="csX4" fmla="*/ 390300 w 645150"/>
+              <a:gd name="csY4" fmla="*/ 450000 h 900000"/>
+              <a:gd name="csX5" fmla="*/ 588701 w 645150"/>
+              <a:gd name="csY5" fmla="*/ 823147 h 900000"/>
+              <a:gd name="csX6" fmla="*/ 645150 w 645150"/>
+              <a:gd name="csY6" fmla="*/ 853787 h 900000"/>
+              <a:gd name="csX7" fmla="*/ 625161 w 645150"/>
+              <a:gd name="csY7" fmla="*/ 864637 h 900000"/>
+              <a:gd name="csX8" fmla="*/ 450000 w 645150"/>
+              <a:gd name="csY8" fmla="*/ 900000 h 900000"/>
+              <a:gd name="csX9" fmla="*/ 0 w 645150"/>
+              <a:gd name="csY9" fmla="*/ 450000 h 900000"/>
+              <a:gd name="csX10" fmla="*/ 450000 w 645150"/>
+              <a:gd name="csY10" fmla="*/ 0 h 900000"/>
+              <a:gd name="csX0" fmla="*/ 450000 w 645150"/>
+              <a:gd name="csY0" fmla="*/ 0 h 900000"/>
+              <a:gd name="csX1" fmla="*/ 625161 w 645150"/>
+              <a:gd name="csY1" fmla="*/ 35364 h 900000"/>
+              <a:gd name="csX2" fmla="*/ 588701 w 645150"/>
+              <a:gd name="csY2" fmla="*/ 76853 h 900000"/>
+              <a:gd name="csX3" fmla="*/ 390300 w 645150"/>
+              <a:gd name="csY3" fmla="*/ 450000 h 900000"/>
+              <a:gd name="csX4" fmla="*/ 588701 w 645150"/>
+              <a:gd name="csY4" fmla="*/ 823147 h 900000"/>
+              <a:gd name="csX5" fmla="*/ 645150 w 645150"/>
+              <a:gd name="csY5" fmla="*/ 853787 h 900000"/>
+              <a:gd name="csX6" fmla="*/ 625161 w 645150"/>
+              <a:gd name="csY6" fmla="*/ 864637 h 900000"/>
+              <a:gd name="csX7" fmla="*/ 450000 w 645150"/>
+              <a:gd name="csY7" fmla="*/ 900000 h 900000"/>
+              <a:gd name="csX8" fmla="*/ 0 w 645150"/>
+              <a:gd name="csY8" fmla="*/ 450000 h 900000"/>
+              <a:gd name="csX9" fmla="*/ 450000 w 645150"/>
+              <a:gd name="csY9" fmla="*/ 0 h 900000"/>
+              <a:gd name="csX0" fmla="*/ 450000 w 625161"/>
+              <a:gd name="csY0" fmla="*/ 0 h 900000"/>
+              <a:gd name="csX1" fmla="*/ 625161 w 625161"/>
+              <a:gd name="csY1" fmla="*/ 35364 h 900000"/>
+              <a:gd name="csX2" fmla="*/ 588701 w 625161"/>
+              <a:gd name="csY2" fmla="*/ 76853 h 900000"/>
+              <a:gd name="csX3" fmla="*/ 390300 w 625161"/>
+              <a:gd name="csY3" fmla="*/ 450000 h 900000"/>
+              <a:gd name="csX4" fmla="*/ 588701 w 625161"/>
+              <a:gd name="csY4" fmla="*/ 823147 h 900000"/>
+              <a:gd name="csX5" fmla="*/ 625161 w 625161"/>
+              <a:gd name="csY5" fmla="*/ 864637 h 900000"/>
+              <a:gd name="csX6" fmla="*/ 450000 w 625161"/>
+              <a:gd name="csY6" fmla="*/ 900000 h 900000"/>
+              <a:gd name="csX7" fmla="*/ 0 w 625161"/>
+              <a:gd name="csY7" fmla="*/ 450000 h 900000"/>
+              <a:gd name="csX8" fmla="*/ 450000 w 625161"/>
+              <a:gd name="csY8" fmla="*/ 0 h 900000"/>
+              <a:gd name="csX0" fmla="*/ 450000 w 627137"/>
+              <a:gd name="csY0" fmla="*/ 0 h 900000"/>
+              <a:gd name="csX1" fmla="*/ 625161 w 627137"/>
+              <a:gd name="csY1" fmla="*/ 35364 h 900000"/>
+              <a:gd name="csX2" fmla="*/ 588701 w 627137"/>
+              <a:gd name="csY2" fmla="*/ 76853 h 900000"/>
+              <a:gd name="csX3" fmla="*/ 390300 w 627137"/>
+              <a:gd name="csY3" fmla="*/ 450000 h 900000"/>
+              <a:gd name="csX4" fmla="*/ 588701 w 627137"/>
+              <a:gd name="csY4" fmla="*/ 823147 h 900000"/>
+              <a:gd name="csX5" fmla="*/ 625161 w 627137"/>
+              <a:gd name="csY5" fmla="*/ 864637 h 900000"/>
+              <a:gd name="csX6" fmla="*/ 450000 w 627137"/>
+              <a:gd name="csY6" fmla="*/ 900000 h 900000"/>
+              <a:gd name="csX7" fmla="*/ 0 w 627137"/>
+              <a:gd name="csY7" fmla="*/ 450000 h 900000"/>
+              <a:gd name="csX8" fmla="*/ 450000 w 627137"/>
+              <a:gd name="csY8" fmla="*/ 0 h 900000"/>
+              <a:gd name="csX0" fmla="*/ 450000 w 627137"/>
+              <a:gd name="csY0" fmla="*/ 0 h 900000"/>
+              <a:gd name="csX1" fmla="*/ 625161 w 627137"/>
+              <a:gd name="csY1" fmla="*/ 35364 h 900000"/>
+              <a:gd name="csX2" fmla="*/ 588701 w 627137"/>
+              <a:gd name="csY2" fmla="*/ 76853 h 900000"/>
+              <a:gd name="csX3" fmla="*/ 390300 w 627137"/>
+              <a:gd name="csY3" fmla="*/ 450000 h 900000"/>
+              <a:gd name="csX4" fmla="*/ 588701 w 627137"/>
+              <a:gd name="csY4" fmla="*/ 823147 h 900000"/>
+              <a:gd name="csX5" fmla="*/ 625161 w 627137"/>
+              <a:gd name="csY5" fmla="*/ 864637 h 900000"/>
+              <a:gd name="csX6" fmla="*/ 450000 w 627137"/>
+              <a:gd name="csY6" fmla="*/ 900000 h 900000"/>
+              <a:gd name="csX7" fmla="*/ 0 w 627137"/>
+              <a:gd name="csY7" fmla="*/ 450000 h 900000"/>
+              <a:gd name="csX8" fmla="*/ 450000 w 627137"/>
+              <a:gd name="csY8" fmla="*/ 0 h 900000"/>
+            </a:gdLst>
+            <a:ahLst/>
+            <a:cxnLst>
+              <a:cxn ang="0">
+                <a:pos x="csX0" y="csY0"/>
+              </a:cxn>
+              <a:cxn ang="0">
+                <a:pos x="csX1" y="csY1"/>
+              </a:cxn>
+              <a:cxn ang="0">
+                <a:pos x="csX2" y="csY2"/>
+              </a:cxn>
+              <a:cxn ang="0">
+                <a:pos x="csX3" y="csY3"/>
+              </a:cxn>
+              <a:cxn ang="0">
+                <a:pos x="csX4" y="csY4"/>
+              </a:cxn>
+              <a:cxn ang="0">
+                <a:pos x="csX5" y="csY5"/>
+              </a:cxn>
+              <a:cxn ang="0">
+                <a:pos x="csX6" y="csY6"/>
+              </a:cxn>
+              <a:cxn ang="0">
+                <a:pos x="csX7" y="csY7"/>
+              </a:cxn>
+              <a:cxn ang="0">
+                <a:pos x="csX8" y="csY8"/>
+              </a:cxn>
+            </a:cxnLst>
+            <a:rect l="l" t="t" r="r" b="b"/>
+            <a:pathLst>
+              <a:path w="627137" h="900000">
+                <a:moveTo>
+                  <a:pt x="450000" y="0"/>
+                </a:moveTo>
+                <a:cubicBezTo>
+                  <a:pt x="512132" y="0"/>
+                  <a:pt x="571323" y="12592"/>
+                  <a:pt x="625161" y="35364"/>
+                </a:cubicBezTo>
+                <a:cubicBezTo>
+                  <a:pt x="635760" y="54886"/>
+                  <a:pt x="600854" y="63023"/>
+                  <a:pt x="588701" y="76853"/>
+                </a:cubicBezTo>
+                <a:cubicBezTo>
+                  <a:pt x="469000" y="157722"/>
+                  <a:pt x="390300" y="294670"/>
+                  <a:pt x="390300" y="450000"/>
+                </a:cubicBezTo>
+                <a:cubicBezTo>
+                  <a:pt x="390300" y="605330"/>
+                  <a:pt x="469000" y="742279"/>
+                  <a:pt x="588701" y="823147"/>
+                </a:cubicBezTo>
+                <a:cubicBezTo>
+                  <a:pt x="600854" y="836977"/>
+                  <a:pt x="630540" y="855442"/>
+                  <a:pt x="625161" y="864637"/>
+                </a:cubicBezTo>
+                <a:cubicBezTo>
+                  <a:pt x="571323" y="887408"/>
+                  <a:pt x="512132" y="900000"/>
+                  <a:pt x="450000" y="900000"/>
+                </a:cubicBezTo>
+                <a:cubicBezTo>
+                  <a:pt x="201472" y="900000"/>
+                  <a:pt x="0" y="698528"/>
+                  <a:pt x="0" y="450000"/>
+                </a:cubicBezTo>
+                <a:cubicBezTo>
+                  <a:pt x="0" y="201472"/>
+                  <a:pt x="201472" y="0"/>
+                  <a:pt x="450000" y="0"/>
+                </a:cubicBezTo>
+                <a:close/>
+              </a:path>
+            </a:pathLst>
+          </a:custGeom>
+          <a:solidFill>
+            <a:schemeClr val="tx1"/>
+          </a:solidFill>
+          <a:ln w="74613" cap="flat">
+            <a:noFill/>
+            <a:prstDash val="solid"/>
+            <a:miter/>
+          </a:ln>
+        </p:spPr>
+        <p:txBody>
+          <a:bodyPr wrap="square">
+            <a:noAutofit/>
+          </a:bodyPr>
+          <a:lstStyle/>
+          <a:p>
+            <a:endParaRPr lang="en-US"/>
+          </a:p>
+        </p:txBody>
+      </p:sp>
+      <p:sp>
+        <p:nvSpPr>
+          <p:cNvPr id="60" name="Oval 59">
+            <a:extLst>
+              <a:ext uri="{FF2B5EF4-FFF2-40B4-BE49-F238E27FC236}">
+                <a16:creationId xmlns:a16="http://schemas.microsoft.com/office/drawing/2014/main" id="{15E3DDD9-29D5-C838-07EA-30CB87E8C12F}"/>
+              </a:ext>
+            </a:extLst>
+          </p:cNvPr>
+          <p:cNvSpPr/>
+          <p:nvPr/>
+        </p:nvSpPr>
+        <p:spPr>
+          <a:xfrm>
+            <a:off x="3281820" y="968525"/>
+            <a:ext cx="151200" cy="151200"/>
+          </a:xfrm>
+          <a:prstGeom prst="ellipse">
+            <a:avLst/>
+          </a:prstGeom>
+          <a:solidFill>
+            <a:schemeClr val="tx1"/>
+          </a:solidFill>
+          <a:ln>
+            <a:noFill/>
+          </a:ln>
+        </p:spPr>
+        <p:style>
+          <a:lnRef idx="2">
+            <a:schemeClr val="accent1">
+              <a:shade val="15000"/>
+            </a:schemeClr>
+          </a:lnRef>
+          <a:fillRef idx="1">
+            <a:schemeClr val="accent1"/>
+          </a:fillRef>
+          <a:effectRef idx="0">
+            <a:schemeClr val="accent1"/>
+          </a:effectRef>
+          <a:fontRef idx="minor">
+            <a:schemeClr val="lt1"/>
+          </a:fontRef>
+        </p:style>
+        <p:txBody>
+          <a:bodyPr rtlCol="0" anchor="ctr"/>
+          <a:lstStyle/>
+          <a:p>
+            <a:pPr algn="ctr"/>
+            <a:endParaRPr lang="en-US"/>
+          </a:p>
+        </p:txBody>
+      </p:sp>
+      <p:sp>
+        <p:nvSpPr>
+          <p:cNvPr id="61" name="Oval 60">
+            <a:extLst>
+              <a:ext uri="{FF2B5EF4-FFF2-40B4-BE49-F238E27FC236}">
+                <a16:creationId xmlns:a16="http://schemas.microsoft.com/office/drawing/2014/main" id="{72DE3F93-8974-B215-5337-8E0A04E3786A}"/>
+              </a:ext>
+            </a:extLst>
+          </p:cNvPr>
+          <p:cNvSpPr/>
+          <p:nvPr/>
+        </p:nvSpPr>
+        <p:spPr>
+          <a:xfrm>
+            <a:off x="4432917" y="491228"/>
+            <a:ext cx="151200" cy="151200"/>
+          </a:xfrm>
+          <a:prstGeom prst="ellipse">
+            <a:avLst/>
+          </a:prstGeom>
+          <a:solidFill>
+            <a:schemeClr val="tx1"/>
+          </a:solidFill>
+          <a:ln>
+            <a:noFill/>
+          </a:ln>
+        </p:spPr>
+        <p:style>
+          <a:lnRef idx="2">
+            <a:schemeClr val="accent1">
+              <a:shade val="15000"/>
+            </a:schemeClr>
+          </a:lnRef>
+          <a:fillRef idx="1">
+            <a:schemeClr val="accent1"/>
+          </a:fillRef>
+          <a:effectRef idx="0">
+            <a:schemeClr val="accent1"/>
+          </a:effectRef>
+          <a:fontRef idx="minor">
+            <a:schemeClr val="lt1"/>
+          </a:fontRef>
+        </p:style>
+        <p:txBody>
+          <a:bodyPr rtlCol="0" anchor="ctr"/>
+          <a:lstStyle/>
+          <a:p>
+            <a:pPr algn="ctr"/>
+            <a:endParaRPr lang="en-US"/>
+          </a:p>
+        </p:txBody>
+      </p:sp>
+      <p:sp>
+        <p:nvSpPr>
+          <p:cNvPr id="62" name="Oval 61">
+            <a:extLst>
+              <a:ext uri="{FF2B5EF4-FFF2-40B4-BE49-F238E27FC236}">
+                <a16:creationId xmlns:a16="http://schemas.microsoft.com/office/drawing/2014/main" id="{79A09F4D-B561-04A3-CA44-B06913069C01}"/>
+              </a:ext>
+            </a:extLst>
+          </p:cNvPr>
+          <p:cNvSpPr/>
+          <p:nvPr/>
+        </p:nvSpPr>
+        <p:spPr>
+          <a:xfrm>
+            <a:off x="3955620" y="293525"/>
+            <a:ext cx="151200" cy="151200"/>
+          </a:xfrm>
+          <a:prstGeom prst="ellipse">
+            <a:avLst/>
+          </a:prstGeom>
+          <a:solidFill>
+            <a:schemeClr val="tx1"/>
+          </a:solidFill>
+          <a:ln>
+            <a:noFill/>
+          </a:ln>
+        </p:spPr>
+        <p:style>
+          <a:lnRef idx="2">
+            <a:schemeClr val="accent1">
+              <a:shade val="15000"/>
+            </a:schemeClr>
+          </a:lnRef>
+          <a:fillRef idx="1">
+            <a:schemeClr val="accent1"/>
+          </a:fillRef>
+          <a:effectRef idx="0">
+            <a:schemeClr val="accent1"/>
+          </a:effectRef>
+          <a:fontRef idx="minor">
+            <a:schemeClr val="lt1"/>
+          </a:fontRef>
+        </p:style>
+        <p:txBody>
+          <a:bodyPr rtlCol="0" anchor="ctr"/>
+          <a:lstStyle/>
+          <a:p>
+            <a:pPr algn="ctr"/>
+            <a:endParaRPr lang="en-US"/>
+          </a:p>
+        </p:txBody>
+      </p:sp>
+      <p:sp>
+        <p:nvSpPr>
+          <p:cNvPr id="63" name="Oval 62">
+            <a:extLst>
+              <a:ext uri="{FF2B5EF4-FFF2-40B4-BE49-F238E27FC236}">
+                <a16:creationId xmlns:a16="http://schemas.microsoft.com/office/drawing/2014/main" id="{8FED497A-CBDA-DC55-F7EB-3213FFB3BFE3}"/>
+              </a:ext>
+            </a:extLst>
+          </p:cNvPr>
+          <p:cNvSpPr/>
+          <p:nvPr/>
+        </p:nvSpPr>
+        <p:spPr>
+          <a:xfrm>
+            <a:off x="3479522" y="491228"/>
+            <a:ext cx="151200" cy="151200"/>
+          </a:xfrm>
+          <a:prstGeom prst="ellipse">
+            <a:avLst/>
+          </a:prstGeom>
+          <a:solidFill>
+            <a:schemeClr val="tx1"/>
+          </a:solidFill>
+          <a:ln>
+            <a:noFill/>
+          </a:ln>
+        </p:spPr>
+        <p:style>
+          <a:lnRef idx="2">
+            <a:schemeClr val="accent1">
+              <a:shade val="15000"/>
+            </a:schemeClr>
+          </a:lnRef>
+          <a:fillRef idx="1">
+            <a:schemeClr val="accent1"/>
+          </a:fillRef>
+          <a:effectRef idx="0">
+            <a:schemeClr val="accent1"/>
+          </a:effectRef>
+          <a:fontRef idx="minor">
+            <a:schemeClr val="lt1"/>
+          </a:fontRef>
+        </p:style>
+        <p:txBody>
+          <a:bodyPr rtlCol="0" anchor="ctr"/>
+          <a:lstStyle/>
+          <a:p>
+            <a:pPr algn="ctr"/>
+            <a:endParaRPr lang="en-US"/>
+          </a:p>
+        </p:txBody>
+      </p:sp>
+      <p:sp>
+        <p:nvSpPr>
+          <p:cNvPr id="64" name="Oval 63">
+            <a:extLst>
+              <a:ext uri="{FF2B5EF4-FFF2-40B4-BE49-F238E27FC236}">
+                <a16:creationId xmlns:a16="http://schemas.microsoft.com/office/drawing/2014/main" id="{F67BDBD3-3376-BE31-A6D5-09E7F2403D49}"/>
+              </a:ext>
+            </a:extLst>
+          </p:cNvPr>
+          <p:cNvSpPr/>
+          <p:nvPr/>
+        </p:nvSpPr>
+        <p:spPr>
+          <a:xfrm>
+            <a:off x="4630620" y="968525"/>
+            <a:ext cx="151200" cy="151200"/>
+          </a:xfrm>
+          <a:prstGeom prst="ellipse">
+            <a:avLst/>
+          </a:prstGeom>
+          <a:solidFill>
+            <a:schemeClr val="tx1"/>
+          </a:solidFill>
+          <a:ln>
+            <a:noFill/>
+          </a:ln>
+        </p:spPr>
+        <p:style>
+          <a:lnRef idx="2">
+            <a:schemeClr val="accent1">
+              <a:shade val="15000"/>
+            </a:schemeClr>
+          </a:lnRef>
+          <a:fillRef idx="1">
+            <a:schemeClr val="accent1"/>
+          </a:fillRef>
+          <a:effectRef idx="0">
+            <a:schemeClr val="accent1"/>
+          </a:effectRef>
+          <a:fontRef idx="minor">
+            <a:schemeClr val="lt1"/>
+          </a:fontRef>
+        </p:style>
+        <p:txBody>
+          <a:bodyPr rtlCol="0" anchor="ctr"/>
+          <a:lstStyle/>
+          <a:p>
+            <a:pPr algn="ctr"/>
+            <a:endParaRPr lang="en-US"/>
+          </a:p>
+        </p:txBody>
+      </p:sp>
+      <p:sp>
+        <p:nvSpPr>
+          <p:cNvPr id="65" name="Oval 64">
+            <a:extLst>
+              <a:ext uri="{FF2B5EF4-FFF2-40B4-BE49-F238E27FC236}">
+                <a16:creationId xmlns:a16="http://schemas.microsoft.com/office/drawing/2014/main" id="{94A10547-6900-4A53-6C6A-752559744030}"/>
+              </a:ext>
+            </a:extLst>
+          </p:cNvPr>
+          <p:cNvSpPr/>
+          <p:nvPr/>
+        </p:nvSpPr>
+        <p:spPr>
+          <a:xfrm>
+            <a:off x="3479522" y="1444622"/>
+            <a:ext cx="151200" cy="151200"/>
+          </a:xfrm>
+          <a:prstGeom prst="ellipse">
+            <a:avLst/>
+          </a:prstGeom>
+          <a:solidFill>
+            <a:schemeClr val="tx1"/>
+          </a:solidFill>
+          <a:ln>
+            <a:noFill/>
+          </a:ln>
+        </p:spPr>
+        <p:style>
+          <a:lnRef idx="2">
+            <a:schemeClr val="accent1">
+              <a:shade val="15000"/>
+            </a:schemeClr>
+          </a:lnRef>
+          <a:fillRef idx="1">
+            <a:schemeClr val="accent1"/>
+          </a:fillRef>
+          <a:effectRef idx="0">
+            <a:schemeClr val="accent1"/>
+          </a:effectRef>
+          <a:fontRef idx="minor">
+            <a:schemeClr val="lt1"/>
+          </a:fontRef>
+        </p:style>
+        <p:txBody>
+          <a:bodyPr rtlCol="0" anchor="ctr"/>
+          <a:lstStyle/>
+          <a:p>
+            <a:pPr algn="ctr"/>
+            <a:endParaRPr lang="en-US"/>
+          </a:p>
+        </p:txBody>
+      </p:sp>
+      <p:sp>
+        <p:nvSpPr>
+          <p:cNvPr id="66" name="Oval 65">
+            <a:extLst>
+              <a:ext uri="{FF2B5EF4-FFF2-40B4-BE49-F238E27FC236}">
+                <a16:creationId xmlns:a16="http://schemas.microsoft.com/office/drawing/2014/main" id="{3F5D8FF3-A71D-130C-903D-D9C864644AF5}"/>
+              </a:ext>
+            </a:extLst>
+          </p:cNvPr>
+          <p:cNvSpPr/>
+          <p:nvPr/>
+        </p:nvSpPr>
+        <p:spPr>
+          <a:xfrm>
+            <a:off x="3956820" y="1642325"/>
+            <a:ext cx="151200" cy="151200"/>
+          </a:xfrm>
+          <a:prstGeom prst="ellipse">
+            <a:avLst/>
+          </a:prstGeom>
+          <a:solidFill>
+            <a:schemeClr val="tx1"/>
+          </a:solidFill>
+          <a:ln>
+            <a:noFill/>
+          </a:ln>
+        </p:spPr>
+        <p:style>
+          <a:lnRef idx="2">
+            <a:schemeClr val="accent1">
+              <a:shade val="15000"/>
+            </a:schemeClr>
+          </a:lnRef>
+          <a:fillRef idx="1">
+            <a:schemeClr val="accent1"/>
+          </a:fillRef>
+          <a:effectRef idx="0">
+            <a:schemeClr val="accent1"/>
+          </a:effectRef>
+          <a:fontRef idx="minor">
+            <a:schemeClr val="lt1"/>
+          </a:fontRef>
+        </p:style>
+        <p:txBody>
+          <a:bodyPr rtlCol="0" anchor="ctr"/>
+          <a:lstStyle/>
+          <a:p>
+            <a:pPr algn="ctr"/>
+            <a:endParaRPr lang="en-US"/>
+          </a:p>
+        </p:txBody>
+      </p:sp>
+      <p:sp>
+        <p:nvSpPr>
+          <p:cNvPr id="67" name="Oval 66">
+            <a:extLst>
+              <a:ext uri="{FF2B5EF4-FFF2-40B4-BE49-F238E27FC236}">
+                <a16:creationId xmlns:a16="http://schemas.microsoft.com/office/drawing/2014/main" id="{31CBEC7B-19BD-22A3-E56C-4A93D1516BE2}"/>
+              </a:ext>
+            </a:extLst>
+          </p:cNvPr>
+          <p:cNvSpPr/>
+          <p:nvPr/>
+        </p:nvSpPr>
+        <p:spPr>
+          <a:xfrm>
+            <a:off x="4432917" y="1444622"/>
+            <a:ext cx="151200" cy="151200"/>
+          </a:xfrm>
+          <a:prstGeom prst="ellipse">
+            <a:avLst/>
+          </a:prstGeom>
+          <a:solidFill>
+            <a:schemeClr val="tx1"/>
+          </a:solidFill>
+          <a:ln>
+            <a:noFill/>
+          </a:ln>
+        </p:spPr>
+        <p:style>
+          <a:lnRef idx="2">
+            <a:schemeClr val="accent1">
+              <a:shade val="15000"/>
+            </a:schemeClr>
+          </a:lnRef>
+          <a:fillRef idx="1">
+            <a:schemeClr val="accent1"/>
+          </a:fillRef>
+          <a:effectRef idx="0">
+            <a:schemeClr val="accent1"/>
+          </a:effectRef>
+          <a:fontRef idx="minor">
+            <a:schemeClr val="lt1"/>
+          </a:fontRef>
+        </p:style>
+        <p:txBody>
+          <a:bodyPr rtlCol="0" anchor="ctr"/>
+          <a:lstStyle/>
+          <a:p>
+            <a:pPr algn="ctr"/>
+            <a:endParaRPr lang="en-US"/>
+          </a:p>
+        </p:txBody>
+      </p:sp>
+    </p:spTree>
+    <p:extLst>
+      <p:ext uri="{BB962C8B-B14F-4D97-AF65-F5344CB8AC3E}">
+        <p14:creationId xmlns:p14="http://schemas.microsoft.com/office/powerpoint/2010/main" val="1116993007"/>
+      </p:ext>
+    </p:extLst>
+  </p:cSld>
+  <p:clrMapOvr>
+    <a:masterClrMapping/>
+  </p:clrMapOvr>
+</p:sld>
+</file>
+
 <file path=ppt/theme/theme1.xml><?xml version="1.0" encoding="utf-8"?>
 <a:theme xmlns:a="http://schemas.openxmlformats.org/drawingml/2006/main" name="Office Theme">
   <a:themeElements>

--- a/Icons_UI/bcpst.pptx
+++ b/Icons_UI/bcpst.pptx
@@ -20713,6 +20713,535 @@
           <a:chExt cx="0" cy="0"/>
         </a:xfrm>
       </p:grpSpPr>
+      <p:sp>
+        <p:nvSpPr>
+          <p:cNvPr id="137" name="Freeform: Shape 136">
+            <a:extLst>
+              <a:ext uri="{FF2B5EF4-FFF2-40B4-BE49-F238E27FC236}">
+                <a16:creationId xmlns:a16="http://schemas.microsoft.com/office/drawing/2014/main" id="{270D7917-6A5A-5366-AA35-C844DE220D38}"/>
+              </a:ext>
+            </a:extLst>
+          </p:cNvPr>
+          <p:cNvSpPr/>
+          <p:nvPr/>
+        </p:nvSpPr>
+        <p:spPr>
+          <a:xfrm>
+            <a:off x="4748630" y="2292972"/>
+            <a:ext cx="1300455" cy="1501202"/>
+          </a:xfrm>
+          <a:custGeom>
+            <a:avLst/>
+            <a:gdLst>
+              <a:gd name="csX0" fmla="*/ 149719 w 1300455"/>
+              <a:gd name="csY0" fmla="*/ 301603 h 1501202"/>
+              <a:gd name="csX1" fmla="*/ 149719 w 1300455"/>
+              <a:gd name="csY1" fmla="*/ 401415 h 1501202"/>
+              <a:gd name="csX2" fmla="*/ 299436 w 1300455"/>
+              <a:gd name="csY2" fmla="*/ 551133 h 1501202"/>
+              <a:gd name="csX3" fmla="*/ 698684 w 1300455"/>
+              <a:gd name="csY3" fmla="*/ 551133 h 1501202"/>
+              <a:gd name="csX4" fmla="*/ 848402 w 1300455"/>
+              <a:gd name="csY4" fmla="*/ 401415 h 1501202"/>
+              <a:gd name="csX5" fmla="*/ 848402 w 1300455"/>
+              <a:gd name="csY5" fmla="*/ 301603 h 1501202"/>
+              <a:gd name="csX6" fmla="*/ 998119 w 1300455"/>
+              <a:gd name="csY6" fmla="*/ 451321 h 1501202"/>
+              <a:gd name="csX7" fmla="*/ 998119 w 1300455"/>
+              <a:gd name="csY7" fmla="*/ 1351484 h 1501202"/>
+              <a:gd name="csX8" fmla="*/ 848402 w 1300455"/>
+              <a:gd name="csY8" fmla="*/ 1501202 h 1501202"/>
+              <a:gd name="csX9" fmla="*/ 149719 w 1300455"/>
+              <a:gd name="csY9" fmla="*/ 1501202 h 1501202"/>
+              <a:gd name="csX10" fmla="*/ 0 w 1300455"/>
+              <a:gd name="csY10" fmla="*/ 1351484 h 1501202"/>
+              <a:gd name="csX11" fmla="*/ 0 w 1300455"/>
+              <a:gd name="csY11" fmla="*/ 451321 h 1501202"/>
+              <a:gd name="csX12" fmla="*/ 149719 w 1300455"/>
+              <a:gd name="csY12" fmla="*/ 301603 h 1501202"/>
+              <a:gd name="csX13" fmla="*/ 498261 w 1300455"/>
+              <a:gd name="csY13" fmla="*/ 151885 h 1501202"/>
+              <a:gd name="csX14" fmla="*/ 519121 w 1300455"/>
+              <a:gd name="csY14" fmla="*/ 153732 h 1501202"/>
+              <a:gd name="csX15" fmla="*/ 628116 w 1300455"/>
+              <a:gd name="csY15" fmla="*/ 226745 h 1501202"/>
+              <a:gd name="csX16" fmla="*/ 642539 w 1300455"/>
+              <a:gd name="csY16" fmla="*/ 251697 h 1501202"/>
+              <a:gd name="csX17" fmla="*/ 698684 w 1300455"/>
+              <a:gd name="csY17" fmla="*/ 251697 h 1501202"/>
+              <a:gd name="csX18" fmla="*/ 748589 w 1300455"/>
+              <a:gd name="csY18" fmla="*/ 301603 h 1501202"/>
+              <a:gd name="csX19" fmla="*/ 748589 w 1300455"/>
+              <a:gd name="csY19" fmla="*/ 401415 h 1501202"/>
+              <a:gd name="csX20" fmla="*/ 698684 w 1300455"/>
+              <a:gd name="csY20" fmla="*/ 451321 h 1501202"/>
+              <a:gd name="csX21" fmla="*/ 299436 w 1300455"/>
+              <a:gd name="csY21" fmla="*/ 451321 h 1501202"/>
+              <a:gd name="csX22" fmla="*/ 249529 w 1300455"/>
+              <a:gd name="csY22" fmla="*/ 401415 h 1501202"/>
+              <a:gd name="csX23" fmla="*/ 249529 w 1300455"/>
+              <a:gd name="csY23" fmla="*/ 301603 h 1501202"/>
+              <a:gd name="csX24" fmla="*/ 299436 w 1300455"/>
+              <a:gd name="csY24" fmla="*/ 251697 h 1501202"/>
+              <a:gd name="csX25" fmla="*/ 355579 w 1300455"/>
+              <a:gd name="csY25" fmla="*/ 251697 h 1501202"/>
+              <a:gd name="csX26" fmla="*/ 370053 w 1300455"/>
+              <a:gd name="csY26" fmla="*/ 226745 h 1501202"/>
+              <a:gd name="csX27" fmla="*/ 479097 w 1300455"/>
+              <a:gd name="csY27" fmla="*/ 153931 h 1501202"/>
+              <a:gd name="csX28" fmla="*/ 498261 w 1300455"/>
+              <a:gd name="csY28" fmla="*/ 151885 h 1501202"/>
+              <a:gd name="csX29" fmla="*/ 448804 w 1300455"/>
+              <a:gd name="csY29" fmla="*/ 0 h 1501202"/>
+              <a:gd name="csX30" fmla="*/ 1151306 w 1300455"/>
+              <a:gd name="csY30" fmla="*/ 0 h 1501202"/>
+              <a:gd name="csX31" fmla="*/ 1300455 w 1300455"/>
+              <a:gd name="csY31" fmla="*/ 149149 h 1501202"/>
+              <a:gd name="csX32" fmla="*/ 1300455 w 1300455"/>
+              <a:gd name="csY32" fmla="*/ 1150451 h 1501202"/>
+              <a:gd name="csX33" fmla="*/ 1151306 w 1300455"/>
+              <a:gd name="csY33" fmla="*/ 1299600 h 1501202"/>
+              <a:gd name="csX34" fmla="*/ 1094634 w 1300455"/>
+              <a:gd name="csY34" fmla="*/ 1299600 h 1501202"/>
+              <a:gd name="csX35" fmla="*/ 1094634 w 1300455"/>
+              <a:gd name="csY35" fmla="*/ 400113 h 1501202"/>
+              <a:gd name="csX36" fmla="*/ 985416 w 1300455"/>
+              <a:gd name="csY36" fmla="*/ 235623 h 1501202"/>
+              <a:gd name="csX37" fmla="*/ 919399 w 1300455"/>
+              <a:gd name="csY37" fmla="*/ 222142 h 1501202"/>
+              <a:gd name="csX38" fmla="*/ 919399 w 1300455"/>
+              <a:gd name="csY38" fmla="*/ 221440 h 1501202"/>
+              <a:gd name="csX39" fmla="*/ 915963 w 1300455"/>
+              <a:gd name="csY39" fmla="*/ 221440 h 1501202"/>
+              <a:gd name="csX40" fmla="*/ 844022 w 1300455"/>
+              <a:gd name="csY40" fmla="*/ 221440 h 1501202"/>
+              <a:gd name="csX41" fmla="*/ 843469 w 1300455"/>
+              <a:gd name="csY41" fmla="*/ 218698 h 1501202"/>
+              <a:gd name="csX42" fmla="*/ 767099 w 1300455"/>
+              <a:gd name="csY42" fmla="*/ 168076 h 1501202"/>
+              <a:gd name="csX43" fmla="*/ 706597 w 1300455"/>
+              <a:gd name="csY43" fmla="*/ 168076 h 1501202"/>
+              <a:gd name="csX44" fmla="*/ 679711 w 1300455"/>
+              <a:gd name="csY44" fmla="*/ 131705 h 1501202"/>
+              <a:gd name="csX45" fmla="*/ 532379 w 1300455"/>
+              <a:gd name="csY45" fmla="*/ 56018 h 1501202"/>
+              <a:gd name="csX46" fmla="*/ 497734 w 1300455"/>
+              <a:gd name="csY46" fmla="*/ 52951 h 1501202"/>
+              <a:gd name="csX47" fmla="*/ 465907 w 1300455"/>
+              <a:gd name="csY47" fmla="*/ 56348 h 1501202"/>
+              <a:gd name="csX48" fmla="*/ 318530 w 1300455"/>
+              <a:gd name="csY48" fmla="*/ 131766 h 1501202"/>
+              <a:gd name="csX49" fmla="*/ 299655 w 1300455"/>
+              <a:gd name="csY49" fmla="*/ 157237 h 1501202"/>
+              <a:gd name="csX50" fmla="*/ 299655 w 1300455"/>
+              <a:gd name="csY50" fmla="*/ 149149 h 1501202"/>
+              <a:gd name="csX51" fmla="*/ 448804 w 1300455"/>
+              <a:gd name="csY51" fmla="*/ 0 h 1501202"/>
+            </a:gdLst>
+            <a:ahLst/>
+            <a:cxnLst>
+              <a:cxn ang="0">
+                <a:pos x="csX0" y="csY0"/>
+              </a:cxn>
+              <a:cxn ang="0">
+                <a:pos x="csX1" y="csY1"/>
+              </a:cxn>
+              <a:cxn ang="0">
+                <a:pos x="csX2" y="csY2"/>
+              </a:cxn>
+              <a:cxn ang="0">
+                <a:pos x="csX3" y="csY3"/>
+              </a:cxn>
+              <a:cxn ang="0">
+                <a:pos x="csX4" y="csY4"/>
+              </a:cxn>
+              <a:cxn ang="0">
+                <a:pos x="csX5" y="csY5"/>
+              </a:cxn>
+              <a:cxn ang="0">
+                <a:pos x="csX6" y="csY6"/>
+              </a:cxn>
+              <a:cxn ang="0">
+                <a:pos x="csX7" y="csY7"/>
+              </a:cxn>
+              <a:cxn ang="0">
+                <a:pos x="csX8" y="csY8"/>
+              </a:cxn>
+              <a:cxn ang="0">
+                <a:pos x="csX9" y="csY9"/>
+              </a:cxn>
+              <a:cxn ang="0">
+                <a:pos x="csX10" y="csY10"/>
+              </a:cxn>
+              <a:cxn ang="0">
+                <a:pos x="csX11" y="csY11"/>
+              </a:cxn>
+              <a:cxn ang="0">
+                <a:pos x="csX12" y="csY12"/>
+              </a:cxn>
+              <a:cxn ang="0">
+                <a:pos x="csX13" y="csY13"/>
+              </a:cxn>
+              <a:cxn ang="0">
+                <a:pos x="csX14" y="csY14"/>
+              </a:cxn>
+              <a:cxn ang="0">
+                <a:pos x="csX15" y="csY15"/>
+              </a:cxn>
+              <a:cxn ang="0">
+                <a:pos x="csX16" y="csY16"/>
+              </a:cxn>
+              <a:cxn ang="0">
+                <a:pos x="csX17" y="csY17"/>
+              </a:cxn>
+              <a:cxn ang="0">
+                <a:pos x="csX18" y="csY18"/>
+              </a:cxn>
+              <a:cxn ang="0">
+                <a:pos x="csX19" y="csY19"/>
+              </a:cxn>
+              <a:cxn ang="0">
+                <a:pos x="csX20" y="csY20"/>
+              </a:cxn>
+              <a:cxn ang="0">
+                <a:pos x="csX21" y="csY21"/>
+              </a:cxn>
+              <a:cxn ang="0">
+                <a:pos x="csX22" y="csY22"/>
+              </a:cxn>
+              <a:cxn ang="0">
+                <a:pos x="csX23" y="csY23"/>
+              </a:cxn>
+              <a:cxn ang="0">
+                <a:pos x="csX24" y="csY24"/>
+              </a:cxn>
+              <a:cxn ang="0">
+                <a:pos x="csX25" y="csY25"/>
+              </a:cxn>
+              <a:cxn ang="0">
+                <a:pos x="csX26" y="csY26"/>
+              </a:cxn>
+              <a:cxn ang="0">
+                <a:pos x="csX27" y="csY27"/>
+              </a:cxn>
+              <a:cxn ang="0">
+                <a:pos x="csX28" y="csY28"/>
+              </a:cxn>
+              <a:cxn ang="0">
+                <a:pos x="csX29" y="csY29"/>
+              </a:cxn>
+              <a:cxn ang="0">
+                <a:pos x="csX30" y="csY30"/>
+              </a:cxn>
+              <a:cxn ang="0">
+                <a:pos x="csX31" y="csY31"/>
+              </a:cxn>
+              <a:cxn ang="0">
+                <a:pos x="csX32" y="csY32"/>
+              </a:cxn>
+              <a:cxn ang="0">
+                <a:pos x="csX33" y="csY33"/>
+              </a:cxn>
+              <a:cxn ang="0">
+                <a:pos x="csX34" y="csY34"/>
+              </a:cxn>
+              <a:cxn ang="0">
+                <a:pos x="csX35" y="csY35"/>
+              </a:cxn>
+              <a:cxn ang="0">
+                <a:pos x="csX36" y="csY36"/>
+              </a:cxn>
+              <a:cxn ang="0">
+                <a:pos x="csX37" y="csY37"/>
+              </a:cxn>
+              <a:cxn ang="0">
+                <a:pos x="csX38" y="csY38"/>
+              </a:cxn>
+              <a:cxn ang="0">
+                <a:pos x="csX39" y="csY39"/>
+              </a:cxn>
+              <a:cxn ang="0">
+                <a:pos x="csX40" y="csY40"/>
+              </a:cxn>
+              <a:cxn ang="0">
+                <a:pos x="csX41" y="csY41"/>
+              </a:cxn>
+              <a:cxn ang="0">
+                <a:pos x="csX42" y="csY42"/>
+              </a:cxn>
+              <a:cxn ang="0">
+                <a:pos x="csX43" y="csY43"/>
+              </a:cxn>
+              <a:cxn ang="0">
+                <a:pos x="csX44" y="csY44"/>
+              </a:cxn>
+              <a:cxn ang="0">
+                <a:pos x="csX45" y="csY45"/>
+              </a:cxn>
+              <a:cxn ang="0">
+                <a:pos x="csX46" y="csY46"/>
+              </a:cxn>
+              <a:cxn ang="0">
+                <a:pos x="csX47" y="csY47"/>
+              </a:cxn>
+              <a:cxn ang="0">
+                <a:pos x="csX48" y="csY48"/>
+              </a:cxn>
+              <a:cxn ang="0">
+                <a:pos x="csX49" y="csY49"/>
+              </a:cxn>
+              <a:cxn ang="0">
+                <a:pos x="csX50" y="csY50"/>
+              </a:cxn>
+              <a:cxn ang="0">
+                <a:pos x="csX51" y="csY51"/>
+              </a:cxn>
+            </a:cxnLst>
+            <a:rect l="l" t="t" r="r" b="b"/>
+            <a:pathLst>
+              <a:path w="1300455" h="1501202">
+                <a:moveTo>
+                  <a:pt x="149719" y="301603"/>
+                </a:moveTo>
+                <a:lnTo>
+                  <a:pt x="149719" y="401415"/>
+                </a:lnTo>
+                <a:cubicBezTo>
+                  <a:pt x="149964" y="484000"/>
+                  <a:pt x="216851" y="550887"/>
+                  <a:pt x="299436" y="551133"/>
+                </a:cubicBezTo>
+                <a:lnTo>
+                  <a:pt x="698684" y="551133"/>
+                </a:lnTo>
+                <a:cubicBezTo>
+                  <a:pt x="781268" y="550887"/>
+                  <a:pt x="848155" y="484000"/>
+                  <a:pt x="848402" y="401415"/>
+                </a:cubicBezTo>
+                <a:lnTo>
+                  <a:pt x="848402" y="301603"/>
+                </a:lnTo>
+                <a:cubicBezTo>
+                  <a:pt x="930985" y="301850"/>
+                  <a:pt x="997872" y="368737"/>
+                  <a:pt x="998119" y="451321"/>
+                </a:cubicBezTo>
+                <a:lnTo>
+                  <a:pt x="998119" y="1351484"/>
+                </a:lnTo>
+                <a:cubicBezTo>
+                  <a:pt x="997872" y="1434068"/>
+                  <a:pt x="930985" y="1500955"/>
+                  <a:pt x="848402" y="1501202"/>
+                </a:cubicBezTo>
+                <a:lnTo>
+                  <a:pt x="149719" y="1501202"/>
+                </a:lnTo>
+                <a:cubicBezTo>
+                  <a:pt x="67134" y="1500955"/>
+                  <a:pt x="247" y="1434068"/>
+                  <a:pt x="0" y="1351484"/>
+                </a:cubicBezTo>
+                <a:lnTo>
+                  <a:pt x="0" y="451321"/>
+                </a:lnTo>
+                <a:cubicBezTo>
+                  <a:pt x="247" y="368737"/>
+                  <a:pt x="67134" y="301850"/>
+                  <a:pt x="149719" y="301603"/>
+                </a:cubicBezTo>
+                <a:close/>
+                <a:moveTo>
+                  <a:pt x="498261" y="151885"/>
+                </a:moveTo>
+                <a:cubicBezTo>
+                  <a:pt x="505259" y="151815"/>
+                  <a:pt x="512246" y="152434"/>
+                  <a:pt x="519121" y="153732"/>
+                </a:cubicBezTo>
+                <a:cubicBezTo>
+                  <a:pt x="564851" y="159740"/>
+                  <a:pt x="605160" y="186740"/>
+                  <a:pt x="628116" y="226745"/>
+                </a:cubicBezTo>
+                <a:lnTo>
+                  <a:pt x="642539" y="251697"/>
+                </a:lnTo>
+                <a:lnTo>
+                  <a:pt x="698684" y="251697"/>
+                </a:lnTo>
+                <a:cubicBezTo>
+                  <a:pt x="726246" y="251697"/>
+                  <a:pt x="748589" y="274041"/>
+                  <a:pt x="748589" y="301603"/>
+                </a:cubicBezTo>
+                <a:lnTo>
+                  <a:pt x="748589" y="401415"/>
+                </a:lnTo>
+                <a:cubicBezTo>
+                  <a:pt x="748589" y="428978"/>
+                  <a:pt x="726246" y="451321"/>
+                  <a:pt x="698684" y="451321"/>
+                </a:cubicBezTo>
+                <a:lnTo>
+                  <a:pt x="299436" y="451321"/>
+                </a:lnTo>
+                <a:cubicBezTo>
+                  <a:pt x="271872" y="451321"/>
+                  <a:pt x="249529" y="428978"/>
+                  <a:pt x="249529" y="401415"/>
+                </a:cubicBezTo>
+                <a:lnTo>
+                  <a:pt x="249529" y="301603"/>
+                </a:lnTo>
+                <a:cubicBezTo>
+                  <a:pt x="249529" y="274041"/>
+                  <a:pt x="271872" y="251697"/>
+                  <a:pt x="299436" y="251697"/>
+                </a:cubicBezTo>
+                <a:lnTo>
+                  <a:pt x="355579" y="251697"/>
+                </a:lnTo>
+                <a:lnTo>
+                  <a:pt x="370053" y="226745"/>
+                </a:lnTo>
+                <a:cubicBezTo>
+                  <a:pt x="393042" y="186783"/>
+                  <a:pt x="433376" y="159850"/>
+                  <a:pt x="479097" y="153931"/>
+                </a:cubicBezTo>
+                <a:cubicBezTo>
+                  <a:pt x="485398" y="152600"/>
+                  <a:pt x="491819" y="151915"/>
+                  <a:pt x="498261" y="151885"/>
+                </a:cubicBezTo>
+                <a:close/>
+                <a:moveTo>
+                  <a:pt x="448804" y="0"/>
+                </a:moveTo>
+                <a:lnTo>
+                  <a:pt x="1151306" y="0"/>
+                </a:lnTo>
+                <a:cubicBezTo>
+                  <a:pt x="1233679" y="0"/>
+                  <a:pt x="1300455" y="66776"/>
+                  <a:pt x="1300455" y="149149"/>
+                </a:cubicBezTo>
+                <a:lnTo>
+                  <a:pt x="1300455" y="1150451"/>
+                </a:lnTo>
+                <a:cubicBezTo>
+                  <a:pt x="1300455" y="1232824"/>
+                  <a:pt x="1233679" y="1299600"/>
+                  <a:pt x="1151306" y="1299600"/>
+                </a:cubicBezTo>
+                <a:lnTo>
+                  <a:pt x="1094634" y="1299600"/>
+                </a:lnTo>
+                <a:lnTo>
+                  <a:pt x="1094634" y="400113"/>
+                </a:lnTo>
+                <a:cubicBezTo>
+                  <a:pt x="1094413" y="326196"/>
+                  <a:pt x="1049458" y="262817"/>
+                  <a:pt x="985416" y="235623"/>
+                </a:cubicBezTo>
+                <a:lnTo>
+                  <a:pt x="919399" y="222142"/>
+                </a:lnTo>
+                <a:lnTo>
+                  <a:pt x="919399" y="221440"/>
+                </a:lnTo>
+                <a:lnTo>
+                  <a:pt x="915963" y="221440"/>
+                </a:lnTo>
+                <a:lnTo>
+                  <a:pt x="844022" y="221440"/>
+                </a:lnTo>
+                <a:lnTo>
+                  <a:pt x="843469" y="218698"/>
+                </a:lnTo>
+                <a:cubicBezTo>
+                  <a:pt x="830887" y="188949"/>
+                  <a:pt x="801430" y="168076"/>
+                  <a:pt x="767099" y="168076"/>
+                </a:cubicBezTo>
+                <a:lnTo>
+                  <a:pt x="706597" y="168076"/>
+                </a:lnTo>
+                <a:lnTo>
+                  <a:pt x="679711" y="131705"/>
+                </a:lnTo>
+                <a:cubicBezTo>
+                  <a:pt x="641239" y="90596"/>
+                  <a:pt x="589341" y="63501"/>
+                  <a:pt x="532379" y="56018"/>
+                </a:cubicBezTo>
+                <a:cubicBezTo>
+                  <a:pt x="520960" y="53863"/>
+                  <a:pt x="509356" y="52834"/>
+                  <a:pt x="497734" y="52951"/>
+                </a:cubicBezTo>
+                <a:cubicBezTo>
+                  <a:pt x="487036" y="53000"/>
+                  <a:pt x="476372" y="54138"/>
+                  <a:pt x="465907" y="56348"/>
+                </a:cubicBezTo>
+                <a:cubicBezTo>
+                  <a:pt x="408956" y="63721"/>
+                  <a:pt x="357037" y="90725"/>
+                  <a:pt x="318530" y="131766"/>
+                </a:cubicBezTo>
+                <a:lnTo>
+                  <a:pt x="299655" y="157237"/>
+                </a:lnTo>
+                <a:lnTo>
+                  <a:pt x="299655" y="149149"/>
+                </a:lnTo>
+                <a:cubicBezTo>
+                  <a:pt x="299655" y="66776"/>
+                  <a:pt x="366431" y="0"/>
+                  <a:pt x="448804" y="0"/>
+                </a:cubicBezTo>
+                <a:close/>
+              </a:path>
+            </a:pathLst>
+          </a:custGeom>
+          <a:solidFill>
+            <a:schemeClr val="tx1"/>
+          </a:solidFill>
+          <a:ln>
+            <a:noFill/>
+          </a:ln>
+        </p:spPr>
+        <p:style>
+          <a:lnRef idx="2">
+            <a:schemeClr val="accent1">
+              <a:shade val="15000"/>
+            </a:schemeClr>
+          </a:lnRef>
+          <a:fillRef idx="1">
+            <a:schemeClr val="accent1"/>
+          </a:fillRef>
+          <a:effectRef idx="0">
+            <a:schemeClr val="accent1"/>
+          </a:effectRef>
+          <a:fontRef idx="minor">
+            <a:schemeClr val="lt1"/>
+          </a:fontRef>
+        </p:style>
+        <p:txBody>
+          <a:bodyPr wrap="square" rtlCol="0" anchor="ctr">
+            <a:noAutofit/>
+          </a:bodyPr>
+          <a:lstStyle/>
+          <a:p>
+            <a:pPr algn="ctr"/>
+            <a:endParaRPr lang="en-US"/>
+          </a:p>
+        </p:txBody>
+      </p:sp>
       <p:grpSp>
         <p:nvGrpSpPr>
           <p:cNvPr id="49" name="Group 48">
@@ -21745,228 +22274,1127 @@
           </p:txBody>
         </p:sp>
       </p:grpSp>
-      <p:sp>
-        <p:nvSpPr>
-          <p:cNvPr id="35" name="Freeform: Shape 34">
+      <p:grpSp>
+        <p:nvGrpSpPr>
+          <p:cNvPr id="8" name="Group 7">
             <a:extLst>
               <a:ext uri="{FF2B5EF4-FFF2-40B4-BE49-F238E27FC236}">
-                <a16:creationId xmlns:a16="http://schemas.microsoft.com/office/drawing/2014/main" id="{DBFFE6FC-20FA-BDB9-9377-208B24B8D088}"/>
+                <a16:creationId xmlns:a16="http://schemas.microsoft.com/office/drawing/2014/main" id="{0BCD4FA5-78E1-0838-6932-1C54407C0CAB}"/>
               </a:ext>
             </a:extLst>
           </p:cNvPr>
-          <p:cNvSpPr/>
+          <p:cNvGrpSpPr/>
           <p:nvPr/>
-        </p:nvSpPr>
-        <p:spPr>
-          <a:xfrm rot="19319567">
-            <a:off x="3611767" y="675989"/>
-            <a:ext cx="627137" cy="900000"/>
+        </p:nvGrpSpPr>
+        <p:grpSpPr>
+          <a:xfrm>
+            <a:off x="3281820" y="293525"/>
+            <a:ext cx="1500000" cy="1500000"/>
+            <a:chOff x="3281820" y="293525"/>
+            <a:chExt cx="1500000" cy="1500000"/>
           </a:xfrm>
-          <a:custGeom>
-            <a:avLst/>
-            <a:gdLst>
-              <a:gd name="csX0" fmla="*/ 450000 w 645150"/>
-              <a:gd name="csY0" fmla="*/ 0 h 900000"/>
-              <a:gd name="csX1" fmla="*/ 625161 w 645150"/>
-              <a:gd name="csY1" fmla="*/ 35364 h 900000"/>
-              <a:gd name="csX2" fmla="*/ 645150 w 645150"/>
-              <a:gd name="csY2" fmla="*/ 46214 h 900000"/>
-              <a:gd name="csX3" fmla="*/ 588701 w 645150"/>
-              <a:gd name="csY3" fmla="*/ 76853 h 900000"/>
-              <a:gd name="csX4" fmla="*/ 390300 w 645150"/>
-              <a:gd name="csY4" fmla="*/ 450000 h 900000"/>
-              <a:gd name="csX5" fmla="*/ 588701 w 645150"/>
-              <a:gd name="csY5" fmla="*/ 823147 h 900000"/>
-              <a:gd name="csX6" fmla="*/ 645150 w 645150"/>
-              <a:gd name="csY6" fmla="*/ 853787 h 900000"/>
-              <a:gd name="csX7" fmla="*/ 625161 w 645150"/>
-              <a:gd name="csY7" fmla="*/ 864637 h 900000"/>
-              <a:gd name="csX8" fmla="*/ 450000 w 645150"/>
-              <a:gd name="csY8" fmla="*/ 900000 h 900000"/>
-              <a:gd name="csX9" fmla="*/ 0 w 645150"/>
-              <a:gd name="csY9" fmla="*/ 450000 h 900000"/>
-              <a:gd name="csX10" fmla="*/ 450000 w 645150"/>
-              <a:gd name="csY10" fmla="*/ 0 h 900000"/>
-              <a:gd name="csX0" fmla="*/ 450000 w 645150"/>
-              <a:gd name="csY0" fmla="*/ 0 h 900000"/>
-              <a:gd name="csX1" fmla="*/ 625161 w 645150"/>
-              <a:gd name="csY1" fmla="*/ 35364 h 900000"/>
-              <a:gd name="csX2" fmla="*/ 588701 w 645150"/>
-              <a:gd name="csY2" fmla="*/ 76853 h 900000"/>
-              <a:gd name="csX3" fmla="*/ 390300 w 645150"/>
-              <a:gd name="csY3" fmla="*/ 450000 h 900000"/>
-              <a:gd name="csX4" fmla="*/ 588701 w 645150"/>
-              <a:gd name="csY4" fmla="*/ 823147 h 900000"/>
-              <a:gd name="csX5" fmla="*/ 645150 w 645150"/>
-              <a:gd name="csY5" fmla="*/ 853787 h 900000"/>
-              <a:gd name="csX6" fmla="*/ 625161 w 645150"/>
-              <a:gd name="csY6" fmla="*/ 864637 h 900000"/>
-              <a:gd name="csX7" fmla="*/ 450000 w 645150"/>
-              <a:gd name="csY7" fmla="*/ 900000 h 900000"/>
-              <a:gd name="csX8" fmla="*/ 0 w 645150"/>
-              <a:gd name="csY8" fmla="*/ 450000 h 900000"/>
-              <a:gd name="csX9" fmla="*/ 450000 w 645150"/>
-              <a:gd name="csY9" fmla="*/ 0 h 900000"/>
-              <a:gd name="csX0" fmla="*/ 450000 w 625161"/>
-              <a:gd name="csY0" fmla="*/ 0 h 900000"/>
-              <a:gd name="csX1" fmla="*/ 625161 w 625161"/>
-              <a:gd name="csY1" fmla="*/ 35364 h 900000"/>
-              <a:gd name="csX2" fmla="*/ 588701 w 625161"/>
-              <a:gd name="csY2" fmla="*/ 76853 h 900000"/>
-              <a:gd name="csX3" fmla="*/ 390300 w 625161"/>
-              <a:gd name="csY3" fmla="*/ 450000 h 900000"/>
-              <a:gd name="csX4" fmla="*/ 588701 w 625161"/>
-              <a:gd name="csY4" fmla="*/ 823147 h 900000"/>
-              <a:gd name="csX5" fmla="*/ 625161 w 625161"/>
-              <a:gd name="csY5" fmla="*/ 864637 h 900000"/>
-              <a:gd name="csX6" fmla="*/ 450000 w 625161"/>
-              <a:gd name="csY6" fmla="*/ 900000 h 900000"/>
-              <a:gd name="csX7" fmla="*/ 0 w 625161"/>
-              <a:gd name="csY7" fmla="*/ 450000 h 900000"/>
-              <a:gd name="csX8" fmla="*/ 450000 w 625161"/>
-              <a:gd name="csY8" fmla="*/ 0 h 900000"/>
-              <a:gd name="csX0" fmla="*/ 450000 w 627137"/>
-              <a:gd name="csY0" fmla="*/ 0 h 900000"/>
-              <a:gd name="csX1" fmla="*/ 625161 w 627137"/>
-              <a:gd name="csY1" fmla="*/ 35364 h 900000"/>
-              <a:gd name="csX2" fmla="*/ 588701 w 627137"/>
-              <a:gd name="csY2" fmla="*/ 76853 h 900000"/>
-              <a:gd name="csX3" fmla="*/ 390300 w 627137"/>
-              <a:gd name="csY3" fmla="*/ 450000 h 900000"/>
-              <a:gd name="csX4" fmla="*/ 588701 w 627137"/>
-              <a:gd name="csY4" fmla="*/ 823147 h 900000"/>
-              <a:gd name="csX5" fmla="*/ 625161 w 627137"/>
-              <a:gd name="csY5" fmla="*/ 864637 h 900000"/>
-              <a:gd name="csX6" fmla="*/ 450000 w 627137"/>
-              <a:gd name="csY6" fmla="*/ 900000 h 900000"/>
-              <a:gd name="csX7" fmla="*/ 0 w 627137"/>
-              <a:gd name="csY7" fmla="*/ 450000 h 900000"/>
-              <a:gd name="csX8" fmla="*/ 450000 w 627137"/>
-              <a:gd name="csY8" fmla="*/ 0 h 900000"/>
-              <a:gd name="csX0" fmla="*/ 450000 w 627137"/>
-              <a:gd name="csY0" fmla="*/ 0 h 900000"/>
-              <a:gd name="csX1" fmla="*/ 625161 w 627137"/>
-              <a:gd name="csY1" fmla="*/ 35364 h 900000"/>
-              <a:gd name="csX2" fmla="*/ 588701 w 627137"/>
-              <a:gd name="csY2" fmla="*/ 76853 h 900000"/>
-              <a:gd name="csX3" fmla="*/ 390300 w 627137"/>
-              <a:gd name="csY3" fmla="*/ 450000 h 900000"/>
-              <a:gd name="csX4" fmla="*/ 588701 w 627137"/>
-              <a:gd name="csY4" fmla="*/ 823147 h 900000"/>
-              <a:gd name="csX5" fmla="*/ 625161 w 627137"/>
-              <a:gd name="csY5" fmla="*/ 864637 h 900000"/>
-              <a:gd name="csX6" fmla="*/ 450000 w 627137"/>
-              <a:gd name="csY6" fmla="*/ 900000 h 900000"/>
-              <a:gd name="csX7" fmla="*/ 0 w 627137"/>
-              <a:gd name="csY7" fmla="*/ 450000 h 900000"/>
-              <a:gd name="csX8" fmla="*/ 450000 w 627137"/>
-              <a:gd name="csY8" fmla="*/ 0 h 900000"/>
-            </a:gdLst>
-            <a:ahLst/>
-            <a:cxnLst>
-              <a:cxn ang="0">
-                <a:pos x="csX0" y="csY0"/>
-              </a:cxn>
-              <a:cxn ang="0">
-                <a:pos x="csX1" y="csY1"/>
-              </a:cxn>
-              <a:cxn ang="0">
-                <a:pos x="csX2" y="csY2"/>
-              </a:cxn>
-              <a:cxn ang="0">
-                <a:pos x="csX3" y="csY3"/>
-              </a:cxn>
-              <a:cxn ang="0">
-                <a:pos x="csX4" y="csY4"/>
-              </a:cxn>
-              <a:cxn ang="0">
-                <a:pos x="csX5" y="csY5"/>
-              </a:cxn>
-              <a:cxn ang="0">
-                <a:pos x="csX6" y="csY6"/>
-              </a:cxn>
-              <a:cxn ang="0">
-                <a:pos x="csX7" y="csY7"/>
-              </a:cxn>
-              <a:cxn ang="0">
-                <a:pos x="csX8" y="csY8"/>
-              </a:cxn>
-            </a:cxnLst>
-            <a:rect l="l" t="t" r="r" b="b"/>
-            <a:pathLst>
-              <a:path w="627137" h="900000">
-                <a:moveTo>
-                  <a:pt x="450000" y="0"/>
-                </a:moveTo>
-                <a:cubicBezTo>
-                  <a:pt x="512132" y="0"/>
-                  <a:pt x="571323" y="12592"/>
-                  <a:pt x="625161" y="35364"/>
-                </a:cubicBezTo>
-                <a:cubicBezTo>
-                  <a:pt x="635760" y="54886"/>
-                  <a:pt x="600854" y="63023"/>
-                  <a:pt x="588701" y="76853"/>
-                </a:cubicBezTo>
-                <a:cubicBezTo>
-                  <a:pt x="469000" y="157722"/>
-                  <a:pt x="390300" y="294670"/>
-                  <a:pt x="390300" y="450000"/>
-                </a:cubicBezTo>
-                <a:cubicBezTo>
-                  <a:pt x="390300" y="605330"/>
-                  <a:pt x="469000" y="742279"/>
-                  <a:pt x="588701" y="823147"/>
-                </a:cubicBezTo>
-                <a:cubicBezTo>
-                  <a:pt x="600854" y="836977"/>
-                  <a:pt x="630540" y="855442"/>
-                  <a:pt x="625161" y="864637"/>
-                </a:cubicBezTo>
-                <a:cubicBezTo>
-                  <a:pt x="571323" y="887408"/>
-                  <a:pt x="512132" y="900000"/>
-                  <a:pt x="450000" y="900000"/>
-                </a:cubicBezTo>
-                <a:cubicBezTo>
-                  <a:pt x="201472" y="900000"/>
-                  <a:pt x="0" y="698528"/>
-                  <a:pt x="0" y="450000"/>
-                </a:cubicBezTo>
-                <a:cubicBezTo>
-                  <a:pt x="0" y="201472"/>
-                  <a:pt x="201472" y="0"/>
-                  <a:pt x="450000" y="0"/>
-                </a:cubicBezTo>
-                <a:close/>
-              </a:path>
-            </a:pathLst>
-          </a:custGeom>
-          <a:solidFill>
-            <a:schemeClr val="tx1"/>
-          </a:solidFill>
-          <a:ln w="74613" cap="flat">
-            <a:noFill/>
-            <a:prstDash val="solid"/>
-            <a:miter/>
-          </a:ln>
-        </p:spPr>
-        <p:txBody>
-          <a:bodyPr wrap="square">
-            <a:noAutofit/>
-          </a:bodyPr>
-          <a:lstStyle/>
-          <a:p>
-            <a:endParaRPr lang="en-US"/>
-          </a:p>
-        </p:txBody>
-      </p:sp>
+        </p:grpSpPr>
+        <p:sp>
+          <p:nvSpPr>
+            <p:cNvPr id="35" name="Freeform: Shape 34">
+              <a:extLst>
+                <a:ext uri="{FF2B5EF4-FFF2-40B4-BE49-F238E27FC236}">
+                  <a16:creationId xmlns:a16="http://schemas.microsoft.com/office/drawing/2014/main" id="{DBFFE6FC-20FA-BDB9-9377-208B24B8D088}"/>
+                </a:ext>
+              </a:extLst>
+            </p:cNvPr>
+            <p:cNvSpPr/>
+            <p:nvPr/>
+          </p:nvSpPr>
+          <p:spPr>
+            <a:xfrm rot="19319567">
+              <a:off x="3611767" y="675989"/>
+              <a:ext cx="627137" cy="900000"/>
+            </a:xfrm>
+            <a:custGeom>
+              <a:avLst/>
+              <a:gdLst>
+                <a:gd name="csX0" fmla="*/ 450000 w 645150"/>
+                <a:gd name="csY0" fmla="*/ 0 h 900000"/>
+                <a:gd name="csX1" fmla="*/ 625161 w 645150"/>
+                <a:gd name="csY1" fmla="*/ 35364 h 900000"/>
+                <a:gd name="csX2" fmla="*/ 645150 w 645150"/>
+                <a:gd name="csY2" fmla="*/ 46214 h 900000"/>
+                <a:gd name="csX3" fmla="*/ 588701 w 645150"/>
+                <a:gd name="csY3" fmla="*/ 76853 h 900000"/>
+                <a:gd name="csX4" fmla="*/ 390300 w 645150"/>
+                <a:gd name="csY4" fmla="*/ 450000 h 900000"/>
+                <a:gd name="csX5" fmla="*/ 588701 w 645150"/>
+                <a:gd name="csY5" fmla="*/ 823147 h 900000"/>
+                <a:gd name="csX6" fmla="*/ 645150 w 645150"/>
+                <a:gd name="csY6" fmla="*/ 853787 h 900000"/>
+                <a:gd name="csX7" fmla="*/ 625161 w 645150"/>
+                <a:gd name="csY7" fmla="*/ 864637 h 900000"/>
+                <a:gd name="csX8" fmla="*/ 450000 w 645150"/>
+                <a:gd name="csY8" fmla="*/ 900000 h 900000"/>
+                <a:gd name="csX9" fmla="*/ 0 w 645150"/>
+                <a:gd name="csY9" fmla="*/ 450000 h 900000"/>
+                <a:gd name="csX10" fmla="*/ 450000 w 645150"/>
+                <a:gd name="csY10" fmla="*/ 0 h 900000"/>
+                <a:gd name="csX0" fmla="*/ 450000 w 645150"/>
+                <a:gd name="csY0" fmla="*/ 0 h 900000"/>
+                <a:gd name="csX1" fmla="*/ 625161 w 645150"/>
+                <a:gd name="csY1" fmla="*/ 35364 h 900000"/>
+                <a:gd name="csX2" fmla="*/ 588701 w 645150"/>
+                <a:gd name="csY2" fmla="*/ 76853 h 900000"/>
+                <a:gd name="csX3" fmla="*/ 390300 w 645150"/>
+                <a:gd name="csY3" fmla="*/ 450000 h 900000"/>
+                <a:gd name="csX4" fmla="*/ 588701 w 645150"/>
+                <a:gd name="csY4" fmla="*/ 823147 h 900000"/>
+                <a:gd name="csX5" fmla="*/ 645150 w 645150"/>
+                <a:gd name="csY5" fmla="*/ 853787 h 900000"/>
+                <a:gd name="csX6" fmla="*/ 625161 w 645150"/>
+                <a:gd name="csY6" fmla="*/ 864637 h 900000"/>
+                <a:gd name="csX7" fmla="*/ 450000 w 645150"/>
+                <a:gd name="csY7" fmla="*/ 900000 h 900000"/>
+                <a:gd name="csX8" fmla="*/ 0 w 645150"/>
+                <a:gd name="csY8" fmla="*/ 450000 h 900000"/>
+                <a:gd name="csX9" fmla="*/ 450000 w 645150"/>
+                <a:gd name="csY9" fmla="*/ 0 h 900000"/>
+                <a:gd name="csX0" fmla="*/ 450000 w 625161"/>
+                <a:gd name="csY0" fmla="*/ 0 h 900000"/>
+                <a:gd name="csX1" fmla="*/ 625161 w 625161"/>
+                <a:gd name="csY1" fmla="*/ 35364 h 900000"/>
+                <a:gd name="csX2" fmla="*/ 588701 w 625161"/>
+                <a:gd name="csY2" fmla="*/ 76853 h 900000"/>
+                <a:gd name="csX3" fmla="*/ 390300 w 625161"/>
+                <a:gd name="csY3" fmla="*/ 450000 h 900000"/>
+                <a:gd name="csX4" fmla="*/ 588701 w 625161"/>
+                <a:gd name="csY4" fmla="*/ 823147 h 900000"/>
+                <a:gd name="csX5" fmla="*/ 625161 w 625161"/>
+                <a:gd name="csY5" fmla="*/ 864637 h 900000"/>
+                <a:gd name="csX6" fmla="*/ 450000 w 625161"/>
+                <a:gd name="csY6" fmla="*/ 900000 h 900000"/>
+                <a:gd name="csX7" fmla="*/ 0 w 625161"/>
+                <a:gd name="csY7" fmla="*/ 450000 h 900000"/>
+                <a:gd name="csX8" fmla="*/ 450000 w 625161"/>
+                <a:gd name="csY8" fmla="*/ 0 h 900000"/>
+                <a:gd name="csX0" fmla="*/ 450000 w 627137"/>
+                <a:gd name="csY0" fmla="*/ 0 h 900000"/>
+                <a:gd name="csX1" fmla="*/ 625161 w 627137"/>
+                <a:gd name="csY1" fmla="*/ 35364 h 900000"/>
+                <a:gd name="csX2" fmla="*/ 588701 w 627137"/>
+                <a:gd name="csY2" fmla="*/ 76853 h 900000"/>
+                <a:gd name="csX3" fmla="*/ 390300 w 627137"/>
+                <a:gd name="csY3" fmla="*/ 450000 h 900000"/>
+                <a:gd name="csX4" fmla="*/ 588701 w 627137"/>
+                <a:gd name="csY4" fmla="*/ 823147 h 900000"/>
+                <a:gd name="csX5" fmla="*/ 625161 w 627137"/>
+                <a:gd name="csY5" fmla="*/ 864637 h 900000"/>
+                <a:gd name="csX6" fmla="*/ 450000 w 627137"/>
+                <a:gd name="csY6" fmla="*/ 900000 h 900000"/>
+                <a:gd name="csX7" fmla="*/ 0 w 627137"/>
+                <a:gd name="csY7" fmla="*/ 450000 h 900000"/>
+                <a:gd name="csX8" fmla="*/ 450000 w 627137"/>
+                <a:gd name="csY8" fmla="*/ 0 h 900000"/>
+                <a:gd name="csX0" fmla="*/ 450000 w 627137"/>
+                <a:gd name="csY0" fmla="*/ 0 h 900000"/>
+                <a:gd name="csX1" fmla="*/ 625161 w 627137"/>
+                <a:gd name="csY1" fmla="*/ 35364 h 900000"/>
+                <a:gd name="csX2" fmla="*/ 588701 w 627137"/>
+                <a:gd name="csY2" fmla="*/ 76853 h 900000"/>
+                <a:gd name="csX3" fmla="*/ 390300 w 627137"/>
+                <a:gd name="csY3" fmla="*/ 450000 h 900000"/>
+                <a:gd name="csX4" fmla="*/ 588701 w 627137"/>
+                <a:gd name="csY4" fmla="*/ 823147 h 900000"/>
+                <a:gd name="csX5" fmla="*/ 625161 w 627137"/>
+                <a:gd name="csY5" fmla="*/ 864637 h 900000"/>
+                <a:gd name="csX6" fmla="*/ 450000 w 627137"/>
+                <a:gd name="csY6" fmla="*/ 900000 h 900000"/>
+                <a:gd name="csX7" fmla="*/ 0 w 627137"/>
+                <a:gd name="csY7" fmla="*/ 450000 h 900000"/>
+                <a:gd name="csX8" fmla="*/ 450000 w 627137"/>
+                <a:gd name="csY8" fmla="*/ 0 h 900000"/>
+              </a:gdLst>
+              <a:ahLst/>
+              <a:cxnLst>
+                <a:cxn ang="0">
+                  <a:pos x="csX0" y="csY0"/>
+                </a:cxn>
+                <a:cxn ang="0">
+                  <a:pos x="csX1" y="csY1"/>
+                </a:cxn>
+                <a:cxn ang="0">
+                  <a:pos x="csX2" y="csY2"/>
+                </a:cxn>
+                <a:cxn ang="0">
+                  <a:pos x="csX3" y="csY3"/>
+                </a:cxn>
+                <a:cxn ang="0">
+                  <a:pos x="csX4" y="csY4"/>
+                </a:cxn>
+                <a:cxn ang="0">
+                  <a:pos x="csX5" y="csY5"/>
+                </a:cxn>
+                <a:cxn ang="0">
+                  <a:pos x="csX6" y="csY6"/>
+                </a:cxn>
+                <a:cxn ang="0">
+                  <a:pos x="csX7" y="csY7"/>
+                </a:cxn>
+                <a:cxn ang="0">
+                  <a:pos x="csX8" y="csY8"/>
+                </a:cxn>
+              </a:cxnLst>
+              <a:rect l="l" t="t" r="r" b="b"/>
+              <a:pathLst>
+                <a:path w="627137" h="900000">
+                  <a:moveTo>
+                    <a:pt x="450000" y="0"/>
+                  </a:moveTo>
+                  <a:cubicBezTo>
+                    <a:pt x="512132" y="0"/>
+                    <a:pt x="571323" y="12592"/>
+                    <a:pt x="625161" y="35364"/>
+                  </a:cubicBezTo>
+                  <a:cubicBezTo>
+                    <a:pt x="635760" y="54886"/>
+                    <a:pt x="600854" y="63023"/>
+                    <a:pt x="588701" y="76853"/>
+                  </a:cubicBezTo>
+                  <a:cubicBezTo>
+                    <a:pt x="469000" y="157722"/>
+                    <a:pt x="390300" y="294670"/>
+                    <a:pt x="390300" y="450000"/>
+                  </a:cubicBezTo>
+                  <a:cubicBezTo>
+                    <a:pt x="390300" y="605330"/>
+                    <a:pt x="469000" y="742279"/>
+                    <a:pt x="588701" y="823147"/>
+                  </a:cubicBezTo>
+                  <a:cubicBezTo>
+                    <a:pt x="600854" y="836977"/>
+                    <a:pt x="630540" y="855442"/>
+                    <a:pt x="625161" y="864637"/>
+                  </a:cubicBezTo>
+                  <a:cubicBezTo>
+                    <a:pt x="571323" y="887408"/>
+                    <a:pt x="512132" y="900000"/>
+                    <a:pt x="450000" y="900000"/>
+                  </a:cubicBezTo>
+                  <a:cubicBezTo>
+                    <a:pt x="201472" y="900000"/>
+                    <a:pt x="0" y="698528"/>
+                    <a:pt x="0" y="450000"/>
+                  </a:cubicBezTo>
+                  <a:cubicBezTo>
+                    <a:pt x="0" y="201472"/>
+                    <a:pt x="201472" y="0"/>
+                    <a:pt x="450000" y="0"/>
+                  </a:cubicBezTo>
+                  <a:close/>
+                </a:path>
+              </a:pathLst>
+            </a:custGeom>
+            <a:solidFill>
+              <a:schemeClr val="tx1"/>
+            </a:solidFill>
+            <a:ln w="74613" cap="flat">
+              <a:noFill/>
+              <a:prstDash val="solid"/>
+              <a:miter/>
+            </a:ln>
+          </p:spPr>
+          <p:txBody>
+            <a:bodyPr wrap="square">
+              <a:noAutofit/>
+            </a:bodyPr>
+            <a:lstStyle/>
+            <a:p>
+              <a:endParaRPr lang="en-US"/>
+            </a:p>
+          </p:txBody>
+        </p:sp>
+        <p:sp>
+          <p:nvSpPr>
+            <p:cNvPr id="60" name="Oval 59">
+              <a:extLst>
+                <a:ext uri="{FF2B5EF4-FFF2-40B4-BE49-F238E27FC236}">
+                  <a16:creationId xmlns:a16="http://schemas.microsoft.com/office/drawing/2014/main" id="{15E3DDD9-29D5-C838-07EA-30CB87E8C12F}"/>
+                </a:ext>
+              </a:extLst>
+            </p:cNvPr>
+            <p:cNvSpPr/>
+            <p:nvPr/>
+          </p:nvSpPr>
+          <p:spPr>
+            <a:xfrm>
+              <a:off x="3281820" y="968525"/>
+              <a:ext cx="151200" cy="151200"/>
+            </a:xfrm>
+            <a:prstGeom prst="ellipse">
+              <a:avLst/>
+            </a:prstGeom>
+            <a:solidFill>
+              <a:schemeClr val="tx1"/>
+            </a:solidFill>
+            <a:ln>
+              <a:noFill/>
+            </a:ln>
+          </p:spPr>
+          <p:style>
+            <a:lnRef idx="2">
+              <a:schemeClr val="accent1">
+                <a:shade val="15000"/>
+              </a:schemeClr>
+            </a:lnRef>
+            <a:fillRef idx="1">
+              <a:schemeClr val="accent1"/>
+            </a:fillRef>
+            <a:effectRef idx="0">
+              <a:schemeClr val="accent1"/>
+            </a:effectRef>
+            <a:fontRef idx="minor">
+              <a:schemeClr val="lt1"/>
+            </a:fontRef>
+          </p:style>
+          <p:txBody>
+            <a:bodyPr rtlCol="0" anchor="ctr"/>
+            <a:lstStyle/>
+            <a:p>
+              <a:pPr algn="ctr"/>
+              <a:endParaRPr lang="en-US"/>
+            </a:p>
+          </p:txBody>
+        </p:sp>
+        <p:sp>
+          <p:nvSpPr>
+            <p:cNvPr id="61" name="Oval 60">
+              <a:extLst>
+                <a:ext uri="{FF2B5EF4-FFF2-40B4-BE49-F238E27FC236}">
+                  <a16:creationId xmlns:a16="http://schemas.microsoft.com/office/drawing/2014/main" id="{72DE3F93-8974-B215-5337-8E0A04E3786A}"/>
+                </a:ext>
+              </a:extLst>
+            </p:cNvPr>
+            <p:cNvSpPr/>
+            <p:nvPr/>
+          </p:nvSpPr>
+          <p:spPr>
+            <a:xfrm>
+              <a:off x="4432917" y="491228"/>
+              <a:ext cx="151200" cy="151200"/>
+            </a:xfrm>
+            <a:prstGeom prst="ellipse">
+              <a:avLst/>
+            </a:prstGeom>
+            <a:solidFill>
+              <a:schemeClr val="tx1"/>
+            </a:solidFill>
+            <a:ln>
+              <a:noFill/>
+            </a:ln>
+          </p:spPr>
+          <p:style>
+            <a:lnRef idx="2">
+              <a:schemeClr val="accent1">
+                <a:shade val="15000"/>
+              </a:schemeClr>
+            </a:lnRef>
+            <a:fillRef idx="1">
+              <a:schemeClr val="accent1"/>
+            </a:fillRef>
+            <a:effectRef idx="0">
+              <a:schemeClr val="accent1"/>
+            </a:effectRef>
+            <a:fontRef idx="minor">
+              <a:schemeClr val="lt1"/>
+            </a:fontRef>
+          </p:style>
+          <p:txBody>
+            <a:bodyPr rtlCol="0" anchor="ctr"/>
+            <a:lstStyle/>
+            <a:p>
+              <a:pPr algn="ctr"/>
+              <a:endParaRPr lang="en-US"/>
+            </a:p>
+          </p:txBody>
+        </p:sp>
+        <p:sp>
+          <p:nvSpPr>
+            <p:cNvPr id="62" name="Oval 61">
+              <a:extLst>
+                <a:ext uri="{FF2B5EF4-FFF2-40B4-BE49-F238E27FC236}">
+                  <a16:creationId xmlns:a16="http://schemas.microsoft.com/office/drawing/2014/main" id="{79A09F4D-B561-04A3-CA44-B06913069C01}"/>
+                </a:ext>
+              </a:extLst>
+            </p:cNvPr>
+            <p:cNvSpPr/>
+            <p:nvPr/>
+          </p:nvSpPr>
+          <p:spPr>
+            <a:xfrm>
+              <a:off x="3955620" y="293525"/>
+              <a:ext cx="151200" cy="151200"/>
+            </a:xfrm>
+            <a:prstGeom prst="ellipse">
+              <a:avLst/>
+            </a:prstGeom>
+            <a:solidFill>
+              <a:schemeClr val="tx1"/>
+            </a:solidFill>
+            <a:ln>
+              <a:noFill/>
+            </a:ln>
+          </p:spPr>
+          <p:style>
+            <a:lnRef idx="2">
+              <a:schemeClr val="accent1">
+                <a:shade val="15000"/>
+              </a:schemeClr>
+            </a:lnRef>
+            <a:fillRef idx="1">
+              <a:schemeClr val="accent1"/>
+            </a:fillRef>
+            <a:effectRef idx="0">
+              <a:schemeClr val="accent1"/>
+            </a:effectRef>
+            <a:fontRef idx="minor">
+              <a:schemeClr val="lt1"/>
+            </a:fontRef>
+          </p:style>
+          <p:txBody>
+            <a:bodyPr rtlCol="0" anchor="ctr"/>
+            <a:lstStyle/>
+            <a:p>
+              <a:pPr algn="ctr"/>
+              <a:endParaRPr lang="en-US"/>
+            </a:p>
+          </p:txBody>
+        </p:sp>
+        <p:sp>
+          <p:nvSpPr>
+            <p:cNvPr id="63" name="Oval 62">
+              <a:extLst>
+                <a:ext uri="{FF2B5EF4-FFF2-40B4-BE49-F238E27FC236}">
+                  <a16:creationId xmlns:a16="http://schemas.microsoft.com/office/drawing/2014/main" id="{8FED497A-CBDA-DC55-F7EB-3213FFB3BFE3}"/>
+                </a:ext>
+              </a:extLst>
+            </p:cNvPr>
+            <p:cNvSpPr/>
+            <p:nvPr/>
+          </p:nvSpPr>
+          <p:spPr>
+            <a:xfrm>
+              <a:off x="3479522" y="491228"/>
+              <a:ext cx="151200" cy="151200"/>
+            </a:xfrm>
+            <a:prstGeom prst="ellipse">
+              <a:avLst/>
+            </a:prstGeom>
+            <a:solidFill>
+              <a:schemeClr val="tx1"/>
+            </a:solidFill>
+            <a:ln>
+              <a:noFill/>
+            </a:ln>
+          </p:spPr>
+          <p:style>
+            <a:lnRef idx="2">
+              <a:schemeClr val="accent1">
+                <a:shade val="15000"/>
+              </a:schemeClr>
+            </a:lnRef>
+            <a:fillRef idx="1">
+              <a:schemeClr val="accent1"/>
+            </a:fillRef>
+            <a:effectRef idx="0">
+              <a:schemeClr val="accent1"/>
+            </a:effectRef>
+            <a:fontRef idx="minor">
+              <a:schemeClr val="lt1"/>
+            </a:fontRef>
+          </p:style>
+          <p:txBody>
+            <a:bodyPr rtlCol="0" anchor="ctr"/>
+            <a:lstStyle/>
+            <a:p>
+              <a:pPr algn="ctr"/>
+              <a:endParaRPr lang="en-US"/>
+            </a:p>
+          </p:txBody>
+        </p:sp>
+        <p:sp>
+          <p:nvSpPr>
+            <p:cNvPr id="64" name="Oval 63">
+              <a:extLst>
+                <a:ext uri="{FF2B5EF4-FFF2-40B4-BE49-F238E27FC236}">
+                  <a16:creationId xmlns:a16="http://schemas.microsoft.com/office/drawing/2014/main" id="{F67BDBD3-3376-BE31-A6D5-09E7F2403D49}"/>
+                </a:ext>
+              </a:extLst>
+            </p:cNvPr>
+            <p:cNvSpPr/>
+            <p:nvPr/>
+          </p:nvSpPr>
+          <p:spPr>
+            <a:xfrm>
+              <a:off x="4630620" y="968525"/>
+              <a:ext cx="151200" cy="151200"/>
+            </a:xfrm>
+            <a:prstGeom prst="ellipse">
+              <a:avLst/>
+            </a:prstGeom>
+            <a:solidFill>
+              <a:schemeClr val="tx1"/>
+            </a:solidFill>
+            <a:ln>
+              <a:noFill/>
+            </a:ln>
+          </p:spPr>
+          <p:style>
+            <a:lnRef idx="2">
+              <a:schemeClr val="accent1">
+                <a:shade val="15000"/>
+              </a:schemeClr>
+            </a:lnRef>
+            <a:fillRef idx="1">
+              <a:schemeClr val="accent1"/>
+            </a:fillRef>
+            <a:effectRef idx="0">
+              <a:schemeClr val="accent1"/>
+            </a:effectRef>
+            <a:fontRef idx="minor">
+              <a:schemeClr val="lt1"/>
+            </a:fontRef>
+          </p:style>
+          <p:txBody>
+            <a:bodyPr rtlCol="0" anchor="ctr"/>
+            <a:lstStyle/>
+            <a:p>
+              <a:pPr algn="ctr"/>
+              <a:endParaRPr lang="en-US"/>
+            </a:p>
+          </p:txBody>
+        </p:sp>
+        <p:sp>
+          <p:nvSpPr>
+            <p:cNvPr id="65" name="Oval 64">
+              <a:extLst>
+                <a:ext uri="{FF2B5EF4-FFF2-40B4-BE49-F238E27FC236}">
+                  <a16:creationId xmlns:a16="http://schemas.microsoft.com/office/drawing/2014/main" id="{94A10547-6900-4A53-6C6A-752559744030}"/>
+                </a:ext>
+              </a:extLst>
+            </p:cNvPr>
+            <p:cNvSpPr/>
+            <p:nvPr/>
+          </p:nvSpPr>
+          <p:spPr>
+            <a:xfrm>
+              <a:off x="3479522" y="1444622"/>
+              <a:ext cx="151200" cy="151200"/>
+            </a:xfrm>
+            <a:prstGeom prst="ellipse">
+              <a:avLst/>
+            </a:prstGeom>
+            <a:solidFill>
+              <a:schemeClr val="tx1"/>
+            </a:solidFill>
+            <a:ln>
+              <a:noFill/>
+            </a:ln>
+          </p:spPr>
+          <p:style>
+            <a:lnRef idx="2">
+              <a:schemeClr val="accent1">
+                <a:shade val="15000"/>
+              </a:schemeClr>
+            </a:lnRef>
+            <a:fillRef idx="1">
+              <a:schemeClr val="accent1"/>
+            </a:fillRef>
+            <a:effectRef idx="0">
+              <a:schemeClr val="accent1"/>
+            </a:effectRef>
+            <a:fontRef idx="minor">
+              <a:schemeClr val="lt1"/>
+            </a:fontRef>
+          </p:style>
+          <p:txBody>
+            <a:bodyPr rtlCol="0" anchor="ctr"/>
+            <a:lstStyle/>
+            <a:p>
+              <a:pPr algn="ctr"/>
+              <a:endParaRPr lang="en-US"/>
+            </a:p>
+          </p:txBody>
+        </p:sp>
+        <p:sp>
+          <p:nvSpPr>
+            <p:cNvPr id="66" name="Oval 65">
+              <a:extLst>
+                <a:ext uri="{FF2B5EF4-FFF2-40B4-BE49-F238E27FC236}">
+                  <a16:creationId xmlns:a16="http://schemas.microsoft.com/office/drawing/2014/main" id="{3F5D8FF3-A71D-130C-903D-D9C864644AF5}"/>
+                </a:ext>
+              </a:extLst>
+            </p:cNvPr>
+            <p:cNvSpPr/>
+            <p:nvPr/>
+          </p:nvSpPr>
+          <p:spPr>
+            <a:xfrm>
+              <a:off x="3956820" y="1642325"/>
+              <a:ext cx="151200" cy="151200"/>
+            </a:xfrm>
+            <a:prstGeom prst="ellipse">
+              <a:avLst/>
+            </a:prstGeom>
+            <a:solidFill>
+              <a:schemeClr val="tx1"/>
+            </a:solidFill>
+            <a:ln>
+              <a:noFill/>
+            </a:ln>
+          </p:spPr>
+          <p:style>
+            <a:lnRef idx="2">
+              <a:schemeClr val="accent1">
+                <a:shade val="15000"/>
+              </a:schemeClr>
+            </a:lnRef>
+            <a:fillRef idx="1">
+              <a:schemeClr val="accent1"/>
+            </a:fillRef>
+            <a:effectRef idx="0">
+              <a:schemeClr val="accent1"/>
+            </a:effectRef>
+            <a:fontRef idx="minor">
+              <a:schemeClr val="lt1"/>
+            </a:fontRef>
+          </p:style>
+          <p:txBody>
+            <a:bodyPr rtlCol="0" anchor="ctr"/>
+            <a:lstStyle/>
+            <a:p>
+              <a:pPr algn="ctr"/>
+              <a:endParaRPr lang="en-US"/>
+            </a:p>
+          </p:txBody>
+        </p:sp>
+        <p:sp>
+          <p:nvSpPr>
+            <p:cNvPr id="67" name="Oval 66">
+              <a:extLst>
+                <a:ext uri="{FF2B5EF4-FFF2-40B4-BE49-F238E27FC236}">
+                  <a16:creationId xmlns:a16="http://schemas.microsoft.com/office/drawing/2014/main" id="{31CBEC7B-19BD-22A3-E56C-4A93D1516BE2}"/>
+                </a:ext>
+              </a:extLst>
+            </p:cNvPr>
+            <p:cNvSpPr/>
+            <p:nvPr/>
+          </p:nvSpPr>
+          <p:spPr>
+            <a:xfrm>
+              <a:off x="4432917" y="1444622"/>
+              <a:ext cx="151200" cy="151200"/>
+            </a:xfrm>
+            <a:prstGeom prst="ellipse">
+              <a:avLst/>
+            </a:prstGeom>
+            <a:solidFill>
+              <a:schemeClr val="tx1"/>
+            </a:solidFill>
+            <a:ln>
+              <a:noFill/>
+            </a:ln>
+          </p:spPr>
+          <p:style>
+            <a:lnRef idx="2">
+              <a:schemeClr val="accent1">
+                <a:shade val="15000"/>
+              </a:schemeClr>
+            </a:lnRef>
+            <a:fillRef idx="1">
+              <a:schemeClr val="accent1"/>
+            </a:fillRef>
+            <a:effectRef idx="0">
+              <a:schemeClr val="accent1"/>
+            </a:effectRef>
+            <a:fontRef idx="minor">
+              <a:schemeClr val="lt1"/>
+            </a:fontRef>
+          </p:style>
+          <p:txBody>
+            <a:bodyPr rtlCol="0" anchor="ctr"/>
+            <a:lstStyle/>
+            <a:p>
+              <a:pPr algn="ctr"/>
+              <a:endParaRPr lang="en-US"/>
+            </a:p>
+          </p:txBody>
+        </p:sp>
+      </p:grpSp>
+      <p:grpSp>
+        <p:nvGrpSpPr>
+          <p:cNvPr id="100" name="Group 99">
+            <a:extLst>
+              <a:ext uri="{FF2B5EF4-FFF2-40B4-BE49-F238E27FC236}">
+                <a16:creationId xmlns:a16="http://schemas.microsoft.com/office/drawing/2014/main" id="{C3D96305-75DA-D430-9EDF-52DFE2649EDE}"/>
+              </a:ext>
+            </a:extLst>
+          </p:cNvPr>
+          <p:cNvGrpSpPr/>
+          <p:nvPr/>
+        </p:nvGrpSpPr>
+        <p:grpSpPr>
+          <a:xfrm>
+            <a:off x="251162" y="2299222"/>
+            <a:ext cx="1067817" cy="1501200"/>
+            <a:chOff x="251163" y="3239689"/>
+            <a:chExt cx="938250" cy="1313554"/>
+          </a:xfrm>
+        </p:grpSpPr>
+        <p:sp>
+          <p:nvSpPr>
+            <p:cNvPr id="18" name="Freeform: Shape 17">
+              <a:extLst>
+                <a:ext uri="{FF2B5EF4-FFF2-40B4-BE49-F238E27FC236}">
+                  <a16:creationId xmlns:a16="http://schemas.microsoft.com/office/drawing/2014/main" id="{0C367A9C-0472-DE94-9898-166A5FD33739}"/>
+                </a:ext>
+              </a:extLst>
+            </p:cNvPr>
+            <p:cNvSpPr/>
+            <p:nvPr/>
+          </p:nvSpPr>
+          <p:spPr>
+            <a:xfrm>
+              <a:off x="251163" y="3380431"/>
+              <a:ext cx="938250" cy="1172812"/>
+            </a:xfrm>
+            <a:custGeom>
+              <a:avLst/>
+              <a:gdLst>
+                <a:gd name="csX0" fmla="*/ 938250 w 938250"/>
+                <a:gd name="csY0" fmla="*/ 140738 h 1172812"/>
+                <a:gd name="csX1" fmla="*/ 938250 w 938250"/>
+                <a:gd name="csY1" fmla="*/ 1032075 h 1172812"/>
+                <a:gd name="csX2" fmla="*/ 797513 w 938250"/>
+                <a:gd name="csY2" fmla="*/ 1172813 h 1172812"/>
+                <a:gd name="csX3" fmla="*/ 140738 w 938250"/>
+                <a:gd name="csY3" fmla="*/ 1172813 h 1172812"/>
+                <a:gd name="csX4" fmla="*/ 0 w 938250"/>
+                <a:gd name="csY4" fmla="*/ 1032075 h 1172812"/>
+                <a:gd name="csX5" fmla="*/ 0 w 938250"/>
+                <a:gd name="csY5" fmla="*/ 140738 h 1172812"/>
+                <a:gd name="csX6" fmla="*/ 140738 w 938250"/>
+                <a:gd name="csY6" fmla="*/ 0 h 1172812"/>
+                <a:gd name="csX7" fmla="*/ 140738 w 938250"/>
+                <a:gd name="csY7" fmla="*/ 93825 h 1172812"/>
+                <a:gd name="csX8" fmla="*/ 281475 w 938250"/>
+                <a:gd name="csY8" fmla="*/ 234563 h 1172812"/>
+                <a:gd name="csX9" fmla="*/ 656775 w 938250"/>
+                <a:gd name="csY9" fmla="*/ 234563 h 1172812"/>
+                <a:gd name="csX10" fmla="*/ 797513 w 938250"/>
+                <a:gd name="csY10" fmla="*/ 93825 h 1172812"/>
+                <a:gd name="csX11" fmla="*/ 797513 w 938250"/>
+                <a:gd name="csY11" fmla="*/ 0 h 1172812"/>
+                <a:gd name="csX12" fmla="*/ 938250 w 938250"/>
+                <a:gd name="csY12" fmla="*/ 140738 h 1172812"/>
+              </a:gdLst>
+              <a:ahLst/>
+              <a:cxnLst>
+                <a:cxn ang="0">
+                  <a:pos x="csX0" y="csY0"/>
+                </a:cxn>
+                <a:cxn ang="0">
+                  <a:pos x="csX1" y="csY1"/>
+                </a:cxn>
+                <a:cxn ang="0">
+                  <a:pos x="csX2" y="csY2"/>
+                </a:cxn>
+                <a:cxn ang="0">
+                  <a:pos x="csX3" y="csY3"/>
+                </a:cxn>
+                <a:cxn ang="0">
+                  <a:pos x="csX4" y="csY4"/>
+                </a:cxn>
+                <a:cxn ang="0">
+                  <a:pos x="csX5" y="csY5"/>
+                </a:cxn>
+                <a:cxn ang="0">
+                  <a:pos x="csX6" y="csY6"/>
+                </a:cxn>
+                <a:cxn ang="0">
+                  <a:pos x="csX7" y="csY7"/>
+                </a:cxn>
+                <a:cxn ang="0">
+                  <a:pos x="csX8" y="csY8"/>
+                </a:cxn>
+                <a:cxn ang="0">
+                  <a:pos x="csX9" y="csY9"/>
+                </a:cxn>
+                <a:cxn ang="0">
+                  <a:pos x="csX10" y="csY10"/>
+                </a:cxn>
+                <a:cxn ang="0">
+                  <a:pos x="csX11" y="csY11"/>
+                </a:cxn>
+                <a:cxn ang="0">
+                  <a:pos x="csX12" y="csY12"/>
+                </a:cxn>
+              </a:cxnLst>
+              <a:rect l="l" t="t" r="r" b="b"/>
+              <a:pathLst>
+                <a:path w="938250" h="1172812">
+                  <a:moveTo>
+                    <a:pt x="938250" y="140738"/>
+                  </a:moveTo>
+                  <a:lnTo>
+                    <a:pt x="938250" y="1032075"/>
+                  </a:lnTo>
+                  <a:cubicBezTo>
+                    <a:pt x="938018" y="1109706"/>
+                    <a:pt x="875143" y="1172581"/>
+                    <a:pt x="797513" y="1172813"/>
+                  </a:cubicBezTo>
+                  <a:lnTo>
+                    <a:pt x="140738" y="1172813"/>
+                  </a:lnTo>
+                  <a:cubicBezTo>
+                    <a:pt x="63107" y="1172581"/>
+                    <a:pt x="232" y="1109706"/>
+                    <a:pt x="0" y="1032075"/>
+                  </a:cubicBezTo>
+                  <a:lnTo>
+                    <a:pt x="0" y="140738"/>
+                  </a:lnTo>
+                  <a:cubicBezTo>
+                    <a:pt x="232" y="63107"/>
+                    <a:pt x="63107" y="232"/>
+                    <a:pt x="140738" y="0"/>
+                  </a:cubicBezTo>
+                  <a:lnTo>
+                    <a:pt x="140738" y="93825"/>
+                  </a:lnTo>
+                  <a:cubicBezTo>
+                    <a:pt x="140969" y="171456"/>
+                    <a:pt x="203844" y="234331"/>
+                    <a:pt x="281475" y="234563"/>
+                  </a:cubicBezTo>
+                  <a:lnTo>
+                    <a:pt x="656775" y="234563"/>
+                  </a:lnTo>
+                  <a:cubicBezTo>
+                    <a:pt x="734406" y="234331"/>
+                    <a:pt x="797281" y="171456"/>
+                    <a:pt x="797513" y="93825"/>
+                  </a:cubicBezTo>
+                  <a:lnTo>
+                    <a:pt x="797513" y="0"/>
+                  </a:lnTo>
+                  <a:cubicBezTo>
+                    <a:pt x="875143" y="232"/>
+                    <a:pt x="938018" y="63107"/>
+                    <a:pt x="938250" y="140738"/>
+                  </a:cubicBezTo>
+                  <a:close/>
+                </a:path>
+              </a:pathLst>
+            </a:custGeom>
+            <a:solidFill>
+              <a:srgbClr val="000000"/>
+            </a:solidFill>
+            <a:ln w="46732" cap="flat">
+              <a:noFill/>
+              <a:prstDash val="solid"/>
+              <a:miter/>
+            </a:ln>
+          </p:spPr>
+          <p:txBody>
+            <a:bodyPr/>
+            <a:lstStyle/>
+            <a:p>
+              <a:endParaRPr lang="en-US"/>
+            </a:p>
+          </p:txBody>
+        </p:sp>
+        <p:sp>
+          <p:nvSpPr>
+            <p:cNvPr id="19" name="Freeform: Shape 18">
+              <a:extLst>
+                <a:ext uri="{FF2B5EF4-FFF2-40B4-BE49-F238E27FC236}">
+                  <a16:creationId xmlns:a16="http://schemas.microsoft.com/office/drawing/2014/main" id="{1E827209-71F7-E51B-ED43-7816EB172C92}"/>
+                </a:ext>
+              </a:extLst>
+            </p:cNvPr>
+            <p:cNvSpPr/>
+            <p:nvPr/>
+          </p:nvSpPr>
+          <p:spPr>
+            <a:xfrm>
+              <a:off x="485725" y="3239689"/>
+              <a:ext cx="469125" cy="281479"/>
+            </a:xfrm>
+            <a:custGeom>
+              <a:avLst/>
+              <a:gdLst>
+                <a:gd name="csX0" fmla="*/ 46913 w 469125"/>
+                <a:gd name="csY0" fmla="*/ 281480 h 281479"/>
+                <a:gd name="csX1" fmla="*/ 0 w 469125"/>
+                <a:gd name="csY1" fmla="*/ 234567 h 281479"/>
+                <a:gd name="csX2" fmla="*/ 0 w 469125"/>
+                <a:gd name="csY2" fmla="*/ 140742 h 281479"/>
+                <a:gd name="csX3" fmla="*/ 46913 w 469125"/>
+                <a:gd name="csY3" fmla="*/ 93830 h 281479"/>
+                <a:gd name="csX4" fmla="*/ 99689 w 469125"/>
+                <a:gd name="csY4" fmla="*/ 93830 h 281479"/>
+                <a:gd name="csX5" fmla="*/ 113294 w 469125"/>
+                <a:gd name="csY5" fmla="*/ 70374 h 281479"/>
+                <a:gd name="csX6" fmla="*/ 215798 w 469125"/>
+                <a:gd name="csY6" fmla="*/ 1928 h 281479"/>
+                <a:gd name="csX7" fmla="*/ 233812 w 469125"/>
+                <a:gd name="csY7" fmla="*/ 5 h 281479"/>
+                <a:gd name="csX8" fmla="*/ 253421 w 469125"/>
+                <a:gd name="csY8" fmla="*/ 1741 h 281479"/>
+                <a:gd name="csX9" fmla="*/ 355878 w 469125"/>
+                <a:gd name="csY9" fmla="*/ 70374 h 281479"/>
+                <a:gd name="csX10" fmla="*/ 369436 w 469125"/>
+                <a:gd name="csY10" fmla="*/ 93830 h 281479"/>
+                <a:gd name="csX11" fmla="*/ 422213 w 469125"/>
+                <a:gd name="csY11" fmla="*/ 93830 h 281479"/>
+                <a:gd name="csX12" fmla="*/ 469125 w 469125"/>
+                <a:gd name="csY12" fmla="*/ 140742 h 281479"/>
+                <a:gd name="csX13" fmla="*/ 469125 w 469125"/>
+                <a:gd name="csY13" fmla="*/ 234567 h 281479"/>
+                <a:gd name="csX14" fmla="*/ 422213 w 469125"/>
+                <a:gd name="csY14" fmla="*/ 281480 h 281479"/>
+              </a:gdLst>
+              <a:ahLst/>
+              <a:cxnLst>
+                <a:cxn ang="0">
+                  <a:pos x="csX0" y="csY0"/>
+                </a:cxn>
+                <a:cxn ang="0">
+                  <a:pos x="csX1" y="csY1"/>
+                </a:cxn>
+                <a:cxn ang="0">
+                  <a:pos x="csX2" y="csY2"/>
+                </a:cxn>
+                <a:cxn ang="0">
+                  <a:pos x="csX3" y="csY3"/>
+                </a:cxn>
+                <a:cxn ang="0">
+                  <a:pos x="csX4" y="csY4"/>
+                </a:cxn>
+                <a:cxn ang="0">
+                  <a:pos x="csX5" y="csY5"/>
+                </a:cxn>
+                <a:cxn ang="0">
+                  <a:pos x="csX6" y="csY6"/>
+                </a:cxn>
+                <a:cxn ang="0">
+                  <a:pos x="csX7" y="csY7"/>
+                </a:cxn>
+                <a:cxn ang="0">
+                  <a:pos x="csX8" y="csY8"/>
+                </a:cxn>
+                <a:cxn ang="0">
+                  <a:pos x="csX9" y="csY9"/>
+                </a:cxn>
+                <a:cxn ang="0">
+                  <a:pos x="csX10" y="csY10"/>
+                </a:cxn>
+                <a:cxn ang="0">
+                  <a:pos x="csX11" y="csY11"/>
+                </a:cxn>
+                <a:cxn ang="0">
+                  <a:pos x="csX12" y="csY12"/>
+                </a:cxn>
+                <a:cxn ang="0">
+                  <a:pos x="csX13" y="csY13"/>
+                </a:cxn>
+                <a:cxn ang="0">
+                  <a:pos x="csX14" y="csY14"/>
+                </a:cxn>
+              </a:cxnLst>
+              <a:rect l="l" t="t" r="r" b="b"/>
+              <a:pathLst>
+                <a:path w="469125" h="281479">
+                  <a:moveTo>
+                    <a:pt x="46913" y="281480"/>
+                  </a:moveTo>
+                  <a:cubicBezTo>
+                    <a:pt x="21003" y="281480"/>
+                    <a:pt x="0" y="260477"/>
+                    <a:pt x="0" y="234567"/>
+                  </a:cubicBezTo>
+                  <a:lnTo>
+                    <a:pt x="0" y="140742"/>
+                  </a:lnTo>
+                  <a:cubicBezTo>
+                    <a:pt x="0" y="114833"/>
+                    <a:pt x="21003" y="93830"/>
+                    <a:pt x="46913" y="93830"/>
+                  </a:cubicBezTo>
+                  <a:lnTo>
+                    <a:pt x="99689" y="93830"/>
+                  </a:lnTo>
+                  <a:lnTo>
+                    <a:pt x="113294" y="70374"/>
+                  </a:lnTo>
+                  <a:cubicBezTo>
+                    <a:pt x="134904" y="32809"/>
+                    <a:pt x="172819" y="7492"/>
+                    <a:pt x="215798" y="1928"/>
+                  </a:cubicBezTo>
+                  <a:cubicBezTo>
+                    <a:pt x="221721" y="677"/>
+                    <a:pt x="227757" y="33"/>
+                    <a:pt x="233812" y="5"/>
+                  </a:cubicBezTo>
+                  <a:cubicBezTo>
+                    <a:pt x="240390" y="-61"/>
+                    <a:pt x="246958" y="521"/>
+                    <a:pt x="253421" y="1741"/>
+                  </a:cubicBezTo>
+                  <a:cubicBezTo>
+                    <a:pt x="296408" y="7388"/>
+                    <a:pt x="334299" y="32769"/>
+                    <a:pt x="355878" y="70374"/>
+                  </a:cubicBezTo>
+                  <a:lnTo>
+                    <a:pt x="369436" y="93830"/>
+                  </a:lnTo>
+                  <a:lnTo>
+                    <a:pt x="422213" y="93830"/>
+                  </a:lnTo>
+                  <a:cubicBezTo>
+                    <a:pt x="448122" y="93830"/>
+                    <a:pt x="469125" y="114833"/>
+                    <a:pt x="469125" y="140742"/>
+                  </a:cubicBezTo>
+                  <a:lnTo>
+                    <a:pt x="469125" y="234567"/>
+                  </a:lnTo>
+                  <a:cubicBezTo>
+                    <a:pt x="469125" y="260477"/>
+                    <a:pt x="448122" y="281480"/>
+                    <a:pt x="422213" y="281480"/>
+                  </a:cubicBezTo>
+                  <a:close/>
+                </a:path>
+              </a:pathLst>
+            </a:custGeom>
+            <a:solidFill>
+              <a:srgbClr val="000000"/>
+            </a:solidFill>
+            <a:ln w="46732" cap="flat">
+              <a:noFill/>
+              <a:prstDash val="solid"/>
+              <a:miter/>
+            </a:ln>
+          </p:spPr>
+          <p:txBody>
+            <a:bodyPr/>
+            <a:lstStyle/>
+            <a:p>
+              <a:endParaRPr lang="en-US"/>
+            </a:p>
+          </p:txBody>
+        </p:sp>
+      </p:grpSp>
+      <p:grpSp>
+        <p:nvGrpSpPr>
+          <p:cNvPr id="12" name="Group 11">
+            <a:extLst>
+              <a:ext uri="{FF2B5EF4-FFF2-40B4-BE49-F238E27FC236}">
+                <a16:creationId xmlns:a16="http://schemas.microsoft.com/office/drawing/2014/main" id="{DE3375B0-F789-BC04-58E6-B6AFC7600F59}"/>
+              </a:ext>
+            </a:extLst>
+          </p:cNvPr>
+          <p:cNvGrpSpPr/>
+          <p:nvPr/>
+        </p:nvGrpSpPr>
+        <p:grpSpPr>
+          <a:xfrm>
+            <a:off x="320040" y="2292972"/>
+            <a:ext cx="11871960" cy="1501200"/>
+            <a:chOff x="1644242" y="6040073"/>
+            <a:chExt cx="7684316" cy="562063"/>
+          </a:xfrm>
+        </p:grpSpPr>
+        <p:cxnSp>
+          <p:nvCxnSpPr>
+            <p:cNvPr id="10" name="Straight Connector 9">
+              <a:extLst>
+                <a:ext uri="{FF2B5EF4-FFF2-40B4-BE49-F238E27FC236}">
+                  <a16:creationId xmlns:a16="http://schemas.microsoft.com/office/drawing/2014/main" id="{A0AF680D-14B9-BACE-5EED-EF936754797E}"/>
+                </a:ext>
+              </a:extLst>
+            </p:cNvPr>
+            <p:cNvCxnSpPr/>
+            <p:nvPr/>
+          </p:nvCxnSpPr>
+          <p:spPr>
+            <a:xfrm>
+              <a:off x="1644242" y="6040073"/>
+              <a:ext cx="7684316" cy="0"/>
+            </a:xfrm>
+            <a:prstGeom prst="line">
+              <a:avLst/>
+            </a:prstGeom>
+          </p:spPr>
+          <p:style>
+            <a:lnRef idx="1">
+              <a:schemeClr val="accent1"/>
+            </a:lnRef>
+            <a:fillRef idx="0">
+              <a:schemeClr val="accent1"/>
+            </a:fillRef>
+            <a:effectRef idx="0">
+              <a:schemeClr val="accent1"/>
+            </a:effectRef>
+            <a:fontRef idx="minor">
+              <a:schemeClr val="tx1"/>
+            </a:fontRef>
+          </p:style>
+        </p:cxnSp>
+        <p:cxnSp>
+          <p:nvCxnSpPr>
+            <p:cNvPr id="11" name="Straight Connector 10">
+              <a:extLst>
+                <a:ext uri="{FF2B5EF4-FFF2-40B4-BE49-F238E27FC236}">
+                  <a16:creationId xmlns:a16="http://schemas.microsoft.com/office/drawing/2014/main" id="{DE8CE165-BFEE-BF0C-CF52-130716790726}"/>
+                </a:ext>
+              </a:extLst>
+            </p:cNvPr>
+            <p:cNvCxnSpPr/>
+            <p:nvPr/>
+          </p:nvCxnSpPr>
+          <p:spPr>
+            <a:xfrm>
+              <a:off x="1644242" y="6602136"/>
+              <a:ext cx="7684316" cy="0"/>
+            </a:xfrm>
+            <a:prstGeom prst="line">
+              <a:avLst/>
+            </a:prstGeom>
+          </p:spPr>
+          <p:style>
+            <a:lnRef idx="1">
+              <a:schemeClr val="accent1"/>
+            </a:lnRef>
+            <a:fillRef idx="0">
+              <a:schemeClr val="accent1"/>
+            </a:fillRef>
+            <a:effectRef idx="0">
+              <a:schemeClr val="accent1"/>
+            </a:effectRef>
+            <a:fontRef idx="minor">
+              <a:schemeClr val="tx1"/>
+            </a:fontRef>
+          </p:style>
+        </p:cxnSp>
+      </p:grpSp>
       <p:sp>
         <p:nvSpPr>
-          <p:cNvPr id="60" name="Oval 59">
+          <p:cNvPr id="53" name="Rectangle: Rounded Corners 52">
             <a:extLst>
               <a:ext uri="{FF2B5EF4-FFF2-40B4-BE49-F238E27FC236}">
-                <a16:creationId xmlns:a16="http://schemas.microsoft.com/office/drawing/2014/main" id="{15E3DDD9-29D5-C838-07EA-30CB87E8C12F}"/>
+                <a16:creationId xmlns:a16="http://schemas.microsoft.com/office/drawing/2014/main" id="{5202DEE6-46B5-1A3F-5ED1-DE476D12C716}"/>
               </a:ext>
             </a:extLst>
           </p:cNvPr>
@@ -21975,14 +23403,67 @@
         </p:nvSpPr>
         <p:spPr>
           <a:xfrm>
-            <a:off x="3281820" y="968525"/>
-            <a:ext cx="151200" cy="151200"/>
+            <a:off x="7868308" y="2292972"/>
+            <a:ext cx="1000800" cy="1299600"/>
           </a:xfrm>
-          <a:prstGeom prst="ellipse">
-            <a:avLst/>
+          <a:prstGeom prst="roundRect">
+            <a:avLst>
+              <a:gd name="adj" fmla="val 14903"/>
+            </a:avLst>
+          </a:prstGeom>
+          <a:ln>
+            <a:noFill/>
+          </a:ln>
+        </p:spPr>
+        <p:style>
+          <a:lnRef idx="2">
+            <a:schemeClr val="accent1">
+              <a:shade val="15000"/>
+            </a:schemeClr>
+          </a:lnRef>
+          <a:fillRef idx="1">
+            <a:schemeClr val="accent1"/>
+          </a:fillRef>
+          <a:effectRef idx="0">
+            <a:schemeClr val="accent1"/>
+          </a:effectRef>
+          <a:fontRef idx="minor">
+            <a:schemeClr val="lt1"/>
+          </a:fontRef>
+        </p:style>
+        <p:txBody>
+          <a:bodyPr rtlCol="0" anchor="ctr"/>
+          <a:lstStyle/>
+          <a:p>
+            <a:pPr algn="ctr"/>
+            <a:endParaRPr lang="en-US"/>
+          </a:p>
+        </p:txBody>
+      </p:sp>
+      <p:sp>
+        <p:nvSpPr>
+          <p:cNvPr id="54" name="Rectangle: Rounded Corners 53">
+            <a:extLst>
+              <a:ext uri="{FF2B5EF4-FFF2-40B4-BE49-F238E27FC236}">
+                <a16:creationId xmlns:a16="http://schemas.microsoft.com/office/drawing/2014/main" id="{A7714D1D-0B0B-8ECC-6B61-98DB02D0A5ED}"/>
+              </a:ext>
+            </a:extLst>
+          </p:cNvPr>
+          <p:cNvSpPr/>
+          <p:nvPr/>
+        </p:nvSpPr>
+        <p:spPr>
+          <a:xfrm>
+            <a:off x="7967468" y="2393193"/>
+            <a:ext cx="802481" cy="1099376"/>
+          </a:xfrm>
+          <a:prstGeom prst="roundRect">
+            <a:avLst>
+              <a:gd name="adj" fmla="val 6217"/>
+            </a:avLst>
           </a:prstGeom>
           <a:solidFill>
-            <a:schemeClr val="tx1"/>
+            <a:schemeClr val="accent2"/>
           </a:solidFill>
           <a:ln>
             <a:noFill/>
@@ -22015,10 +23496,10 @@
       </p:sp>
       <p:sp>
         <p:nvSpPr>
-          <p:cNvPr id="61" name="Oval 60">
+          <p:cNvPr id="56" name="Rectangle: Rounded Corners 55">
             <a:extLst>
               <a:ext uri="{FF2B5EF4-FFF2-40B4-BE49-F238E27FC236}">
-                <a16:creationId xmlns:a16="http://schemas.microsoft.com/office/drawing/2014/main" id="{72DE3F93-8974-B215-5337-8E0A04E3786A}"/>
+                <a16:creationId xmlns:a16="http://schemas.microsoft.com/office/drawing/2014/main" id="{C01B3D6A-B8D2-B228-EAC8-C3244FA466A2}"/>
               </a:ext>
             </a:extLst>
           </p:cNvPr>
@@ -22027,15 +23508,14 @@
         </p:nvSpPr>
         <p:spPr>
           <a:xfrm>
-            <a:off x="4432917" y="491228"/>
-            <a:ext cx="151200" cy="151200"/>
+            <a:off x="7568654" y="2494572"/>
+            <a:ext cx="1000800" cy="1299600"/>
           </a:xfrm>
-          <a:prstGeom prst="ellipse">
-            <a:avLst/>
+          <a:prstGeom prst="roundRect">
+            <a:avLst>
+              <a:gd name="adj" fmla="val 14903"/>
+            </a:avLst>
           </a:prstGeom>
-          <a:solidFill>
-            <a:schemeClr val="tx1"/>
-          </a:solidFill>
           <a:ln>
             <a:noFill/>
           </a:ln>
@@ -22067,10 +23547,10 @@
       </p:sp>
       <p:sp>
         <p:nvSpPr>
-          <p:cNvPr id="62" name="Oval 61">
+          <p:cNvPr id="57" name="Rectangle: Rounded Corners 56">
             <a:extLst>
               <a:ext uri="{FF2B5EF4-FFF2-40B4-BE49-F238E27FC236}">
-                <a16:creationId xmlns:a16="http://schemas.microsoft.com/office/drawing/2014/main" id="{79A09F4D-B561-04A3-CA44-B06913069C01}"/>
+                <a16:creationId xmlns:a16="http://schemas.microsoft.com/office/drawing/2014/main" id="{10E6BF5B-7FFA-9C74-8D53-525F6219D06C}"/>
               </a:ext>
             </a:extLst>
           </p:cNvPr>
@@ -22079,14 +23559,16 @@
         </p:nvSpPr>
         <p:spPr>
           <a:xfrm>
-            <a:off x="3955620" y="293525"/>
-            <a:ext cx="151200" cy="151200"/>
+            <a:off x="7667814" y="2594793"/>
+            <a:ext cx="802481" cy="1099376"/>
           </a:xfrm>
-          <a:prstGeom prst="ellipse">
-            <a:avLst/>
+          <a:prstGeom prst="roundRect">
+            <a:avLst>
+              <a:gd name="adj" fmla="val 6217"/>
+            </a:avLst>
           </a:prstGeom>
           <a:solidFill>
-            <a:schemeClr val="tx1"/>
+            <a:schemeClr val="accent2"/>
           </a:solidFill>
           <a:ln>
             <a:noFill/>
@@ -22117,12 +23599,381 @@
           </a:p>
         </p:txBody>
       </p:sp>
+      <p:grpSp>
+        <p:nvGrpSpPr>
+          <p:cNvPr id="101" name="Group 100">
+            <a:extLst>
+              <a:ext uri="{FF2B5EF4-FFF2-40B4-BE49-F238E27FC236}">
+                <a16:creationId xmlns:a16="http://schemas.microsoft.com/office/drawing/2014/main" id="{1C58287F-98B7-DBD6-7688-3A4A6879665D}"/>
+              </a:ext>
+            </a:extLst>
+          </p:cNvPr>
+          <p:cNvGrpSpPr/>
+          <p:nvPr/>
+        </p:nvGrpSpPr>
+        <p:grpSpPr>
+          <a:xfrm>
+            <a:off x="6427663" y="2386792"/>
+            <a:ext cx="938250" cy="1313554"/>
+            <a:chOff x="4794479" y="3239689"/>
+            <a:chExt cx="938250" cy="1313554"/>
+          </a:xfrm>
+        </p:grpSpPr>
+        <p:sp>
+          <p:nvSpPr>
+            <p:cNvPr id="58" name="Freeform: Shape 57">
+              <a:extLst>
+                <a:ext uri="{FF2B5EF4-FFF2-40B4-BE49-F238E27FC236}">
+                  <a16:creationId xmlns:a16="http://schemas.microsoft.com/office/drawing/2014/main" id="{47369550-7BF4-4D10-7B7E-9BC4EE89C198}"/>
+                </a:ext>
+              </a:extLst>
+            </p:cNvPr>
+            <p:cNvSpPr/>
+            <p:nvPr/>
+          </p:nvSpPr>
+          <p:spPr>
+            <a:xfrm>
+              <a:off x="4794479" y="3380431"/>
+              <a:ext cx="938250" cy="1172812"/>
+            </a:xfrm>
+            <a:custGeom>
+              <a:avLst/>
+              <a:gdLst>
+                <a:gd name="csX0" fmla="*/ 938250 w 938250"/>
+                <a:gd name="csY0" fmla="*/ 140738 h 1172812"/>
+                <a:gd name="csX1" fmla="*/ 938250 w 938250"/>
+                <a:gd name="csY1" fmla="*/ 1032075 h 1172812"/>
+                <a:gd name="csX2" fmla="*/ 797513 w 938250"/>
+                <a:gd name="csY2" fmla="*/ 1172813 h 1172812"/>
+                <a:gd name="csX3" fmla="*/ 140738 w 938250"/>
+                <a:gd name="csY3" fmla="*/ 1172813 h 1172812"/>
+                <a:gd name="csX4" fmla="*/ 0 w 938250"/>
+                <a:gd name="csY4" fmla="*/ 1032075 h 1172812"/>
+                <a:gd name="csX5" fmla="*/ 0 w 938250"/>
+                <a:gd name="csY5" fmla="*/ 140738 h 1172812"/>
+                <a:gd name="csX6" fmla="*/ 140738 w 938250"/>
+                <a:gd name="csY6" fmla="*/ 0 h 1172812"/>
+                <a:gd name="csX7" fmla="*/ 140738 w 938250"/>
+                <a:gd name="csY7" fmla="*/ 93825 h 1172812"/>
+                <a:gd name="csX8" fmla="*/ 281475 w 938250"/>
+                <a:gd name="csY8" fmla="*/ 234563 h 1172812"/>
+                <a:gd name="csX9" fmla="*/ 656775 w 938250"/>
+                <a:gd name="csY9" fmla="*/ 234563 h 1172812"/>
+                <a:gd name="csX10" fmla="*/ 797513 w 938250"/>
+                <a:gd name="csY10" fmla="*/ 93825 h 1172812"/>
+                <a:gd name="csX11" fmla="*/ 797513 w 938250"/>
+                <a:gd name="csY11" fmla="*/ 0 h 1172812"/>
+                <a:gd name="csX12" fmla="*/ 938250 w 938250"/>
+                <a:gd name="csY12" fmla="*/ 140738 h 1172812"/>
+              </a:gdLst>
+              <a:ahLst/>
+              <a:cxnLst>
+                <a:cxn ang="0">
+                  <a:pos x="csX0" y="csY0"/>
+                </a:cxn>
+                <a:cxn ang="0">
+                  <a:pos x="csX1" y="csY1"/>
+                </a:cxn>
+                <a:cxn ang="0">
+                  <a:pos x="csX2" y="csY2"/>
+                </a:cxn>
+                <a:cxn ang="0">
+                  <a:pos x="csX3" y="csY3"/>
+                </a:cxn>
+                <a:cxn ang="0">
+                  <a:pos x="csX4" y="csY4"/>
+                </a:cxn>
+                <a:cxn ang="0">
+                  <a:pos x="csX5" y="csY5"/>
+                </a:cxn>
+                <a:cxn ang="0">
+                  <a:pos x="csX6" y="csY6"/>
+                </a:cxn>
+                <a:cxn ang="0">
+                  <a:pos x="csX7" y="csY7"/>
+                </a:cxn>
+                <a:cxn ang="0">
+                  <a:pos x="csX8" y="csY8"/>
+                </a:cxn>
+                <a:cxn ang="0">
+                  <a:pos x="csX9" y="csY9"/>
+                </a:cxn>
+                <a:cxn ang="0">
+                  <a:pos x="csX10" y="csY10"/>
+                </a:cxn>
+                <a:cxn ang="0">
+                  <a:pos x="csX11" y="csY11"/>
+                </a:cxn>
+                <a:cxn ang="0">
+                  <a:pos x="csX12" y="csY12"/>
+                </a:cxn>
+              </a:cxnLst>
+              <a:rect l="l" t="t" r="r" b="b"/>
+              <a:pathLst>
+                <a:path w="938250" h="1172812">
+                  <a:moveTo>
+                    <a:pt x="938250" y="140738"/>
+                  </a:moveTo>
+                  <a:lnTo>
+                    <a:pt x="938250" y="1032075"/>
+                  </a:lnTo>
+                  <a:cubicBezTo>
+                    <a:pt x="938018" y="1109706"/>
+                    <a:pt x="875143" y="1172581"/>
+                    <a:pt x="797513" y="1172813"/>
+                  </a:cubicBezTo>
+                  <a:lnTo>
+                    <a:pt x="140738" y="1172813"/>
+                  </a:lnTo>
+                  <a:cubicBezTo>
+                    <a:pt x="63107" y="1172581"/>
+                    <a:pt x="232" y="1109706"/>
+                    <a:pt x="0" y="1032075"/>
+                  </a:cubicBezTo>
+                  <a:lnTo>
+                    <a:pt x="0" y="140738"/>
+                  </a:lnTo>
+                  <a:cubicBezTo>
+                    <a:pt x="232" y="63107"/>
+                    <a:pt x="63107" y="232"/>
+                    <a:pt x="140738" y="0"/>
+                  </a:cubicBezTo>
+                  <a:lnTo>
+                    <a:pt x="140738" y="93825"/>
+                  </a:lnTo>
+                  <a:cubicBezTo>
+                    <a:pt x="140969" y="171456"/>
+                    <a:pt x="203844" y="234331"/>
+                    <a:pt x="281475" y="234563"/>
+                  </a:cubicBezTo>
+                  <a:lnTo>
+                    <a:pt x="656775" y="234563"/>
+                  </a:lnTo>
+                  <a:cubicBezTo>
+                    <a:pt x="734406" y="234331"/>
+                    <a:pt x="797281" y="171456"/>
+                    <a:pt x="797513" y="93825"/>
+                  </a:cubicBezTo>
+                  <a:lnTo>
+                    <a:pt x="797513" y="0"/>
+                  </a:lnTo>
+                  <a:cubicBezTo>
+                    <a:pt x="875143" y="232"/>
+                    <a:pt x="938018" y="63107"/>
+                    <a:pt x="938250" y="140738"/>
+                  </a:cubicBezTo>
+                  <a:close/>
+                </a:path>
+              </a:pathLst>
+            </a:custGeom>
+            <a:solidFill>
+              <a:srgbClr val="000000"/>
+            </a:solidFill>
+            <a:ln w="46732" cap="flat">
+              <a:noFill/>
+              <a:prstDash val="solid"/>
+              <a:miter/>
+            </a:ln>
+          </p:spPr>
+          <p:txBody>
+            <a:bodyPr/>
+            <a:lstStyle/>
+            <a:p>
+              <a:endParaRPr lang="en-US"/>
+            </a:p>
+          </p:txBody>
+        </p:sp>
+        <p:sp>
+          <p:nvSpPr>
+            <p:cNvPr id="59" name="Freeform: Shape 58">
+              <a:extLst>
+                <a:ext uri="{FF2B5EF4-FFF2-40B4-BE49-F238E27FC236}">
+                  <a16:creationId xmlns:a16="http://schemas.microsoft.com/office/drawing/2014/main" id="{A35A891A-7542-540A-8195-A6A7907C450B}"/>
+                </a:ext>
+              </a:extLst>
+            </p:cNvPr>
+            <p:cNvSpPr/>
+            <p:nvPr/>
+          </p:nvSpPr>
+          <p:spPr>
+            <a:xfrm>
+              <a:off x="5029041" y="3239689"/>
+              <a:ext cx="469125" cy="281479"/>
+            </a:xfrm>
+            <a:custGeom>
+              <a:avLst/>
+              <a:gdLst>
+                <a:gd name="csX0" fmla="*/ 46913 w 469125"/>
+                <a:gd name="csY0" fmla="*/ 281480 h 281479"/>
+                <a:gd name="csX1" fmla="*/ 0 w 469125"/>
+                <a:gd name="csY1" fmla="*/ 234567 h 281479"/>
+                <a:gd name="csX2" fmla="*/ 0 w 469125"/>
+                <a:gd name="csY2" fmla="*/ 140742 h 281479"/>
+                <a:gd name="csX3" fmla="*/ 46913 w 469125"/>
+                <a:gd name="csY3" fmla="*/ 93830 h 281479"/>
+                <a:gd name="csX4" fmla="*/ 99689 w 469125"/>
+                <a:gd name="csY4" fmla="*/ 93830 h 281479"/>
+                <a:gd name="csX5" fmla="*/ 113294 w 469125"/>
+                <a:gd name="csY5" fmla="*/ 70374 h 281479"/>
+                <a:gd name="csX6" fmla="*/ 215798 w 469125"/>
+                <a:gd name="csY6" fmla="*/ 1928 h 281479"/>
+                <a:gd name="csX7" fmla="*/ 233812 w 469125"/>
+                <a:gd name="csY7" fmla="*/ 5 h 281479"/>
+                <a:gd name="csX8" fmla="*/ 253421 w 469125"/>
+                <a:gd name="csY8" fmla="*/ 1741 h 281479"/>
+                <a:gd name="csX9" fmla="*/ 355878 w 469125"/>
+                <a:gd name="csY9" fmla="*/ 70374 h 281479"/>
+                <a:gd name="csX10" fmla="*/ 369436 w 469125"/>
+                <a:gd name="csY10" fmla="*/ 93830 h 281479"/>
+                <a:gd name="csX11" fmla="*/ 422213 w 469125"/>
+                <a:gd name="csY11" fmla="*/ 93830 h 281479"/>
+                <a:gd name="csX12" fmla="*/ 469125 w 469125"/>
+                <a:gd name="csY12" fmla="*/ 140742 h 281479"/>
+                <a:gd name="csX13" fmla="*/ 469125 w 469125"/>
+                <a:gd name="csY13" fmla="*/ 234567 h 281479"/>
+                <a:gd name="csX14" fmla="*/ 422213 w 469125"/>
+                <a:gd name="csY14" fmla="*/ 281480 h 281479"/>
+              </a:gdLst>
+              <a:ahLst/>
+              <a:cxnLst>
+                <a:cxn ang="0">
+                  <a:pos x="csX0" y="csY0"/>
+                </a:cxn>
+                <a:cxn ang="0">
+                  <a:pos x="csX1" y="csY1"/>
+                </a:cxn>
+                <a:cxn ang="0">
+                  <a:pos x="csX2" y="csY2"/>
+                </a:cxn>
+                <a:cxn ang="0">
+                  <a:pos x="csX3" y="csY3"/>
+                </a:cxn>
+                <a:cxn ang="0">
+                  <a:pos x="csX4" y="csY4"/>
+                </a:cxn>
+                <a:cxn ang="0">
+                  <a:pos x="csX5" y="csY5"/>
+                </a:cxn>
+                <a:cxn ang="0">
+                  <a:pos x="csX6" y="csY6"/>
+                </a:cxn>
+                <a:cxn ang="0">
+                  <a:pos x="csX7" y="csY7"/>
+                </a:cxn>
+                <a:cxn ang="0">
+                  <a:pos x="csX8" y="csY8"/>
+                </a:cxn>
+                <a:cxn ang="0">
+                  <a:pos x="csX9" y="csY9"/>
+                </a:cxn>
+                <a:cxn ang="0">
+                  <a:pos x="csX10" y="csY10"/>
+                </a:cxn>
+                <a:cxn ang="0">
+                  <a:pos x="csX11" y="csY11"/>
+                </a:cxn>
+                <a:cxn ang="0">
+                  <a:pos x="csX12" y="csY12"/>
+                </a:cxn>
+                <a:cxn ang="0">
+                  <a:pos x="csX13" y="csY13"/>
+                </a:cxn>
+                <a:cxn ang="0">
+                  <a:pos x="csX14" y="csY14"/>
+                </a:cxn>
+              </a:cxnLst>
+              <a:rect l="l" t="t" r="r" b="b"/>
+              <a:pathLst>
+                <a:path w="469125" h="281479">
+                  <a:moveTo>
+                    <a:pt x="46913" y="281480"/>
+                  </a:moveTo>
+                  <a:cubicBezTo>
+                    <a:pt x="21003" y="281480"/>
+                    <a:pt x="0" y="260477"/>
+                    <a:pt x="0" y="234567"/>
+                  </a:cubicBezTo>
+                  <a:lnTo>
+                    <a:pt x="0" y="140742"/>
+                  </a:lnTo>
+                  <a:cubicBezTo>
+                    <a:pt x="0" y="114833"/>
+                    <a:pt x="21003" y="93830"/>
+                    <a:pt x="46913" y="93830"/>
+                  </a:cubicBezTo>
+                  <a:lnTo>
+                    <a:pt x="99689" y="93830"/>
+                  </a:lnTo>
+                  <a:lnTo>
+                    <a:pt x="113294" y="70374"/>
+                  </a:lnTo>
+                  <a:cubicBezTo>
+                    <a:pt x="134904" y="32809"/>
+                    <a:pt x="172819" y="7492"/>
+                    <a:pt x="215798" y="1928"/>
+                  </a:cubicBezTo>
+                  <a:cubicBezTo>
+                    <a:pt x="221721" y="677"/>
+                    <a:pt x="227757" y="33"/>
+                    <a:pt x="233812" y="5"/>
+                  </a:cubicBezTo>
+                  <a:cubicBezTo>
+                    <a:pt x="240390" y="-61"/>
+                    <a:pt x="246958" y="521"/>
+                    <a:pt x="253421" y="1741"/>
+                  </a:cubicBezTo>
+                  <a:cubicBezTo>
+                    <a:pt x="296408" y="7388"/>
+                    <a:pt x="334299" y="32769"/>
+                    <a:pt x="355878" y="70374"/>
+                  </a:cubicBezTo>
+                  <a:lnTo>
+                    <a:pt x="369436" y="93830"/>
+                  </a:lnTo>
+                  <a:lnTo>
+                    <a:pt x="422213" y="93830"/>
+                  </a:lnTo>
+                  <a:cubicBezTo>
+                    <a:pt x="448122" y="93830"/>
+                    <a:pt x="469125" y="114833"/>
+                    <a:pt x="469125" y="140742"/>
+                  </a:cubicBezTo>
+                  <a:lnTo>
+                    <a:pt x="469125" y="234567"/>
+                  </a:lnTo>
+                  <a:cubicBezTo>
+                    <a:pt x="469125" y="260477"/>
+                    <a:pt x="448122" y="281480"/>
+                    <a:pt x="422213" y="281480"/>
+                  </a:cubicBezTo>
+                  <a:close/>
+                </a:path>
+              </a:pathLst>
+            </a:custGeom>
+            <a:solidFill>
+              <a:srgbClr val="000000"/>
+            </a:solidFill>
+            <a:ln w="46732" cap="flat">
+              <a:noFill/>
+              <a:prstDash val="solid"/>
+              <a:miter/>
+            </a:ln>
+          </p:spPr>
+          <p:txBody>
+            <a:bodyPr/>
+            <a:lstStyle/>
+            <a:p>
+              <a:endParaRPr lang="en-US"/>
+            </a:p>
+          </p:txBody>
+        </p:sp>
+      </p:grpSp>
       <p:sp>
         <p:nvSpPr>
-          <p:cNvPr id="63" name="Oval 62">
+          <p:cNvPr id="76" name="Freeform: Shape 75">
             <a:extLst>
               <a:ext uri="{FF2B5EF4-FFF2-40B4-BE49-F238E27FC236}">
-                <a16:creationId xmlns:a16="http://schemas.microsoft.com/office/drawing/2014/main" id="{8FED497A-CBDA-DC55-F7EB-3213FFB3BFE3}"/>
+                <a16:creationId xmlns:a16="http://schemas.microsoft.com/office/drawing/2014/main" id="{1103A28F-7F23-9FEC-DACF-301F3BF8B5ED}"/>
               </a:ext>
             </a:extLst>
           </p:cNvPr>
@@ -22131,12 +23982,228 @@
         </p:nvSpPr>
         <p:spPr>
           <a:xfrm>
-            <a:off x="3479522" y="491228"/>
-            <a:ext cx="151200" cy="151200"/>
+            <a:off x="1478890" y="2292972"/>
+            <a:ext cx="1300454" cy="1501200"/>
           </a:xfrm>
-          <a:prstGeom prst="ellipse">
+          <a:custGeom>
             <a:avLst/>
-          </a:prstGeom>
+            <a:gdLst>
+              <a:gd name="csX0" fmla="*/ 149050 w 1300454"/>
+              <a:gd name="csY0" fmla="*/ 301821 h 1501200"/>
+              <a:gd name="csX1" fmla="*/ 99160 w 1300454"/>
+              <a:gd name="csY1" fmla="*/ 351711 h 1501200"/>
+              <a:gd name="csX2" fmla="*/ 99160 w 1300454"/>
+              <a:gd name="csY2" fmla="*/ 1351307 h 1501200"/>
+              <a:gd name="csX3" fmla="*/ 149050 w 1300454"/>
+              <a:gd name="csY3" fmla="*/ 1401197 h 1501200"/>
+              <a:gd name="csX4" fmla="*/ 851751 w 1300454"/>
+              <a:gd name="csY4" fmla="*/ 1401197 h 1501200"/>
+              <a:gd name="csX5" fmla="*/ 901641 w 1300454"/>
+              <a:gd name="csY5" fmla="*/ 1351307 h 1501200"/>
+              <a:gd name="csX6" fmla="*/ 901641 w 1300454"/>
+              <a:gd name="csY6" fmla="*/ 351711 h 1501200"/>
+              <a:gd name="csX7" fmla="*/ 851751 w 1300454"/>
+              <a:gd name="csY7" fmla="*/ 301821 h 1501200"/>
+              <a:gd name="csX8" fmla="*/ 448803 w 1300454"/>
+              <a:gd name="csY8" fmla="*/ 0 h 1501200"/>
+              <a:gd name="csX9" fmla="*/ 1151305 w 1300454"/>
+              <a:gd name="csY9" fmla="*/ 0 h 1501200"/>
+              <a:gd name="csX10" fmla="*/ 1300454 w 1300454"/>
+              <a:gd name="csY10" fmla="*/ 149149 h 1501200"/>
+              <a:gd name="csX11" fmla="*/ 1300454 w 1300454"/>
+              <a:gd name="csY11" fmla="*/ 1150451 h 1501200"/>
+              <a:gd name="csX12" fmla="*/ 1151305 w 1300454"/>
+              <a:gd name="csY12" fmla="*/ 1299600 h 1501200"/>
+              <a:gd name="csX13" fmla="*/ 1000800 w 1300454"/>
+              <a:gd name="csY13" fmla="*/ 1299600 h 1501200"/>
+              <a:gd name="csX14" fmla="*/ 1000800 w 1300454"/>
+              <a:gd name="csY14" fmla="*/ 1352051 h 1501200"/>
+              <a:gd name="csX15" fmla="*/ 851651 w 1300454"/>
+              <a:gd name="csY15" fmla="*/ 1501200 h 1501200"/>
+              <a:gd name="csX16" fmla="*/ 149149 w 1300454"/>
+              <a:gd name="csY16" fmla="*/ 1501200 h 1501200"/>
+              <a:gd name="csX17" fmla="*/ 0 w 1300454"/>
+              <a:gd name="csY17" fmla="*/ 1352051 h 1501200"/>
+              <a:gd name="csX18" fmla="*/ 0 w 1300454"/>
+              <a:gd name="csY18" fmla="*/ 350749 h 1501200"/>
+              <a:gd name="csX19" fmla="*/ 149149 w 1300454"/>
+              <a:gd name="csY19" fmla="*/ 201600 h 1501200"/>
+              <a:gd name="csX20" fmla="*/ 299654 w 1300454"/>
+              <a:gd name="csY20" fmla="*/ 201600 h 1501200"/>
+              <a:gd name="csX21" fmla="*/ 299654 w 1300454"/>
+              <a:gd name="csY21" fmla="*/ 149149 h 1501200"/>
+              <a:gd name="csX22" fmla="*/ 448803 w 1300454"/>
+              <a:gd name="csY22" fmla="*/ 0 h 1501200"/>
+            </a:gdLst>
+            <a:ahLst/>
+            <a:cxnLst>
+              <a:cxn ang="0">
+                <a:pos x="csX0" y="csY0"/>
+              </a:cxn>
+              <a:cxn ang="0">
+                <a:pos x="csX1" y="csY1"/>
+              </a:cxn>
+              <a:cxn ang="0">
+                <a:pos x="csX2" y="csY2"/>
+              </a:cxn>
+              <a:cxn ang="0">
+                <a:pos x="csX3" y="csY3"/>
+              </a:cxn>
+              <a:cxn ang="0">
+                <a:pos x="csX4" y="csY4"/>
+              </a:cxn>
+              <a:cxn ang="0">
+                <a:pos x="csX5" y="csY5"/>
+              </a:cxn>
+              <a:cxn ang="0">
+                <a:pos x="csX6" y="csY6"/>
+              </a:cxn>
+              <a:cxn ang="0">
+                <a:pos x="csX7" y="csY7"/>
+              </a:cxn>
+              <a:cxn ang="0">
+                <a:pos x="csX8" y="csY8"/>
+              </a:cxn>
+              <a:cxn ang="0">
+                <a:pos x="csX9" y="csY9"/>
+              </a:cxn>
+              <a:cxn ang="0">
+                <a:pos x="csX10" y="csY10"/>
+              </a:cxn>
+              <a:cxn ang="0">
+                <a:pos x="csX11" y="csY11"/>
+              </a:cxn>
+              <a:cxn ang="0">
+                <a:pos x="csX12" y="csY12"/>
+              </a:cxn>
+              <a:cxn ang="0">
+                <a:pos x="csX13" y="csY13"/>
+              </a:cxn>
+              <a:cxn ang="0">
+                <a:pos x="csX14" y="csY14"/>
+              </a:cxn>
+              <a:cxn ang="0">
+                <a:pos x="csX15" y="csY15"/>
+              </a:cxn>
+              <a:cxn ang="0">
+                <a:pos x="csX16" y="csY16"/>
+              </a:cxn>
+              <a:cxn ang="0">
+                <a:pos x="csX17" y="csY17"/>
+              </a:cxn>
+              <a:cxn ang="0">
+                <a:pos x="csX18" y="csY18"/>
+              </a:cxn>
+              <a:cxn ang="0">
+                <a:pos x="csX19" y="csY19"/>
+              </a:cxn>
+              <a:cxn ang="0">
+                <a:pos x="csX20" y="csY20"/>
+              </a:cxn>
+              <a:cxn ang="0">
+                <a:pos x="csX21" y="csY21"/>
+              </a:cxn>
+              <a:cxn ang="0">
+                <a:pos x="csX22" y="csY22"/>
+              </a:cxn>
+            </a:cxnLst>
+            <a:rect l="l" t="t" r="r" b="b"/>
+            <a:pathLst>
+              <a:path w="1300454" h="1501200">
+                <a:moveTo>
+                  <a:pt x="149050" y="301821"/>
+                </a:moveTo>
+                <a:cubicBezTo>
+                  <a:pt x="121497" y="301821"/>
+                  <a:pt x="99160" y="324158"/>
+                  <a:pt x="99160" y="351711"/>
+                </a:cubicBezTo>
+                <a:lnTo>
+                  <a:pt x="99160" y="1351307"/>
+                </a:lnTo>
+                <a:cubicBezTo>
+                  <a:pt x="99160" y="1378860"/>
+                  <a:pt x="121497" y="1401197"/>
+                  <a:pt x="149050" y="1401197"/>
+                </a:cubicBezTo>
+                <a:lnTo>
+                  <a:pt x="851751" y="1401197"/>
+                </a:lnTo>
+                <a:cubicBezTo>
+                  <a:pt x="879304" y="1401197"/>
+                  <a:pt x="901641" y="1378860"/>
+                  <a:pt x="901641" y="1351307"/>
+                </a:cubicBezTo>
+                <a:lnTo>
+                  <a:pt x="901641" y="351711"/>
+                </a:lnTo>
+                <a:cubicBezTo>
+                  <a:pt x="901641" y="324158"/>
+                  <a:pt x="879304" y="301821"/>
+                  <a:pt x="851751" y="301821"/>
+                </a:cubicBezTo>
+                <a:close/>
+                <a:moveTo>
+                  <a:pt x="448803" y="0"/>
+                </a:moveTo>
+                <a:lnTo>
+                  <a:pt x="1151305" y="0"/>
+                </a:lnTo>
+                <a:cubicBezTo>
+                  <a:pt x="1233678" y="0"/>
+                  <a:pt x="1300454" y="66776"/>
+                  <a:pt x="1300454" y="149149"/>
+                </a:cubicBezTo>
+                <a:lnTo>
+                  <a:pt x="1300454" y="1150451"/>
+                </a:lnTo>
+                <a:cubicBezTo>
+                  <a:pt x="1300454" y="1232824"/>
+                  <a:pt x="1233678" y="1299600"/>
+                  <a:pt x="1151305" y="1299600"/>
+                </a:cubicBezTo>
+                <a:lnTo>
+                  <a:pt x="1000800" y="1299600"/>
+                </a:lnTo>
+                <a:lnTo>
+                  <a:pt x="1000800" y="1352051"/>
+                </a:lnTo>
+                <a:cubicBezTo>
+                  <a:pt x="1000800" y="1434424"/>
+                  <a:pt x="934024" y="1501200"/>
+                  <a:pt x="851651" y="1501200"/>
+                </a:cubicBezTo>
+                <a:lnTo>
+                  <a:pt x="149149" y="1501200"/>
+                </a:lnTo>
+                <a:cubicBezTo>
+                  <a:pt x="66776" y="1501200"/>
+                  <a:pt x="0" y="1434424"/>
+                  <a:pt x="0" y="1352051"/>
+                </a:cubicBezTo>
+                <a:lnTo>
+                  <a:pt x="0" y="350749"/>
+                </a:lnTo>
+                <a:cubicBezTo>
+                  <a:pt x="0" y="268376"/>
+                  <a:pt x="66776" y="201600"/>
+                  <a:pt x="149149" y="201600"/>
+                </a:cubicBezTo>
+                <a:lnTo>
+                  <a:pt x="299654" y="201600"/>
+                </a:lnTo>
+                <a:lnTo>
+                  <a:pt x="299654" y="149149"/>
+                </a:lnTo>
+                <a:cubicBezTo>
+                  <a:pt x="299654" y="66776"/>
+                  <a:pt x="366430" y="0"/>
+                  <a:pt x="448803" y="0"/>
+                </a:cubicBezTo>
+                <a:close/>
+              </a:path>
+            </a:pathLst>
+          </a:custGeom>
           <a:solidFill>
             <a:schemeClr val="tx1"/>
           </a:solidFill>
@@ -22161,7 +24228,9 @@
           </a:fontRef>
         </p:style>
         <p:txBody>
-          <a:bodyPr rtlCol="0" anchor="ctr"/>
+          <a:bodyPr wrap="square" rtlCol="0" anchor="ctr">
+            <a:noAutofit/>
+          </a:bodyPr>
           <a:lstStyle/>
           <a:p>
             <a:pPr algn="ctr"/>
@@ -22171,10 +24240,10 @@
       </p:sp>
       <p:sp>
         <p:nvSpPr>
-          <p:cNvPr id="64" name="Oval 63">
+          <p:cNvPr id="74" name="Freeform: Shape 73">
             <a:extLst>
               <a:ext uri="{FF2B5EF4-FFF2-40B4-BE49-F238E27FC236}">
-                <a16:creationId xmlns:a16="http://schemas.microsoft.com/office/drawing/2014/main" id="{F67BDBD3-3376-BE31-A6D5-09E7F2403D49}"/>
+                <a16:creationId xmlns:a16="http://schemas.microsoft.com/office/drawing/2014/main" id="{1798C64C-8589-A567-634C-696B5D2BFFF7}"/>
               </a:ext>
             </a:extLst>
           </p:cNvPr>
@@ -22183,12 +24252,767 @@
         </p:nvSpPr>
         <p:spPr>
           <a:xfrm>
-            <a:off x="4630620" y="968525"/>
-            <a:ext cx="151200" cy="151200"/>
+            <a:off x="9134762" y="2292972"/>
+            <a:ext cx="1300454" cy="1501200"/>
           </a:xfrm>
-          <a:prstGeom prst="ellipse">
+          <a:custGeom>
             <a:avLst/>
-          </a:prstGeom>
+            <a:gdLst>
+              <a:gd name="csX0" fmla="*/ 448803 w 1300454"/>
+              <a:gd name="csY0" fmla="*/ 0 h 1501200"/>
+              <a:gd name="csX1" fmla="*/ 1151305 w 1300454"/>
+              <a:gd name="csY1" fmla="*/ 0 h 1501200"/>
+              <a:gd name="csX2" fmla="*/ 1300454 w 1300454"/>
+              <a:gd name="csY2" fmla="*/ 149149 h 1501200"/>
+              <a:gd name="csX3" fmla="*/ 1300454 w 1300454"/>
+              <a:gd name="csY3" fmla="*/ 1150451 h 1501200"/>
+              <a:gd name="csX4" fmla="*/ 1151305 w 1300454"/>
+              <a:gd name="csY4" fmla="*/ 1299600 h 1501200"/>
+              <a:gd name="csX5" fmla="*/ 1000800 w 1300454"/>
+              <a:gd name="csY5" fmla="*/ 1299600 h 1501200"/>
+              <a:gd name="csX6" fmla="*/ 1000800 w 1300454"/>
+              <a:gd name="csY6" fmla="*/ 1352051 h 1501200"/>
+              <a:gd name="csX7" fmla="*/ 851651 w 1300454"/>
+              <a:gd name="csY7" fmla="*/ 1501200 h 1501200"/>
+              <a:gd name="csX8" fmla="*/ 149149 w 1300454"/>
+              <a:gd name="csY8" fmla="*/ 1501200 h 1501200"/>
+              <a:gd name="csX9" fmla="*/ 0 w 1300454"/>
+              <a:gd name="csY9" fmla="*/ 1352051 h 1501200"/>
+              <a:gd name="csX10" fmla="*/ 0 w 1300454"/>
+              <a:gd name="csY10" fmla="*/ 350749 h 1501200"/>
+              <a:gd name="csX11" fmla="*/ 149149 w 1300454"/>
+              <a:gd name="csY11" fmla="*/ 201600 h 1501200"/>
+              <a:gd name="csX12" fmla="*/ 299654 w 1300454"/>
+              <a:gd name="csY12" fmla="*/ 201600 h 1501200"/>
+              <a:gd name="csX13" fmla="*/ 299654 w 1300454"/>
+              <a:gd name="csY13" fmla="*/ 149149 h 1501200"/>
+              <a:gd name="csX14" fmla="*/ 448803 w 1300454"/>
+              <a:gd name="csY14" fmla="*/ 0 h 1501200"/>
+            </a:gdLst>
+            <a:ahLst/>
+            <a:cxnLst>
+              <a:cxn ang="0">
+                <a:pos x="csX0" y="csY0"/>
+              </a:cxn>
+              <a:cxn ang="0">
+                <a:pos x="csX1" y="csY1"/>
+              </a:cxn>
+              <a:cxn ang="0">
+                <a:pos x="csX2" y="csY2"/>
+              </a:cxn>
+              <a:cxn ang="0">
+                <a:pos x="csX3" y="csY3"/>
+              </a:cxn>
+              <a:cxn ang="0">
+                <a:pos x="csX4" y="csY4"/>
+              </a:cxn>
+              <a:cxn ang="0">
+                <a:pos x="csX5" y="csY5"/>
+              </a:cxn>
+              <a:cxn ang="0">
+                <a:pos x="csX6" y="csY6"/>
+              </a:cxn>
+              <a:cxn ang="0">
+                <a:pos x="csX7" y="csY7"/>
+              </a:cxn>
+              <a:cxn ang="0">
+                <a:pos x="csX8" y="csY8"/>
+              </a:cxn>
+              <a:cxn ang="0">
+                <a:pos x="csX9" y="csY9"/>
+              </a:cxn>
+              <a:cxn ang="0">
+                <a:pos x="csX10" y="csY10"/>
+              </a:cxn>
+              <a:cxn ang="0">
+                <a:pos x="csX11" y="csY11"/>
+              </a:cxn>
+              <a:cxn ang="0">
+                <a:pos x="csX12" y="csY12"/>
+              </a:cxn>
+              <a:cxn ang="0">
+                <a:pos x="csX13" y="csY13"/>
+              </a:cxn>
+              <a:cxn ang="0">
+                <a:pos x="csX14" y="csY14"/>
+              </a:cxn>
+            </a:cxnLst>
+            <a:rect l="l" t="t" r="r" b="b"/>
+            <a:pathLst>
+              <a:path w="1300454" h="1501200">
+                <a:moveTo>
+                  <a:pt x="448803" y="0"/>
+                </a:moveTo>
+                <a:lnTo>
+                  <a:pt x="1151305" y="0"/>
+                </a:lnTo>
+                <a:cubicBezTo>
+                  <a:pt x="1233678" y="0"/>
+                  <a:pt x="1300454" y="66776"/>
+                  <a:pt x="1300454" y="149149"/>
+                </a:cubicBezTo>
+                <a:lnTo>
+                  <a:pt x="1300454" y="1150451"/>
+                </a:lnTo>
+                <a:cubicBezTo>
+                  <a:pt x="1300454" y="1232824"/>
+                  <a:pt x="1233678" y="1299600"/>
+                  <a:pt x="1151305" y="1299600"/>
+                </a:cubicBezTo>
+                <a:lnTo>
+                  <a:pt x="1000800" y="1299600"/>
+                </a:lnTo>
+                <a:lnTo>
+                  <a:pt x="1000800" y="1352051"/>
+                </a:lnTo>
+                <a:cubicBezTo>
+                  <a:pt x="1000800" y="1434424"/>
+                  <a:pt x="934024" y="1501200"/>
+                  <a:pt x="851651" y="1501200"/>
+                </a:cubicBezTo>
+                <a:lnTo>
+                  <a:pt x="149149" y="1501200"/>
+                </a:lnTo>
+                <a:cubicBezTo>
+                  <a:pt x="66776" y="1501200"/>
+                  <a:pt x="0" y="1434424"/>
+                  <a:pt x="0" y="1352051"/>
+                </a:cubicBezTo>
+                <a:lnTo>
+                  <a:pt x="0" y="350749"/>
+                </a:lnTo>
+                <a:cubicBezTo>
+                  <a:pt x="0" y="268376"/>
+                  <a:pt x="66776" y="201600"/>
+                  <a:pt x="149149" y="201600"/>
+                </a:cubicBezTo>
+                <a:lnTo>
+                  <a:pt x="299654" y="201600"/>
+                </a:lnTo>
+                <a:lnTo>
+                  <a:pt x="299654" y="149149"/>
+                </a:lnTo>
+                <a:cubicBezTo>
+                  <a:pt x="299654" y="66776"/>
+                  <a:pt x="366430" y="0"/>
+                  <a:pt x="448803" y="0"/>
+                </a:cubicBezTo>
+                <a:close/>
+              </a:path>
+            </a:pathLst>
+          </a:custGeom>
+          <a:ln>
+            <a:noFill/>
+          </a:ln>
+        </p:spPr>
+        <p:style>
+          <a:lnRef idx="2">
+            <a:schemeClr val="accent1">
+              <a:shade val="15000"/>
+            </a:schemeClr>
+          </a:lnRef>
+          <a:fillRef idx="1">
+            <a:schemeClr val="accent1"/>
+          </a:fillRef>
+          <a:effectRef idx="0">
+            <a:schemeClr val="accent1"/>
+          </a:effectRef>
+          <a:fontRef idx="minor">
+            <a:schemeClr val="lt1"/>
+          </a:fontRef>
+        </p:style>
+        <p:txBody>
+          <a:bodyPr wrap="square" rtlCol="0" anchor="ctr">
+            <a:noAutofit/>
+          </a:bodyPr>
+          <a:lstStyle/>
+          <a:p>
+            <a:pPr algn="ctr"/>
+            <a:endParaRPr lang="en-US"/>
+          </a:p>
+        </p:txBody>
+      </p:sp>
+      <p:sp>
+        <p:nvSpPr>
+          <p:cNvPr id="93" name="Freeform: Shape 92">
+            <a:extLst>
+              <a:ext uri="{FF2B5EF4-FFF2-40B4-BE49-F238E27FC236}">
+                <a16:creationId xmlns:a16="http://schemas.microsoft.com/office/drawing/2014/main" id="{93AEC0D9-5828-2FB8-20C5-2FD660C59D61}"/>
+              </a:ext>
+            </a:extLst>
+          </p:cNvPr>
+          <p:cNvSpPr/>
+          <p:nvPr/>
+        </p:nvSpPr>
+        <p:spPr>
+          <a:xfrm>
+            <a:off x="11119882" y="2292972"/>
+            <a:ext cx="994366" cy="1299600"/>
+          </a:xfrm>
+          <a:custGeom>
+            <a:avLst/>
+            <a:gdLst>
+              <a:gd name="csX0" fmla="*/ 142715 w 994366"/>
+              <a:gd name="csY0" fmla="*/ 0 h 1299600"/>
+              <a:gd name="csX1" fmla="*/ 845217 w 994366"/>
+              <a:gd name="csY1" fmla="*/ 0 h 1299600"/>
+              <a:gd name="csX2" fmla="*/ 994366 w 994366"/>
+              <a:gd name="csY2" fmla="*/ 149149 h 1299600"/>
+              <a:gd name="csX3" fmla="*/ 994366 w 994366"/>
+              <a:gd name="csY3" fmla="*/ 1150451 h 1299600"/>
+              <a:gd name="csX4" fmla="*/ 845217 w 994366"/>
+              <a:gd name="csY4" fmla="*/ 1299600 h 1299600"/>
+              <a:gd name="csX5" fmla="*/ 794960 w 994366"/>
+              <a:gd name="csY5" fmla="*/ 1299600 h 1299600"/>
+              <a:gd name="csX6" fmla="*/ 794960 w 994366"/>
+              <a:gd name="csY6" fmla="*/ 358731 h 1299600"/>
+              <a:gd name="csX7" fmla="*/ 553509 w 994366"/>
+              <a:gd name="csY7" fmla="*/ 117280 h 1299600"/>
+              <a:gd name="csX8" fmla="*/ 0 w 994366"/>
+              <a:gd name="csY8" fmla="*/ 117280 h 1299600"/>
+              <a:gd name="csX9" fmla="*/ 5287 w 994366"/>
+              <a:gd name="csY9" fmla="*/ 91094 h 1299600"/>
+              <a:gd name="csX10" fmla="*/ 142715 w 994366"/>
+              <a:gd name="csY10" fmla="*/ 0 h 1299600"/>
+            </a:gdLst>
+            <a:ahLst/>
+            <a:cxnLst>
+              <a:cxn ang="0">
+                <a:pos x="csX0" y="csY0"/>
+              </a:cxn>
+              <a:cxn ang="0">
+                <a:pos x="csX1" y="csY1"/>
+              </a:cxn>
+              <a:cxn ang="0">
+                <a:pos x="csX2" y="csY2"/>
+              </a:cxn>
+              <a:cxn ang="0">
+                <a:pos x="csX3" y="csY3"/>
+              </a:cxn>
+              <a:cxn ang="0">
+                <a:pos x="csX4" y="csY4"/>
+              </a:cxn>
+              <a:cxn ang="0">
+                <a:pos x="csX5" y="csY5"/>
+              </a:cxn>
+              <a:cxn ang="0">
+                <a:pos x="csX6" y="csY6"/>
+              </a:cxn>
+              <a:cxn ang="0">
+                <a:pos x="csX7" y="csY7"/>
+              </a:cxn>
+              <a:cxn ang="0">
+                <a:pos x="csX8" y="csY8"/>
+              </a:cxn>
+              <a:cxn ang="0">
+                <a:pos x="csX9" y="csY9"/>
+              </a:cxn>
+              <a:cxn ang="0">
+                <a:pos x="csX10" y="csY10"/>
+              </a:cxn>
+            </a:cxnLst>
+            <a:rect l="l" t="t" r="r" b="b"/>
+            <a:pathLst>
+              <a:path w="994366" h="1299600">
+                <a:moveTo>
+                  <a:pt x="142715" y="0"/>
+                </a:moveTo>
+                <a:lnTo>
+                  <a:pt x="845217" y="0"/>
+                </a:lnTo>
+                <a:cubicBezTo>
+                  <a:pt x="927590" y="0"/>
+                  <a:pt x="994366" y="66776"/>
+                  <a:pt x="994366" y="149149"/>
+                </a:cubicBezTo>
+                <a:lnTo>
+                  <a:pt x="994366" y="1150451"/>
+                </a:lnTo>
+                <a:cubicBezTo>
+                  <a:pt x="994366" y="1232824"/>
+                  <a:pt x="927590" y="1299600"/>
+                  <a:pt x="845217" y="1299600"/>
+                </a:cubicBezTo>
+                <a:lnTo>
+                  <a:pt x="794960" y="1299600"/>
+                </a:lnTo>
+                <a:lnTo>
+                  <a:pt x="794960" y="358731"/>
+                </a:lnTo>
+                <a:cubicBezTo>
+                  <a:pt x="794960" y="225381"/>
+                  <a:pt x="686859" y="117280"/>
+                  <a:pt x="553509" y="117280"/>
+                </a:cubicBezTo>
+                <a:lnTo>
+                  <a:pt x="0" y="117280"/>
+                </a:lnTo>
+                <a:lnTo>
+                  <a:pt x="5287" y="91094"/>
+                </a:lnTo>
+                <a:cubicBezTo>
+                  <a:pt x="27929" y="37562"/>
+                  <a:pt x="80936" y="0"/>
+                  <a:pt x="142715" y="0"/>
+                </a:cubicBezTo>
+                <a:close/>
+              </a:path>
+            </a:pathLst>
+          </a:custGeom>
+          <a:ln>
+            <a:noFill/>
+          </a:ln>
+        </p:spPr>
+        <p:style>
+          <a:lnRef idx="2">
+            <a:schemeClr val="accent1">
+              <a:shade val="15000"/>
+            </a:schemeClr>
+          </a:lnRef>
+          <a:fillRef idx="1">
+            <a:schemeClr val="accent1"/>
+          </a:fillRef>
+          <a:effectRef idx="0">
+            <a:schemeClr val="accent1"/>
+          </a:effectRef>
+          <a:fontRef idx="minor">
+            <a:schemeClr val="lt1"/>
+          </a:fontRef>
+        </p:style>
+        <p:txBody>
+          <a:bodyPr wrap="square" rtlCol="0" anchor="ctr">
+            <a:noAutofit/>
+          </a:bodyPr>
+          <a:lstStyle/>
+          <a:p>
+            <a:pPr algn="ctr"/>
+            <a:endParaRPr lang="en-US"/>
+          </a:p>
+        </p:txBody>
+      </p:sp>
+      <p:sp>
+        <p:nvSpPr>
+          <p:cNvPr id="99" name="Freeform: Shape 98">
+            <a:extLst>
+              <a:ext uri="{FF2B5EF4-FFF2-40B4-BE49-F238E27FC236}">
+                <a16:creationId xmlns:a16="http://schemas.microsoft.com/office/drawing/2014/main" id="{3C5C0DA1-8418-655B-6EC4-DEA43D3E1E22}"/>
+              </a:ext>
+            </a:extLst>
+          </p:cNvPr>
+          <p:cNvSpPr/>
+          <p:nvPr/>
+        </p:nvSpPr>
+        <p:spPr>
+          <a:xfrm>
+            <a:off x="10813794" y="2494572"/>
+            <a:ext cx="1000800" cy="1299600"/>
+          </a:xfrm>
+          <a:custGeom>
+            <a:avLst/>
+            <a:gdLst>
+              <a:gd name="csX0" fmla="*/ 149050 w 1000800"/>
+              <a:gd name="csY0" fmla="*/ 100221 h 1299600"/>
+              <a:gd name="csX1" fmla="*/ 99160 w 1000800"/>
+              <a:gd name="csY1" fmla="*/ 150111 h 1299600"/>
+              <a:gd name="csX2" fmla="*/ 99160 w 1000800"/>
+              <a:gd name="csY2" fmla="*/ 1149707 h 1299600"/>
+              <a:gd name="csX3" fmla="*/ 149050 w 1000800"/>
+              <a:gd name="csY3" fmla="*/ 1199597 h 1299600"/>
+              <a:gd name="csX4" fmla="*/ 851751 w 1000800"/>
+              <a:gd name="csY4" fmla="*/ 1199597 h 1299600"/>
+              <a:gd name="csX5" fmla="*/ 901641 w 1000800"/>
+              <a:gd name="csY5" fmla="*/ 1149707 h 1299600"/>
+              <a:gd name="csX6" fmla="*/ 901641 w 1000800"/>
+              <a:gd name="csY6" fmla="*/ 150111 h 1299600"/>
+              <a:gd name="csX7" fmla="*/ 851751 w 1000800"/>
+              <a:gd name="csY7" fmla="*/ 100221 h 1299600"/>
+              <a:gd name="csX8" fmla="*/ 149149 w 1000800"/>
+              <a:gd name="csY8" fmla="*/ 0 h 1299600"/>
+              <a:gd name="csX9" fmla="*/ 851651 w 1000800"/>
+              <a:gd name="csY9" fmla="*/ 0 h 1299600"/>
+              <a:gd name="csX10" fmla="*/ 1000800 w 1000800"/>
+              <a:gd name="csY10" fmla="*/ 149149 h 1299600"/>
+              <a:gd name="csX11" fmla="*/ 1000800 w 1000800"/>
+              <a:gd name="csY11" fmla="*/ 1150451 h 1299600"/>
+              <a:gd name="csX12" fmla="*/ 851651 w 1000800"/>
+              <a:gd name="csY12" fmla="*/ 1299600 h 1299600"/>
+              <a:gd name="csX13" fmla="*/ 149149 w 1000800"/>
+              <a:gd name="csY13" fmla="*/ 1299600 h 1299600"/>
+              <a:gd name="csX14" fmla="*/ 0 w 1000800"/>
+              <a:gd name="csY14" fmla="*/ 1150451 h 1299600"/>
+              <a:gd name="csX15" fmla="*/ 0 w 1000800"/>
+              <a:gd name="csY15" fmla="*/ 149149 h 1299600"/>
+              <a:gd name="csX16" fmla="*/ 149149 w 1000800"/>
+              <a:gd name="csY16" fmla="*/ 0 h 1299600"/>
+            </a:gdLst>
+            <a:ahLst/>
+            <a:cxnLst>
+              <a:cxn ang="0">
+                <a:pos x="csX0" y="csY0"/>
+              </a:cxn>
+              <a:cxn ang="0">
+                <a:pos x="csX1" y="csY1"/>
+              </a:cxn>
+              <a:cxn ang="0">
+                <a:pos x="csX2" y="csY2"/>
+              </a:cxn>
+              <a:cxn ang="0">
+                <a:pos x="csX3" y="csY3"/>
+              </a:cxn>
+              <a:cxn ang="0">
+                <a:pos x="csX4" y="csY4"/>
+              </a:cxn>
+              <a:cxn ang="0">
+                <a:pos x="csX5" y="csY5"/>
+              </a:cxn>
+              <a:cxn ang="0">
+                <a:pos x="csX6" y="csY6"/>
+              </a:cxn>
+              <a:cxn ang="0">
+                <a:pos x="csX7" y="csY7"/>
+              </a:cxn>
+              <a:cxn ang="0">
+                <a:pos x="csX8" y="csY8"/>
+              </a:cxn>
+              <a:cxn ang="0">
+                <a:pos x="csX9" y="csY9"/>
+              </a:cxn>
+              <a:cxn ang="0">
+                <a:pos x="csX10" y="csY10"/>
+              </a:cxn>
+              <a:cxn ang="0">
+                <a:pos x="csX11" y="csY11"/>
+              </a:cxn>
+              <a:cxn ang="0">
+                <a:pos x="csX12" y="csY12"/>
+              </a:cxn>
+              <a:cxn ang="0">
+                <a:pos x="csX13" y="csY13"/>
+              </a:cxn>
+              <a:cxn ang="0">
+                <a:pos x="csX14" y="csY14"/>
+              </a:cxn>
+              <a:cxn ang="0">
+                <a:pos x="csX15" y="csY15"/>
+              </a:cxn>
+              <a:cxn ang="0">
+                <a:pos x="csX16" y="csY16"/>
+              </a:cxn>
+            </a:cxnLst>
+            <a:rect l="l" t="t" r="r" b="b"/>
+            <a:pathLst>
+              <a:path w="1000800" h="1299600">
+                <a:moveTo>
+                  <a:pt x="149050" y="100221"/>
+                </a:moveTo>
+                <a:cubicBezTo>
+                  <a:pt x="121497" y="100221"/>
+                  <a:pt x="99160" y="122558"/>
+                  <a:pt x="99160" y="150111"/>
+                </a:cubicBezTo>
+                <a:lnTo>
+                  <a:pt x="99160" y="1149707"/>
+                </a:lnTo>
+                <a:cubicBezTo>
+                  <a:pt x="99160" y="1177260"/>
+                  <a:pt x="121497" y="1199597"/>
+                  <a:pt x="149050" y="1199597"/>
+                </a:cubicBezTo>
+                <a:lnTo>
+                  <a:pt x="851751" y="1199597"/>
+                </a:lnTo>
+                <a:cubicBezTo>
+                  <a:pt x="879304" y="1199597"/>
+                  <a:pt x="901641" y="1177260"/>
+                  <a:pt x="901641" y="1149707"/>
+                </a:cubicBezTo>
+                <a:lnTo>
+                  <a:pt x="901641" y="150111"/>
+                </a:lnTo>
+                <a:cubicBezTo>
+                  <a:pt x="901641" y="122558"/>
+                  <a:pt x="879304" y="100221"/>
+                  <a:pt x="851751" y="100221"/>
+                </a:cubicBezTo>
+                <a:close/>
+                <a:moveTo>
+                  <a:pt x="149149" y="0"/>
+                </a:moveTo>
+                <a:lnTo>
+                  <a:pt x="851651" y="0"/>
+                </a:lnTo>
+                <a:cubicBezTo>
+                  <a:pt x="934024" y="0"/>
+                  <a:pt x="1000800" y="66776"/>
+                  <a:pt x="1000800" y="149149"/>
+                </a:cubicBezTo>
+                <a:lnTo>
+                  <a:pt x="1000800" y="1150451"/>
+                </a:lnTo>
+                <a:cubicBezTo>
+                  <a:pt x="1000800" y="1232824"/>
+                  <a:pt x="934024" y="1299600"/>
+                  <a:pt x="851651" y="1299600"/>
+                </a:cubicBezTo>
+                <a:lnTo>
+                  <a:pt x="149149" y="1299600"/>
+                </a:lnTo>
+                <a:cubicBezTo>
+                  <a:pt x="66776" y="1299600"/>
+                  <a:pt x="0" y="1232824"/>
+                  <a:pt x="0" y="1150451"/>
+                </a:cubicBezTo>
+                <a:lnTo>
+                  <a:pt x="0" y="149149"/>
+                </a:lnTo>
+                <a:cubicBezTo>
+                  <a:pt x="0" y="66776"/>
+                  <a:pt x="66776" y="0"/>
+                  <a:pt x="149149" y="0"/>
+                </a:cubicBezTo>
+                <a:close/>
+              </a:path>
+            </a:pathLst>
+          </a:custGeom>
+          <a:ln>
+            <a:noFill/>
+          </a:ln>
+        </p:spPr>
+        <p:style>
+          <a:lnRef idx="2">
+            <a:schemeClr val="accent1">
+              <a:shade val="15000"/>
+            </a:schemeClr>
+          </a:lnRef>
+          <a:fillRef idx="1">
+            <a:schemeClr val="accent1"/>
+          </a:fillRef>
+          <a:effectRef idx="0">
+            <a:schemeClr val="accent1"/>
+          </a:effectRef>
+          <a:fontRef idx="minor">
+            <a:schemeClr val="lt1"/>
+          </a:fontRef>
+        </p:style>
+        <p:txBody>
+          <a:bodyPr wrap="square" rtlCol="0" anchor="ctr">
+            <a:noAutofit/>
+          </a:bodyPr>
+          <a:lstStyle/>
+          <a:p>
+            <a:pPr algn="ctr"/>
+            <a:endParaRPr lang="en-US"/>
+          </a:p>
+        </p:txBody>
+      </p:sp>
+      <p:sp>
+        <p:nvSpPr>
+          <p:cNvPr id="138" name="Freeform: Shape 137">
+            <a:extLst>
+              <a:ext uri="{FF2B5EF4-FFF2-40B4-BE49-F238E27FC236}">
+                <a16:creationId xmlns:a16="http://schemas.microsoft.com/office/drawing/2014/main" id="{D9EDB3E0-DAA4-AACD-500F-93FD93EADD62}"/>
+              </a:ext>
+            </a:extLst>
+          </p:cNvPr>
+          <p:cNvSpPr/>
+          <p:nvPr/>
+        </p:nvSpPr>
+        <p:spPr>
+          <a:xfrm>
+            <a:off x="3023240" y="2292972"/>
+            <a:ext cx="1300454" cy="1501200"/>
+          </a:xfrm>
+          <a:custGeom>
+            <a:avLst/>
+            <a:gdLst>
+              <a:gd name="csX0" fmla="*/ 149149 w 1300454"/>
+              <a:gd name="csY0" fmla="*/ 201600 h 1501200"/>
+              <a:gd name="csX1" fmla="*/ 851651 w 1300454"/>
+              <a:gd name="csY1" fmla="*/ 201600 h 1501200"/>
+              <a:gd name="csX2" fmla="*/ 1000800 w 1300454"/>
+              <a:gd name="csY2" fmla="*/ 350749 h 1501200"/>
+              <a:gd name="csX3" fmla="*/ 1000800 w 1300454"/>
+              <a:gd name="csY3" fmla="*/ 1352051 h 1501200"/>
+              <a:gd name="csX4" fmla="*/ 851651 w 1300454"/>
+              <a:gd name="csY4" fmla="*/ 1501200 h 1501200"/>
+              <a:gd name="csX5" fmla="*/ 149149 w 1300454"/>
+              <a:gd name="csY5" fmla="*/ 1501200 h 1501200"/>
+              <a:gd name="csX6" fmla="*/ 0 w 1300454"/>
+              <a:gd name="csY6" fmla="*/ 1352051 h 1501200"/>
+              <a:gd name="csX7" fmla="*/ 0 w 1300454"/>
+              <a:gd name="csY7" fmla="*/ 350749 h 1501200"/>
+              <a:gd name="csX8" fmla="*/ 149149 w 1300454"/>
+              <a:gd name="csY8" fmla="*/ 201600 h 1501200"/>
+              <a:gd name="csX9" fmla="*/ 448803 w 1300454"/>
+              <a:gd name="csY9" fmla="*/ 0 h 1501200"/>
+              <a:gd name="csX10" fmla="*/ 1151305 w 1300454"/>
+              <a:gd name="csY10" fmla="*/ 0 h 1501200"/>
+              <a:gd name="csX11" fmla="*/ 1300454 w 1300454"/>
+              <a:gd name="csY11" fmla="*/ 149149 h 1501200"/>
+              <a:gd name="csX12" fmla="*/ 1300454 w 1300454"/>
+              <a:gd name="csY12" fmla="*/ 1150451 h 1501200"/>
+              <a:gd name="csX13" fmla="*/ 1151305 w 1300454"/>
+              <a:gd name="csY13" fmla="*/ 1299600 h 1501200"/>
+              <a:gd name="csX14" fmla="*/ 1101048 w 1300454"/>
+              <a:gd name="csY14" fmla="*/ 1299600 h 1501200"/>
+              <a:gd name="csX15" fmla="*/ 1101048 w 1300454"/>
+              <a:gd name="csY15" fmla="*/ 358731 h 1501200"/>
+              <a:gd name="csX16" fmla="*/ 859597 w 1300454"/>
+              <a:gd name="csY16" fmla="*/ 117280 h 1501200"/>
+              <a:gd name="csX17" fmla="*/ 306088 w 1300454"/>
+              <a:gd name="csY17" fmla="*/ 117280 h 1501200"/>
+              <a:gd name="csX18" fmla="*/ 311375 w 1300454"/>
+              <a:gd name="csY18" fmla="*/ 91094 h 1501200"/>
+              <a:gd name="csX19" fmla="*/ 448803 w 1300454"/>
+              <a:gd name="csY19" fmla="*/ 0 h 1501200"/>
+            </a:gdLst>
+            <a:ahLst/>
+            <a:cxnLst>
+              <a:cxn ang="0">
+                <a:pos x="csX0" y="csY0"/>
+              </a:cxn>
+              <a:cxn ang="0">
+                <a:pos x="csX1" y="csY1"/>
+              </a:cxn>
+              <a:cxn ang="0">
+                <a:pos x="csX2" y="csY2"/>
+              </a:cxn>
+              <a:cxn ang="0">
+                <a:pos x="csX3" y="csY3"/>
+              </a:cxn>
+              <a:cxn ang="0">
+                <a:pos x="csX4" y="csY4"/>
+              </a:cxn>
+              <a:cxn ang="0">
+                <a:pos x="csX5" y="csY5"/>
+              </a:cxn>
+              <a:cxn ang="0">
+                <a:pos x="csX6" y="csY6"/>
+              </a:cxn>
+              <a:cxn ang="0">
+                <a:pos x="csX7" y="csY7"/>
+              </a:cxn>
+              <a:cxn ang="0">
+                <a:pos x="csX8" y="csY8"/>
+              </a:cxn>
+              <a:cxn ang="0">
+                <a:pos x="csX9" y="csY9"/>
+              </a:cxn>
+              <a:cxn ang="0">
+                <a:pos x="csX10" y="csY10"/>
+              </a:cxn>
+              <a:cxn ang="0">
+                <a:pos x="csX11" y="csY11"/>
+              </a:cxn>
+              <a:cxn ang="0">
+                <a:pos x="csX12" y="csY12"/>
+              </a:cxn>
+              <a:cxn ang="0">
+                <a:pos x="csX13" y="csY13"/>
+              </a:cxn>
+              <a:cxn ang="0">
+                <a:pos x="csX14" y="csY14"/>
+              </a:cxn>
+              <a:cxn ang="0">
+                <a:pos x="csX15" y="csY15"/>
+              </a:cxn>
+              <a:cxn ang="0">
+                <a:pos x="csX16" y="csY16"/>
+              </a:cxn>
+              <a:cxn ang="0">
+                <a:pos x="csX17" y="csY17"/>
+              </a:cxn>
+              <a:cxn ang="0">
+                <a:pos x="csX18" y="csY18"/>
+              </a:cxn>
+              <a:cxn ang="0">
+                <a:pos x="csX19" y="csY19"/>
+              </a:cxn>
+            </a:cxnLst>
+            <a:rect l="l" t="t" r="r" b="b"/>
+            <a:pathLst>
+              <a:path w="1300454" h="1501200">
+                <a:moveTo>
+                  <a:pt x="149149" y="201600"/>
+                </a:moveTo>
+                <a:lnTo>
+                  <a:pt x="851651" y="201600"/>
+                </a:lnTo>
+                <a:cubicBezTo>
+                  <a:pt x="934024" y="201600"/>
+                  <a:pt x="1000800" y="268376"/>
+                  <a:pt x="1000800" y="350749"/>
+                </a:cubicBezTo>
+                <a:lnTo>
+                  <a:pt x="1000800" y="1352051"/>
+                </a:lnTo>
+                <a:cubicBezTo>
+                  <a:pt x="1000800" y="1434424"/>
+                  <a:pt x="934024" y="1501200"/>
+                  <a:pt x="851651" y="1501200"/>
+                </a:cubicBezTo>
+                <a:lnTo>
+                  <a:pt x="149149" y="1501200"/>
+                </a:lnTo>
+                <a:cubicBezTo>
+                  <a:pt x="66776" y="1501200"/>
+                  <a:pt x="0" y="1434424"/>
+                  <a:pt x="0" y="1352051"/>
+                </a:cubicBezTo>
+                <a:lnTo>
+                  <a:pt x="0" y="350749"/>
+                </a:lnTo>
+                <a:cubicBezTo>
+                  <a:pt x="0" y="268376"/>
+                  <a:pt x="66776" y="201600"/>
+                  <a:pt x="149149" y="201600"/>
+                </a:cubicBezTo>
+                <a:close/>
+                <a:moveTo>
+                  <a:pt x="448803" y="0"/>
+                </a:moveTo>
+                <a:lnTo>
+                  <a:pt x="1151305" y="0"/>
+                </a:lnTo>
+                <a:cubicBezTo>
+                  <a:pt x="1233678" y="0"/>
+                  <a:pt x="1300454" y="66776"/>
+                  <a:pt x="1300454" y="149149"/>
+                </a:cubicBezTo>
+                <a:lnTo>
+                  <a:pt x="1300454" y="1150451"/>
+                </a:lnTo>
+                <a:cubicBezTo>
+                  <a:pt x="1300454" y="1232824"/>
+                  <a:pt x="1233678" y="1299600"/>
+                  <a:pt x="1151305" y="1299600"/>
+                </a:cubicBezTo>
+                <a:lnTo>
+                  <a:pt x="1101048" y="1299600"/>
+                </a:lnTo>
+                <a:lnTo>
+                  <a:pt x="1101048" y="358731"/>
+                </a:lnTo>
+                <a:cubicBezTo>
+                  <a:pt x="1101048" y="225381"/>
+                  <a:pt x="992947" y="117280"/>
+                  <a:pt x="859597" y="117280"/>
+                </a:cubicBezTo>
+                <a:lnTo>
+                  <a:pt x="306088" y="117280"/>
+                </a:lnTo>
+                <a:lnTo>
+                  <a:pt x="311375" y="91094"/>
+                </a:lnTo>
+                <a:cubicBezTo>
+                  <a:pt x="334017" y="37562"/>
+                  <a:pt x="387024" y="0"/>
+                  <a:pt x="448803" y="0"/>
+                </a:cubicBezTo>
+                <a:close/>
+              </a:path>
+            </a:pathLst>
+          </a:custGeom>
           <a:solidFill>
             <a:schemeClr val="tx1"/>
           </a:solidFill>
@@ -22213,7 +25037,9 @@
           </a:fontRef>
         </p:style>
         <p:txBody>
-          <a:bodyPr rtlCol="0" anchor="ctr"/>
+          <a:bodyPr wrap="square" rtlCol="0" anchor="ctr">
+            <a:noAutofit/>
+          </a:bodyPr>
           <a:lstStyle/>
           <a:p>
             <a:pPr algn="ctr"/>
@@ -22221,12 +25047,105 @@
           </a:p>
         </p:txBody>
       </p:sp>
+      <p:grpSp>
+        <p:nvGrpSpPr>
+          <p:cNvPr id="143" name="Group 142">
+            <a:extLst>
+              <a:ext uri="{FF2B5EF4-FFF2-40B4-BE49-F238E27FC236}">
+                <a16:creationId xmlns:a16="http://schemas.microsoft.com/office/drawing/2014/main" id="{A49AB6E0-6E2B-598D-3F2A-8365A7D9A387}"/>
+              </a:ext>
+            </a:extLst>
+          </p:cNvPr>
+          <p:cNvGrpSpPr/>
+          <p:nvPr/>
+        </p:nvGrpSpPr>
+        <p:grpSpPr>
+          <a:xfrm>
+            <a:off x="320040" y="4211901"/>
+            <a:ext cx="11871960" cy="1501200"/>
+            <a:chOff x="1644242" y="6040073"/>
+            <a:chExt cx="7684316" cy="562063"/>
+          </a:xfrm>
+        </p:grpSpPr>
+        <p:cxnSp>
+          <p:nvCxnSpPr>
+            <p:cNvPr id="144" name="Straight Connector 143">
+              <a:extLst>
+                <a:ext uri="{FF2B5EF4-FFF2-40B4-BE49-F238E27FC236}">
+                  <a16:creationId xmlns:a16="http://schemas.microsoft.com/office/drawing/2014/main" id="{857F4746-32AD-3C08-EF9A-99AAA2922DA4}"/>
+                </a:ext>
+              </a:extLst>
+            </p:cNvPr>
+            <p:cNvCxnSpPr/>
+            <p:nvPr/>
+          </p:nvCxnSpPr>
+          <p:spPr>
+            <a:xfrm>
+              <a:off x="1644242" y="6040073"/>
+              <a:ext cx="7684316" cy="0"/>
+            </a:xfrm>
+            <a:prstGeom prst="line">
+              <a:avLst/>
+            </a:prstGeom>
+          </p:spPr>
+          <p:style>
+            <a:lnRef idx="1">
+              <a:schemeClr val="accent1"/>
+            </a:lnRef>
+            <a:fillRef idx="0">
+              <a:schemeClr val="accent1"/>
+            </a:fillRef>
+            <a:effectRef idx="0">
+              <a:schemeClr val="accent1"/>
+            </a:effectRef>
+            <a:fontRef idx="minor">
+              <a:schemeClr val="tx1"/>
+            </a:fontRef>
+          </p:style>
+        </p:cxnSp>
+        <p:cxnSp>
+          <p:nvCxnSpPr>
+            <p:cNvPr id="145" name="Straight Connector 144">
+              <a:extLst>
+                <a:ext uri="{FF2B5EF4-FFF2-40B4-BE49-F238E27FC236}">
+                  <a16:creationId xmlns:a16="http://schemas.microsoft.com/office/drawing/2014/main" id="{A38C8A33-363E-FD44-0ACC-78907758F412}"/>
+                </a:ext>
+              </a:extLst>
+            </p:cNvPr>
+            <p:cNvCxnSpPr/>
+            <p:nvPr/>
+          </p:nvCxnSpPr>
+          <p:spPr>
+            <a:xfrm>
+              <a:off x="1644242" y="6602136"/>
+              <a:ext cx="7684316" cy="0"/>
+            </a:xfrm>
+            <a:prstGeom prst="line">
+              <a:avLst/>
+            </a:prstGeom>
+          </p:spPr>
+          <p:style>
+            <a:lnRef idx="1">
+              <a:schemeClr val="accent1"/>
+            </a:lnRef>
+            <a:fillRef idx="0">
+              <a:schemeClr val="accent1"/>
+            </a:fillRef>
+            <a:effectRef idx="0">
+              <a:schemeClr val="accent1"/>
+            </a:effectRef>
+            <a:fontRef idx="minor">
+              <a:schemeClr val="tx1"/>
+            </a:fontRef>
+          </p:style>
+        </p:cxnSp>
+      </p:grpSp>
       <p:sp>
         <p:nvSpPr>
-          <p:cNvPr id="65" name="Oval 64">
+          <p:cNvPr id="163" name="Freeform: Shape 162">
             <a:extLst>
               <a:ext uri="{FF2B5EF4-FFF2-40B4-BE49-F238E27FC236}">
-                <a16:creationId xmlns:a16="http://schemas.microsoft.com/office/drawing/2014/main" id="{94A10547-6900-4A53-6C6A-752559744030}"/>
+                <a16:creationId xmlns:a16="http://schemas.microsoft.com/office/drawing/2014/main" id="{0863D569-85DE-B1B1-1080-4670FD3DD715}"/>
               </a:ext>
             </a:extLst>
           </p:cNvPr>
@@ -22235,12 +25154,487 @@
         </p:nvSpPr>
         <p:spPr>
           <a:xfrm>
-            <a:off x="3479522" y="1444622"/>
-            <a:ext cx="151200" cy="151200"/>
+            <a:off x="4708157" y="4211901"/>
+            <a:ext cx="1035632" cy="1501200"/>
           </a:xfrm>
-          <a:prstGeom prst="ellipse">
+          <a:custGeom>
             <a:avLst/>
-          </a:prstGeom>
+            <a:gdLst>
+              <a:gd name="csX0" fmla="*/ 140738 w 938250"/>
+              <a:gd name="csY0" fmla="*/ 140742 h 1313555"/>
+              <a:gd name="csX1" fmla="*/ 140738 w 938250"/>
+              <a:gd name="csY1" fmla="*/ 234567 h 1313555"/>
+              <a:gd name="csX2" fmla="*/ 281475 w 938250"/>
+              <a:gd name="csY2" fmla="*/ 375305 h 1313555"/>
+              <a:gd name="csX3" fmla="*/ 656775 w 938250"/>
+              <a:gd name="csY3" fmla="*/ 375305 h 1313555"/>
+              <a:gd name="csX4" fmla="*/ 797513 w 938250"/>
+              <a:gd name="csY4" fmla="*/ 234567 h 1313555"/>
+              <a:gd name="csX5" fmla="*/ 797513 w 938250"/>
+              <a:gd name="csY5" fmla="*/ 140742 h 1313555"/>
+              <a:gd name="csX6" fmla="*/ 938250 w 938250"/>
+              <a:gd name="csY6" fmla="*/ 281480 h 1313555"/>
+              <a:gd name="csX7" fmla="*/ 938250 w 938250"/>
+              <a:gd name="csY7" fmla="*/ 1172817 h 1313555"/>
+              <a:gd name="csX8" fmla="*/ 797513 w 938250"/>
+              <a:gd name="csY8" fmla="*/ 1313555 h 1313555"/>
+              <a:gd name="csX9" fmla="*/ 140738 w 938250"/>
+              <a:gd name="csY9" fmla="*/ 1313555 h 1313555"/>
+              <a:gd name="csX10" fmla="*/ 0 w 938250"/>
+              <a:gd name="csY10" fmla="*/ 1172817 h 1313555"/>
+              <a:gd name="csX11" fmla="*/ 0 w 938250"/>
+              <a:gd name="csY11" fmla="*/ 281480 h 1313555"/>
+              <a:gd name="csX12" fmla="*/ 140738 w 938250"/>
+              <a:gd name="csY12" fmla="*/ 140742 h 1313555"/>
+              <a:gd name="csX13" fmla="*/ 468374 w 938250"/>
+              <a:gd name="csY13" fmla="*/ 5 h 1313555"/>
+              <a:gd name="csX14" fmla="*/ 487983 w 938250"/>
+              <a:gd name="csY14" fmla="*/ 1741 h 1313555"/>
+              <a:gd name="csX15" fmla="*/ 590440 w 938250"/>
+              <a:gd name="csY15" fmla="*/ 70374 h 1313555"/>
+              <a:gd name="csX16" fmla="*/ 603998 w 938250"/>
+              <a:gd name="csY16" fmla="*/ 93830 h 1313555"/>
+              <a:gd name="csX17" fmla="*/ 656775 w 938250"/>
+              <a:gd name="csY17" fmla="*/ 93830 h 1313555"/>
+              <a:gd name="csX18" fmla="*/ 703687 w 938250"/>
+              <a:gd name="csY18" fmla="*/ 140742 h 1313555"/>
+              <a:gd name="csX19" fmla="*/ 703687 w 938250"/>
+              <a:gd name="csY19" fmla="*/ 234567 h 1313555"/>
+              <a:gd name="csX20" fmla="*/ 656775 w 938250"/>
+              <a:gd name="csY20" fmla="*/ 281480 h 1313555"/>
+              <a:gd name="csX21" fmla="*/ 281475 w 938250"/>
+              <a:gd name="csY21" fmla="*/ 281480 h 1313555"/>
+              <a:gd name="csX22" fmla="*/ 234562 w 938250"/>
+              <a:gd name="csY22" fmla="*/ 234567 h 1313555"/>
+              <a:gd name="csX23" fmla="*/ 234562 w 938250"/>
+              <a:gd name="csY23" fmla="*/ 140742 h 1313555"/>
+              <a:gd name="csX24" fmla="*/ 281475 w 938250"/>
+              <a:gd name="csY24" fmla="*/ 93830 h 1313555"/>
+              <a:gd name="csX25" fmla="*/ 334251 w 938250"/>
+              <a:gd name="csY25" fmla="*/ 93830 h 1313555"/>
+              <a:gd name="csX26" fmla="*/ 347856 w 938250"/>
+              <a:gd name="csY26" fmla="*/ 70374 h 1313555"/>
+              <a:gd name="csX27" fmla="*/ 450360 w 938250"/>
+              <a:gd name="csY27" fmla="*/ 1928 h 1313555"/>
+              <a:gd name="csX28" fmla="*/ 468374 w 938250"/>
+              <a:gd name="csY28" fmla="*/ 5 h 1313555"/>
+            </a:gdLst>
+            <a:ahLst/>
+            <a:cxnLst>
+              <a:cxn ang="0">
+                <a:pos x="csX0" y="csY0"/>
+              </a:cxn>
+              <a:cxn ang="0">
+                <a:pos x="csX1" y="csY1"/>
+              </a:cxn>
+              <a:cxn ang="0">
+                <a:pos x="csX2" y="csY2"/>
+              </a:cxn>
+              <a:cxn ang="0">
+                <a:pos x="csX3" y="csY3"/>
+              </a:cxn>
+              <a:cxn ang="0">
+                <a:pos x="csX4" y="csY4"/>
+              </a:cxn>
+              <a:cxn ang="0">
+                <a:pos x="csX5" y="csY5"/>
+              </a:cxn>
+              <a:cxn ang="0">
+                <a:pos x="csX6" y="csY6"/>
+              </a:cxn>
+              <a:cxn ang="0">
+                <a:pos x="csX7" y="csY7"/>
+              </a:cxn>
+              <a:cxn ang="0">
+                <a:pos x="csX8" y="csY8"/>
+              </a:cxn>
+              <a:cxn ang="0">
+                <a:pos x="csX9" y="csY9"/>
+              </a:cxn>
+              <a:cxn ang="0">
+                <a:pos x="csX10" y="csY10"/>
+              </a:cxn>
+              <a:cxn ang="0">
+                <a:pos x="csX11" y="csY11"/>
+              </a:cxn>
+              <a:cxn ang="0">
+                <a:pos x="csX12" y="csY12"/>
+              </a:cxn>
+              <a:cxn ang="0">
+                <a:pos x="csX13" y="csY13"/>
+              </a:cxn>
+              <a:cxn ang="0">
+                <a:pos x="csX14" y="csY14"/>
+              </a:cxn>
+              <a:cxn ang="0">
+                <a:pos x="csX15" y="csY15"/>
+              </a:cxn>
+              <a:cxn ang="0">
+                <a:pos x="csX16" y="csY16"/>
+              </a:cxn>
+              <a:cxn ang="0">
+                <a:pos x="csX17" y="csY17"/>
+              </a:cxn>
+              <a:cxn ang="0">
+                <a:pos x="csX18" y="csY18"/>
+              </a:cxn>
+              <a:cxn ang="0">
+                <a:pos x="csX19" y="csY19"/>
+              </a:cxn>
+              <a:cxn ang="0">
+                <a:pos x="csX20" y="csY20"/>
+              </a:cxn>
+              <a:cxn ang="0">
+                <a:pos x="csX21" y="csY21"/>
+              </a:cxn>
+              <a:cxn ang="0">
+                <a:pos x="csX22" y="csY22"/>
+              </a:cxn>
+              <a:cxn ang="0">
+                <a:pos x="csX23" y="csY23"/>
+              </a:cxn>
+              <a:cxn ang="0">
+                <a:pos x="csX24" y="csY24"/>
+              </a:cxn>
+              <a:cxn ang="0">
+                <a:pos x="csX25" y="csY25"/>
+              </a:cxn>
+              <a:cxn ang="0">
+                <a:pos x="csX26" y="csY26"/>
+              </a:cxn>
+              <a:cxn ang="0">
+                <a:pos x="csX27" y="csY27"/>
+              </a:cxn>
+              <a:cxn ang="0">
+                <a:pos x="csX28" y="csY28"/>
+              </a:cxn>
+            </a:cxnLst>
+            <a:rect l="l" t="t" r="r" b="b"/>
+            <a:pathLst>
+              <a:path w="938250" h="1313555">
+                <a:moveTo>
+                  <a:pt x="140738" y="140742"/>
+                </a:moveTo>
+                <a:lnTo>
+                  <a:pt x="140738" y="234567"/>
+                </a:lnTo>
+                <a:cubicBezTo>
+                  <a:pt x="140969" y="312198"/>
+                  <a:pt x="203844" y="375073"/>
+                  <a:pt x="281475" y="375305"/>
+                </a:cubicBezTo>
+                <a:lnTo>
+                  <a:pt x="656775" y="375305"/>
+                </a:lnTo>
+                <a:cubicBezTo>
+                  <a:pt x="734406" y="375073"/>
+                  <a:pt x="797281" y="312198"/>
+                  <a:pt x="797513" y="234567"/>
+                </a:cubicBezTo>
+                <a:lnTo>
+                  <a:pt x="797513" y="140742"/>
+                </a:lnTo>
+                <a:cubicBezTo>
+                  <a:pt x="875143" y="140974"/>
+                  <a:pt x="938018" y="203849"/>
+                  <a:pt x="938250" y="281480"/>
+                </a:cubicBezTo>
+                <a:lnTo>
+                  <a:pt x="938250" y="1172817"/>
+                </a:lnTo>
+                <a:cubicBezTo>
+                  <a:pt x="938018" y="1250448"/>
+                  <a:pt x="875143" y="1313323"/>
+                  <a:pt x="797513" y="1313555"/>
+                </a:cubicBezTo>
+                <a:lnTo>
+                  <a:pt x="140738" y="1313555"/>
+                </a:lnTo>
+                <a:cubicBezTo>
+                  <a:pt x="63107" y="1313323"/>
+                  <a:pt x="232" y="1250448"/>
+                  <a:pt x="0" y="1172817"/>
+                </a:cubicBezTo>
+                <a:lnTo>
+                  <a:pt x="0" y="281480"/>
+                </a:lnTo>
+                <a:cubicBezTo>
+                  <a:pt x="232" y="203849"/>
+                  <a:pt x="63107" y="140974"/>
+                  <a:pt x="140738" y="140742"/>
+                </a:cubicBezTo>
+                <a:close/>
+                <a:moveTo>
+                  <a:pt x="468374" y="5"/>
+                </a:moveTo>
+                <a:cubicBezTo>
+                  <a:pt x="474952" y="-61"/>
+                  <a:pt x="481520" y="521"/>
+                  <a:pt x="487983" y="1741"/>
+                </a:cubicBezTo>
+                <a:cubicBezTo>
+                  <a:pt x="530970" y="7388"/>
+                  <a:pt x="568861" y="32769"/>
+                  <a:pt x="590440" y="70374"/>
+                </a:cubicBezTo>
+                <a:lnTo>
+                  <a:pt x="603998" y="93830"/>
+                </a:lnTo>
+                <a:lnTo>
+                  <a:pt x="656775" y="93830"/>
+                </a:lnTo>
+                <a:cubicBezTo>
+                  <a:pt x="682684" y="93830"/>
+                  <a:pt x="703687" y="114833"/>
+                  <a:pt x="703687" y="140742"/>
+                </a:cubicBezTo>
+                <a:lnTo>
+                  <a:pt x="703687" y="234567"/>
+                </a:lnTo>
+                <a:cubicBezTo>
+                  <a:pt x="703687" y="260477"/>
+                  <a:pt x="682684" y="281480"/>
+                  <a:pt x="656775" y="281480"/>
+                </a:cubicBezTo>
+                <a:lnTo>
+                  <a:pt x="281475" y="281480"/>
+                </a:lnTo>
+                <a:cubicBezTo>
+                  <a:pt x="255565" y="281480"/>
+                  <a:pt x="234562" y="260477"/>
+                  <a:pt x="234562" y="234567"/>
+                </a:cubicBezTo>
+                <a:lnTo>
+                  <a:pt x="234562" y="140742"/>
+                </a:lnTo>
+                <a:cubicBezTo>
+                  <a:pt x="234562" y="114833"/>
+                  <a:pt x="255565" y="93830"/>
+                  <a:pt x="281475" y="93830"/>
+                </a:cubicBezTo>
+                <a:lnTo>
+                  <a:pt x="334251" y="93830"/>
+                </a:lnTo>
+                <a:lnTo>
+                  <a:pt x="347856" y="70374"/>
+                </a:lnTo>
+                <a:cubicBezTo>
+                  <a:pt x="369466" y="32809"/>
+                  <a:pt x="407381" y="7492"/>
+                  <a:pt x="450360" y="1928"/>
+                </a:cubicBezTo>
+                <a:cubicBezTo>
+                  <a:pt x="456283" y="677"/>
+                  <a:pt x="462319" y="33"/>
+                  <a:pt x="468374" y="5"/>
+                </a:cubicBezTo>
+                <a:close/>
+              </a:path>
+            </a:pathLst>
+          </a:custGeom>
+          <a:solidFill>
+            <a:schemeClr val="tx1"/>
+          </a:solidFill>
+          <a:ln w="46732" cap="flat">
+            <a:noFill/>
+            <a:prstDash val="solid"/>
+            <a:miter/>
+          </a:ln>
+        </p:spPr>
+        <p:txBody>
+          <a:bodyPr wrap="square">
+            <a:noAutofit/>
+          </a:bodyPr>
+          <a:lstStyle/>
+          <a:p>
+            <a:endParaRPr lang="en-US"/>
+          </a:p>
+        </p:txBody>
+      </p:sp>
+      <p:sp>
+        <p:nvSpPr>
+          <p:cNvPr id="162" name="Freeform: Shape 161">
+            <a:extLst>
+              <a:ext uri="{FF2B5EF4-FFF2-40B4-BE49-F238E27FC236}">
+                <a16:creationId xmlns:a16="http://schemas.microsoft.com/office/drawing/2014/main" id="{7819108B-6AF1-1D1E-551C-E38E388CEA0A}"/>
+              </a:ext>
+            </a:extLst>
+          </p:cNvPr>
+          <p:cNvSpPr/>
+          <p:nvPr/>
+        </p:nvSpPr>
+        <p:spPr>
+          <a:xfrm>
+            <a:off x="1858863" y="4211901"/>
+            <a:ext cx="1104674" cy="1501200"/>
+          </a:xfrm>
+          <a:custGeom>
+            <a:avLst/>
+            <a:gdLst>
+              <a:gd name="csX0" fmla="*/ 149050 w 1000800"/>
+              <a:gd name="csY0" fmla="*/ 100221 h 1299600"/>
+              <a:gd name="csX1" fmla="*/ 99160 w 1000800"/>
+              <a:gd name="csY1" fmla="*/ 150111 h 1299600"/>
+              <a:gd name="csX2" fmla="*/ 99160 w 1000800"/>
+              <a:gd name="csY2" fmla="*/ 1149707 h 1299600"/>
+              <a:gd name="csX3" fmla="*/ 149050 w 1000800"/>
+              <a:gd name="csY3" fmla="*/ 1199597 h 1299600"/>
+              <a:gd name="csX4" fmla="*/ 851751 w 1000800"/>
+              <a:gd name="csY4" fmla="*/ 1199597 h 1299600"/>
+              <a:gd name="csX5" fmla="*/ 901641 w 1000800"/>
+              <a:gd name="csY5" fmla="*/ 1149707 h 1299600"/>
+              <a:gd name="csX6" fmla="*/ 901641 w 1000800"/>
+              <a:gd name="csY6" fmla="*/ 150111 h 1299600"/>
+              <a:gd name="csX7" fmla="*/ 851751 w 1000800"/>
+              <a:gd name="csY7" fmla="*/ 100221 h 1299600"/>
+              <a:gd name="csX8" fmla="*/ 149149 w 1000800"/>
+              <a:gd name="csY8" fmla="*/ 0 h 1299600"/>
+              <a:gd name="csX9" fmla="*/ 851651 w 1000800"/>
+              <a:gd name="csY9" fmla="*/ 0 h 1299600"/>
+              <a:gd name="csX10" fmla="*/ 1000800 w 1000800"/>
+              <a:gd name="csY10" fmla="*/ 149149 h 1299600"/>
+              <a:gd name="csX11" fmla="*/ 1000800 w 1000800"/>
+              <a:gd name="csY11" fmla="*/ 1150451 h 1299600"/>
+              <a:gd name="csX12" fmla="*/ 851651 w 1000800"/>
+              <a:gd name="csY12" fmla="*/ 1299600 h 1299600"/>
+              <a:gd name="csX13" fmla="*/ 149149 w 1000800"/>
+              <a:gd name="csY13" fmla="*/ 1299600 h 1299600"/>
+              <a:gd name="csX14" fmla="*/ 0 w 1000800"/>
+              <a:gd name="csY14" fmla="*/ 1150451 h 1299600"/>
+              <a:gd name="csX15" fmla="*/ 0 w 1000800"/>
+              <a:gd name="csY15" fmla="*/ 149149 h 1299600"/>
+              <a:gd name="csX16" fmla="*/ 149149 w 1000800"/>
+              <a:gd name="csY16" fmla="*/ 0 h 1299600"/>
+            </a:gdLst>
+            <a:ahLst/>
+            <a:cxnLst>
+              <a:cxn ang="0">
+                <a:pos x="csX0" y="csY0"/>
+              </a:cxn>
+              <a:cxn ang="0">
+                <a:pos x="csX1" y="csY1"/>
+              </a:cxn>
+              <a:cxn ang="0">
+                <a:pos x="csX2" y="csY2"/>
+              </a:cxn>
+              <a:cxn ang="0">
+                <a:pos x="csX3" y="csY3"/>
+              </a:cxn>
+              <a:cxn ang="0">
+                <a:pos x="csX4" y="csY4"/>
+              </a:cxn>
+              <a:cxn ang="0">
+                <a:pos x="csX5" y="csY5"/>
+              </a:cxn>
+              <a:cxn ang="0">
+                <a:pos x="csX6" y="csY6"/>
+              </a:cxn>
+              <a:cxn ang="0">
+                <a:pos x="csX7" y="csY7"/>
+              </a:cxn>
+              <a:cxn ang="0">
+                <a:pos x="csX8" y="csY8"/>
+              </a:cxn>
+              <a:cxn ang="0">
+                <a:pos x="csX9" y="csY9"/>
+              </a:cxn>
+              <a:cxn ang="0">
+                <a:pos x="csX10" y="csY10"/>
+              </a:cxn>
+              <a:cxn ang="0">
+                <a:pos x="csX11" y="csY11"/>
+              </a:cxn>
+              <a:cxn ang="0">
+                <a:pos x="csX12" y="csY12"/>
+              </a:cxn>
+              <a:cxn ang="0">
+                <a:pos x="csX13" y="csY13"/>
+              </a:cxn>
+              <a:cxn ang="0">
+                <a:pos x="csX14" y="csY14"/>
+              </a:cxn>
+              <a:cxn ang="0">
+                <a:pos x="csX15" y="csY15"/>
+              </a:cxn>
+              <a:cxn ang="0">
+                <a:pos x="csX16" y="csY16"/>
+              </a:cxn>
+            </a:cxnLst>
+            <a:rect l="l" t="t" r="r" b="b"/>
+            <a:pathLst>
+              <a:path w="1000800" h="1299600">
+                <a:moveTo>
+                  <a:pt x="149050" y="100221"/>
+                </a:moveTo>
+                <a:cubicBezTo>
+                  <a:pt x="121497" y="100221"/>
+                  <a:pt x="99160" y="122558"/>
+                  <a:pt x="99160" y="150111"/>
+                </a:cubicBezTo>
+                <a:lnTo>
+                  <a:pt x="99160" y="1149707"/>
+                </a:lnTo>
+                <a:cubicBezTo>
+                  <a:pt x="99160" y="1177260"/>
+                  <a:pt x="121497" y="1199597"/>
+                  <a:pt x="149050" y="1199597"/>
+                </a:cubicBezTo>
+                <a:lnTo>
+                  <a:pt x="851751" y="1199597"/>
+                </a:lnTo>
+                <a:cubicBezTo>
+                  <a:pt x="879304" y="1199597"/>
+                  <a:pt x="901641" y="1177260"/>
+                  <a:pt x="901641" y="1149707"/>
+                </a:cubicBezTo>
+                <a:lnTo>
+                  <a:pt x="901641" y="150111"/>
+                </a:lnTo>
+                <a:cubicBezTo>
+                  <a:pt x="901641" y="122558"/>
+                  <a:pt x="879304" y="100221"/>
+                  <a:pt x="851751" y="100221"/>
+                </a:cubicBezTo>
+                <a:close/>
+                <a:moveTo>
+                  <a:pt x="149149" y="0"/>
+                </a:moveTo>
+                <a:lnTo>
+                  <a:pt x="851651" y="0"/>
+                </a:lnTo>
+                <a:cubicBezTo>
+                  <a:pt x="934024" y="0"/>
+                  <a:pt x="1000800" y="66776"/>
+                  <a:pt x="1000800" y="149149"/>
+                </a:cubicBezTo>
+                <a:lnTo>
+                  <a:pt x="1000800" y="1150451"/>
+                </a:lnTo>
+                <a:cubicBezTo>
+                  <a:pt x="1000800" y="1232824"/>
+                  <a:pt x="934024" y="1299600"/>
+                  <a:pt x="851651" y="1299600"/>
+                </a:cubicBezTo>
+                <a:lnTo>
+                  <a:pt x="149149" y="1299600"/>
+                </a:lnTo>
+                <a:cubicBezTo>
+                  <a:pt x="66776" y="1299600"/>
+                  <a:pt x="0" y="1232824"/>
+                  <a:pt x="0" y="1150451"/>
+                </a:cubicBezTo>
+                <a:lnTo>
+                  <a:pt x="0" y="149149"/>
+                </a:lnTo>
+                <a:cubicBezTo>
+                  <a:pt x="0" y="66776"/>
+                  <a:pt x="66776" y="0"/>
+                  <a:pt x="149149" y="0"/>
+                </a:cubicBezTo>
+                <a:close/>
+              </a:path>
+            </a:pathLst>
+          </a:custGeom>
           <a:solidFill>
             <a:schemeClr val="tx1"/>
           </a:solidFill>
@@ -22265,7 +25659,9 @@
           </a:fontRef>
         </p:style>
         <p:txBody>
-          <a:bodyPr rtlCol="0" anchor="ctr"/>
+          <a:bodyPr wrap="square" rtlCol="0" anchor="ctr">
+            <a:noAutofit/>
+          </a:bodyPr>
           <a:lstStyle/>
           <a:p>
             <a:pPr algn="ctr"/>
@@ -22275,10 +25671,10 @@
       </p:sp>
       <p:sp>
         <p:nvSpPr>
-          <p:cNvPr id="66" name="Oval 65">
+          <p:cNvPr id="160" name="Rectangle: Rounded Corners 159">
             <a:extLst>
               <a:ext uri="{FF2B5EF4-FFF2-40B4-BE49-F238E27FC236}">
-                <a16:creationId xmlns:a16="http://schemas.microsoft.com/office/drawing/2014/main" id="{3F5D8FF3-A71D-130C-903D-D9C864644AF5}"/>
+                <a16:creationId xmlns:a16="http://schemas.microsoft.com/office/drawing/2014/main" id="{4CEC6272-D4B3-D807-7325-5691C62E9530}"/>
               </a:ext>
             </a:extLst>
           </p:cNvPr>
@@ -22287,63 +25683,13 @@
         </p:nvSpPr>
         <p:spPr>
           <a:xfrm>
-            <a:off x="3956820" y="1642325"/>
-            <a:ext cx="151200" cy="151200"/>
+            <a:off x="3296967" y="4211901"/>
+            <a:ext cx="1104674" cy="1501200"/>
           </a:xfrm>
-          <a:prstGeom prst="ellipse">
-            <a:avLst/>
-          </a:prstGeom>
-          <a:solidFill>
-            <a:schemeClr val="tx1"/>
-          </a:solidFill>
-          <a:ln>
-            <a:noFill/>
-          </a:ln>
-        </p:spPr>
-        <p:style>
-          <a:lnRef idx="2">
-            <a:schemeClr val="accent1">
-              <a:shade val="15000"/>
-            </a:schemeClr>
-          </a:lnRef>
-          <a:fillRef idx="1">
-            <a:schemeClr val="accent1"/>
-          </a:fillRef>
-          <a:effectRef idx="0">
-            <a:schemeClr val="accent1"/>
-          </a:effectRef>
-          <a:fontRef idx="minor">
-            <a:schemeClr val="lt1"/>
-          </a:fontRef>
-        </p:style>
-        <p:txBody>
-          <a:bodyPr rtlCol="0" anchor="ctr"/>
-          <a:lstStyle/>
-          <a:p>
-            <a:pPr algn="ctr"/>
-            <a:endParaRPr lang="en-US"/>
-          </a:p>
-        </p:txBody>
-      </p:sp>
-      <p:sp>
-        <p:nvSpPr>
-          <p:cNvPr id="67" name="Oval 66">
-            <a:extLst>
-              <a:ext uri="{FF2B5EF4-FFF2-40B4-BE49-F238E27FC236}">
-                <a16:creationId xmlns:a16="http://schemas.microsoft.com/office/drawing/2014/main" id="{31CBEC7B-19BD-22A3-E56C-4A93D1516BE2}"/>
-              </a:ext>
-            </a:extLst>
-          </p:cNvPr>
-          <p:cNvSpPr/>
-          <p:nvPr/>
-        </p:nvSpPr>
-        <p:spPr>
-          <a:xfrm>
-            <a:off x="4432917" y="1444622"/>
-            <a:ext cx="151200" cy="151200"/>
-          </a:xfrm>
-          <a:prstGeom prst="ellipse">
-            <a:avLst/>
+          <a:prstGeom prst="roundRect">
+            <a:avLst>
+              <a:gd name="adj" fmla="val 14903"/>
+            </a:avLst>
           </a:prstGeom>
           <a:solidFill>
             <a:schemeClr val="tx1"/>
